--- a/public/presentations/CS211_Recitation_7.pptx
+++ b/public/presentations/CS211_Recitation_7.pptx
@@ -2,53 +2,52 @@
 <file path=ppt/presentation.xml><?xml version="1.0" encoding="utf-8"?>
 <p:presentation xmlns:p="http://schemas.openxmlformats.org/presentationml/2006/main" embedTrueTypeFonts="1" saveSubsetFonts="0">
   <p:sldMasterIdLst>
-    <p:sldMasterId xmlns:r="http://schemas.openxmlformats.org/officeDocument/2006/relationships" id="2147483648" r:id="Rc76a5364182742f8"/>
+    <p:sldMasterId xmlns:r="http://schemas.openxmlformats.org/officeDocument/2006/relationships" id="2147483648" r:id="Re2730baed9e54b6b"/>
   </p:sldMasterIdLst>
   <p:notesMasterIdLst>
-    <p:notesMasterId xmlns:r="http://schemas.openxmlformats.org/officeDocument/2006/relationships" r:id="R1ee1ef5f405a4e43"/>
+    <p:notesMasterId xmlns:r="http://schemas.openxmlformats.org/officeDocument/2006/relationships" r:id="Rdd1504ebdcc84692"/>
   </p:notesMasterIdLst>
   <p:sldIdLst>
-    <p:sldId xmlns:r="http://schemas.openxmlformats.org/officeDocument/2006/relationships" id="256" r:id="Ra48751e9cff843fe"/>
-    <p:sldId xmlns:r="http://schemas.openxmlformats.org/officeDocument/2006/relationships" id="257" r:id="R02c8d5c25bc34ca5"/>
-    <p:sldId xmlns:r="http://schemas.openxmlformats.org/officeDocument/2006/relationships" id="258" r:id="Ra5c7c4a96b9a4e1f"/>
-    <p:sldId xmlns:r="http://schemas.openxmlformats.org/officeDocument/2006/relationships" id="259" r:id="Rc8bb612c752749dd"/>
-    <p:sldId xmlns:r="http://schemas.openxmlformats.org/officeDocument/2006/relationships" id="260" r:id="Rafd93a57eeb24c3d"/>
-    <p:sldId xmlns:r="http://schemas.openxmlformats.org/officeDocument/2006/relationships" id="261" r:id="R1d516e04bad845de"/>
-    <p:sldId xmlns:r="http://schemas.openxmlformats.org/officeDocument/2006/relationships" id="262" r:id="R3ac5ba564266494d"/>
-    <p:sldId xmlns:r="http://schemas.openxmlformats.org/officeDocument/2006/relationships" id="263" r:id="R956a933d69544c31"/>
-    <p:sldId xmlns:r="http://schemas.openxmlformats.org/officeDocument/2006/relationships" id="264" r:id="Rf30d7cccc2e7499a"/>
-    <p:sldId xmlns:r="http://schemas.openxmlformats.org/officeDocument/2006/relationships" id="265" r:id="R8bb0b964250147bc"/>
-    <p:sldId xmlns:r="http://schemas.openxmlformats.org/officeDocument/2006/relationships" id="266" r:id="R94c48f2cf81d481e"/>
-    <p:sldId xmlns:r="http://schemas.openxmlformats.org/officeDocument/2006/relationships" id="267" r:id="R1ea4680176d743ef"/>
-    <p:sldId xmlns:r="http://schemas.openxmlformats.org/officeDocument/2006/relationships" id="268" r:id="Rca2568ae0fd94273"/>
-    <p:sldId xmlns:r="http://schemas.openxmlformats.org/officeDocument/2006/relationships" id="269" r:id="Rac754ba1e4c24c1e"/>
-    <p:sldId xmlns:r="http://schemas.openxmlformats.org/officeDocument/2006/relationships" id="270" r:id="Ra64bb772388149cc"/>
-    <p:sldId xmlns:r="http://schemas.openxmlformats.org/officeDocument/2006/relationships" id="271" r:id="R0f8017d3c5d540fc"/>
-    <p:sldId xmlns:r="http://schemas.openxmlformats.org/officeDocument/2006/relationships" id="272" r:id="R16b6c9c5e800414a"/>
-    <p:sldId xmlns:r="http://schemas.openxmlformats.org/officeDocument/2006/relationships" id="273" r:id="R1424cfc7b62b4170"/>
-    <p:sldId xmlns:r="http://schemas.openxmlformats.org/officeDocument/2006/relationships" id="274" r:id="Rfbdc1eba488942cc"/>
-    <p:sldId xmlns:r="http://schemas.openxmlformats.org/officeDocument/2006/relationships" id="275" r:id="Rfda35d4ad4904315"/>
-    <p:sldId xmlns:r="http://schemas.openxmlformats.org/officeDocument/2006/relationships" id="276" r:id="Rbb8082fc47574521"/>
-    <p:sldId xmlns:r="http://schemas.openxmlformats.org/officeDocument/2006/relationships" id="277" r:id="R9a6cec4074504a65"/>
-    <p:sldId xmlns:r="http://schemas.openxmlformats.org/officeDocument/2006/relationships" id="278" r:id="R3bd8c71ee7d54461"/>
-    <p:sldId xmlns:r="http://schemas.openxmlformats.org/officeDocument/2006/relationships" id="279" r:id="Rc52bd9ca41924baa"/>
-    <p:sldId xmlns:r="http://schemas.openxmlformats.org/officeDocument/2006/relationships" id="280" r:id="Rdd88f702cb8840b6"/>
-    <p:sldId xmlns:r="http://schemas.openxmlformats.org/officeDocument/2006/relationships" id="281" r:id="R84ea8a4b59d44dc1"/>
-    <p:sldId xmlns:r="http://schemas.openxmlformats.org/officeDocument/2006/relationships" id="282" r:id="Rcbdfeb6cb63444b3"/>
-    <p:sldId xmlns:r="http://schemas.openxmlformats.org/officeDocument/2006/relationships" id="283" r:id="R2ebd684a45c34b7b"/>
-    <p:sldId xmlns:r="http://schemas.openxmlformats.org/officeDocument/2006/relationships" id="284" r:id="R1fc9f127d0f24e97"/>
-    <p:sldId xmlns:r="http://schemas.openxmlformats.org/officeDocument/2006/relationships" id="285" r:id="R97e6ab4fe5c64574"/>
-    <p:sldId xmlns:r="http://schemas.openxmlformats.org/officeDocument/2006/relationships" id="286" r:id="Rb3f984f85ae64db3"/>
+    <p:sldId xmlns:r="http://schemas.openxmlformats.org/officeDocument/2006/relationships" id="256" r:id="R7d68e1d101b04b68"/>
+    <p:sldId xmlns:r="http://schemas.openxmlformats.org/officeDocument/2006/relationships" id="257" r:id="R599120de0d5c4d63"/>
+    <p:sldId xmlns:r="http://schemas.openxmlformats.org/officeDocument/2006/relationships" id="258" r:id="Rf2f4698244ce42b4"/>
+    <p:sldId xmlns:r="http://schemas.openxmlformats.org/officeDocument/2006/relationships" id="259" r:id="Rad4c03fecce1441e"/>
+    <p:sldId xmlns:r="http://schemas.openxmlformats.org/officeDocument/2006/relationships" id="260" r:id="R0295689deaf144e6"/>
+    <p:sldId xmlns:r="http://schemas.openxmlformats.org/officeDocument/2006/relationships" id="261" r:id="R81c4f3bd49d64eda"/>
+    <p:sldId xmlns:r="http://schemas.openxmlformats.org/officeDocument/2006/relationships" id="262" r:id="R0b13d5ab7f2f4f6d"/>
+    <p:sldId xmlns:r="http://schemas.openxmlformats.org/officeDocument/2006/relationships" id="263" r:id="R6abdaf40926a4479"/>
+    <p:sldId xmlns:r="http://schemas.openxmlformats.org/officeDocument/2006/relationships" id="264" r:id="R224676fd510549d7"/>
+    <p:sldId xmlns:r="http://schemas.openxmlformats.org/officeDocument/2006/relationships" id="265" r:id="R1fc4b7c59a8a4d60"/>
+    <p:sldId xmlns:r="http://schemas.openxmlformats.org/officeDocument/2006/relationships" id="266" r:id="R33ea77c3488a4625"/>
+    <p:sldId xmlns:r="http://schemas.openxmlformats.org/officeDocument/2006/relationships" id="267" r:id="R8f3318731eeb4a75"/>
+    <p:sldId xmlns:r="http://schemas.openxmlformats.org/officeDocument/2006/relationships" id="268" r:id="Raade177721cf48bd"/>
+    <p:sldId xmlns:r="http://schemas.openxmlformats.org/officeDocument/2006/relationships" id="269" r:id="R5d91716568214e01"/>
+    <p:sldId xmlns:r="http://schemas.openxmlformats.org/officeDocument/2006/relationships" id="270" r:id="R7d12cb44e7d54164"/>
+    <p:sldId xmlns:r="http://schemas.openxmlformats.org/officeDocument/2006/relationships" id="271" r:id="Rfb3f7fc14b674945"/>
+    <p:sldId xmlns:r="http://schemas.openxmlformats.org/officeDocument/2006/relationships" id="272" r:id="Rff337c8dd38e4113"/>
+    <p:sldId xmlns:r="http://schemas.openxmlformats.org/officeDocument/2006/relationships" id="273" r:id="R735fad1af27042f1"/>
+    <p:sldId xmlns:r="http://schemas.openxmlformats.org/officeDocument/2006/relationships" id="274" r:id="Ra0651d8d5ee14907"/>
+    <p:sldId xmlns:r="http://schemas.openxmlformats.org/officeDocument/2006/relationships" id="275" r:id="R4bd1a9cc70054474"/>
+    <p:sldId xmlns:r="http://schemas.openxmlformats.org/officeDocument/2006/relationships" id="276" r:id="R4d64056e24b44976"/>
+    <p:sldId xmlns:r="http://schemas.openxmlformats.org/officeDocument/2006/relationships" id="277" r:id="Rfa69948d815c453a"/>
+    <p:sldId xmlns:r="http://schemas.openxmlformats.org/officeDocument/2006/relationships" id="278" r:id="Rc67301e042fd4569"/>
+    <p:sldId xmlns:r="http://schemas.openxmlformats.org/officeDocument/2006/relationships" id="279" r:id="Rdadfedb1402f48fb"/>
+    <p:sldId xmlns:r="http://schemas.openxmlformats.org/officeDocument/2006/relationships" id="280" r:id="R574deb00313b4bd3"/>
+    <p:sldId xmlns:r="http://schemas.openxmlformats.org/officeDocument/2006/relationships" id="281" r:id="R73a0dc75472c40d6"/>
+    <p:sldId xmlns:r="http://schemas.openxmlformats.org/officeDocument/2006/relationships" id="282" r:id="Rf5441557bfd6445e"/>
+    <p:sldId xmlns:r="http://schemas.openxmlformats.org/officeDocument/2006/relationships" id="283" r:id="R65510d3ade3e4087"/>
+    <p:sldId xmlns:r="http://schemas.openxmlformats.org/officeDocument/2006/relationships" id="284" r:id="R8d7ddfd168fe4c4e"/>
+    <p:sldId xmlns:r="http://schemas.openxmlformats.org/officeDocument/2006/relationships" id="285" r:id="Rf9873121b5374af6"/>
   </p:sldIdLst>
   <p:sldSz cx="12192000" cy="6858000"/>
   <p:notesSz cx="6858000" cy="9144000"/>
   <p:embeddedFontLst>
     <p:embeddedFont>
       <p:font typeface="OpenAI Sans"/>
-      <p:regular xmlns:r="http://schemas.openxmlformats.org/officeDocument/2006/relationships" r:id="R98485980376a44c0"/>
-      <p:bold xmlns:r="http://schemas.openxmlformats.org/officeDocument/2006/relationships" r:id="Re3e6365f57864683"/>
-      <p:italic xmlns:r="http://schemas.openxmlformats.org/officeDocument/2006/relationships" r:id="Ra759844764ef4ba1"/>
-      <p:boldItalic xmlns:r="http://schemas.openxmlformats.org/officeDocument/2006/relationships" r:id="R9b60141552304266"/>
+      <p:regular xmlns:r="http://schemas.openxmlformats.org/officeDocument/2006/relationships" r:id="R608e1c2447004b10"/>
+      <p:bold xmlns:r="http://schemas.openxmlformats.org/officeDocument/2006/relationships" r:id="Re100d9798e27402b"/>
+      <p:italic xmlns:r="http://schemas.openxmlformats.org/officeDocument/2006/relationships" r:id="R2b14cb00e3944668"/>
+      <p:boldItalic xmlns:r="http://schemas.openxmlformats.org/officeDocument/2006/relationships" r:id="R1de27b5702c1446f"/>
     </p:embeddedFont>
   </p:embeddedFontLst>
   <p:defaultTextStyle>
@@ -1950,7 +1949,7 @@
               <a:buNone/>
             </a:pPr>
             <a:r>
-              <a:t>Ask students to compare E=0,F=0 and E=0,F=1. The second retains a tiny positive magnitude. For FP32, replace the bias by 127, fraction-bit count by 23, and all-ones E by 255. Be careful not to use 2^(0−bias) for subnormals. Zero’s sign bit permits +0 or −0.</a:t>
+              <a:t>Say: a large tray can hold one small cup; tray size and cup size are different. This is why both 64-bit and 8-byte choices on released Quiz 3A Q11 were insufficient. XMM is the low 128 bits of the corresponding YMM; ZMM, when present, extends that storage further. x87 has its own register stack, separate from the function-call stack. MMX registers are packed-integer aliases of x87 storage, not another name for XMM. Scalar mulss/addss use float values, not integer addition of their bit encodings.</a:t>
             </a:r>
             <a:endParaRPr/>
           </a:p>
@@ -1980,7 +1979,7 @@
               <a:buNone/>
             </a:pPr>
             <a:r>
-              <a:t>Sources: https://firner.com/presentations/cs211/2026-Fall/cs211_05/</a:t>
+              <a:t>Sources: https://firner.com/presentations/cs211/2026-Fall/cs211_11/; https://www.intel.com/content/www/us/en/developer/articles/technical/intel-sdm.html</a:t>
             </a:r>
             <a:endParaRPr/>
           </a:p>
@@ -2010,7 +2009,7 @@
               <a:buNone/>
             </a:pPr>
             <a:r>
-              <a:t>Answer: 1. E=0 and F=1 is subnormal.</a:t>
+              <a:t>Answer: 1. A 32-bit float stored in XMM does not make XMM a 32-bit register. XMM is 128 bits wide.</a:t>
             </a:r>
             <a:endParaRPr/>
           </a:p>
@@ -2040,37 +2039,7 @@
               <a:buNone/>
             </a:pPr>
             <a:r>
-              <a:t>2. Fraction = 1/2² = 1/4, with no implied leading 1.</a:t>
-            </a:r>
-            <a:endParaRPr/>
-          </a:p>
-          <a:p xmlns:a="http://schemas.openxmlformats.org/drawingml/2006/main">
-            <a:pPr marL="0" lvl="0" indent="0" algn="l">
-              <a:spcBef>
-                <a:spcPts val="0"/>
-              </a:spcBef>
-              <a:spcAft>
-                <a:spcPts val="0"/>
-              </a:spcAft>
-              <a:buNone/>
-            </a:pPr>
-            <a:r>
-              <a:t/>
-            </a:r>
-            <a:endParaRPr/>
-          </a:p>
-          <a:p xmlns:a="http://schemas.openxmlformats.org/drawingml/2006/main">
-            <a:pPr marL="0" lvl="0" indent="0" algn="l">
-              <a:spcBef>
-                <a:spcPts val="0"/>
-              </a:spcBef>
-              <a:spcAft>
-                <a:spcPts val="0"/>
-              </a:spcAft>
-              <a:buNone/>
-            </a:pPr>
-            <a:r>
-              <a:t>3. Value = 2^(1−15) × 1/4 = 2^(−16).</a:t>
+              <a:t>2. The largest available register depends on CPU extensions; common examples are wider than 64 bits.</a:t>
             </a:r>
             <a:endParaRPr/>
           </a:p>
@@ -2150,7 +2119,7 @@
               <a:buNone/>
             </a:pPr>
             <a:r>
-              <a:t>Say: a large tray can hold one small cup; tray size and cup size are different. This is why both 64-bit and 8-byte choices on released Quiz 3A Q11 were insufficient. XMM is the low 128 bits of the corresponding YMM; ZMM, when present, extends that storage further. x87 has its own register stack, separate from the function-call stack. MMX registers are packed-integer aliases of x87 storage, not another name for XMM. Scalar mulss/addss use float values, not integer addition of their bit encodings.</a:t>
+              <a:t>Use a desk analogy: running out of desk space differs from scribbling over someone else’s paper. The old quiz guard is conceptual canary behavior. A callee may write through a valid pointer into caller-owned data, so not every cross-frame write is inherently illegal; the unexpected unauthorized overwrite is the problem. Canaries detect some corruption, ASLR changes predictability, and NX changes execution permissions. Do not imply the byte pattern identifies the exact buggy instruction.</a:t>
             </a:r>
             <a:endParaRPr/>
           </a:p>
@@ -2180,7 +2149,7 @@
               <a:buNone/>
             </a:pPr>
             <a:r>
-              <a:t>Sources: https://firner.com/presentations/cs211/2026-Fall/cs211_11/; https://www.intel.com/content/www/us/en/developer/articles/technical/intel-sdm.html</a:t>
+              <a:t>Sources: https://firner.com/presentations/cs211/2026-Fall/cs211_09/; https://firner.com/presentations/cs211/2026-Fall/cs211_11/</a:t>
             </a:r>
             <a:endParaRPr/>
           </a:p>
@@ -2210,7 +2179,7 @@
               <a:buNone/>
             </a:pPr>
             <a:r>
-              <a:t>Answer: 1. A 32-bit float stored in XMM does not make XMM a 32-bit register. XMM is 128 bits wide.</a:t>
+              <a:t>Answer: 1. word[4] is outside the 4-byte array and is undefined behavior. It is a bounds error, not proof the entire stack has run out.</a:t>
             </a:r>
             <a:endParaRPr/>
           </a:p>
@@ -2240,7 +2209,7 @@
               <a:buNone/>
             </a:pPr>
             <a:r>
-              <a:t>2. The largest available register depends on CPU extensions; common examples are wider than 64 bits.</a:t>
+              <a:t>2. An unexpectedly changed guard suggests corruption, not normal stack cleanup. The exact effect and whether a crash occurs are not guaranteed.</a:t>
             </a:r>
             <a:endParaRPr/>
           </a:p>
@@ -2520,7 +2489,7 @@
               <a:buNone/>
             </a:pPr>
             <a:r>
-              <a:t>Use a desk analogy: running out of desk space differs from scribbling over someone else’s paper. The old quiz guard is conceptual canary behavior. A callee may write through a valid pointer into caller-owned data, so not every cross-frame write is inherently illegal; the unexpected unauthorized overwrite is the problem. Canaries detect some corruption, ASLR changes predictability, and NX changes execution permissions. Do not imply the byte pattern identifies the exact buggy instruction.</a:t>
+              <a:t>Ask the two answer-reveal questions aloud: convert 0xA7; then list bytes of 0xA7B2 little-endian. Break into 4-bit groups and insist on preserving leading zeros within each nibble. For the endian example, draw addresses 1000 and 1001 and place full byte pairs into them. Do not reverse the digits inside a byte or the individual bits. Reading a uint32_t word in GDB and listing its bytes are different displays.</a:t>
             </a:r>
             <a:endParaRPr/>
           </a:p>
@@ -2550,7 +2519,7 @@
               <a:buNone/>
             </a:pPr>
             <a:r>
-              <a:t>Sources: https://firner.com/presentations/cs211/2026-Fall/cs211_09/; https://firner.com/presentations/cs211/2026-Fall/cs211_11/</a:t>
+              <a:t>Sources: https://firner.com/presentations/cs211/2026-Fall/cs211_01/; https://firner.com/presentations/cs211/2026-Fall/cs211_03/</a:t>
             </a:r>
             <a:endParaRPr/>
           </a:p>
@@ -2580,7 +2549,7 @@
               <a:buNone/>
             </a:pPr>
             <a:r>
-              <a:t>Answer: 1. word[4] is outside the 4-byte array and is undefined behavior. It is a bounds error, not proof the entire stack has run out.</a:t>
+              <a:t>Answer: 1. 0xA7 expands to 1010 0111₂.</a:t>
             </a:r>
             <a:endParaRPr/>
           </a:p>
@@ -2610,7 +2579,7 @@
               <a:buNone/>
             </a:pPr>
             <a:r>
-              <a:t>2. An unexpectedly changed guard suggests corruption, not normal stack cleanup. The exact effect and whether a crash occurs are not guaranteed.</a:t>
+              <a:t>2. In little-endian memory, 0xA7B2 as a 16-bit value stores B2 first, then A7.</a:t>
             </a:r>
             <a:endParaRPr/>
           </a:p>
@@ -2690,7 +2659,7 @@
               <a:buNone/>
             </a:pPr>
             <a:r>
-              <a:t>Ask the two answer-reveal questions aloud: convert 0xA7; then list bytes of 0xA7B2 little-endian. Break into 4-bit groups and insist on preserving leading zeros within each nibble. For the endian example, draw addresses 1000 and 1001 and place full byte pairs into them. Do not reverse the digits inside a byte or the individual bits. Reading a uint32_t word in GDB and listing its bytes are different displays.</a:t>
+              <a:t>Emphasize interpretation rather than a separate collection of signed memory cells. For general n-bit signed values, minimum is −2^(n−1) and maximum is 2^(n−1)−1. This is a fixed-width hardware/representation exercise. In C, small integer types are usually promoted before arithmetic, and signed overflow at the operation’s actual type width is undefined behavior; do not claim ordinary signed C overflow is guaranteed to wrap.</a:t>
             </a:r>
             <a:endParaRPr/>
           </a:p>
@@ -2720,7 +2689,7 @@
               <a:buNone/>
             </a:pPr>
             <a:r>
-              <a:t>Sources: https://firner.com/presentations/cs211/2026-Fall/cs211_01/; https://firner.com/presentations/cs211/2026-Fall/cs211_03/</a:t>
+              <a:t>Sources: https://firner.com/presentations/cs211/2026-Fall/cs211_02/; https://firner.com/presentations/cs211/2026-Fall/cs211_04/</a:t>
             </a:r>
             <a:endParaRPr/>
           </a:p>
@@ -2750,7 +2719,7 @@
               <a:buNone/>
             </a:pPr>
             <a:r>
-              <a:t>Answer: 1. 0xA7 expands to 1010 0111₂.</a:t>
+              <a:t>Answer: 1. Signed and unsigned 8-bit values each have 256 possible patterns.</a:t>
             </a:r>
             <a:endParaRPr/>
           </a:p>
@@ -2780,7 +2749,7 @@
               <a:buNone/>
             </a:pPr>
             <a:r>
-              <a:t>2. In little-endian memory, 0xA7B2 as a 16-bit value stores B2 first, then A7.</a:t>
+              <a:t>2. The fixed-width negation pattern for 10000000 is still 10000000. Read as signed, it is −128, but the desired positive result overflowed the signed 8-bit range.</a:t>
             </a:r>
             <a:endParaRPr/>
           </a:p>
@@ -2860,7 +2829,7 @@
               <a:buNone/>
             </a:pPr>
             <a:r>
-              <a:t>Emphasize interpretation rather than a separate collection of signed memory cells. For general n-bit signed values, minimum is −2^(n−1) and maximum is 2^(n−1)−1. This is a fixed-width hardware/representation exercise. In C, small integer types are usually promoted before arithmetic, and signed overflow at the operation’s actual type width is undefined behavior; do not claim ordinary signed C overflow is guaranteed to wrap.</a:t>
+              <a:t>Draw eight seats in a row; a shift throws the person at the end away, while a rotation sends that person around to the empty seat. For the homework-style method, combine a masked left shift with x &gt;&gt; 7. State the width and use unsigned arithmetic; shift counts must be valid for the promoted operand type. This is a one-bit illustration, not a complete general rotation function with all edge cases.</a:t>
             </a:r>
             <a:endParaRPr/>
           </a:p>
@@ -2890,7 +2859,7 @@
               <a:buNone/>
             </a:pPr>
             <a:r>
-              <a:t>Sources: https://firner.com/presentations/cs211/2026-Fall/cs211_02/; https://firner.com/presentations/cs211/2026-Fall/cs211_04/</a:t>
+              <a:t>Sources: https://firner.com/presentations/cs211/2026-Fall/cs211_02/; https://firner.com/presentations/cs211/2026-Fall/hw2.html</a:t>
             </a:r>
             <a:endParaRPr/>
           </a:p>
@@ -2920,7 +2889,7 @@
               <a:buNone/>
             </a:pPr>
             <a:r>
-              <a:t>Answer: 1. Signed and unsigned 8-bit values each have 256 possible patterns.</a:t>
+              <a:t>Answer: 1. x &amp; 0x0F = 0x06, keeping the low four bits.</a:t>
             </a:r>
             <a:endParaRPr/>
           </a:p>
@@ -2950,7 +2919,37 @@
               <a:buNone/>
             </a:pPr>
             <a:r>
-              <a:t>2. The fixed-width negation pattern for 10000000 is still 10000000. Read as signed, it is −128, but the desired positive result overflowed the signed 8-bit range.</a:t>
+              <a:t>2. The masked left shift is 0x6C = 01101100₂.</a:t>
+            </a:r>
+            <a:endParaRPr/>
+          </a:p>
+          <a:p xmlns:a="http://schemas.openxmlformats.org/drawingml/2006/main">
+            <a:pPr marL="0" lvl="0" indent="0" algn="l">
+              <a:spcBef>
+                <a:spcPts val="0"/>
+              </a:spcBef>
+              <a:spcAft>
+                <a:spcPts val="0"/>
+              </a:spcAft>
+              <a:buNone/>
+            </a:pPr>
+            <a:r>
+              <a:t/>
+            </a:r>
+            <a:endParaRPr/>
+          </a:p>
+          <a:p xmlns:a="http://schemas.openxmlformats.org/drawingml/2006/main">
+            <a:pPr marL="0" lvl="0" indent="0" algn="l">
+              <a:spcBef>
+                <a:spcPts val="0"/>
+              </a:spcBef>
+              <a:spcAft>
+                <a:spcPts val="0"/>
+              </a:spcAft>
+              <a:buNone/>
+            </a:pPr>
+            <a:r>
+              <a:t>3. The rotation is 0x6D = 01101101₂: the old top bit becomes the low bit.</a:t>
             </a:r>
             <a:endParaRPr/>
           </a:p>
@@ -3030,7 +3029,7 @@
               <a:buNone/>
             </a:pPr>
             <a:r>
-              <a:t>Draw eight seats in a row; a shift throws the person at the end away, while a rotation sends that person around to the empty seat. For the homework-style method, combine a masked left shift with x &gt;&gt; 7. State the width and use unsigned arithmetic; shift counts must be valid for the promoted operand type. This is a one-bit illustration, not a complete general rotation function with all edge cases.</a:t>
+              <a:t>Board: draw columns A, B, A AND B, NOT A, Out. For each row, fill both internal columns before Out. Circle the wire entering NOT so students do not invert the wrong input. In C, bitwise &amp;, |, ~ operate on bit patterns, while logical &amp;&amp;, ||, ! operate on truth values; this slide is single-bit logic. A truth table with n binary inputs needs 2^n rows.</a:t>
             </a:r>
             <a:endParaRPr/>
           </a:p>
@@ -3060,7 +3059,7 @@
               <a:buNone/>
             </a:pPr>
             <a:r>
-              <a:t>Sources: https://firner.com/presentations/cs211/2026-Fall/cs211_02/; https://firner.com/presentations/cs211/2026-Fall/hw2.html</a:t>
+              <a:t>Sources: https://firner.com/presentations/cs211/2026-Fall/cs211_02/; https://firner.com/presentations/cs211/2026-Fall/cs211_12/</a:t>
             </a:r>
             <a:endParaRPr/>
           </a:p>
@@ -3090,7 +3089,7 @@
               <a:buNone/>
             </a:pPr>
             <a:r>
-              <a:t>Answer: 1. x &amp; 0x0F = 0x06, keeping the low four bits.</a:t>
+              <a:t>Answer: 1. A=0,B=0: AND=0, NOT A=1, so output=1.</a:t>
             </a:r>
             <a:endParaRPr/>
           </a:p>
@@ -3120,7 +3119,7 @@
               <a:buNone/>
             </a:pPr>
             <a:r>
-              <a:t>2. The masked left shift is 0x6C = 01101100₂.</a:t>
+              <a:t>2. A=0,B=1: AND=0, NOT A=1, so output=1.</a:t>
             </a:r>
             <a:endParaRPr/>
           </a:p>
@@ -3150,7 +3149,37 @@
               <a:buNone/>
             </a:pPr>
             <a:r>
-              <a:t>3. The rotation is 0x6D = 01101101₂: the old top bit becomes the low bit.</a:t>
+              <a:t>3. A=1,B=0: AND=0, NOT A=0, so output=0.</a:t>
+            </a:r>
+            <a:endParaRPr/>
+          </a:p>
+          <a:p xmlns:a="http://schemas.openxmlformats.org/drawingml/2006/main">
+            <a:pPr marL="0" lvl="0" indent="0" algn="l">
+              <a:spcBef>
+                <a:spcPts val="0"/>
+              </a:spcBef>
+              <a:spcAft>
+                <a:spcPts val="0"/>
+              </a:spcAft>
+              <a:buNone/>
+            </a:pPr>
+            <a:r>
+              <a:t/>
+            </a:r>
+            <a:endParaRPr/>
+          </a:p>
+          <a:p xmlns:a="http://schemas.openxmlformats.org/drawingml/2006/main">
+            <a:pPr marL="0" lvl="0" indent="0" algn="l">
+              <a:spcBef>
+                <a:spcPts val="0"/>
+              </a:spcBef>
+              <a:spcAft>
+                <a:spcPts val="0"/>
+              </a:spcAft>
+              <a:buNone/>
+            </a:pPr>
+            <a:r>
+              <a:t>4. A=1,B=1: AND=1, NOT A=0, so output=1.</a:t>
             </a:r>
             <a:endParaRPr/>
           </a:p>
@@ -3230,7 +3259,7 @@
               <a:buNone/>
             </a:pPr>
             <a:r>
-              <a:t>Board: draw columns A, B, A AND B, NOT A, Out. For each row, fill both internal columns before Out. Circle the wire entering NOT so students do not invert the wrong input. In C, bitwise &amp;, |, ~ operate on bit patterns, while logical &amp;&amp;, ||, ! operate on truth values; this slide is single-bit logic. A truth table with n binary inputs needs 2^n rows.</a:t>
+              <a:t>Use decimal addition’s carry as the analogy. Two ones in a binary column produce zero in that column and carry one left. If each stage waits for the previous carry, a longer chain can take longer. For lookahead, define G=A AND B and P=A XOR B; then Cnext=G OR (P AND Cin). Avoid quoting a universal fixed number of gate delays because it depends on the implementation. Distinguish combinational propagation delay from sequential state storage.</a:t>
             </a:r>
             <a:endParaRPr/>
           </a:p>
@@ -3260,7 +3289,7 @@
               <a:buNone/>
             </a:pPr>
             <a:r>
-              <a:t>Sources: https://firner.com/presentations/cs211/2026-Fall/cs211_02/; https://firner.com/presentations/cs211/2026-Fall/cs211_12/</a:t>
+              <a:t>Sources: https://firner.com/presentations/cs211/2026-Fall/cs211_03/; https://firner.com/presentations/cs211/2026-Fall/cs211_12/; https://firner.com/presentations/cs211/2026-Fall/cs211_13/</a:t>
             </a:r>
             <a:endParaRPr/>
           </a:p>
@@ -3290,7 +3319,7 @@
               <a:buNone/>
             </a:pPr>
             <a:r>
-              <a:t>Answer: 1. A=0,B=0: AND=0, NOT A=1, so output=1.</a:t>
+              <a:t>Answer: 1. Sum = 1 XOR 1 XOR 0 = 0.</a:t>
             </a:r>
             <a:endParaRPr/>
           </a:p>
@@ -3320,7 +3349,7 @@
               <a:buNone/>
             </a:pPr>
             <a:r>
-              <a:t>2. A=0,B=1: AND=0, NOT A=1, so output=1.</a:t>
+              <a:t>2. Carry-out = 1. The binary total is 10₂.</a:t>
             </a:r>
             <a:endParaRPr/>
           </a:p>
@@ -3350,37 +3379,7 @@
               <a:buNone/>
             </a:pPr>
             <a:r>
-              <a:t>3. A=1,B=0: AND=0, NOT A=0, so output=0.</a:t>
-            </a:r>
-            <a:endParaRPr/>
-          </a:p>
-          <a:p xmlns:a="http://schemas.openxmlformats.org/drawingml/2006/main">
-            <a:pPr marL="0" lvl="0" indent="0" algn="l">
-              <a:spcBef>
-                <a:spcPts val="0"/>
-              </a:spcBef>
-              <a:spcAft>
-                <a:spcPts val="0"/>
-              </a:spcAft>
-              <a:buNone/>
-            </a:pPr>
-            <a:r>
-              <a:t/>
-            </a:r>
-            <a:endParaRPr/>
-          </a:p>
-          <a:p xmlns:a="http://schemas.openxmlformats.org/drawingml/2006/main">
-            <a:pPr marL="0" lvl="0" indent="0" algn="l">
-              <a:spcBef>
-                <a:spcPts val="0"/>
-              </a:spcBef>
-              <a:spcAft>
-                <a:spcPts val="0"/>
-              </a:spcAft>
-              <a:buNone/>
-            </a:pPr>
-            <a:r>
-              <a:t>4. A=1,B=1: AND=1, NOT A=0, so output=1.</a:t>
+              <a:t>3. Lookahead trades extra circuitry for less serial carry waiting; it does not make propagation delay disappear.</a:t>
             </a:r>
             <a:endParaRPr/>
           </a:p>
@@ -3460,7 +3459,7 @@
               <a:buNone/>
             </a:pPr>
             <a:r>
-              <a:t>Use decimal addition’s carry as the analogy. Two ones in a binary column produce zero in that column and carry one left. If each stage waits for the previous carry, a longer chain can take longer. For lookahead, define G=A AND B and P=A XOR B; then Cnext=G OR (P AND Cin). Avoid quoting a universal fixed number of gate delays because it depends on the implementation. Distinguish combinational propagation delay from sequential state storage.</a:t>
+              <a:t>Say: a MUX is a switch choosing which wire gets through; a decoder is a row of labels where one label lights up. Use active-high and enabled as explicit assumptions, since real parts can have active-low outputs and enable controls. n inputs to a binary decoder means n input BITS and up to 2^n output lines, not 2^n-bit values at every output.</a:t>
             </a:r>
             <a:endParaRPr/>
           </a:p>
@@ -3490,7 +3489,7 @@
               <a:buNone/>
             </a:pPr>
             <a:r>
-              <a:t>Sources: https://firner.com/presentations/cs211/2026-Fall/cs211_03/; https://firner.com/presentations/cs211/2026-Fall/cs211_12/; https://firner.com/presentations/cs211/2026-Fall/cs211_13/</a:t>
+              <a:t>Sources: https://firner.com/presentations/cs211/2026-Fall/cs211_12/</a:t>
             </a:r>
             <a:endParaRPr/>
           </a:p>
@@ -3520,7 +3519,7 @@
               <a:buNone/>
             </a:pPr>
             <a:r>
-              <a:t>Answer: 1. Sum = 1 XOR 1 XOR 0 = 0.</a:t>
+              <a:t>Answer: 1. The MUX output is B = 1.</a:t>
             </a:r>
             <a:endParaRPr/>
           </a:p>
@@ -3550,7 +3549,7 @@
               <a:buNone/>
             </a:pPr>
             <a:r>
-              <a:t>2. Carry-out = 1. The binary total is 10₂.</a:t>
+              <a:t>2. Input 10₂ selects line 2; the other output lines are 0 in this active-high model.</a:t>
             </a:r>
             <a:endParaRPr/>
           </a:p>
@@ -3580,7 +3579,7 @@
               <a:buNone/>
             </a:pPr>
             <a:r>
-              <a:t>3. Lookahead trades extra circuitry for less serial carry waiting; it does not make propagation delay disappear.</a:t>
+              <a:t>3. An 8-input MUX needs 3 selector bits because 2³ = 8.</a:t>
             </a:r>
             <a:endParaRPr/>
           </a:p>
@@ -3660,7 +3659,7 @@
               <a:buNone/>
             </a:pPr>
             <a:r>
-              <a:t>Say: a MUX is a switch choosing which wire gets through; a decoder is a row of labels where one label lights up. Use active-high and enabled as explicit assumptions, since real parts can have active-low outputs and enable controls. n inputs to a binary decoder means n input BITS and up to 2^n output lines, not 2^n-bit values at every output.</a:t>
+              <a:t>Analogy: a latch is an open window while enabled; a flip-flop is a snapshot at one instant. For an active-high NOR SR latch, S=R=0 holds, S=1 sets, R=1 resets, and S=R=1 is invalid. Do not transfer those levels directly to a NAND latch, whose controls are active-low. Combinational gate delays still exist in sequential circuits. The clock period must leave enough time for data to travel and settle before capture.</a:t>
             </a:r>
             <a:endParaRPr/>
           </a:p>
@@ -3690,7 +3689,7 @@
               <a:buNone/>
             </a:pPr>
             <a:r>
-              <a:t>Sources: https://firner.com/presentations/cs211/2026-Fall/cs211_12/</a:t>
+              <a:t>Sources: https://firner.com/presentations/cs211/2026-Fall/cs211_13/</a:t>
             </a:r>
             <a:endParaRPr/>
           </a:p>
@@ -3720,7 +3719,7 @@
               <a:buNone/>
             </a:pPr>
             <a:r>
-              <a:t>Answer: 1. The MUX output is B = 1.</a:t>
+              <a:t>Answer: 1. Before the next active rising edge, Q stays 0.</a:t>
             </a:r>
             <a:endParaRPr/>
           </a:p>
@@ -3750,37 +3749,7 @@
               <a:buNone/>
             </a:pPr>
             <a:r>
-              <a:t>2. Input 10₂ selects line 2; the other output lines are 0 in this active-high model.</a:t>
-            </a:r>
-            <a:endParaRPr/>
-          </a:p>
-          <a:p xmlns:a="http://schemas.openxmlformats.org/drawingml/2006/main">
-            <a:pPr marL="0" lvl="0" indent="0" algn="l">
-              <a:spcBef>
-                <a:spcPts val="0"/>
-              </a:spcBef>
-              <a:spcAft>
-                <a:spcPts val="0"/>
-              </a:spcAft>
-              <a:buNone/>
-            </a:pPr>
-            <a:r>
-              <a:t/>
-            </a:r>
-            <a:endParaRPr/>
-          </a:p>
-          <a:p xmlns:a="http://schemas.openxmlformats.org/drawingml/2006/main">
-            <a:pPr marL="0" lvl="0" indent="0" algn="l">
-              <a:spcBef>
-                <a:spcPts val="0"/>
-              </a:spcBef>
-              <a:spcAft>
-                <a:spcPts val="0"/>
-              </a:spcAft>
-              <a:buNone/>
-            </a:pPr>
-            <a:r>
-              <a:t>3. An 8-input MUX needs 3 selector bits because 2³ = 8.</a:t>
+              <a:t>2. At the rising edge, Q becomes 1, assuming D has been stable long enough to meet timing requirements.</a:t>
             </a:r>
             <a:endParaRPr/>
           </a:p>
@@ -3860,7 +3829,7 @@
               <a:buNone/>
             </a:pPr>
             <a:r>
-              <a:t>Analogy: a latch is an open window while enabled; a flip-flop is a snapshot at one instant. For an active-high NOR SR latch, S=R=0 holds, S=1 sets, R=1 resets, and S=R=1 is invalid. Do not transfer those levels directly to a NAND latch, whose controls are active-low. Combinational gate delays still exist in sequential circuits. The clock period must leave enough time for data to travel and settle before capture.</a:t>
+              <a:t>Board: write i, v[i], low bit, total. Students should trace rather than guess from the function name. Point out n is an element count, not a byte count; do not use sizeof v to recover it. const prevents writing elements through v. Ask what happens for n=0: the loop runs zero times and returns 0. Check pointer validity and bounds assumptions before reasoning about values.</a:t>
             </a:r>
             <a:endParaRPr/>
           </a:p>
@@ -3890,7 +3859,7 @@
               <a:buNone/>
             </a:pPr>
             <a:r>
-              <a:t>Sources: https://firner.com/presentations/cs211/2026-Fall/cs211_13/</a:t>
+              <a:t>Sources: https://firner.com/presentations/cs211/2026-Fall/cs211_04/; https://firner.com/presentations/cs211/2026-Fall/cs211_09/; https://firner.com/presentations/cs211/2026-Fall/cs211_13/ (midterm coding scope)</a:t>
             </a:r>
             <a:endParaRPr/>
           </a:p>
@@ -3920,7 +3889,7 @@
               <a:buNone/>
             </a:pPr>
             <a:r>
-              <a:t>Answer: 1. Before the next active rising edge, Q stays 0.</a:t>
+              <a:t>Answer: 1. The return value is 12: 4 + 8.</a:t>
             </a:r>
             <a:endParaRPr/>
           </a:p>
@@ -3950,7 +3919,37 @@
               <a:buNone/>
             </a:pPr>
             <a:r>
-              <a:t>2. At the rising edge, Q becomes 1, assuming D has been stable long enough to meet timing requirements.</a:t>
+              <a:t>2. v[i] &amp; 1u reads the low bit. A zero low bit means an even unsigned integer.</a:t>
+            </a:r>
+            <a:endParaRPr/>
+          </a:p>
+          <a:p xmlns:a="http://schemas.openxmlformats.org/drawingml/2006/main">
+            <a:pPr marL="0" lvl="0" indent="0" algn="l">
+              <a:spcBef>
+                <a:spcPts val="0"/>
+              </a:spcBef>
+              <a:spcAft>
+                <a:spcPts val="0"/>
+              </a:spcAft>
+              <a:buNone/>
+            </a:pPr>
+            <a:r>
+              <a:t/>
+            </a:r>
+            <a:endParaRPr/>
+          </a:p>
+          <a:p xmlns:a="http://schemas.openxmlformats.org/drawingml/2006/main">
+            <a:pPr marL="0" lvl="0" indent="0" algn="l">
+              <a:spcBef>
+                <a:spcPts val="0"/>
+              </a:spcBef>
+              <a:spcAft>
+                <a:spcPts val="0"/>
+              </a:spcAft>
+              <a:buNone/>
+            </a:pPr>
+            <a:r>
+              <a:t>3. total across the four iterations is 0, 4, 4, 12.</a:t>
             </a:r>
             <a:endParaRPr/>
           </a:p>
@@ -4030,7 +4029,7 @@
               <a:buNone/>
             </a:pPr>
             <a:r>
-              <a:t>Board: write i, v[i], low bit, total. Students should trace rather than guess from the function name. Point out n is an element count, not a byte count; do not use sizeof v to recover it. const prevents writing elements through v. Ask what happens for n=0: the loop runs zero times and returns 0. Check pointer validity and bounds assumptions before reasoning about values.</a:t>
+              <a:t>Analogy: a laundry line can wash one load while drying another; each load still goes through all the steps. State the ideal assumptions before using k+n−1. Real stages can have unequal delays; clock time is constrained by the slowest stage plus register overhead. More stages do not guarantee a proportional speedup. The professor lists this material as included but less emphasized than Lectures 1–13.</a:t>
             </a:r>
             <a:endParaRPr/>
           </a:p>
@@ -4060,7 +4059,7 @@
               <a:buNone/>
             </a:pPr>
             <a:r>
-              <a:t>Sources: https://firner.com/presentations/cs211/2026-Fall/cs211_04/; https://firner.com/presentations/cs211/2026-Fall/cs211_09/; https://firner.com/presentations/cs211/2026-Fall/cs211_13/ (midterm coding scope)</a:t>
+              <a:t>Sources: https://firner.com/presentations/cs211/2026-Fall/cs211_14/; https://firner.com/presentations/cs211/2026-Fall/cs211_15/</a:t>
             </a:r>
             <a:endParaRPr/>
           </a:p>
@@ -4090,7 +4089,7 @@
               <a:buNone/>
             </a:pPr>
             <a:r>
-              <a:t>Answer: 1. The return value is 12: 4 + 8.</a:t>
+              <a:t>Answer: 1. It takes 8 cycles to finish four instructions from an empty ideal pipeline.</a:t>
             </a:r>
             <a:endParaRPr/>
           </a:p>
@@ -4120,37 +4119,7 @@
               <a:buNone/>
             </a:pPr>
             <a:r>
-              <a:t>2. v[i] &amp; 1u reads the low bit. A zero low bit means an even unsigned integer.</a:t>
-            </a:r>
-            <a:endParaRPr/>
-          </a:p>
-          <a:p xmlns:a="http://schemas.openxmlformats.org/drawingml/2006/main">
-            <a:pPr marL="0" lvl="0" indent="0" algn="l">
-              <a:spcBef>
-                <a:spcPts val="0"/>
-              </a:spcBef>
-              <a:spcAft>
-                <a:spcPts val="0"/>
-              </a:spcAft>
-              <a:buNone/>
-            </a:pPr>
-            <a:r>
-              <a:t/>
-            </a:r>
-            <a:endParaRPr/>
-          </a:p>
-          <a:p xmlns:a="http://schemas.openxmlformats.org/drawingml/2006/main">
-            <a:pPr marL="0" lvl="0" indent="0" algn="l">
-              <a:spcBef>
-                <a:spcPts val="0"/>
-              </a:spcBef>
-              <a:spcAft>
-                <a:spcPts val="0"/>
-              </a:spcAft>
-              <a:buNone/>
-            </a:pPr>
-            <a:r>
-              <a:t>3. total across the four iterations is 0, 4, 4, 12.</a:t>
+              <a:t>2. Each instruction still spans five stages. After the pipeline fills, up to one instruction finishes per cycle under these assumptions.</a:t>
             </a:r>
             <a:endParaRPr/>
           </a:p>
@@ -4230,7 +4199,7 @@
               <a:buNone/>
             </a:pPr>
             <a:r>
-              <a:t>Analogy: a laundry line can wash one load while drying another; each load still goes through all the steps. State the ideal assumptions before using k+n−1. Real stages can have unequal delays; clock time is constrained by the slowest stage plus register overhead. More stages do not guarantee a proportional speedup. The professor lists this material as included but less emphasized than Lectures 1–13.</a:t>
+              <a:t>Ask students to draw a circle around the value being produced and consumed: RAX. For the branch, circle the flags produced by cmp and consumed by je. Forwarding is a shortcut wire, not time travel. In a simple in-order pipeline, RAW is the main data dependency; WAR/WAW become more important with reordering and multiple execution paths. Independent instructions can sometimes be scheduled while waiting, subject to preserving program behavior.</a:t>
             </a:r>
             <a:endParaRPr/>
           </a:p>
@@ -4290,7 +4259,7 @@
               <a:buNone/>
             </a:pPr>
             <a:r>
-              <a:t>Answer: 1. It takes 8 cycles to finish four instructions from an empty ideal pipeline.</a:t>
+              <a:t>Answer: 1. addq needs the value loaded into RAX. In the course’s five-stage model, an immediate load/use dependency typically needs a stall even with forwarding.</a:t>
             </a:r>
             <a:endParaRPr/>
           </a:p>
@@ -4320,7 +4289,7 @@
               <a:buNone/>
             </a:pPr>
             <a:r>
-              <a:t>2. Each instruction still spans five stages. After the pipeline fills, up to one instruction finishes per cycle under these assumptions.</a:t>
+              <a:t>2. je depends on the comparison result and changes the next instruction address. A wrong prediction can require discarding speculative work.</a:t>
             </a:r>
             <a:endParaRPr/>
           </a:p>
@@ -4462,176 +4431,6 @@
 </file>
 
 <file path=ppt/notesSlides/notesSlide30.xml><?xml version="1.0" encoding="utf-8"?>
-<p:notes xmlns:p="http://schemas.openxmlformats.org/presentationml/2006/main">
-  <p:cSld>
-    <p:spTree>
-      <p:nvGrpSpPr>
-        <p:cNvPr id="1" name=""/>
-        <p:cNvGrpSpPr/>
-        <p:nvPr/>
-      </p:nvGrpSpPr>
-      <p:grpSpPr>
-        <a:xfrm xmlns:a="http://schemas.openxmlformats.org/drawingml/2006/main"/>
-      </p:grpSpPr>
-      <p:sp>
-        <p:nvSpPr>
-          <p:cNvPr id="2" name="Slide Image Placeholder 1"/>
-          <p:cNvSpPr>
-            <a:spLocks xmlns:a="http://schemas.openxmlformats.org/drawingml/2006/main" noGrp="1"/>
-          </p:cNvSpPr>
-          <p:nvPr>
-            <p:ph type="sldImg" idx="0"/>
-          </p:nvPr>
-        </p:nvSpPr>
-        <p:spPr/>
-      </p:sp>
-      <p:sp>
-        <p:nvSpPr>
-          <p:cNvPr id="3" name="Notes Placeholder 2"/>
-          <p:cNvSpPr>
-            <a:spLocks xmlns:a="http://schemas.openxmlformats.org/drawingml/2006/main" noGrp="1"/>
-          </p:cNvSpPr>
-          <p:nvPr>
-            <p:ph type="body" idx="1"/>
-          </p:nvPr>
-        </p:nvSpPr>
-        <p:spPr/>
-        <p:txBody>
-          <a:bodyPr xmlns:a="http://schemas.openxmlformats.org/drawingml/2006/main"/>
-          <a:lstStyle xmlns:a="http://schemas.openxmlformats.org/drawingml/2006/main"/>
-          <a:p xmlns:a="http://schemas.openxmlformats.org/drawingml/2006/main">
-            <a:pPr marL="0" lvl="0" indent="0" algn="l">
-              <a:spcBef>
-                <a:spcPts val="0"/>
-              </a:spcBef>
-              <a:spcAft>
-                <a:spcPts val="0"/>
-              </a:spcAft>
-              <a:buNone/>
-            </a:pPr>
-            <a:r>
-              <a:t>Ask students to draw a circle around the value being produced and consumed: RAX. For the branch, circle the flags produced by cmp and consumed by je. Forwarding is a shortcut wire, not time travel. In a simple in-order pipeline, RAW is the main data dependency; WAR/WAW become more important with reordering and multiple execution paths. Independent instructions can sometimes be scheduled while waiting, subject to preserving program behavior.</a:t>
-            </a:r>
-            <a:endParaRPr/>
-          </a:p>
-          <a:p xmlns:a="http://schemas.openxmlformats.org/drawingml/2006/main">
-            <a:pPr marL="0" lvl="0" indent="0" algn="l">
-              <a:spcBef>
-                <a:spcPts val="0"/>
-              </a:spcBef>
-              <a:spcAft>
-                <a:spcPts val="0"/>
-              </a:spcAft>
-              <a:buNone/>
-            </a:pPr>
-            <a:r>
-              <a:t/>
-            </a:r>
-            <a:endParaRPr/>
-          </a:p>
-          <a:p xmlns:a="http://schemas.openxmlformats.org/drawingml/2006/main">
-            <a:pPr marL="0" lvl="0" indent="0" algn="l">
-              <a:spcBef>
-                <a:spcPts val="0"/>
-              </a:spcBef>
-              <a:spcAft>
-                <a:spcPts val="0"/>
-              </a:spcAft>
-              <a:buNone/>
-            </a:pPr>
-            <a:r>
-              <a:t>Sources: https://firner.com/presentations/cs211/2026-Fall/cs211_14/; https://firner.com/presentations/cs211/2026-Fall/cs211_15/</a:t>
-            </a:r>
-            <a:endParaRPr/>
-          </a:p>
-          <a:p xmlns:a="http://schemas.openxmlformats.org/drawingml/2006/main">
-            <a:pPr marL="0" lvl="0" indent="0" algn="l">
-              <a:spcBef>
-                <a:spcPts val="0"/>
-              </a:spcBef>
-              <a:spcAft>
-                <a:spcPts val="0"/>
-              </a:spcAft>
-              <a:buNone/>
-            </a:pPr>
-            <a:r>
-              <a:t/>
-            </a:r>
-            <a:endParaRPr/>
-          </a:p>
-          <a:p xmlns:a="http://schemas.openxmlformats.org/drawingml/2006/main">
-            <a:pPr marL="0" lvl="0" indent="0" algn="l">
-              <a:spcBef>
-                <a:spcPts val="0"/>
-              </a:spcBef>
-              <a:spcAft>
-                <a:spcPts val="0"/>
-              </a:spcAft>
-              <a:buNone/>
-            </a:pPr>
-            <a:r>
-              <a:t>Answer: 1. addq needs the value loaded into RAX. In the course’s five-stage model, an immediate load/use dependency typically needs a stall even with forwarding.</a:t>
-            </a:r>
-            <a:endParaRPr/>
-          </a:p>
-          <a:p xmlns:a="http://schemas.openxmlformats.org/drawingml/2006/main">
-            <a:pPr marL="0" lvl="0" indent="0" algn="l">
-              <a:spcBef>
-                <a:spcPts val="0"/>
-              </a:spcBef>
-              <a:spcAft>
-                <a:spcPts val="0"/>
-              </a:spcAft>
-              <a:buNone/>
-            </a:pPr>
-            <a:r>
-              <a:t/>
-            </a:r>
-            <a:endParaRPr/>
-          </a:p>
-          <a:p xmlns:a="http://schemas.openxmlformats.org/drawingml/2006/main">
-            <a:pPr marL="0" lvl="0" indent="0" algn="l">
-              <a:spcBef>
-                <a:spcPts val="0"/>
-              </a:spcBef>
-              <a:spcAft>
-                <a:spcPts val="0"/>
-              </a:spcAft>
-              <a:buNone/>
-            </a:pPr>
-            <a:r>
-              <a:t>2. je depends on the comparison result and changes the next instruction address. A wrong prediction can require discarding speculative work.</a:t>
-            </a:r>
-            <a:endParaRPr/>
-          </a:p>
-        </p:txBody>
-      </p:sp>
-      <p:sp>
-        <p:nvSpPr>
-          <p:cNvPr id="4" name="Slide Number Placeholder 3"/>
-          <p:cNvSpPr>
-            <a:spLocks xmlns:a="http://schemas.openxmlformats.org/drawingml/2006/main" noGrp="1"/>
-          </p:cNvSpPr>
-          <p:nvPr>
-            <p:ph type="sldNum" idx="5"/>
-          </p:nvPr>
-        </p:nvSpPr>
-        <p:spPr/>
-        <p:txBody>
-          <a:bodyPr xmlns:a="http://schemas.openxmlformats.org/drawingml/2006/main"/>
-          <a:lstStyle xmlns:a="http://schemas.openxmlformats.org/drawingml/2006/main"/>
-          <a:p xmlns:a="http://schemas.openxmlformats.org/drawingml/2006/main"/>
-        </p:txBody>
-      </p:sp>
-    </p:spTree>
-  </p:cSld>
-  <p:clrMapOvr>
-    <a:masterClrMapping xmlns:a="http://schemas.openxmlformats.org/drawingml/2006/main"/>
-  </p:clrMapOvr>
-</p:notes>
-</file>
-
-<file path=ppt/notesSlides/notesSlide31.xml><?xml version="1.0" encoding="utf-8"?>
 <p:notes xmlns:p="http://schemas.openxmlformats.org/presentationml/2006/main">
   <p:cSld>
     <p:spTree>
@@ -7794,14 +7593,14 @@
   </p:cSld>
   <p:clrMap bg1="dk1" tx1="lt1" bg2="dk2" tx2="lt2" accent1="accent1" accent2="accent2" accent3="accent3" accent4="accent4" accent5="accent5" accent6="accent6" hlink="hlink" folHlink="folHlink"/>
   <p:sldLayoutIdLst>
-    <p:sldLayoutId xmlns:r="http://schemas.openxmlformats.org/officeDocument/2006/relationships" id="2147483649" r:id="R32006a6cbeeb4945"/>
-    <p:sldLayoutId xmlns:r="http://schemas.openxmlformats.org/officeDocument/2006/relationships" id="2147483650" r:id="Rcc5528f652094124"/>
-    <p:sldLayoutId xmlns:r="http://schemas.openxmlformats.org/officeDocument/2006/relationships" id="2147483651" r:id="Ra7ed0b4b74874e05"/>
-    <p:sldLayoutId xmlns:r="http://schemas.openxmlformats.org/officeDocument/2006/relationships" id="2147483652" r:id="Rc78e9634c6d94bfd"/>
-    <p:sldLayoutId xmlns:r="http://schemas.openxmlformats.org/officeDocument/2006/relationships" id="2147483653" r:id="R2ae6612cef2c4670"/>
-    <p:sldLayoutId xmlns:r="http://schemas.openxmlformats.org/officeDocument/2006/relationships" id="2147483654" r:id="R9ebf7b9bcd9f43cc"/>
-    <p:sldLayoutId xmlns:r="http://schemas.openxmlformats.org/officeDocument/2006/relationships" id="2147483655" r:id="R6f0d72cc63154a27"/>
-    <p:sldLayoutId xmlns:r="http://schemas.openxmlformats.org/officeDocument/2006/relationships" id="2147483656" r:id="Rfdc2ad9608bd430b"/>
+    <p:sldLayoutId xmlns:r="http://schemas.openxmlformats.org/officeDocument/2006/relationships" id="2147483649" r:id="R15b8b3bd30d54c42"/>
+    <p:sldLayoutId xmlns:r="http://schemas.openxmlformats.org/officeDocument/2006/relationships" id="2147483650" r:id="R3bdd156fd53f43ab"/>
+    <p:sldLayoutId xmlns:r="http://schemas.openxmlformats.org/officeDocument/2006/relationships" id="2147483651" r:id="R62792a25c29644f7"/>
+    <p:sldLayoutId xmlns:r="http://schemas.openxmlformats.org/officeDocument/2006/relationships" id="2147483652" r:id="Rd94091917d1a42ff"/>
+    <p:sldLayoutId xmlns:r="http://schemas.openxmlformats.org/officeDocument/2006/relationships" id="2147483653" r:id="R86e93820104b4aed"/>
+    <p:sldLayoutId xmlns:r="http://schemas.openxmlformats.org/officeDocument/2006/relationships" id="2147483654" r:id="R717dfaea55e342cd"/>
+    <p:sldLayoutId xmlns:r="http://schemas.openxmlformats.org/officeDocument/2006/relationships" id="2147483655" r:id="R03d03b627e6647aa"/>
+    <p:sldLayoutId xmlns:r="http://schemas.openxmlformats.org/officeDocument/2006/relationships" id="2147483656" r:id="R4f1773dae1d54d49"/>
   </p:sldLayoutIdLst>
   <p:hf hdr="0" dt="0"/>
   <p:txStyles>
@@ -10672,7 +10471,7 @@
           <p:cNvPr id="534" name="">
             <a:extLst xmlns:a="http://schemas.openxmlformats.org/drawingml/2006/main">
               <a:ext uri="{FF2B5EF4-FFF2-40B4-BE49-F238E27FC236}">
-                <a16:creationId xmlns:a16="http://schemas.microsoft.com/office/drawing/2014/main" id="{E40F3655-CC2F-4964-B502-29C3E0CA4B7E}"/>
+                <a16:creationId xmlns:a16="http://schemas.microsoft.com/office/drawing/2014/main" id="{3C9E9A29-1F76-4B71-AB96-EC661CF8BC86}"/>
               </a:ext>
             </a:extLst>
           </p:cNvPr>
@@ -11415,7 +11214,7 @@
           <p:cNvPr id="535" name="Takeaway">
             <a:extLst xmlns:a="http://schemas.openxmlformats.org/drawingml/2006/main">
               <a:ext uri="{FF2B5EF4-FFF2-40B4-BE49-F238E27FC236}">
-                <a16:creationId xmlns:a16="http://schemas.microsoft.com/office/drawing/2014/main" id="{705CD37A-688D-485D-9C69-811E85302BC1}"/>
+                <a16:creationId xmlns:a16="http://schemas.microsoft.com/office/drawing/2014/main" id="{4698B99D-ACE1-4432-A75A-2277009F6E75}"/>
               </a:ext>
             </a:extLst>
           </p:cNvPr>
@@ -12799,7 +12598,7 @@
           <p:cNvPr id="534" name="Takeaway">
             <a:extLst xmlns:a="http://schemas.openxmlformats.org/drawingml/2006/main">
               <a:ext uri="{FF2B5EF4-FFF2-40B4-BE49-F238E27FC236}">
-                <a16:creationId xmlns:a16="http://schemas.microsoft.com/office/drawing/2014/main" id="{DDFCA9EA-00BC-47B7-BD2F-9D1EEDEA85B2}"/>
+                <a16:creationId xmlns:a16="http://schemas.microsoft.com/office/drawing/2014/main" id="{3805E744-1A0F-41EA-950E-E5AC13311F41}"/>
               </a:ext>
             </a:extLst>
           </p:cNvPr>
@@ -14232,7 +14031,7 @@
           <p:cNvPr id="534" name="Takeaway">
             <a:extLst xmlns:a="http://schemas.openxmlformats.org/drawingml/2006/main">
               <a:ext uri="{FF2B5EF4-FFF2-40B4-BE49-F238E27FC236}">
-                <a16:creationId xmlns:a16="http://schemas.microsoft.com/office/drawing/2014/main" id="{39CEA808-3881-4E00-858A-046D2A8AD1D8}"/>
+                <a16:creationId xmlns:a16="http://schemas.microsoft.com/office/drawing/2014/main" id="{45D0A285-3B1A-4A84-8DD0-A60B3461E759}"/>
               </a:ext>
             </a:extLst>
           </p:cNvPr>
@@ -15714,7 +15513,7 @@
           <p:cNvPr id="534" name="Takeaway">
             <a:extLst xmlns:a="http://schemas.openxmlformats.org/drawingml/2006/main">
               <a:ext uri="{FF2B5EF4-FFF2-40B4-BE49-F238E27FC236}">
-                <a16:creationId xmlns:a16="http://schemas.microsoft.com/office/drawing/2014/main" id="{42940F6E-A384-42E0-83EB-E61B1D100174}"/>
+                <a16:creationId xmlns:a16="http://schemas.microsoft.com/office/drawing/2014/main" id="{05D63010-2970-4521-8158-18CAAC94DD8A}"/>
               </a:ext>
             </a:extLst>
           </p:cNvPr>
@@ -17097,7 +16896,7 @@
           <p:cNvPr id="534" name="">
             <a:extLst xmlns:a="http://schemas.openxmlformats.org/drawingml/2006/main">
               <a:ext uri="{FF2B5EF4-FFF2-40B4-BE49-F238E27FC236}">
-                <a16:creationId xmlns:a16="http://schemas.microsoft.com/office/drawing/2014/main" id="{00B53BCF-65B8-4AAD-AA37-406EE4CACCD0}"/>
+                <a16:creationId xmlns:a16="http://schemas.microsoft.com/office/drawing/2014/main" id="{E736BE7D-115A-4F0D-97C1-430C93B52E58}"/>
               </a:ext>
             </a:extLst>
           </p:cNvPr>
@@ -17457,7 +17256,7 @@
           <p:cNvPr id="535" name="Takeaway">
             <a:extLst xmlns:a="http://schemas.openxmlformats.org/drawingml/2006/main">
               <a:ext uri="{FF2B5EF4-FFF2-40B4-BE49-F238E27FC236}">
-                <a16:creationId xmlns:a16="http://schemas.microsoft.com/office/drawing/2014/main" id="{C8F0F567-1CB1-433A-ADBA-1160EAE0C474}"/>
+                <a16:creationId xmlns:a16="http://schemas.microsoft.com/office/drawing/2014/main" id="{7A1364B4-9C7F-49AC-AA46-4521C616671A}"/>
               </a:ext>
             </a:extLst>
           </p:cNvPr>
@@ -18907,7 +18706,7 @@
           <p:cNvPr id="534" name="Takeaway">
             <a:extLst xmlns:a="http://schemas.openxmlformats.org/drawingml/2006/main">
               <a:ext uri="{FF2B5EF4-FFF2-40B4-BE49-F238E27FC236}">
-                <a16:creationId xmlns:a16="http://schemas.microsoft.com/office/drawing/2014/main" id="{DD830B9A-14B0-4F28-AF01-3F087A774306}"/>
+                <a16:creationId xmlns:a16="http://schemas.microsoft.com/office/drawing/2014/main" id="{530237C3-91F9-427B-B950-CB162DC524AF}"/>
               </a:ext>
             </a:extLst>
           </p:cNvPr>
@@ -20307,7 +20106,7 @@
           <p:cNvPr id="534" name="Takeaway">
             <a:extLst xmlns:a="http://schemas.openxmlformats.org/drawingml/2006/main">
               <a:ext uri="{FF2B5EF4-FFF2-40B4-BE49-F238E27FC236}">
-                <a16:creationId xmlns:a16="http://schemas.microsoft.com/office/drawing/2014/main" id="{E6CAEA66-294E-4162-AD01-F8C68A8EC4EC}"/>
+                <a16:creationId xmlns:a16="http://schemas.microsoft.com/office/drawing/2014/main" id="{128DB647-1AB6-44AB-9540-5C0CBA92FB8F}"/>
               </a:ext>
             </a:extLst>
           </p:cNvPr>
@@ -21757,7 +21556,7 @@
           <p:cNvPr id="534" name="Takeaway">
             <a:extLst xmlns:a="http://schemas.openxmlformats.org/drawingml/2006/main">
               <a:ext uri="{FF2B5EF4-FFF2-40B4-BE49-F238E27FC236}">
-                <a16:creationId xmlns:a16="http://schemas.microsoft.com/office/drawing/2014/main" id="{58E2BECD-CA3A-402F-8B80-5F2A19A1850B}"/>
+                <a16:creationId xmlns:a16="http://schemas.microsoft.com/office/drawing/2014/main" id="{957C10D5-6078-46DC-959D-F79CB6F1267E}"/>
               </a:ext>
             </a:extLst>
           </p:cNvPr>
@@ -22426,7 +22225,7 @@
                 <a:ea typeface="Arial"/>
                 <a:cs typeface="Arial"/>
               </a:rPr>
-              <a:t>Special exponents change the rule</a:t>
+              <a:t>A 64-bit CPU can have wider registers</a:t>
             </a:r>
           </a:p>
         </p:txBody>
@@ -22662,7 +22461,7 @@
                 <a:ea typeface="Arial"/>
                 <a:cs typeface="Arial"/>
               </a:rPr>
-              <a:t>Check the exponent before applying the normal formula.</a:t>
+              <a:t>The machine’s common integer-register width does not set the maximum size of every register.</a:t>
             </a:r>
           </a:p>
           <a:p xmlns:a="http://schemas.openxmlformats.org/drawingml/2006/main">
@@ -22712,7 +22511,7 @@
                 <a:ea typeface="Arial"/>
                 <a:cs typeface="Arial"/>
               </a:rPr>
-              <a:t>An exponent of all zeros uses 0.f and a scale of 2^(1−bias).</a:t>
+              <a:t>An XMM register can hold a scalar 32-bit float even though the register itself is 128 bits wide.</a:t>
             </a:r>
           </a:p>
           <a:p xmlns:a="http://schemas.openxmlformats.org/drawingml/2006/main">
@@ -22762,7 +22561,7 @@
                 <a:ea typeface="Arial"/>
                 <a:cs typeface="Arial"/>
               </a:rPr>
-              <a:t>An exponent of all ones means infinity or NaN.</a:t>
+              <a:t>Wider extensions depend on the supported instruction set.</a:t>
             </a:r>
           </a:p>
         </p:txBody>
@@ -22998,24 +22797,7 @@
                 <a:ea typeface="Consolas"/>
                 <a:cs typeface="Consolas"/>
               </a:rPr>
-              <a:t>For the 1 / 5 / 2 format, bias 15:</a:t>
-            </a:r>
-          </a:p>
-          <a:p xmlns:a="http://schemas.openxmlformats.org/drawingml/2006/main">
-            <a:pPr marL="0" indent="0">
-              <a:lnSpc>
-                <a:spcPct val="112000"/>
-              </a:lnSpc>
-              <a:spcBef>
-                <a:spcPts val="0"/>
-              </a:spcBef>
-              <a:spcAft>
-                <a:spcPts val="0"/>
-              </a:spcAft>
-              <a:buNone/>
-            </a:pPr>
-            <a:r>
-              <a:t/>
+              <a:t>x87: 80-bit floating-point registers</a:t>
             </a:r>
           </a:p>
           <a:p xmlns:a="http://schemas.openxmlformats.org/drawingml/2006/main">
@@ -23048,7 +22830,7 @@
                 <a:ea typeface="Consolas"/>
                 <a:cs typeface="Consolas"/>
               </a:rPr>
-              <a:t>E = 0, F = 0: zero</a:t>
+              <a:t>XMM: 128 bits = 16 bytes</a:t>
             </a:r>
           </a:p>
           <a:p xmlns:a="http://schemas.openxmlformats.org/drawingml/2006/main">
@@ -23081,7 +22863,7 @@
                 <a:ea typeface="Consolas"/>
                 <a:cs typeface="Consolas"/>
               </a:rPr>
-              <a:t>E = 0, F &gt; 0: subnormal</a:t>
+              <a:t>YMM: 256 bits = 32 bytes</a:t>
             </a:r>
           </a:p>
           <a:p xmlns:a="http://schemas.openxmlformats.org/drawingml/2006/main">
@@ -23114,7 +22896,24 @@
                 <a:ea typeface="Consolas"/>
                 <a:cs typeface="Consolas"/>
               </a:rPr>
-              <a:t>E = 1..30: normal</a:t>
+              <a:t>ZMM: 512 bits = 64 bytes (AVX-512)</a:t>
+            </a:r>
+          </a:p>
+          <a:p xmlns:a="http://schemas.openxmlformats.org/drawingml/2006/main">
+            <a:pPr marL="0" indent="0">
+              <a:lnSpc>
+                <a:spcPct val="112000"/>
+              </a:lnSpc>
+              <a:spcBef>
+                <a:spcPts val="0"/>
+              </a:spcBef>
+              <a:spcAft>
+                <a:spcPts val="0"/>
+              </a:spcAft>
+              <a:buNone/>
+            </a:pPr>
+            <a:r>
+              <a:t/>
             </a:r>
           </a:p>
           <a:p xmlns:a="http://schemas.openxmlformats.org/drawingml/2006/main">
@@ -23147,7 +22946,7 @@
                 <a:ea typeface="Consolas"/>
                 <a:cs typeface="Consolas"/>
               </a:rPr>
-              <a:t>E = 31, F = 0: infinity</a:t>
+              <a:t>movss / addss: low scalar FP32</a:t>
             </a:r>
           </a:p>
           <a:p xmlns:a="http://schemas.openxmlformats.org/drawingml/2006/main">
@@ -23180,57 +22979,7 @@
                 <a:ea typeface="Consolas"/>
                 <a:cs typeface="Consolas"/>
               </a:rPr>
-              <a:t>E = 31, F &gt; 0: NaN</a:t>
-            </a:r>
-          </a:p>
-          <a:p xmlns:a="http://schemas.openxmlformats.org/drawingml/2006/main">
-            <a:pPr marL="0" indent="0">
-              <a:lnSpc>
-                <a:spcPct val="112000"/>
-              </a:lnSpc>
-              <a:spcBef>
-                <a:spcPts val="0"/>
-              </a:spcBef>
-              <a:spcAft>
-                <a:spcPts val="0"/>
-              </a:spcAft>
-              <a:buNone/>
-            </a:pPr>
-            <a:r>
-              <a:t/>
-            </a:r>
-          </a:p>
-          <a:p xmlns:a="http://schemas.openxmlformats.org/drawingml/2006/main">
-            <a:pPr marL="0" indent="0">
-              <a:lnSpc>
-                <a:spcPct val="112000"/>
-              </a:lnSpc>
-              <a:spcBef>
-                <a:spcPts val="0"/>
-              </a:spcBef>
-              <a:spcAft>
-                <a:spcPts val="0"/>
-              </a:spcAft>
-              <a:buNone/>
-              <a:defRPr sz="1800">
-                <a:solidFill>
-                  <a:srgbClr val="FFFFFF"/>
-                </a:solidFill>
-                <a:latin typeface="Consolas"/>
-                <a:ea typeface="Consolas"/>
-                <a:cs typeface="Consolas"/>
-              </a:defRPr>
-            </a:pPr>
-            <a:r>
-              <a:rPr sz="1800">
-                <a:solidFill>
-                  <a:srgbClr val="FFFFFF"/>
-                </a:solidFill>
-                <a:latin typeface="Consolas"/>
-                <a:ea typeface="Consolas"/>
-                <a:cs typeface="Consolas"/>
-              </a:rPr>
-              <a:t>Decode s=0, E=0, F=1.</a:t>
+              <a:t>movsd / addsd: low scalar FP64</a:t>
             </a:r>
           </a:p>
         </p:txBody>
@@ -23240,7 +22989,7 @@
           <p:cNvPr id="534" name="Takeaway">
             <a:extLst xmlns:a="http://schemas.openxmlformats.org/drawingml/2006/main">
               <a:ext uri="{FF2B5EF4-FFF2-40B4-BE49-F238E27FC236}">
-                <a16:creationId xmlns:a16="http://schemas.microsoft.com/office/drawing/2014/main" id="{5C4B2696-831D-4E59-B105-200C662FC6E3}"/>
+                <a16:creationId xmlns:a16="http://schemas.microsoft.com/office/drawing/2014/main" id="{C9EBB754-0619-4E36-8E0A-D936A2460162}"/>
               </a:ext>
             </a:extLst>
           </p:cNvPr>
@@ -23398,7 +23147,7 @@
                 <a:ea typeface="Arial"/>
                 <a:cs typeface="Arial"/>
               </a:rPr>
-              <a:t>A zero stored exponent does not force the whole number to be zero.</a:t>
+              <a:t>There is no universal “largest register = 64 bits” rule for a 64-bit system.</a:t>
             </a:r>
           </a:p>
         </p:txBody>
@@ -23909,7 +23658,7 @@
                 <a:ea typeface="Arial"/>
                 <a:cs typeface="Arial"/>
               </a:rPr>
-              <a:t>A 64-bit CPU can have wider registers</a:t>
+              <a:t>Stack exhaustion and stack corruption</a:t>
             </a:r>
           </a:p>
         </p:txBody>
@@ -24145,7 +23894,7 @@
                 <a:ea typeface="Arial"/>
                 <a:cs typeface="Arial"/>
               </a:rPr>
-              <a:t>The machine’s common integer-register width does not set the maximum size of every register.</a:t>
+              <a:t>Exhaustion: too many active frames or large local allocations use up the available stack.</a:t>
             </a:r>
           </a:p>
           <a:p xmlns:a="http://schemas.openxmlformats.org/drawingml/2006/main">
@@ -24195,7 +23944,7 @@
                 <a:ea typeface="Arial"/>
                 <a:cs typeface="Arial"/>
               </a:rPr>
-              <a:t>An XMM register can hold a scalar 32-bit float even though the register itself is 128 bits wide.</a:t>
+              <a:t>Corruption: code writes outside a valid object and may overwrite nearby state.</a:t>
             </a:r>
           </a:p>
           <a:p xmlns:a="http://schemas.openxmlformats.org/drawingml/2006/main">
@@ -24245,7 +23994,7 @@
                 <a:ea typeface="Arial"/>
                 <a:cs typeface="Arial"/>
               </a:rPr>
-              <a:t>Wider extensions depend on the supported instruction set.</a:t>
+              <a:t>A canary is a marker checked for unexpected change.</a:t>
             </a:r>
           </a:p>
         </p:txBody>
@@ -24481,7 +24230,7 @@
                 <a:ea typeface="Consolas"/>
                 <a:cs typeface="Consolas"/>
               </a:rPr>
-              <a:t>x87: 80-bit floating-point registers</a:t>
+              <a:t>char word[4];</a:t>
             </a:r>
           </a:p>
           <a:p xmlns:a="http://schemas.openxmlformats.org/drawingml/2006/main">
@@ -24514,7 +24263,7 @@
                 <a:ea typeface="Consolas"/>
                 <a:cs typeface="Consolas"/>
               </a:rPr>
-              <a:t>XMM: 128 bits = 16 bytes</a:t>
+              <a:t>// Valid indexes: 0,1,2,3</a:t>
             </a:r>
           </a:p>
           <a:p xmlns:a="http://schemas.openxmlformats.org/drawingml/2006/main">
@@ -24547,7 +24296,24 @@
                 <a:ea typeface="Consolas"/>
                 <a:cs typeface="Consolas"/>
               </a:rPr>
-              <a:t>YMM: 256 bits = 32 bytes</a:t>
+              <a:t>word[4] = 0;  // invalid write</a:t>
+            </a:r>
+          </a:p>
+          <a:p xmlns:a="http://schemas.openxmlformats.org/drawingml/2006/main">
+            <a:pPr marL="0" indent="0">
+              <a:lnSpc>
+                <a:spcPct val="112000"/>
+              </a:lnSpc>
+              <a:spcBef>
+                <a:spcPts val="0"/>
+              </a:spcBef>
+              <a:spcAft>
+                <a:spcPts val="0"/>
+              </a:spcAft>
+              <a:buNone/>
+            </a:pPr>
+            <a:r>
+              <a:t/>
             </a:r>
           </a:p>
           <a:p xmlns:a="http://schemas.openxmlformats.org/drawingml/2006/main">
@@ -24580,24 +24346,7 @@
                 <a:ea typeface="Consolas"/>
                 <a:cs typeface="Consolas"/>
               </a:rPr>
-              <a:t>ZMM: 512 bits = 64 bytes (AVX-512)</a:t>
-            </a:r>
-          </a:p>
-          <a:p xmlns:a="http://schemas.openxmlformats.org/drawingml/2006/main">
-            <a:pPr marL="0" indent="0">
-              <a:lnSpc>
-                <a:spcPct val="112000"/>
-              </a:lnSpc>
-              <a:spcBef>
-                <a:spcPts val="0"/>
-              </a:spcBef>
-              <a:spcAft>
-                <a:spcPts val="0"/>
-              </a:spcAft>
-              <a:buNone/>
-            </a:pPr>
-            <a:r>
-              <a:t/>
+              <a:t>Canary: detects some overwrites</a:t>
             </a:r>
           </a:p>
           <a:p xmlns:a="http://schemas.openxmlformats.org/drawingml/2006/main">
@@ -24630,7 +24379,7 @@
                 <a:ea typeface="Consolas"/>
                 <a:cs typeface="Consolas"/>
               </a:rPr>
-              <a:t>movss / addss: low scalar FP32</a:t>
+              <a:t>ASLR: makes addresses less predictable</a:t>
             </a:r>
           </a:p>
           <a:p xmlns:a="http://schemas.openxmlformats.org/drawingml/2006/main">
@@ -24663,7 +24412,7 @@
                 <a:ea typeface="Consolas"/>
                 <a:cs typeface="Consolas"/>
               </a:rPr>
-              <a:t>movsd / addsd: low scalar FP64</a:t>
+              <a:t>NX: blocks execution from data pages</a:t>
             </a:r>
           </a:p>
         </p:txBody>
@@ -24673,7 +24422,7 @@
           <p:cNvPr id="534" name="Takeaway">
             <a:extLst xmlns:a="http://schemas.openxmlformats.org/drawingml/2006/main">
               <a:ext uri="{FF2B5EF4-FFF2-40B4-BE49-F238E27FC236}">
-                <a16:creationId xmlns:a16="http://schemas.microsoft.com/office/drawing/2014/main" id="{AA28333E-6CB8-4B96-BD6D-B29E6304A6E4}"/>
+                <a16:creationId xmlns:a16="http://schemas.microsoft.com/office/drawing/2014/main" id="{EA9276A2-46EF-4D73-8D08-46BCBA819C99}"/>
               </a:ext>
             </a:extLst>
           </p:cNvPr>
@@ -24831,7 +24580,7 @@
                 <a:ea typeface="Arial"/>
                 <a:cs typeface="Arial"/>
               </a:rPr>
-              <a:t>There is no universal “largest register = 64 bits” rule for a 64-bit system.</a:t>
+              <a:t>Why is word[4] invalid? What does an unexpectedly changed guard suggest?</a:t>
             </a:r>
           </a:p>
         </p:txBody>
@@ -25957,7 +25706,7 @@
           <p:cNvPr id="534" name="">
             <a:extLst xmlns:a="http://schemas.openxmlformats.org/drawingml/2006/main">
               <a:ext uri="{FF2B5EF4-FFF2-40B4-BE49-F238E27FC236}">
-                <a16:creationId xmlns:a16="http://schemas.microsoft.com/office/drawing/2014/main" id="{F4B48831-4BC3-47CF-964A-DFBD79F1F9F8}"/>
+                <a16:creationId xmlns:a16="http://schemas.microsoft.com/office/drawing/2014/main" id="{672C00B6-3243-4B6E-851A-44104A944240}"/>
               </a:ext>
             </a:extLst>
           </p:cNvPr>
@@ -26317,7 +26066,7 @@
           <p:cNvPr id="535" name="Takeaway">
             <a:extLst xmlns:a="http://schemas.openxmlformats.org/drawingml/2006/main">
               <a:ext uri="{FF2B5EF4-FFF2-40B4-BE49-F238E27FC236}">
-                <a16:creationId xmlns:a16="http://schemas.microsoft.com/office/drawing/2014/main" id="{2E5CD575-860C-4D98-847D-0F5EEB70EC19}"/>
+                <a16:creationId xmlns:a16="http://schemas.microsoft.com/office/drawing/2014/main" id="{77CDE3D4-3334-4EEE-BBCA-5616AEE1009D}"/>
               </a:ext>
             </a:extLst>
           </p:cNvPr>
@@ -26986,7 +26735,7 @@
                 <a:ea typeface="Arial"/>
                 <a:cs typeface="Arial"/>
               </a:rPr>
-              <a:t>Stack exhaustion and stack corruption</a:t>
+              <a:t>Hex, binary, and byte order</a:t>
             </a:r>
           </a:p>
         </p:txBody>
@@ -27222,7 +26971,7 @@
                 <a:ea typeface="Arial"/>
                 <a:cs typeface="Arial"/>
               </a:rPr>
-              <a:t>Exhaustion: too many active frames or large local allocations use up the available stack.</a:t>
+              <a:t>One hex digit represents four bits. Convert one digit at a time.</a:t>
             </a:r>
           </a:p>
           <a:p xmlns:a="http://schemas.openxmlformats.org/drawingml/2006/main">
@@ -27272,7 +27021,7 @@
                 <a:ea typeface="Arial"/>
                 <a:cs typeface="Arial"/>
               </a:rPr>
-              <a:t>Corruption: code writes outside a valid object and may overwrite nearby state.</a:t>
+              <a:t>Endianness orders bytes in memory; it does not reverse the bits within each byte.</a:t>
             </a:r>
           </a:p>
           <a:p xmlns:a="http://schemas.openxmlformats.org/drawingml/2006/main">
@@ -27322,7 +27071,7 @@
                 <a:ea typeface="Arial"/>
                 <a:cs typeface="Arial"/>
               </a:rPr>
-              <a:t>A canary is a marker checked for unexpected change.</a:t>
+              <a:t>Start at the lowest address when listing stored bytes.</a:t>
             </a:r>
           </a:p>
         </p:txBody>
@@ -27558,7 +27307,7 @@
                 <a:ea typeface="Consolas"/>
                 <a:cs typeface="Consolas"/>
               </a:rPr>
-              <a:t>char word[4];</a:t>
+              <a:t>0xD6 = 1101 0110₂</a:t>
             </a:r>
           </a:p>
           <a:p xmlns:a="http://schemas.openxmlformats.org/drawingml/2006/main">
@@ -27591,7 +27340,7 @@
                 <a:ea typeface="Consolas"/>
                 <a:cs typeface="Consolas"/>
               </a:rPr>
-              <a:t>// Valid indexes: 0,1,2,3</a:t>
+              <a:t>0x1234, low address first:</a:t>
             </a:r>
           </a:p>
           <a:p xmlns:a="http://schemas.openxmlformats.org/drawingml/2006/main">
@@ -27624,24 +27373,7 @@
                 <a:ea typeface="Consolas"/>
                 <a:cs typeface="Consolas"/>
               </a:rPr>
-              <a:t>word[4] = 0;  // invalid write</a:t>
-            </a:r>
-          </a:p>
-          <a:p xmlns:a="http://schemas.openxmlformats.org/drawingml/2006/main">
-            <a:pPr marL="0" indent="0">
-              <a:lnSpc>
-                <a:spcPct val="112000"/>
-              </a:lnSpc>
-              <a:spcBef>
-                <a:spcPts val="0"/>
-              </a:spcBef>
-              <a:spcAft>
-                <a:spcPts val="0"/>
-              </a:spcAft>
-              <a:buNone/>
-            </a:pPr>
-            <a:r>
-              <a:t/>
+              <a:t>Little endian: 34 12</a:t>
             </a:r>
           </a:p>
           <a:p xmlns:a="http://schemas.openxmlformats.org/drawingml/2006/main">
@@ -27674,7 +27406,24 @@
                 <a:ea typeface="Consolas"/>
                 <a:cs typeface="Consolas"/>
               </a:rPr>
-              <a:t>Canary: detects some overwrites</a:t>
+              <a:t>Big endian:    12 34</a:t>
+            </a:r>
+          </a:p>
+          <a:p xmlns:a="http://schemas.openxmlformats.org/drawingml/2006/main">
+            <a:pPr marL="0" indent="0">
+              <a:lnSpc>
+                <a:spcPct val="112000"/>
+              </a:lnSpc>
+              <a:spcBef>
+                <a:spcPts val="0"/>
+              </a:spcBef>
+              <a:spcAft>
+                <a:spcPts val="0"/>
+              </a:spcAft>
+              <a:buNone/>
+            </a:pPr>
+            <a:r>
+              <a:t/>
             </a:r>
           </a:p>
           <a:p xmlns:a="http://schemas.openxmlformats.org/drawingml/2006/main">
@@ -27707,7 +27456,7 @@
                 <a:ea typeface="Consolas"/>
                 <a:cs typeface="Consolas"/>
               </a:rPr>
-              <a:t>ASLR: makes addresses less predictable</a:t>
+              <a:t>Your turn:</a:t>
             </a:r>
           </a:p>
           <a:p xmlns:a="http://schemas.openxmlformats.org/drawingml/2006/main">
@@ -27740,7 +27489,40 @@
                 <a:ea typeface="Consolas"/>
                 <a:cs typeface="Consolas"/>
               </a:rPr>
-              <a:t>NX: blocks execution from data pages</a:t>
+              <a:t>1. 0xA7 in binary?</a:t>
+            </a:r>
+          </a:p>
+          <a:p xmlns:a="http://schemas.openxmlformats.org/drawingml/2006/main">
+            <a:pPr marL="0" indent="0">
+              <a:lnSpc>
+                <a:spcPct val="112000"/>
+              </a:lnSpc>
+              <a:spcBef>
+                <a:spcPts val="0"/>
+              </a:spcBef>
+              <a:spcAft>
+                <a:spcPts val="0"/>
+              </a:spcAft>
+              <a:buNone/>
+              <a:defRPr sz="1800">
+                <a:solidFill>
+                  <a:srgbClr val="FFFFFF"/>
+                </a:solidFill>
+                <a:latin typeface="Consolas"/>
+                <a:ea typeface="Consolas"/>
+                <a:cs typeface="Consolas"/>
+              </a:defRPr>
+            </a:pPr>
+            <a:r>
+              <a:rPr sz="1800">
+                <a:solidFill>
+                  <a:srgbClr val="FFFFFF"/>
+                </a:solidFill>
+                <a:latin typeface="Consolas"/>
+                <a:ea typeface="Consolas"/>
+                <a:cs typeface="Consolas"/>
+              </a:rPr>
+              <a:t>2. Bytes of 0xA7B2, little-endian?</a:t>
             </a:r>
           </a:p>
         </p:txBody>
@@ -27750,7 +27532,7 @@
           <p:cNvPr id="534" name="Takeaway">
             <a:extLst xmlns:a="http://schemas.openxmlformats.org/drawingml/2006/main">
               <a:ext uri="{FF2B5EF4-FFF2-40B4-BE49-F238E27FC236}">
-                <a16:creationId xmlns:a16="http://schemas.microsoft.com/office/drawing/2014/main" id="{00A5034E-9DBB-4D59-BB6B-D78E7035D967}"/>
+                <a16:creationId xmlns:a16="http://schemas.microsoft.com/office/drawing/2014/main" id="{9413E870-2EA1-4A77-9C6A-DFE9B20E25EE}"/>
               </a:ext>
             </a:extLst>
           </p:cNvPr>
@@ -27908,7 +27690,7 @@
                 <a:ea typeface="Arial"/>
                 <a:cs typeface="Arial"/>
               </a:rPr>
-              <a:t>Why is word[4] invalid? What does an unexpectedly changed guard suggest?</a:t>
+              <a:t>Same numeric value, different byte order in memory.</a:t>
             </a:r>
           </a:p>
         </p:txBody>
@@ -28419,7 +28201,7 @@
                 <a:ea typeface="Arial"/>
                 <a:cs typeface="Arial"/>
               </a:rPr>
-              <a:t>Hex, binary, and byte order</a:t>
+              <a:t>Signed values use the same bit patterns</a:t>
             </a:r>
           </a:p>
         </p:txBody>
@@ -28655,7 +28437,7 @@
                 <a:ea typeface="Arial"/>
                 <a:cs typeface="Arial"/>
               </a:rPr>
-              <a:t>One hex digit represents four bits. Convert one digit at a time.</a:t>
+              <a:t>n bits provide 2^n distinct patterns. Signed and unsigned interpretation assign different meanings to those patterns.</a:t>
             </a:r>
           </a:p>
           <a:p xmlns:a="http://schemas.openxmlformats.org/drawingml/2006/main">
@@ -28705,57 +28487,7 @@
                 <a:ea typeface="Arial"/>
                 <a:cs typeface="Arial"/>
               </a:rPr>
-              <a:t>Endianness orders bytes in memory; it does not reverse the bits within each byte.</a:t>
-            </a:r>
-          </a:p>
-          <a:p xmlns:a="http://schemas.openxmlformats.org/drawingml/2006/main">
-            <a:pPr marL="0" indent="0">
-              <a:lnSpc>
-                <a:spcPct val="112000"/>
-              </a:lnSpc>
-              <a:spcBef>
-                <a:spcPts val="0"/>
-              </a:spcBef>
-              <a:spcAft>
-                <a:spcPts val="0"/>
-              </a:spcAft>
-              <a:buNone/>
-            </a:pPr>
-            <a:r>
-              <a:t/>
-            </a:r>
-          </a:p>
-          <a:p xmlns:a="http://schemas.openxmlformats.org/drawingml/2006/main">
-            <a:pPr marL="0" indent="0">
-              <a:lnSpc>
-                <a:spcPct val="112000"/>
-              </a:lnSpc>
-              <a:spcBef>
-                <a:spcPts val="0"/>
-              </a:spcBef>
-              <a:spcAft>
-                <a:spcPts val="0"/>
-              </a:spcAft>
-              <a:buNone/>
-              <a:defRPr sz="1875">
-                <a:solidFill>
-                  <a:srgbClr val="FFFFFF"/>
-                </a:solidFill>
-                <a:latin typeface="Arial"/>
-                <a:ea typeface="Arial"/>
-                <a:cs typeface="Arial"/>
-              </a:defRPr>
-            </a:pPr>
-            <a:r>
-              <a:rPr sz="1875">
-                <a:solidFill>
-                  <a:srgbClr val="FFFFFF"/>
-                </a:solidFill>
-                <a:latin typeface="Arial"/>
-                <a:ea typeface="Arial"/>
-                <a:cs typeface="Arial"/>
-              </a:rPr>
-              <a:t>Start at the lowest address when listing stored bytes.</a:t>
+              <a:t>For 8-bit two’s complement, the range is −128 through 127. Negation flips the bits and adds 1, keeping 8 bits.</a:t>
             </a:r>
           </a:p>
         </p:txBody>
@@ -28991,7 +28723,7 @@
                 <a:ea typeface="Consolas"/>
                 <a:cs typeface="Consolas"/>
               </a:rPr>
-              <a:t>0xD6 = 1101 0110₂</a:t>
+              <a:t>8-bit pattern: 11111111</a:t>
             </a:r>
           </a:p>
           <a:p xmlns:a="http://schemas.openxmlformats.org/drawingml/2006/main">
@@ -29024,7 +28756,7 @@
                 <a:ea typeface="Consolas"/>
                 <a:cs typeface="Consolas"/>
               </a:rPr>
-              <a:t>0x1234, low address first:</a:t>
+              <a:t>Unsigned meaning: 255</a:t>
             </a:r>
           </a:p>
           <a:p xmlns:a="http://schemas.openxmlformats.org/drawingml/2006/main">
@@ -29057,7 +28789,24 @@
                 <a:ea typeface="Consolas"/>
                 <a:cs typeface="Consolas"/>
               </a:rPr>
-              <a:t>Little endian: 34 12</a:t>
+              <a:t>Signed meaning:   −1</a:t>
+            </a:r>
+          </a:p>
+          <a:p xmlns:a="http://schemas.openxmlformats.org/drawingml/2006/main">
+            <a:pPr marL="0" indent="0">
+              <a:lnSpc>
+                <a:spcPct val="112000"/>
+              </a:lnSpc>
+              <a:spcBef>
+                <a:spcPts val="0"/>
+              </a:spcBef>
+              <a:spcAft>
+                <a:spcPts val="0"/>
+              </a:spcAft>
+              <a:buNone/>
+            </a:pPr>
+            <a:r>
+              <a:t/>
             </a:r>
           </a:p>
           <a:p xmlns:a="http://schemas.openxmlformats.org/drawingml/2006/main">
@@ -29090,24 +28839,7 @@
                 <a:ea typeface="Consolas"/>
                 <a:cs typeface="Consolas"/>
               </a:rPr>
-              <a:t>Big endian:    12 34</a:t>
-            </a:r>
-          </a:p>
-          <a:p xmlns:a="http://schemas.openxmlformats.org/drawingml/2006/main">
-            <a:pPr marL="0" indent="0">
-              <a:lnSpc>
-                <a:spcPct val="112000"/>
-              </a:lnSpc>
-              <a:spcBef>
-                <a:spcPts val="0"/>
-              </a:spcBef>
-              <a:spcAft>
-                <a:spcPts val="0"/>
-              </a:spcAft>
-              <a:buNone/>
-            </a:pPr>
-            <a:r>
-              <a:t/>
+              <a:t>Negate 10000000 in 8 bits:</a:t>
             </a:r>
           </a:p>
           <a:p xmlns:a="http://schemas.openxmlformats.org/drawingml/2006/main">
@@ -29140,7 +28872,7 @@
                 <a:ea typeface="Consolas"/>
                 <a:cs typeface="Consolas"/>
               </a:rPr>
-              <a:t>Your turn:</a:t>
+              <a:t>Flip: 01111111</a:t>
             </a:r>
           </a:p>
           <a:p xmlns:a="http://schemas.openxmlformats.org/drawingml/2006/main">
@@ -29173,40 +28905,7 @@
                 <a:ea typeface="Consolas"/>
                 <a:cs typeface="Consolas"/>
               </a:rPr>
-              <a:t>1. 0xA7 in binary?</a:t>
-            </a:r>
-          </a:p>
-          <a:p xmlns:a="http://schemas.openxmlformats.org/drawingml/2006/main">
-            <a:pPr marL="0" indent="0">
-              <a:lnSpc>
-                <a:spcPct val="112000"/>
-              </a:lnSpc>
-              <a:spcBef>
-                <a:spcPts val="0"/>
-              </a:spcBef>
-              <a:spcAft>
-                <a:spcPts val="0"/>
-              </a:spcAft>
-              <a:buNone/>
-              <a:defRPr sz="1800">
-                <a:solidFill>
-                  <a:srgbClr val="FFFFFF"/>
-                </a:solidFill>
-                <a:latin typeface="Consolas"/>
-                <a:ea typeface="Consolas"/>
-                <a:cs typeface="Consolas"/>
-              </a:defRPr>
-            </a:pPr>
-            <a:r>
-              <a:rPr sz="1800">
-                <a:solidFill>
-                  <a:srgbClr val="FFFFFF"/>
-                </a:solidFill>
-                <a:latin typeface="Consolas"/>
-                <a:ea typeface="Consolas"/>
-                <a:cs typeface="Consolas"/>
-              </a:rPr>
-              <a:t>2. Bytes of 0xA7B2, little-endian?</a:t>
+              <a:t>Add 1: 10000000</a:t>
             </a:r>
           </a:p>
         </p:txBody>
@@ -29216,7 +28915,7 @@
           <p:cNvPr id="534" name="Takeaway">
             <a:extLst xmlns:a="http://schemas.openxmlformats.org/drawingml/2006/main">
               <a:ext uri="{FF2B5EF4-FFF2-40B4-BE49-F238E27FC236}">
-                <a16:creationId xmlns:a16="http://schemas.microsoft.com/office/drawing/2014/main" id="{C60209AE-4A8F-4407-88B7-3DAFC58FA7C5}"/>
+                <a16:creationId xmlns:a16="http://schemas.microsoft.com/office/drawing/2014/main" id="{07EEB422-E6CC-44AD-B43C-EF098E301184}"/>
               </a:ext>
             </a:extLst>
           </p:cNvPr>
@@ -29374,7 +29073,7 @@
                 <a:ea typeface="Arial"/>
                 <a:cs typeface="Arial"/>
               </a:rPr>
-              <a:t>Same numeric value, different byte order in memory.</a:t>
+              <a:t>Mathematically +128 cannot fit in a signed 8-bit result.</a:t>
             </a:r>
           </a:p>
         </p:txBody>
@@ -29885,7 +29584,7 @@
                 <a:ea typeface="Arial"/>
                 <a:cs typeface="Arial"/>
               </a:rPr>
-              <a:t>Signed values use the same bit patterns</a:t>
+              <a:t>Masks, shifts, and rotations</a:t>
             </a:r>
           </a:p>
         </p:txBody>
@@ -30121,7 +29820,7 @@
                 <a:ea typeface="Arial"/>
                 <a:cs typeface="Arial"/>
               </a:rPr>
-              <a:t>n bits provide 2^n distinct patterns. Signed and unsigned interpretation assign different meanings to those patterns.</a:t>
+              <a:t>AND keeps only bits selected by a mask. OR sets selected bits. XOR flips selected bits.</a:t>
             </a:r>
           </a:p>
           <a:p xmlns:a="http://schemas.openxmlformats.org/drawingml/2006/main">
@@ -30171,7 +29870,57 @@
                 <a:ea typeface="Arial"/>
                 <a:cs typeface="Arial"/>
               </a:rPr>
-              <a:t>For 8-bit two’s complement, the range is −128 through 127. Negation flips the bits and adds 1, keeping 8 bits.</a:t>
+              <a:t>A shift drops bits from one end. A rotation brings those bits around to the other end.</a:t>
+            </a:r>
+          </a:p>
+          <a:p xmlns:a="http://schemas.openxmlformats.org/drawingml/2006/main">
+            <a:pPr marL="0" indent="0">
+              <a:lnSpc>
+                <a:spcPct val="112000"/>
+              </a:lnSpc>
+              <a:spcBef>
+                <a:spcPts val="0"/>
+              </a:spcBef>
+              <a:spcAft>
+                <a:spcPts val="0"/>
+              </a:spcAft>
+              <a:buNone/>
+            </a:pPr>
+            <a:r>
+              <a:t/>
+            </a:r>
+          </a:p>
+          <a:p xmlns:a="http://schemas.openxmlformats.org/drawingml/2006/main">
+            <a:pPr marL="0" indent="0">
+              <a:lnSpc>
+                <a:spcPct val="112000"/>
+              </a:lnSpc>
+              <a:spcBef>
+                <a:spcPts val="0"/>
+              </a:spcBef>
+              <a:spcAft>
+                <a:spcPts val="0"/>
+              </a:spcAft>
+              <a:buNone/>
+              <a:defRPr sz="1875">
+                <a:solidFill>
+                  <a:srgbClr val="FFFFFF"/>
+                </a:solidFill>
+                <a:latin typeface="Arial"/>
+                <a:ea typeface="Arial"/>
+                <a:cs typeface="Arial"/>
+              </a:defRPr>
+            </a:pPr>
+            <a:r>
+              <a:rPr sz="1875">
+                <a:solidFill>
+                  <a:srgbClr val="FFFFFF"/>
+                </a:solidFill>
+                <a:latin typeface="Arial"/>
+                <a:ea typeface="Arial"/>
+                <a:cs typeface="Arial"/>
+              </a:rPr>
+              <a:t>Use an explicitly unsigned 8-bit model here.</a:t>
             </a:r>
           </a:p>
         </p:txBody>
@@ -30407,7 +30156,24 @@
                 <a:ea typeface="Consolas"/>
                 <a:cs typeface="Consolas"/>
               </a:rPr>
-              <a:t>8-bit pattern: 11111111</a:t>
+              <a:t>x = 0xB6 = 10110110₂</a:t>
+            </a:r>
+          </a:p>
+          <a:p xmlns:a="http://schemas.openxmlformats.org/drawingml/2006/main">
+            <a:pPr marL="0" indent="0">
+              <a:lnSpc>
+                <a:spcPct val="112000"/>
+              </a:lnSpc>
+              <a:spcBef>
+                <a:spcPts val="0"/>
+              </a:spcBef>
+              <a:spcAft>
+                <a:spcPts val="0"/>
+              </a:spcAft>
+              <a:buNone/>
+            </a:pPr>
+            <a:r>
+              <a:t/>
             </a:r>
           </a:p>
           <a:p xmlns:a="http://schemas.openxmlformats.org/drawingml/2006/main">
@@ -30440,7 +30206,7 @@
                 <a:ea typeface="Consolas"/>
                 <a:cs typeface="Consolas"/>
               </a:rPr>
-              <a:t>Unsigned meaning: 255</a:t>
+              <a:t>x &amp; 0x0F = ?</a:t>
             </a:r>
           </a:p>
           <a:p xmlns:a="http://schemas.openxmlformats.org/drawingml/2006/main">
@@ -30473,24 +30239,7 @@
                 <a:ea typeface="Consolas"/>
                 <a:cs typeface="Consolas"/>
               </a:rPr>
-              <a:t>Signed meaning:   −1</a:t>
-            </a:r>
-          </a:p>
-          <a:p xmlns:a="http://schemas.openxmlformats.org/drawingml/2006/main">
-            <a:pPr marL="0" indent="0">
-              <a:lnSpc>
-                <a:spcPct val="112000"/>
-              </a:lnSpc>
-              <a:spcBef>
-                <a:spcPts val="0"/>
-              </a:spcBef>
-              <a:spcAft>
-                <a:spcPts val="0"/>
-              </a:spcAft>
-              <a:buNone/>
-            </a:pPr>
-            <a:r>
-              <a:t/>
+              <a:t>(x &lt;&lt; 1) &amp; 0xFF = ?</a:t>
             </a:r>
           </a:p>
           <a:p xmlns:a="http://schemas.openxmlformats.org/drawingml/2006/main">
@@ -30523,73 +30272,7 @@
                 <a:ea typeface="Consolas"/>
                 <a:cs typeface="Consolas"/>
               </a:rPr>
-              <a:t>Negate 10000000 in 8 bits:</a:t>
-            </a:r>
-          </a:p>
-          <a:p xmlns:a="http://schemas.openxmlformats.org/drawingml/2006/main">
-            <a:pPr marL="0" indent="0">
-              <a:lnSpc>
-                <a:spcPct val="112000"/>
-              </a:lnSpc>
-              <a:spcBef>
-                <a:spcPts val="0"/>
-              </a:spcBef>
-              <a:spcAft>
-                <a:spcPts val="0"/>
-              </a:spcAft>
-              <a:buNone/>
-              <a:defRPr sz="1800">
-                <a:solidFill>
-                  <a:srgbClr val="FFFFFF"/>
-                </a:solidFill>
-                <a:latin typeface="Consolas"/>
-                <a:ea typeface="Consolas"/>
-                <a:cs typeface="Consolas"/>
-              </a:defRPr>
-            </a:pPr>
-            <a:r>
-              <a:rPr sz="1800">
-                <a:solidFill>
-                  <a:srgbClr val="FFFFFF"/>
-                </a:solidFill>
-                <a:latin typeface="Consolas"/>
-                <a:ea typeface="Consolas"/>
-                <a:cs typeface="Consolas"/>
-              </a:rPr>
-              <a:t>Flip: 01111111</a:t>
-            </a:r>
-          </a:p>
-          <a:p xmlns:a="http://schemas.openxmlformats.org/drawingml/2006/main">
-            <a:pPr marL="0" indent="0">
-              <a:lnSpc>
-                <a:spcPct val="112000"/>
-              </a:lnSpc>
-              <a:spcBef>
-                <a:spcPts val="0"/>
-              </a:spcBef>
-              <a:spcAft>
-                <a:spcPts val="0"/>
-              </a:spcAft>
-              <a:buNone/>
-              <a:defRPr sz="1800">
-                <a:solidFill>
-                  <a:srgbClr val="FFFFFF"/>
-                </a:solidFill>
-                <a:latin typeface="Consolas"/>
-                <a:ea typeface="Consolas"/>
-                <a:cs typeface="Consolas"/>
-              </a:defRPr>
-            </a:pPr>
-            <a:r>
-              <a:rPr sz="1800">
-                <a:solidFill>
-                  <a:srgbClr val="FFFFFF"/>
-                </a:solidFill>
-                <a:latin typeface="Consolas"/>
-                <a:ea typeface="Consolas"/>
-                <a:cs typeface="Consolas"/>
-              </a:rPr>
-              <a:t>Add 1: 10000000</a:t>
+              <a:t>Rotate left by 1 within 8 bits = ?</a:t>
             </a:r>
           </a:p>
         </p:txBody>
@@ -30599,7 +30282,7 @@
           <p:cNvPr id="534" name="Takeaway">
             <a:extLst xmlns:a="http://schemas.openxmlformats.org/drawingml/2006/main">
               <a:ext uri="{FF2B5EF4-FFF2-40B4-BE49-F238E27FC236}">
-                <a16:creationId xmlns:a16="http://schemas.microsoft.com/office/drawing/2014/main" id="{0E4A66D9-01C4-497E-8958-41A2BFD47F7F}"/>
+                <a16:creationId xmlns:a16="http://schemas.microsoft.com/office/drawing/2014/main" id="{5BA3EF08-28FD-4090-9CDC-517B88F6C82D}"/>
               </a:ext>
             </a:extLst>
           </p:cNvPr>
@@ -30757,7 +30440,7 @@
                 <a:ea typeface="Arial"/>
                 <a:cs typeface="Arial"/>
               </a:rPr>
-              <a:t>Mathematically +128 cannot fit in a signed 8-bit result.</a:t>
+              <a:t>Keep the chosen width explicit; C integer promotions do not automatically limit x &lt;&lt; 1 to 8 bits.</a:t>
             </a:r>
           </a:p>
         </p:txBody>
@@ -31268,7 +30951,7 @@
                 <a:ea typeface="Arial"/>
                 <a:cs typeface="Arial"/>
               </a:rPr>
-              <a:t>Masks, shifts, and rotations</a:t>
+              <a:t>Build a truth table one gate at a time</a:t>
             </a:r>
           </a:p>
         </p:txBody>
@@ -31504,1373 +31187,6 @@
                 <a:ea typeface="Arial"/>
                 <a:cs typeface="Arial"/>
               </a:rPr>
-              <a:t>AND keeps only bits selected by a mask. OR sets selected bits. XOR flips selected bits.</a:t>
-            </a:r>
-          </a:p>
-          <a:p xmlns:a="http://schemas.openxmlformats.org/drawingml/2006/main">
-            <a:pPr marL="0" indent="0">
-              <a:lnSpc>
-                <a:spcPct val="112000"/>
-              </a:lnSpc>
-              <a:spcBef>
-                <a:spcPts val="0"/>
-              </a:spcBef>
-              <a:spcAft>
-                <a:spcPts val="0"/>
-              </a:spcAft>
-              <a:buNone/>
-            </a:pPr>
-            <a:r>
-              <a:t/>
-            </a:r>
-          </a:p>
-          <a:p xmlns:a="http://schemas.openxmlformats.org/drawingml/2006/main">
-            <a:pPr marL="0" indent="0">
-              <a:lnSpc>
-                <a:spcPct val="112000"/>
-              </a:lnSpc>
-              <a:spcBef>
-                <a:spcPts val="0"/>
-              </a:spcBef>
-              <a:spcAft>
-                <a:spcPts val="0"/>
-              </a:spcAft>
-              <a:buNone/>
-              <a:defRPr sz="1875">
-                <a:solidFill>
-                  <a:srgbClr val="FFFFFF"/>
-                </a:solidFill>
-                <a:latin typeface="Arial"/>
-                <a:ea typeface="Arial"/>
-                <a:cs typeface="Arial"/>
-              </a:defRPr>
-            </a:pPr>
-            <a:r>
-              <a:rPr sz="1875">
-                <a:solidFill>
-                  <a:srgbClr val="FFFFFF"/>
-                </a:solidFill>
-                <a:latin typeface="Arial"/>
-                <a:ea typeface="Arial"/>
-                <a:cs typeface="Arial"/>
-              </a:rPr>
-              <a:t>A shift drops bits from one end. A rotation brings those bits around to the other end.</a:t>
-            </a:r>
-          </a:p>
-          <a:p xmlns:a="http://schemas.openxmlformats.org/drawingml/2006/main">
-            <a:pPr marL="0" indent="0">
-              <a:lnSpc>
-                <a:spcPct val="112000"/>
-              </a:lnSpc>
-              <a:spcBef>
-                <a:spcPts val="0"/>
-              </a:spcBef>
-              <a:spcAft>
-                <a:spcPts val="0"/>
-              </a:spcAft>
-              <a:buNone/>
-            </a:pPr>
-            <a:r>
-              <a:t/>
-            </a:r>
-          </a:p>
-          <a:p xmlns:a="http://schemas.openxmlformats.org/drawingml/2006/main">
-            <a:pPr marL="0" indent="0">
-              <a:lnSpc>
-                <a:spcPct val="112000"/>
-              </a:lnSpc>
-              <a:spcBef>
-                <a:spcPts val="0"/>
-              </a:spcBef>
-              <a:spcAft>
-                <a:spcPts val="0"/>
-              </a:spcAft>
-              <a:buNone/>
-              <a:defRPr sz="1875">
-                <a:solidFill>
-                  <a:srgbClr val="FFFFFF"/>
-                </a:solidFill>
-                <a:latin typeface="Arial"/>
-                <a:ea typeface="Arial"/>
-                <a:cs typeface="Arial"/>
-              </a:defRPr>
-            </a:pPr>
-            <a:r>
-              <a:rPr sz="1875">
-                <a:solidFill>
-                  <a:srgbClr val="FFFFFF"/>
-                </a:solidFill>
-                <a:latin typeface="Arial"/>
-                <a:ea typeface="Arial"/>
-                <a:cs typeface="Arial"/>
-              </a:rPr>
-              <a:t>Use an explicitly unsigned 8-bit model here.</a:t>
-            </a:r>
-          </a:p>
-        </p:txBody>
-      </p:sp>
-      <p:sp>
-        <p:nvSpPr>
-          <p:cNvPr id="8" name="Content Placeholder 3">
-            <a:extLst xmlns:a="http://schemas.openxmlformats.org/drawingml/2006/main">
-              <a:ext uri="{FF2B5EF4-FFF2-40B4-BE49-F238E27FC236}">
-                <a16:creationId xmlns:a16="http://schemas.microsoft.com/office/drawing/2014/main" id="{2EE8F343-A95F-2AAA-FE9E-A6C31E298DF7}"/>
-              </a:ext>
-            </a:extLst>
-          </p:cNvPr>
-          <p:cNvSpPr>
-            <a:spLocks xmlns:a="http://schemas.openxmlformats.org/drawingml/2006/main" noGrp="1"/>
-          </p:cNvSpPr>
-          <p:nvPr/>
-        </p:nvSpPr>
-        <p:spPr>
-          <a:xfrm xmlns:a="http://schemas.openxmlformats.org/drawingml/2006/main">
-            <a:off x="6256618" y="2031999"/>
-            <a:ext cx="5537200" cy="3534787"/>
-          </a:xfrm>
-          <a:prstGeom xmlns:a="http://schemas.openxmlformats.org/drawingml/2006/main" prst="rect">
-            <a:avLst/>
-          </a:prstGeom>
-        </p:spPr>
-        <p:txBody>
-          <a:bodyPr xmlns:a="http://schemas.openxmlformats.org/drawingml/2006/main" lIns="0" tIns="0" rIns="0" bIns="0" anchor="t">
-            <a:noAutofit/>
-          </a:bodyPr>
-          <a:lstStyle xmlns:a="http://schemas.openxmlformats.org/drawingml/2006/main">
-            <a:defPPr>
-              <a:defRPr sz="1800">
-                <a:solidFill>
-                  <a:srgbClr val="FFFFFF"/>
-                </a:solidFill>
-                <a:latin typeface="Consolas"/>
-                <a:ea typeface="Consolas"/>
-                <a:cs typeface="Consolas"/>
-              </a:defRPr>
-            </a:defPPr>
-            <a:lvl1pPr marL="228600" indent="-228600" algn="l" defTabSz="914400">
-              <a:lnSpc>
-                <a:spcPct val="90000"/>
-              </a:lnSpc>
-              <a:spcBef>
-                <a:spcPts val="1000"/>
-              </a:spcBef>
-              <a:buFont typeface="Arial"/>
-              <a:buChar char="•"/>
-              <a:defRPr sz="2400" kern="1200">
-                <a:solidFill>
-                  <a:schemeClr val="tx1"/>
-                </a:solidFill>
-                <a:latin typeface="+mn-lt"/>
-                <a:ea typeface="+mn-lt"/>
-                <a:cs typeface="+mn-lt"/>
-              </a:defRPr>
-            </a:lvl1pPr>
-            <a:lvl2pPr marL="685800" indent="-228600" algn="l" defTabSz="914400">
-              <a:lnSpc>
-                <a:spcPct val="90000"/>
-              </a:lnSpc>
-              <a:spcBef>
-                <a:spcPts val="500"/>
-              </a:spcBef>
-              <a:buFont typeface="Arial"/>
-              <a:buChar char="•"/>
-              <a:defRPr sz="2000" kern="1200">
-                <a:solidFill>
-                  <a:schemeClr val="tx1"/>
-                </a:solidFill>
-                <a:latin typeface="+mn-lt"/>
-                <a:ea typeface="+mn-lt"/>
-                <a:cs typeface="+mn-lt"/>
-              </a:defRPr>
-            </a:lvl2pPr>
-            <a:lvl3pPr marL="1143000" indent="-228600" algn="l" defTabSz="914400">
-              <a:lnSpc>
-                <a:spcPct val="90000"/>
-              </a:lnSpc>
-              <a:spcBef>
-                <a:spcPts val="500"/>
-              </a:spcBef>
-              <a:buFont typeface="Arial"/>
-              <a:buChar char="•"/>
-              <a:defRPr sz="1800" kern="1200">
-                <a:solidFill>
-                  <a:schemeClr val="tx1"/>
-                </a:solidFill>
-                <a:latin typeface="+mn-lt"/>
-                <a:ea typeface="+mn-lt"/>
-                <a:cs typeface="+mn-lt"/>
-              </a:defRPr>
-            </a:lvl3pPr>
-            <a:lvl4pPr marL="1600200" indent="-228600" algn="l" defTabSz="914400">
-              <a:lnSpc>
-                <a:spcPct val="90000"/>
-              </a:lnSpc>
-              <a:spcBef>
-                <a:spcPts val="500"/>
-              </a:spcBef>
-              <a:buFont typeface="Arial"/>
-              <a:buChar char="•"/>
-              <a:defRPr sz="1800" kern="1200">
-                <a:solidFill>
-                  <a:schemeClr val="tx1"/>
-                </a:solidFill>
-                <a:latin typeface="+mn-lt"/>
-                <a:ea typeface="+mn-lt"/>
-                <a:cs typeface="+mn-lt"/>
-              </a:defRPr>
-            </a:lvl4pPr>
-            <a:lvl5pPr marL="2057400" indent="-228600" algn="l" defTabSz="914400">
-              <a:lnSpc>
-                <a:spcPct val="90000"/>
-              </a:lnSpc>
-              <a:spcBef>
-                <a:spcPts val="500"/>
-              </a:spcBef>
-              <a:buFont typeface="Arial"/>
-              <a:buChar char="•"/>
-              <a:defRPr sz="1800" kern="1200">
-                <a:solidFill>
-                  <a:schemeClr val="tx1"/>
-                </a:solidFill>
-                <a:latin typeface="+mn-lt"/>
-                <a:ea typeface="+mn-lt"/>
-                <a:cs typeface="+mn-lt"/>
-              </a:defRPr>
-            </a:lvl5pPr>
-            <a:lvl6pPr marL="2514600" indent="-228600" algn="l" defTabSz="914400">
-              <a:lnSpc>
-                <a:spcPct val="90000"/>
-              </a:lnSpc>
-              <a:spcBef>
-                <a:spcPts val="500"/>
-              </a:spcBef>
-              <a:buFont typeface="Arial"/>
-              <a:buChar char="•"/>
-              <a:defRPr sz="1800" kern="1200">
-                <a:solidFill>
-                  <a:schemeClr val="tx1"/>
-                </a:solidFill>
-                <a:latin typeface="+mn-lt"/>
-                <a:ea typeface="+mn-lt"/>
-                <a:cs typeface="+mn-lt"/>
-              </a:defRPr>
-            </a:lvl6pPr>
-            <a:lvl7pPr marL="2971800" indent="-228600" algn="l" defTabSz="914400">
-              <a:lnSpc>
-                <a:spcPct val="90000"/>
-              </a:lnSpc>
-              <a:spcBef>
-                <a:spcPts val="500"/>
-              </a:spcBef>
-              <a:buFont typeface="Arial"/>
-              <a:buChar char="•"/>
-              <a:defRPr sz="1800" kern="1200">
-                <a:solidFill>
-                  <a:schemeClr val="tx1"/>
-                </a:solidFill>
-                <a:latin typeface="+mn-lt"/>
-                <a:ea typeface="+mn-lt"/>
-                <a:cs typeface="+mn-lt"/>
-              </a:defRPr>
-            </a:lvl7pPr>
-            <a:lvl8pPr marL="3429000" indent="-228600" algn="l" defTabSz="914400">
-              <a:lnSpc>
-                <a:spcPct val="90000"/>
-              </a:lnSpc>
-              <a:spcBef>
-                <a:spcPts val="500"/>
-              </a:spcBef>
-              <a:buFont typeface="Arial"/>
-              <a:buChar char="•"/>
-              <a:defRPr sz="1800" kern="1200">
-                <a:solidFill>
-                  <a:schemeClr val="tx1"/>
-                </a:solidFill>
-                <a:latin typeface="+mn-lt"/>
-                <a:ea typeface="+mn-lt"/>
-                <a:cs typeface="+mn-lt"/>
-              </a:defRPr>
-            </a:lvl8pPr>
-            <a:lvl9pPr marL="3886200" indent="-228600" algn="l" defTabSz="914400">
-              <a:lnSpc>
-                <a:spcPct val="90000"/>
-              </a:lnSpc>
-              <a:spcBef>
-                <a:spcPts val="500"/>
-              </a:spcBef>
-              <a:buFont typeface="Arial"/>
-              <a:buChar char="•"/>
-              <a:defRPr sz="1800" kern="1200">
-                <a:solidFill>
-                  <a:schemeClr val="tx1"/>
-                </a:solidFill>
-                <a:latin typeface="+mn-lt"/>
-                <a:ea typeface="+mn-lt"/>
-                <a:cs typeface="+mn-lt"/>
-              </a:defRPr>
-            </a:lvl9pPr>
-          </a:lstStyle>
-          <a:p xmlns:a="http://schemas.openxmlformats.org/drawingml/2006/main">
-            <a:pPr marL="0" indent="0">
-              <a:lnSpc>
-                <a:spcPct val="112000"/>
-              </a:lnSpc>
-              <a:spcBef>
-                <a:spcPts val="0"/>
-              </a:spcBef>
-              <a:spcAft>
-                <a:spcPts val="0"/>
-              </a:spcAft>
-              <a:buNone/>
-              <a:defRPr sz="1800">
-                <a:solidFill>
-                  <a:srgbClr val="FFFFFF"/>
-                </a:solidFill>
-                <a:latin typeface="Consolas"/>
-                <a:ea typeface="Consolas"/>
-                <a:cs typeface="Consolas"/>
-              </a:defRPr>
-            </a:pPr>
-            <a:r>
-              <a:rPr sz="1800">
-                <a:solidFill>
-                  <a:srgbClr val="FFFFFF"/>
-                </a:solidFill>
-                <a:latin typeface="Consolas"/>
-                <a:ea typeface="Consolas"/>
-                <a:cs typeface="Consolas"/>
-              </a:rPr>
-              <a:t>x = 0xB6 = 10110110₂</a:t>
-            </a:r>
-          </a:p>
-          <a:p xmlns:a="http://schemas.openxmlformats.org/drawingml/2006/main">
-            <a:pPr marL="0" indent="0">
-              <a:lnSpc>
-                <a:spcPct val="112000"/>
-              </a:lnSpc>
-              <a:spcBef>
-                <a:spcPts val="0"/>
-              </a:spcBef>
-              <a:spcAft>
-                <a:spcPts val="0"/>
-              </a:spcAft>
-              <a:buNone/>
-            </a:pPr>
-            <a:r>
-              <a:t/>
-            </a:r>
-          </a:p>
-          <a:p xmlns:a="http://schemas.openxmlformats.org/drawingml/2006/main">
-            <a:pPr marL="0" indent="0">
-              <a:lnSpc>
-                <a:spcPct val="112000"/>
-              </a:lnSpc>
-              <a:spcBef>
-                <a:spcPts val="0"/>
-              </a:spcBef>
-              <a:spcAft>
-                <a:spcPts val="0"/>
-              </a:spcAft>
-              <a:buNone/>
-              <a:defRPr sz="1800">
-                <a:solidFill>
-                  <a:srgbClr val="FFFFFF"/>
-                </a:solidFill>
-                <a:latin typeface="Consolas"/>
-                <a:ea typeface="Consolas"/>
-                <a:cs typeface="Consolas"/>
-              </a:defRPr>
-            </a:pPr>
-            <a:r>
-              <a:rPr sz="1800">
-                <a:solidFill>
-                  <a:srgbClr val="FFFFFF"/>
-                </a:solidFill>
-                <a:latin typeface="Consolas"/>
-                <a:ea typeface="Consolas"/>
-                <a:cs typeface="Consolas"/>
-              </a:rPr>
-              <a:t>x &amp; 0x0F = ?</a:t>
-            </a:r>
-          </a:p>
-          <a:p xmlns:a="http://schemas.openxmlformats.org/drawingml/2006/main">
-            <a:pPr marL="0" indent="0">
-              <a:lnSpc>
-                <a:spcPct val="112000"/>
-              </a:lnSpc>
-              <a:spcBef>
-                <a:spcPts val="0"/>
-              </a:spcBef>
-              <a:spcAft>
-                <a:spcPts val="0"/>
-              </a:spcAft>
-              <a:buNone/>
-              <a:defRPr sz="1800">
-                <a:solidFill>
-                  <a:srgbClr val="FFFFFF"/>
-                </a:solidFill>
-                <a:latin typeface="Consolas"/>
-                <a:ea typeface="Consolas"/>
-                <a:cs typeface="Consolas"/>
-              </a:defRPr>
-            </a:pPr>
-            <a:r>
-              <a:rPr sz="1800">
-                <a:solidFill>
-                  <a:srgbClr val="FFFFFF"/>
-                </a:solidFill>
-                <a:latin typeface="Consolas"/>
-                <a:ea typeface="Consolas"/>
-                <a:cs typeface="Consolas"/>
-              </a:rPr>
-              <a:t>(x &lt;&lt; 1) &amp; 0xFF = ?</a:t>
-            </a:r>
-          </a:p>
-          <a:p xmlns:a="http://schemas.openxmlformats.org/drawingml/2006/main">
-            <a:pPr marL="0" indent="0">
-              <a:lnSpc>
-                <a:spcPct val="112000"/>
-              </a:lnSpc>
-              <a:spcBef>
-                <a:spcPts val="0"/>
-              </a:spcBef>
-              <a:spcAft>
-                <a:spcPts val="0"/>
-              </a:spcAft>
-              <a:buNone/>
-              <a:defRPr sz="1800">
-                <a:solidFill>
-                  <a:srgbClr val="FFFFFF"/>
-                </a:solidFill>
-                <a:latin typeface="Consolas"/>
-                <a:ea typeface="Consolas"/>
-                <a:cs typeface="Consolas"/>
-              </a:defRPr>
-            </a:pPr>
-            <a:r>
-              <a:rPr sz="1800">
-                <a:solidFill>
-                  <a:srgbClr val="FFFFFF"/>
-                </a:solidFill>
-                <a:latin typeface="Consolas"/>
-                <a:ea typeface="Consolas"/>
-                <a:cs typeface="Consolas"/>
-              </a:rPr>
-              <a:t>Rotate left by 1 within 8 bits = ?</a:t>
-            </a:r>
-          </a:p>
-        </p:txBody>
-      </p:sp>
-      <p:sp>
-        <p:nvSpPr>
-          <p:cNvPr id="534" name="Takeaway">
-            <a:extLst xmlns:a="http://schemas.openxmlformats.org/drawingml/2006/main">
-              <a:ext uri="{FF2B5EF4-FFF2-40B4-BE49-F238E27FC236}">
-                <a16:creationId xmlns:a16="http://schemas.microsoft.com/office/drawing/2014/main" id="{47C09AB8-6FD2-4BD7-B7C4-71FD7E7B5289}"/>
-              </a:ext>
-            </a:extLst>
-          </p:cNvPr>
-          <p:cNvSpPr>
-            <a:spLocks xmlns:a="http://schemas.openxmlformats.org/drawingml/2006/main" noGrp="1"/>
-          </p:cNvSpPr>
-          <p:nvPr/>
-        </p:nvSpPr>
-        <p:spPr>
-          <a:xfrm xmlns:a="http://schemas.openxmlformats.org/drawingml/2006/main">
-            <a:off x="393668" y="5715000"/>
-            <a:ext cx="11404283" cy="466725"/>
-          </a:xfrm>
-          <a:prstGeom xmlns:a="http://schemas.openxmlformats.org/drawingml/2006/main" prst="rect">
-            <a:avLst/>
-          </a:prstGeom>
-          <a:noFill xmlns:a="http://schemas.openxmlformats.org/drawingml/2006/main"/>
-          <a:ln xmlns:a="http://schemas.openxmlformats.org/drawingml/2006/main" w="0">
-            <a:noFill/>
-          </a:ln>
-        </p:spPr>
-        <p:txBody>
-          <a:bodyPr xmlns:a="http://schemas.openxmlformats.org/drawingml/2006/main" lIns="0" tIns="0" rIns="0" bIns="0" anchor="t">
-            <a:noAutofit/>
-          </a:bodyPr>
-          <a:lstStyle xmlns:a="http://schemas.openxmlformats.org/drawingml/2006/main">
-            <a:defPPr>
-              <a:defRPr sz="1350">
-                <a:solidFill>
-                  <a:srgbClr val="CCCCCC"/>
-                </a:solidFill>
-                <a:latin typeface="Arial"/>
-                <a:ea typeface="Arial"/>
-                <a:cs typeface="Arial"/>
-              </a:defRPr>
-            </a:defPPr>
-            <a:lvl1pPr>
-              <a:defRPr sz="1350">
-                <a:solidFill>
-                  <a:srgbClr val="CCCCCC"/>
-                </a:solidFill>
-                <a:latin typeface="Arial"/>
-                <a:ea typeface="Arial"/>
-                <a:cs typeface="Arial"/>
-              </a:defRPr>
-            </a:lvl1pPr>
-            <a:lvl2pPr>
-              <a:defRPr sz="1350">
-                <a:solidFill>
-                  <a:srgbClr val="CCCCCC"/>
-                </a:solidFill>
-                <a:latin typeface="Arial"/>
-                <a:ea typeface="Arial"/>
-                <a:cs typeface="Arial"/>
-              </a:defRPr>
-            </a:lvl2pPr>
-            <a:lvl3pPr>
-              <a:defRPr sz="1350">
-                <a:solidFill>
-                  <a:srgbClr val="CCCCCC"/>
-                </a:solidFill>
-                <a:latin typeface="Arial"/>
-                <a:ea typeface="Arial"/>
-                <a:cs typeface="Arial"/>
-              </a:defRPr>
-            </a:lvl3pPr>
-            <a:lvl4pPr>
-              <a:defRPr sz="1350">
-                <a:solidFill>
-                  <a:srgbClr val="CCCCCC"/>
-                </a:solidFill>
-                <a:latin typeface="Arial"/>
-                <a:ea typeface="Arial"/>
-                <a:cs typeface="Arial"/>
-              </a:defRPr>
-            </a:lvl4pPr>
-            <a:lvl5pPr>
-              <a:defRPr sz="1350">
-                <a:solidFill>
-                  <a:srgbClr val="CCCCCC"/>
-                </a:solidFill>
-                <a:latin typeface="Arial"/>
-                <a:ea typeface="Arial"/>
-                <a:cs typeface="Arial"/>
-              </a:defRPr>
-            </a:lvl5pPr>
-            <a:lvl6pPr>
-              <a:defRPr sz="1350">
-                <a:solidFill>
-                  <a:srgbClr val="CCCCCC"/>
-                </a:solidFill>
-                <a:latin typeface="Arial"/>
-                <a:ea typeface="Arial"/>
-                <a:cs typeface="Arial"/>
-              </a:defRPr>
-            </a:lvl6pPr>
-            <a:lvl7pPr>
-              <a:defRPr sz="1350">
-                <a:solidFill>
-                  <a:srgbClr val="CCCCCC"/>
-                </a:solidFill>
-                <a:latin typeface="Arial"/>
-                <a:ea typeface="Arial"/>
-                <a:cs typeface="Arial"/>
-              </a:defRPr>
-            </a:lvl7pPr>
-            <a:lvl8pPr>
-              <a:defRPr sz="1350">
-                <a:solidFill>
-                  <a:srgbClr val="CCCCCC"/>
-                </a:solidFill>
-                <a:latin typeface="Arial"/>
-                <a:ea typeface="Arial"/>
-                <a:cs typeface="Arial"/>
-              </a:defRPr>
-            </a:lvl8pPr>
-            <a:lvl9pPr>
-              <a:defRPr sz="1350">
-                <a:solidFill>
-                  <a:srgbClr val="CCCCCC"/>
-                </a:solidFill>
-                <a:latin typeface="Arial"/>
-                <a:ea typeface="Arial"/>
-                <a:cs typeface="Arial"/>
-              </a:defRPr>
-            </a:lvl9pPr>
-          </a:lstStyle>
-          <a:p xmlns:a="http://schemas.openxmlformats.org/drawingml/2006/main">
-            <a:pPr marL="0" indent="0">
-              <a:lnSpc>
-                <a:spcPct val="112000"/>
-              </a:lnSpc>
-              <a:spcBef>
-                <a:spcPts val="0"/>
-              </a:spcBef>
-              <a:spcAft>
-                <a:spcPts val="0"/>
-              </a:spcAft>
-              <a:buNone/>
-              <a:defRPr sz="1350">
-                <a:solidFill>
-                  <a:srgbClr val="CCCCCC"/>
-                </a:solidFill>
-                <a:latin typeface="Arial"/>
-                <a:ea typeface="Arial"/>
-                <a:cs typeface="Arial"/>
-              </a:defRPr>
-            </a:pPr>
-            <a:r>
-              <a:rPr sz="1350">
-                <a:solidFill>
-                  <a:srgbClr val="CCCCCC"/>
-                </a:solidFill>
-                <a:latin typeface="Arial"/>
-                <a:ea typeface="Arial"/>
-                <a:cs typeface="Arial"/>
-              </a:rPr>
-              <a:t>Keep the chosen width explicit; C integer promotions do not automatically limit x &lt;&lt; 1 to 8 bits.</a:t>
-            </a:r>
-          </a:p>
-        </p:txBody>
-      </p:sp>
-    </p:spTree>
-    <p:extLst>
-      <p:ext uri="{BB962C8B-B14F-4D97-AF65-F5344CB8AC3E}">
-        <p14:creationId xmlns:p14="http://schemas.microsoft.com/office/powerpoint/2010/main" val="3667182145"/>
-      </p:ext>
-    </p:extLst>
-  </p:cSld>
-</p:sld>
-</file>
-
-<file path=ppt/slides/slide24.xml><?xml version="1.0" encoding="utf-8"?>
-<p:sld xmlns:p="http://schemas.openxmlformats.org/presentationml/2006/main">
-  <p:cSld>
-    <p:spTree>
-      <p:nvGrpSpPr>
-        <p:cNvPr id="1" name=""/>
-        <p:cNvGrpSpPr/>
-        <p:nvPr/>
-      </p:nvGrpSpPr>
-      <p:grpSpPr>
-        <a:xfrm xmlns:a="http://schemas.openxmlformats.org/drawingml/2006/main"/>
-      </p:grpSpPr>
-      <p:sp>
-        <p:nvSpPr>
-          <p:cNvPr id="3" name="Footer Placeholder 2">
-            <a:extLst xmlns:a="http://schemas.openxmlformats.org/drawingml/2006/main">
-              <a:ext uri="{FF2B5EF4-FFF2-40B4-BE49-F238E27FC236}">
-                <a16:creationId xmlns:a16="http://schemas.microsoft.com/office/drawing/2014/main" id="{39EA4C82-C623-0196-4A95-876ADF5DEE92}"/>
-              </a:ext>
-            </a:extLst>
-          </p:cNvPr>
-          <p:cNvSpPr>
-            <a:spLocks xmlns:a="http://schemas.openxmlformats.org/drawingml/2006/main" noGrp="1"/>
-          </p:cNvSpPr>
-          <p:nvPr>
-            <p:ph type="ftr" idx="3"/>
-          </p:nvPr>
-        </p:nvSpPr>
-        <p:spPr>
-          <a:xfrm xmlns:a="http://schemas.openxmlformats.org/drawingml/2006/main">
-            <a:off x="393700" y="6279952"/>
-            <a:ext cx="3568700" cy="241240"/>
-          </a:xfrm>
-        </p:spPr>
-        <p:txBody>
-          <a:bodyPr xmlns:a="http://schemas.openxmlformats.org/drawingml/2006/main" lIns="0" tIns="0" rIns="0" bIns="0" anchor="t">
-            <a:noAutofit/>
-          </a:bodyPr>
-          <a:lstStyle xmlns:a="http://schemas.openxmlformats.org/drawingml/2006/main">
-            <a:defPPr>
-              <a:defRPr sz="1125">
-                <a:solidFill>
-                  <a:srgbClr val="FFFFFF"/>
-                </a:solidFill>
-                <a:latin typeface="Arial"/>
-                <a:ea typeface="Arial"/>
-                <a:cs typeface="Arial"/>
-              </a:defRPr>
-            </a:defPPr>
-            <a:lvl1pPr>
-              <a:defRPr sz="1125">
-                <a:solidFill>
-                  <a:srgbClr val="FFFFFF"/>
-                </a:solidFill>
-                <a:latin typeface="Arial"/>
-                <a:ea typeface="Arial"/>
-                <a:cs typeface="Arial"/>
-              </a:defRPr>
-            </a:lvl1pPr>
-            <a:lvl2pPr>
-              <a:defRPr sz="1125">
-                <a:solidFill>
-                  <a:srgbClr val="FFFFFF"/>
-                </a:solidFill>
-                <a:latin typeface="Arial"/>
-                <a:ea typeface="Arial"/>
-                <a:cs typeface="Arial"/>
-              </a:defRPr>
-            </a:lvl2pPr>
-            <a:lvl3pPr>
-              <a:defRPr sz="1125">
-                <a:solidFill>
-                  <a:srgbClr val="FFFFFF"/>
-                </a:solidFill>
-                <a:latin typeface="Arial"/>
-                <a:ea typeface="Arial"/>
-                <a:cs typeface="Arial"/>
-              </a:defRPr>
-            </a:lvl3pPr>
-            <a:lvl4pPr>
-              <a:defRPr sz="1125">
-                <a:solidFill>
-                  <a:srgbClr val="FFFFFF"/>
-                </a:solidFill>
-                <a:latin typeface="Arial"/>
-                <a:ea typeface="Arial"/>
-                <a:cs typeface="Arial"/>
-              </a:defRPr>
-            </a:lvl4pPr>
-            <a:lvl5pPr>
-              <a:defRPr sz="1125">
-                <a:solidFill>
-                  <a:srgbClr val="FFFFFF"/>
-                </a:solidFill>
-                <a:latin typeface="Arial"/>
-                <a:ea typeface="Arial"/>
-                <a:cs typeface="Arial"/>
-              </a:defRPr>
-            </a:lvl5pPr>
-            <a:lvl6pPr>
-              <a:defRPr sz="1125">
-                <a:solidFill>
-                  <a:srgbClr val="FFFFFF"/>
-                </a:solidFill>
-                <a:latin typeface="Arial"/>
-                <a:ea typeface="Arial"/>
-                <a:cs typeface="Arial"/>
-              </a:defRPr>
-            </a:lvl6pPr>
-            <a:lvl7pPr>
-              <a:defRPr sz="1125">
-                <a:solidFill>
-                  <a:srgbClr val="FFFFFF"/>
-                </a:solidFill>
-                <a:latin typeface="Arial"/>
-                <a:ea typeface="Arial"/>
-                <a:cs typeface="Arial"/>
-              </a:defRPr>
-            </a:lvl7pPr>
-            <a:lvl8pPr>
-              <a:defRPr sz="1125">
-                <a:solidFill>
-                  <a:srgbClr val="FFFFFF"/>
-                </a:solidFill>
-                <a:latin typeface="Arial"/>
-                <a:ea typeface="Arial"/>
-                <a:cs typeface="Arial"/>
-              </a:defRPr>
-            </a:lvl8pPr>
-            <a:lvl9pPr>
-              <a:defRPr sz="1125">
-                <a:solidFill>
-                  <a:srgbClr val="FFFFFF"/>
-                </a:solidFill>
-                <a:latin typeface="Arial"/>
-                <a:ea typeface="Arial"/>
-                <a:cs typeface="Arial"/>
-              </a:defRPr>
-            </a:lvl9pPr>
-          </a:lstStyle>
-          <a:p xmlns:a="http://schemas.openxmlformats.org/drawingml/2006/main">
-            <a:pPr marL="0" indent="0">
-              <a:lnSpc>
-                <a:spcPct val="112000"/>
-              </a:lnSpc>
-              <a:spcBef>
-                <a:spcPts val="0"/>
-              </a:spcBef>
-              <a:spcAft>
-                <a:spcPts val="0"/>
-              </a:spcAft>
-              <a:buNone/>
-              <a:defRPr sz="1125">
-                <a:solidFill>
-                  <a:srgbClr val="FFFFFF"/>
-                </a:solidFill>
-                <a:latin typeface="Arial"/>
-                <a:ea typeface="Arial"/>
-                <a:cs typeface="Arial"/>
-              </a:defRPr>
-            </a:pPr>
-            <a:r>
-              <a:rPr sz="1125">
-                <a:solidFill>
-                  <a:srgbClr val="FFFFFF"/>
-                </a:solidFill>
-                <a:latin typeface="Arial"/>
-                <a:ea typeface="Arial"/>
-                <a:cs typeface="Arial"/>
-              </a:rPr>
-              <a:t>CS 211 · Recitation 07</a:t>
-            </a:r>
-          </a:p>
-        </p:txBody>
-      </p:sp>
-      <p:sp>
-        <p:nvSpPr>
-          <p:cNvPr id="532" name="Google Shape;532;p58">
-            <a:extLst xmlns:a="http://schemas.openxmlformats.org/drawingml/2006/main">
-              <a:ext uri="{FF2B5EF4-FFF2-40B4-BE49-F238E27FC236}">
-                <a16:creationId xmlns:a16="http://schemas.microsoft.com/office/drawing/2014/main" id="{1BCBE750-7048-686D-1472-52C53362D6CD}"/>
-              </a:ext>
-            </a:extLst>
-          </p:cNvPr>
-          <p:cNvSpPr>
-            <a:spLocks xmlns:a="http://schemas.openxmlformats.org/drawingml/2006/main" noGrp="1"/>
-          </p:cNvSpPr>
-          <p:nvPr>
-            <p:ph type="sldNum" idx="4"/>
-          </p:nvPr>
-        </p:nvSpPr>
-        <p:spPr>
-          <a:xfrm xmlns:a="http://schemas.openxmlformats.org/drawingml/2006/main">
-            <a:off x="11279332" y="6279294"/>
-            <a:ext cx="518968" cy="241240"/>
-          </a:xfrm>
-        </p:spPr>
-        <p:txBody>
-          <a:bodyPr xmlns:a="http://schemas.openxmlformats.org/drawingml/2006/main" spcFirstLastPara="1" vert="horz" wrap="square" lIns="0" tIns="0" rIns="0" bIns="0" anchor="t">
-            <a:noAutofit/>
-          </a:bodyPr>
-          <a:lstStyle xmlns:a="http://schemas.openxmlformats.org/drawingml/2006/main">
-            <a:defPPr>
-              <a:defRPr sz="1125">
-                <a:solidFill>
-                  <a:srgbClr val="FFFFFF"/>
-                </a:solidFill>
-                <a:latin typeface="Arial"/>
-                <a:ea typeface="Arial"/>
-                <a:cs typeface="Arial"/>
-              </a:defRPr>
-            </a:defPPr>
-            <a:lvl1pPr>
-              <a:defRPr sz="1125">
-                <a:solidFill>
-                  <a:srgbClr val="FFFFFF"/>
-                </a:solidFill>
-                <a:latin typeface="Arial"/>
-                <a:ea typeface="Arial"/>
-                <a:cs typeface="Arial"/>
-              </a:defRPr>
-            </a:lvl1pPr>
-            <a:lvl2pPr>
-              <a:defRPr sz="1125">
-                <a:solidFill>
-                  <a:srgbClr val="FFFFFF"/>
-                </a:solidFill>
-                <a:latin typeface="Arial"/>
-                <a:ea typeface="Arial"/>
-                <a:cs typeface="Arial"/>
-              </a:defRPr>
-            </a:lvl2pPr>
-            <a:lvl3pPr>
-              <a:defRPr sz="1125">
-                <a:solidFill>
-                  <a:srgbClr val="FFFFFF"/>
-                </a:solidFill>
-                <a:latin typeface="Arial"/>
-                <a:ea typeface="Arial"/>
-                <a:cs typeface="Arial"/>
-              </a:defRPr>
-            </a:lvl3pPr>
-            <a:lvl4pPr>
-              <a:defRPr sz="1125">
-                <a:solidFill>
-                  <a:srgbClr val="FFFFFF"/>
-                </a:solidFill>
-                <a:latin typeface="Arial"/>
-                <a:ea typeface="Arial"/>
-                <a:cs typeface="Arial"/>
-              </a:defRPr>
-            </a:lvl4pPr>
-            <a:lvl5pPr>
-              <a:defRPr sz="1125">
-                <a:solidFill>
-                  <a:srgbClr val="FFFFFF"/>
-                </a:solidFill>
-                <a:latin typeface="Arial"/>
-                <a:ea typeface="Arial"/>
-                <a:cs typeface="Arial"/>
-              </a:defRPr>
-            </a:lvl5pPr>
-            <a:lvl6pPr>
-              <a:defRPr sz="1125">
-                <a:solidFill>
-                  <a:srgbClr val="FFFFFF"/>
-                </a:solidFill>
-                <a:latin typeface="Arial"/>
-                <a:ea typeface="Arial"/>
-                <a:cs typeface="Arial"/>
-              </a:defRPr>
-            </a:lvl6pPr>
-            <a:lvl7pPr>
-              <a:defRPr sz="1125">
-                <a:solidFill>
-                  <a:srgbClr val="FFFFFF"/>
-                </a:solidFill>
-                <a:latin typeface="Arial"/>
-                <a:ea typeface="Arial"/>
-                <a:cs typeface="Arial"/>
-              </a:defRPr>
-            </a:lvl7pPr>
-            <a:lvl8pPr>
-              <a:defRPr sz="1125">
-                <a:solidFill>
-                  <a:srgbClr val="FFFFFF"/>
-                </a:solidFill>
-                <a:latin typeface="Arial"/>
-                <a:ea typeface="Arial"/>
-                <a:cs typeface="Arial"/>
-              </a:defRPr>
-            </a:lvl8pPr>
-            <a:lvl9pPr>
-              <a:defRPr sz="1125">
-                <a:solidFill>
-                  <a:srgbClr val="FFFFFF"/>
-                </a:solidFill>
-                <a:latin typeface="Arial"/>
-                <a:ea typeface="Arial"/>
-                <a:cs typeface="Arial"/>
-              </a:defRPr>
-            </a:lvl9pPr>
-          </a:lstStyle>
-          <a:p xmlns:a="http://schemas.openxmlformats.org/drawingml/2006/main">
-            <a:pPr marL="0" indent="0">
-              <a:lnSpc>
-                <a:spcPct val="112000"/>
-              </a:lnSpc>
-              <a:spcBef>
-                <a:spcPts val="0"/>
-              </a:spcBef>
-              <a:spcAft>
-                <a:spcPts val="0"/>
-              </a:spcAft>
-              <a:buNone/>
-              <a:defRPr sz="1125">
-                <a:solidFill>
-                  <a:srgbClr val="FFFFFF"/>
-                </a:solidFill>
-                <a:latin typeface="Arial"/>
-                <a:ea typeface="Arial"/>
-                <a:cs typeface="Arial"/>
-              </a:defRPr>
-            </a:pPr>
-            <a:r>
-              <a:rPr sz="1125">
-                <a:solidFill>
-                  <a:srgbClr val="FFFFFF"/>
-                </a:solidFill>
-                <a:latin typeface="Arial"/>
-                <a:ea typeface="Arial"/>
-                <a:cs typeface="Arial"/>
-              </a:rPr>
-              <a:t>24</a:t>
-            </a:r>
-          </a:p>
-        </p:txBody>
-      </p:sp>
-      <p:sp>
-        <p:nvSpPr>
-          <p:cNvPr id="533" name="Google Shape;533;p58">
-            <a:extLst xmlns:a="http://schemas.openxmlformats.org/drawingml/2006/main">
-              <a:ext uri="{FF2B5EF4-FFF2-40B4-BE49-F238E27FC236}">
-                <a16:creationId xmlns:a16="http://schemas.microsoft.com/office/drawing/2014/main" id="{1B5D55CD-1C17-7CD8-F26A-2DD65B067687}"/>
-              </a:ext>
-            </a:extLst>
-          </p:cNvPr>
-          <p:cNvSpPr>
-            <a:spLocks xmlns:a="http://schemas.openxmlformats.org/drawingml/2006/main" noGrp="1"/>
-          </p:cNvSpPr>
-          <p:nvPr>
-            <p:ph type="title" idx="0"/>
-          </p:nvPr>
-        </p:nvSpPr>
-        <p:spPr>
-          <a:xfrm xmlns:a="http://schemas.openxmlformats.org/drawingml/2006/main">
-            <a:off x="393700" y="344008"/>
-            <a:ext cx="11404600" cy="1047491"/>
-          </a:xfrm>
-        </p:spPr>
-        <p:txBody>
-          <a:bodyPr xmlns:a="http://schemas.openxmlformats.org/drawingml/2006/main" spcFirstLastPara="1" vert="horz" wrap="square" lIns="0" tIns="0" rIns="0" bIns="0" anchor="t">
-            <a:noAutofit/>
-          </a:bodyPr>
-          <a:lstStyle xmlns:a="http://schemas.openxmlformats.org/drawingml/2006/main">
-            <a:defPPr>
-              <a:defRPr sz="3150">
-                <a:solidFill>
-                  <a:srgbClr val="FFFFFF"/>
-                </a:solidFill>
-                <a:latin typeface="Arial"/>
-                <a:ea typeface="Arial"/>
-                <a:cs typeface="Arial"/>
-              </a:defRPr>
-            </a:defPPr>
-            <a:lvl1pPr>
-              <a:defRPr sz="3150">
-                <a:solidFill>
-                  <a:srgbClr val="FFFFFF"/>
-                </a:solidFill>
-                <a:latin typeface="Arial"/>
-                <a:ea typeface="Arial"/>
-                <a:cs typeface="Arial"/>
-              </a:defRPr>
-            </a:lvl1pPr>
-            <a:lvl2pPr>
-              <a:defRPr sz="3150">
-                <a:solidFill>
-                  <a:srgbClr val="FFFFFF"/>
-                </a:solidFill>
-                <a:latin typeface="Arial"/>
-                <a:ea typeface="Arial"/>
-                <a:cs typeface="Arial"/>
-              </a:defRPr>
-            </a:lvl2pPr>
-            <a:lvl3pPr>
-              <a:defRPr sz="3150">
-                <a:solidFill>
-                  <a:srgbClr val="FFFFFF"/>
-                </a:solidFill>
-                <a:latin typeface="Arial"/>
-                <a:ea typeface="Arial"/>
-                <a:cs typeface="Arial"/>
-              </a:defRPr>
-            </a:lvl3pPr>
-            <a:lvl4pPr>
-              <a:defRPr sz="3150">
-                <a:solidFill>
-                  <a:srgbClr val="FFFFFF"/>
-                </a:solidFill>
-                <a:latin typeface="Arial"/>
-                <a:ea typeface="Arial"/>
-                <a:cs typeface="Arial"/>
-              </a:defRPr>
-            </a:lvl4pPr>
-            <a:lvl5pPr>
-              <a:defRPr sz="3150">
-                <a:solidFill>
-                  <a:srgbClr val="FFFFFF"/>
-                </a:solidFill>
-                <a:latin typeface="Arial"/>
-                <a:ea typeface="Arial"/>
-                <a:cs typeface="Arial"/>
-              </a:defRPr>
-            </a:lvl5pPr>
-            <a:lvl6pPr>
-              <a:defRPr sz="3150">
-                <a:solidFill>
-                  <a:srgbClr val="FFFFFF"/>
-                </a:solidFill>
-                <a:latin typeface="Arial"/>
-                <a:ea typeface="Arial"/>
-                <a:cs typeface="Arial"/>
-              </a:defRPr>
-            </a:lvl6pPr>
-            <a:lvl7pPr>
-              <a:defRPr sz="3150">
-                <a:solidFill>
-                  <a:srgbClr val="FFFFFF"/>
-                </a:solidFill>
-                <a:latin typeface="Arial"/>
-                <a:ea typeface="Arial"/>
-                <a:cs typeface="Arial"/>
-              </a:defRPr>
-            </a:lvl7pPr>
-            <a:lvl8pPr>
-              <a:defRPr sz="3150">
-                <a:solidFill>
-                  <a:srgbClr val="FFFFFF"/>
-                </a:solidFill>
-                <a:latin typeface="Arial"/>
-                <a:ea typeface="Arial"/>
-                <a:cs typeface="Arial"/>
-              </a:defRPr>
-            </a:lvl8pPr>
-            <a:lvl9pPr>
-              <a:defRPr sz="3150">
-                <a:solidFill>
-                  <a:srgbClr val="FFFFFF"/>
-                </a:solidFill>
-                <a:latin typeface="Arial"/>
-                <a:ea typeface="Arial"/>
-                <a:cs typeface="Arial"/>
-              </a:defRPr>
-            </a:lvl9pPr>
-          </a:lstStyle>
-          <a:p xmlns:a="http://schemas.openxmlformats.org/drawingml/2006/main">
-            <a:pPr marL="0" indent="0">
-              <a:lnSpc>
-                <a:spcPct val="112000"/>
-              </a:lnSpc>
-              <a:spcBef>
-                <a:spcPts val="0"/>
-              </a:spcBef>
-              <a:spcAft>
-                <a:spcPts val="0"/>
-              </a:spcAft>
-              <a:buNone/>
-              <a:defRPr sz="3150">
-                <a:solidFill>
-                  <a:srgbClr val="FFFFFF"/>
-                </a:solidFill>
-                <a:latin typeface="Arial"/>
-                <a:ea typeface="Arial"/>
-                <a:cs typeface="Arial"/>
-              </a:defRPr>
-            </a:pPr>
-            <a:r>
-              <a:rPr sz="3150">
-                <a:solidFill>
-                  <a:srgbClr val="FFFFFF"/>
-                </a:solidFill>
-                <a:latin typeface="Arial"/>
-                <a:ea typeface="Arial"/>
-                <a:cs typeface="Arial"/>
-              </a:rPr>
-              <a:t>Build a truth table one gate at a time</a:t>
-            </a:r>
-          </a:p>
-        </p:txBody>
-      </p:sp>
-      <p:sp>
-        <p:nvSpPr>
-          <p:cNvPr id="7" name="Google Shape;534;p58">
-            <a:extLst xmlns:a="http://schemas.openxmlformats.org/drawingml/2006/main">
-              <a:ext uri="{FF2B5EF4-FFF2-40B4-BE49-F238E27FC236}">
-                <a16:creationId xmlns:a16="http://schemas.microsoft.com/office/drawing/2014/main" id="{3A923FEE-B8D2-CD3A-ABBD-21770B40AA24}"/>
-              </a:ext>
-            </a:extLst>
-          </p:cNvPr>
-          <p:cNvSpPr>
-            <a:spLocks xmlns:a="http://schemas.openxmlformats.org/drawingml/2006/main" noGrp="1"/>
-          </p:cNvSpPr>
-          <p:nvPr/>
-        </p:nvSpPr>
-        <p:spPr>
-          <a:xfrm xmlns:a="http://schemas.openxmlformats.org/drawingml/2006/main">
-            <a:off x="393700" y="2031999"/>
-            <a:ext cx="5537200" cy="3534787"/>
-          </a:xfrm>
-          <a:prstGeom xmlns:a="http://schemas.openxmlformats.org/drawingml/2006/main" prst="rect">
-            <a:avLst/>
-          </a:prstGeom>
-        </p:spPr>
-        <p:txBody>
-          <a:bodyPr xmlns:a="http://schemas.openxmlformats.org/drawingml/2006/main" spcFirstLastPara="1" vert="horz" wrap="square" lIns="0" tIns="0" rIns="0" bIns="0" anchor="t">
-            <a:noAutofit/>
-          </a:bodyPr>
-          <a:lstStyle xmlns:a="http://schemas.openxmlformats.org/drawingml/2006/main">
-            <a:defPPr>
-              <a:defRPr sz="1875">
-                <a:solidFill>
-                  <a:srgbClr val="FFFFFF"/>
-                </a:solidFill>
-                <a:latin typeface="Arial"/>
-                <a:ea typeface="Arial"/>
-                <a:cs typeface="Arial"/>
-              </a:defRPr>
-            </a:defPPr>
-            <a:lvl1pPr marL="228600" indent="-228600" algn="l" defTabSz="914400">
-              <a:lnSpc>
-                <a:spcPct val="90000"/>
-              </a:lnSpc>
-              <a:spcBef>
-                <a:spcPts val="1000"/>
-              </a:spcBef>
-              <a:buFont typeface="Arial"/>
-              <a:buChar char="•"/>
-              <a:defRPr sz="2400" kern="1200">
-                <a:solidFill>
-                  <a:schemeClr val="tx1"/>
-                </a:solidFill>
-                <a:latin typeface="+mn-lt"/>
-                <a:ea typeface="+mn-lt"/>
-                <a:cs typeface="+mn-lt"/>
-              </a:defRPr>
-            </a:lvl1pPr>
-            <a:lvl2pPr marL="685800" indent="-228600" algn="l" defTabSz="914400">
-              <a:lnSpc>
-                <a:spcPct val="90000"/>
-              </a:lnSpc>
-              <a:spcBef>
-                <a:spcPts val="500"/>
-              </a:spcBef>
-              <a:buFont typeface="Arial"/>
-              <a:buChar char="•"/>
-              <a:defRPr sz="2000" kern="1200">
-                <a:solidFill>
-                  <a:schemeClr val="tx1"/>
-                </a:solidFill>
-                <a:latin typeface="+mn-lt"/>
-                <a:ea typeface="+mn-lt"/>
-                <a:cs typeface="+mn-lt"/>
-              </a:defRPr>
-            </a:lvl2pPr>
-            <a:lvl3pPr marL="1143000" indent="-228600" algn="l" defTabSz="914400">
-              <a:lnSpc>
-                <a:spcPct val="90000"/>
-              </a:lnSpc>
-              <a:spcBef>
-                <a:spcPts val="500"/>
-              </a:spcBef>
-              <a:buFont typeface="Arial"/>
-              <a:buChar char="•"/>
-              <a:defRPr sz="1800" kern="1200">
-                <a:solidFill>
-                  <a:schemeClr val="tx1"/>
-                </a:solidFill>
-                <a:latin typeface="+mn-lt"/>
-                <a:ea typeface="+mn-lt"/>
-                <a:cs typeface="+mn-lt"/>
-              </a:defRPr>
-            </a:lvl3pPr>
-            <a:lvl4pPr marL="1600200" indent="-228600" algn="l" defTabSz="914400">
-              <a:lnSpc>
-                <a:spcPct val="90000"/>
-              </a:lnSpc>
-              <a:spcBef>
-                <a:spcPts val="500"/>
-              </a:spcBef>
-              <a:buFont typeface="Arial"/>
-              <a:buChar char="•"/>
-              <a:defRPr sz="1800" kern="1200">
-                <a:solidFill>
-                  <a:schemeClr val="tx1"/>
-                </a:solidFill>
-                <a:latin typeface="+mn-lt"/>
-                <a:ea typeface="+mn-lt"/>
-                <a:cs typeface="+mn-lt"/>
-              </a:defRPr>
-            </a:lvl4pPr>
-            <a:lvl5pPr marL="2057400" indent="-228600" algn="l" defTabSz="914400">
-              <a:lnSpc>
-                <a:spcPct val="90000"/>
-              </a:lnSpc>
-              <a:spcBef>
-                <a:spcPts val="500"/>
-              </a:spcBef>
-              <a:buFont typeface="Arial"/>
-              <a:buChar char="•"/>
-              <a:defRPr sz="1800" kern="1200">
-                <a:solidFill>
-                  <a:schemeClr val="tx1"/>
-                </a:solidFill>
-                <a:latin typeface="+mn-lt"/>
-                <a:ea typeface="+mn-lt"/>
-                <a:cs typeface="+mn-lt"/>
-              </a:defRPr>
-            </a:lvl5pPr>
-            <a:lvl6pPr marL="2514600" indent="-228600" algn="l" defTabSz="914400">
-              <a:lnSpc>
-                <a:spcPct val="90000"/>
-              </a:lnSpc>
-              <a:spcBef>
-                <a:spcPts val="500"/>
-              </a:spcBef>
-              <a:buFont typeface="Arial"/>
-              <a:buChar char="•"/>
-              <a:defRPr sz="1800" kern="1200">
-                <a:solidFill>
-                  <a:schemeClr val="tx1"/>
-                </a:solidFill>
-                <a:latin typeface="+mn-lt"/>
-                <a:ea typeface="+mn-lt"/>
-                <a:cs typeface="+mn-lt"/>
-              </a:defRPr>
-            </a:lvl6pPr>
-            <a:lvl7pPr marL="2971800" indent="-228600" algn="l" defTabSz="914400">
-              <a:lnSpc>
-                <a:spcPct val="90000"/>
-              </a:lnSpc>
-              <a:spcBef>
-                <a:spcPts val="500"/>
-              </a:spcBef>
-              <a:buFont typeface="Arial"/>
-              <a:buChar char="•"/>
-              <a:defRPr sz="1800" kern="1200">
-                <a:solidFill>
-                  <a:schemeClr val="tx1"/>
-                </a:solidFill>
-                <a:latin typeface="+mn-lt"/>
-                <a:ea typeface="+mn-lt"/>
-                <a:cs typeface="+mn-lt"/>
-              </a:defRPr>
-            </a:lvl7pPr>
-            <a:lvl8pPr marL="3429000" indent="-228600" algn="l" defTabSz="914400">
-              <a:lnSpc>
-                <a:spcPct val="90000"/>
-              </a:lnSpc>
-              <a:spcBef>
-                <a:spcPts val="500"/>
-              </a:spcBef>
-              <a:buFont typeface="Arial"/>
-              <a:buChar char="•"/>
-              <a:defRPr sz="1800" kern="1200">
-                <a:solidFill>
-                  <a:schemeClr val="tx1"/>
-                </a:solidFill>
-                <a:latin typeface="+mn-lt"/>
-                <a:ea typeface="+mn-lt"/>
-                <a:cs typeface="+mn-lt"/>
-              </a:defRPr>
-            </a:lvl8pPr>
-            <a:lvl9pPr marL="3886200" indent="-228600" algn="l" defTabSz="914400">
-              <a:lnSpc>
-                <a:spcPct val="90000"/>
-              </a:lnSpc>
-              <a:spcBef>
-                <a:spcPts val="500"/>
-              </a:spcBef>
-              <a:buFont typeface="Arial"/>
-              <a:buChar char="•"/>
-              <a:defRPr sz="1800" kern="1200">
-                <a:solidFill>
-                  <a:schemeClr val="tx1"/>
-                </a:solidFill>
-                <a:latin typeface="+mn-lt"/>
-                <a:ea typeface="+mn-lt"/>
-                <a:cs typeface="+mn-lt"/>
-              </a:defRPr>
-            </a:lvl9pPr>
-          </a:lstStyle>
-          <a:p xmlns:a="http://schemas.openxmlformats.org/drawingml/2006/main">
-            <a:pPr marL="0" indent="0">
-              <a:lnSpc>
-                <a:spcPct val="112000"/>
-              </a:lnSpc>
-              <a:spcBef>
-                <a:spcPts val="0"/>
-              </a:spcBef>
-              <a:spcAft>
-                <a:spcPts val="0"/>
-              </a:spcAft>
-              <a:buNone/>
-              <a:defRPr sz="1875">
-                <a:solidFill>
-                  <a:srgbClr val="FFFFFF"/>
-                </a:solidFill>
-                <a:latin typeface="Arial"/>
-                <a:ea typeface="Arial"/>
-                <a:cs typeface="Arial"/>
-              </a:defRPr>
-            </a:pPr>
-            <a:r>
-              <a:rPr sz="1875">
-                <a:solidFill>
-                  <a:srgbClr val="FFFFFF"/>
-                </a:solidFill>
-                <a:latin typeface="Arial"/>
-                <a:ea typeface="Arial"/>
-                <a:cs typeface="Arial"/>
-              </a:rPr>
               <a:t>Do not try to guess the entire circuit at once. Write a column for each intermediate result.</a:t>
             </a:r>
           </a:p>
@@ -33217,7 +31533,7 @@
           <p:cNvPr id="534" name="">
             <a:extLst xmlns:a="http://schemas.openxmlformats.org/drawingml/2006/main">
               <a:ext uri="{FF2B5EF4-FFF2-40B4-BE49-F238E27FC236}">
-                <a16:creationId xmlns:a16="http://schemas.microsoft.com/office/drawing/2014/main" id="{7DE011A4-2FEC-4DCA-9E8F-129554AD49C8}"/>
+                <a16:creationId xmlns:a16="http://schemas.microsoft.com/office/drawing/2014/main" id="{892F17AA-7048-4B21-B2B4-F588175E1970}"/>
               </a:ext>
             </a:extLst>
           </p:cNvPr>
@@ -34218,7 +32534,7 @@
           <p:cNvPr id="535" name="Takeaway">
             <a:extLst xmlns:a="http://schemas.openxmlformats.org/drawingml/2006/main">
               <a:ext uri="{FF2B5EF4-FFF2-40B4-BE49-F238E27FC236}">
-                <a16:creationId xmlns:a16="http://schemas.microsoft.com/office/drawing/2014/main" id="{2704C161-9C8A-453C-9D93-0C5A7AA605FC}"/>
+                <a16:creationId xmlns:a16="http://schemas.microsoft.com/office/drawing/2014/main" id="{7E04588D-4CB6-47B1-AE72-565046C62D63}"/>
               </a:ext>
             </a:extLst>
           </p:cNvPr>
@@ -34377,6 +32693,1439 @@
                 <a:cs typeface="Arial"/>
               </a:rPr>
               <a:t>The same method works when the circuit is drawn with gate symbols.</a:t>
+            </a:r>
+          </a:p>
+        </p:txBody>
+      </p:sp>
+    </p:spTree>
+    <p:extLst>
+      <p:ext uri="{BB962C8B-B14F-4D97-AF65-F5344CB8AC3E}">
+        <p14:creationId xmlns:p14="http://schemas.microsoft.com/office/powerpoint/2010/main" val="3667182145"/>
+      </p:ext>
+    </p:extLst>
+  </p:cSld>
+</p:sld>
+</file>
+
+<file path=ppt/slides/slide24.xml><?xml version="1.0" encoding="utf-8"?>
+<p:sld xmlns:p="http://schemas.openxmlformats.org/presentationml/2006/main">
+  <p:cSld>
+    <p:spTree>
+      <p:nvGrpSpPr>
+        <p:cNvPr id="1" name=""/>
+        <p:cNvGrpSpPr/>
+        <p:nvPr/>
+      </p:nvGrpSpPr>
+      <p:grpSpPr>
+        <a:xfrm xmlns:a="http://schemas.openxmlformats.org/drawingml/2006/main"/>
+      </p:grpSpPr>
+      <p:sp>
+        <p:nvSpPr>
+          <p:cNvPr id="3" name="Footer Placeholder 2">
+            <a:extLst xmlns:a="http://schemas.openxmlformats.org/drawingml/2006/main">
+              <a:ext uri="{FF2B5EF4-FFF2-40B4-BE49-F238E27FC236}">
+                <a16:creationId xmlns:a16="http://schemas.microsoft.com/office/drawing/2014/main" id="{39EA4C82-C623-0196-4A95-876ADF5DEE92}"/>
+              </a:ext>
+            </a:extLst>
+          </p:cNvPr>
+          <p:cNvSpPr>
+            <a:spLocks xmlns:a="http://schemas.openxmlformats.org/drawingml/2006/main" noGrp="1"/>
+          </p:cNvSpPr>
+          <p:nvPr>
+            <p:ph type="ftr" idx="3"/>
+          </p:nvPr>
+        </p:nvSpPr>
+        <p:spPr>
+          <a:xfrm xmlns:a="http://schemas.openxmlformats.org/drawingml/2006/main">
+            <a:off x="393700" y="6279952"/>
+            <a:ext cx="3568700" cy="241240"/>
+          </a:xfrm>
+        </p:spPr>
+        <p:txBody>
+          <a:bodyPr xmlns:a="http://schemas.openxmlformats.org/drawingml/2006/main" lIns="0" tIns="0" rIns="0" bIns="0" anchor="t">
+            <a:noAutofit/>
+          </a:bodyPr>
+          <a:lstStyle xmlns:a="http://schemas.openxmlformats.org/drawingml/2006/main">
+            <a:defPPr>
+              <a:defRPr sz="1125">
+                <a:solidFill>
+                  <a:srgbClr val="FFFFFF"/>
+                </a:solidFill>
+                <a:latin typeface="Arial"/>
+                <a:ea typeface="Arial"/>
+                <a:cs typeface="Arial"/>
+              </a:defRPr>
+            </a:defPPr>
+            <a:lvl1pPr>
+              <a:defRPr sz="1125">
+                <a:solidFill>
+                  <a:srgbClr val="FFFFFF"/>
+                </a:solidFill>
+                <a:latin typeface="Arial"/>
+                <a:ea typeface="Arial"/>
+                <a:cs typeface="Arial"/>
+              </a:defRPr>
+            </a:lvl1pPr>
+            <a:lvl2pPr>
+              <a:defRPr sz="1125">
+                <a:solidFill>
+                  <a:srgbClr val="FFFFFF"/>
+                </a:solidFill>
+                <a:latin typeface="Arial"/>
+                <a:ea typeface="Arial"/>
+                <a:cs typeface="Arial"/>
+              </a:defRPr>
+            </a:lvl2pPr>
+            <a:lvl3pPr>
+              <a:defRPr sz="1125">
+                <a:solidFill>
+                  <a:srgbClr val="FFFFFF"/>
+                </a:solidFill>
+                <a:latin typeface="Arial"/>
+                <a:ea typeface="Arial"/>
+                <a:cs typeface="Arial"/>
+              </a:defRPr>
+            </a:lvl3pPr>
+            <a:lvl4pPr>
+              <a:defRPr sz="1125">
+                <a:solidFill>
+                  <a:srgbClr val="FFFFFF"/>
+                </a:solidFill>
+                <a:latin typeface="Arial"/>
+                <a:ea typeface="Arial"/>
+                <a:cs typeface="Arial"/>
+              </a:defRPr>
+            </a:lvl4pPr>
+            <a:lvl5pPr>
+              <a:defRPr sz="1125">
+                <a:solidFill>
+                  <a:srgbClr val="FFFFFF"/>
+                </a:solidFill>
+                <a:latin typeface="Arial"/>
+                <a:ea typeface="Arial"/>
+                <a:cs typeface="Arial"/>
+              </a:defRPr>
+            </a:lvl5pPr>
+            <a:lvl6pPr>
+              <a:defRPr sz="1125">
+                <a:solidFill>
+                  <a:srgbClr val="FFFFFF"/>
+                </a:solidFill>
+                <a:latin typeface="Arial"/>
+                <a:ea typeface="Arial"/>
+                <a:cs typeface="Arial"/>
+              </a:defRPr>
+            </a:lvl6pPr>
+            <a:lvl7pPr>
+              <a:defRPr sz="1125">
+                <a:solidFill>
+                  <a:srgbClr val="FFFFFF"/>
+                </a:solidFill>
+                <a:latin typeface="Arial"/>
+                <a:ea typeface="Arial"/>
+                <a:cs typeface="Arial"/>
+              </a:defRPr>
+            </a:lvl7pPr>
+            <a:lvl8pPr>
+              <a:defRPr sz="1125">
+                <a:solidFill>
+                  <a:srgbClr val="FFFFFF"/>
+                </a:solidFill>
+                <a:latin typeface="Arial"/>
+                <a:ea typeface="Arial"/>
+                <a:cs typeface="Arial"/>
+              </a:defRPr>
+            </a:lvl8pPr>
+            <a:lvl9pPr>
+              <a:defRPr sz="1125">
+                <a:solidFill>
+                  <a:srgbClr val="FFFFFF"/>
+                </a:solidFill>
+                <a:latin typeface="Arial"/>
+                <a:ea typeface="Arial"/>
+                <a:cs typeface="Arial"/>
+              </a:defRPr>
+            </a:lvl9pPr>
+          </a:lstStyle>
+          <a:p xmlns:a="http://schemas.openxmlformats.org/drawingml/2006/main">
+            <a:pPr marL="0" indent="0">
+              <a:lnSpc>
+                <a:spcPct val="112000"/>
+              </a:lnSpc>
+              <a:spcBef>
+                <a:spcPts val="0"/>
+              </a:spcBef>
+              <a:spcAft>
+                <a:spcPts val="0"/>
+              </a:spcAft>
+              <a:buNone/>
+              <a:defRPr sz="1125">
+                <a:solidFill>
+                  <a:srgbClr val="FFFFFF"/>
+                </a:solidFill>
+                <a:latin typeface="Arial"/>
+                <a:ea typeface="Arial"/>
+                <a:cs typeface="Arial"/>
+              </a:defRPr>
+            </a:pPr>
+            <a:r>
+              <a:rPr sz="1125">
+                <a:solidFill>
+                  <a:srgbClr val="FFFFFF"/>
+                </a:solidFill>
+                <a:latin typeface="Arial"/>
+                <a:ea typeface="Arial"/>
+                <a:cs typeface="Arial"/>
+              </a:rPr>
+              <a:t>CS 211 · Recitation 07</a:t>
+            </a:r>
+          </a:p>
+        </p:txBody>
+      </p:sp>
+      <p:sp>
+        <p:nvSpPr>
+          <p:cNvPr id="532" name="Google Shape;532;p58">
+            <a:extLst xmlns:a="http://schemas.openxmlformats.org/drawingml/2006/main">
+              <a:ext uri="{FF2B5EF4-FFF2-40B4-BE49-F238E27FC236}">
+                <a16:creationId xmlns:a16="http://schemas.microsoft.com/office/drawing/2014/main" id="{1BCBE750-7048-686D-1472-52C53362D6CD}"/>
+              </a:ext>
+            </a:extLst>
+          </p:cNvPr>
+          <p:cNvSpPr>
+            <a:spLocks xmlns:a="http://schemas.openxmlformats.org/drawingml/2006/main" noGrp="1"/>
+          </p:cNvSpPr>
+          <p:nvPr>
+            <p:ph type="sldNum" idx="4"/>
+          </p:nvPr>
+        </p:nvSpPr>
+        <p:spPr>
+          <a:xfrm xmlns:a="http://schemas.openxmlformats.org/drawingml/2006/main">
+            <a:off x="11279332" y="6279294"/>
+            <a:ext cx="518968" cy="241240"/>
+          </a:xfrm>
+        </p:spPr>
+        <p:txBody>
+          <a:bodyPr xmlns:a="http://schemas.openxmlformats.org/drawingml/2006/main" spcFirstLastPara="1" vert="horz" wrap="square" lIns="0" tIns="0" rIns="0" bIns="0" anchor="t">
+            <a:noAutofit/>
+          </a:bodyPr>
+          <a:lstStyle xmlns:a="http://schemas.openxmlformats.org/drawingml/2006/main">
+            <a:defPPr>
+              <a:defRPr sz="1125">
+                <a:solidFill>
+                  <a:srgbClr val="FFFFFF"/>
+                </a:solidFill>
+                <a:latin typeface="Arial"/>
+                <a:ea typeface="Arial"/>
+                <a:cs typeface="Arial"/>
+              </a:defRPr>
+            </a:defPPr>
+            <a:lvl1pPr>
+              <a:defRPr sz="1125">
+                <a:solidFill>
+                  <a:srgbClr val="FFFFFF"/>
+                </a:solidFill>
+                <a:latin typeface="Arial"/>
+                <a:ea typeface="Arial"/>
+                <a:cs typeface="Arial"/>
+              </a:defRPr>
+            </a:lvl1pPr>
+            <a:lvl2pPr>
+              <a:defRPr sz="1125">
+                <a:solidFill>
+                  <a:srgbClr val="FFFFFF"/>
+                </a:solidFill>
+                <a:latin typeface="Arial"/>
+                <a:ea typeface="Arial"/>
+                <a:cs typeface="Arial"/>
+              </a:defRPr>
+            </a:lvl2pPr>
+            <a:lvl3pPr>
+              <a:defRPr sz="1125">
+                <a:solidFill>
+                  <a:srgbClr val="FFFFFF"/>
+                </a:solidFill>
+                <a:latin typeface="Arial"/>
+                <a:ea typeface="Arial"/>
+                <a:cs typeface="Arial"/>
+              </a:defRPr>
+            </a:lvl3pPr>
+            <a:lvl4pPr>
+              <a:defRPr sz="1125">
+                <a:solidFill>
+                  <a:srgbClr val="FFFFFF"/>
+                </a:solidFill>
+                <a:latin typeface="Arial"/>
+                <a:ea typeface="Arial"/>
+                <a:cs typeface="Arial"/>
+              </a:defRPr>
+            </a:lvl4pPr>
+            <a:lvl5pPr>
+              <a:defRPr sz="1125">
+                <a:solidFill>
+                  <a:srgbClr val="FFFFFF"/>
+                </a:solidFill>
+                <a:latin typeface="Arial"/>
+                <a:ea typeface="Arial"/>
+                <a:cs typeface="Arial"/>
+              </a:defRPr>
+            </a:lvl5pPr>
+            <a:lvl6pPr>
+              <a:defRPr sz="1125">
+                <a:solidFill>
+                  <a:srgbClr val="FFFFFF"/>
+                </a:solidFill>
+                <a:latin typeface="Arial"/>
+                <a:ea typeface="Arial"/>
+                <a:cs typeface="Arial"/>
+              </a:defRPr>
+            </a:lvl6pPr>
+            <a:lvl7pPr>
+              <a:defRPr sz="1125">
+                <a:solidFill>
+                  <a:srgbClr val="FFFFFF"/>
+                </a:solidFill>
+                <a:latin typeface="Arial"/>
+                <a:ea typeface="Arial"/>
+                <a:cs typeface="Arial"/>
+              </a:defRPr>
+            </a:lvl7pPr>
+            <a:lvl8pPr>
+              <a:defRPr sz="1125">
+                <a:solidFill>
+                  <a:srgbClr val="FFFFFF"/>
+                </a:solidFill>
+                <a:latin typeface="Arial"/>
+                <a:ea typeface="Arial"/>
+                <a:cs typeface="Arial"/>
+              </a:defRPr>
+            </a:lvl8pPr>
+            <a:lvl9pPr>
+              <a:defRPr sz="1125">
+                <a:solidFill>
+                  <a:srgbClr val="FFFFFF"/>
+                </a:solidFill>
+                <a:latin typeface="Arial"/>
+                <a:ea typeface="Arial"/>
+                <a:cs typeface="Arial"/>
+              </a:defRPr>
+            </a:lvl9pPr>
+          </a:lstStyle>
+          <a:p xmlns:a="http://schemas.openxmlformats.org/drawingml/2006/main">
+            <a:pPr marL="0" indent="0">
+              <a:lnSpc>
+                <a:spcPct val="112000"/>
+              </a:lnSpc>
+              <a:spcBef>
+                <a:spcPts val="0"/>
+              </a:spcBef>
+              <a:spcAft>
+                <a:spcPts val="0"/>
+              </a:spcAft>
+              <a:buNone/>
+              <a:defRPr sz="1125">
+                <a:solidFill>
+                  <a:srgbClr val="FFFFFF"/>
+                </a:solidFill>
+                <a:latin typeface="Arial"/>
+                <a:ea typeface="Arial"/>
+                <a:cs typeface="Arial"/>
+              </a:defRPr>
+            </a:pPr>
+            <a:r>
+              <a:rPr sz="1125">
+                <a:solidFill>
+                  <a:srgbClr val="FFFFFF"/>
+                </a:solidFill>
+                <a:latin typeface="Arial"/>
+                <a:ea typeface="Arial"/>
+                <a:cs typeface="Arial"/>
+              </a:rPr>
+              <a:t>24</a:t>
+            </a:r>
+          </a:p>
+        </p:txBody>
+      </p:sp>
+      <p:sp>
+        <p:nvSpPr>
+          <p:cNvPr id="533" name="Google Shape;533;p58">
+            <a:extLst xmlns:a="http://schemas.openxmlformats.org/drawingml/2006/main">
+              <a:ext uri="{FF2B5EF4-FFF2-40B4-BE49-F238E27FC236}">
+                <a16:creationId xmlns:a16="http://schemas.microsoft.com/office/drawing/2014/main" id="{1B5D55CD-1C17-7CD8-F26A-2DD65B067687}"/>
+              </a:ext>
+            </a:extLst>
+          </p:cNvPr>
+          <p:cNvSpPr>
+            <a:spLocks xmlns:a="http://schemas.openxmlformats.org/drawingml/2006/main" noGrp="1"/>
+          </p:cNvSpPr>
+          <p:nvPr>
+            <p:ph type="title" idx="0"/>
+          </p:nvPr>
+        </p:nvSpPr>
+        <p:spPr>
+          <a:xfrm xmlns:a="http://schemas.openxmlformats.org/drawingml/2006/main">
+            <a:off x="393700" y="344008"/>
+            <a:ext cx="11404600" cy="1047491"/>
+          </a:xfrm>
+        </p:spPr>
+        <p:txBody>
+          <a:bodyPr xmlns:a="http://schemas.openxmlformats.org/drawingml/2006/main" spcFirstLastPara="1" vert="horz" wrap="square" lIns="0" tIns="0" rIns="0" bIns="0" anchor="t">
+            <a:noAutofit/>
+          </a:bodyPr>
+          <a:lstStyle xmlns:a="http://schemas.openxmlformats.org/drawingml/2006/main">
+            <a:defPPr>
+              <a:defRPr sz="3150">
+                <a:solidFill>
+                  <a:srgbClr val="FFFFFF"/>
+                </a:solidFill>
+                <a:latin typeface="Arial"/>
+                <a:ea typeface="Arial"/>
+                <a:cs typeface="Arial"/>
+              </a:defRPr>
+            </a:defPPr>
+            <a:lvl1pPr>
+              <a:defRPr sz="3150">
+                <a:solidFill>
+                  <a:srgbClr val="FFFFFF"/>
+                </a:solidFill>
+                <a:latin typeface="Arial"/>
+                <a:ea typeface="Arial"/>
+                <a:cs typeface="Arial"/>
+              </a:defRPr>
+            </a:lvl1pPr>
+            <a:lvl2pPr>
+              <a:defRPr sz="3150">
+                <a:solidFill>
+                  <a:srgbClr val="FFFFFF"/>
+                </a:solidFill>
+                <a:latin typeface="Arial"/>
+                <a:ea typeface="Arial"/>
+                <a:cs typeface="Arial"/>
+              </a:defRPr>
+            </a:lvl2pPr>
+            <a:lvl3pPr>
+              <a:defRPr sz="3150">
+                <a:solidFill>
+                  <a:srgbClr val="FFFFFF"/>
+                </a:solidFill>
+                <a:latin typeface="Arial"/>
+                <a:ea typeface="Arial"/>
+                <a:cs typeface="Arial"/>
+              </a:defRPr>
+            </a:lvl3pPr>
+            <a:lvl4pPr>
+              <a:defRPr sz="3150">
+                <a:solidFill>
+                  <a:srgbClr val="FFFFFF"/>
+                </a:solidFill>
+                <a:latin typeface="Arial"/>
+                <a:ea typeface="Arial"/>
+                <a:cs typeface="Arial"/>
+              </a:defRPr>
+            </a:lvl4pPr>
+            <a:lvl5pPr>
+              <a:defRPr sz="3150">
+                <a:solidFill>
+                  <a:srgbClr val="FFFFFF"/>
+                </a:solidFill>
+                <a:latin typeface="Arial"/>
+                <a:ea typeface="Arial"/>
+                <a:cs typeface="Arial"/>
+              </a:defRPr>
+            </a:lvl5pPr>
+            <a:lvl6pPr>
+              <a:defRPr sz="3150">
+                <a:solidFill>
+                  <a:srgbClr val="FFFFFF"/>
+                </a:solidFill>
+                <a:latin typeface="Arial"/>
+                <a:ea typeface="Arial"/>
+                <a:cs typeface="Arial"/>
+              </a:defRPr>
+            </a:lvl6pPr>
+            <a:lvl7pPr>
+              <a:defRPr sz="3150">
+                <a:solidFill>
+                  <a:srgbClr val="FFFFFF"/>
+                </a:solidFill>
+                <a:latin typeface="Arial"/>
+                <a:ea typeface="Arial"/>
+                <a:cs typeface="Arial"/>
+              </a:defRPr>
+            </a:lvl7pPr>
+            <a:lvl8pPr>
+              <a:defRPr sz="3150">
+                <a:solidFill>
+                  <a:srgbClr val="FFFFFF"/>
+                </a:solidFill>
+                <a:latin typeface="Arial"/>
+                <a:ea typeface="Arial"/>
+                <a:cs typeface="Arial"/>
+              </a:defRPr>
+            </a:lvl8pPr>
+            <a:lvl9pPr>
+              <a:defRPr sz="3150">
+                <a:solidFill>
+                  <a:srgbClr val="FFFFFF"/>
+                </a:solidFill>
+                <a:latin typeface="Arial"/>
+                <a:ea typeface="Arial"/>
+                <a:cs typeface="Arial"/>
+              </a:defRPr>
+            </a:lvl9pPr>
+          </a:lstStyle>
+          <a:p xmlns:a="http://schemas.openxmlformats.org/drawingml/2006/main">
+            <a:pPr marL="0" indent="0">
+              <a:lnSpc>
+                <a:spcPct val="112000"/>
+              </a:lnSpc>
+              <a:spcBef>
+                <a:spcPts val="0"/>
+              </a:spcBef>
+              <a:spcAft>
+                <a:spcPts val="0"/>
+              </a:spcAft>
+              <a:buNone/>
+              <a:defRPr sz="3150">
+                <a:solidFill>
+                  <a:srgbClr val="FFFFFF"/>
+                </a:solidFill>
+                <a:latin typeface="Arial"/>
+                <a:ea typeface="Arial"/>
+                <a:cs typeface="Arial"/>
+              </a:defRPr>
+            </a:pPr>
+            <a:r>
+              <a:rPr sz="3150">
+                <a:solidFill>
+                  <a:srgbClr val="FFFFFF"/>
+                </a:solidFill>
+                <a:latin typeface="Arial"/>
+                <a:ea typeface="Arial"/>
+                <a:cs typeface="Arial"/>
+              </a:rPr>
+              <a:t>Adders and propagation delay</a:t>
+            </a:r>
+          </a:p>
+        </p:txBody>
+      </p:sp>
+      <p:sp>
+        <p:nvSpPr>
+          <p:cNvPr id="7" name="Google Shape;534;p58">
+            <a:extLst xmlns:a="http://schemas.openxmlformats.org/drawingml/2006/main">
+              <a:ext uri="{FF2B5EF4-FFF2-40B4-BE49-F238E27FC236}">
+                <a16:creationId xmlns:a16="http://schemas.microsoft.com/office/drawing/2014/main" id="{3A923FEE-B8D2-CD3A-ABBD-21770B40AA24}"/>
+              </a:ext>
+            </a:extLst>
+          </p:cNvPr>
+          <p:cNvSpPr>
+            <a:spLocks xmlns:a="http://schemas.openxmlformats.org/drawingml/2006/main" noGrp="1"/>
+          </p:cNvSpPr>
+          <p:nvPr/>
+        </p:nvSpPr>
+        <p:spPr>
+          <a:xfrm xmlns:a="http://schemas.openxmlformats.org/drawingml/2006/main">
+            <a:off x="393700" y="2031999"/>
+            <a:ext cx="5537200" cy="3534787"/>
+          </a:xfrm>
+          <a:prstGeom xmlns:a="http://schemas.openxmlformats.org/drawingml/2006/main" prst="rect">
+            <a:avLst/>
+          </a:prstGeom>
+        </p:spPr>
+        <p:txBody>
+          <a:bodyPr xmlns:a="http://schemas.openxmlformats.org/drawingml/2006/main" spcFirstLastPara="1" vert="horz" wrap="square" lIns="0" tIns="0" rIns="0" bIns="0" anchor="t">
+            <a:noAutofit/>
+          </a:bodyPr>
+          <a:lstStyle xmlns:a="http://schemas.openxmlformats.org/drawingml/2006/main">
+            <a:defPPr>
+              <a:defRPr sz="1575">
+                <a:solidFill>
+                  <a:srgbClr val="FFFFFF"/>
+                </a:solidFill>
+                <a:latin typeface="Arial"/>
+                <a:ea typeface="Arial"/>
+                <a:cs typeface="Arial"/>
+              </a:defRPr>
+            </a:defPPr>
+            <a:lvl1pPr marL="228600" indent="-228600" algn="l" defTabSz="914400">
+              <a:lnSpc>
+                <a:spcPct val="90000"/>
+              </a:lnSpc>
+              <a:spcBef>
+                <a:spcPts val="1000"/>
+              </a:spcBef>
+              <a:buFont typeface="Arial"/>
+              <a:buChar char="•"/>
+              <a:defRPr sz="2400" kern="1200">
+                <a:solidFill>
+                  <a:schemeClr val="tx1"/>
+                </a:solidFill>
+                <a:latin typeface="+mn-lt"/>
+                <a:ea typeface="+mn-lt"/>
+                <a:cs typeface="+mn-lt"/>
+              </a:defRPr>
+            </a:lvl1pPr>
+            <a:lvl2pPr marL="685800" indent="-228600" algn="l" defTabSz="914400">
+              <a:lnSpc>
+                <a:spcPct val="90000"/>
+              </a:lnSpc>
+              <a:spcBef>
+                <a:spcPts val="500"/>
+              </a:spcBef>
+              <a:buFont typeface="Arial"/>
+              <a:buChar char="•"/>
+              <a:defRPr sz="2000" kern="1200">
+                <a:solidFill>
+                  <a:schemeClr val="tx1"/>
+                </a:solidFill>
+                <a:latin typeface="+mn-lt"/>
+                <a:ea typeface="+mn-lt"/>
+                <a:cs typeface="+mn-lt"/>
+              </a:defRPr>
+            </a:lvl2pPr>
+            <a:lvl3pPr marL="1143000" indent="-228600" algn="l" defTabSz="914400">
+              <a:lnSpc>
+                <a:spcPct val="90000"/>
+              </a:lnSpc>
+              <a:spcBef>
+                <a:spcPts val="500"/>
+              </a:spcBef>
+              <a:buFont typeface="Arial"/>
+              <a:buChar char="•"/>
+              <a:defRPr sz="1800" kern="1200">
+                <a:solidFill>
+                  <a:schemeClr val="tx1"/>
+                </a:solidFill>
+                <a:latin typeface="+mn-lt"/>
+                <a:ea typeface="+mn-lt"/>
+                <a:cs typeface="+mn-lt"/>
+              </a:defRPr>
+            </a:lvl3pPr>
+            <a:lvl4pPr marL="1600200" indent="-228600" algn="l" defTabSz="914400">
+              <a:lnSpc>
+                <a:spcPct val="90000"/>
+              </a:lnSpc>
+              <a:spcBef>
+                <a:spcPts val="500"/>
+              </a:spcBef>
+              <a:buFont typeface="Arial"/>
+              <a:buChar char="•"/>
+              <a:defRPr sz="1800" kern="1200">
+                <a:solidFill>
+                  <a:schemeClr val="tx1"/>
+                </a:solidFill>
+                <a:latin typeface="+mn-lt"/>
+                <a:ea typeface="+mn-lt"/>
+                <a:cs typeface="+mn-lt"/>
+              </a:defRPr>
+            </a:lvl4pPr>
+            <a:lvl5pPr marL="2057400" indent="-228600" algn="l" defTabSz="914400">
+              <a:lnSpc>
+                <a:spcPct val="90000"/>
+              </a:lnSpc>
+              <a:spcBef>
+                <a:spcPts val="500"/>
+              </a:spcBef>
+              <a:buFont typeface="Arial"/>
+              <a:buChar char="•"/>
+              <a:defRPr sz="1800" kern="1200">
+                <a:solidFill>
+                  <a:schemeClr val="tx1"/>
+                </a:solidFill>
+                <a:latin typeface="+mn-lt"/>
+                <a:ea typeface="+mn-lt"/>
+                <a:cs typeface="+mn-lt"/>
+              </a:defRPr>
+            </a:lvl5pPr>
+            <a:lvl6pPr marL="2514600" indent="-228600" algn="l" defTabSz="914400">
+              <a:lnSpc>
+                <a:spcPct val="90000"/>
+              </a:lnSpc>
+              <a:spcBef>
+                <a:spcPts val="500"/>
+              </a:spcBef>
+              <a:buFont typeface="Arial"/>
+              <a:buChar char="•"/>
+              <a:defRPr sz="1800" kern="1200">
+                <a:solidFill>
+                  <a:schemeClr val="tx1"/>
+                </a:solidFill>
+                <a:latin typeface="+mn-lt"/>
+                <a:ea typeface="+mn-lt"/>
+                <a:cs typeface="+mn-lt"/>
+              </a:defRPr>
+            </a:lvl6pPr>
+            <a:lvl7pPr marL="2971800" indent="-228600" algn="l" defTabSz="914400">
+              <a:lnSpc>
+                <a:spcPct val="90000"/>
+              </a:lnSpc>
+              <a:spcBef>
+                <a:spcPts val="500"/>
+              </a:spcBef>
+              <a:buFont typeface="Arial"/>
+              <a:buChar char="•"/>
+              <a:defRPr sz="1800" kern="1200">
+                <a:solidFill>
+                  <a:schemeClr val="tx1"/>
+                </a:solidFill>
+                <a:latin typeface="+mn-lt"/>
+                <a:ea typeface="+mn-lt"/>
+                <a:cs typeface="+mn-lt"/>
+              </a:defRPr>
+            </a:lvl7pPr>
+            <a:lvl8pPr marL="3429000" indent="-228600" algn="l" defTabSz="914400">
+              <a:lnSpc>
+                <a:spcPct val="90000"/>
+              </a:lnSpc>
+              <a:spcBef>
+                <a:spcPts val="500"/>
+              </a:spcBef>
+              <a:buFont typeface="Arial"/>
+              <a:buChar char="•"/>
+              <a:defRPr sz="1800" kern="1200">
+                <a:solidFill>
+                  <a:schemeClr val="tx1"/>
+                </a:solidFill>
+                <a:latin typeface="+mn-lt"/>
+                <a:ea typeface="+mn-lt"/>
+                <a:cs typeface="+mn-lt"/>
+              </a:defRPr>
+            </a:lvl8pPr>
+            <a:lvl9pPr marL="3886200" indent="-228600" algn="l" defTabSz="914400">
+              <a:lnSpc>
+                <a:spcPct val="90000"/>
+              </a:lnSpc>
+              <a:spcBef>
+                <a:spcPts val="500"/>
+              </a:spcBef>
+              <a:buFont typeface="Arial"/>
+              <a:buChar char="•"/>
+              <a:defRPr sz="1800" kern="1200">
+                <a:solidFill>
+                  <a:schemeClr val="tx1"/>
+                </a:solidFill>
+                <a:latin typeface="+mn-lt"/>
+                <a:ea typeface="+mn-lt"/>
+                <a:cs typeface="+mn-lt"/>
+              </a:defRPr>
+            </a:lvl9pPr>
+          </a:lstStyle>
+          <a:p xmlns:a="http://schemas.openxmlformats.org/drawingml/2006/main">
+            <a:pPr marL="0" indent="0">
+              <a:lnSpc>
+                <a:spcPct val="112000"/>
+              </a:lnSpc>
+              <a:spcBef>
+                <a:spcPts val="0"/>
+              </a:spcBef>
+              <a:spcAft>
+                <a:spcPts val="0"/>
+              </a:spcAft>
+              <a:buNone/>
+              <a:defRPr sz="1575">
+                <a:solidFill>
+                  <a:srgbClr val="FFFFFF"/>
+                </a:solidFill>
+                <a:latin typeface="Arial"/>
+                <a:ea typeface="Arial"/>
+                <a:cs typeface="Arial"/>
+              </a:defRPr>
+            </a:pPr>
+            <a:r>
+              <a:rPr sz="1575">
+                <a:solidFill>
+                  <a:srgbClr val="FFFFFF"/>
+                </a:solidFill>
+                <a:latin typeface="Arial"/>
+                <a:ea typeface="Arial"/>
+                <a:cs typeface="Arial"/>
+              </a:rPr>
+              <a:t>A full adder takes A, B, and carry-in. It produces a sum bit and carry-out.</a:t>
+            </a:r>
+          </a:p>
+          <a:p xmlns:a="http://schemas.openxmlformats.org/drawingml/2006/main">
+            <a:pPr marL="0" indent="0">
+              <a:lnSpc>
+                <a:spcPct val="112000"/>
+              </a:lnSpc>
+              <a:spcBef>
+                <a:spcPts val="0"/>
+              </a:spcBef>
+              <a:spcAft>
+                <a:spcPts val="0"/>
+              </a:spcAft>
+              <a:buNone/>
+            </a:pPr>
+            <a:r>
+              <a:t/>
+            </a:r>
+          </a:p>
+          <a:p xmlns:a="http://schemas.openxmlformats.org/drawingml/2006/main">
+            <a:pPr marL="0" indent="0">
+              <a:lnSpc>
+                <a:spcPct val="112000"/>
+              </a:lnSpc>
+              <a:spcBef>
+                <a:spcPts val="0"/>
+              </a:spcBef>
+              <a:spcAft>
+                <a:spcPts val="0"/>
+              </a:spcAft>
+              <a:buNone/>
+              <a:defRPr sz="1575">
+                <a:solidFill>
+                  <a:srgbClr val="FFFFFF"/>
+                </a:solidFill>
+                <a:latin typeface="Arial"/>
+                <a:ea typeface="Arial"/>
+                <a:cs typeface="Arial"/>
+              </a:defRPr>
+            </a:pPr>
+            <a:r>
+              <a:rPr sz="1575">
+                <a:solidFill>
+                  <a:srgbClr val="FFFFFF"/>
+                </a:solidFill>
+                <a:latin typeface="Arial"/>
+                <a:ea typeface="Arial"/>
+                <a:cs typeface="Arial"/>
+              </a:rPr>
+              <a:t>Signals need time to propagate through gates. A ripple adder can wait for a carry to pass through many bit positions.</a:t>
+            </a:r>
+          </a:p>
+          <a:p xmlns:a="http://schemas.openxmlformats.org/drawingml/2006/main">
+            <a:pPr marL="0" indent="0">
+              <a:lnSpc>
+                <a:spcPct val="112000"/>
+              </a:lnSpc>
+              <a:spcBef>
+                <a:spcPts val="0"/>
+              </a:spcBef>
+              <a:spcAft>
+                <a:spcPts val="0"/>
+              </a:spcAft>
+              <a:buNone/>
+            </a:pPr>
+            <a:r>
+              <a:t/>
+            </a:r>
+          </a:p>
+          <a:p xmlns:a="http://schemas.openxmlformats.org/drawingml/2006/main">
+            <a:pPr marL="0" indent="0">
+              <a:lnSpc>
+                <a:spcPct val="112000"/>
+              </a:lnSpc>
+              <a:spcBef>
+                <a:spcPts val="0"/>
+              </a:spcBef>
+              <a:spcAft>
+                <a:spcPts val="0"/>
+              </a:spcAft>
+              <a:buNone/>
+              <a:defRPr sz="1575">
+                <a:solidFill>
+                  <a:srgbClr val="FFFFFF"/>
+                </a:solidFill>
+                <a:latin typeface="Arial"/>
+                <a:ea typeface="Arial"/>
+                <a:cs typeface="Arial"/>
+              </a:defRPr>
+            </a:pPr>
+            <a:r>
+              <a:rPr sz="1575">
+                <a:solidFill>
+                  <a:srgbClr val="FFFFFF"/>
+                </a:solidFill>
+                <a:latin typeface="Arial"/>
+                <a:ea typeface="Arial"/>
+                <a:cs typeface="Arial"/>
+              </a:rPr>
+              <a:t>Carry-lookahead uses more logic to reduce that dependency.</a:t>
+            </a:r>
+          </a:p>
+        </p:txBody>
+      </p:sp>
+      <p:sp>
+        <p:nvSpPr>
+          <p:cNvPr id="8" name="Content Placeholder 3">
+            <a:extLst xmlns:a="http://schemas.openxmlformats.org/drawingml/2006/main">
+              <a:ext uri="{FF2B5EF4-FFF2-40B4-BE49-F238E27FC236}">
+                <a16:creationId xmlns:a16="http://schemas.microsoft.com/office/drawing/2014/main" id="{2EE8F343-A95F-2AAA-FE9E-A6C31E298DF7}"/>
+              </a:ext>
+            </a:extLst>
+          </p:cNvPr>
+          <p:cNvSpPr>
+            <a:spLocks xmlns:a="http://schemas.openxmlformats.org/drawingml/2006/main" noGrp="1"/>
+          </p:cNvSpPr>
+          <p:nvPr/>
+        </p:nvSpPr>
+        <p:spPr>
+          <a:xfrm xmlns:a="http://schemas.openxmlformats.org/drawingml/2006/main">
+            <a:off x="6256618" y="2031999"/>
+            <a:ext cx="5537200" cy="3534787"/>
+          </a:xfrm>
+          <a:prstGeom xmlns:a="http://schemas.openxmlformats.org/drawingml/2006/main" prst="rect">
+            <a:avLst/>
+          </a:prstGeom>
+        </p:spPr>
+        <p:txBody>
+          <a:bodyPr xmlns:a="http://schemas.openxmlformats.org/drawingml/2006/main" lIns="0" tIns="0" rIns="0" bIns="0" anchor="t">
+            <a:noAutofit/>
+          </a:bodyPr>
+          <a:lstStyle xmlns:a="http://schemas.openxmlformats.org/drawingml/2006/main">
+            <a:defPPr>
+              <a:defRPr sz="1800">
+                <a:solidFill>
+                  <a:srgbClr val="FFFFFF"/>
+                </a:solidFill>
+                <a:latin typeface="Consolas"/>
+                <a:ea typeface="Consolas"/>
+                <a:cs typeface="Consolas"/>
+              </a:defRPr>
+            </a:defPPr>
+            <a:lvl1pPr marL="228600" indent="-228600" algn="l" defTabSz="914400">
+              <a:lnSpc>
+                <a:spcPct val="90000"/>
+              </a:lnSpc>
+              <a:spcBef>
+                <a:spcPts val="1000"/>
+              </a:spcBef>
+              <a:buFont typeface="Arial"/>
+              <a:buChar char="•"/>
+              <a:defRPr sz="2400" kern="1200">
+                <a:solidFill>
+                  <a:schemeClr val="tx1"/>
+                </a:solidFill>
+                <a:latin typeface="+mn-lt"/>
+                <a:ea typeface="+mn-lt"/>
+                <a:cs typeface="+mn-lt"/>
+              </a:defRPr>
+            </a:lvl1pPr>
+            <a:lvl2pPr marL="685800" indent="-228600" algn="l" defTabSz="914400">
+              <a:lnSpc>
+                <a:spcPct val="90000"/>
+              </a:lnSpc>
+              <a:spcBef>
+                <a:spcPts val="500"/>
+              </a:spcBef>
+              <a:buFont typeface="Arial"/>
+              <a:buChar char="•"/>
+              <a:defRPr sz="2000" kern="1200">
+                <a:solidFill>
+                  <a:schemeClr val="tx1"/>
+                </a:solidFill>
+                <a:latin typeface="+mn-lt"/>
+                <a:ea typeface="+mn-lt"/>
+                <a:cs typeface="+mn-lt"/>
+              </a:defRPr>
+            </a:lvl2pPr>
+            <a:lvl3pPr marL="1143000" indent="-228600" algn="l" defTabSz="914400">
+              <a:lnSpc>
+                <a:spcPct val="90000"/>
+              </a:lnSpc>
+              <a:spcBef>
+                <a:spcPts val="500"/>
+              </a:spcBef>
+              <a:buFont typeface="Arial"/>
+              <a:buChar char="•"/>
+              <a:defRPr sz="1800" kern="1200">
+                <a:solidFill>
+                  <a:schemeClr val="tx1"/>
+                </a:solidFill>
+                <a:latin typeface="+mn-lt"/>
+                <a:ea typeface="+mn-lt"/>
+                <a:cs typeface="+mn-lt"/>
+              </a:defRPr>
+            </a:lvl3pPr>
+            <a:lvl4pPr marL="1600200" indent="-228600" algn="l" defTabSz="914400">
+              <a:lnSpc>
+                <a:spcPct val="90000"/>
+              </a:lnSpc>
+              <a:spcBef>
+                <a:spcPts val="500"/>
+              </a:spcBef>
+              <a:buFont typeface="Arial"/>
+              <a:buChar char="•"/>
+              <a:defRPr sz="1800" kern="1200">
+                <a:solidFill>
+                  <a:schemeClr val="tx1"/>
+                </a:solidFill>
+                <a:latin typeface="+mn-lt"/>
+                <a:ea typeface="+mn-lt"/>
+                <a:cs typeface="+mn-lt"/>
+              </a:defRPr>
+            </a:lvl4pPr>
+            <a:lvl5pPr marL="2057400" indent="-228600" algn="l" defTabSz="914400">
+              <a:lnSpc>
+                <a:spcPct val="90000"/>
+              </a:lnSpc>
+              <a:spcBef>
+                <a:spcPts val="500"/>
+              </a:spcBef>
+              <a:buFont typeface="Arial"/>
+              <a:buChar char="•"/>
+              <a:defRPr sz="1800" kern="1200">
+                <a:solidFill>
+                  <a:schemeClr val="tx1"/>
+                </a:solidFill>
+                <a:latin typeface="+mn-lt"/>
+                <a:ea typeface="+mn-lt"/>
+                <a:cs typeface="+mn-lt"/>
+              </a:defRPr>
+            </a:lvl5pPr>
+            <a:lvl6pPr marL="2514600" indent="-228600" algn="l" defTabSz="914400">
+              <a:lnSpc>
+                <a:spcPct val="90000"/>
+              </a:lnSpc>
+              <a:spcBef>
+                <a:spcPts val="500"/>
+              </a:spcBef>
+              <a:buFont typeface="Arial"/>
+              <a:buChar char="•"/>
+              <a:defRPr sz="1800" kern="1200">
+                <a:solidFill>
+                  <a:schemeClr val="tx1"/>
+                </a:solidFill>
+                <a:latin typeface="+mn-lt"/>
+                <a:ea typeface="+mn-lt"/>
+                <a:cs typeface="+mn-lt"/>
+              </a:defRPr>
+            </a:lvl6pPr>
+            <a:lvl7pPr marL="2971800" indent="-228600" algn="l" defTabSz="914400">
+              <a:lnSpc>
+                <a:spcPct val="90000"/>
+              </a:lnSpc>
+              <a:spcBef>
+                <a:spcPts val="500"/>
+              </a:spcBef>
+              <a:buFont typeface="Arial"/>
+              <a:buChar char="•"/>
+              <a:defRPr sz="1800" kern="1200">
+                <a:solidFill>
+                  <a:schemeClr val="tx1"/>
+                </a:solidFill>
+                <a:latin typeface="+mn-lt"/>
+                <a:ea typeface="+mn-lt"/>
+                <a:cs typeface="+mn-lt"/>
+              </a:defRPr>
+            </a:lvl7pPr>
+            <a:lvl8pPr marL="3429000" indent="-228600" algn="l" defTabSz="914400">
+              <a:lnSpc>
+                <a:spcPct val="90000"/>
+              </a:lnSpc>
+              <a:spcBef>
+                <a:spcPts val="500"/>
+              </a:spcBef>
+              <a:buFont typeface="Arial"/>
+              <a:buChar char="•"/>
+              <a:defRPr sz="1800" kern="1200">
+                <a:solidFill>
+                  <a:schemeClr val="tx1"/>
+                </a:solidFill>
+                <a:latin typeface="+mn-lt"/>
+                <a:ea typeface="+mn-lt"/>
+                <a:cs typeface="+mn-lt"/>
+              </a:defRPr>
+            </a:lvl8pPr>
+            <a:lvl9pPr marL="3886200" indent="-228600" algn="l" defTabSz="914400">
+              <a:lnSpc>
+                <a:spcPct val="90000"/>
+              </a:lnSpc>
+              <a:spcBef>
+                <a:spcPts val="500"/>
+              </a:spcBef>
+              <a:buFont typeface="Arial"/>
+              <a:buChar char="•"/>
+              <a:defRPr sz="1800" kern="1200">
+                <a:solidFill>
+                  <a:schemeClr val="tx1"/>
+                </a:solidFill>
+                <a:latin typeface="+mn-lt"/>
+                <a:ea typeface="+mn-lt"/>
+                <a:cs typeface="+mn-lt"/>
+              </a:defRPr>
+            </a:lvl9pPr>
+          </a:lstStyle>
+          <a:p xmlns:a="http://schemas.openxmlformats.org/drawingml/2006/main">
+            <a:pPr marL="0" indent="0">
+              <a:lnSpc>
+                <a:spcPct val="112000"/>
+              </a:lnSpc>
+              <a:spcBef>
+                <a:spcPts val="0"/>
+              </a:spcBef>
+              <a:spcAft>
+                <a:spcPts val="0"/>
+              </a:spcAft>
+              <a:buNone/>
+              <a:defRPr sz="1800">
+                <a:solidFill>
+                  <a:srgbClr val="FFFFFF"/>
+                </a:solidFill>
+                <a:latin typeface="Consolas"/>
+                <a:ea typeface="Consolas"/>
+                <a:cs typeface="Consolas"/>
+              </a:defRPr>
+            </a:pPr>
+            <a:r>
+              <a:rPr sz="1800">
+                <a:solidFill>
+                  <a:srgbClr val="FFFFFF"/>
+                </a:solidFill>
+                <a:latin typeface="Consolas"/>
+                <a:ea typeface="Consolas"/>
+                <a:cs typeface="Consolas"/>
+              </a:rPr>
+              <a:t>Sum = A XOR B XOR Cin</a:t>
+            </a:r>
+          </a:p>
+          <a:p xmlns:a="http://schemas.openxmlformats.org/drawingml/2006/main">
+            <a:pPr marL="0" indent="0">
+              <a:lnSpc>
+                <a:spcPct val="112000"/>
+              </a:lnSpc>
+              <a:spcBef>
+                <a:spcPts val="0"/>
+              </a:spcBef>
+              <a:spcAft>
+                <a:spcPts val="0"/>
+              </a:spcAft>
+              <a:buNone/>
+              <a:defRPr sz="1800">
+                <a:solidFill>
+                  <a:srgbClr val="FFFFFF"/>
+                </a:solidFill>
+                <a:latin typeface="Consolas"/>
+                <a:ea typeface="Consolas"/>
+                <a:cs typeface="Consolas"/>
+              </a:defRPr>
+            </a:pPr>
+            <a:r>
+              <a:rPr sz="1800">
+                <a:solidFill>
+                  <a:srgbClr val="FFFFFF"/>
+                </a:solidFill>
+                <a:latin typeface="Consolas"/>
+                <a:ea typeface="Consolas"/>
+                <a:cs typeface="Consolas"/>
+              </a:rPr>
+              <a:t>Cout = (A AND B) OR</a:t>
+            </a:r>
+          </a:p>
+          <a:p xmlns:a="http://schemas.openxmlformats.org/drawingml/2006/main">
+            <a:pPr marL="0" indent="0">
+              <a:lnSpc>
+                <a:spcPct val="112000"/>
+              </a:lnSpc>
+              <a:spcBef>
+                <a:spcPts val="0"/>
+              </a:spcBef>
+              <a:spcAft>
+                <a:spcPts val="0"/>
+              </a:spcAft>
+              <a:buNone/>
+              <a:defRPr sz="1800">
+                <a:solidFill>
+                  <a:srgbClr val="FFFFFF"/>
+                </a:solidFill>
+                <a:latin typeface="Consolas"/>
+                <a:ea typeface="Consolas"/>
+                <a:cs typeface="Consolas"/>
+              </a:defRPr>
+            </a:pPr>
+            <a:r>
+              <a:rPr sz="1800">
+                <a:solidFill>
+                  <a:srgbClr val="FFFFFF"/>
+                </a:solidFill>
+                <a:latin typeface="Consolas"/>
+                <a:ea typeface="Consolas"/>
+                <a:cs typeface="Consolas"/>
+              </a:rPr>
+              <a:t>       (Cin AND (A XOR B))</a:t>
+            </a:r>
+          </a:p>
+          <a:p xmlns:a="http://schemas.openxmlformats.org/drawingml/2006/main">
+            <a:pPr marL="0" indent="0">
+              <a:lnSpc>
+                <a:spcPct val="112000"/>
+              </a:lnSpc>
+              <a:spcBef>
+                <a:spcPts val="0"/>
+              </a:spcBef>
+              <a:spcAft>
+                <a:spcPts val="0"/>
+              </a:spcAft>
+              <a:buNone/>
+            </a:pPr>
+            <a:r>
+              <a:t/>
+            </a:r>
+          </a:p>
+          <a:p xmlns:a="http://schemas.openxmlformats.org/drawingml/2006/main">
+            <a:pPr marL="0" indent="0">
+              <a:lnSpc>
+                <a:spcPct val="112000"/>
+              </a:lnSpc>
+              <a:spcBef>
+                <a:spcPts val="0"/>
+              </a:spcBef>
+              <a:spcAft>
+                <a:spcPts val="0"/>
+              </a:spcAft>
+              <a:buNone/>
+              <a:defRPr sz="1800">
+                <a:solidFill>
+                  <a:srgbClr val="FFFFFF"/>
+                </a:solidFill>
+                <a:latin typeface="Consolas"/>
+                <a:ea typeface="Consolas"/>
+                <a:cs typeface="Consolas"/>
+              </a:defRPr>
+            </a:pPr>
+            <a:r>
+              <a:rPr sz="1800">
+                <a:solidFill>
+                  <a:srgbClr val="FFFFFF"/>
+                </a:solidFill>
+                <a:latin typeface="Consolas"/>
+                <a:ea typeface="Consolas"/>
+                <a:cs typeface="Consolas"/>
+              </a:rPr>
+              <a:t>A=1, B=1, Cin=0:</a:t>
+            </a:r>
+          </a:p>
+          <a:p xmlns:a="http://schemas.openxmlformats.org/drawingml/2006/main">
+            <a:pPr marL="0" indent="0">
+              <a:lnSpc>
+                <a:spcPct val="112000"/>
+              </a:lnSpc>
+              <a:spcBef>
+                <a:spcPts val="0"/>
+              </a:spcBef>
+              <a:spcAft>
+                <a:spcPts val="0"/>
+              </a:spcAft>
+              <a:buNone/>
+              <a:defRPr sz="1800">
+                <a:solidFill>
+                  <a:srgbClr val="FFFFFF"/>
+                </a:solidFill>
+                <a:latin typeface="Consolas"/>
+                <a:ea typeface="Consolas"/>
+                <a:cs typeface="Consolas"/>
+              </a:defRPr>
+            </a:pPr>
+            <a:r>
+              <a:rPr sz="1800">
+                <a:solidFill>
+                  <a:srgbClr val="FFFFFF"/>
+                </a:solidFill>
+                <a:latin typeface="Consolas"/>
+                <a:ea typeface="Consolas"/>
+                <a:cs typeface="Consolas"/>
+              </a:rPr>
+              <a:t>Sum = ?</a:t>
+            </a:r>
+          </a:p>
+          <a:p xmlns:a="http://schemas.openxmlformats.org/drawingml/2006/main">
+            <a:pPr marL="0" indent="0">
+              <a:lnSpc>
+                <a:spcPct val="112000"/>
+              </a:lnSpc>
+              <a:spcBef>
+                <a:spcPts val="0"/>
+              </a:spcBef>
+              <a:spcAft>
+                <a:spcPts val="0"/>
+              </a:spcAft>
+              <a:buNone/>
+              <a:defRPr sz="1800">
+                <a:solidFill>
+                  <a:srgbClr val="FFFFFF"/>
+                </a:solidFill>
+                <a:latin typeface="Consolas"/>
+                <a:ea typeface="Consolas"/>
+                <a:cs typeface="Consolas"/>
+              </a:defRPr>
+            </a:pPr>
+            <a:r>
+              <a:rPr sz="1800">
+                <a:solidFill>
+                  <a:srgbClr val="FFFFFF"/>
+                </a:solidFill>
+                <a:latin typeface="Consolas"/>
+                <a:ea typeface="Consolas"/>
+                <a:cs typeface="Consolas"/>
+              </a:rPr>
+              <a:t>Cout = ?</a:t>
+            </a:r>
+          </a:p>
+        </p:txBody>
+      </p:sp>
+      <p:sp>
+        <p:nvSpPr>
+          <p:cNvPr id="534" name="Takeaway">
+            <a:extLst xmlns:a="http://schemas.openxmlformats.org/drawingml/2006/main">
+              <a:ext uri="{FF2B5EF4-FFF2-40B4-BE49-F238E27FC236}">
+                <a16:creationId xmlns:a16="http://schemas.microsoft.com/office/drawing/2014/main" id="{58AB3541-69CC-4A88-923F-9B809C265791}"/>
+              </a:ext>
+            </a:extLst>
+          </p:cNvPr>
+          <p:cNvSpPr>
+            <a:spLocks xmlns:a="http://schemas.openxmlformats.org/drawingml/2006/main" noGrp="1"/>
+          </p:cNvSpPr>
+          <p:nvPr/>
+        </p:nvSpPr>
+        <p:spPr>
+          <a:xfrm xmlns:a="http://schemas.openxmlformats.org/drawingml/2006/main">
+            <a:off x="393668" y="5715000"/>
+            <a:ext cx="11404283" cy="466725"/>
+          </a:xfrm>
+          <a:prstGeom xmlns:a="http://schemas.openxmlformats.org/drawingml/2006/main" prst="rect">
+            <a:avLst/>
+          </a:prstGeom>
+          <a:noFill xmlns:a="http://schemas.openxmlformats.org/drawingml/2006/main"/>
+          <a:ln xmlns:a="http://schemas.openxmlformats.org/drawingml/2006/main" w="0">
+            <a:noFill/>
+          </a:ln>
+        </p:spPr>
+        <p:txBody>
+          <a:bodyPr xmlns:a="http://schemas.openxmlformats.org/drawingml/2006/main" lIns="0" tIns="0" rIns="0" bIns="0" anchor="t">
+            <a:noAutofit/>
+          </a:bodyPr>
+          <a:lstStyle xmlns:a="http://schemas.openxmlformats.org/drawingml/2006/main">
+            <a:defPPr>
+              <a:defRPr sz="1350">
+                <a:solidFill>
+                  <a:srgbClr val="CCCCCC"/>
+                </a:solidFill>
+                <a:latin typeface="Arial"/>
+                <a:ea typeface="Arial"/>
+                <a:cs typeface="Arial"/>
+              </a:defRPr>
+            </a:defPPr>
+            <a:lvl1pPr>
+              <a:defRPr sz="1350">
+                <a:solidFill>
+                  <a:srgbClr val="CCCCCC"/>
+                </a:solidFill>
+                <a:latin typeface="Arial"/>
+                <a:ea typeface="Arial"/>
+                <a:cs typeface="Arial"/>
+              </a:defRPr>
+            </a:lvl1pPr>
+            <a:lvl2pPr>
+              <a:defRPr sz="1350">
+                <a:solidFill>
+                  <a:srgbClr val="CCCCCC"/>
+                </a:solidFill>
+                <a:latin typeface="Arial"/>
+                <a:ea typeface="Arial"/>
+                <a:cs typeface="Arial"/>
+              </a:defRPr>
+            </a:lvl2pPr>
+            <a:lvl3pPr>
+              <a:defRPr sz="1350">
+                <a:solidFill>
+                  <a:srgbClr val="CCCCCC"/>
+                </a:solidFill>
+                <a:latin typeface="Arial"/>
+                <a:ea typeface="Arial"/>
+                <a:cs typeface="Arial"/>
+              </a:defRPr>
+            </a:lvl3pPr>
+            <a:lvl4pPr>
+              <a:defRPr sz="1350">
+                <a:solidFill>
+                  <a:srgbClr val="CCCCCC"/>
+                </a:solidFill>
+                <a:latin typeface="Arial"/>
+                <a:ea typeface="Arial"/>
+                <a:cs typeface="Arial"/>
+              </a:defRPr>
+            </a:lvl4pPr>
+            <a:lvl5pPr>
+              <a:defRPr sz="1350">
+                <a:solidFill>
+                  <a:srgbClr val="CCCCCC"/>
+                </a:solidFill>
+                <a:latin typeface="Arial"/>
+                <a:ea typeface="Arial"/>
+                <a:cs typeface="Arial"/>
+              </a:defRPr>
+            </a:lvl5pPr>
+            <a:lvl6pPr>
+              <a:defRPr sz="1350">
+                <a:solidFill>
+                  <a:srgbClr val="CCCCCC"/>
+                </a:solidFill>
+                <a:latin typeface="Arial"/>
+                <a:ea typeface="Arial"/>
+                <a:cs typeface="Arial"/>
+              </a:defRPr>
+            </a:lvl6pPr>
+            <a:lvl7pPr>
+              <a:defRPr sz="1350">
+                <a:solidFill>
+                  <a:srgbClr val="CCCCCC"/>
+                </a:solidFill>
+                <a:latin typeface="Arial"/>
+                <a:ea typeface="Arial"/>
+                <a:cs typeface="Arial"/>
+              </a:defRPr>
+            </a:lvl7pPr>
+            <a:lvl8pPr>
+              <a:defRPr sz="1350">
+                <a:solidFill>
+                  <a:srgbClr val="CCCCCC"/>
+                </a:solidFill>
+                <a:latin typeface="Arial"/>
+                <a:ea typeface="Arial"/>
+                <a:cs typeface="Arial"/>
+              </a:defRPr>
+            </a:lvl8pPr>
+            <a:lvl9pPr>
+              <a:defRPr sz="1350">
+                <a:solidFill>
+                  <a:srgbClr val="CCCCCC"/>
+                </a:solidFill>
+                <a:latin typeface="Arial"/>
+                <a:ea typeface="Arial"/>
+                <a:cs typeface="Arial"/>
+              </a:defRPr>
+            </a:lvl9pPr>
+          </a:lstStyle>
+          <a:p xmlns:a="http://schemas.openxmlformats.org/drawingml/2006/main">
+            <a:pPr marL="0" indent="0">
+              <a:lnSpc>
+                <a:spcPct val="112000"/>
+              </a:lnSpc>
+              <a:spcBef>
+                <a:spcPts val="0"/>
+              </a:spcBef>
+              <a:spcAft>
+                <a:spcPts val="0"/>
+              </a:spcAft>
+              <a:buNone/>
+              <a:defRPr sz="1350">
+                <a:solidFill>
+                  <a:srgbClr val="CCCCCC"/>
+                </a:solidFill>
+                <a:latin typeface="Arial"/>
+                <a:ea typeface="Arial"/>
+                <a:cs typeface="Arial"/>
+              </a:defRPr>
+            </a:pPr>
+            <a:r>
+              <a:rPr sz="1350">
+                <a:solidFill>
+                  <a:srgbClr val="CCCCCC"/>
+                </a:solidFill>
+                <a:latin typeface="Arial"/>
+                <a:ea typeface="Arial"/>
+                <a:cs typeface="Arial"/>
+              </a:rPr>
+              <a:t>Timing follows the longest relevant signal path, not just the number of gates drawn.</a:t>
             </a:r>
           </a:p>
         </p:txBody>
@@ -34887,7 +34636,7 @@
                 <a:ea typeface="Arial"/>
                 <a:cs typeface="Arial"/>
               </a:rPr>
-              <a:t>Adders and propagation delay</a:t>
+              <a:t>MUXes select; decoders identify</a:t>
             </a:r>
           </a:p>
         </p:txBody>
@@ -34921,7 +34670,7 @@
           </a:bodyPr>
           <a:lstStyle xmlns:a="http://schemas.openxmlformats.org/drawingml/2006/main">
             <a:defPPr>
-              <a:defRPr sz="1575">
+              <a:defRPr sz="1875">
                 <a:solidFill>
                   <a:srgbClr val="FFFFFF"/>
                 </a:solidFill>
@@ -35105,17 +34854,17 @@
                 <a:spcPts val="0"/>
               </a:spcAft>
               <a:buNone/>
-              <a:defRPr sz="1575">
-                <a:solidFill>
-                  <a:srgbClr val="FFFFFF"/>
-                </a:solidFill>
-                <a:latin typeface="Arial"/>
-                <a:ea typeface="Arial"/>
-                <a:cs typeface="Arial"/>
-              </a:defRPr>
-            </a:pPr>
-            <a:r>
-              <a:rPr sz="1575">
+              <a:defRPr sz="1875">
+                <a:solidFill>
+                  <a:srgbClr val="FFFFFF"/>
+                </a:solidFill>
+                <a:latin typeface="Arial"/>
+                <a:ea typeface="Arial"/>
+                <a:cs typeface="Arial"/>
+              </a:defRPr>
+            </a:pPr>
+            <a:r>
+              <a:rPr sz="1875">
                 <a:solidFill>
                   <a:srgbClr val="FFFFFF"/>
                 </a:solidFill>
@@ -35123,7 +34872,7 @@
                 <a:ea typeface="Arial"/>
                 <a:cs typeface="Arial"/>
               </a:rPr>
-              <a:t>A full adder takes A, B, and carry-in. It produces a sum bit and carry-out.</a:t>
+              <a:t>A multiplexer routes one selected input to its output.</a:t>
             </a:r>
           </a:p>
           <a:p xmlns:a="http://schemas.openxmlformats.org/drawingml/2006/main">
@@ -35155,17 +34904,17 @@
                 <a:spcPts val="0"/>
               </a:spcAft>
               <a:buNone/>
-              <a:defRPr sz="1575">
-                <a:solidFill>
-                  <a:srgbClr val="FFFFFF"/>
-                </a:solidFill>
-                <a:latin typeface="Arial"/>
-                <a:ea typeface="Arial"/>
-                <a:cs typeface="Arial"/>
-              </a:defRPr>
-            </a:pPr>
-            <a:r>
-              <a:rPr sz="1575">
+              <a:defRPr sz="1875">
+                <a:solidFill>
+                  <a:srgbClr val="FFFFFF"/>
+                </a:solidFill>
+                <a:latin typeface="Arial"/>
+                <a:ea typeface="Arial"/>
+                <a:cs typeface="Arial"/>
+              </a:defRPr>
+            </a:pPr>
+            <a:r>
+              <a:rPr sz="1875">
                 <a:solidFill>
                   <a:srgbClr val="FFFFFF"/>
                 </a:solidFill>
@@ -35173,7 +34922,7 @@
                 <a:ea typeface="Arial"/>
                 <a:cs typeface="Arial"/>
               </a:rPr>
-              <a:t>Signals need time to propagate through gates. A ripple adder can wait for a carry to pass through many bit positions.</a:t>
+              <a:t>A decoder translates a binary input into a selected output line.</a:t>
             </a:r>
           </a:p>
           <a:p xmlns:a="http://schemas.openxmlformats.org/drawingml/2006/main">
@@ -35205,17 +34954,17 @@
                 <a:spcPts val="0"/>
               </a:spcAft>
               <a:buNone/>
-              <a:defRPr sz="1575">
-                <a:solidFill>
-                  <a:srgbClr val="FFFFFF"/>
-                </a:solidFill>
-                <a:latin typeface="Arial"/>
-                <a:ea typeface="Arial"/>
-                <a:cs typeface="Arial"/>
-              </a:defRPr>
-            </a:pPr>
-            <a:r>
-              <a:rPr sz="1575">
+              <a:defRPr sz="1875">
+                <a:solidFill>
+                  <a:srgbClr val="FFFFFF"/>
+                </a:solidFill>
+                <a:latin typeface="Arial"/>
+                <a:ea typeface="Arial"/>
+                <a:cs typeface="Arial"/>
+              </a:defRPr>
+            </a:pPr>
+            <a:r>
+              <a:rPr sz="1875">
                 <a:solidFill>
                   <a:srgbClr val="FFFFFF"/>
                 </a:solidFill>
@@ -35223,7 +34972,7 @@
                 <a:ea typeface="Arial"/>
                 <a:cs typeface="Arial"/>
               </a:rPr>
-              <a:t>Carry-lookahead uses more logic to reduce that dependency.</a:t>
+              <a:t>They help choose operands, operations, and memory locations.</a:t>
             </a:r>
           </a:p>
         </p:txBody>
@@ -35459,7 +35208,7 @@
                 <a:ea typeface="Consolas"/>
                 <a:cs typeface="Consolas"/>
               </a:rPr>
-              <a:t>Sum = A XOR B XOR Cin</a:t>
+              <a:t>2-to-1 MUX:</a:t>
             </a:r>
           </a:p>
           <a:p xmlns:a="http://schemas.openxmlformats.org/drawingml/2006/main">
@@ -35492,7 +35241,7 @@
                 <a:ea typeface="Consolas"/>
                 <a:cs typeface="Consolas"/>
               </a:rPr>
-              <a:t>Cout = (A AND B) OR</a:t>
+              <a:t>S=0 selects A; S=1 selects B</a:t>
             </a:r>
           </a:p>
           <a:p xmlns:a="http://schemas.openxmlformats.org/drawingml/2006/main">
@@ -35525,7 +35274,7 @@
                 <a:ea typeface="Consolas"/>
                 <a:cs typeface="Consolas"/>
               </a:rPr>
-              <a:t>       (Cin AND (A XOR B))</a:t>
+              <a:t>A=0, B=1, S=1: output = ?</a:t>
             </a:r>
           </a:p>
           <a:p xmlns:a="http://schemas.openxmlformats.org/drawingml/2006/main">
@@ -35575,7 +35324,7 @@
                 <a:ea typeface="Consolas"/>
                 <a:cs typeface="Consolas"/>
               </a:rPr>
-              <a:t>A=1, B=1, Cin=0:</a:t>
+              <a:t>2-to-4 active-high decoder:</a:t>
             </a:r>
           </a:p>
           <a:p xmlns:a="http://schemas.openxmlformats.org/drawingml/2006/main">
@@ -35608,7 +35357,24 @@
                 <a:ea typeface="Consolas"/>
                 <a:cs typeface="Consolas"/>
               </a:rPr>
-              <a:t>Sum = ?</a:t>
+              <a:t>input 10₂: selected line = ?</a:t>
+            </a:r>
+          </a:p>
+          <a:p xmlns:a="http://schemas.openxmlformats.org/drawingml/2006/main">
+            <a:pPr marL="0" indent="0">
+              <a:lnSpc>
+                <a:spcPct val="112000"/>
+              </a:lnSpc>
+              <a:spcBef>
+                <a:spcPts val="0"/>
+              </a:spcBef>
+              <a:spcAft>
+                <a:spcPts val="0"/>
+              </a:spcAft>
+              <a:buNone/>
+            </a:pPr>
+            <a:r>
+              <a:t/>
             </a:r>
           </a:p>
           <a:p xmlns:a="http://schemas.openxmlformats.org/drawingml/2006/main">
@@ -35641,7 +35407,7 @@
                 <a:ea typeface="Consolas"/>
                 <a:cs typeface="Consolas"/>
               </a:rPr>
-              <a:t>Cout = ?</a:t>
+              <a:t>8-input MUX: selector bits = ?</a:t>
             </a:r>
           </a:p>
         </p:txBody>
@@ -35651,7 +35417,7 @@
           <p:cNvPr id="534" name="Takeaway">
             <a:extLst xmlns:a="http://schemas.openxmlformats.org/drawingml/2006/main">
               <a:ext uri="{FF2B5EF4-FFF2-40B4-BE49-F238E27FC236}">
-                <a16:creationId xmlns:a16="http://schemas.microsoft.com/office/drawing/2014/main" id="{F7649EDA-EE50-4A33-8A39-93D2DB1058A4}"/>
+                <a16:creationId xmlns:a16="http://schemas.microsoft.com/office/drawing/2014/main" id="{8FC80085-0CB6-4781-9B2F-EEA24965EDF9}"/>
               </a:ext>
             </a:extLst>
           </p:cNvPr>
@@ -35809,7 +35575,7 @@
                 <a:ea typeface="Arial"/>
                 <a:cs typeface="Arial"/>
               </a:rPr>
-              <a:t>Timing follows the longest relevant signal path, not just the number of gates drawn.</a:t>
+              <a:t>For 2^n MUX inputs, n selector bits are needed.</a:t>
             </a:r>
           </a:p>
         </p:txBody>
@@ -36320,7 +36086,7 @@
                 <a:ea typeface="Arial"/>
                 <a:cs typeface="Arial"/>
               </a:rPr>
-              <a:t>MUXes select; decoders identify</a:t>
+              <a:t>Combinational logic versus stored state</a:t>
             </a:r>
           </a:p>
         </p:txBody>
@@ -36556,7 +36322,7 @@
                 <a:ea typeface="Arial"/>
                 <a:cs typeface="Arial"/>
               </a:rPr>
-              <a:t>A multiplexer routes one selected input to its output.</a:t>
+              <a:t>Combinational output depends on current inputs. Sequential behavior also depends on saved state.</a:t>
             </a:r>
           </a:p>
           <a:p xmlns:a="http://schemas.openxmlformats.org/drawingml/2006/main">
@@ -36606,57 +36372,7 @@
                 <a:ea typeface="Arial"/>
                 <a:cs typeface="Arial"/>
               </a:rPr>
-              <a:t>A decoder translates a binary input into a selected output line.</a:t>
-            </a:r>
-          </a:p>
-          <a:p xmlns:a="http://schemas.openxmlformats.org/drawingml/2006/main">
-            <a:pPr marL="0" indent="0">
-              <a:lnSpc>
-                <a:spcPct val="112000"/>
-              </a:lnSpc>
-              <a:spcBef>
-                <a:spcPts val="0"/>
-              </a:spcBef>
-              <a:spcAft>
-                <a:spcPts val="0"/>
-              </a:spcAft>
-              <a:buNone/>
-            </a:pPr>
-            <a:r>
-              <a:t/>
-            </a:r>
-          </a:p>
-          <a:p xmlns:a="http://schemas.openxmlformats.org/drawingml/2006/main">
-            <a:pPr marL="0" indent="0">
-              <a:lnSpc>
-                <a:spcPct val="112000"/>
-              </a:lnSpc>
-              <a:spcBef>
-                <a:spcPts val="0"/>
-              </a:spcBef>
-              <a:spcAft>
-                <a:spcPts val="0"/>
-              </a:spcAft>
-              <a:buNone/>
-              <a:defRPr sz="1875">
-                <a:solidFill>
-                  <a:srgbClr val="FFFFFF"/>
-                </a:solidFill>
-                <a:latin typeface="Arial"/>
-                <a:ea typeface="Arial"/>
-                <a:cs typeface="Arial"/>
-              </a:defRPr>
-            </a:pPr>
-            <a:r>
-              <a:rPr sz="1875">
-                <a:solidFill>
-                  <a:srgbClr val="FFFFFF"/>
-                </a:solidFill>
-                <a:latin typeface="Arial"/>
-                <a:ea typeface="Arial"/>
-                <a:cs typeface="Arial"/>
-              </a:rPr>
-              <a:t>They help choose operands, operations, and memory locations.</a:t>
+              <a:t>A D latch follows D while enabled, then holds its value. A D flip-flop samples D at its active clock edge.</a:t>
             </a:r>
           </a:p>
         </p:txBody>
@@ -36892,7 +36608,24 @@
                 <a:ea typeface="Consolas"/>
                 <a:cs typeface="Consolas"/>
               </a:rPr>
-              <a:t>2-to-1 MUX:</a:t>
+              <a:t>Rising-edge D flip-flop:</a:t>
+            </a:r>
+          </a:p>
+          <a:p xmlns:a="http://schemas.openxmlformats.org/drawingml/2006/main">
+            <a:pPr marL="0" indent="0">
+              <a:lnSpc>
+                <a:spcPct val="112000"/>
+              </a:lnSpc>
+              <a:spcBef>
+                <a:spcPts val="0"/>
+              </a:spcBef>
+              <a:spcAft>
+                <a:spcPts val="0"/>
+              </a:spcAft>
+              <a:buNone/>
+            </a:pPr>
+            <a:r>
+              <a:t/>
             </a:r>
           </a:p>
           <a:p xmlns:a="http://schemas.openxmlformats.org/drawingml/2006/main">
@@ -36925,7 +36658,7 @@
                 <a:ea typeface="Consolas"/>
                 <a:cs typeface="Consolas"/>
               </a:rPr>
-              <a:t>S=0 selects A; S=1 selects B</a:t>
+              <a:t>Q starts at 0.</a:t>
             </a:r>
           </a:p>
           <a:p xmlns:a="http://schemas.openxmlformats.org/drawingml/2006/main">
@@ -36958,24 +36691,7 @@
                 <a:ea typeface="Consolas"/>
                 <a:cs typeface="Consolas"/>
               </a:rPr>
-              <a:t>A=0, B=1, S=1: output = ?</a:t>
-            </a:r>
-          </a:p>
-          <a:p xmlns:a="http://schemas.openxmlformats.org/drawingml/2006/main">
-            <a:pPr marL="0" indent="0">
-              <a:lnSpc>
-                <a:spcPct val="112000"/>
-              </a:lnSpc>
-              <a:spcBef>
-                <a:spcPts val="0"/>
-              </a:spcBef>
-              <a:spcAft>
-                <a:spcPts val="0"/>
-              </a:spcAft>
-              <a:buNone/>
-            </a:pPr>
-            <a:r>
-              <a:t/>
+              <a:t>D changes to 1 between clock edges.</a:t>
             </a:r>
           </a:p>
           <a:p xmlns:a="http://schemas.openxmlformats.org/drawingml/2006/main">
@@ -37008,7 +36724,7 @@
                 <a:ea typeface="Consolas"/>
                 <a:cs typeface="Consolas"/>
               </a:rPr>
-              <a:t>2-to-4 active-high decoder:</a:t>
+              <a:t>Before the next rising edge: Q = ?</a:t>
             </a:r>
           </a:p>
           <a:p xmlns:a="http://schemas.openxmlformats.org/drawingml/2006/main">
@@ -37041,57 +36757,7 @@
                 <a:ea typeface="Consolas"/>
                 <a:cs typeface="Consolas"/>
               </a:rPr>
-              <a:t>input 10₂: selected line = ?</a:t>
-            </a:r>
-          </a:p>
-          <a:p xmlns:a="http://schemas.openxmlformats.org/drawingml/2006/main">
-            <a:pPr marL="0" indent="0">
-              <a:lnSpc>
-                <a:spcPct val="112000"/>
-              </a:lnSpc>
-              <a:spcBef>
-                <a:spcPts val="0"/>
-              </a:spcBef>
-              <a:spcAft>
-                <a:spcPts val="0"/>
-              </a:spcAft>
-              <a:buNone/>
-            </a:pPr>
-            <a:r>
-              <a:t/>
-            </a:r>
-          </a:p>
-          <a:p xmlns:a="http://schemas.openxmlformats.org/drawingml/2006/main">
-            <a:pPr marL="0" indent="0">
-              <a:lnSpc>
-                <a:spcPct val="112000"/>
-              </a:lnSpc>
-              <a:spcBef>
-                <a:spcPts val="0"/>
-              </a:spcBef>
-              <a:spcAft>
-                <a:spcPts val="0"/>
-              </a:spcAft>
-              <a:buNone/>
-              <a:defRPr sz="1800">
-                <a:solidFill>
-                  <a:srgbClr val="FFFFFF"/>
-                </a:solidFill>
-                <a:latin typeface="Consolas"/>
-                <a:ea typeface="Consolas"/>
-                <a:cs typeface="Consolas"/>
-              </a:defRPr>
-            </a:pPr>
-            <a:r>
-              <a:rPr sz="1800">
-                <a:solidFill>
-                  <a:srgbClr val="FFFFFF"/>
-                </a:solidFill>
-                <a:latin typeface="Consolas"/>
-                <a:ea typeface="Consolas"/>
-                <a:cs typeface="Consolas"/>
-              </a:rPr>
-              <a:t>8-input MUX: selector bits = ?</a:t>
+              <a:t>At that rising edge: Q becomes ?</a:t>
             </a:r>
           </a:p>
         </p:txBody>
@@ -37101,7 +36767,7 @@
           <p:cNvPr id="534" name="Takeaway">
             <a:extLst xmlns:a="http://schemas.openxmlformats.org/drawingml/2006/main">
               <a:ext uri="{FF2B5EF4-FFF2-40B4-BE49-F238E27FC236}">
-                <a16:creationId xmlns:a16="http://schemas.microsoft.com/office/drawing/2014/main" id="{66F1CDD2-F187-4A21-9B92-185C1679FEDE}"/>
+                <a16:creationId xmlns:a16="http://schemas.microsoft.com/office/drawing/2014/main" id="{E576E655-4291-46C9-82E1-8BDA563E72CC}"/>
               </a:ext>
             </a:extLst>
           </p:cNvPr>
@@ -37259,7 +36925,7 @@
                 <a:ea typeface="Arial"/>
                 <a:cs typeface="Arial"/>
               </a:rPr>
-              <a:t>For 2^n MUX inputs, n selector bits are needed.</a:t>
+              <a:t>A latch is level-sensitive; a flip-flop is edge-triggered.</a:t>
             </a:r>
           </a:p>
         </p:txBody>
@@ -37770,7 +37436,7 @@
                 <a:ea typeface="Arial"/>
                 <a:cs typeface="Arial"/>
               </a:rPr>
-              <a:t>Combinational logic versus stored state</a:t>
+              <a:t>Short C code: trace the actual values</a:t>
             </a:r>
           </a:p>
         </p:txBody>
@@ -38006,7 +37672,7 @@
                 <a:ea typeface="Arial"/>
                 <a:cs typeface="Arial"/>
               </a:rPr>
-              <a:t>Combinational output depends on current inputs. Sequential behavior also depends on saved state.</a:t>
+              <a:t>The midterm can include short code based on the homework. Trace one iteration at a time.</a:t>
             </a:r>
           </a:p>
           <a:p xmlns:a="http://schemas.openxmlformats.org/drawingml/2006/main">
@@ -38056,7 +37722,57 @@
                 <a:ea typeface="Arial"/>
                 <a:cs typeface="Arial"/>
               </a:rPr>
-              <a:t>A D latch follows D while enabled, then holds its value. A D flip-flop samples D at its active clock edge.</a:t>
+              <a:t>What does this function return for {3, 4, 7, 8}?</a:t>
+            </a:r>
+          </a:p>
+          <a:p xmlns:a="http://schemas.openxmlformats.org/drawingml/2006/main">
+            <a:pPr marL="0" indent="0">
+              <a:lnSpc>
+                <a:spcPct val="112000"/>
+              </a:lnSpc>
+              <a:spcBef>
+                <a:spcPts val="0"/>
+              </a:spcBef>
+              <a:spcAft>
+                <a:spcPts val="0"/>
+              </a:spcAft>
+              <a:buNone/>
+            </a:pPr>
+            <a:r>
+              <a:t/>
+            </a:r>
+          </a:p>
+          <a:p xmlns:a="http://schemas.openxmlformats.org/drawingml/2006/main">
+            <a:pPr marL="0" indent="0">
+              <a:lnSpc>
+                <a:spcPct val="112000"/>
+              </a:lnSpc>
+              <a:spcBef>
+                <a:spcPts val="0"/>
+              </a:spcBef>
+              <a:spcAft>
+                <a:spcPts val="0"/>
+              </a:spcAft>
+              <a:buNone/>
+              <a:defRPr sz="1875">
+                <a:solidFill>
+                  <a:srgbClr val="FFFFFF"/>
+                </a:solidFill>
+                <a:latin typeface="Arial"/>
+                <a:ea typeface="Arial"/>
+                <a:cs typeface="Arial"/>
+              </a:defRPr>
+            </a:pPr>
+            <a:r>
+              <a:rPr sz="1875">
+                <a:solidFill>
+                  <a:srgbClr val="FFFFFF"/>
+                </a:solidFill>
+                <a:latin typeface="Arial"/>
+                <a:ea typeface="Arial"/>
+                <a:cs typeface="Arial"/>
+              </a:rPr>
+              <a:t>What test selects the numbers being added?</a:t>
             </a:r>
           </a:p>
         </p:txBody>
@@ -38292,24 +38008,7 @@
                 <a:ea typeface="Consolas"/>
                 <a:cs typeface="Consolas"/>
               </a:rPr>
-              <a:t>Rising-edge D flip-flop:</a:t>
-            </a:r>
-          </a:p>
-          <a:p xmlns:a="http://schemas.openxmlformats.org/drawingml/2006/main">
-            <a:pPr marL="0" indent="0">
-              <a:lnSpc>
-                <a:spcPct val="112000"/>
-              </a:lnSpc>
-              <a:spcBef>
-                <a:spcPts val="0"/>
-              </a:spcBef>
-              <a:spcAft>
-                <a:spcPts val="0"/>
-              </a:spcAft>
-              <a:buNone/>
-            </a:pPr>
-            <a:r>
-              <a:t/>
+              <a:t>unsigned sum_even(const unsigned *v,</a:t>
             </a:r>
           </a:p>
           <a:p xmlns:a="http://schemas.openxmlformats.org/drawingml/2006/main">
@@ -38342,7 +38041,7 @@
                 <a:ea typeface="Consolas"/>
                 <a:cs typeface="Consolas"/>
               </a:rPr>
-              <a:t>Q starts at 0.</a:t>
+              <a:t>                  unsigned n) {</a:t>
             </a:r>
           </a:p>
           <a:p xmlns:a="http://schemas.openxmlformats.org/drawingml/2006/main">
@@ -38375,7 +38074,7 @@
                 <a:ea typeface="Consolas"/>
                 <a:cs typeface="Consolas"/>
               </a:rPr>
-              <a:t>D changes to 1 between clock edges.</a:t>
+              <a:t>    unsigned total = 0;</a:t>
             </a:r>
           </a:p>
           <a:p xmlns:a="http://schemas.openxmlformats.org/drawingml/2006/main">
@@ -38408,7 +38107,7 @@
                 <a:ea typeface="Consolas"/>
                 <a:cs typeface="Consolas"/>
               </a:rPr>
-              <a:t>Before the next rising edge: Q = ?</a:t>
+              <a:t>    for (unsigned i = 0; i &lt; n; ++i) {</a:t>
             </a:r>
           </a:p>
           <a:p xmlns:a="http://schemas.openxmlformats.org/drawingml/2006/main">
@@ -38441,7 +38140,139 @@
                 <a:ea typeface="Consolas"/>
                 <a:cs typeface="Consolas"/>
               </a:rPr>
-              <a:t>At that rising edge: Q becomes ?</a:t>
+              <a:t>        if ((v[i] &amp; 1u) == 0)</a:t>
+            </a:r>
+          </a:p>
+          <a:p xmlns:a="http://schemas.openxmlformats.org/drawingml/2006/main">
+            <a:pPr marL="0" indent="0">
+              <a:lnSpc>
+                <a:spcPct val="112000"/>
+              </a:lnSpc>
+              <a:spcBef>
+                <a:spcPts val="0"/>
+              </a:spcBef>
+              <a:spcAft>
+                <a:spcPts val="0"/>
+              </a:spcAft>
+              <a:buNone/>
+              <a:defRPr sz="1800">
+                <a:solidFill>
+                  <a:srgbClr val="FFFFFF"/>
+                </a:solidFill>
+                <a:latin typeface="Consolas"/>
+                <a:ea typeface="Consolas"/>
+                <a:cs typeface="Consolas"/>
+              </a:defRPr>
+            </a:pPr>
+            <a:r>
+              <a:rPr sz="1800">
+                <a:solidFill>
+                  <a:srgbClr val="FFFFFF"/>
+                </a:solidFill>
+                <a:latin typeface="Consolas"/>
+                <a:ea typeface="Consolas"/>
+                <a:cs typeface="Consolas"/>
+              </a:rPr>
+              <a:t>            total += v[i];</a:t>
+            </a:r>
+          </a:p>
+          <a:p xmlns:a="http://schemas.openxmlformats.org/drawingml/2006/main">
+            <a:pPr marL="0" indent="0">
+              <a:lnSpc>
+                <a:spcPct val="112000"/>
+              </a:lnSpc>
+              <a:spcBef>
+                <a:spcPts val="0"/>
+              </a:spcBef>
+              <a:spcAft>
+                <a:spcPts val="0"/>
+              </a:spcAft>
+              <a:buNone/>
+              <a:defRPr sz="1800">
+                <a:solidFill>
+                  <a:srgbClr val="FFFFFF"/>
+                </a:solidFill>
+                <a:latin typeface="Consolas"/>
+                <a:ea typeface="Consolas"/>
+                <a:cs typeface="Consolas"/>
+              </a:defRPr>
+            </a:pPr>
+            <a:r>
+              <a:rPr sz="1800">
+                <a:solidFill>
+                  <a:srgbClr val="FFFFFF"/>
+                </a:solidFill>
+                <a:latin typeface="Consolas"/>
+                <a:ea typeface="Consolas"/>
+                <a:cs typeface="Consolas"/>
+              </a:rPr>
+              <a:t>    }</a:t>
+            </a:r>
+          </a:p>
+          <a:p xmlns:a="http://schemas.openxmlformats.org/drawingml/2006/main">
+            <a:pPr marL="0" indent="0">
+              <a:lnSpc>
+                <a:spcPct val="112000"/>
+              </a:lnSpc>
+              <a:spcBef>
+                <a:spcPts val="0"/>
+              </a:spcBef>
+              <a:spcAft>
+                <a:spcPts val="0"/>
+              </a:spcAft>
+              <a:buNone/>
+              <a:defRPr sz="1800">
+                <a:solidFill>
+                  <a:srgbClr val="FFFFFF"/>
+                </a:solidFill>
+                <a:latin typeface="Consolas"/>
+                <a:ea typeface="Consolas"/>
+                <a:cs typeface="Consolas"/>
+              </a:defRPr>
+            </a:pPr>
+            <a:r>
+              <a:rPr sz="1800">
+                <a:solidFill>
+                  <a:srgbClr val="FFFFFF"/>
+                </a:solidFill>
+                <a:latin typeface="Consolas"/>
+                <a:ea typeface="Consolas"/>
+                <a:cs typeface="Consolas"/>
+              </a:rPr>
+              <a:t>    return total;</a:t>
+            </a:r>
+          </a:p>
+          <a:p xmlns:a="http://schemas.openxmlformats.org/drawingml/2006/main">
+            <a:pPr marL="0" indent="0">
+              <a:lnSpc>
+                <a:spcPct val="112000"/>
+              </a:lnSpc>
+              <a:spcBef>
+                <a:spcPts val="0"/>
+              </a:spcBef>
+              <a:spcAft>
+                <a:spcPts val="0"/>
+              </a:spcAft>
+              <a:buNone/>
+              <a:defRPr sz="1800">
+                <a:solidFill>
+                  <a:srgbClr val="FFFFFF"/>
+                </a:solidFill>
+                <a:latin typeface="Consolas"/>
+                <a:ea typeface="Consolas"/>
+                <a:cs typeface="Consolas"/>
+              </a:defRPr>
+            </a:pPr>
+            <a:r>
+              <a:rPr sz="1800">
+                <a:solidFill>
+                  <a:srgbClr val="FFFFFF"/>
+                </a:solidFill>
+                <a:latin typeface="Consolas"/>
+                <a:ea typeface="Consolas"/>
+                <a:cs typeface="Consolas"/>
+              </a:rPr>
+              <a:t>}</a:t>
             </a:r>
           </a:p>
         </p:txBody>
@@ -38451,7 +38282,7 @@
           <p:cNvPr id="534" name="Takeaway">
             <a:extLst xmlns:a="http://schemas.openxmlformats.org/drawingml/2006/main">
               <a:ext uri="{FF2B5EF4-FFF2-40B4-BE49-F238E27FC236}">
-                <a16:creationId xmlns:a16="http://schemas.microsoft.com/office/drawing/2014/main" id="{DFC00C46-3041-4220-8429-67538637305C}"/>
+                <a16:creationId xmlns:a16="http://schemas.microsoft.com/office/drawing/2014/main" id="{B36847A7-6E6B-48F5-9CE6-A3EA048B512F}"/>
               </a:ext>
             </a:extLst>
           </p:cNvPr>
@@ -38609,7 +38440,7 @@
                 <a:ea typeface="Arial"/>
                 <a:cs typeface="Arial"/>
               </a:rPr>
-              <a:t>A latch is level-sensitive; a flip-flop is edge-triggered.</a:t>
+              <a:t>Assume v points to at least n valid elements. No new allocation is needed.</a:t>
             </a:r>
           </a:p>
         </p:txBody>
@@ -39120,7 +38951,7 @@
                 <a:ea typeface="Arial"/>
                 <a:cs typeface="Arial"/>
               </a:rPr>
-              <a:t>Short C code: trace the actual values</a:t>
+              <a:t>Pipelines overlap instructions</a:t>
             </a:r>
           </a:p>
         </p:txBody>
@@ -39356,7 +39187,7 @@
                 <a:ea typeface="Arial"/>
                 <a:cs typeface="Arial"/>
               </a:rPr>
-              <a:t>The midterm can include short code based on the homework. Trace one iteration at a time.</a:t>
+              <a:t>Split instruction work into stages so different instructions can occupy different stages at the same time.</a:t>
             </a:r>
           </a:p>
           <a:p xmlns:a="http://schemas.openxmlformats.org/drawingml/2006/main">
@@ -39406,57 +39237,7 @@
                 <a:ea typeface="Arial"/>
                 <a:cs typeface="Arial"/>
               </a:rPr>
-              <a:t>What does this function return for {3, 4, 7, 8}?</a:t>
-            </a:r>
-          </a:p>
-          <a:p xmlns:a="http://schemas.openxmlformats.org/drawingml/2006/main">
-            <a:pPr marL="0" indent="0">
-              <a:lnSpc>
-                <a:spcPct val="112000"/>
-              </a:lnSpc>
-              <a:spcBef>
-                <a:spcPts val="0"/>
-              </a:spcBef>
-              <a:spcAft>
-                <a:spcPts val="0"/>
-              </a:spcAft>
-              <a:buNone/>
-            </a:pPr>
-            <a:r>
-              <a:t/>
-            </a:r>
-          </a:p>
-          <a:p xmlns:a="http://schemas.openxmlformats.org/drawingml/2006/main">
-            <a:pPr marL="0" indent="0">
-              <a:lnSpc>
-                <a:spcPct val="112000"/>
-              </a:lnSpc>
-              <a:spcBef>
-                <a:spcPts val="0"/>
-              </a:spcBef>
-              <a:spcAft>
-                <a:spcPts val="0"/>
-              </a:spcAft>
-              <a:buNone/>
-              <a:defRPr sz="1875">
-                <a:solidFill>
-                  <a:srgbClr val="FFFFFF"/>
-                </a:solidFill>
-                <a:latin typeface="Arial"/>
-                <a:ea typeface="Arial"/>
-                <a:cs typeface="Arial"/>
-              </a:defRPr>
-            </a:pPr>
-            <a:r>
-              <a:rPr sz="1875">
-                <a:solidFill>
-                  <a:srgbClr val="FFFFFF"/>
-                </a:solidFill>
-                <a:latin typeface="Arial"/>
-                <a:ea typeface="Arial"/>
-                <a:cs typeface="Arial"/>
-              </a:rPr>
-              <a:t>What test selects the numbers being added?</a:t>
+              <a:t>Pipelining improves throughput. It does not mean one instruction finishes instantly.</a:t>
             </a:r>
           </a:p>
         </p:txBody>
@@ -39692,7 +39473,7 @@
                 <a:ea typeface="Consolas"/>
                 <a:cs typeface="Consolas"/>
               </a:rPr>
-              <a:t>unsigned sum_even(const unsigned *v,</a:t>
+              <a:t>IF: fetch the instruction</a:t>
             </a:r>
           </a:p>
           <a:p xmlns:a="http://schemas.openxmlformats.org/drawingml/2006/main">
@@ -39725,7 +39506,7 @@
                 <a:ea typeface="Consolas"/>
                 <a:cs typeface="Consolas"/>
               </a:rPr>
-              <a:t>                  unsigned n) {</a:t>
+              <a:t>ID: decode and read registers</a:t>
             </a:r>
           </a:p>
           <a:p xmlns:a="http://schemas.openxmlformats.org/drawingml/2006/main">
@@ -39758,7 +39539,7 @@
                 <a:ea typeface="Consolas"/>
                 <a:cs typeface="Consolas"/>
               </a:rPr>
-              <a:t>    unsigned total = 0;</a:t>
+              <a:t>EX: compute or calculate an address</a:t>
             </a:r>
           </a:p>
           <a:p xmlns:a="http://schemas.openxmlformats.org/drawingml/2006/main">
@@ -39791,7 +39572,7 @@
                 <a:ea typeface="Consolas"/>
                 <a:cs typeface="Consolas"/>
               </a:rPr>
-              <a:t>    for (unsigned i = 0; i &lt; n; ++i) {</a:t>
+              <a:t>MA: access memory</a:t>
             </a:r>
           </a:p>
           <a:p xmlns:a="http://schemas.openxmlformats.org/drawingml/2006/main">
@@ -39824,7 +39605,24 @@
                 <a:ea typeface="Consolas"/>
                 <a:cs typeface="Consolas"/>
               </a:rPr>
-              <a:t>        if ((v[i] &amp; 1u) == 0)</a:t>
+              <a:t>WB: write the result</a:t>
+            </a:r>
+          </a:p>
+          <a:p xmlns:a="http://schemas.openxmlformats.org/drawingml/2006/main">
+            <a:pPr marL="0" indent="0">
+              <a:lnSpc>
+                <a:spcPct val="112000"/>
+              </a:lnSpc>
+              <a:spcBef>
+                <a:spcPts val="0"/>
+              </a:spcBef>
+              <a:spcAft>
+                <a:spcPts val="0"/>
+              </a:spcAft>
+              <a:buNone/>
+            </a:pPr>
+            <a:r>
+              <a:t/>
             </a:r>
           </a:p>
           <a:p xmlns:a="http://schemas.openxmlformats.org/drawingml/2006/main">
@@ -39857,7 +39655,7 @@
                 <a:ea typeface="Consolas"/>
                 <a:cs typeface="Consolas"/>
               </a:rPr>
-              <a:t>            total += v[i];</a:t>
+              <a:t>Ideal 5-stage pipeline, 4 instructions:</a:t>
             </a:r>
           </a:p>
           <a:p xmlns:a="http://schemas.openxmlformats.org/drawingml/2006/main">
@@ -39890,73 +39688,7 @@
                 <a:ea typeface="Consolas"/>
                 <a:cs typeface="Consolas"/>
               </a:rPr>
-              <a:t>    }</a:t>
-            </a:r>
-          </a:p>
-          <a:p xmlns:a="http://schemas.openxmlformats.org/drawingml/2006/main">
-            <a:pPr marL="0" indent="0">
-              <a:lnSpc>
-                <a:spcPct val="112000"/>
-              </a:lnSpc>
-              <a:spcBef>
-                <a:spcPts val="0"/>
-              </a:spcBef>
-              <a:spcAft>
-                <a:spcPts val="0"/>
-              </a:spcAft>
-              <a:buNone/>
-              <a:defRPr sz="1800">
-                <a:solidFill>
-                  <a:srgbClr val="FFFFFF"/>
-                </a:solidFill>
-                <a:latin typeface="Consolas"/>
-                <a:ea typeface="Consolas"/>
-                <a:cs typeface="Consolas"/>
-              </a:defRPr>
-            </a:pPr>
-            <a:r>
-              <a:rPr sz="1800">
-                <a:solidFill>
-                  <a:srgbClr val="FFFFFF"/>
-                </a:solidFill>
-                <a:latin typeface="Consolas"/>
-                <a:ea typeface="Consolas"/>
-                <a:cs typeface="Consolas"/>
-              </a:rPr>
-              <a:t>    return total;</a:t>
-            </a:r>
-          </a:p>
-          <a:p xmlns:a="http://schemas.openxmlformats.org/drawingml/2006/main">
-            <a:pPr marL="0" indent="0">
-              <a:lnSpc>
-                <a:spcPct val="112000"/>
-              </a:lnSpc>
-              <a:spcBef>
-                <a:spcPts val="0"/>
-              </a:spcBef>
-              <a:spcAft>
-                <a:spcPts val="0"/>
-              </a:spcAft>
-              <a:buNone/>
-              <a:defRPr sz="1800">
-                <a:solidFill>
-                  <a:srgbClr val="FFFFFF"/>
-                </a:solidFill>
-                <a:latin typeface="Consolas"/>
-                <a:ea typeface="Consolas"/>
-                <a:cs typeface="Consolas"/>
-              </a:defRPr>
-            </a:pPr>
-            <a:r>
-              <a:rPr sz="1800">
-                <a:solidFill>
-                  <a:srgbClr val="FFFFFF"/>
-                </a:solidFill>
-                <a:latin typeface="Consolas"/>
-                <a:ea typeface="Consolas"/>
-                <a:cs typeface="Consolas"/>
-              </a:rPr>
-              <a:t>}</a:t>
+              <a:t>cycles = 5 + 4 − 1 = ?</a:t>
             </a:r>
           </a:p>
         </p:txBody>
@@ -39966,7 +39698,7 @@
           <p:cNvPr id="534" name="Takeaway">
             <a:extLst xmlns:a="http://schemas.openxmlformats.org/drawingml/2006/main">
               <a:ext uri="{FF2B5EF4-FFF2-40B4-BE49-F238E27FC236}">
-                <a16:creationId xmlns:a16="http://schemas.microsoft.com/office/drawing/2014/main" id="{3E5A47B2-87BE-4D25-BD6F-F3B091C3B25B}"/>
+                <a16:creationId xmlns:a16="http://schemas.microsoft.com/office/drawing/2014/main" id="{86129679-6608-40DA-91B3-2AD17D917755}"/>
               </a:ext>
             </a:extLst>
           </p:cNvPr>
@@ -40124,7 +39856,7 @@
                 <a:ea typeface="Arial"/>
                 <a:cs typeface="Arial"/>
               </a:rPr>
-              <a:t>Assume v points to at least n valid elements. No new allocation is needed.</a:t>
+              <a:t>Assume one cycle per stage, no hazards, and a single issue per cycle.</a:t>
             </a:r>
           </a:p>
         </p:txBody>
@@ -40635,7 +40367,7 @@
                 <a:ea typeface="Arial"/>
                 <a:cs typeface="Arial"/>
               </a:rPr>
-              <a:t>Pipelines overlap instructions</a:t>
+              <a:t>Dependencies can force a wait</a:t>
             </a:r>
           </a:p>
         </p:txBody>
@@ -40871,7 +40603,7 @@
                 <a:ea typeface="Arial"/>
                 <a:cs typeface="Arial"/>
               </a:rPr>
-              <a:t>Split instruction work into stages so different instructions can occupy different stages at the same time.</a:t>
+              <a:t>A data hazard occurs when an instruction needs a result that is not ready. Forwarding can deliver a result before normal writeback; some cases still need a stall.</a:t>
             </a:r>
           </a:p>
           <a:p xmlns:a="http://schemas.openxmlformats.org/drawingml/2006/main">
@@ -40921,7 +40653,7 @@
                 <a:ea typeface="Arial"/>
                 <a:cs typeface="Arial"/>
               </a:rPr>
-              <a:t>Pipelining improves throughput. It does not mean one instruction finishes instantly.</a:t>
+              <a:t>A control hazard comes from uncertainty about the next instruction address.</a:t>
             </a:r>
           </a:p>
         </p:txBody>
@@ -41157,7 +40889,7 @@
                 <a:ea typeface="Consolas"/>
                 <a:cs typeface="Consolas"/>
               </a:rPr>
-              <a:t>IF: fetch the instruction</a:t>
+              <a:t># Data dependency on rax</a:t>
             </a:r>
           </a:p>
           <a:p xmlns:a="http://schemas.openxmlformats.org/drawingml/2006/main">
@@ -41190,7 +40922,7 @@
                 <a:ea typeface="Consolas"/>
                 <a:cs typeface="Consolas"/>
               </a:rPr>
-              <a:t>ID: decode and read registers</a:t>
+              <a:t>movq (%rdi), %rax</a:t>
             </a:r>
           </a:p>
           <a:p xmlns:a="http://schemas.openxmlformats.org/drawingml/2006/main">
@@ -41223,7 +40955,24 @@
                 <a:ea typeface="Consolas"/>
                 <a:cs typeface="Consolas"/>
               </a:rPr>
-              <a:t>EX: compute or calculate an address</a:t>
+              <a:t>addq %rax, %rbx</a:t>
+            </a:r>
+          </a:p>
+          <a:p xmlns:a="http://schemas.openxmlformats.org/drawingml/2006/main">
+            <a:pPr marL="0" indent="0">
+              <a:lnSpc>
+                <a:spcPct val="112000"/>
+              </a:lnSpc>
+              <a:spcBef>
+                <a:spcPts val="0"/>
+              </a:spcBef>
+              <a:spcAft>
+                <a:spcPts val="0"/>
+              </a:spcAft>
+              <a:buNone/>
+            </a:pPr>
+            <a:r>
+              <a:t/>
             </a:r>
           </a:p>
           <a:p xmlns:a="http://schemas.openxmlformats.org/drawingml/2006/main">
@@ -41256,7 +41005,7 @@
                 <a:ea typeface="Consolas"/>
                 <a:cs typeface="Consolas"/>
               </a:rPr>
-              <a:t>MA: access memory</a:t>
+              <a:t># Control depends on comparison</a:t>
             </a:r>
           </a:p>
           <a:p xmlns:a="http://schemas.openxmlformats.org/drawingml/2006/main">
@@ -41289,24 +41038,7 @@
                 <a:ea typeface="Consolas"/>
                 <a:cs typeface="Consolas"/>
               </a:rPr>
-              <a:t>WB: write the result</a:t>
-            </a:r>
-          </a:p>
-          <a:p xmlns:a="http://schemas.openxmlformats.org/drawingml/2006/main">
-            <a:pPr marL="0" indent="0">
-              <a:lnSpc>
-                <a:spcPct val="112000"/>
-              </a:lnSpc>
-              <a:spcBef>
-                <a:spcPts val="0"/>
-              </a:spcBef>
-              <a:spcAft>
-                <a:spcPts val="0"/>
-              </a:spcAft>
-              <a:buNone/>
-            </a:pPr>
-            <a:r>
-              <a:t/>
+              <a:t>cmpq $0, %rax</a:t>
             </a:r>
           </a:p>
           <a:p xmlns:a="http://schemas.openxmlformats.org/drawingml/2006/main">
@@ -41339,40 +41071,7 @@
                 <a:ea typeface="Consolas"/>
                 <a:cs typeface="Consolas"/>
               </a:rPr>
-              <a:t>Ideal 5-stage pipeline, 4 instructions:</a:t>
-            </a:r>
-          </a:p>
-          <a:p xmlns:a="http://schemas.openxmlformats.org/drawingml/2006/main">
-            <a:pPr marL="0" indent="0">
-              <a:lnSpc>
-                <a:spcPct val="112000"/>
-              </a:lnSpc>
-              <a:spcBef>
-                <a:spcPts val="0"/>
-              </a:spcBef>
-              <a:spcAft>
-                <a:spcPts val="0"/>
-              </a:spcAft>
-              <a:buNone/>
-              <a:defRPr sz="1800">
-                <a:solidFill>
-                  <a:srgbClr val="FFFFFF"/>
-                </a:solidFill>
-                <a:latin typeface="Consolas"/>
-                <a:ea typeface="Consolas"/>
-                <a:cs typeface="Consolas"/>
-              </a:defRPr>
-            </a:pPr>
-            <a:r>
-              <a:rPr sz="1800">
-                <a:solidFill>
-                  <a:srgbClr val="FFFFFF"/>
-                </a:solidFill>
-                <a:latin typeface="Consolas"/>
-                <a:ea typeface="Consolas"/>
-                <a:cs typeface="Consolas"/>
-              </a:rPr>
-              <a:t>cycles = 5 + 4 − 1 = ?</a:t>
+              <a:t>je zero_case</a:t>
             </a:r>
           </a:p>
         </p:txBody>
@@ -41382,7 +41081,7 @@
           <p:cNvPr id="534" name="Takeaway">
             <a:extLst xmlns:a="http://schemas.openxmlformats.org/drawingml/2006/main">
               <a:ext uri="{FF2B5EF4-FFF2-40B4-BE49-F238E27FC236}">
-                <a16:creationId xmlns:a16="http://schemas.microsoft.com/office/drawing/2014/main" id="{8E06FE4E-C752-4207-AEC0-63032D8610DE}"/>
+                <a16:creationId xmlns:a16="http://schemas.microsoft.com/office/drawing/2014/main" id="{96B91709-A055-4146-A099-BB7584BBF9AC}"/>
               </a:ext>
             </a:extLst>
           </p:cNvPr>
@@ -41540,7 +41239,7 @@
                 <a:ea typeface="Arial"/>
                 <a:cs typeface="Arial"/>
               </a:rPr>
-              <a:t>Assume one cycle per stage, no hazards, and a single issue per cycle.</a:t>
+              <a:t>Forwarding cannot provide a value before the earlier instruction has produced it.</a:t>
             </a:r>
           </a:p>
         </p:txBody>
@@ -42783,7 +42482,7 @@
           <p:cNvPr id="534" name="Takeaway">
             <a:extLst xmlns:a="http://schemas.openxmlformats.org/drawingml/2006/main">
               <a:ext uri="{FF2B5EF4-FFF2-40B4-BE49-F238E27FC236}">
-                <a16:creationId xmlns:a16="http://schemas.microsoft.com/office/drawing/2014/main" id="{6D727D0F-ED1A-40E8-86E2-4A21FD8CF2F2}"/>
+                <a16:creationId xmlns:a16="http://schemas.microsoft.com/office/drawing/2014/main" id="{F198C445-5161-454C-96BD-58E9F698CCE8}"/>
               </a:ext>
             </a:extLst>
           </p:cNvPr>
@@ -43452,7 +43151,7 @@
                 <a:ea typeface="Arial"/>
                 <a:cs typeface="Arial"/>
               </a:rPr>
-              <a:t>Dependencies can force a wait</a:t>
+              <a:t>Final check: explain the difference</a:t>
             </a:r>
           </a:p>
         </p:txBody>
@@ -43688,7 +43387,7 @@
                 <a:ea typeface="Arial"/>
                 <a:cs typeface="Arial"/>
               </a:rPr>
-              <a:t>A data hazard occurs when an instruction needs a result that is not ready. Forwarding can deliver a result before normal writeback; some cases still need a stall.</a:t>
+              <a:t>Give one clear sentence for each pair.</a:t>
             </a:r>
           </a:p>
           <a:p xmlns:a="http://schemas.openxmlformats.org/drawingml/2006/main">
@@ -43738,7 +43437,57 @@
                 <a:ea typeface="Arial"/>
                 <a:cs typeface="Arial"/>
               </a:rPr>
-              <a:t>A control hazard comes from uncertainty about the next instruction address.</a:t>
+              <a:t>An answer should name what changes and what stays the same.</a:t>
+            </a:r>
+          </a:p>
+          <a:p xmlns:a="http://schemas.openxmlformats.org/drawingml/2006/main">
+            <a:pPr marL="0" indent="0">
+              <a:lnSpc>
+                <a:spcPct val="112000"/>
+              </a:lnSpc>
+              <a:spcBef>
+                <a:spcPts val="0"/>
+              </a:spcBef>
+              <a:spcAft>
+                <a:spcPts val="0"/>
+              </a:spcAft>
+              <a:buNone/>
+            </a:pPr>
+            <a:r>
+              <a:t/>
+            </a:r>
+          </a:p>
+          <a:p xmlns:a="http://schemas.openxmlformats.org/drawingml/2006/main">
+            <a:pPr marL="0" indent="0">
+              <a:lnSpc>
+                <a:spcPct val="112000"/>
+              </a:lnSpc>
+              <a:spcBef>
+                <a:spcPts val="0"/>
+              </a:spcBef>
+              <a:spcAft>
+                <a:spcPts val="0"/>
+              </a:spcAft>
+              <a:buNone/>
+              <a:defRPr sz="1875">
+                <a:solidFill>
+                  <a:srgbClr val="FFFFFF"/>
+                </a:solidFill>
+                <a:latin typeface="Arial"/>
+                <a:ea typeface="Arial"/>
+                <a:cs typeface="Arial"/>
+              </a:defRPr>
+            </a:pPr>
+            <a:r>
+              <a:rPr sz="1875">
+                <a:solidFill>
+                  <a:srgbClr val="FFFFFF"/>
+                </a:solidFill>
+                <a:latin typeface="Arial"/>
+                <a:ea typeface="Arial"/>
+                <a:cs typeface="Arial"/>
+              </a:rPr>
+              <a:t>Then return to the topic you could not explain yet.</a:t>
             </a:r>
           </a:p>
         </p:txBody>
@@ -43974,7 +43723,7 @@
                 <a:ea typeface="Consolas"/>
                 <a:cs typeface="Consolas"/>
               </a:rPr>
-              <a:t># Data dependency on rax</a:t>
+              <a:t>1. Pointer size vs allocation size</a:t>
             </a:r>
           </a:p>
           <a:p xmlns:a="http://schemas.openxmlformats.org/drawingml/2006/main">
@@ -44007,7 +43756,7 @@
                 <a:ea typeface="Consolas"/>
                 <a:cs typeface="Consolas"/>
               </a:rPr>
-              <a:t>movq (%rdi), %rax</a:t>
+              <a:t>2. Address vs contents</a:t>
             </a:r>
           </a:p>
           <a:p xmlns:a="http://schemas.openxmlformats.org/drawingml/2006/main">
@@ -44040,24 +43789,7 @@
                 <a:ea typeface="Consolas"/>
                 <a:cs typeface="Consolas"/>
               </a:rPr>
-              <a:t>addq %rax, %rbx</a:t>
-            </a:r>
-          </a:p>
-          <a:p xmlns:a="http://schemas.openxmlformats.org/drawingml/2006/main">
-            <a:pPr marL="0" indent="0">
-              <a:lnSpc>
-                <a:spcPct val="112000"/>
-              </a:lnSpc>
-              <a:spcBef>
-                <a:spcPts val="0"/>
-              </a:spcBef>
-              <a:spcAft>
-                <a:spcPts val="0"/>
-              </a:spcAft>
-              <a:buNone/>
-            </a:pPr>
-            <a:r>
-              <a:t/>
+              <a:t>3. Stored fraction vs significand</a:t>
             </a:r>
           </a:p>
           <a:p xmlns:a="http://schemas.openxmlformats.org/drawingml/2006/main">
@@ -44090,7 +43822,7 @@
                 <a:ea typeface="Consolas"/>
                 <a:cs typeface="Consolas"/>
               </a:rPr>
-              <a:t># Control depends on comparison</a:t>
+              <a:t>4. Struct vs union</a:t>
             </a:r>
           </a:p>
           <a:p xmlns:a="http://schemas.openxmlformats.org/drawingml/2006/main">
@@ -44123,7 +43855,7 @@
                 <a:ea typeface="Consolas"/>
                 <a:cs typeface="Consolas"/>
               </a:rPr>
-              <a:t>cmpq $0, %rax</a:t>
+              <a:t>5. Stack cleanup vs free</a:t>
             </a:r>
           </a:p>
           <a:p xmlns:a="http://schemas.openxmlformats.org/drawingml/2006/main">
@@ -44156,7 +43888,7 @@
                 <a:ea typeface="Consolas"/>
                 <a:cs typeface="Consolas"/>
               </a:rPr>
-              <a:t>je zero_case</a:t>
+              <a:t>6. Latency vs throughput</a:t>
             </a:r>
           </a:p>
         </p:txBody>
@@ -44166,1423 +43898,7 @@
           <p:cNvPr id="534" name="Takeaway">
             <a:extLst xmlns:a="http://schemas.openxmlformats.org/drawingml/2006/main">
               <a:ext uri="{FF2B5EF4-FFF2-40B4-BE49-F238E27FC236}">
-                <a16:creationId xmlns:a16="http://schemas.microsoft.com/office/drawing/2014/main" id="{A8BE8A4C-953F-41FF-BD08-68E3A7DD119A}"/>
-              </a:ext>
-            </a:extLst>
-          </p:cNvPr>
-          <p:cNvSpPr>
-            <a:spLocks xmlns:a="http://schemas.openxmlformats.org/drawingml/2006/main" noGrp="1"/>
-          </p:cNvSpPr>
-          <p:nvPr/>
-        </p:nvSpPr>
-        <p:spPr>
-          <a:xfrm xmlns:a="http://schemas.openxmlformats.org/drawingml/2006/main">
-            <a:off x="393668" y="5715000"/>
-            <a:ext cx="11404283" cy="466725"/>
-          </a:xfrm>
-          <a:prstGeom xmlns:a="http://schemas.openxmlformats.org/drawingml/2006/main" prst="rect">
-            <a:avLst/>
-          </a:prstGeom>
-          <a:noFill xmlns:a="http://schemas.openxmlformats.org/drawingml/2006/main"/>
-          <a:ln xmlns:a="http://schemas.openxmlformats.org/drawingml/2006/main" w="0">
-            <a:noFill/>
-          </a:ln>
-        </p:spPr>
-        <p:txBody>
-          <a:bodyPr xmlns:a="http://schemas.openxmlformats.org/drawingml/2006/main" lIns="0" tIns="0" rIns="0" bIns="0" anchor="t">
-            <a:noAutofit/>
-          </a:bodyPr>
-          <a:lstStyle xmlns:a="http://schemas.openxmlformats.org/drawingml/2006/main">
-            <a:defPPr>
-              <a:defRPr sz="1350">
-                <a:solidFill>
-                  <a:srgbClr val="CCCCCC"/>
-                </a:solidFill>
-                <a:latin typeface="Arial"/>
-                <a:ea typeface="Arial"/>
-                <a:cs typeface="Arial"/>
-              </a:defRPr>
-            </a:defPPr>
-            <a:lvl1pPr>
-              <a:defRPr sz="1350">
-                <a:solidFill>
-                  <a:srgbClr val="CCCCCC"/>
-                </a:solidFill>
-                <a:latin typeface="Arial"/>
-                <a:ea typeface="Arial"/>
-                <a:cs typeface="Arial"/>
-              </a:defRPr>
-            </a:lvl1pPr>
-            <a:lvl2pPr>
-              <a:defRPr sz="1350">
-                <a:solidFill>
-                  <a:srgbClr val="CCCCCC"/>
-                </a:solidFill>
-                <a:latin typeface="Arial"/>
-                <a:ea typeface="Arial"/>
-                <a:cs typeface="Arial"/>
-              </a:defRPr>
-            </a:lvl2pPr>
-            <a:lvl3pPr>
-              <a:defRPr sz="1350">
-                <a:solidFill>
-                  <a:srgbClr val="CCCCCC"/>
-                </a:solidFill>
-                <a:latin typeface="Arial"/>
-                <a:ea typeface="Arial"/>
-                <a:cs typeface="Arial"/>
-              </a:defRPr>
-            </a:lvl3pPr>
-            <a:lvl4pPr>
-              <a:defRPr sz="1350">
-                <a:solidFill>
-                  <a:srgbClr val="CCCCCC"/>
-                </a:solidFill>
-                <a:latin typeface="Arial"/>
-                <a:ea typeface="Arial"/>
-                <a:cs typeface="Arial"/>
-              </a:defRPr>
-            </a:lvl4pPr>
-            <a:lvl5pPr>
-              <a:defRPr sz="1350">
-                <a:solidFill>
-                  <a:srgbClr val="CCCCCC"/>
-                </a:solidFill>
-                <a:latin typeface="Arial"/>
-                <a:ea typeface="Arial"/>
-                <a:cs typeface="Arial"/>
-              </a:defRPr>
-            </a:lvl5pPr>
-            <a:lvl6pPr>
-              <a:defRPr sz="1350">
-                <a:solidFill>
-                  <a:srgbClr val="CCCCCC"/>
-                </a:solidFill>
-                <a:latin typeface="Arial"/>
-                <a:ea typeface="Arial"/>
-                <a:cs typeface="Arial"/>
-              </a:defRPr>
-            </a:lvl6pPr>
-            <a:lvl7pPr>
-              <a:defRPr sz="1350">
-                <a:solidFill>
-                  <a:srgbClr val="CCCCCC"/>
-                </a:solidFill>
-                <a:latin typeface="Arial"/>
-                <a:ea typeface="Arial"/>
-                <a:cs typeface="Arial"/>
-              </a:defRPr>
-            </a:lvl7pPr>
-            <a:lvl8pPr>
-              <a:defRPr sz="1350">
-                <a:solidFill>
-                  <a:srgbClr val="CCCCCC"/>
-                </a:solidFill>
-                <a:latin typeface="Arial"/>
-                <a:ea typeface="Arial"/>
-                <a:cs typeface="Arial"/>
-              </a:defRPr>
-            </a:lvl8pPr>
-            <a:lvl9pPr>
-              <a:defRPr sz="1350">
-                <a:solidFill>
-                  <a:srgbClr val="CCCCCC"/>
-                </a:solidFill>
-                <a:latin typeface="Arial"/>
-                <a:ea typeface="Arial"/>
-                <a:cs typeface="Arial"/>
-              </a:defRPr>
-            </a:lvl9pPr>
-          </a:lstStyle>
-          <a:p xmlns:a="http://schemas.openxmlformats.org/drawingml/2006/main">
-            <a:pPr marL="0" indent="0">
-              <a:lnSpc>
-                <a:spcPct val="112000"/>
-              </a:lnSpc>
-              <a:spcBef>
-                <a:spcPts val="0"/>
-              </a:spcBef>
-              <a:spcAft>
-                <a:spcPts val="0"/>
-              </a:spcAft>
-              <a:buNone/>
-              <a:defRPr sz="1350">
-                <a:solidFill>
-                  <a:srgbClr val="CCCCCC"/>
-                </a:solidFill>
-                <a:latin typeface="Arial"/>
-                <a:ea typeface="Arial"/>
-                <a:cs typeface="Arial"/>
-              </a:defRPr>
-            </a:pPr>
-            <a:r>
-              <a:rPr sz="1350">
-                <a:solidFill>
-                  <a:srgbClr val="CCCCCC"/>
-                </a:solidFill>
-                <a:latin typeface="Arial"/>
-                <a:ea typeface="Arial"/>
-                <a:cs typeface="Arial"/>
-              </a:rPr>
-              <a:t>Forwarding cannot provide a value before the earlier instruction has produced it.</a:t>
-            </a:r>
-          </a:p>
-        </p:txBody>
-      </p:sp>
-    </p:spTree>
-    <p:extLst>
-      <p:ext uri="{BB962C8B-B14F-4D97-AF65-F5344CB8AC3E}">
-        <p14:creationId xmlns:p14="http://schemas.microsoft.com/office/powerpoint/2010/main" val="3667182145"/>
-      </p:ext>
-    </p:extLst>
-  </p:cSld>
-</p:sld>
-</file>
-
-<file path=ppt/slides/slide31.xml><?xml version="1.0" encoding="utf-8"?>
-<p:sld xmlns:p="http://schemas.openxmlformats.org/presentationml/2006/main">
-  <p:cSld>
-    <p:spTree>
-      <p:nvGrpSpPr>
-        <p:cNvPr id="1" name=""/>
-        <p:cNvGrpSpPr/>
-        <p:nvPr/>
-      </p:nvGrpSpPr>
-      <p:grpSpPr>
-        <a:xfrm xmlns:a="http://schemas.openxmlformats.org/drawingml/2006/main"/>
-      </p:grpSpPr>
-      <p:sp>
-        <p:nvSpPr>
-          <p:cNvPr id="3" name="Footer Placeholder 2">
-            <a:extLst xmlns:a="http://schemas.openxmlformats.org/drawingml/2006/main">
-              <a:ext uri="{FF2B5EF4-FFF2-40B4-BE49-F238E27FC236}">
-                <a16:creationId xmlns:a16="http://schemas.microsoft.com/office/drawing/2014/main" id="{39EA4C82-C623-0196-4A95-876ADF5DEE92}"/>
-              </a:ext>
-            </a:extLst>
-          </p:cNvPr>
-          <p:cNvSpPr>
-            <a:spLocks xmlns:a="http://schemas.openxmlformats.org/drawingml/2006/main" noGrp="1"/>
-          </p:cNvSpPr>
-          <p:nvPr>
-            <p:ph type="ftr" idx="3"/>
-          </p:nvPr>
-        </p:nvSpPr>
-        <p:spPr>
-          <a:xfrm xmlns:a="http://schemas.openxmlformats.org/drawingml/2006/main">
-            <a:off x="393700" y="6279952"/>
-            <a:ext cx="3568700" cy="241240"/>
-          </a:xfrm>
-        </p:spPr>
-        <p:txBody>
-          <a:bodyPr xmlns:a="http://schemas.openxmlformats.org/drawingml/2006/main" lIns="0" tIns="0" rIns="0" bIns="0" anchor="t">
-            <a:noAutofit/>
-          </a:bodyPr>
-          <a:lstStyle xmlns:a="http://schemas.openxmlformats.org/drawingml/2006/main">
-            <a:defPPr>
-              <a:defRPr sz="1125">
-                <a:solidFill>
-                  <a:srgbClr val="FFFFFF"/>
-                </a:solidFill>
-                <a:latin typeface="Arial"/>
-                <a:ea typeface="Arial"/>
-                <a:cs typeface="Arial"/>
-              </a:defRPr>
-            </a:defPPr>
-            <a:lvl1pPr>
-              <a:defRPr sz="1125">
-                <a:solidFill>
-                  <a:srgbClr val="FFFFFF"/>
-                </a:solidFill>
-                <a:latin typeface="Arial"/>
-                <a:ea typeface="Arial"/>
-                <a:cs typeface="Arial"/>
-              </a:defRPr>
-            </a:lvl1pPr>
-            <a:lvl2pPr>
-              <a:defRPr sz="1125">
-                <a:solidFill>
-                  <a:srgbClr val="FFFFFF"/>
-                </a:solidFill>
-                <a:latin typeface="Arial"/>
-                <a:ea typeface="Arial"/>
-                <a:cs typeface="Arial"/>
-              </a:defRPr>
-            </a:lvl2pPr>
-            <a:lvl3pPr>
-              <a:defRPr sz="1125">
-                <a:solidFill>
-                  <a:srgbClr val="FFFFFF"/>
-                </a:solidFill>
-                <a:latin typeface="Arial"/>
-                <a:ea typeface="Arial"/>
-                <a:cs typeface="Arial"/>
-              </a:defRPr>
-            </a:lvl3pPr>
-            <a:lvl4pPr>
-              <a:defRPr sz="1125">
-                <a:solidFill>
-                  <a:srgbClr val="FFFFFF"/>
-                </a:solidFill>
-                <a:latin typeface="Arial"/>
-                <a:ea typeface="Arial"/>
-                <a:cs typeface="Arial"/>
-              </a:defRPr>
-            </a:lvl4pPr>
-            <a:lvl5pPr>
-              <a:defRPr sz="1125">
-                <a:solidFill>
-                  <a:srgbClr val="FFFFFF"/>
-                </a:solidFill>
-                <a:latin typeface="Arial"/>
-                <a:ea typeface="Arial"/>
-                <a:cs typeface="Arial"/>
-              </a:defRPr>
-            </a:lvl5pPr>
-            <a:lvl6pPr>
-              <a:defRPr sz="1125">
-                <a:solidFill>
-                  <a:srgbClr val="FFFFFF"/>
-                </a:solidFill>
-                <a:latin typeface="Arial"/>
-                <a:ea typeface="Arial"/>
-                <a:cs typeface="Arial"/>
-              </a:defRPr>
-            </a:lvl6pPr>
-            <a:lvl7pPr>
-              <a:defRPr sz="1125">
-                <a:solidFill>
-                  <a:srgbClr val="FFFFFF"/>
-                </a:solidFill>
-                <a:latin typeface="Arial"/>
-                <a:ea typeface="Arial"/>
-                <a:cs typeface="Arial"/>
-              </a:defRPr>
-            </a:lvl7pPr>
-            <a:lvl8pPr>
-              <a:defRPr sz="1125">
-                <a:solidFill>
-                  <a:srgbClr val="FFFFFF"/>
-                </a:solidFill>
-                <a:latin typeface="Arial"/>
-                <a:ea typeface="Arial"/>
-                <a:cs typeface="Arial"/>
-              </a:defRPr>
-            </a:lvl8pPr>
-            <a:lvl9pPr>
-              <a:defRPr sz="1125">
-                <a:solidFill>
-                  <a:srgbClr val="FFFFFF"/>
-                </a:solidFill>
-                <a:latin typeface="Arial"/>
-                <a:ea typeface="Arial"/>
-                <a:cs typeface="Arial"/>
-              </a:defRPr>
-            </a:lvl9pPr>
-          </a:lstStyle>
-          <a:p xmlns:a="http://schemas.openxmlformats.org/drawingml/2006/main">
-            <a:pPr marL="0" indent="0">
-              <a:lnSpc>
-                <a:spcPct val="112000"/>
-              </a:lnSpc>
-              <a:spcBef>
-                <a:spcPts val="0"/>
-              </a:spcBef>
-              <a:spcAft>
-                <a:spcPts val="0"/>
-              </a:spcAft>
-              <a:buNone/>
-              <a:defRPr sz="1125">
-                <a:solidFill>
-                  <a:srgbClr val="FFFFFF"/>
-                </a:solidFill>
-                <a:latin typeface="Arial"/>
-                <a:ea typeface="Arial"/>
-                <a:cs typeface="Arial"/>
-              </a:defRPr>
-            </a:pPr>
-            <a:r>
-              <a:rPr sz="1125">
-                <a:solidFill>
-                  <a:srgbClr val="FFFFFF"/>
-                </a:solidFill>
-                <a:latin typeface="Arial"/>
-                <a:ea typeface="Arial"/>
-                <a:cs typeface="Arial"/>
-              </a:rPr>
-              <a:t>CS 211 · Recitation 07</a:t>
-            </a:r>
-          </a:p>
-        </p:txBody>
-      </p:sp>
-      <p:sp>
-        <p:nvSpPr>
-          <p:cNvPr id="532" name="Google Shape;532;p58">
-            <a:extLst xmlns:a="http://schemas.openxmlformats.org/drawingml/2006/main">
-              <a:ext uri="{FF2B5EF4-FFF2-40B4-BE49-F238E27FC236}">
-                <a16:creationId xmlns:a16="http://schemas.microsoft.com/office/drawing/2014/main" id="{1BCBE750-7048-686D-1472-52C53362D6CD}"/>
-              </a:ext>
-            </a:extLst>
-          </p:cNvPr>
-          <p:cNvSpPr>
-            <a:spLocks xmlns:a="http://schemas.openxmlformats.org/drawingml/2006/main" noGrp="1"/>
-          </p:cNvSpPr>
-          <p:nvPr>
-            <p:ph type="sldNum" idx="4"/>
-          </p:nvPr>
-        </p:nvSpPr>
-        <p:spPr>
-          <a:xfrm xmlns:a="http://schemas.openxmlformats.org/drawingml/2006/main">
-            <a:off x="11279332" y="6279294"/>
-            <a:ext cx="518968" cy="241240"/>
-          </a:xfrm>
-        </p:spPr>
-        <p:txBody>
-          <a:bodyPr xmlns:a="http://schemas.openxmlformats.org/drawingml/2006/main" spcFirstLastPara="1" vert="horz" wrap="square" lIns="0" tIns="0" rIns="0" bIns="0" anchor="t">
-            <a:noAutofit/>
-          </a:bodyPr>
-          <a:lstStyle xmlns:a="http://schemas.openxmlformats.org/drawingml/2006/main">
-            <a:defPPr>
-              <a:defRPr sz="1125">
-                <a:solidFill>
-                  <a:srgbClr val="FFFFFF"/>
-                </a:solidFill>
-                <a:latin typeface="Arial"/>
-                <a:ea typeface="Arial"/>
-                <a:cs typeface="Arial"/>
-              </a:defRPr>
-            </a:defPPr>
-            <a:lvl1pPr>
-              <a:defRPr sz="1125">
-                <a:solidFill>
-                  <a:srgbClr val="FFFFFF"/>
-                </a:solidFill>
-                <a:latin typeface="Arial"/>
-                <a:ea typeface="Arial"/>
-                <a:cs typeface="Arial"/>
-              </a:defRPr>
-            </a:lvl1pPr>
-            <a:lvl2pPr>
-              <a:defRPr sz="1125">
-                <a:solidFill>
-                  <a:srgbClr val="FFFFFF"/>
-                </a:solidFill>
-                <a:latin typeface="Arial"/>
-                <a:ea typeface="Arial"/>
-                <a:cs typeface="Arial"/>
-              </a:defRPr>
-            </a:lvl2pPr>
-            <a:lvl3pPr>
-              <a:defRPr sz="1125">
-                <a:solidFill>
-                  <a:srgbClr val="FFFFFF"/>
-                </a:solidFill>
-                <a:latin typeface="Arial"/>
-                <a:ea typeface="Arial"/>
-                <a:cs typeface="Arial"/>
-              </a:defRPr>
-            </a:lvl3pPr>
-            <a:lvl4pPr>
-              <a:defRPr sz="1125">
-                <a:solidFill>
-                  <a:srgbClr val="FFFFFF"/>
-                </a:solidFill>
-                <a:latin typeface="Arial"/>
-                <a:ea typeface="Arial"/>
-                <a:cs typeface="Arial"/>
-              </a:defRPr>
-            </a:lvl4pPr>
-            <a:lvl5pPr>
-              <a:defRPr sz="1125">
-                <a:solidFill>
-                  <a:srgbClr val="FFFFFF"/>
-                </a:solidFill>
-                <a:latin typeface="Arial"/>
-                <a:ea typeface="Arial"/>
-                <a:cs typeface="Arial"/>
-              </a:defRPr>
-            </a:lvl5pPr>
-            <a:lvl6pPr>
-              <a:defRPr sz="1125">
-                <a:solidFill>
-                  <a:srgbClr val="FFFFFF"/>
-                </a:solidFill>
-                <a:latin typeface="Arial"/>
-                <a:ea typeface="Arial"/>
-                <a:cs typeface="Arial"/>
-              </a:defRPr>
-            </a:lvl6pPr>
-            <a:lvl7pPr>
-              <a:defRPr sz="1125">
-                <a:solidFill>
-                  <a:srgbClr val="FFFFFF"/>
-                </a:solidFill>
-                <a:latin typeface="Arial"/>
-                <a:ea typeface="Arial"/>
-                <a:cs typeface="Arial"/>
-              </a:defRPr>
-            </a:lvl7pPr>
-            <a:lvl8pPr>
-              <a:defRPr sz="1125">
-                <a:solidFill>
-                  <a:srgbClr val="FFFFFF"/>
-                </a:solidFill>
-                <a:latin typeface="Arial"/>
-                <a:ea typeface="Arial"/>
-                <a:cs typeface="Arial"/>
-              </a:defRPr>
-            </a:lvl8pPr>
-            <a:lvl9pPr>
-              <a:defRPr sz="1125">
-                <a:solidFill>
-                  <a:srgbClr val="FFFFFF"/>
-                </a:solidFill>
-                <a:latin typeface="Arial"/>
-                <a:ea typeface="Arial"/>
-                <a:cs typeface="Arial"/>
-              </a:defRPr>
-            </a:lvl9pPr>
-          </a:lstStyle>
-          <a:p xmlns:a="http://schemas.openxmlformats.org/drawingml/2006/main">
-            <a:pPr marL="0" indent="0">
-              <a:lnSpc>
-                <a:spcPct val="112000"/>
-              </a:lnSpc>
-              <a:spcBef>
-                <a:spcPts val="0"/>
-              </a:spcBef>
-              <a:spcAft>
-                <a:spcPts val="0"/>
-              </a:spcAft>
-              <a:buNone/>
-              <a:defRPr sz="1125">
-                <a:solidFill>
-                  <a:srgbClr val="FFFFFF"/>
-                </a:solidFill>
-                <a:latin typeface="Arial"/>
-                <a:ea typeface="Arial"/>
-                <a:cs typeface="Arial"/>
-              </a:defRPr>
-            </a:pPr>
-            <a:r>
-              <a:rPr sz="1125">
-                <a:solidFill>
-                  <a:srgbClr val="FFFFFF"/>
-                </a:solidFill>
-                <a:latin typeface="Arial"/>
-                <a:ea typeface="Arial"/>
-                <a:cs typeface="Arial"/>
-              </a:rPr>
-              <a:t>31</a:t>
-            </a:r>
-          </a:p>
-        </p:txBody>
-      </p:sp>
-      <p:sp>
-        <p:nvSpPr>
-          <p:cNvPr id="533" name="Google Shape;533;p58">
-            <a:extLst xmlns:a="http://schemas.openxmlformats.org/drawingml/2006/main">
-              <a:ext uri="{FF2B5EF4-FFF2-40B4-BE49-F238E27FC236}">
-                <a16:creationId xmlns:a16="http://schemas.microsoft.com/office/drawing/2014/main" id="{1B5D55CD-1C17-7CD8-F26A-2DD65B067687}"/>
-              </a:ext>
-            </a:extLst>
-          </p:cNvPr>
-          <p:cNvSpPr>
-            <a:spLocks xmlns:a="http://schemas.openxmlformats.org/drawingml/2006/main" noGrp="1"/>
-          </p:cNvSpPr>
-          <p:nvPr>
-            <p:ph type="title" idx="0"/>
-          </p:nvPr>
-        </p:nvSpPr>
-        <p:spPr>
-          <a:xfrm xmlns:a="http://schemas.openxmlformats.org/drawingml/2006/main">
-            <a:off x="393700" y="344008"/>
-            <a:ext cx="11404600" cy="1047491"/>
-          </a:xfrm>
-        </p:spPr>
-        <p:txBody>
-          <a:bodyPr xmlns:a="http://schemas.openxmlformats.org/drawingml/2006/main" spcFirstLastPara="1" vert="horz" wrap="square" lIns="0" tIns="0" rIns="0" bIns="0" anchor="t">
-            <a:noAutofit/>
-          </a:bodyPr>
-          <a:lstStyle xmlns:a="http://schemas.openxmlformats.org/drawingml/2006/main">
-            <a:defPPr>
-              <a:defRPr sz="3150">
-                <a:solidFill>
-                  <a:srgbClr val="FFFFFF"/>
-                </a:solidFill>
-                <a:latin typeface="Arial"/>
-                <a:ea typeface="Arial"/>
-                <a:cs typeface="Arial"/>
-              </a:defRPr>
-            </a:defPPr>
-            <a:lvl1pPr>
-              <a:defRPr sz="3150">
-                <a:solidFill>
-                  <a:srgbClr val="FFFFFF"/>
-                </a:solidFill>
-                <a:latin typeface="Arial"/>
-                <a:ea typeface="Arial"/>
-                <a:cs typeface="Arial"/>
-              </a:defRPr>
-            </a:lvl1pPr>
-            <a:lvl2pPr>
-              <a:defRPr sz="3150">
-                <a:solidFill>
-                  <a:srgbClr val="FFFFFF"/>
-                </a:solidFill>
-                <a:latin typeface="Arial"/>
-                <a:ea typeface="Arial"/>
-                <a:cs typeface="Arial"/>
-              </a:defRPr>
-            </a:lvl2pPr>
-            <a:lvl3pPr>
-              <a:defRPr sz="3150">
-                <a:solidFill>
-                  <a:srgbClr val="FFFFFF"/>
-                </a:solidFill>
-                <a:latin typeface="Arial"/>
-                <a:ea typeface="Arial"/>
-                <a:cs typeface="Arial"/>
-              </a:defRPr>
-            </a:lvl3pPr>
-            <a:lvl4pPr>
-              <a:defRPr sz="3150">
-                <a:solidFill>
-                  <a:srgbClr val="FFFFFF"/>
-                </a:solidFill>
-                <a:latin typeface="Arial"/>
-                <a:ea typeface="Arial"/>
-                <a:cs typeface="Arial"/>
-              </a:defRPr>
-            </a:lvl4pPr>
-            <a:lvl5pPr>
-              <a:defRPr sz="3150">
-                <a:solidFill>
-                  <a:srgbClr val="FFFFFF"/>
-                </a:solidFill>
-                <a:latin typeface="Arial"/>
-                <a:ea typeface="Arial"/>
-                <a:cs typeface="Arial"/>
-              </a:defRPr>
-            </a:lvl5pPr>
-            <a:lvl6pPr>
-              <a:defRPr sz="3150">
-                <a:solidFill>
-                  <a:srgbClr val="FFFFFF"/>
-                </a:solidFill>
-                <a:latin typeface="Arial"/>
-                <a:ea typeface="Arial"/>
-                <a:cs typeface="Arial"/>
-              </a:defRPr>
-            </a:lvl6pPr>
-            <a:lvl7pPr>
-              <a:defRPr sz="3150">
-                <a:solidFill>
-                  <a:srgbClr val="FFFFFF"/>
-                </a:solidFill>
-                <a:latin typeface="Arial"/>
-                <a:ea typeface="Arial"/>
-                <a:cs typeface="Arial"/>
-              </a:defRPr>
-            </a:lvl7pPr>
-            <a:lvl8pPr>
-              <a:defRPr sz="3150">
-                <a:solidFill>
-                  <a:srgbClr val="FFFFFF"/>
-                </a:solidFill>
-                <a:latin typeface="Arial"/>
-                <a:ea typeface="Arial"/>
-                <a:cs typeface="Arial"/>
-              </a:defRPr>
-            </a:lvl8pPr>
-            <a:lvl9pPr>
-              <a:defRPr sz="3150">
-                <a:solidFill>
-                  <a:srgbClr val="FFFFFF"/>
-                </a:solidFill>
-                <a:latin typeface="Arial"/>
-                <a:ea typeface="Arial"/>
-                <a:cs typeface="Arial"/>
-              </a:defRPr>
-            </a:lvl9pPr>
-          </a:lstStyle>
-          <a:p xmlns:a="http://schemas.openxmlformats.org/drawingml/2006/main">
-            <a:pPr marL="0" indent="0">
-              <a:lnSpc>
-                <a:spcPct val="112000"/>
-              </a:lnSpc>
-              <a:spcBef>
-                <a:spcPts val="0"/>
-              </a:spcBef>
-              <a:spcAft>
-                <a:spcPts val="0"/>
-              </a:spcAft>
-              <a:buNone/>
-              <a:defRPr sz="3150">
-                <a:solidFill>
-                  <a:srgbClr val="FFFFFF"/>
-                </a:solidFill>
-                <a:latin typeface="Arial"/>
-                <a:ea typeface="Arial"/>
-                <a:cs typeface="Arial"/>
-              </a:defRPr>
-            </a:pPr>
-            <a:r>
-              <a:rPr sz="3150">
-                <a:solidFill>
-                  <a:srgbClr val="FFFFFF"/>
-                </a:solidFill>
-                <a:latin typeface="Arial"/>
-                <a:ea typeface="Arial"/>
-                <a:cs typeface="Arial"/>
-              </a:rPr>
-              <a:t>Final check: explain the difference</a:t>
-            </a:r>
-          </a:p>
-        </p:txBody>
-      </p:sp>
-      <p:sp>
-        <p:nvSpPr>
-          <p:cNvPr id="7" name="Google Shape;534;p58">
-            <a:extLst xmlns:a="http://schemas.openxmlformats.org/drawingml/2006/main">
-              <a:ext uri="{FF2B5EF4-FFF2-40B4-BE49-F238E27FC236}">
-                <a16:creationId xmlns:a16="http://schemas.microsoft.com/office/drawing/2014/main" id="{3A923FEE-B8D2-CD3A-ABBD-21770B40AA24}"/>
-              </a:ext>
-            </a:extLst>
-          </p:cNvPr>
-          <p:cNvSpPr>
-            <a:spLocks xmlns:a="http://schemas.openxmlformats.org/drawingml/2006/main" noGrp="1"/>
-          </p:cNvSpPr>
-          <p:nvPr/>
-        </p:nvSpPr>
-        <p:spPr>
-          <a:xfrm xmlns:a="http://schemas.openxmlformats.org/drawingml/2006/main">
-            <a:off x="393700" y="2031999"/>
-            <a:ext cx="5537200" cy="3534787"/>
-          </a:xfrm>
-          <a:prstGeom xmlns:a="http://schemas.openxmlformats.org/drawingml/2006/main" prst="rect">
-            <a:avLst/>
-          </a:prstGeom>
-        </p:spPr>
-        <p:txBody>
-          <a:bodyPr xmlns:a="http://schemas.openxmlformats.org/drawingml/2006/main" spcFirstLastPara="1" vert="horz" wrap="square" lIns="0" tIns="0" rIns="0" bIns="0" anchor="t">
-            <a:noAutofit/>
-          </a:bodyPr>
-          <a:lstStyle xmlns:a="http://schemas.openxmlformats.org/drawingml/2006/main">
-            <a:defPPr>
-              <a:defRPr sz="1875">
-                <a:solidFill>
-                  <a:srgbClr val="FFFFFF"/>
-                </a:solidFill>
-                <a:latin typeface="Arial"/>
-                <a:ea typeface="Arial"/>
-                <a:cs typeface="Arial"/>
-              </a:defRPr>
-            </a:defPPr>
-            <a:lvl1pPr marL="228600" indent="-228600" algn="l" defTabSz="914400">
-              <a:lnSpc>
-                <a:spcPct val="90000"/>
-              </a:lnSpc>
-              <a:spcBef>
-                <a:spcPts val="1000"/>
-              </a:spcBef>
-              <a:buFont typeface="Arial"/>
-              <a:buChar char="•"/>
-              <a:defRPr sz="2400" kern="1200">
-                <a:solidFill>
-                  <a:schemeClr val="tx1"/>
-                </a:solidFill>
-                <a:latin typeface="+mn-lt"/>
-                <a:ea typeface="+mn-lt"/>
-                <a:cs typeface="+mn-lt"/>
-              </a:defRPr>
-            </a:lvl1pPr>
-            <a:lvl2pPr marL="685800" indent="-228600" algn="l" defTabSz="914400">
-              <a:lnSpc>
-                <a:spcPct val="90000"/>
-              </a:lnSpc>
-              <a:spcBef>
-                <a:spcPts val="500"/>
-              </a:spcBef>
-              <a:buFont typeface="Arial"/>
-              <a:buChar char="•"/>
-              <a:defRPr sz="2000" kern="1200">
-                <a:solidFill>
-                  <a:schemeClr val="tx1"/>
-                </a:solidFill>
-                <a:latin typeface="+mn-lt"/>
-                <a:ea typeface="+mn-lt"/>
-                <a:cs typeface="+mn-lt"/>
-              </a:defRPr>
-            </a:lvl2pPr>
-            <a:lvl3pPr marL="1143000" indent="-228600" algn="l" defTabSz="914400">
-              <a:lnSpc>
-                <a:spcPct val="90000"/>
-              </a:lnSpc>
-              <a:spcBef>
-                <a:spcPts val="500"/>
-              </a:spcBef>
-              <a:buFont typeface="Arial"/>
-              <a:buChar char="•"/>
-              <a:defRPr sz="1800" kern="1200">
-                <a:solidFill>
-                  <a:schemeClr val="tx1"/>
-                </a:solidFill>
-                <a:latin typeface="+mn-lt"/>
-                <a:ea typeface="+mn-lt"/>
-                <a:cs typeface="+mn-lt"/>
-              </a:defRPr>
-            </a:lvl3pPr>
-            <a:lvl4pPr marL="1600200" indent="-228600" algn="l" defTabSz="914400">
-              <a:lnSpc>
-                <a:spcPct val="90000"/>
-              </a:lnSpc>
-              <a:spcBef>
-                <a:spcPts val="500"/>
-              </a:spcBef>
-              <a:buFont typeface="Arial"/>
-              <a:buChar char="•"/>
-              <a:defRPr sz="1800" kern="1200">
-                <a:solidFill>
-                  <a:schemeClr val="tx1"/>
-                </a:solidFill>
-                <a:latin typeface="+mn-lt"/>
-                <a:ea typeface="+mn-lt"/>
-                <a:cs typeface="+mn-lt"/>
-              </a:defRPr>
-            </a:lvl4pPr>
-            <a:lvl5pPr marL="2057400" indent="-228600" algn="l" defTabSz="914400">
-              <a:lnSpc>
-                <a:spcPct val="90000"/>
-              </a:lnSpc>
-              <a:spcBef>
-                <a:spcPts val="500"/>
-              </a:spcBef>
-              <a:buFont typeface="Arial"/>
-              <a:buChar char="•"/>
-              <a:defRPr sz="1800" kern="1200">
-                <a:solidFill>
-                  <a:schemeClr val="tx1"/>
-                </a:solidFill>
-                <a:latin typeface="+mn-lt"/>
-                <a:ea typeface="+mn-lt"/>
-                <a:cs typeface="+mn-lt"/>
-              </a:defRPr>
-            </a:lvl5pPr>
-            <a:lvl6pPr marL="2514600" indent="-228600" algn="l" defTabSz="914400">
-              <a:lnSpc>
-                <a:spcPct val="90000"/>
-              </a:lnSpc>
-              <a:spcBef>
-                <a:spcPts val="500"/>
-              </a:spcBef>
-              <a:buFont typeface="Arial"/>
-              <a:buChar char="•"/>
-              <a:defRPr sz="1800" kern="1200">
-                <a:solidFill>
-                  <a:schemeClr val="tx1"/>
-                </a:solidFill>
-                <a:latin typeface="+mn-lt"/>
-                <a:ea typeface="+mn-lt"/>
-                <a:cs typeface="+mn-lt"/>
-              </a:defRPr>
-            </a:lvl6pPr>
-            <a:lvl7pPr marL="2971800" indent="-228600" algn="l" defTabSz="914400">
-              <a:lnSpc>
-                <a:spcPct val="90000"/>
-              </a:lnSpc>
-              <a:spcBef>
-                <a:spcPts val="500"/>
-              </a:spcBef>
-              <a:buFont typeface="Arial"/>
-              <a:buChar char="•"/>
-              <a:defRPr sz="1800" kern="1200">
-                <a:solidFill>
-                  <a:schemeClr val="tx1"/>
-                </a:solidFill>
-                <a:latin typeface="+mn-lt"/>
-                <a:ea typeface="+mn-lt"/>
-                <a:cs typeface="+mn-lt"/>
-              </a:defRPr>
-            </a:lvl7pPr>
-            <a:lvl8pPr marL="3429000" indent="-228600" algn="l" defTabSz="914400">
-              <a:lnSpc>
-                <a:spcPct val="90000"/>
-              </a:lnSpc>
-              <a:spcBef>
-                <a:spcPts val="500"/>
-              </a:spcBef>
-              <a:buFont typeface="Arial"/>
-              <a:buChar char="•"/>
-              <a:defRPr sz="1800" kern="1200">
-                <a:solidFill>
-                  <a:schemeClr val="tx1"/>
-                </a:solidFill>
-                <a:latin typeface="+mn-lt"/>
-                <a:ea typeface="+mn-lt"/>
-                <a:cs typeface="+mn-lt"/>
-              </a:defRPr>
-            </a:lvl8pPr>
-            <a:lvl9pPr marL="3886200" indent="-228600" algn="l" defTabSz="914400">
-              <a:lnSpc>
-                <a:spcPct val="90000"/>
-              </a:lnSpc>
-              <a:spcBef>
-                <a:spcPts val="500"/>
-              </a:spcBef>
-              <a:buFont typeface="Arial"/>
-              <a:buChar char="•"/>
-              <a:defRPr sz="1800" kern="1200">
-                <a:solidFill>
-                  <a:schemeClr val="tx1"/>
-                </a:solidFill>
-                <a:latin typeface="+mn-lt"/>
-                <a:ea typeface="+mn-lt"/>
-                <a:cs typeface="+mn-lt"/>
-              </a:defRPr>
-            </a:lvl9pPr>
-          </a:lstStyle>
-          <a:p xmlns:a="http://schemas.openxmlformats.org/drawingml/2006/main">
-            <a:pPr marL="0" indent="0">
-              <a:lnSpc>
-                <a:spcPct val="112000"/>
-              </a:lnSpc>
-              <a:spcBef>
-                <a:spcPts val="0"/>
-              </a:spcBef>
-              <a:spcAft>
-                <a:spcPts val="0"/>
-              </a:spcAft>
-              <a:buNone/>
-              <a:defRPr sz="1875">
-                <a:solidFill>
-                  <a:srgbClr val="FFFFFF"/>
-                </a:solidFill>
-                <a:latin typeface="Arial"/>
-                <a:ea typeface="Arial"/>
-                <a:cs typeface="Arial"/>
-              </a:defRPr>
-            </a:pPr>
-            <a:r>
-              <a:rPr sz="1875">
-                <a:solidFill>
-                  <a:srgbClr val="FFFFFF"/>
-                </a:solidFill>
-                <a:latin typeface="Arial"/>
-                <a:ea typeface="Arial"/>
-                <a:cs typeface="Arial"/>
-              </a:rPr>
-              <a:t>Give one clear sentence for each pair.</a:t>
-            </a:r>
-          </a:p>
-          <a:p xmlns:a="http://schemas.openxmlformats.org/drawingml/2006/main">
-            <a:pPr marL="0" indent="0">
-              <a:lnSpc>
-                <a:spcPct val="112000"/>
-              </a:lnSpc>
-              <a:spcBef>
-                <a:spcPts val="0"/>
-              </a:spcBef>
-              <a:spcAft>
-                <a:spcPts val="0"/>
-              </a:spcAft>
-              <a:buNone/>
-            </a:pPr>
-            <a:r>
-              <a:t/>
-            </a:r>
-          </a:p>
-          <a:p xmlns:a="http://schemas.openxmlformats.org/drawingml/2006/main">
-            <a:pPr marL="0" indent="0">
-              <a:lnSpc>
-                <a:spcPct val="112000"/>
-              </a:lnSpc>
-              <a:spcBef>
-                <a:spcPts val="0"/>
-              </a:spcBef>
-              <a:spcAft>
-                <a:spcPts val="0"/>
-              </a:spcAft>
-              <a:buNone/>
-              <a:defRPr sz="1875">
-                <a:solidFill>
-                  <a:srgbClr val="FFFFFF"/>
-                </a:solidFill>
-                <a:latin typeface="Arial"/>
-                <a:ea typeface="Arial"/>
-                <a:cs typeface="Arial"/>
-              </a:defRPr>
-            </a:pPr>
-            <a:r>
-              <a:rPr sz="1875">
-                <a:solidFill>
-                  <a:srgbClr val="FFFFFF"/>
-                </a:solidFill>
-                <a:latin typeface="Arial"/>
-                <a:ea typeface="Arial"/>
-                <a:cs typeface="Arial"/>
-              </a:rPr>
-              <a:t>An answer should name what changes and what stays the same.</a:t>
-            </a:r>
-          </a:p>
-          <a:p xmlns:a="http://schemas.openxmlformats.org/drawingml/2006/main">
-            <a:pPr marL="0" indent="0">
-              <a:lnSpc>
-                <a:spcPct val="112000"/>
-              </a:lnSpc>
-              <a:spcBef>
-                <a:spcPts val="0"/>
-              </a:spcBef>
-              <a:spcAft>
-                <a:spcPts val="0"/>
-              </a:spcAft>
-              <a:buNone/>
-            </a:pPr>
-            <a:r>
-              <a:t/>
-            </a:r>
-          </a:p>
-          <a:p xmlns:a="http://schemas.openxmlformats.org/drawingml/2006/main">
-            <a:pPr marL="0" indent="0">
-              <a:lnSpc>
-                <a:spcPct val="112000"/>
-              </a:lnSpc>
-              <a:spcBef>
-                <a:spcPts val="0"/>
-              </a:spcBef>
-              <a:spcAft>
-                <a:spcPts val="0"/>
-              </a:spcAft>
-              <a:buNone/>
-              <a:defRPr sz="1875">
-                <a:solidFill>
-                  <a:srgbClr val="FFFFFF"/>
-                </a:solidFill>
-                <a:latin typeface="Arial"/>
-                <a:ea typeface="Arial"/>
-                <a:cs typeface="Arial"/>
-              </a:defRPr>
-            </a:pPr>
-            <a:r>
-              <a:rPr sz="1875">
-                <a:solidFill>
-                  <a:srgbClr val="FFFFFF"/>
-                </a:solidFill>
-                <a:latin typeface="Arial"/>
-                <a:ea typeface="Arial"/>
-                <a:cs typeface="Arial"/>
-              </a:rPr>
-              <a:t>Then return to the topic you could not explain yet.</a:t>
-            </a:r>
-          </a:p>
-        </p:txBody>
-      </p:sp>
-      <p:sp>
-        <p:nvSpPr>
-          <p:cNvPr id="8" name="Content Placeholder 3">
-            <a:extLst xmlns:a="http://schemas.openxmlformats.org/drawingml/2006/main">
-              <a:ext uri="{FF2B5EF4-FFF2-40B4-BE49-F238E27FC236}">
-                <a16:creationId xmlns:a16="http://schemas.microsoft.com/office/drawing/2014/main" id="{2EE8F343-A95F-2AAA-FE9E-A6C31E298DF7}"/>
-              </a:ext>
-            </a:extLst>
-          </p:cNvPr>
-          <p:cNvSpPr>
-            <a:spLocks xmlns:a="http://schemas.openxmlformats.org/drawingml/2006/main" noGrp="1"/>
-          </p:cNvSpPr>
-          <p:nvPr/>
-        </p:nvSpPr>
-        <p:spPr>
-          <a:xfrm xmlns:a="http://schemas.openxmlformats.org/drawingml/2006/main">
-            <a:off x="6256618" y="2031999"/>
-            <a:ext cx="5537200" cy="3534787"/>
-          </a:xfrm>
-          <a:prstGeom xmlns:a="http://schemas.openxmlformats.org/drawingml/2006/main" prst="rect">
-            <a:avLst/>
-          </a:prstGeom>
-        </p:spPr>
-        <p:txBody>
-          <a:bodyPr xmlns:a="http://schemas.openxmlformats.org/drawingml/2006/main" lIns="0" tIns="0" rIns="0" bIns="0" anchor="t">
-            <a:noAutofit/>
-          </a:bodyPr>
-          <a:lstStyle xmlns:a="http://schemas.openxmlformats.org/drawingml/2006/main">
-            <a:defPPr>
-              <a:defRPr sz="1800">
-                <a:solidFill>
-                  <a:srgbClr val="FFFFFF"/>
-                </a:solidFill>
-                <a:latin typeface="Consolas"/>
-                <a:ea typeface="Consolas"/>
-                <a:cs typeface="Consolas"/>
-              </a:defRPr>
-            </a:defPPr>
-            <a:lvl1pPr marL="228600" indent="-228600" algn="l" defTabSz="914400">
-              <a:lnSpc>
-                <a:spcPct val="90000"/>
-              </a:lnSpc>
-              <a:spcBef>
-                <a:spcPts val="1000"/>
-              </a:spcBef>
-              <a:buFont typeface="Arial"/>
-              <a:buChar char="•"/>
-              <a:defRPr sz="2400" kern="1200">
-                <a:solidFill>
-                  <a:schemeClr val="tx1"/>
-                </a:solidFill>
-                <a:latin typeface="+mn-lt"/>
-                <a:ea typeface="+mn-lt"/>
-                <a:cs typeface="+mn-lt"/>
-              </a:defRPr>
-            </a:lvl1pPr>
-            <a:lvl2pPr marL="685800" indent="-228600" algn="l" defTabSz="914400">
-              <a:lnSpc>
-                <a:spcPct val="90000"/>
-              </a:lnSpc>
-              <a:spcBef>
-                <a:spcPts val="500"/>
-              </a:spcBef>
-              <a:buFont typeface="Arial"/>
-              <a:buChar char="•"/>
-              <a:defRPr sz="2000" kern="1200">
-                <a:solidFill>
-                  <a:schemeClr val="tx1"/>
-                </a:solidFill>
-                <a:latin typeface="+mn-lt"/>
-                <a:ea typeface="+mn-lt"/>
-                <a:cs typeface="+mn-lt"/>
-              </a:defRPr>
-            </a:lvl2pPr>
-            <a:lvl3pPr marL="1143000" indent="-228600" algn="l" defTabSz="914400">
-              <a:lnSpc>
-                <a:spcPct val="90000"/>
-              </a:lnSpc>
-              <a:spcBef>
-                <a:spcPts val="500"/>
-              </a:spcBef>
-              <a:buFont typeface="Arial"/>
-              <a:buChar char="•"/>
-              <a:defRPr sz="1800" kern="1200">
-                <a:solidFill>
-                  <a:schemeClr val="tx1"/>
-                </a:solidFill>
-                <a:latin typeface="+mn-lt"/>
-                <a:ea typeface="+mn-lt"/>
-                <a:cs typeface="+mn-lt"/>
-              </a:defRPr>
-            </a:lvl3pPr>
-            <a:lvl4pPr marL="1600200" indent="-228600" algn="l" defTabSz="914400">
-              <a:lnSpc>
-                <a:spcPct val="90000"/>
-              </a:lnSpc>
-              <a:spcBef>
-                <a:spcPts val="500"/>
-              </a:spcBef>
-              <a:buFont typeface="Arial"/>
-              <a:buChar char="•"/>
-              <a:defRPr sz="1800" kern="1200">
-                <a:solidFill>
-                  <a:schemeClr val="tx1"/>
-                </a:solidFill>
-                <a:latin typeface="+mn-lt"/>
-                <a:ea typeface="+mn-lt"/>
-                <a:cs typeface="+mn-lt"/>
-              </a:defRPr>
-            </a:lvl4pPr>
-            <a:lvl5pPr marL="2057400" indent="-228600" algn="l" defTabSz="914400">
-              <a:lnSpc>
-                <a:spcPct val="90000"/>
-              </a:lnSpc>
-              <a:spcBef>
-                <a:spcPts val="500"/>
-              </a:spcBef>
-              <a:buFont typeface="Arial"/>
-              <a:buChar char="•"/>
-              <a:defRPr sz="1800" kern="1200">
-                <a:solidFill>
-                  <a:schemeClr val="tx1"/>
-                </a:solidFill>
-                <a:latin typeface="+mn-lt"/>
-                <a:ea typeface="+mn-lt"/>
-                <a:cs typeface="+mn-lt"/>
-              </a:defRPr>
-            </a:lvl5pPr>
-            <a:lvl6pPr marL="2514600" indent="-228600" algn="l" defTabSz="914400">
-              <a:lnSpc>
-                <a:spcPct val="90000"/>
-              </a:lnSpc>
-              <a:spcBef>
-                <a:spcPts val="500"/>
-              </a:spcBef>
-              <a:buFont typeface="Arial"/>
-              <a:buChar char="•"/>
-              <a:defRPr sz="1800" kern="1200">
-                <a:solidFill>
-                  <a:schemeClr val="tx1"/>
-                </a:solidFill>
-                <a:latin typeface="+mn-lt"/>
-                <a:ea typeface="+mn-lt"/>
-                <a:cs typeface="+mn-lt"/>
-              </a:defRPr>
-            </a:lvl6pPr>
-            <a:lvl7pPr marL="2971800" indent="-228600" algn="l" defTabSz="914400">
-              <a:lnSpc>
-                <a:spcPct val="90000"/>
-              </a:lnSpc>
-              <a:spcBef>
-                <a:spcPts val="500"/>
-              </a:spcBef>
-              <a:buFont typeface="Arial"/>
-              <a:buChar char="•"/>
-              <a:defRPr sz="1800" kern="1200">
-                <a:solidFill>
-                  <a:schemeClr val="tx1"/>
-                </a:solidFill>
-                <a:latin typeface="+mn-lt"/>
-                <a:ea typeface="+mn-lt"/>
-                <a:cs typeface="+mn-lt"/>
-              </a:defRPr>
-            </a:lvl7pPr>
-            <a:lvl8pPr marL="3429000" indent="-228600" algn="l" defTabSz="914400">
-              <a:lnSpc>
-                <a:spcPct val="90000"/>
-              </a:lnSpc>
-              <a:spcBef>
-                <a:spcPts val="500"/>
-              </a:spcBef>
-              <a:buFont typeface="Arial"/>
-              <a:buChar char="•"/>
-              <a:defRPr sz="1800" kern="1200">
-                <a:solidFill>
-                  <a:schemeClr val="tx1"/>
-                </a:solidFill>
-                <a:latin typeface="+mn-lt"/>
-                <a:ea typeface="+mn-lt"/>
-                <a:cs typeface="+mn-lt"/>
-              </a:defRPr>
-            </a:lvl8pPr>
-            <a:lvl9pPr marL="3886200" indent="-228600" algn="l" defTabSz="914400">
-              <a:lnSpc>
-                <a:spcPct val="90000"/>
-              </a:lnSpc>
-              <a:spcBef>
-                <a:spcPts val="500"/>
-              </a:spcBef>
-              <a:buFont typeface="Arial"/>
-              <a:buChar char="•"/>
-              <a:defRPr sz="1800" kern="1200">
-                <a:solidFill>
-                  <a:schemeClr val="tx1"/>
-                </a:solidFill>
-                <a:latin typeface="+mn-lt"/>
-                <a:ea typeface="+mn-lt"/>
-                <a:cs typeface="+mn-lt"/>
-              </a:defRPr>
-            </a:lvl9pPr>
-          </a:lstStyle>
-          <a:p xmlns:a="http://schemas.openxmlformats.org/drawingml/2006/main">
-            <a:pPr marL="0" indent="0">
-              <a:lnSpc>
-                <a:spcPct val="112000"/>
-              </a:lnSpc>
-              <a:spcBef>
-                <a:spcPts val="0"/>
-              </a:spcBef>
-              <a:spcAft>
-                <a:spcPts val="0"/>
-              </a:spcAft>
-              <a:buNone/>
-              <a:defRPr sz="1800">
-                <a:solidFill>
-                  <a:srgbClr val="FFFFFF"/>
-                </a:solidFill>
-                <a:latin typeface="Consolas"/>
-                <a:ea typeface="Consolas"/>
-                <a:cs typeface="Consolas"/>
-              </a:defRPr>
-            </a:pPr>
-            <a:r>
-              <a:rPr sz="1800">
-                <a:solidFill>
-                  <a:srgbClr val="FFFFFF"/>
-                </a:solidFill>
-                <a:latin typeface="Consolas"/>
-                <a:ea typeface="Consolas"/>
-                <a:cs typeface="Consolas"/>
-              </a:rPr>
-              <a:t>1. Pointer size vs allocation size</a:t>
-            </a:r>
-          </a:p>
-          <a:p xmlns:a="http://schemas.openxmlformats.org/drawingml/2006/main">
-            <a:pPr marL="0" indent="0">
-              <a:lnSpc>
-                <a:spcPct val="112000"/>
-              </a:lnSpc>
-              <a:spcBef>
-                <a:spcPts val="0"/>
-              </a:spcBef>
-              <a:spcAft>
-                <a:spcPts val="0"/>
-              </a:spcAft>
-              <a:buNone/>
-              <a:defRPr sz="1800">
-                <a:solidFill>
-                  <a:srgbClr val="FFFFFF"/>
-                </a:solidFill>
-                <a:latin typeface="Consolas"/>
-                <a:ea typeface="Consolas"/>
-                <a:cs typeface="Consolas"/>
-              </a:defRPr>
-            </a:pPr>
-            <a:r>
-              <a:rPr sz="1800">
-                <a:solidFill>
-                  <a:srgbClr val="FFFFFF"/>
-                </a:solidFill>
-                <a:latin typeface="Consolas"/>
-                <a:ea typeface="Consolas"/>
-                <a:cs typeface="Consolas"/>
-              </a:rPr>
-              <a:t>2. Address vs contents</a:t>
-            </a:r>
-          </a:p>
-          <a:p xmlns:a="http://schemas.openxmlformats.org/drawingml/2006/main">
-            <a:pPr marL="0" indent="0">
-              <a:lnSpc>
-                <a:spcPct val="112000"/>
-              </a:lnSpc>
-              <a:spcBef>
-                <a:spcPts val="0"/>
-              </a:spcBef>
-              <a:spcAft>
-                <a:spcPts val="0"/>
-              </a:spcAft>
-              <a:buNone/>
-              <a:defRPr sz="1800">
-                <a:solidFill>
-                  <a:srgbClr val="FFFFFF"/>
-                </a:solidFill>
-                <a:latin typeface="Consolas"/>
-                <a:ea typeface="Consolas"/>
-                <a:cs typeface="Consolas"/>
-              </a:defRPr>
-            </a:pPr>
-            <a:r>
-              <a:rPr sz="1800">
-                <a:solidFill>
-                  <a:srgbClr val="FFFFFF"/>
-                </a:solidFill>
-                <a:latin typeface="Consolas"/>
-                <a:ea typeface="Consolas"/>
-                <a:cs typeface="Consolas"/>
-              </a:rPr>
-              <a:t>3. Stored fraction vs significand</a:t>
-            </a:r>
-          </a:p>
-          <a:p xmlns:a="http://schemas.openxmlformats.org/drawingml/2006/main">
-            <a:pPr marL="0" indent="0">
-              <a:lnSpc>
-                <a:spcPct val="112000"/>
-              </a:lnSpc>
-              <a:spcBef>
-                <a:spcPts val="0"/>
-              </a:spcBef>
-              <a:spcAft>
-                <a:spcPts val="0"/>
-              </a:spcAft>
-              <a:buNone/>
-              <a:defRPr sz="1800">
-                <a:solidFill>
-                  <a:srgbClr val="FFFFFF"/>
-                </a:solidFill>
-                <a:latin typeface="Consolas"/>
-                <a:ea typeface="Consolas"/>
-                <a:cs typeface="Consolas"/>
-              </a:defRPr>
-            </a:pPr>
-            <a:r>
-              <a:rPr sz="1800">
-                <a:solidFill>
-                  <a:srgbClr val="FFFFFF"/>
-                </a:solidFill>
-                <a:latin typeface="Consolas"/>
-                <a:ea typeface="Consolas"/>
-                <a:cs typeface="Consolas"/>
-              </a:rPr>
-              <a:t>4. Struct vs union</a:t>
-            </a:r>
-          </a:p>
-          <a:p xmlns:a="http://schemas.openxmlformats.org/drawingml/2006/main">
-            <a:pPr marL="0" indent="0">
-              <a:lnSpc>
-                <a:spcPct val="112000"/>
-              </a:lnSpc>
-              <a:spcBef>
-                <a:spcPts val="0"/>
-              </a:spcBef>
-              <a:spcAft>
-                <a:spcPts val="0"/>
-              </a:spcAft>
-              <a:buNone/>
-              <a:defRPr sz="1800">
-                <a:solidFill>
-                  <a:srgbClr val="FFFFFF"/>
-                </a:solidFill>
-                <a:latin typeface="Consolas"/>
-                <a:ea typeface="Consolas"/>
-                <a:cs typeface="Consolas"/>
-              </a:defRPr>
-            </a:pPr>
-            <a:r>
-              <a:rPr sz="1800">
-                <a:solidFill>
-                  <a:srgbClr val="FFFFFF"/>
-                </a:solidFill>
-                <a:latin typeface="Consolas"/>
-                <a:ea typeface="Consolas"/>
-                <a:cs typeface="Consolas"/>
-              </a:rPr>
-              <a:t>5. Stack cleanup vs free</a:t>
-            </a:r>
-          </a:p>
-          <a:p xmlns:a="http://schemas.openxmlformats.org/drawingml/2006/main">
-            <a:pPr marL="0" indent="0">
-              <a:lnSpc>
-                <a:spcPct val="112000"/>
-              </a:lnSpc>
-              <a:spcBef>
-                <a:spcPts val="0"/>
-              </a:spcBef>
-              <a:spcAft>
-                <a:spcPts val="0"/>
-              </a:spcAft>
-              <a:buNone/>
-              <a:defRPr sz="1800">
-                <a:solidFill>
-                  <a:srgbClr val="FFFFFF"/>
-                </a:solidFill>
-                <a:latin typeface="Consolas"/>
-                <a:ea typeface="Consolas"/>
-                <a:cs typeface="Consolas"/>
-              </a:defRPr>
-            </a:pPr>
-            <a:r>
-              <a:rPr sz="1800">
-                <a:solidFill>
-                  <a:srgbClr val="FFFFFF"/>
-                </a:solidFill>
-                <a:latin typeface="Consolas"/>
-                <a:ea typeface="Consolas"/>
-                <a:cs typeface="Consolas"/>
-              </a:rPr>
-              <a:t>6. Latency vs throughput</a:t>
-            </a:r>
-          </a:p>
-        </p:txBody>
-      </p:sp>
-      <p:sp>
-        <p:nvSpPr>
-          <p:cNvPr id="534" name="Takeaway">
-            <a:extLst xmlns:a="http://schemas.openxmlformats.org/drawingml/2006/main">
-              <a:ext uri="{FF2B5EF4-FFF2-40B4-BE49-F238E27FC236}">
-                <a16:creationId xmlns:a16="http://schemas.microsoft.com/office/drawing/2014/main" id="{B44A63A1-749B-4F97-93FD-6637D3466F1D}"/>
+                <a16:creationId xmlns:a16="http://schemas.microsoft.com/office/drawing/2014/main" id="{5CEBB2C4-8C45-4CE1-8A00-EFBDC3F67A50}"/>
               </a:ext>
             </a:extLst>
           </p:cNvPr>
@@ -46998,7 +45314,7 @@
           <p:cNvPr id="534" name="Takeaway">
             <a:extLst xmlns:a="http://schemas.openxmlformats.org/drawingml/2006/main">
               <a:ext uri="{FF2B5EF4-FFF2-40B4-BE49-F238E27FC236}">
-                <a16:creationId xmlns:a16="http://schemas.microsoft.com/office/drawing/2014/main" id="{5EB8D8D0-AE18-44CC-8CE3-54A49D43B8D7}"/>
+                <a16:creationId xmlns:a16="http://schemas.microsoft.com/office/drawing/2014/main" id="{498B7EAC-8B8F-4F0C-9421-FC1F053285C2}"/>
               </a:ext>
             </a:extLst>
           </p:cNvPr>
@@ -48447,7 +46763,7 @@
           <p:cNvPr id="534" name="Takeaway">
             <a:extLst xmlns:a="http://schemas.openxmlformats.org/drawingml/2006/main">
               <a:ext uri="{FF2B5EF4-FFF2-40B4-BE49-F238E27FC236}">
-                <a16:creationId xmlns:a16="http://schemas.microsoft.com/office/drawing/2014/main" id="{90BBFC09-461F-428F-A9D9-852D40F9AB22}"/>
+                <a16:creationId xmlns:a16="http://schemas.microsoft.com/office/drawing/2014/main" id="{6EB8A47F-6B2E-4ADB-93D5-AAB6784DD975}"/>
               </a:ext>
             </a:extLst>
           </p:cNvPr>
@@ -49830,7 +48146,7 @@
           <p:cNvPr id="534" name="Takeaway">
             <a:extLst xmlns:a="http://schemas.openxmlformats.org/drawingml/2006/main">
               <a:ext uri="{FF2B5EF4-FFF2-40B4-BE49-F238E27FC236}">
-                <a16:creationId xmlns:a16="http://schemas.microsoft.com/office/drawing/2014/main" id="{34BCA7FC-EC95-4C20-BA66-1E039C7C7227}"/>
+                <a16:creationId xmlns:a16="http://schemas.microsoft.com/office/drawing/2014/main" id="{3F85962B-2FD9-4219-9D45-E8B8A86EA0C6}"/>
               </a:ext>
             </a:extLst>
           </p:cNvPr>
@@ -51246,7 +49562,7 @@
           <p:cNvPr id="534" name="Takeaway">
             <a:extLst xmlns:a="http://schemas.openxmlformats.org/drawingml/2006/main">
               <a:ext uri="{FF2B5EF4-FFF2-40B4-BE49-F238E27FC236}">
-                <a16:creationId xmlns:a16="http://schemas.microsoft.com/office/drawing/2014/main" id="{CF868555-0D23-4043-BDE6-674FF3CA39AA}"/>
+                <a16:creationId xmlns:a16="http://schemas.microsoft.com/office/drawing/2014/main" id="{F0C067B6-61CD-4C92-BA29-CEEE39A771F3}"/>
               </a:ext>
             </a:extLst>
           </p:cNvPr>
@@ -52663,7 +50979,7 @@
           <p:cNvPr id="534" name="Takeaway">
             <a:extLst xmlns:a="http://schemas.openxmlformats.org/drawingml/2006/main">
               <a:ext uri="{FF2B5EF4-FFF2-40B4-BE49-F238E27FC236}">
-                <a16:creationId xmlns:a16="http://schemas.microsoft.com/office/drawing/2014/main" id="{8357B8D7-056E-48C5-A7C5-6FAA945D8D33}"/>
+                <a16:creationId xmlns:a16="http://schemas.microsoft.com/office/drawing/2014/main" id="{FECEEAC4-8E77-4099-B8FF-4843DF6F5C3D}"/>
               </a:ext>
             </a:extLst>
           </p:cNvPr>
@@ -54162,7 +52478,7 @@
           <p:cNvPr id="534" name="Takeaway">
             <a:extLst xmlns:a="http://schemas.openxmlformats.org/drawingml/2006/main">
               <a:ext uri="{FF2B5EF4-FFF2-40B4-BE49-F238E27FC236}">
-                <a16:creationId xmlns:a16="http://schemas.microsoft.com/office/drawing/2014/main" id="{A144A3EC-8C60-4D05-B360-8DB309E8D8AB}"/>
+                <a16:creationId xmlns:a16="http://schemas.microsoft.com/office/drawing/2014/main" id="{82E021C4-0CA4-4FD7-9A21-06231B6DDF4A}"/>
               </a:ext>
             </a:extLst>
           </p:cNvPr>

--- a/public/presentations/CS211_Recitation_7.pptx
+++ b/public/presentations/CS211_Recitation_7.pptx
@@ -2,52 +2,51 @@
 <file path=ppt/presentation.xml><?xml version="1.0" encoding="utf-8"?>
 <p:presentation xmlns:p="http://schemas.openxmlformats.org/presentationml/2006/main" embedTrueTypeFonts="1" saveSubsetFonts="0">
   <p:sldMasterIdLst>
-    <p:sldMasterId xmlns:r="http://schemas.openxmlformats.org/officeDocument/2006/relationships" id="2147483648" r:id="Re2730baed9e54b6b"/>
+    <p:sldMasterId xmlns:r="http://schemas.openxmlformats.org/officeDocument/2006/relationships" id="2147483648" r:id="R23ff7da710404590"/>
   </p:sldMasterIdLst>
   <p:notesMasterIdLst>
-    <p:notesMasterId xmlns:r="http://schemas.openxmlformats.org/officeDocument/2006/relationships" r:id="Rdd1504ebdcc84692"/>
+    <p:notesMasterId xmlns:r="http://schemas.openxmlformats.org/officeDocument/2006/relationships" r:id="R5dbeea42e92e4111"/>
   </p:notesMasterIdLst>
   <p:sldIdLst>
-    <p:sldId xmlns:r="http://schemas.openxmlformats.org/officeDocument/2006/relationships" id="256" r:id="R7d68e1d101b04b68"/>
-    <p:sldId xmlns:r="http://schemas.openxmlformats.org/officeDocument/2006/relationships" id="257" r:id="R599120de0d5c4d63"/>
-    <p:sldId xmlns:r="http://schemas.openxmlformats.org/officeDocument/2006/relationships" id="258" r:id="Rf2f4698244ce42b4"/>
-    <p:sldId xmlns:r="http://schemas.openxmlformats.org/officeDocument/2006/relationships" id="259" r:id="Rad4c03fecce1441e"/>
-    <p:sldId xmlns:r="http://schemas.openxmlformats.org/officeDocument/2006/relationships" id="260" r:id="R0295689deaf144e6"/>
-    <p:sldId xmlns:r="http://schemas.openxmlformats.org/officeDocument/2006/relationships" id="261" r:id="R81c4f3bd49d64eda"/>
-    <p:sldId xmlns:r="http://schemas.openxmlformats.org/officeDocument/2006/relationships" id="262" r:id="R0b13d5ab7f2f4f6d"/>
-    <p:sldId xmlns:r="http://schemas.openxmlformats.org/officeDocument/2006/relationships" id="263" r:id="R6abdaf40926a4479"/>
-    <p:sldId xmlns:r="http://schemas.openxmlformats.org/officeDocument/2006/relationships" id="264" r:id="R224676fd510549d7"/>
-    <p:sldId xmlns:r="http://schemas.openxmlformats.org/officeDocument/2006/relationships" id="265" r:id="R1fc4b7c59a8a4d60"/>
-    <p:sldId xmlns:r="http://schemas.openxmlformats.org/officeDocument/2006/relationships" id="266" r:id="R33ea77c3488a4625"/>
-    <p:sldId xmlns:r="http://schemas.openxmlformats.org/officeDocument/2006/relationships" id="267" r:id="R8f3318731eeb4a75"/>
-    <p:sldId xmlns:r="http://schemas.openxmlformats.org/officeDocument/2006/relationships" id="268" r:id="Raade177721cf48bd"/>
-    <p:sldId xmlns:r="http://schemas.openxmlformats.org/officeDocument/2006/relationships" id="269" r:id="R5d91716568214e01"/>
-    <p:sldId xmlns:r="http://schemas.openxmlformats.org/officeDocument/2006/relationships" id="270" r:id="R7d12cb44e7d54164"/>
-    <p:sldId xmlns:r="http://schemas.openxmlformats.org/officeDocument/2006/relationships" id="271" r:id="Rfb3f7fc14b674945"/>
-    <p:sldId xmlns:r="http://schemas.openxmlformats.org/officeDocument/2006/relationships" id="272" r:id="Rff337c8dd38e4113"/>
-    <p:sldId xmlns:r="http://schemas.openxmlformats.org/officeDocument/2006/relationships" id="273" r:id="R735fad1af27042f1"/>
-    <p:sldId xmlns:r="http://schemas.openxmlformats.org/officeDocument/2006/relationships" id="274" r:id="Ra0651d8d5ee14907"/>
-    <p:sldId xmlns:r="http://schemas.openxmlformats.org/officeDocument/2006/relationships" id="275" r:id="R4bd1a9cc70054474"/>
-    <p:sldId xmlns:r="http://schemas.openxmlformats.org/officeDocument/2006/relationships" id="276" r:id="R4d64056e24b44976"/>
-    <p:sldId xmlns:r="http://schemas.openxmlformats.org/officeDocument/2006/relationships" id="277" r:id="Rfa69948d815c453a"/>
-    <p:sldId xmlns:r="http://schemas.openxmlformats.org/officeDocument/2006/relationships" id="278" r:id="Rc67301e042fd4569"/>
-    <p:sldId xmlns:r="http://schemas.openxmlformats.org/officeDocument/2006/relationships" id="279" r:id="Rdadfedb1402f48fb"/>
-    <p:sldId xmlns:r="http://schemas.openxmlformats.org/officeDocument/2006/relationships" id="280" r:id="R574deb00313b4bd3"/>
-    <p:sldId xmlns:r="http://schemas.openxmlformats.org/officeDocument/2006/relationships" id="281" r:id="R73a0dc75472c40d6"/>
-    <p:sldId xmlns:r="http://schemas.openxmlformats.org/officeDocument/2006/relationships" id="282" r:id="Rf5441557bfd6445e"/>
-    <p:sldId xmlns:r="http://schemas.openxmlformats.org/officeDocument/2006/relationships" id="283" r:id="R65510d3ade3e4087"/>
-    <p:sldId xmlns:r="http://schemas.openxmlformats.org/officeDocument/2006/relationships" id="284" r:id="R8d7ddfd168fe4c4e"/>
-    <p:sldId xmlns:r="http://schemas.openxmlformats.org/officeDocument/2006/relationships" id="285" r:id="Rf9873121b5374af6"/>
+    <p:sldId xmlns:r="http://schemas.openxmlformats.org/officeDocument/2006/relationships" id="256" r:id="R997dae5d176a41db"/>
+    <p:sldId xmlns:r="http://schemas.openxmlformats.org/officeDocument/2006/relationships" id="257" r:id="Rf319768d965a4a98"/>
+    <p:sldId xmlns:r="http://schemas.openxmlformats.org/officeDocument/2006/relationships" id="258" r:id="R54fffdeff8574a6e"/>
+    <p:sldId xmlns:r="http://schemas.openxmlformats.org/officeDocument/2006/relationships" id="259" r:id="R3587880e81754493"/>
+    <p:sldId xmlns:r="http://schemas.openxmlformats.org/officeDocument/2006/relationships" id="260" r:id="R634c055f1a8840f8"/>
+    <p:sldId xmlns:r="http://schemas.openxmlformats.org/officeDocument/2006/relationships" id="261" r:id="Rd14bd63075b14580"/>
+    <p:sldId xmlns:r="http://schemas.openxmlformats.org/officeDocument/2006/relationships" id="262" r:id="R200ca385fa0b4303"/>
+    <p:sldId xmlns:r="http://schemas.openxmlformats.org/officeDocument/2006/relationships" id="263" r:id="R470848df088745d1"/>
+    <p:sldId xmlns:r="http://schemas.openxmlformats.org/officeDocument/2006/relationships" id="264" r:id="R5a9a5275a7884ce5"/>
+    <p:sldId xmlns:r="http://schemas.openxmlformats.org/officeDocument/2006/relationships" id="265" r:id="R76f65b3f81664da0"/>
+    <p:sldId xmlns:r="http://schemas.openxmlformats.org/officeDocument/2006/relationships" id="266" r:id="Rfc960d550712436c"/>
+    <p:sldId xmlns:r="http://schemas.openxmlformats.org/officeDocument/2006/relationships" id="267" r:id="R566e55d5e7d049b2"/>
+    <p:sldId xmlns:r="http://schemas.openxmlformats.org/officeDocument/2006/relationships" id="268" r:id="Rb4e93393e8f1404c"/>
+    <p:sldId xmlns:r="http://schemas.openxmlformats.org/officeDocument/2006/relationships" id="269" r:id="R7c8a5420f88b47b1"/>
+    <p:sldId xmlns:r="http://schemas.openxmlformats.org/officeDocument/2006/relationships" id="270" r:id="Rb52545d87f1c454b"/>
+    <p:sldId xmlns:r="http://schemas.openxmlformats.org/officeDocument/2006/relationships" id="271" r:id="R86f4d3bb08214125"/>
+    <p:sldId xmlns:r="http://schemas.openxmlformats.org/officeDocument/2006/relationships" id="272" r:id="R17b26653fd31482a"/>
+    <p:sldId xmlns:r="http://schemas.openxmlformats.org/officeDocument/2006/relationships" id="273" r:id="R71ffe93e74234e04"/>
+    <p:sldId xmlns:r="http://schemas.openxmlformats.org/officeDocument/2006/relationships" id="274" r:id="R43b4738bf3a64041"/>
+    <p:sldId xmlns:r="http://schemas.openxmlformats.org/officeDocument/2006/relationships" id="275" r:id="Raa75ee7636f04183"/>
+    <p:sldId xmlns:r="http://schemas.openxmlformats.org/officeDocument/2006/relationships" id="276" r:id="R27e9edc8ff68461e"/>
+    <p:sldId xmlns:r="http://schemas.openxmlformats.org/officeDocument/2006/relationships" id="277" r:id="R8a8415e97ab64ddd"/>
+    <p:sldId xmlns:r="http://schemas.openxmlformats.org/officeDocument/2006/relationships" id="278" r:id="R539e9b483bfd48db"/>
+    <p:sldId xmlns:r="http://schemas.openxmlformats.org/officeDocument/2006/relationships" id="279" r:id="R422f086600ff488b"/>
+    <p:sldId xmlns:r="http://schemas.openxmlformats.org/officeDocument/2006/relationships" id="280" r:id="Re9b76ab7c2e64314"/>
+    <p:sldId xmlns:r="http://schemas.openxmlformats.org/officeDocument/2006/relationships" id="281" r:id="Re2be9686255848c9"/>
+    <p:sldId xmlns:r="http://schemas.openxmlformats.org/officeDocument/2006/relationships" id="282" r:id="Rd063be711bf4438d"/>
+    <p:sldId xmlns:r="http://schemas.openxmlformats.org/officeDocument/2006/relationships" id="283" r:id="Racd678a8db764f74"/>
+    <p:sldId xmlns:r="http://schemas.openxmlformats.org/officeDocument/2006/relationships" id="284" r:id="R54dcd4c9c015499d"/>
   </p:sldIdLst>
   <p:sldSz cx="12192000" cy="6858000"/>
   <p:notesSz cx="6858000" cy="9144000"/>
   <p:embeddedFontLst>
     <p:embeddedFont>
       <p:font typeface="OpenAI Sans"/>
-      <p:regular xmlns:r="http://schemas.openxmlformats.org/officeDocument/2006/relationships" r:id="R608e1c2447004b10"/>
-      <p:bold xmlns:r="http://schemas.openxmlformats.org/officeDocument/2006/relationships" r:id="Re100d9798e27402b"/>
-      <p:italic xmlns:r="http://schemas.openxmlformats.org/officeDocument/2006/relationships" r:id="R2b14cb00e3944668"/>
-      <p:boldItalic xmlns:r="http://schemas.openxmlformats.org/officeDocument/2006/relationships" r:id="R1de27b5702c1446f"/>
+      <p:regular xmlns:r="http://schemas.openxmlformats.org/officeDocument/2006/relationships" r:id="Rb80ec28e51324e42"/>
+      <p:bold xmlns:r="http://schemas.openxmlformats.org/officeDocument/2006/relationships" r:id="R1a5d7a1059bc40d7"/>
+      <p:italic xmlns:r="http://schemas.openxmlformats.org/officeDocument/2006/relationships" r:id="R4cd076db35dc4888"/>
+      <p:boldItalic xmlns:r="http://schemas.openxmlformats.org/officeDocument/2006/relationships" r:id="R23c5deb809814675"/>
     </p:embeddedFont>
   </p:embeddedFontLst>
   <p:defaultTextStyle>
@@ -2119,7 +2118,7 @@
               <a:buNone/>
             </a:pPr>
             <a:r>
-              <a:t>Use a desk analogy: running out of desk space differs from scribbling over someone else’s paper. The old quiz guard is conceptual canary behavior. A callee may write through a valid pointer into caller-owned data, so not every cross-frame write is inherently illegal; the unexpected unauthorized overwrite is the problem. Canaries detect some corruption, ASLR changes predictability, and NX changes execution permissions. Do not imply the byte pattern identifies the exact buggy instruction.</a:t>
+              <a:t>Ask the two answer-reveal questions aloud: convert 0xA7; then list bytes of 0xA7B2 little-endian. Break into 4-bit groups and insist on preserving leading zeros within each nibble. For the endian example, draw addresses 1000 and 1001 and place full byte pairs into them. Do not reverse the digits inside a byte or the individual bits. Reading a uint32_t word in GDB and listing its bytes are different displays.</a:t>
             </a:r>
             <a:endParaRPr/>
           </a:p>
@@ -2149,7 +2148,7 @@
               <a:buNone/>
             </a:pPr>
             <a:r>
-              <a:t>Sources: https://firner.com/presentations/cs211/2026-Fall/cs211_09/; https://firner.com/presentations/cs211/2026-Fall/cs211_11/</a:t>
+              <a:t>Sources: https://firner.com/presentations/cs211/2026-Fall/cs211_01/; https://firner.com/presentations/cs211/2026-Fall/cs211_03/</a:t>
             </a:r>
             <a:endParaRPr/>
           </a:p>
@@ -2179,7 +2178,7 @@
               <a:buNone/>
             </a:pPr>
             <a:r>
-              <a:t>Answer: 1. word[4] is outside the 4-byte array and is undefined behavior. It is a bounds error, not proof the entire stack has run out.</a:t>
+              <a:t>Answer: 1. 0xA7 expands to 1010 0111₂.</a:t>
             </a:r>
             <a:endParaRPr/>
           </a:p>
@@ -2209,7 +2208,7 @@
               <a:buNone/>
             </a:pPr>
             <a:r>
-              <a:t>2. An unexpectedly changed guard suggests corruption, not normal stack cleanup. The exact effect and whether a crash occurs are not guaranteed.</a:t>
+              <a:t>2. In little-endian memory, 0xA7B2 as a 16-bit value stores B2 first, then A7.</a:t>
             </a:r>
             <a:endParaRPr/>
           </a:p>
@@ -2489,7 +2488,7 @@
               <a:buNone/>
             </a:pPr>
             <a:r>
-              <a:t>Ask the two answer-reveal questions aloud: convert 0xA7; then list bytes of 0xA7B2 little-endian. Break into 4-bit groups and insist on preserving leading zeros within each nibble. For the endian example, draw addresses 1000 and 1001 and place full byte pairs into them. Do not reverse the digits inside a byte or the individual bits. Reading a uint32_t word in GDB and listing its bytes are different displays.</a:t>
+              <a:t>Emphasize interpretation rather than a separate collection of signed memory cells. For general n-bit signed values, minimum is −2^(n−1) and maximum is 2^(n−1)−1. This is a fixed-width hardware/representation exercise. In C, small integer types are usually promoted before arithmetic, and signed overflow at the operation’s actual type width is undefined behavior; do not claim ordinary signed C overflow is guaranteed to wrap.</a:t>
             </a:r>
             <a:endParaRPr/>
           </a:p>
@@ -2519,7 +2518,7 @@
               <a:buNone/>
             </a:pPr>
             <a:r>
-              <a:t>Sources: https://firner.com/presentations/cs211/2026-Fall/cs211_01/; https://firner.com/presentations/cs211/2026-Fall/cs211_03/</a:t>
+              <a:t>Sources: https://firner.com/presentations/cs211/2026-Fall/cs211_02/; https://firner.com/presentations/cs211/2026-Fall/cs211_04/</a:t>
             </a:r>
             <a:endParaRPr/>
           </a:p>
@@ -2549,7 +2548,7 @@
               <a:buNone/>
             </a:pPr>
             <a:r>
-              <a:t>Answer: 1. 0xA7 expands to 1010 0111₂.</a:t>
+              <a:t>Answer: 1. Signed and unsigned 8-bit values each have 256 possible patterns.</a:t>
             </a:r>
             <a:endParaRPr/>
           </a:p>
@@ -2579,7 +2578,7 @@
               <a:buNone/>
             </a:pPr>
             <a:r>
-              <a:t>2. In little-endian memory, 0xA7B2 as a 16-bit value stores B2 first, then A7.</a:t>
+              <a:t>2. The fixed-width negation pattern for 10000000 is still 10000000. Read as signed, it is −128, but the desired positive result overflowed the signed 8-bit range.</a:t>
             </a:r>
             <a:endParaRPr/>
           </a:p>
@@ -2659,7 +2658,7 @@
               <a:buNone/>
             </a:pPr>
             <a:r>
-              <a:t>Emphasize interpretation rather than a separate collection of signed memory cells. For general n-bit signed values, minimum is −2^(n−1) and maximum is 2^(n−1)−1. This is a fixed-width hardware/representation exercise. In C, small integer types are usually promoted before arithmetic, and signed overflow at the operation’s actual type width is undefined behavior; do not claim ordinary signed C overflow is guaranteed to wrap.</a:t>
+              <a:t>Draw eight seats in a row; a shift throws the person at the end away, while a rotation sends that person around to the empty seat. For the homework-style method, combine a masked left shift with x &gt;&gt; 7. State the width and use unsigned arithmetic; shift counts must be valid for the promoted operand type. This is a one-bit illustration, not a complete general rotation function with all edge cases.</a:t>
             </a:r>
             <a:endParaRPr/>
           </a:p>
@@ -2689,7 +2688,7 @@
               <a:buNone/>
             </a:pPr>
             <a:r>
-              <a:t>Sources: https://firner.com/presentations/cs211/2026-Fall/cs211_02/; https://firner.com/presentations/cs211/2026-Fall/cs211_04/</a:t>
+              <a:t>Sources: https://firner.com/presentations/cs211/2026-Fall/cs211_02/; https://firner.com/presentations/cs211/2026-Fall/hw2.html</a:t>
             </a:r>
             <a:endParaRPr/>
           </a:p>
@@ -2719,7 +2718,7 @@
               <a:buNone/>
             </a:pPr>
             <a:r>
-              <a:t>Answer: 1. Signed and unsigned 8-bit values each have 256 possible patterns.</a:t>
+              <a:t>Answer: 1. x &amp; 0x0F = 0x06, keeping the low four bits.</a:t>
             </a:r>
             <a:endParaRPr/>
           </a:p>
@@ -2749,7 +2748,37 @@
               <a:buNone/>
             </a:pPr>
             <a:r>
-              <a:t>2. The fixed-width negation pattern for 10000000 is still 10000000. Read as signed, it is −128, but the desired positive result overflowed the signed 8-bit range.</a:t>
+              <a:t>2. The masked left shift is 0x6C = 01101100₂.</a:t>
+            </a:r>
+            <a:endParaRPr/>
+          </a:p>
+          <a:p xmlns:a="http://schemas.openxmlformats.org/drawingml/2006/main">
+            <a:pPr marL="0" lvl="0" indent="0" algn="l">
+              <a:spcBef>
+                <a:spcPts val="0"/>
+              </a:spcBef>
+              <a:spcAft>
+                <a:spcPts val="0"/>
+              </a:spcAft>
+              <a:buNone/>
+            </a:pPr>
+            <a:r>
+              <a:t/>
+            </a:r>
+            <a:endParaRPr/>
+          </a:p>
+          <a:p xmlns:a="http://schemas.openxmlformats.org/drawingml/2006/main">
+            <a:pPr marL="0" lvl="0" indent="0" algn="l">
+              <a:spcBef>
+                <a:spcPts val="0"/>
+              </a:spcBef>
+              <a:spcAft>
+                <a:spcPts val="0"/>
+              </a:spcAft>
+              <a:buNone/>
+            </a:pPr>
+            <a:r>
+              <a:t>3. The rotation is 0x6D = 01101101₂: the old top bit becomes the low bit.</a:t>
             </a:r>
             <a:endParaRPr/>
           </a:p>
@@ -2829,7 +2858,7 @@
               <a:buNone/>
             </a:pPr>
             <a:r>
-              <a:t>Draw eight seats in a row; a shift throws the person at the end away, while a rotation sends that person around to the empty seat. For the homework-style method, combine a masked left shift with x &gt;&gt; 7. State the width and use unsigned arithmetic; shift counts must be valid for the promoted operand type. This is a one-bit illustration, not a complete general rotation function with all edge cases.</a:t>
+              <a:t>Board: draw columns A, B, A AND B, NOT A, Out. For each row, fill both internal columns before Out. Circle the wire entering NOT so students do not invert the wrong input. In C, bitwise &amp;, |, ~ operate on bit patterns, while logical &amp;&amp;, ||, ! operate on truth values; this slide is single-bit logic. A truth table with n binary inputs needs 2^n rows.</a:t>
             </a:r>
             <a:endParaRPr/>
           </a:p>
@@ -2859,7 +2888,7 @@
               <a:buNone/>
             </a:pPr>
             <a:r>
-              <a:t>Sources: https://firner.com/presentations/cs211/2026-Fall/cs211_02/; https://firner.com/presentations/cs211/2026-Fall/hw2.html</a:t>
+              <a:t>Sources: https://firner.com/presentations/cs211/2026-Fall/cs211_02/; https://firner.com/presentations/cs211/2026-Fall/cs211_12/</a:t>
             </a:r>
             <a:endParaRPr/>
           </a:p>
@@ -2889,7 +2918,7 @@
               <a:buNone/>
             </a:pPr>
             <a:r>
-              <a:t>Answer: 1. x &amp; 0x0F = 0x06, keeping the low four bits.</a:t>
+              <a:t>Answer: 1. A=0,B=0: AND=0, NOT A=1, so output=1.</a:t>
             </a:r>
             <a:endParaRPr/>
           </a:p>
@@ -2919,7 +2948,7 @@
               <a:buNone/>
             </a:pPr>
             <a:r>
-              <a:t>2. The masked left shift is 0x6C = 01101100₂.</a:t>
+              <a:t>2. A=0,B=1: AND=0, NOT A=1, so output=1.</a:t>
             </a:r>
             <a:endParaRPr/>
           </a:p>
@@ -2949,7 +2978,37 @@
               <a:buNone/>
             </a:pPr>
             <a:r>
-              <a:t>3. The rotation is 0x6D = 01101101₂: the old top bit becomes the low bit.</a:t>
+              <a:t>3. A=1,B=0: AND=0, NOT A=0, so output=0.</a:t>
+            </a:r>
+            <a:endParaRPr/>
+          </a:p>
+          <a:p xmlns:a="http://schemas.openxmlformats.org/drawingml/2006/main">
+            <a:pPr marL="0" lvl="0" indent="0" algn="l">
+              <a:spcBef>
+                <a:spcPts val="0"/>
+              </a:spcBef>
+              <a:spcAft>
+                <a:spcPts val="0"/>
+              </a:spcAft>
+              <a:buNone/>
+            </a:pPr>
+            <a:r>
+              <a:t/>
+            </a:r>
+            <a:endParaRPr/>
+          </a:p>
+          <a:p xmlns:a="http://schemas.openxmlformats.org/drawingml/2006/main">
+            <a:pPr marL="0" lvl="0" indent="0" algn="l">
+              <a:spcBef>
+                <a:spcPts val="0"/>
+              </a:spcBef>
+              <a:spcAft>
+                <a:spcPts val="0"/>
+              </a:spcAft>
+              <a:buNone/>
+            </a:pPr>
+            <a:r>
+              <a:t>4. A=1,B=1: AND=1, NOT A=0, so output=1.</a:t>
             </a:r>
             <a:endParaRPr/>
           </a:p>
@@ -3029,7 +3088,7 @@
               <a:buNone/>
             </a:pPr>
             <a:r>
-              <a:t>Board: draw columns A, B, A AND B, NOT A, Out. For each row, fill both internal columns before Out. Circle the wire entering NOT so students do not invert the wrong input. In C, bitwise &amp;, |, ~ operate on bit patterns, while logical &amp;&amp;, ||, ! operate on truth values; this slide is single-bit logic. A truth table with n binary inputs needs 2^n rows.</a:t>
+              <a:t>Use decimal addition’s carry as the analogy. Two ones in a binary column produce zero in that column and carry one left. If each stage waits for the previous carry, a longer chain can take longer. For lookahead, define G=A AND B and P=A XOR B; then Cnext=G OR (P AND Cin). Avoid quoting a universal fixed number of gate delays because it depends on the implementation. Distinguish combinational propagation delay from sequential state storage.</a:t>
             </a:r>
             <a:endParaRPr/>
           </a:p>
@@ -3059,7 +3118,7 @@
               <a:buNone/>
             </a:pPr>
             <a:r>
-              <a:t>Sources: https://firner.com/presentations/cs211/2026-Fall/cs211_02/; https://firner.com/presentations/cs211/2026-Fall/cs211_12/</a:t>
+              <a:t>Sources: https://firner.com/presentations/cs211/2026-Fall/cs211_03/; https://firner.com/presentations/cs211/2026-Fall/cs211_12/; https://firner.com/presentations/cs211/2026-Fall/cs211_13/</a:t>
             </a:r>
             <a:endParaRPr/>
           </a:p>
@@ -3089,7 +3148,7 @@
               <a:buNone/>
             </a:pPr>
             <a:r>
-              <a:t>Answer: 1. A=0,B=0: AND=0, NOT A=1, so output=1.</a:t>
+              <a:t>Answer: 1. Sum = 1 XOR 1 XOR 0 = 0.</a:t>
             </a:r>
             <a:endParaRPr/>
           </a:p>
@@ -3119,7 +3178,7 @@
               <a:buNone/>
             </a:pPr>
             <a:r>
-              <a:t>2. A=0,B=1: AND=0, NOT A=1, so output=1.</a:t>
+              <a:t>2. Carry-out = 1. The binary total is 10₂.</a:t>
             </a:r>
             <a:endParaRPr/>
           </a:p>
@@ -3149,37 +3208,7 @@
               <a:buNone/>
             </a:pPr>
             <a:r>
-              <a:t>3. A=1,B=0: AND=0, NOT A=0, so output=0.</a:t>
-            </a:r>
-            <a:endParaRPr/>
-          </a:p>
-          <a:p xmlns:a="http://schemas.openxmlformats.org/drawingml/2006/main">
-            <a:pPr marL="0" lvl="0" indent="0" algn="l">
-              <a:spcBef>
-                <a:spcPts val="0"/>
-              </a:spcBef>
-              <a:spcAft>
-                <a:spcPts val="0"/>
-              </a:spcAft>
-              <a:buNone/>
-            </a:pPr>
-            <a:r>
-              <a:t/>
-            </a:r>
-            <a:endParaRPr/>
-          </a:p>
-          <a:p xmlns:a="http://schemas.openxmlformats.org/drawingml/2006/main">
-            <a:pPr marL="0" lvl="0" indent="0" algn="l">
-              <a:spcBef>
-                <a:spcPts val="0"/>
-              </a:spcBef>
-              <a:spcAft>
-                <a:spcPts val="0"/>
-              </a:spcAft>
-              <a:buNone/>
-            </a:pPr>
-            <a:r>
-              <a:t>4. A=1,B=1: AND=1, NOT A=0, so output=1.</a:t>
+              <a:t>3. Lookahead trades extra circuitry for less serial carry waiting; it does not make propagation delay disappear.</a:t>
             </a:r>
             <a:endParaRPr/>
           </a:p>
@@ -3259,7 +3288,7 @@
               <a:buNone/>
             </a:pPr>
             <a:r>
-              <a:t>Use decimal addition’s carry as the analogy. Two ones in a binary column produce zero in that column and carry one left. If each stage waits for the previous carry, a longer chain can take longer. For lookahead, define G=A AND B and P=A XOR B; then Cnext=G OR (P AND Cin). Avoid quoting a universal fixed number of gate delays because it depends on the implementation. Distinguish combinational propagation delay from sequential state storage.</a:t>
+              <a:t>Say: a MUX is a switch choosing which wire gets through; a decoder is a row of labels where one label lights up. Use active-high and enabled as explicit assumptions, since real parts can have active-low outputs and enable controls. n inputs to a binary decoder means n input BITS and up to 2^n output lines, not 2^n-bit values at every output.</a:t>
             </a:r>
             <a:endParaRPr/>
           </a:p>
@@ -3289,7 +3318,7 @@
               <a:buNone/>
             </a:pPr>
             <a:r>
-              <a:t>Sources: https://firner.com/presentations/cs211/2026-Fall/cs211_03/; https://firner.com/presentations/cs211/2026-Fall/cs211_12/; https://firner.com/presentations/cs211/2026-Fall/cs211_13/</a:t>
+              <a:t>Sources: https://firner.com/presentations/cs211/2026-Fall/cs211_12/</a:t>
             </a:r>
             <a:endParaRPr/>
           </a:p>
@@ -3319,7 +3348,7 @@
               <a:buNone/>
             </a:pPr>
             <a:r>
-              <a:t>Answer: 1. Sum = 1 XOR 1 XOR 0 = 0.</a:t>
+              <a:t>Answer: 1. The MUX output is B = 1.</a:t>
             </a:r>
             <a:endParaRPr/>
           </a:p>
@@ -3349,7 +3378,7 @@
               <a:buNone/>
             </a:pPr>
             <a:r>
-              <a:t>2. Carry-out = 1. The binary total is 10₂.</a:t>
+              <a:t>2. Input 10₂ selects line 2; the other output lines are 0 in this active-high model.</a:t>
             </a:r>
             <a:endParaRPr/>
           </a:p>
@@ -3379,7 +3408,7 @@
               <a:buNone/>
             </a:pPr>
             <a:r>
-              <a:t>3. Lookahead trades extra circuitry for less serial carry waiting; it does not make propagation delay disappear.</a:t>
+              <a:t>3. An 8-input MUX needs 3 selector bits because 2³ = 8.</a:t>
             </a:r>
             <a:endParaRPr/>
           </a:p>
@@ -3459,7 +3488,7 @@
               <a:buNone/>
             </a:pPr>
             <a:r>
-              <a:t>Say: a MUX is a switch choosing which wire gets through; a decoder is a row of labels where one label lights up. Use active-high and enabled as explicit assumptions, since real parts can have active-low outputs and enable controls. n inputs to a binary decoder means n input BITS and up to 2^n output lines, not 2^n-bit values at every output.</a:t>
+              <a:t>Analogy: a latch is an open window while enabled; a flip-flop is a snapshot at one instant. For an active-high NOR SR latch, S=R=0 holds, S=1 sets, R=1 resets, and S=R=1 is invalid. Do not transfer those levels directly to a NAND latch, whose controls are active-low. Combinational gate delays still exist in sequential circuits. The clock period must leave enough time for data to travel and settle before capture.</a:t>
             </a:r>
             <a:endParaRPr/>
           </a:p>
@@ -3489,7 +3518,7 @@
               <a:buNone/>
             </a:pPr>
             <a:r>
-              <a:t>Sources: https://firner.com/presentations/cs211/2026-Fall/cs211_12/</a:t>
+              <a:t>Sources: https://firner.com/presentations/cs211/2026-Fall/cs211_13/</a:t>
             </a:r>
             <a:endParaRPr/>
           </a:p>
@@ -3519,7 +3548,7 @@
               <a:buNone/>
             </a:pPr>
             <a:r>
-              <a:t>Answer: 1. The MUX output is B = 1.</a:t>
+              <a:t>Answer: 1. Before the next active rising edge, Q stays 0.</a:t>
             </a:r>
             <a:endParaRPr/>
           </a:p>
@@ -3549,37 +3578,7 @@
               <a:buNone/>
             </a:pPr>
             <a:r>
-              <a:t>2. Input 10₂ selects line 2; the other output lines are 0 in this active-high model.</a:t>
-            </a:r>
-            <a:endParaRPr/>
-          </a:p>
-          <a:p xmlns:a="http://schemas.openxmlformats.org/drawingml/2006/main">
-            <a:pPr marL="0" lvl="0" indent="0" algn="l">
-              <a:spcBef>
-                <a:spcPts val="0"/>
-              </a:spcBef>
-              <a:spcAft>
-                <a:spcPts val="0"/>
-              </a:spcAft>
-              <a:buNone/>
-            </a:pPr>
-            <a:r>
-              <a:t/>
-            </a:r>
-            <a:endParaRPr/>
-          </a:p>
-          <a:p xmlns:a="http://schemas.openxmlformats.org/drawingml/2006/main">
-            <a:pPr marL="0" lvl="0" indent="0" algn="l">
-              <a:spcBef>
-                <a:spcPts val="0"/>
-              </a:spcBef>
-              <a:spcAft>
-                <a:spcPts val="0"/>
-              </a:spcAft>
-              <a:buNone/>
-            </a:pPr>
-            <a:r>
-              <a:t>3. An 8-input MUX needs 3 selector bits because 2³ = 8.</a:t>
+              <a:t>2. At the rising edge, Q becomes 1, assuming D has been stable long enough to meet timing requirements.</a:t>
             </a:r>
             <a:endParaRPr/>
           </a:p>
@@ -3659,7 +3658,7 @@
               <a:buNone/>
             </a:pPr>
             <a:r>
-              <a:t>Analogy: a latch is an open window while enabled; a flip-flop is a snapshot at one instant. For an active-high NOR SR latch, S=R=0 holds, S=1 sets, R=1 resets, and S=R=1 is invalid. Do not transfer those levels directly to a NAND latch, whose controls are active-low. Combinational gate delays still exist in sequential circuits. The clock period must leave enough time for data to travel and settle before capture.</a:t>
+              <a:t>Board: write i, v[i], low bit, total. Students should trace rather than guess from the function name. Point out n is an element count, not a byte count; do not use sizeof v to recover it. const prevents writing elements through v. Ask what happens for n=0: the loop runs zero times and returns 0. Check pointer validity and bounds assumptions before reasoning about values.</a:t>
             </a:r>
             <a:endParaRPr/>
           </a:p>
@@ -3689,7 +3688,7 @@
               <a:buNone/>
             </a:pPr>
             <a:r>
-              <a:t>Sources: https://firner.com/presentations/cs211/2026-Fall/cs211_13/</a:t>
+              <a:t>Sources: https://firner.com/presentations/cs211/2026-Fall/cs211_04/; https://firner.com/presentations/cs211/2026-Fall/cs211_09/; https://firner.com/presentations/cs211/2026-Fall/cs211_13/ (midterm coding scope)</a:t>
             </a:r>
             <a:endParaRPr/>
           </a:p>
@@ -3719,7 +3718,7 @@
               <a:buNone/>
             </a:pPr>
             <a:r>
-              <a:t>Answer: 1. Before the next active rising edge, Q stays 0.</a:t>
+              <a:t>Answer: 1. The return value is 12: 4 + 8.</a:t>
             </a:r>
             <a:endParaRPr/>
           </a:p>
@@ -3749,7 +3748,37 @@
               <a:buNone/>
             </a:pPr>
             <a:r>
-              <a:t>2. At the rising edge, Q becomes 1, assuming D has been stable long enough to meet timing requirements.</a:t>
+              <a:t>2. v[i] &amp; 1u reads the low bit. A zero low bit means an even unsigned integer.</a:t>
+            </a:r>
+            <a:endParaRPr/>
+          </a:p>
+          <a:p xmlns:a="http://schemas.openxmlformats.org/drawingml/2006/main">
+            <a:pPr marL="0" lvl="0" indent="0" algn="l">
+              <a:spcBef>
+                <a:spcPts val="0"/>
+              </a:spcBef>
+              <a:spcAft>
+                <a:spcPts val="0"/>
+              </a:spcAft>
+              <a:buNone/>
+            </a:pPr>
+            <a:r>
+              <a:t/>
+            </a:r>
+            <a:endParaRPr/>
+          </a:p>
+          <a:p xmlns:a="http://schemas.openxmlformats.org/drawingml/2006/main">
+            <a:pPr marL="0" lvl="0" indent="0" algn="l">
+              <a:spcBef>
+                <a:spcPts val="0"/>
+              </a:spcBef>
+              <a:spcAft>
+                <a:spcPts val="0"/>
+              </a:spcAft>
+              <a:buNone/>
+            </a:pPr>
+            <a:r>
+              <a:t>3. total across the four iterations is 0, 4, 4, 12.</a:t>
             </a:r>
             <a:endParaRPr/>
           </a:p>
@@ -3829,7 +3858,7 @@
               <a:buNone/>
             </a:pPr>
             <a:r>
-              <a:t>Board: write i, v[i], low bit, total. Students should trace rather than guess from the function name. Point out n is an element count, not a byte count; do not use sizeof v to recover it. const prevents writing elements through v. Ask what happens for n=0: the loop runs zero times and returns 0. Check pointer validity and bounds assumptions before reasoning about values.</a:t>
+              <a:t>Analogy: a laundry line can wash one load while drying another; each load still goes through all the steps. State the ideal assumptions before using k+n−1. Real stages can have unequal delays; clock time is constrained by the slowest stage plus register overhead. More stages do not guarantee a proportional speedup. The professor lists this material as included but less emphasized than Lectures 1–13.</a:t>
             </a:r>
             <a:endParaRPr/>
           </a:p>
@@ -3859,7 +3888,7 @@
               <a:buNone/>
             </a:pPr>
             <a:r>
-              <a:t>Sources: https://firner.com/presentations/cs211/2026-Fall/cs211_04/; https://firner.com/presentations/cs211/2026-Fall/cs211_09/; https://firner.com/presentations/cs211/2026-Fall/cs211_13/ (midterm coding scope)</a:t>
+              <a:t>Sources: https://firner.com/presentations/cs211/2026-Fall/cs211_14/; https://firner.com/presentations/cs211/2026-Fall/cs211_15/</a:t>
             </a:r>
             <a:endParaRPr/>
           </a:p>
@@ -3889,7 +3918,7 @@
               <a:buNone/>
             </a:pPr>
             <a:r>
-              <a:t>Answer: 1. The return value is 12: 4 + 8.</a:t>
+              <a:t>Answer: 1. It takes 8 cycles to finish four instructions from an empty ideal pipeline.</a:t>
             </a:r>
             <a:endParaRPr/>
           </a:p>
@@ -3919,37 +3948,7 @@
               <a:buNone/>
             </a:pPr>
             <a:r>
-              <a:t>2. v[i] &amp; 1u reads the low bit. A zero low bit means an even unsigned integer.</a:t>
-            </a:r>
-            <a:endParaRPr/>
-          </a:p>
-          <a:p xmlns:a="http://schemas.openxmlformats.org/drawingml/2006/main">
-            <a:pPr marL="0" lvl="0" indent="0" algn="l">
-              <a:spcBef>
-                <a:spcPts val="0"/>
-              </a:spcBef>
-              <a:spcAft>
-                <a:spcPts val="0"/>
-              </a:spcAft>
-              <a:buNone/>
-            </a:pPr>
-            <a:r>
-              <a:t/>
-            </a:r>
-            <a:endParaRPr/>
-          </a:p>
-          <a:p xmlns:a="http://schemas.openxmlformats.org/drawingml/2006/main">
-            <a:pPr marL="0" lvl="0" indent="0" algn="l">
-              <a:spcBef>
-                <a:spcPts val="0"/>
-              </a:spcBef>
-              <a:spcAft>
-                <a:spcPts val="0"/>
-              </a:spcAft>
-              <a:buNone/>
-            </a:pPr>
-            <a:r>
-              <a:t>3. total across the four iterations is 0, 4, 4, 12.</a:t>
+              <a:t>2. Each instruction still spans five stages. After the pipeline fills, up to one instruction finishes per cycle under these assumptions.</a:t>
             </a:r>
             <a:endParaRPr/>
           </a:p>
@@ -4029,7 +4028,7 @@
               <a:buNone/>
             </a:pPr>
             <a:r>
-              <a:t>Analogy: a laundry line can wash one load while drying another; each load still goes through all the steps. State the ideal assumptions before using k+n−1. Real stages can have unequal delays; clock time is constrained by the slowest stage plus register overhead. More stages do not guarantee a proportional speedup. The professor lists this material as included but less emphasized than Lectures 1–13.</a:t>
+              <a:t>Ask students to draw a circle around the value being produced and consumed: RAX. For the branch, circle the flags produced by cmp and consumed by je. Forwarding is a shortcut wire, not time travel. In a simple in-order pipeline, RAW is the main data dependency; WAR/WAW become more important with reordering and multiple execution paths. Independent instructions can sometimes be scheduled while waiting, subject to preserving program behavior.</a:t>
             </a:r>
             <a:endParaRPr/>
           </a:p>
@@ -4089,7 +4088,7 @@
               <a:buNone/>
             </a:pPr>
             <a:r>
-              <a:t>Answer: 1. It takes 8 cycles to finish four instructions from an empty ideal pipeline.</a:t>
+              <a:t>Answer: 1. addq needs the value loaded into RAX. In the course’s five-stage model, an immediate load/use dependency typically needs a stall even with forwarding.</a:t>
             </a:r>
             <a:endParaRPr/>
           </a:p>
@@ -4119,7 +4118,7 @@
               <a:buNone/>
             </a:pPr>
             <a:r>
-              <a:t>2. Each instruction still spans five stages. After the pipeline fills, up to one instruction finishes per cycle under these assumptions.</a:t>
+              <a:t>2. je depends on the comparison result and changes the next instruction address. A wrong prediction can require discarding speculative work.</a:t>
             </a:r>
             <a:endParaRPr/>
           </a:p>
@@ -4199,7 +4198,7 @@
               <a:buNone/>
             </a:pPr>
             <a:r>
-              <a:t>Ask students to draw a circle around the value being produced and consumed: RAX. For the branch, circle the flags produced by cmp and consumed by je. Forwarding is a shortcut wire, not time travel. In a simple in-order pipeline, RAW is the main data dependency; WAR/WAW become more important with reordering and multiple execution paths. Independent instructions can sometimes be scheduled while waiting, subject to preserving program behavior.</a:t>
+              <a:t>Use this as a verbal exit check, not a race. Students should be able to explain the pointer and fraction distinctions without plugging values into a formula. If time is short, prioritize the union walkthrough and have students complete the extra float and pointer problems independently. Refer them to the lecture examples and past quizzes for full course coverage; no single recitation can reproduce every example.</a:t>
             </a:r>
             <a:endParaRPr/>
           </a:p>
@@ -4229,7 +4228,7 @@
               <a:buNone/>
             </a:pPr>
             <a:r>
-              <a:t>Sources: https://firner.com/presentations/cs211/2026-Fall/cs211_14/; https://firner.com/presentations/cs211/2026-Fall/cs211_15/</a:t>
+              <a:t>Sources: https://firner.com/presentations/cs211/2026-Fall/cs211_05/; https://firner.com/presentations/cs211/2026-Fall/cs211_09/; https://firner.com/presentations/cs211/2026-Fall/cs211_10/; https://firner.com/presentations/cs211/2026-Fall/cs211_15/</a:t>
             </a:r>
             <a:endParaRPr/>
           </a:p>
@@ -4259,7 +4258,7 @@
               <a:buNone/>
             </a:pPr>
             <a:r>
-              <a:t>Answer: 1. addq needs the value loaded into RAX. In the course’s five-stage model, an immediate load/use dependency typically needs a stall even with forwarding.</a:t>
+              <a:t>Answer: 1. Pointer size measures the address object; allocation size measures the separate requested block.</a:t>
             </a:r>
             <a:endParaRPr/>
           </a:p>
@@ -4289,7 +4288,127 @@
               <a:buNone/>
             </a:pPr>
             <a:r>
-              <a:t>2. je depends on the comparison result and changes the next instruction address. A wrong prediction can require discarding speculative work.</a:t>
+              <a:t>2. An address identifies a location; contents are the bytes stored there.</a:t>
+            </a:r>
+            <a:endParaRPr/>
+          </a:p>
+          <a:p xmlns:a="http://schemas.openxmlformats.org/drawingml/2006/main">
+            <a:pPr marL="0" lvl="0" indent="0" algn="l">
+              <a:spcBef>
+                <a:spcPts val="0"/>
+              </a:spcBef>
+              <a:spcAft>
+                <a:spcPts val="0"/>
+              </a:spcAft>
+              <a:buNone/>
+            </a:pPr>
+            <a:r>
+              <a:t/>
+            </a:r>
+            <a:endParaRPr/>
+          </a:p>
+          <a:p xmlns:a="http://schemas.openxmlformats.org/drawingml/2006/main">
+            <a:pPr marL="0" lvl="0" indent="0" algn="l">
+              <a:spcBef>
+                <a:spcPts val="0"/>
+              </a:spcBef>
+              <a:spcAft>
+                <a:spcPts val="0"/>
+              </a:spcAft>
+              <a:buNone/>
+            </a:pPr>
+            <a:r>
+              <a:t>3. The normal significand restores the implied leading 1 before the stored fraction.</a:t>
+            </a:r>
+            <a:endParaRPr/>
+          </a:p>
+          <a:p xmlns:a="http://schemas.openxmlformats.org/drawingml/2006/main">
+            <a:pPr marL="0" lvl="0" indent="0" algn="l">
+              <a:spcBef>
+                <a:spcPts val="0"/>
+              </a:spcBef>
+              <a:spcAft>
+                <a:spcPts val="0"/>
+              </a:spcAft>
+              <a:buNone/>
+            </a:pPr>
+            <a:r>
+              <a:t/>
+            </a:r>
+            <a:endParaRPr/>
+          </a:p>
+          <a:p xmlns:a="http://schemas.openxmlformats.org/drawingml/2006/main">
+            <a:pPr marL="0" lvl="0" indent="0" algn="l">
+              <a:spcBef>
+                <a:spcPts val="0"/>
+              </a:spcBef>
+              <a:spcAft>
+                <a:spcPts val="0"/>
+              </a:spcAft>
+              <a:buNone/>
+            </a:pPr>
+            <a:r>
+              <a:t>4. Struct members use distinct storage; union members overlap.</a:t>
+            </a:r>
+            <a:endParaRPr/>
+          </a:p>
+          <a:p xmlns:a="http://schemas.openxmlformats.org/drawingml/2006/main">
+            <a:pPr marL="0" lvl="0" indent="0" algn="l">
+              <a:spcBef>
+                <a:spcPts val="0"/>
+              </a:spcBef>
+              <a:spcAft>
+                <a:spcPts val="0"/>
+              </a:spcAft>
+              <a:buNone/>
+            </a:pPr>
+            <a:r>
+              <a:t/>
+            </a:r>
+            <a:endParaRPr/>
+          </a:p>
+          <a:p xmlns:a="http://schemas.openxmlformats.org/drawingml/2006/main">
+            <a:pPr marL="0" lvl="0" indent="0" algn="l">
+              <a:spcBef>
+                <a:spcPts val="0"/>
+              </a:spcBef>
+              <a:spcAft>
+                <a:spcPts val="0"/>
+              </a:spcAft>
+              <a:buNone/>
+            </a:pPr>
+            <a:r>
+              <a:t>5. Stack cleanup ends the current frame’s automatic lifetimes; free releases a dynamic allocation.</a:t>
+            </a:r>
+            <a:endParaRPr/>
+          </a:p>
+          <a:p xmlns:a="http://schemas.openxmlformats.org/drawingml/2006/main">
+            <a:pPr marL="0" lvl="0" indent="0" algn="l">
+              <a:spcBef>
+                <a:spcPts val="0"/>
+              </a:spcBef>
+              <a:spcAft>
+                <a:spcPts val="0"/>
+              </a:spcAft>
+              <a:buNone/>
+            </a:pPr>
+            <a:r>
+              <a:t/>
+            </a:r>
+            <a:endParaRPr/>
+          </a:p>
+          <a:p xmlns:a="http://schemas.openxmlformats.org/drawingml/2006/main">
+            <a:pPr marL="0" lvl="0" indent="0" algn="l">
+              <a:spcBef>
+                <a:spcPts val="0"/>
+              </a:spcBef>
+              <a:spcAft>
+                <a:spcPts val="0"/>
+              </a:spcAft>
+              <a:buNone/>
+            </a:pPr>
+            <a:r>
+              <a:t>6. Latency is the time for one task; throughput is the rate of completing tasks.</a:t>
             </a:r>
             <a:endParaRPr/>
           </a:p>
@@ -4400,296 +4519,6 @@
             </a:pPr>
             <a:r>
               <a:t>Sources: https://firner.com/presentations/cs211/2026-Fall/cs211_08/; https://firner.com/presentations/cs211/2026-Fall/cs211_09/</a:t>
-            </a:r>
-            <a:endParaRPr/>
-          </a:p>
-        </p:txBody>
-      </p:sp>
-      <p:sp>
-        <p:nvSpPr>
-          <p:cNvPr id="4" name="Slide Number Placeholder 3"/>
-          <p:cNvSpPr>
-            <a:spLocks xmlns:a="http://schemas.openxmlformats.org/drawingml/2006/main" noGrp="1"/>
-          </p:cNvSpPr>
-          <p:nvPr>
-            <p:ph type="sldNum" idx="5"/>
-          </p:nvPr>
-        </p:nvSpPr>
-        <p:spPr/>
-        <p:txBody>
-          <a:bodyPr xmlns:a="http://schemas.openxmlformats.org/drawingml/2006/main"/>
-          <a:lstStyle xmlns:a="http://schemas.openxmlformats.org/drawingml/2006/main"/>
-          <a:p xmlns:a="http://schemas.openxmlformats.org/drawingml/2006/main"/>
-        </p:txBody>
-      </p:sp>
-    </p:spTree>
-  </p:cSld>
-  <p:clrMapOvr>
-    <a:masterClrMapping xmlns:a="http://schemas.openxmlformats.org/drawingml/2006/main"/>
-  </p:clrMapOvr>
-</p:notes>
-</file>
-
-<file path=ppt/notesSlides/notesSlide30.xml><?xml version="1.0" encoding="utf-8"?>
-<p:notes xmlns:p="http://schemas.openxmlformats.org/presentationml/2006/main">
-  <p:cSld>
-    <p:spTree>
-      <p:nvGrpSpPr>
-        <p:cNvPr id="1" name=""/>
-        <p:cNvGrpSpPr/>
-        <p:nvPr/>
-      </p:nvGrpSpPr>
-      <p:grpSpPr>
-        <a:xfrm xmlns:a="http://schemas.openxmlformats.org/drawingml/2006/main"/>
-      </p:grpSpPr>
-      <p:sp>
-        <p:nvSpPr>
-          <p:cNvPr id="2" name="Slide Image Placeholder 1"/>
-          <p:cNvSpPr>
-            <a:spLocks xmlns:a="http://schemas.openxmlformats.org/drawingml/2006/main" noGrp="1"/>
-          </p:cNvSpPr>
-          <p:nvPr>
-            <p:ph type="sldImg" idx="0"/>
-          </p:nvPr>
-        </p:nvSpPr>
-        <p:spPr/>
-      </p:sp>
-      <p:sp>
-        <p:nvSpPr>
-          <p:cNvPr id="3" name="Notes Placeholder 2"/>
-          <p:cNvSpPr>
-            <a:spLocks xmlns:a="http://schemas.openxmlformats.org/drawingml/2006/main" noGrp="1"/>
-          </p:cNvSpPr>
-          <p:nvPr>
-            <p:ph type="body" idx="1"/>
-          </p:nvPr>
-        </p:nvSpPr>
-        <p:spPr/>
-        <p:txBody>
-          <a:bodyPr xmlns:a="http://schemas.openxmlformats.org/drawingml/2006/main"/>
-          <a:lstStyle xmlns:a="http://schemas.openxmlformats.org/drawingml/2006/main"/>
-          <a:p xmlns:a="http://schemas.openxmlformats.org/drawingml/2006/main">
-            <a:pPr marL="0" lvl="0" indent="0" algn="l">
-              <a:spcBef>
-                <a:spcPts val="0"/>
-              </a:spcBef>
-              <a:spcAft>
-                <a:spcPts val="0"/>
-              </a:spcAft>
-              <a:buNone/>
-            </a:pPr>
-            <a:r>
-              <a:t>Use this as a verbal exit check, not a race. Students should be able to explain the pointer and fraction distinctions without plugging values into a formula. If time is short, prioritize the union walkthrough and have students complete the extra float and pointer problems independently. Refer them to the lecture examples and past quizzes for full course coverage; no single recitation can reproduce every example.</a:t>
-            </a:r>
-            <a:endParaRPr/>
-          </a:p>
-          <a:p xmlns:a="http://schemas.openxmlformats.org/drawingml/2006/main">
-            <a:pPr marL="0" lvl="0" indent="0" algn="l">
-              <a:spcBef>
-                <a:spcPts val="0"/>
-              </a:spcBef>
-              <a:spcAft>
-                <a:spcPts val="0"/>
-              </a:spcAft>
-              <a:buNone/>
-            </a:pPr>
-            <a:r>
-              <a:t/>
-            </a:r>
-            <a:endParaRPr/>
-          </a:p>
-          <a:p xmlns:a="http://schemas.openxmlformats.org/drawingml/2006/main">
-            <a:pPr marL="0" lvl="0" indent="0" algn="l">
-              <a:spcBef>
-                <a:spcPts val="0"/>
-              </a:spcBef>
-              <a:spcAft>
-                <a:spcPts val="0"/>
-              </a:spcAft>
-              <a:buNone/>
-            </a:pPr>
-            <a:r>
-              <a:t>Sources: https://firner.com/presentations/cs211/2026-Fall/cs211_05/; https://firner.com/presentations/cs211/2026-Fall/cs211_09/; https://firner.com/presentations/cs211/2026-Fall/cs211_10/; https://firner.com/presentations/cs211/2026-Fall/cs211_15/</a:t>
-            </a:r>
-            <a:endParaRPr/>
-          </a:p>
-          <a:p xmlns:a="http://schemas.openxmlformats.org/drawingml/2006/main">
-            <a:pPr marL="0" lvl="0" indent="0" algn="l">
-              <a:spcBef>
-                <a:spcPts val="0"/>
-              </a:spcBef>
-              <a:spcAft>
-                <a:spcPts val="0"/>
-              </a:spcAft>
-              <a:buNone/>
-            </a:pPr>
-            <a:r>
-              <a:t/>
-            </a:r>
-            <a:endParaRPr/>
-          </a:p>
-          <a:p xmlns:a="http://schemas.openxmlformats.org/drawingml/2006/main">
-            <a:pPr marL="0" lvl="0" indent="0" algn="l">
-              <a:spcBef>
-                <a:spcPts val="0"/>
-              </a:spcBef>
-              <a:spcAft>
-                <a:spcPts val="0"/>
-              </a:spcAft>
-              <a:buNone/>
-            </a:pPr>
-            <a:r>
-              <a:t>Answer: 1. Pointer size measures the address object; allocation size measures the separate requested block.</a:t>
-            </a:r>
-            <a:endParaRPr/>
-          </a:p>
-          <a:p xmlns:a="http://schemas.openxmlformats.org/drawingml/2006/main">
-            <a:pPr marL="0" lvl="0" indent="0" algn="l">
-              <a:spcBef>
-                <a:spcPts val="0"/>
-              </a:spcBef>
-              <a:spcAft>
-                <a:spcPts val="0"/>
-              </a:spcAft>
-              <a:buNone/>
-            </a:pPr>
-            <a:r>
-              <a:t/>
-            </a:r>
-            <a:endParaRPr/>
-          </a:p>
-          <a:p xmlns:a="http://schemas.openxmlformats.org/drawingml/2006/main">
-            <a:pPr marL="0" lvl="0" indent="0" algn="l">
-              <a:spcBef>
-                <a:spcPts val="0"/>
-              </a:spcBef>
-              <a:spcAft>
-                <a:spcPts val="0"/>
-              </a:spcAft>
-              <a:buNone/>
-            </a:pPr>
-            <a:r>
-              <a:t>2. An address identifies a location; contents are the bytes stored there.</a:t>
-            </a:r>
-            <a:endParaRPr/>
-          </a:p>
-          <a:p xmlns:a="http://schemas.openxmlformats.org/drawingml/2006/main">
-            <a:pPr marL="0" lvl="0" indent="0" algn="l">
-              <a:spcBef>
-                <a:spcPts val="0"/>
-              </a:spcBef>
-              <a:spcAft>
-                <a:spcPts val="0"/>
-              </a:spcAft>
-              <a:buNone/>
-            </a:pPr>
-            <a:r>
-              <a:t/>
-            </a:r>
-            <a:endParaRPr/>
-          </a:p>
-          <a:p xmlns:a="http://schemas.openxmlformats.org/drawingml/2006/main">
-            <a:pPr marL="0" lvl="0" indent="0" algn="l">
-              <a:spcBef>
-                <a:spcPts val="0"/>
-              </a:spcBef>
-              <a:spcAft>
-                <a:spcPts val="0"/>
-              </a:spcAft>
-              <a:buNone/>
-            </a:pPr>
-            <a:r>
-              <a:t>3. The normal significand restores the implied leading 1 before the stored fraction.</a:t>
-            </a:r>
-            <a:endParaRPr/>
-          </a:p>
-          <a:p xmlns:a="http://schemas.openxmlformats.org/drawingml/2006/main">
-            <a:pPr marL="0" lvl="0" indent="0" algn="l">
-              <a:spcBef>
-                <a:spcPts val="0"/>
-              </a:spcBef>
-              <a:spcAft>
-                <a:spcPts val="0"/>
-              </a:spcAft>
-              <a:buNone/>
-            </a:pPr>
-            <a:r>
-              <a:t/>
-            </a:r>
-            <a:endParaRPr/>
-          </a:p>
-          <a:p xmlns:a="http://schemas.openxmlformats.org/drawingml/2006/main">
-            <a:pPr marL="0" lvl="0" indent="0" algn="l">
-              <a:spcBef>
-                <a:spcPts val="0"/>
-              </a:spcBef>
-              <a:spcAft>
-                <a:spcPts val="0"/>
-              </a:spcAft>
-              <a:buNone/>
-            </a:pPr>
-            <a:r>
-              <a:t>4. Struct members use distinct storage; union members overlap.</a:t>
-            </a:r>
-            <a:endParaRPr/>
-          </a:p>
-          <a:p xmlns:a="http://schemas.openxmlformats.org/drawingml/2006/main">
-            <a:pPr marL="0" lvl="0" indent="0" algn="l">
-              <a:spcBef>
-                <a:spcPts val="0"/>
-              </a:spcBef>
-              <a:spcAft>
-                <a:spcPts val="0"/>
-              </a:spcAft>
-              <a:buNone/>
-            </a:pPr>
-            <a:r>
-              <a:t/>
-            </a:r>
-            <a:endParaRPr/>
-          </a:p>
-          <a:p xmlns:a="http://schemas.openxmlformats.org/drawingml/2006/main">
-            <a:pPr marL="0" lvl="0" indent="0" algn="l">
-              <a:spcBef>
-                <a:spcPts val="0"/>
-              </a:spcBef>
-              <a:spcAft>
-                <a:spcPts val="0"/>
-              </a:spcAft>
-              <a:buNone/>
-            </a:pPr>
-            <a:r>
-              <a:t>5. Stack cleanup ends the current frame’s automatic lifetimes; free releases a dynamic allocation.</a:t>
-            </a:r>
-            <a:endParaRPr/>
-          </a:p>
-          <a:p xmlns:a="http://schemas.openxmlformats.org/drawingml/2006/main">
-            <a:pPr marL="0" lvl="0" indent="0" algn="l">
-              <a:spcBef>
-                <a:spcPts val="0"/>
-              </a:spcBef>
-              <a:spcAft>
-                <a:spcPts val="0"/>
-              </a:spcAft>
-              <a:buNone/>
-            </a:pPr>
-            <a:r>
-              <a:t/>
-            </a:r>
-            <a:endParaRPr/>
-          </a:p>
-          <a:p xmlns:a="http://schemas.openxmlformats.org/drawingml/2006/main">
-            <a:pPr marL="0" lvl="0" indent="0" algn="l">
-              <a:spcBef>
-                <a:spcPts val="0"/>
-              </a:spcBef>
-              <a:spcAft>
-                <a:spcPts val="0"/>
-              </a:spcAft>
-              <a:buNone/>
-            </a:pPr>
-            <a:r>
-              <a:t>6. Latency is the time for one task; throughput is the rate of completing tasks.</a:t>
             </a:r>
             <a:endParaRPr/>
           </a:p>
@@ -7593,14 +7422,14 @@
   </p:cSld>
   <p:clrMap bg1="dk1" tx1="lt1" bg2="dk2" tx2="lt2" accent1="accent1" accent2="accent2" accent3="accent3" accent4="accent4" accent5="accent5" accent6="accent6" hlink="hlink" folHlink="folHlink"/>
   <p:sldLayoutIdLst>
-    <p:sldLayoutId xmlns:r="http://schemas.openxmlformats.org/officeDocument/2006/relationships" id="2147483649" r:id="R15b8b3bd30d54c42"/>
-    <p:sldLayoutId xmlns:r="http://schemas.openxmlformats.org/officeDocument/2006/relationships" id="2147483650" r:id="R3bdd156fd53f43ab"/>
-    <p:sldLayoutId xmlns:r="http://schemas.openxmlformats.org/officeDocument/2006/relationships" id="2147483651" r:id="R62792a25c29644f7"/>
-    <p:sldLayoutId xmlns:r="http://schemas.openxmlformats.org/officeDocument/2006/relationships" id="2147483652" r:id="Rd94091917d1a42ff"/>
-    <p:sldLayoutId xmlns:r="http://schemas.openxmlformats.org/officeDocument/2006/relationships" id="2147483653" r:id="R86e93820104b4aed"/>
-    <p:sldLayoutId xmlns:r="http://schemas.openxmlformats.org/officeDocument/2006/relationships" id="2147483654" r:id="R717dfaea55e342cd"/>
-    <p:sldLayoutId xmlns:r="http://schemas.openxmlformats.org/officeDocument/2006/relationships" id="2147483655" r:id="R03d03b627e6647aa"/>
-    <p:sldLayoutId xmlns:r="http://schemas.openxmlformats.org/officeDocument/2006/relationships" id="2147483656" r:id="R4f1773dae1d54d49"/>
+    <p:sldLayoutId xmlns:r="http://schemas.openxmlformats.org/officeDocument/2006/relationships" id="2147483649" r:id="Rf888fbe4d6bd495b"/>
+    <p:sldLayoutId xmlns:r="http://schemas.openxmlformats.org/officeDocument/2006/relationships" id="2147483650" r:id="R3b3b6729dfc14ed1"/>
+    <p:sldLayoutId xmlns:r="http://schemas.openxmlformats.org/officeDocument/2006/relationships" id="2147483651" r:id="R0815f82b73514e3e"/>
+    <p:sldLayoutId xmlns:r="http://schemas.openxmlformats.org/officeDocument/2006/relationships" id="2147483652" r:id="Rbee41f3951244658"/>
+    <p:sldLayoutId xmlns:r="http://schemas.openxmlformats.org/officeDocument/2006/relationships" id="2147483653" r:id="R17d136eace764864"/>
+    <p:sldLayoutId xmlns:r="http://schemas.openxmlformats.org/officeDocument/2006/relationships" id="2147483654" r:id="R2ea48153a84f4949"/>
+    <p:sldLayoutId xmlns:r="http://schemas.openxmlformats.org/officeDocument/2006/relationships" id="2147483655" r:id="Rc1bcfa9bad1342d7"/>
+    <p:sldLayoutId xmlns:r="http://schemas.openxmlformats.org/officeDocument/2006/relationships" id="2147483656" r:id="R18b18e35a1df405c"/>
   </p:sldLayoutIdLst>
   <p:hf hdr="0" dt="0"/>
   <p:txStyles>
@@ -10471,7 +10300,7 @@
           <p:cNvPr id="534" name="">
             <a:extLst xmlns:a="http://schemas.openxmlformats.org/drawingml/2006/main">
               <a:ext uri="{FF2B5EF4-FFF2-40B4-BE49-F238E27FC236}">
-                <a16:creationId xmlns:a16="http://schemas.microsoft.com/office/drawing/2014/main" id="{3C9E9A29-1F76-4B71-AB96-EC661CF8BC86}"/>
+                <a16:creationId xmlns:a16="http://schemas.microsoft.com/office/drawing/2014/main" id="{96CFABA2-E5FD-4B07-AE63-2ADECDBBAE2C}"/>
               </a:ext>
             </a:extLst>
           </p:cNvPr>
@@ -11214,7 +11043,7 @@
           <p:cNvPr id="535" name="Takeaway">
             <a:extLst xmlns:a="http://schemas.openxmlformats.org/drawingml/2006/main">
               <a:ext uri="{FF2B5EF4-FFF2-40B4-BE49-F238E27FC236}">
-                <a16:creationId xmlns:a16="http://schemas.microsoft.com/office/drawing/2014/main" id="{4698B99D-ACE1-4432-A75A-2277009F6E75}"/>
+                <a16:creationId xmlns:a16="http://schemas.microsoft.com/office/drawing/2014/main" id="{E941B08F-A6B1-485F-8171-1FDEE65D3C0D}"/>
               </a:ext>
             </a:extLst>
           </p:cNvPr>
@@ -12598,7 +12427,7 @@
           <p:cNvPr id="534" name="Takeaway">
             <a:extLst xmlns:a="http://schemas.openxmlformats.org/drawingml/2006/main">
               <a:ext uri="{FF2B5EF4-FFF2-40B4-BE49-F238E27FC236}">
-                <a16:creationId xmlns:a16="http://schemas.microsoft.com/office/drawing/2014/main" id="{3805E744-1A0F-41EA-950E-E5AC13311F41}"/>
+                <a16:creationId xmlns:a16="http://schemas.microsoft.com/office/drawing/2014/main" id="{C1A168B8-8602-498B-BC7E-252FCCD7359C}"/>
               </a:ext>
             </a:extLst>
           </p:cNvPr>
@@ -14031,7 +13860,7 @@
           <p:cNvPr id="534" name="Takeaway">
             <a:extLst xmlns:a="http://schemas.openxmlformats.org/drawingml/2006/main">
               <a:ext uri="{FF2B5EF4-FFF2-40B4-BE49-F238E27FC236}">
-                <a16:creationId xmlns:a16="http://schemas.microsoft.com/office/drawing/2014/main" id="{45D0A285-3B1A-4A84-8DD0-A60B3461E759}"/>
+                <a16:creationId xmlns:a16="http://schemas.microsoft.com/office/drawing/2014/main" id="{24FBD113-DAE8-4E4C-9468-2CF600D695D9}"/>
               </a:ext>
             </a:extLst>
           </p:cNvPr>
@@ -15513,7 +15342,7 @@
           <p:cNvPr id="534" name="Takeaway">
             <a:extLst xmlns:a="http://schemas.openxmlformats.org/drawingml/2006/main">
               <a:ext uri="{FF2B5EF4-FFF2-40B4-BE49-F238E27FC236}">
-                <a16:creationId xmlns:a16="http://schemas.microsoft.com/office/drawing/2014/main" id="{05D63010-2970-4521-8158-18CAAC94DD8A}"/>
+                <a16:creationId xmlns:a16="http://schemas.microsoft.com/office/drawing/2014/main" id="{96031ACB-D1A3-4A56-82FE-89DF5D81DA8E}"/>
               </a:ext>
             </a:extLst>
           </p:cNvPr>
@@ -16896,7 +16725,7 @@
           <p:cNvPr id="534" name="">
             <a:extLst xmlns:a="http://schemas.openxmlformats.org/drawingml/2006/main">
               <a:ext uri="{FF2B5EF4-FFF2-40B4-BE49-F238E27FC236}">
-                <a16:creationId xmlns:a16="http://schemas.microsoft.com/office/drawing/2014/main" id="{E736BE7D-115A-4F0D-97C1-430C93B52E58}"/>
+                <a16:creationId xmlns:a16="http://schemas.microsoft.com/office/drawing/2014/main" id="{1F2C93F1-9F49-4E3C-83E6-110C1ACF97FE}"/>
               </a:ext>
             </a:extLst>
           </p:cNvPr>
@@ -17256,7 +17085,7 @@
           <p:cNvPr id="535" name="Takeaway">
             <a:extLst xmlns:a="http://schemas.openxmlformats.org/drawingml/2006/main">
               <a:ext uri="{FF2B5EF4-FFF2-40B4-BE49-F238E27FC236}">
-                <a16:creationId xmlns:a16="http://schemas.microsoft.com/office/drawing/2014/main" id="{7A1364B4-9C7F-49AC-AA46-4521C616671A}"/>
+                <a16:creationId xmlns:a16="http://schemas.microsoft.com/office/drawing/2014/main" id="{D3C82233-21D5-4DA9-A1B1-64B111E67494}"/>
               </a:ext>
             </a:extLst>
           </p:cNvPr>
@@ -18706,7 +18535,7 @@
           <p:cNvPr id="534" name="Takeaway">
             <a:extLst xmlns:a="http://schemas.openxmlformats.org/drawingml/2006/main">
               <a:ext uri="{FF2B5EF4-FFF2-40B4-BE49-F238E27FC236}">
-                <a16:creationId xmlns:a16="http://schemas.microsoft.com/office/drawing/2014/main" id="{530237C3-91F9-427B-B950-CB162DC524AF}"/>
+                <a16:creationId xmlns:a16="http://schemas.microsoft.com/office/drawing/2014/main" id="{F8B313C2-DF1C-461F-8236-3BEB1B51C26C}"/>
               </a:ext>
             </a:extLst>
           </p:cNvPr>
@@ -20106,7 +19935,7 @@
           <p:cNvPr id="534" name="Takeaway">
             <a:extLst xmlns:a="http://schemas.openxmlformats.org/drawingml/2006/main">
               <a:ext uri="{FF2B5EF4-FFF2-40B4-BE49-F238E27FC236}">
-                <a16:creationId xmlns:a16="http://schemas.microsoft.com/office/drawing/2014/main" id="{128DB647-1AB6-44AB-9540-5C0CBA92FB8F}"/>
+                <a16:creationId xmlns:a16="http://schemas.microsoft.com/office/drawing/2014/main" id="{931288C9-6AB0-4899-9792-BFE1F22AFA70}"/>
               </a:ext>
             </a:extLst>
           </p:cNvPr>
@@ -21556,7 +21385,7 @@
           <p:cNvPr id="534" name="Takeaway">
             <a:extLst xmlns:a="http://schemas.openxmlformats.org/drawingml/2006/main">
               <a:ext uri="{FF2B5EF4-FFF2-40B4-BE49-F238E27FC236}">
-                <a16:creationId xmlns:a16="http://schemas.microsoft.com/office/drawing/2014/main" id="{957C10D5-6078-46DC-959D-F79CB6F1267E}"/>
+                <a16:creationId xmlns:a16="http://schemas.microsoft.com/office/drawing/2014/main" id="{EC79C46D-981C-40B1-B3F7-7F73AF0D4521}"/>
               </a:ext>
             </a:extLst>
           </p:cNvPr>
@@ -22989,7 +22818,7 @@
           <p:cNvPr id="534" name="Takeaway">
             <a:extLst xmlns:a="http://schemas.openxmlformats.org/drawingml/2006/main">
               <a:ext uri="{FF2B5EF4-FFF2-40B4-BE49-F238E27FC236}">
-                <a16:creationId xmlns:a16="http://schemas.microsoft.com/office/drawing/2014/main" id="{C9EBB754-0619-4E36-8E0A-D936A2460162}"/>
+                <a16:creationId xmlns:a16="http://schemas.microsoft.com/office/drawing/2014/main" id="{904702AF-63E9-47E4-A2DF-9CAEC3FDD6CA}"/>
               </a:ext>
             </a:extLst>
           </p:cNvPr>
@@ -23658,7 +23487,7 @@
                 <a:ea typeface="Arial"/>
                 <a:cs typeface="Arial"/>
               </a:rPr>
-              <a:t>Stack exhaustion and stack corruption</a:t>
+              <a:t>Hex, binary, and byte order</a:t>
             </a:r>
           </a:p>
         </p:txBody>
@@ -23894,7 +23723,7 @@
                 <a:ea typeface="Arial"/>
                 <a:cs typeface="Arial"/>
               </a:rPr>
-              <a:t>Exhaustion: too many active frames or large local allocations use up the available stack.</a:t>
+              <a:t>One hex digit represents four bits. Convert one digit at a time.</a:t>
             </a:r>
           </a:p>
           <a:p xmlns:a="http://schemas.openxmlformats.org/drawingml/2006/main">
@@ -23944,7 +23773,7 @@
                 <a:ea typeface="Arial"/>
                 <a:cs typeface="Arial"/>
               </a:rPr>
-              <a:t>Corruption: code writes outside a valid object and may overwrite nearby state.</a:t>
+              <a:t>Endianness orders bytes in memory; it does not reverse the bits within each byte.</a:t>
             </a:r>
           </a:p>
           <a:p xmlns:a="http://schemas.openxmlformats.org/drawingml/2006/main">
@@ -23994,7 +23823,7 @@
                 <a:ea typeface="Arial"/>
                 <a:cs typeface="Arial"/>
               </a:rPr>
-              <a:t>A canary is a marker checked for unexpected change.</a:t>
+              <a:t>Start at the lowest address when listing stored bytes.</a:t>
             </a:r>
           </a:p>
         </p:txBody>
@@ -24230,7 +24059,7 @@
                 <a:ea typeface="Consolas"/>
                 <a:cs typeface="Consolas"/>
               </a:rPr>
-              <a:t>char word[4];</a:t>
+              <a:t>0xD6 = 1101 0110₂</a:t>
             </a:r>
           </a:p>
           <a:p xmlns:a="http://schemas.openxmlformats.org/drawingml/2006/main">
@@ -24263,7 +24092,7 @@
                 <a:ea typeface="Consolas"/>
                 <a:cs typeface="Consolas"/>
               </a:rPr>
-              <a:t>// Valid indexes: 0,1,2,3</a:t>
+              <a:t>0x1234, low address first:</a:t>
             </a:r>
           </a:p>
           <a:p xmlns:a="http://schemas.openxmlformats.org/drawingml/2006/main">
@@ -24296,24 +24125,7 @@
                 <a:ea typeface="Consolas"/>
                 <a:cs typeface="Consolas"/>
               </a:rPr>
-              <a:t>word[4] = 0;  // invalid write</a:t>
-            </a:r>
-          </a:p>
-          <a:p xmlns:a="http://schemas.openxmlformats.org/drawingml/2006/main">
-            <a:pPr marL="0" indent="0">
-              <a:lnSpc>
-                <a:spcPct val="112000"/>
-              </a:lnSpc>
-              <a:spcBef>
-                <a:spcPts val="0"/>
-              </a:spcBef>
-              <a:spcAft>
-                <a:spcPts val="0"/>
-              </a:spcAft>
-              <a:buNone/>
-            </a:pPr>
-            <a:r>
-              <a:t/>
+              <a:t>Little endian: 34 12</a:t>
             </a:r>
           </a:p>
           <a:p xmlns:a="http://schemas.openxmlformats.org/drawingml/2006/main">
@@ -24346,7 +24158,24 @@
                 <a:ea typeface="Consolas"/>
                 <a:cs typeface="Consolas"/>
               </a:rPr>
-              <a:t>Canary: detects some overwrites</a:t>
+              <a:t>Big endian:    12 34</a:t>
+            </a:r>
+          </a:p>
+          <a:p xmlns:a="http://schemas.openxmlformats.org/drawingml/2006/main">
+            <a:pPr marL="0" indent="0">
+              <a:lnSpc>
+                <a:spcPct val="112000"/>
+              </a:lnSpc>
+              <a:spcBef>
+                <a:spcPts val="0"/>
+              </a:spcBef>
+              <a:spcAft>
+                <a:spcPts val="0"/>
+              </a:spcAft>
+              <a:buNone/>
+            </a:pPr>
+            <a:r>
+              <a:t/>
             </a:r>
           </a:p>
           <a:p xmlns:a="http://schemas.openxmlformats.org/drawingml/2006/main">
@@ -24379,7 +24208,7 @@
                 <a:ea typeface="Consolas"/>
                 <a:cs typeface="Consolas"/>
               </a:rPr>
-              <a:t>ASLR: makes addresses less predictable</a:t>
+              <a:t>Your turn:</a:t>
             </a:r>
           </a:p>
           <a:p xmlns:a="http://schemas.openxmlformats.org/drawingml/2006/main">
@@ -24412,7 +24241,40 @@
                 <a:ea typeface="Consolas"/>
                 <a:cs typeface="Consolas"/>
               </a:rPr>
-              <a:t>NX: blocks execution from data pages</a:t>
+              <a:t>1. 0xA7 in binary?</a:t>
+            </a:r>
+          </a:p>
+          <a:p xmlns:a="http://schemas.openxmlformats.org/drawingml/2006/main">
+            <a:pPr marL="0" indent="0">
+              <a:lnSpc>
+                <a:spcPct val="112000"/>
+              </a:lnSpc>
+              <a:spcBef>
+                <a:spcPts val="0"/>
+              </a:spcBef>
+              <a:spcAft>
+                <a:spcPts val="0"/>
+              </a:spcAft>
+              <a:buNone/>
+              <a:defRPr sz="1800">
+                <a:solidFill>
+                  <a:srgbClr val="FFFFFF"/>
+                </a:solidFill>
+                <a:latin typeface="Consolas"/>
+                <a:ea typeface="Consolas"/>
+                <a:cs typeface="Consolas"/>
+              </a:defRPr>
+            </a:pPr>
+            <a:r>
+              <a:rPr sz="1800">
+                <a:solidFill>
+                  <a:srgbClr val="FFFFFF"/>
+                </a:solidFill>
+                <a:latin typeface="Consolas"/>
+                <a:ea typeface="Consolas"/>
+                <a:cs typeface="Consolas"/>
+              </a:rPr>
+              <a:t>2. Bytes of 0xA7B2, little-endian?</a:t>
             </a:r>
           </a:p>
         </p:txBody>
@@ -24422,7 +24284,7 @@
           <p:cNvPr id="534" name="Takeaway">
             <a:extLst xmlns:a="http://schemas.openxmlformats.org/drawingml/2006/main">
               <a:ext uri="{FF2B5EF4-FFF2-40B4-BE49-F238E27FC236}">
-                <a16:creationId xmlns:a16="http://schemas.microsoft.com/office/drawing/2014/main" id="{EA9276A2-46EF-4D73-8D08-46BCBA819C99}"/>
+                <a16:creationId xmlns:a16="http://schemas.microsoft.com/office/drawing/2014/main" id="{086FA82E-3F81-4BA7-949D-70E0BCC98A00}"/>
               </a:ext>
             </a:extLst>
           </p:cNvPr>
@@ -24580,7 +24442,7 @@
                 <a:ea typeface="Arial"/>
                 <a:cs typeface="Arial"/>
               </a:rPr>
-              <a:t>Why is word[4] invalid? What does an unexpectedly changed guard suggest?</a:t>
+              <a:t>Same numeric value, different byte order in memory.</a:t>
             </a:r>
           </a:p>
         </p:txBody>
@@ -25706,7 +25568,7 @@
           <p:cNvPr id="534" name="">
             <a:extLst xmlns:a="http://schemas.openxmlformats.org/drawingml/2006/main">
               <a:ext uri="{FF2B5EF4-FFF2-40B4-BE49-F238E27FC236}">
-                <a16:creationId xmlns:a16="http://schemas.microsoft.com/office/drawing/2014/main" id="{672C00B6-3243-4B6E-851A-44104A944240}"/>
+                <a16:creationId xmlns:a16="http://schemas.microsoft.com/office/drawing/2014/main" id="{37B8EBA3-7BA9-4920-8E1F-1779E2FA6300}"/>
               </a:ext>
             </a:extLst>
           </p:cNvPr>
@@ -26066,7 +25928,7 @@
           <p:cNvPr id="535" name="Takeaway">
             <a:extLst xmlns:a="http://schemas.openxmlformats.org/drawingml/2006/main">
               <a:ext uri="{FF2B5EF4-FFF2-40B4-BE49-F238E27FC236}">
-                <a16:creationId xmlns:a16="http://schemas.microsoft.com/office/drawing/2014/main" id="{77CDE3D4-3334-4EEE-BBCA-5616AEE1009D}"/>
+                <a16:creationId xmlns:a16="http://schemas.microsoft.com/office/drawing/2014/main" id="{C968E84E-86D7-4D33-994C-F2757E568C7D}"/>
               </a:ext>
             </a:extLst>
           </p:cNvPr>
@@ -26735,7 +26597,7 @@
                 <a:ea typeface="Arial"/>
                 <a:cs typeface="Arial"/>
               </a:rPr>
-              <a:t>Hex, binary, and byte order</a:t>
+              <a:t>Signed values use the same bit patterns</a:t>
             </a:r>
           </a:p>
         </p:txBody>
@@ -26971,7 +26833,7 @@
                 <a:ea typeface="Arial"/>
                 <a:cs typeface="Arial"/>
               </a:rPr>
-              <a:t>One hex digit represents four bits. Convert one digit at a time.</a:t>
+              <a:t>n bits provide 2^n distinct patterns. Signed and unsigned interpretation assign different meanings to those patterns.</a:t>
             </a:r>
           </a:p>
           <a:p xmlns:a="http://schemas.openxmlformats.org/drawingml/2006/main">
@@ -27021,57 +26883,7 @@
                 <a:ea typeface="Arial"/>
                 <a:cs typeface="Arial"/>
               </a:rPr>
-              <a:t>Endianness orders bytes in memory; it does not reverse the bits within each byte.</a:t>
-            </a:r>
-          </a:p>
-          <a:p xmlns:a="http://schemas.openxmlformats.org/drawingml/2006/main">
-            <a:pPr marL="0" indent="0">
-              <a:lnSpc>
-                <a:spcPct val="112000"/>
-              </a:lnSpc>
-              <a:spcBef>
-                <a:spcPts val="0"/>
-              </a:spcBef>
-              <a:spcAft>
-                <a:spcPts val="0"/>
-              </a:spcAft>
-              <a:buNone/>
-            </a:pPr>
-            <a:r>
-              <a:t/>
-            </a:r>
-          </a:p>
-          <a:p xmlns:a="http://schemas.openxmlformats.org/drawingml/2006/main">
-            <a:pPr marL="0" indent="0">
-              <a:lnSpc>
-                <a:spcPct val="112000"/>
-              </a:lnSpc>
-              <a:spcBef>
-                <a:spcPts val="0"/>
-              </a:spcBef>
-              <a:spcAft>
-                <a:spcPts val="0"/>
-              </a:spcAft>
-              <a:buNone/>
-              <a:defRPr sz="1875">
-                <a:solidFill>
-                  <a:srgbClr val="FFFFFF"/>
-                </a:solidFill>
-                <a:latin typeface="Arial"/>
-                <a:ea typeface="Arial"/>
-                <a:cs typeface="Arial"/>
-              </a:defRPr>
-            </a:pPr>
-            <a:r>
-              <a:rPr sz="1875">
-                <a:solidFill>
-                  <a:srgbClr val="FFFFFF"/>
-                </a:solidFill>
-                <a:latin typeface="Arial"/>
-                <a:ea typeface="Arial"/>
-                <a:cs typeface="Arial"/>
-              </a:rPr>
-              <a:t>Start at the lowest address when listing stored bytes.</a:t>
+              <a:t>For 8-bit two’s complement, the range is −128 through 127. Negation flips the bits and adds 1, keeping 8 bits.</a:t>
             </a:r>
           </a:p>
         </p:txBody>
@@ -27307,7 +27119,7 @@
                 <a:ea typeface="Consolas"/>
                 <a:cs typeface="Consolas"/>
               </a:rPr>
-              <a:t>0xD6 = 1101 0110₂</a:t>
+              <a:t>8-bit pattern: 11111111</a:t>
             </a:r>
           </a:p>
           <a:p xmlns:a="http://schemas.openxmlformats.org/drawingml/2006/main">
@@ -27340,7 +27152,7 @@
                 <a:ea typeface="Consolas"/>
                 <a:cs typeface="Consolas"/>
               </a:rPr>
-              <a:t>0x1234, low address first:</a:t>
+              <a:t>Unsigned meaning: 255</a:t>
             </a:r>
           </a:p>
           <a:p xmlns:a="http://schemas.openxmlformats.org/drawingml/2006/main">
@@ -27373,7 +27185,24 @@
                 <a:ea typeface="Consolas"/>
                 <a:cs typeface="Consolas"/>
               </a:rPr>
-              <a:t>Little endian: 34 12</a:t>
+              <a:t>Signed meaning:   −1</a:t>
+            </a:r>
+          </a:p>
+          <a:p xmlns:a="http://schemas.openxmlformats.org/drawingml/2006/main">
+            <a:pPr marL="0" indent="0">
+              <a:lnSpc>
+                <a:spcPct val="112000"/>
+              </a:lnSpc>
+              <a:spcBef>
+                <a:spcPts val="0"/>
+              </a:spcBef>
+              <a:spcAft>
+                <a:spcPts val="0"/>
+              </a:spcAft>
+              <a:buNone/>
+            </a:pPr>
+            <a:r>
+              <a:t/>
             </a:r>
           </a:p>
           <a:p xmlns:a="http://schemas.openxmlformats.org/drawingml/2006/main">
@@ -27406,24 +27235,7 @@
                 <a:ea typeface="Consolas"/>
                 <a:cs typeface="Consolas"/>
               </a:rPr>
-              <a:t>Big endian:    12 34</a:t>
-            </a:r>
-          </a:p>
-          <a:p xmlns:a="http://schemas.openxmlformats.org/drawingml/2006/main">
-            <a:pPr marL="0" indent="0">
-              <a:lnSpc>
-                <a:spcPct val="112000"/>
-              </a:lnSpc>
-              <a:spcBef>
-                <a:spcPts val="0"/>
-              </a:spcBef>
-              <a:spcAft>
-                <a:spcPts val="0"/>
-              </a:spcAft>
-              <a:buNone/>
-            </a:pPr>
-            <a:r>
-              <a:t/>
+              <a:t>Negate 10000000 in 8 bits:</a:t>
             </a:r>
           </a:p>
           <a:p xmlns:a="http://schemas.openxmlformats.org/drawingml/2006/main">
@@ -27456,7 +27268,7 @@
                 <a:ea typeface="Consolas"/>
                 <a:cs typeface="Consolas"/>
               </a:rPr>
-              <a:t>Your turn:</a:t>
+              <a:t>Flip: 01111111</a:t>
             </a:r>
           </a:p>
           <a:p xmlns:a="http://schemas.openxmlformats.org/drawingml/2006/main">
@@ -27489,40 +27301,7 @@
                 <a:ea typeface="Consolas"/>
                 <a:cs typeface="Consolas"/>
               </a:rPr>
-              <a:t>1. 0xA7 in binary?</a:t>
-            </a:r>
-          </a:p>
-          <a:p xmlns:a="http://schemas.openxmlformats.org/drawingml/2006/main">
-            <a:pPr marL="0" indent="0">
-              <a:lnSpc>
-                <a:spcPct val="112000"/>
-              </a:lnSpc>
-              <a:spcBef>
-                <a:spcPts val="0"/>
-              </a:spcBef>
-              <a:spcAft>
-                <a:spcPts val="0"/>
-              </a:spcAft>
-              <a:buNone/>
-              <a:defRPr sz="1800">
-                <a:solidFill>
-                  <a:srgbClr val="FFFFFF"/>
-                </a:solidFill>
-                <a:latin typeface="Consolas"/>
-                <a:ea typeface="Consolas"/>
-                <a:cs typeface="Consolas"/>
-              </a:defRPr>
-            </a:pPr>
-            <a:r>
-              <a:rPr sz="1800">
-                <a:solidFill>
-                  <a:srgbClr val="FFFFFF"/>
-                </a:solidFill>
-                <a:latin typeface="Consolas"/>
-                <a:ea typeface="Consolas"/>
-                <a:cs typeface="Consolas"/>
-              </a:rPr>
-              <a:t>2. Bytes of 0xA7B2, little-endian?</a:t>
+              <a:t>Add 1: 10000000</a:t>
             </a:r>
           </a:p>
         </p:txBody>
@@ -27532,7 +27311,7 @@
           <p:cNvPr id="534" name="Takeaway">
             <a:extLst xmlns:a="http://schemas.openxmlformats.org/drawingml/2006/main">
               <a:ext uri="{FF2B5EF4-FFF2-40B4-BE49-F238E27FC236}">
-                <a16:creationId xmlns:a16="http://schemas.microsoft.com/office/drawing/2014/main" id="{9413E870-2EA1-4A77-9C6A-DFE9B20E25EE}"/>
+                <a16:creationId xmlns:a16="http://schemas.microsoft.com/office/drawing/2014/main" id="{DB4ED2F6-1C83-4229-B216-6DC06F91F539}"/>
               </a:ext>
             </a:extLst>
           </p:cNvPr>
@@ -27690,7 +27469,7 @@
                 <a:ea typeface="Arial"/>
                 <a:cs typeface="Arial"/>
               </a:rPr>
-              <a:t>Same numeric value, different byte order in memory.</a:t>
+              <a:t>Mathematically +128 cannot fit in a signed 8-bit result.</a:t>
             </a:r>
           </a:p>
         </p:txBody>
@@ -28201,7 +27980,7 @@
                 <a:ea typeface="Arial"/>
                 <a:cs typeface="Arial"/>
               </a:rPr>
-              <a:t>Signed values use the same bit patterns</a:t>
+              <a:t>Masks, shifts, and rotations</a:t>
             </a:r>
           </a:p>
         </p:txBody>
@@ -28437,7 +28216,7 @@
                 <a:ea typeface="Arial"/>
                 <a:cs typeface="Arial"/>
               </a:rPr>
-              <a:t>n bits provide 2^n distinct patterns. Signed and unsigned interpretation assign different meanings to those patterns.</a:t>
+              <a:t>AND keeps only bits selected by a mask. OR sets selected bits. XOR flips selected bits.</a:t>
             </a:r>
           </a:p>
           <a:p xmlns:a="http://schemas.openxmlformats.org/drawingml/2006/main">
@@ -28487,7 +28266,57 @@
                 <a:ea typeface="Arial"/>
                 <a:cs typeface="Arial"/>
               </a:rPr>
-              <a:t>For 8-bit two’s complement, the range is −128 through 127. Negation flips the bits and adds 1, keeping 8 bits.</a:t>
+              <a:t>A shift drops bits from one end. A rotation brings those bits around to the other end.</a:t>
+            </a:r>
+          </a:p>
+          <a:p xmlns:a="http://schemas.openxmlformats.org/drawingml/2006/main">
+            <a:pPr marL="0" indent="0">
+              <a:lnSpc>
+                <a:spcPct val="112000"/>
+              </a:lnSpc>
+              <a:spcBef>
+                <a:spcPts val="0"/>
+              </a:spcBef>
+              <a:spcAft>
+                <a:spcPts val="0"/>
+              </a:spcAft>
+              <a:buNone/>
+            </a:pPr>
+            <a:r>
+              <a:t/>
+            </a:r>
+          </a:p>
+          <a:p xmlns:a="http://schemas.openxmlformats.org/drawingml/2006/main">
+            <a:pPr marL="0" indent="0">
+              <a:lnSpc>
+                <a:spcPct val="112000"/>
+              </a:lnSpc>
+              <a:spcBef>
+                <a:spcPts val="0"/>
+              </a:spcBef>
+              <a:spcAft>
+                <a:spcPts val="0"/>
+              </a:spcAft>
+              <a:buNone/>
+              <a:defRPr sz="1875">
+                <a:solidFill>
+                  <a:srgbClr val="FFFFFF"/>
+                </a:solidFill>
+                <a:latin typeface="Arial"/>
+                <a:ea typeface="Arial"/>
+                <a:cs typeface="Arial"/>
+              </a:defRPr>
+            </a:pPr>
+            <a:r>
+              <a:rPr sz="1875">
+                <a:solidFill>
+                  <a:srgbClr val="FFFFFF"/>
+                </a:solidFill>
+                <a:latin typeface="Arial"/>
+                <a:ea typeface="Arial"/>
+                <a:cs typeface="Arial"/>
+              </a:rPr>
+              <a:t>Use an explicitly unsigned 8-bit model here.</a:t>
             </a:r>
           </a:p>
         </p:txBody>
@@ -28723,7 +28552,24 @@
                 <a:ea typeface="Consolas"/>
                 <a:cs typeface="Consolas"/>
               </a:rPr>
-              <a:t>8-bit pattern: 11111111</a:t>
+              <a:t>x = 0xB6 = 10110110₂</a:t>
+            </a:r>
+          </a:p>
+          <a:p xmlns:a="http://schemas.openxmlformats.org/drawingml/2006/main">
+            <a:pPr marL="0" indent="0">
+              <a:lnSpc>
+                <a:spcPct val="112000"/>
+              </a:lnSpc>
+              <a:spcBef>
+                <a:spcPts val="0"/>
+              </a:spcBef>
+              <a:spcAft>
+                <a:spcPts val="0"/>
+              </a:spcAft>
+              <a:buNone/>
+            </a:pPr>
+            <a:r>
+              <a:t/>
             </a:r>
           </a:p>
           <a:p xmlns:a="http://schemas.openxmlformats.org/drawingml/2006/main">
@@ -28756,7 +28602,7 @@
                 <a:ea typeface="Consolas"/>
                 <a:cs typeface="Consolas"/>
               </a:rPr>
-              <a:t>Unsigned meaning: 255</a:t>
+              <a:t>x &amp; 0x0F = ?</a:t>
             </a:r>
           </a:p>
           <a:p xmlns:a="http://schemas.openxmlformats.org/drawingml/2006/main">
@@ -28789,24 +28635,7 @@
                 <a:ea typeface="Consolas"/>
                 <a:cs typeface="Consolas"/>
               </a:rPr>
-              <a:t>Signed meaning:   −1</a:t>
-            </a:r>
-          </a:p>
-          <a:p xmlns:a="http://schemas.openxmlformats.org/drawingml/2006/main">
-            <a:pPr marL="0" indent="0">
-              <a:lnSpc>
-                <a:spcPct val="112000"/>
-              </a:lnSpc>
-              <a:spcBef>
-                <a:spcPts val="0"/>
-              </a:spcBef>
-              <a:spcAft>
-                <a:spcPts val="0"/>
-              </a:spcAft>
-              <a:buNone/>
-            </a:pPr>
-            <a:r>
-              <a:t/>
+              <a:t>(x &lt;&lt; 1) &amp; 0xFF = ?</a:t>
             </a:r>
           </a:p>
           <a:p xmlns:a="http://schemas.openxmlformats.org/drawingml/2006/main">
@@ -28839,73 +28668,7 @@
                 <a:ea typeface="Consolas"/>
                 <a:cs typeface="Consolas"/>
               </a:rPr>
-              <a:t>Negate 10000000 in 8 bits:</a:t>
-            </a:r>
-          </a:p>
-          <a:p xmlns:a="http://schemas.openxmlformats.org/drawingml/2006/main">
-            <a:pPr marL="0" indent="0">
-              <a:lnSpc>
-                <a:spcPct val="112000"/>
-              </a:lnSpc>
-              <a:spcBef>
-                <a:spcPts val="0"/>
-              </a:spcBef>
-              <a:spcAft>
-                <a:spcPts val="0"/>
-              </a:spcAft>
-              <a:buNone/>
-              <a:defRPr sz="1800">
-                <a:solidFill>
-                  <a:srgbClr val="FFFFFF"/>
-                </a:solidFill>
-                <a:latin typeface="Consolas"/>
-                <a:ea typeface="Consolas"/>
-                <a:cs typeface="Consolas"/>
-              </a:defRPr>
-            </a:pPr>
-            <a:r>
-              <a:rPr sz="1800">
-                <a:solidFill>
-                  <a:srgbClr val="FFFFFF"/>
-                </a:solidFill>
-                <a:latin typeface="Consolas"/>
-                <a:ea typeface="Consolas"/>
-                <a:cs typeface="Consolas"/>
-              </a:rPr>
-              <a:t>Flip: 01111111</a:t>
-            </a:r>
-          </a:p>
-          <a:p xmlns:a="http://schemas.openxmlformats.org/drawingml/2006/main">
-            <a:pPr marL="0" indent="0">
-              <a:lnSpc>
-                <a:spcPct val="112000"/>
-              </a:lnSpc>
-              <a:spcBef>
-                <a:spcPts val="0"/>
-              </a:spcBef>
-              <a:spcAft>
-                <a:spcPts val="0"/>
-              </a:spcAft>
-              <a:buNone/>
-              <a:defRPr sz="1800">
-                <a:solidFill>
-                  <a:srgbClr val="FFFFFF"/>
-                </a:solidFill>
-                <a:latin typeface="Consolas"/>
-                <a:ea typeface="Consolas"/>
-                <a:cs typeface="Consolas"/>
-              </a:defRPr>
-            </a:pPr>
-            <a:r>
-              <a:rPr sz="1800">
-                <a:solidFill>
-                  <a:srgbClr val="FFFFFF"/>
-                </a:solidFill>
-                <a:latin typeface="Consolas"/>
-                <a:ea typeface="Consolas"/>
-                <a:cs typeface="Consolas"/>
-              </a:rPr>
-              <a:t>Add 1: 10000000</a:t>
+              <a:t>Rotate left by 1 within 8 bits = ?</a:t>
             </a:r>
           </a:p>
         </p:txBody>
@@ -28915,7 +28678,7 @@
           <p:cNvPr id="534" name="Takeaway">
             <a:extLst xmlns:a="http://schemas.openxmlformats.org/drawingml/2006/main">
               <a:ext uri="{FF2B5EF4-FFF2-40B4-BE49-F238E27FC236}">
-                <a16:creationId xmlns:a16="http://schemas.microsoft.com/office/drawing/2014/main" id="{07EEB422-E6CC-44AD-B43C-EF098E301184}"/>
+                <a16:creationId xmlns:a16="http://schemas.microsoft.com/office/drawing/2014/main" id="{96FE5D50-CB20-4424-A96B-8B9EA74FDB2D}"/>
               </a:ext>
             </a:extLst>
           </p:cNvPr>
@@ -29073,7 +28836,7 @@
                 <a:ea typeface="Arial"/>
                 <a:cs typeface="Arial"/>
               </a:rPr>
-              <a:t>Mathematically +128 cannot fit in a signed 8-bit result.</a:t>
+              <a:t>Keep the chosen width explicit; C integer promotions do not automatically limit x &lt;&lt; 1 to 8 bits.</a:t>
             </a:r>
           </a:p>
         </p:txBody>
@@ -29584,7 +29347,7 @@
                 <a:ea typeface="Arial"/>
                 <a:cs typeface="Arial"/>
               </a:rPr>
-              <a:t>Masks, shifts, and rotations</a:t>
+              <a:t>Build a truth table one gate at a time</a:t>
             </a:r>
           </a:p>
         </p:txBody>
@@ -29820,1373 +29583,6 @@
                 <a:ea typeface="Arial"/>
                 <a:cs typeface="Arial"/>
               </a:rPr>
-              <a:t>AND keeps only bits selected by a mask. OR sets selected bits. XOR flips selected bits.</a:t>
-            </a:r>
-          </a:p>
-          <a:p xmlns:a="http://schemas.openxmlformats.org/drawingml/2006/main">
-            <a:pPr marL="0" indent="0">
-              <a:lnSpc>
-                <a:spcPct val="112000"/>
-              </a:lnSpc>
-              <a:spcBef>
-                <a:spcPts val="0"/>
-              </a:spcBef>
-              <a:spcAft>
-                <a:spcPts val="0"/>
-              </a:spcAft>
-              <a:buNone/>
-            </a:pPr>
-            <a:r>
-              <a:t/>
-            </a:r>
-          </a:p>
-          <a:p xmlns:a="http://schemas.openxmlformats.org/drawingml/2006/main">
-            <a:pPr marL="0" indent="0">
-              <a:lnSpc>
-                <a:spcPct val="112000"/>
-              </a:lnSpc>
-              <a:spcBef>
-                <a:spcPts val="0"/>
-              </a:spcBef>
-              <a:spcAft>
-                <a:spcPts val="0"/>
-              </a:spcAft>
-              <a:buNone/>
-              <a:defRPr sz="1875">
-                <a:solidFill>
-                  <a:srgbClr val="FFFFFF"/>
-                </a:solidFill>
-                <a:latin typeface="Arial"/>
-                <a:ea typeface="Arial"/>
-                <a:cs typeface="Arial"/>
-              </a:defRPr>
-            </a:pPr>
-            <a:r>
-              <a:rPr sz="1875">
-                <a:solidFill>
-                  <a:srgbClr val="FFFFFF"/>
-                </a:solidFill>
-                <a:latin typeface="Arial"/>
-                <a:ea typeface="Arial"/>
-                <a:cs typeface="Arial"/>
-              </a:rPr>
-              <a:t>A shift drops bits from one end. A rotation brings those bits around to the other end.</a:t>
-            </a:r>
-          </a:p>
-          <a:p xmlns:a="http://schemas.openxmlformats.org/drawingml/2006/main">
-            <a:pPr marL="0" indent="0">
-              <a:lnSpc>
-                <a:spcPct val="112000"/>
-              </a:lnSpc>
-              <a:spcBef>
-                <a:spcPts val="0"/>
-              </a:spcBef>
-              <a:spcAft>
-                <a:spcPts val="0"/>
-              </a:spcAft>
-              <a:buNone/>
-            </a:pPr>
-            <a:r>
-              <a:t/>
-            </a:r>
-          </a:p>
-          <a:p xmlns:a="http://schemas.openxmlformats.org/drawingml/2006/main">
-            <a:pPr marL="0" indent="0">
-              <a:lnSpc>
-                <a:spcPct val="112000"/>
-              </a:lnSpc>
-              <a:spcBef>
-                <a:spcPts val="0"/>
-              </a:spcBef>
-              <a:spcAft>
-                <a:spcPts val="0"/>
-              </a:spcAft>
-              <a:buNone/>
-              <a:defRPr sz="1875">
-                <a:solidFill>
-                  <a:srgbClr val="FFFFFF"/>
-                </a:solidFill>
-                <a:latin typeface="Arial"/>
-                <a:ea typeface="Arial"/>
-                <a:cs typeface="Arial"/>
-              </a:defRPr>
-            </a:pPr>
-            <a:r>
-              <a:rPr sz="1875">
-                <a:solidFill>
-                  <a:srgbClr val="FFFFFF"/>
-                </a:solidFill>
-                <a:latin typeface="Arial"/>
-                <a:ea typeface="Arial"/>
-                <a:cs typeface="Arial"/>
-              </a:rPr>
-              <a:t>Use an explicitly unsigned 8-bit model here.</a:t>
-            </a:r>
-          </a:p>
-        </p:txBody>
-      </p:sp>
-      <p:sp>
-        <p:nvSpPr>
-          <p:cNvPr id="8" name="Content Placeholder 3">
-            <a:extLst xmlns:a="http://schemas.openxmlformats.org/drawingml/2006/main">
-              <a:ext uri="{FF2B5EF4-FFF2-40B4-BE49-F238E27FC236}">
-                <a16:creationId xmlns:a16="http://schemas.microsoft.com/office/drawing/2014/main" id="{2EE8F343-A95F-2AAA-FE9E-A6C31E298DF7}"/>
-              </a:ext>
-            </a:extLst>
-          </p:cNvPr>
-          <p:cNvSpPr>
-            <a:spLocks xmlns:a="http://schemas.openxmlformats.org/drawingml/2006/main" noGrp="1"/>
-          </p:cNvSpPr>
-          <p:nvPr/>
-        </p:nvSpPr>
-        <p:spPr>
-          <a:xfrm xmlns:a="http://schemas.openxmlformats.org/drawingml/2006/main">
-            <a:off x="6256618" y="2031999"/>
-            <a:ext cx="5537200" cy="3534787"/>
-          </a:xfrm>
-          <a:prstGeom xmlns:a="http://schemas.openxmlformats.org/drawingml/2006/main" prst="rect">
-            <a:avLst/>
-          </a:prstGeom>
-        </p:spPr>
-        <p:txBody>
-          <a:bodyPr xmlns:a="http://schemas.openxmlformats.org/drawingml/2006/main" lIns="0" tIns="0" rIns="0" bIns="0" anchor="t">
-            <a:noAutofit/>
-          </a:bodyPr>
-          <a:lstStyle xmlns:a="http://schemas.openxmlformats.org/drawingml/2006/main">
-            <a:defPPr>
-              <a:defRPr sz="1800">
-                <a:solidFill>
-                  <a:srgbClr val="FFFFFF"/>
-                </a:solidFill>
-                <a:latin typeface="Consolas"/>
-                <a:ea typeface="Consolas"/>
-                <a:cs typeface="Consolas"/>
-              </a:defRPr>
-            </a:defPPr>
-            <a:lvl1pPr marL="228600" indent="-228600" algn="l" defTabSz="914400">
-              <a:lnSpc>
-                <a:spcPct val="90000"/>
-              </a:lnSpc>
-              <a:spcBef>
-                <a:spcPts val="1000"/>
-              </a:spcBef>
-              <a:buFont typeface="Arial"/>
-              <a:buChar char="•"/>
-              <a:defRPr sz="2400" kern="1200">
-                <a:solidFill>
-                  <a:schemeClr val="tx1"/>
-                </a:solidFill>
-                <a:latin typeface="+mn-lt"/>
-                <a:ea typeface="+mn-lt"/>
-                <a:cs typeface="+mn-lt"/>
-              </a:defRPr>
-            </a:lvl1pPr>
-            <a:lvl2pPr marL="685800" indent="-228600" algn="l" defTabSz="914400">
-              <a:lnSpc>
-                <a:spcPct val="90000"/>
-              </a:lnSpc>
-              <a:spcBef>
-                <a:spcPts val="500"/>
-              </a:spcBef>
-              <a:buFont typeface="Arial"/>
-              <a:buChar char="•"/>
-              <a:defRPr sz="2000" kern="1200">
-                <a:solidFill>
-                  <a:schemeClr val="tx1"/>
-                </a:solidFill>
-                <a:latin typeface="+mn-lt"/>
-                <a:ea typeface="+mn-lt"/>
-                <a:cs typeface="+mn-lt"/>
-              </a:defRPr>
-            </a:lvl2pPr>
-            <a:lvl3pPr marL="1143000" indent="-228600" algn="l" defTabSz="914400">
-              <a:lnSpc>
-                <a:spcPct val="90000"/>
-              </a:lnSpc>
-              <a:spcBef>
-                <a:spcPts val="500"/>
-              </a:spcBef>
-              <a:buFont typeface="Arial"/>
-              <a:buChar char="•"/>
-              <a:defRPr sz="1800" kern="1200">
-                <a:solidFill>
-                  <a:schemeClr val="tx1"/>
-                </a:solidFill>
-                <a:latin typeface="+mn-lt"/>
-                <a:ea typeface="+mn-lt"/>
-                <a:cs typeface="+mn-lt"/>
-              </a:defRPr>
-            </a:lvl3pPr>
-            <a:lvl4pPr marL="1600200" indent="-228600" algn="l" defTabSz="914400">
-              <a:lnSpc>
-                <a:spcPct val="90000"/>
-              </a:lnSpc>
-              <a:spcBef>
-                <a:spcPts val="500"/>
-              </a:spcBef>
-              <a:buFont typeface="Arial"/>
-              <a:buChar char="•"/>
-              <a:defRPr sz="1800" kern="1200">
-                <a:solidFill>
-                  <a:schemeClr val="tx1"/>
-                </a:solidFill>
-                <a:latin typeface="+mn-lt"/>
-                <a:ea typeface="+mn-lt"/>
-                <a:cs typeface="+mn-lt"/>
-              </a:defRPr>
-            </a:lvl4pPr>
-            <a:lvl5pPr marL="2057400" indent="-228600" algn="l" defTabSz="914400">
-              <a:lnSpc>
-                <a:spcPct val="90000"/>
-              </a:lnSpc>
-              <a:spcBef>
-                <a:spcPts val="500"/>
-              </a:spcBef>
-              <a:buFont typeface="Arial"/>
-              <a:buChar char="•"/>
-              <a:defRPr sz="1800" kern="1200">
-                <a:solidFill>
-                  <a:schemeClr val="tx1"/>
-                </a:solidFill>
-                <a:latin typeface="+mn-lt"/>
-                <a:ea typeface="+mn-lt"/>
-                <a:cs typeface="+mn-lt"/>
-              </a:defRPr>
-            </a:lvl5pPr>
-            <a:lvl6pPr marL="2514600" indent="-228600" algn="l" defTabSz="914400">
-              <a:lnSpc>
-                <a:spcPct val="90000"/>
-              </a:lnSpc>
-              <a:spcBef>
-                <a:spcPts val="500"/>
-              </a:spcBef>
-              <a:buFont typeface="Arial"/>
-              <a:buChar char="•"/>
-              <a:defRPr sz="1800" kern="1200">
-                <a:solidFill>
-                  <a:schemeClr val="tx1"/>
-                </a:solidFill>
-                <a:latin typeface="+mn-lt"/>
-                <a:ea typeface="+mn-lt"/>
-                <a:cs typeface="+mn-lt"/>
-              </a:defRPr>
-            </a:lvl6pPr>
-            <a:lvl7pPr marL="2971800" indent="-228600" algn="l" defTabSz="914400">
-              <a:lnSpc>
-                <a:spcPct val="90000"/>
-              </a:lnSpc>
-              <a:spcBef>
-                <a:spcPts val="500"/>
-              </a:spcBef>
-              <a:buFont typeface="Arial"/>
-              <a:buChar char="•"/>
-              <a:defRPr sz="1800" kern="1200">
-                <a:solidFill>
-                  <a:schemeClr val="tx1"/>
-                </a:solidFill>
-                <a:latin typeface="+mn-lt"/>
-                <a:ea typeface="+mn-lt"/>
-                <a:cs typeface="+mn-lt"/>
-              </a:defRPr>
-            </a:lvl7pPr>
-            <a:lvl8pPr marL="3429000" indent="-228600" algn="l" defTabSz="914400">
-              <a:lnSpc>
-                <a:spcPct val="90000"/>
-              </a:lnSpc>
-              <a:spcBef>
-                <a:spcPts val="500"/>
-              </a:spcBef>
-              <a:buFont typeface="Arial"/>
-              <a:buChar char="•"/>
-              <a:defRPr sz="1800" kern="1200">
-                <a:solidFill>
-                  <a:schemeClr val="tx1"/>
-                </a:solidFill>
-                <a:latin typeface="+mn-lt"/>
-                <a:ea typeface="+mn-lt"/>
-                <a:cs typeface="+mn-lt"/>
-              </a:defRPr>
-            </a:lvl8pPr>
-            <a:lvl9pPr marL="3886200" indent="-228600" algn="l" defTabSz="914400">
-              <a:lnSpc>
-                <a:spcPct val="90000"/>
-              </a:lnSpc>
-              <a:spcBef>
-                <a:spcPts val="500"/>
-              </a:spcBef>
-              <a:buFont typeface="Arial"/>
-              <a:buChar char="•"/>
-              <a:defRPr sz="1800" kern="1200">
-                <a:solidFill>
-                  <a:schemeClr val="tx1"/>
-                </a:solidFill>
-                <a:latin typeface="+mn-lt"/>
-                <a:ea typeface="+mn-lt"/>
-                <a:cs typeface="+mn-lt"/>
-              </a:defRPr>
-            </a:lvl9pPr>
-          </a:lstStyle>
-          <a:p xmlns:a="http://schemas.openxmlformats.org/drawingml/2006/main">
-            <a:pPr marL="0" indent="0">
-              <a:lnSpc>
-                <a:spcPct val="112000"/>
-              </a:lnSpc>
-              <a:spcBef>
-                <a:spcPts val="0"/>
-              </a:spcBef>
-              <a:spcAft>
-                <a:spcPts val="0"/>
-              </a:spcAft>
-              <a:buNone/>
-              <a:defRPr sz="1800">
-                <a:solidFill>
-                  <a:srgbClr val="FFFFFF"/>
-                </a:solidFill>
-                <a:latin typeface="Consolas"/>
-                <a:ea typeface="Consolas"/>
-                <a:cs typeface="Consolas"/>
-              </a:defRPr>
-            </a:pPr>
-            <a:r>
-              <a:rPr sz="1800">
-                <a:solidFill>
-                  <a:srgbClr val="FFFFFF"/>
-                </a:solidFill>
-                <a:latin typeface="Consolas"/>
-                <a:ea typeface="Consolas"/>
-                <a:cs typeface="Consolas"/>
-              </a:rPr>
-              <a:t>x = 0xB6 = 10110110₂</a:t>
-            </a:r>
-          </a:p>
-          <a:p xmlns:a="http://schemas.openxmlformats.org/drawingml/2006/main">
-            <a:pPr marL="0" indent="0">
-              <a:lnSpc>
-                <a:spcPct val="112000"/>
-              </a:lnSpc>
-              <a:spcBef>
-                <a:spcPts val="0"/>
-              </a:spcBef>
-              <a:spcAft>
-                <a:spcPts val="0"/>
-              </a:spcAft>
-              <a:buNone/>
-            </a:pPr>
-            <a:r>
-              <a:t/>
-            </a:r>
-          </a:p>
-          <a:p xmlns:a="http://schemas.openxmlformats.org/drawingml/2006/main">
-            <a:pPr marL="0" indent="0">
-              <a:lnSpc>
-                <a:spcPct val="112000"/>
-              </a:lnSpc>
-              <a:spcBef>
-                <a:spcPts val="0"/>
-              </a:spcBef>
-              <a:spcAft>
-                <a:spcPts val="0"/>
-              </a:spcAft>
-              <a:buNone/>
-              <a:defRPr sz="1800">
-                <a:solidFill>
-                  <a:srgbClr val="FFFFFF"/>
-                </a:solidFill>
-                <a:latin typeface="Consolas"/>
-                <a:ea typeface="Consolas"/>
-                <a:cs typeface="Consolas"/>
-              </a:defRPr>
-            </a:pPr>
-            <a:r>
-              <a:rPr sz="1800">
-                <a:solidFill>
-                  <a:srgbClr val="FFFFFF"/>
-                </a:solidFill>
-                <a:latin typeface="Consolas"/>
-                <a:ea typeface="Consolas"/>
-                <a:cs typeface="Consolas"/>
-              </a:rPr>
-              <a:t>x &amp; 0x0F = ?</a:t>
-            </a:r>
-          </a:p>
-          <a:p xmlns:a="http://schemas.openxmlformats.org/drawingml/2006/main">
-            <a:pPr marL="0" indent="0">
-              <a:lnSpc>
-                <a:spcPct val="112000"/>
-              </a:lnSpc>
-              <a:spcBef>
-                <a:spcPts val="0"/>
-              </a:spcBef>
-              <a:spcAft>
-                <a:spcPts val="0"/>
-              </a:spcAft>
-              <a:buNone/>
-              <a:defRPr sz="1800">
-                <a:solidFill>
-                  <a:srgbClr val="FFFFFF"/>
-                </a:solidFill>
-                <a:latin typeface="Consolas"/>
-                <a:ea typeface="Consolas"/>
-                <a:cs typeface="Consolas"/>
-              </a:defRPr>
-            </a:pPr>
-            <a:r>
-              <a:rPr sz="1800">
-                <a:solidFill>
-                  <a:srgbClr val="FFFFFF"/>
-                </a:solidFill>
-                <a:latin typeface="Consolas"/>
-                <a:ea typeface="Consolas"/>
-                <a:cs typeface="Consolas"/>
-              </a:rPr>
-              <a:t>(x &lt;&lt; 1) &amp; 0xFF = ?</a:t>
-            </a:r>
-          </a:p>
-          <a:p xmlns:a="http://schemas.openxmlformats.org/drawingml/2006/main">
-            <a:pPr marL="0" indent="0">
-              <a:lnSpc>
-                <a:spcPct val="112000"/>
-              </a:lnSpc>
-              <a:spcBef>
-                <a:spcPts val="0"/>
-              </a:spcBef>
-              <a:spcAft>
-                <a:spcPts val="0"/>
-              </a:spcAft>
-              <a:buNone/>
-              <a:defRPr sz="1800">
-                <a:solidFill>
-                  <a:srgbClr val="FFFFFF"/>
-                </a:solidFill>
-                <a:latin typeface="Consolas"/>
-                <a:ea typeface="Consolas"/>
-                <a:cs typeface="Consolas"/>
-              </a:defRPr>
-            </a:pPr>
-            <a:r>
-              <a:rPr sz="1800">
-                <a:solidFill>
-                  <a:srgbClr val="FFFFFF"/>
-                </a:solidFill>
-                <a:latin typeface="Consolas"/>
-                <a:ea typeface="Consolas"/>
-                <a:cs typeface="Consolas"/>
-              </a:rPr>
-              <a:t>Rotate left by 1 within 8 bits = ?</a:t>
-            </a:r>
-          </a:p>
-        </p:txBody>
-      </p:sp>
-      <p:sp>
-        <p:nvSpPr>
-          <p:cNvPr id="534" name="Takeaway">
-            <a:extLst xmlns:a="http://schemas.openxmlformats.org/drawingml/2006/main">
-              <a:ext uri="{FF2B5EF4-FFF2-40B4-BE49-F238E27FC236}">
-                <a16:creationId xmlns:a16="http://schemas.microsoft.com/office/drawing/2014/main" id="{5BA3EF08-28FD-4090-9CDC-517B88F6C82D}"/>
-              </a:ext>
-            </a:extLst>
-          </p:cNvPr>
-          <p:cNvSpPr>
-            <a:spLocks xmlns:a="http://schemas.openxmlformats.org/drawingml/2006/main" noGrp="1"/>
-          </p:cNvSpPr>
-          <p:nvPr/>
-        </p:nvSpPr>
-        <p:spPr>
-          <a:xfrm xmlns:a="http://schemas.openxmlformats.org/drawingml/2006/main">
-            <a:off x="393668" y="5715000"/>
-            <a:ext cx="11404283" cy="466725"/>
-          </a:xfrm>
-          <a:prstGeom xmlns:a="http://schemas.openxmlformats.org/drawingml/2006/main" prst="rect">
-            <a:avLst/>
-          </a:prstGeom>
-          <a:noFill xmlns:a="http://schemas.openxmlformats.org/drawingml/2006/main"/>
-          <a:ln xmlns:a="http://schemas.openxmlformats.org/drawingml/2006/main" w="0">
-            <a:noFill/>
-          </a:ln>
-        </p:spPr>
-        <p:txBody>
-          <a:bodyPr xmlns:a="http://schemas.openxmlformats.org/drawingml/2006/main" lIns="0" tIns="0" rIns="0" bIns="0" anchor="t">
-            <a:noAutofit/>
-          </a:bodyPr>
-          <a:lstStyle xmlns:a="http://schemas.openxmlformats.org/drawingml/2006/main">
-            <a:defPPr>
-              <a:defRPr sz="1350">
-                <a:solidFill>
-                  <a:srgbClr val="CCCCCC"/>
-                </a:solidFill>
-                <a:latin typeface="Arial"/>
-                <a:ea typeface="Arial"/>
-                <a:cs typeface="Arial"/>
-              </a:defRPr>
-            </a:defPPr>
-            <a:lvl1pPr>
-              <a:defRPr sz="1350">
-                <a:solidFill>
-                  <a:srgbClr val="CCCCCC"/>
-                </a:solidFill>
-                <a:latin typeface="Arial"/>
-                <a:ea typeface="Arial"/>
-                <a:cs typeface="Arial"/>
-              </a:defRPr>
-            </a:lvl1pPr>
-            <a:lvl2pPr>
-              <a:defRPr sz="1350">
-                <a:solidFill>
-                  <a:srgbClr val="CCCCCC"/>
-                </a:solidFill>
-                <a:latin typeface="Arial"/>
-                <a:ea typeface="Arial"/>
-                <a:cs typeface="Arial"/>
-              </a:defRPr>
-            </a:lvl2pPr>
-            <a:lvl3pPr>
-              <a:defRPr sz="1350">
-                <a:solidFill>
-                  <a:srgbClr val="CCCCCC"/>
-                </a:solidFill>
-                <a:latin typeface="Arial"/>
-                <a:ea typeface="Arial"/>
-                <a:cs typeface="Arial"/>
-              </a:defRPr>
-            </a:lvl3pPr>
-            <a:lvl4pPr>
-              <a:defRPr sz="1350">
-                <a:solidFill>
-                  <a:srgbClr val="CCCCCC"/>
-                </a:solidFill>
-                <a:latin typeface="Arial"/>
-                <a:ea typeface="Arial"/>
-                <a:cs typeface="Arial"/>
-              </a:defRPr>
-            </a:lvl4pPr>
-            <a:lvl5pPr>
-              <a:defRPr sz="1350">
-                <a:solidFill>
-                  <a:srgbClr val="CCCCCC"/>
-                </a:solidFill>
-                <a:latin typeface="Arial"/>
-                <a:ea typeface="Arial"/>
-                <a:cs typeface="Arial"/>
-              </a:defRPr>
-            </a:lvl5pPr>
-            <a:lvl6pPr>
-              <a:defRPr sz="1350">
-                <a:solidFill>
-                  <a:srgbClr val="CCCCCC"/>
-                </a:solidFill>
-                <a:latin typeface="Arial"/>
-                <a:ea typeface="Arial"/>
-                <a:cs typeface="Arial"/>
-              </a:defRPr>
-            </a:lvl6pPr>
-            <a:lvl7pPr>
-              <a:defRPr sz="1350">
-                <a:solidFill>
-                  <a:srgbClr val="CCCCCC"/>
-                </a:solidFill>
-                <a:latin typeface="Arial"/>
-                <a:ea typeface="Arial"/>
-                <a:cs typeface="Arial"/>
-              </a:defRPr>
-            </a:lvl7pPr>
-            <a:lvl8pPr>
-              <a:defRPr sz="1350">
-                <a:solidFill>
-                  <a:srgbClr val="CCCCCC"/>
-                </a:solidFill>
-                <a:latin typeface="Arial"/>
-                <a:ea typeface="Arial"/>
-                <a:cs typeface="Arial"/>
-              </a:defRPr>
-            </a:lvl8pPr>
-            <a:lvl9pPr>
-              <a:defRPr sz="1350">
-                <a:solidFill>
-                  <a:srgbClr val="CCCCCC"/>
-                </a:solidFill>
-                <a:latin typeface="Arial"/>
-                <a:ea typeface="Arial"/>
-                <a:cs typeface="Arial"/>
-              </a:defRPr>
-            </a:lvl9pPr>
-          </a:lstStyle>
-          <a:p xmlns:a="http://schemas.openxmlformats.org/drawingml/2006/main">
-            <a:pPr marL="0" indent="0">
-              <a:lnSpc>
-                <a:spcPct val="112000"/>
-              </a:lnSpc>
-              <a:spcBef>
-                <a:spcPts val="0"/>
-              </a:spcBef>
-              <a:spcAft>
-                <a:spcPts val="0"/>
-              </a:spcAft>
-              <a:buNone/>
-              <a:defRPr sz="1350">
-                <a:solidFill>
-                  <a:srgbClr val="CCCCCC"/>
-                </a:solidFill>
-                <a:latin typeface="Arial"/>
-                <a:ea typeface="Arial"/>
-                <a:cs typeface="Arial"/>
-              </a:defRPr>
-            </a:pPr>
-            <a:r>
-              <a:rPr sz="1350">
-                <a:solidFill>
-                  <a:srgbClr val="CCCCCC"/>
-                </a:solidFill>
-                <a:latin typeface="Arial"/>
-                <a:ea typeface="Arial"/>
-                <a:cs typeface="Arial"/>
-              </a:rPr>
-              <a:t>Keep the chosen width explicit; C integer promotions do not automatically limit x &lt;&lt; 1 to 8 bits.</a:t>
-            </a:r>
-          </a:p>
-        </p:txBody>
-      </p:sp>
-    </p:spTree>
-    <p:extLst>
-      <p:ext uri="{BB962C8B-B14F-4D97-AF65-F5344CB8AC3E}">
-        <p14:creationId xmlns:p14="http://schemas.microsoft.com/office/powerpoint/2010/main" val="3667182145"/>
-      </p:ext>
-    </p:extLst>
-  </p:cSld>
-</p:sld>
-</file>
-
-<file path=ppt/slides/slide23.xml><?xml version="1.0" encoding="utf-8"?>
-<p:sld xmlns:p="http://schemas.openxmlformats.org/presentationml/2006/main">
-  <p:cSld>
-    <p:spTree>
-      <p:nvGrpSpPr>
-        <p:cNvPr id="1" name=""/>
-        <p:cNvGrpSpPr/>
-        <p:nvPr/>
-      </p:nvGrpSpPr>
-      <p:grpSpPr>
-        <a:xfrm xmlns:a="http://schemas.openxmlformats.org/drawingml/2006/main"/>
-      </p:grpSpPr>
-      <p:sp>
-        <p:nvSpPr>
-          <p:cNvPr id="3" name="Footer Placeholder 2">
-            <a:extLst xmlns:a="http://schemas.openxmlformats.org/drawingml/2006/main">
-              <a:ext uri="{FF2B5EF4-FFF2-40B4-BE49-F238E27FC236}">
-                <a16:creationId xmlns:a16="http://schemas.microsoft.com/office/drawing/2014/main" id="{39EA4C82-C623-0196-4A95-876ADF5DEE92}"/>
-              </a:ext>
-            </a:extLst>
-          </p:cNvPr>
-          <p:cNvSpPr>
-            <a:spLocks xmlns:a="http://schemas.openxmlformats.org/drawingml/2006/main" noGrp="1"/>
-          </p:cNvSpPr>
-          <p:nvPr>
-            <p:ph type="ftr" idx="3"/>
-          </p:nvPr>
-        </p:nvSpPr>
-        <p:spPr>
-          <a:xfrm xmlns:a="http://schemas.openxmlformats.org/drawingml/2006/main">
-            <a:off x="393700" y="6279952"/>
-            <a:ext cx="3568700" cy="241240"/>
-          </a:xfrm>
-        </p:spPr>
-        <p:txBody>
-          <a:bodyPr xmlns:a="http://schemas.openxmlformats.org/drawingml/2006/main" lIns="0" tIns="0" rIns="0" bIns="0" anchor="t">
-            <a:noAutofit/>
-          </a:bodyPr>
-          <a:lstStyle xmlns:a="http://schemas.openxmlformats.org/drawingml/2006/main">
-            <a:defPPr>
-              <a:defRPr sz="1125">
-                <a:solidFill>
-                  <a:srgbClr val="FFFFFF"/>
-                </a:solidFill>
-                <a:latin typeface="Arial"/>
-                <a:ea typeface="Arial"/>
-                <a:cs typeface="Arial"/>
-              </a:defRPr>
-            </a:defPPr>
-            <a:lvl1pPr>
-              <a:defRPr sz="1125">
-                <a:solidFill>
-                  <a:srgbClr val="FFFFFF"/>
-                </a:solidFill>
-                <a:latin typeface="Arial"/>
-                <a:ea typeface="Arial"/>
-                <a:cs typeface="Arial"/>
-              </a:defRPr>
-            </a:lvl1pPr>
-            <a:lvl2pPr>
-              <a:defRPr sz="1125">
-                <a:solidFill>
-                  <a:srgbClr val="FFFFFF"/>
-                </a:solidFill>
-                <a:latin typeface="Arial"/>
-                <a:ea typeface="Arial"/>
-                <a:cs typeface="Arial"/>
-              </a:defRPr>
-            </a:lvl2pPr>
-            <a:lvl3pPr>
-              <a:defRPr sz="1125">
-                <a:solidFill>
-                  <a:srgbClr val="FFFFFF"/>
-                </a:solidFill>
-                <a:latin typeface="Arial"/>
-                <a:ea typeface="Arial"/>
-                <a:cs typeface="Arial"/>
-              </a:defRPr>
-            </a:lvl3pPr>
-            <a:lvl4pPr>
-              <a:defRPr sz="1125">
-                <a:solidFill>
-                  <a:srgbClr val="FFFFFF"/>
-                </a:solidFill>
-                <a:latin typeface="Arial"/>
-                <a:ea typeface="Arial"/>
-                <a:cs typeface="Arial"/>
-              </a:defRPr>
-            </a:lvl4pPr>
-            <a:lvl5pPr>
-              <a:defRPr sz="1125">
-                <a:solidFill>
-                  <a:srgbClr val="FFFFFF"/>
-                </a:solidFill>
-                <a:latin typeface="Arial"/>
-                <a:ea typeface="Arial"/>
-                <a:cs typeface="Arial"/>
-              </a:defRPr>
-            </a:lvl5pPr>
-            <a:lvl6pPr>
-              <a:defRPr sz="1125">
-                <a:solidFill>
-                  <a:srgbClr val="FFFFFF"/>
-                </a:solidFill>
-                <a:latin typeface="Arial"/>
-                <a:ea typeface="Arial"/>
-                <a:cs typeface="Arial"/>
-              </a:defRPr>
-            </a:lvl6pPr>
-            <a:lvl7pPr>
-              <a:defRPr sz="1125">
-                <a:solidFill>
-                  <a:srgbClr val="FFFFFF"/>
-                </a:solidFill>
-                <a:latin typeface="Arial"/>
-                <a:ea typeface="Arial"/>
-                <a:cs typeface="Arial"/>
-              </a:defRPr>
-            </a:lvl7pPr>
-            <a:lvl8pPr>
-              <a:defRPr sz="1125">
-                <a:solidFill>
-                  <a:srgbClr val="FFFFFF"/>
-                </a:solidFill>
-                <a:latin typeface="Arial"/>
-                <a:ea typeface="Arial"/>
-                <a:cs typeface="Arial"/>
-              </a:defRPr>
-            </a:lvl8pPr>
-            <a:lvl9pPr>
-              <a:defRPr sz="1125">
-                <a:solidFill>
-                  <a:srgbClr val="FFFFFF"/>
-                </a:solidFill>
-                <a:latin typeface="Arial"/>
-                <a:ea typeface="Arial"/>
-                <a:cs typeface="Arial"/>
-              </a:defRPr>
-            </a:lvl9pPr>
-          </a:lstStyle>
-          <a:p xmlns:a="http://schemas.openxmlformats.org/drawingml/2006/main">
-            <a:pPr marL="0" indent="0">
-              <a:lnSpc>
-                <a:spcPct val="112000"/>
-              </a:lnSpc>
-              <a:spcBef>
-                <a:spcPts val="0"/>
-              </a:spcBef>
-              <a:spcAft>
-                <a:spcPts val="0"/>
-              </a:spcAft>
-              <a:buNone/>
-              <a:defRPr sz="1125">
-                <a:solidFill>
-                  <a:srgbClr val="FFFFFF"/>
-                </a:solidFill>
-                <a:latin typeface="Arial"/>
-                <a:ea typeface="Arial"/>
-                <a:cs typeface="Arial"/>
-              </a:defRPr>
-            </a:pPr>
-            <a:r>
-              <a:rPr sz="1125">
-                <a:solidFill>
-                  <a:srgbClr val="FFFFFF"/>
-                </a:solidFill>
-                <a:latin typeface="Arial"/>
-                <a:ea typeface="Arial"/>
-                <a:cs typeface="Arial"/>
-              </a:rPr>
-              <a:t>CS 211 · Recitation 07</a:t>
-            </a:r>
-          </a:p>
-        </p:txBody>
-      </p:sp>
-      <p:sp>
-        <p:nvSpPr>
-          <p:cNvPr id="532" name="Google Shape;532;p58">
-            <a:extLst xmlns:a="http://schemas.openxmlformats.org/drawingml/2006/main">
-              <a:ext uri="{FF2B5EF4-FFF2-40B4-BE49-F238E27FC236}">
-                <a16:creationId xmlns:a16="http://schemas.microsoft.com/office/drawing/2014/main" id="{1BCBE750-7048-686D-1472-52C53362D6CD}"/>
-              </a:ext>
-            </a:extLst>
-          </p:cNvPr>
-          <p:cNvSpPr>
-            <a:spLocks xmlns:a="http://schemas.openxmlformats.org/drawingml/2006/main" noGrp="1"/>
-          </p:cNvSpPr>
-          <p:nvPr>
-            <p:ph type="sldNum" idx="4"/>
-          </p:nvPr>
-        </p:nvSpPr>
-        <p:spPr>
-          <a:xfrm xmlns:a="http://schemas.openxmlformats.org/drawingml/2006/main">
-            <a:off x="11279332" y="6279294"/>
-            <a:ext cx="518968" cy="241240"/>
-          </a:xfrm>
-        </p:spPr>
-        <p:txBody>
-          <a:bodyPr xmlns:a="http://schemas.openxmlformats.org/drawingml/2006/main" spcFirstLastPara="1" vert="horz" wrap="square" lIns="0" tIns="0" rIns="0" bIns="0" anchor="t">
-            <a:noAutofit/>
-          </a:bodyPr>
-          <a:lstStyle xmlns:a="http://schemas.openxmlformats.org/drawingml/2006/main">
-            <a:defPPr>
-              <a:defRPr sz="1125">
-                <a:solidFill>
-                  <a:srgbClr val="FFFFFF"/>
-                </a:solidFill>
-                <a:latin typeface="Arial"/>
-                <a:ea typeface="Arial"/>
-                <a:cs typeface="Arial"/>
-              </a:defRPr>
-            </a:defPPr>
-            <a:lvl1pPr>
-              <a:defRPr sz="1125">
-                <a:solidFill>
-                  <a:srgbClr val="FFFFFF"/>
-                </a:solidFill>
-                <a:latin typeface="Arial"/>
-                <a:ea typeface="Arial"/>
-                <a:cs typeface="Arial"/>
-              </a:defRPr>
-            </a:lvl1pPr>
-            <a:lvl2pPr>
-              <a:defRPr sz="1125">
-                <a:solidFill>
-                  <a:srgbClr val="FFFFFF"/>
-                </a:solidFill>
-                <a:latin typeface="Arial"/>
-                <a:ea typeface="Arial"/>
-                <a:cs typeface="Arial"/>
-              </a:defRPr>
-            </a:lvl2pPr>
-            <a:lvl3pPr>
-              <a:defRPr sz="1125">
-                <a:solidFill>
-                  <a:srgbClr val="FFFFFF"/>
-                </a:solidFill>
-                <a:latin typeface="Arial"/>
-                <a:ea typeface="Arial"/>
-                <a:cs typeface="Arial"/>
-              </a:defRPr>
-            </a:lvl3pPr>
-            <a:lvl4pPr>
-              <a:defRPr sz="1125">
-                <a:solidFill>
-                  <a:srgbClr val="FFFFFF"/>
-                </a:solidFill>
-                <a:latin typeface="Arial"/>
-                <a:ea typeface="Arial"/>
-                <a:cs typeface="Arial"/>
-              </a:defRPr>
-            </a:lvl4pPr>
-            <a:lvl5pPr>
-              <a:defRPr sz="1125">
-                <a:solidFill>
-                  <a:srgbClr val="FFFFFF"/>
-                </a:solidFill>
-                <a:latin typeface="Arial"/>
-                <a:ea typeface="Arial"/>
-                <a:cs typeface="Arial"/>
-              </a:defRPr>
-            </a:lvl5pPr>
-            <a:lvl6pPr>
-              <a:defRPr sz="1125">
-                <a:solidFill>
-                  <a:srgbClr val="FFFFFF"/>
-                </a:solidFill>
-                <a:latin typeface="Arial"/>
-                <a:ea typeface="Arial"/>
-                <a:cs typeface="Arial"/>
-              </a:defRPr>
-            </a:lvl6pPr>
-            <a:lvl7pPr>
-              <a:defRPr sz="1125">
-                <a:solidFill>
-                  <a:srgbClr val="FFFFFF"/>
-                </a:solidFill>
-                <a:latin typeface="Arial"/>
-                <a:ea typeface="Arial"/>
-                <a:cs typeface="Arial"/>
-              </a:defRPr>
-            </a:lvl7pPr>
-            <a:lvl8pPr>
-              <a:defRPr sz="1125">
-                <a:solidFill>
-                  <a:srgbClr val="FFFFFF"/>
-                </a:solidFill>
-                <a:latin typeface="Arial"/>
-                <a:ea typeface="Arial"/>
-                <a:cs typeface="Arial"/>
-              </a:defRPr>
-            </a:lvl8pPr>
-            <a:lvl9pPr>
-              <a:defRPr sz="1125">
-                <a:solidFill>
-                  <a:srgbClr val="FFFFFF"/>
-                </a:solidFill>
-                <a:latin typeface="Arial"/>
-                <a:ea typeface="Arial"/>
-                <a:cs typeface="Arial"/>
-              </a:defRPr>
-            </a:lvl9pPr>
-          </a:lstStyle>
-          <a:p xmlns:a="http://schemas.openxmlformats.org/drawingml/2006/main">
-            <a:pPr marL="0" indent="0">
-              <a:lnSpc>
-                <a:spcPct val="112000"/>
-              </a:lnSpc>
-              <a:spcBef>
-                <a:spcPts val="0"/>
-              </a:spcBef>
-              <a:spcAft>
-                <a:spcPts val="0"/>
-              </a:spcAft>
-              <a:buNone/>
-              <a:defRPr sz="1125">
-                <a:solidFill>
-                  <a:srgbClr val="FFFFFF"/>
-                </a:solidFill>
-                <a:latin typeface="Arial"/>
-                <a:ea typeface="Arial"/>
-                <a:cs typeface="Arial"/>
-              </a:defRPr>
-            </a:pPr>
-            <a:r>
-              <a:rPr sz="1125">
-                <a:solidFill>
-                  <a:srgbClr val="FFFFFF"/>
-                </a:solidFill>
-                <a:latin typeface="Arial"/>
-                <a:ea typeface="Arial"/>
-                <a:cs typeface="Arial"/>
-              </a:rPr>
-              <a:t>23</a:t>
-            </a:r>
-          </a:p>
-        </p:txBody>
-      </p:sp>
-      <p:sp>
-        <p:nvSpPr>
-          <p:cNvPr id="533" name="Google Shape;533;p58">
-            <a:extLst xmlns:a="http://schemas.openxmlformats.org/drawingml/2006/main">
-              <a:ext uri="{FF2B5EF4-FFF2-40B4-BE49-F238E27FC236}">
-                <a16:creationId xmlns:a16="http://schemas.microsoft.com/office/drawing/2014/main" id="{1B5D55CD-1C17-7CD8-F26A-2DD65B067687}"/>
-              </a:ext>
-            </a:extLst>
-          </p:cNvPr>
-          <p:cNvSpPr>
-            <a:spLocks xmlns:a="http://schemas.openxmlformats.org/drawingml/2006/main" noGrp="1"/>
-          </p:cNvSpPr>
-          <p:nvPr>
-            <p:ph type="title" idx="0"/>
-          </p:nvPr>
-        </p:nvSpPr>
-        <p:spPr>
-          <a:xfrm xmlns:a="http://schemas.openxmlformats.org/drawingml/2006/main">
-            <a:off x="393700" y="344008"/>
-            <a:ext cx="11404600" cy="1047491"/>
-          </a:xfrm>
-        </p:spPr>
-        <p:txBody>
-          <a:bodyPr xmlns:a="http://schemas.openxmlformats.org/drawingml/2006/main" spcFirstLastPara="1" vert="horz" wrap="square" lIns="0" tIns="0" rIns="0" bIns="0" anchor="t">
-            <a:noAutofit/>
-          </a:bodyPr>
-          <a:lstStyle xmlns:a="http://schemas.openxmlformats.org/drawingml/2006/main">
-            <a:defPPr>
-              <a:defRPr sz="3150">
-                <a:solidFill>
-                  <a:srgbClr val="FFFFFF"/>
-                </a:solidFill>
-                <a:latin typeface="Arial"/>
-                <a:ea typeface="Arial"/>
-                <a:cs typeface="Arial"/>
-              </a:defRPr>
-            </a:defPPr>
-            <a:lvl1pPr>
-              <a:defRPr sz="3150">
-                <a:solidFill>
-                  <a:srgbClr val="FFFFFF"/>
-                </a:solidFill>
-                <a:latin typeface="Arial"/>
-                <a:ea typeface="Arial"/>
-                <a:cs typeface="Arial"/>
-              </a:defRPr>
-            </a:lvl1pPr>
-            <a:lvl2pPr>
-              <a:defRPr sz="3150">
-                <a:solidFill>
-                  <a:srgbClr val="FFFFFF"/>
-                </a:solidFill>
-                <a:latin typeface="Arial"/>
-                <a:ea typeface="Arial"/>
-                <a:cs typeface="Arial"/>
-              </a:defRPr>
-            </a:lvl2pPr>
-            <a:lvl3pPr>
-              <a:defRPr sz="3150">
-                <a:solidFill>
-                  <a:srgbClr val="FFFFFF"/>
-                </a:solidFill>
-                <a:latin typeface="Arial"/>
-                <a:ea typeface="Arial"/>
-                <a:cs typeface="Arial"/>
-              </a:defRPr>
-            </a:lvl3pPr>
-            <a:lvl4pPr>
-              <a:defRPr sz="3150">
-                <a:solidFill>
-                  <a:srgbClr val="FFFFFF"/>
-                </a:solidFill>
-                <a:latin typeface="Arial"/>
-                <a:ea typeface="Arial"/>
-                <a:cs typeface="Arial"/>
-              </a:defRPr>
-            </a:lvl4pPr>
-            <a:lvl5pPr>
-              <a:defRPr sz="3150">
-                <a:solidFill>
-                  <a:srgbClr val="FFFFFF"/>
-                </a:solidFill>
-                <a:latin typeface="Arial"/>
-                <a:ea typeface="Arial"/>
-                <a:cs typeface="Arial"/>
-              </a:defRPr>
-            </a:lvl5pPr>
-            <a:lvl6pPr>
-              <a:defRPr sz="3150">
-                <a:solidFill>
-                  <a:srgbClr val="FFFFFF"/>
-                </a:solidFill>
-                <a:latin typeface="Arial"/>
-                <a:ea typeface="Arial"/>
-                <a:cs typeface="Arial"/>
-              </a:defRPr>
-            </a:lvl6pPr>
-            <a:lvl7pPr>
-              <a:defRPr sz="3150">
-                <a:solidFill>
-                  <a:srgbClr val="FFFFFF"/>
-                </a:solidFill>
-                <a:latin typeface="Arial"/>
-                <a:ea typeface="Arial"/>
-                <a:cs typeface="Arial"/>
-              </a:defRPr>
-            </a:lvl7pPr>
-            <a:lvl8pPr>
-              <a:defRPr sz="3150">
-                <a:solidFill>
-                  <a:srgbClr val="FFFFFF"/>
-                </a:solidFill>
-                <a:latin typeface="Arial"/>
-                <a:ea typeface="Arial"/>
-                <a:cs typeface="Arial"/>
-              </a:defRPr>
-            </a:lvl8pPr>
-            <a:lvl9pPr>
-              <a:defRPr sz="3150">
-                <a:solidFill>
-                  <a:srgbClr val="FFFFFF"/>
-                </a:solidFill>
-                <a:latin typeface="Arial"/>
-                <a:ea typeface="Arial"/>
-                <a:cs typeface="Arial"/>
-              </a:defRPr>
-            </a:lvl9pPr>
-          </a:lstStyle>
-          <a:p xmlns:a="http://schemas.openxmlformats.org/drawingml/2006/main">
-            <a:pPr marL="0" indent="0">
-              <a:lnSpc>
-                <a:spcPct val="112000"/>
-              </a:lnSpc>
-              <a:spcBef>
-                <a:spcPts val="0"/>
-              </a:spcBef>
-              <a:spcAft>
-                <a:spcPts val="0"/>
-              </a:spcAft>
-              <a:buNone/>
-              <a:defRPr sz="3150">
-                <a:solidFill>
-                  <a:srgbClr val="FFFFFF"/>
-                </a:solidFill>
-                <a:latin typeface="Arial"/>
-                <a:ea typeface="Arial"/>
-                <a:cs typeface="Arial"/>
-              </a:defRPr>
-            </a:pPr>
-            <a:r>
-              <a:rPr sz="3150">
-                <a:solidFill>
-                  <a:srgbClr val="FFFFFF"/>
-                </a:solidFill>
-                <a:latin typeface="Arial"/>
-                <a:ea typeface="Arial"/>
-                <a:cs typeface="Arial"/>
-              </a:rPr>
-              <a:t>Build a truth table one gate at a time</a:t>
-            </a:r>
-          </a:p>
-        </p:txBody>
-      </p:sp>
-      <p:sp>
-        <p:nvSpPr>
-          <p:cNvPr id="7" name="Google Shape;534;p58">
-            <a:extLst xmlns:a="http://schemas.openxmlformats.org/drawingml/2006/main">
-              <a:ext uri="{FF2B5EF4-FFF2-40B4-BE49-F238E27FC236}">
-                <a16:creationId xmlns:a16="http://schemas.microsoft.com/office/drawing/2014/main" id="{3A923FEE-B8D2-CD3A-ABBD-21770B40AA24}"/>
-              </a:ext>
-            </a:extLst>
-          </p:cNvPr>
-          <p:cNvSpPr>
-            <a:spLocks xmlns:a="http://schemas.openxmlformats.org/drawingml/2006/main" noGrp="1"/>
-          </p:cNvSpPr>
-          <p:nvPr/>
-        </p:nvSpPr>
-        <p:spPr>
-          <a:xfrm xmlns:a="http://schemas.openxmlformats.org/drawingml/2006/main">
-            <a:off x="393700" y="2031999"/>
-            <a:ext cx="5537200" cy="3534787"/>
-          </a:xfrm>
-          <a:prstGeom xmlns:a="http://schemas.openxmlformats.org/drawingml/2006/main" prst="rect">
-            <a:avLst/>
-          </a:prstGeom>
-        </p:spPr>
-        <p:txBody>
-          <a:bodyPr xmlns:a="http://schemas.openxmlformats.org/drawingml/2006/main" spcFirstLastPara="1" vert="horz" wrap="square" lIns="0" tIns="0" rIns="0" bIns="0" anchor="t">
-            <a:noAutofit/>
-          </a:bodyPr>
-          <a:lstStyle xmlns:a="http://schemas.openxmlformats.org/drawingml/2006/main">
-            <a:defPPr>
-              <a:defRPr sz="1875">
-                <a:solidFill>
-                  <a:srgbClr val="FFFFFF"/>
-                </a:solidFill>
-                <a:latin typeface="Arial"/>
-                <a:ea typeface="Arial"/>
-                <a:cs typeface="Arial"/>
-              </a:defRPr>
-            </a:defPPr>
-            <a:lvl1pPr marL="228600" indent="-228600" algn="l" defTabSz="914400">
-              <a:lnSpc>
-                <a:spcPct val="90000"/>
-              </a:lnSpc>
-              <a:spcBef>
-                <a:spcPts val="1000"/>
-              </a:spcBef>
-              <a:buFont typeface="Arial"/>
-              <a:buChar char="•"/>
-              <a:defRPr sz="2400" kern="1200">
-                <a:solidFill>
-                  <a:schemeClr val="tx1"/>
-                </a:solidFill>
-                <a:latin typeface="+mn-lt"/>
-                <a:ea typeface="+mn-lt"/>
-                <a:cs typeface="+mn-lt"/>
-              </a:defRPr>
-            </a:lvl1pPr>
-            <a:lvl2pPr marL="685800" indent="-228600" algn="l" defTabSz="914400">
-              <a:lnSpc>
-                <a:spcPct val="90000"/>
-              </a:lnSpc>
-              <a:spcBef>
-                <a:spcPts val="500"/>
-              </a:spcBef>
-              <a:buFont typeface="Arial"/>
-              <a:buChar char="•"/>
-              <a:defRPr sz="2000" kern="1200">
-                <a:solidFill>
-                  <a:schemeClr val="tx1"/>
-                </a:solidFill>
-                <a:latin typeface="+mn-lt"/>
-                <a:ea typeface="+mn-lt"/>
-                <a:cs typeface="+mn-lt"/>
-              </a:defRPr>
-            </a:lvl2pPr>
-            <a:lvl3pPr marL="1143000" indent="-228600" algn="l" defTabSz="914400">
-              <a:lnSpc>
-                <a:spcPct val="90000"/>
-              </a:lnSpc>
-              <a:spcBef>
-                <a:spcPts val="500"/>
-              </a:spcBef>
-              <a:buFont typeface="Arial"/>
-              <a:buChar char="•"/>
-              <a:defRPr sz="1800" kern="1200">
-                <a:solidFill>
-                  <a:schemeClr val="tx1"/>
-                </a:solidFill>
-                <a:latin typeface="+mn-lt"/>
-                <a:ea typeface="+mn-lt"/>
-                <a:cs typeface="+mn-lt"/>
-              </a:defRPr>
-            </a:lvl3pPr>
-            <a:lvl4pPr marL="1600200" indent="-228600" algn="l" defTabSz="914400">
-              <a:lnSpc>
-                <a:spcPct val="90000"/>
-              </a:lnSpc>
-              <a:spcBef>
-                <a:spcPts val="500"/>
-              </a:spcBef>
-              <a:buFont typeface="Arial"/>
-              <a:buChar char="•"/>
-              <a:defRPr sz="1800" kern="1200">
-                <a:solidFill>
-                  <a:schemeClr val="tx1"/>
-                </a:solidFill>
-                <a:latin typeface="+mn-lt"/>
-                <a:ea typeface="+mn-lt"/>
-                <a:cs typeface="+mn-lt"/>
-              </a:defRPr>
-            </a:lvl4pPr>
-            <a:lvl5pPr marL="2057400" indent="-228600" algn="l" defTabSz="914400">
-              <a:lnSpc>
-                <a:spcPct val="90000"/>
-              </a:lnSpc>
-              <a:spcBef>
-                <a:spcPts val="500"/>
-              </a:spcBef>
-              <a:buFont typeface="Arial"/>
-              <a:buChar char="•"/>
-              <a:defRPr sz="1800" kern="1200">
-                <a:solidFill>
-                  <a:schemeClr val="tx1"/>
-                </a:solidFill>
-                <a:latin typeface="+mn-lt"/>
-                <a:ea typeface="+mn-lt"/>
-                <a:cs typeface="+mn-lt"/>
-              </a:defRPr>
-            </a:lvl5pPr>
-            <a:lvl6pPr marL="2514600" indent="-228600" algn="l" defTabSz="914400">
-              <a:lnSpc>
-                <a:spcPct val="90000"/>
-              </a:lnSpc>
-              <a:spcBef>
-                <a:spcPts val="500"/>
-              </a:spcBef>
-              <a:buFont typeface="Arial"/>
-              <a:buChar char="•"/>
-              <a:defRPr sz="1800" kern="1200">
-                <a:solidFill>
-                  <a:schemeClr val="tx1"/>
-                </a:solidFill>
-                <a:latin typeface="+mn-lt"/>
-                <a:ea typeface="+mn-lt"/>
-                <a:cs typeface="+mn-lt"/>
-              </a:defRPr>
-            </a:lvl6pPr>
-            <a:lvl7pPr marL="2971800" indent="-228600" algn="l" defTabSz="914400">
-              <a:lnSpc>
-                <a:spcPct val="90000"/>
-              </a:lnSpc>
-              <a:spcBef>
-                <a:spcPts val="500"/>
-              </a:spcBef>
-              <a:buFont typeface="Arial"/>
-              <a:buChar char="•"/>
-              <a:defRPr sz="1800" kern="1200">
-                <a:solidFill>
-                  <a:schemeClr val="tx1"/>
-                </a:solidFill>
-                <a:latin typeface="+mn-lt"/>
-                <a:ea typeface="+mn-lt"/>
-                <a:cs typeface="+mn-lt"/>
-              </a:defRPr>
-            </a:lvl7pPr>
-            <a:lvl8pPr marL="3429000" indent="-228600" algn="l" defTabSz="914400">
-              <a:lnSpc>
-                <a:spcPct val="90000"/>
-              </a:lnSpc>
-              <a:spcBef>
-                <a:spcPts val="500"/>
-              </a:spcBef>
-              <a:buFont typeface="Arial"/>
-              <a:buChar char="•"/>
-              <a:defRPr sz="1800" kern="1200">
-                <a:solidFill>
-                  <a:schemeClr val="tx1"/>
-                </a:solidFill>
-                <a:latin typeface="+mn-lt"/>
-                <a:ea typeface="+mn-lt"/>
-                <a:cs typeface="+mn-lt"/>
-              </a:defRPr>
-            </a:lvl8pPr>
-            <a:lvl9pPr marL="3886200" indent="-228600" algn="l" defTabSz="914400">
-              <a:lnSpc>
-                <a:spcPct val="90000"/>
-              </a:lnSpc>
-              <a:spcBef>
-                <a:spcPts val="500"/>
-              </a:spcBef>
-              <a:buFont typeface="Arial"/>
-              <a:buChar char="•"/>
-              <a:defRPr sz="1800" kern="1200">
-                <a:solidFill>
-                  <a:schemeClr val="tx1"/>
-                </a:solidFill>
-                <a:latin typeface="+mn-lt"/>
-                <a:ea typeface="+mn-lt"/>
-                <a:cs typeface="+mn-lt"/>
-              </a:defRPr>
-            </a:lvl9pPr>
-          </a:lstStyle>
-          <a:p xmlns:a="http://schemas.openxmlformats.org/drawingml/2006/main">
-            <a:pPr marL="0" indent="0">
-              <a:lnSpc>
-                <a:spcPct val="112000"/>
-              </a:lnSpc>
-              <a:spcBef>
-                <a:spcPts val="0"/>
-              </a:spcBef>
-              <a:spcAft>
-                <a:spcPts val="0"/>
-              </a:spcAft>
-              <a:buNone/>
-              <a:defRPr sz="1875">
-                <a:solidFill>
-                  <a:srgbClr val="FFFFFF"/>
-                </a:solidFill>
-                <a:latin typeface="Arial"/>
-                <a:ea typeface="Arial"/>
-                <a:cs typeface="Arial"/>
-              </a:defRPr>
-            </a:pPr>
-            <a:r>
-              <a:rPr sz="1875">
-                <a:solidFill>
-                  <a:srgbClr val="FFFFFF"/>
-                </a:solidFill>
-                <a:latin typeface="Arial"/>
-                <a:ea typeface="Arial"/>
-                <a:cs typeface="Arial"/>
-              </a:rPr>
               <a:t>Do not try to guess the entire circuit at once. Write a column for each intermediate result.</a:t>
             </a:r>
           </a:p>
@@ -31533,7 +29929,7 @@
           <p:cNvPr id="534" name="">
             <a:extLst xmlns:a="http://schemas.openxmlformats.org/drawingml/2006/main">
               <a:ext uri="{FF2B5EF4-FFF2-40B4-BE49-F238E27FC236}">
-                <a16:creationId xmlns:a16="http://schemas.microsoft.com/office/drawing/2014/main" id="{892F17AA-7048-4B21-B2B4-F588175E1970}"/>
+                <a16:creationId xmlns:a16="http://schemas.microsoft.com/office/drawing/2014/main" id="{8D74B16E-96E5-41EC-974D-8D6B91734A8E}"/>
               </a:ext>
             </a:extLst>
           </p:cNvPr>
@@ -32534,7 +30930,7 @@
           <p:cNvPr id="535" name="Takeaway">
             <a:extLst xmlns:a="http://schemas.openxmlformats.org/drawingml/2006/main">
               <a:ext uri="{FF2B5EF4-FFF2-40B4-BE49-F238E27FC236}">
-                <a16:creationId xmlns:a16="http://schemas.microsoft.com/office/drawing/2014/main" id="{7E04588D-4CB6-47B1-AE72-565046C62D63}"/>
+                <a16:creationId xmlns:a16="http://schemas.microsoft.com/office/drawing/2014/main" id="{7EDD7179-7163-4139-9CB6-DB963A6FFD3F}"/>
               </a:ext>
             </a:extLst>
           </p:cNvPr>
@@ -32693,6 +31089,1439 @@
                 <a:cs typeface="Arial"/>
               </a:rPr>
               <a:t>The same method works when the circuit is drawn with gate symbols.</a:t>
+            </a:r>
+          </a:p>
+        </p:txBody>
+      </p:sp>
+    </p:spTree>
+    <p:extLst>
+      <p:ext uri="{BB962C8B-B14F-4D97-AF65-F5344CB8AC3E}">
+        <p14:creationId xmlns:p14="http://schemas.microsoft.com/office/powerpoint/2010/main" val="3667182145"/>
+      </p:ext>
+    </p:extLst>
+  </p:cSld>
+</p:sld>
+</file>
+
+<file path=ppt/slides/slide23.xml><?xml version="1.0" encoding="utf-8"?>
+<p:sld xmlns:p="http://schemas.openxmlformats.org/presentationml/2006/main">
+  <p:cSld>
+    <p:spTree>
+      <p:nvGrpSpPr>
+        <p:cNvPr id="1" name=""/>
+        <p:cNvGrpSpPr/>
+        <p:nvPr/>
+      </p:nvGrpSpPr>
+      <p:grpSpPr>
+        <a:xfrm xmlns:a="http://schemas.openxmlformats.org/drawingml/2006/main"/>
+      </p:grpSpPr>
+      <p:sp>
+        <p:nvSpPr>
+          <p:cNvPr id="3" name="Footer Placeholder 2">
+            <a:extLst xmlns:a="http://schemas.openxmlformats.org/drawingml/2006/main">
+              <a:ext uri="{FF2B5EF4-FFF2-40B4-BE49-F238E27FC236}">
+                <a16:creationId xmlns:a16="http://schemas.microsoft.com/office/drawing/2014/main" id="{39EA4C82-C623-0196-4A95-876ADF5DEE92}"/>
+              </a:ext>
+            </a:extLst>
+          </p:cNvPr>
+          <p:cNvSpPr>
+            <a:spLocks xmlns:a="http://schemas.openxmlformats.org/drawingml/2006/main" noGrp="1"/>
+          </p:cNvSpPr>
+          <p:nvPr>
+            <p:ph type="ftr" idx="3"/>
+          </p:nvPr>
+        </p:nvSpPr>
+        <p:spPr>
+          <a:xfrm xmlns:a="http://schemas.openxmlformats.org/drawingml/2006/main">
+            <a:off x="393700" y="6279952"/>
+            <a:ext cx="3568700" cy="241240"/>
+          </a:xfrm>
+        </p:spPr>
+        <p:txBody>
+          <a:bodyPr xmlns:a="http://schemas.openxmlformats.org/drawingml/2006/main" lIns="0" tIns="0" rIns="0" bIns="0" anchor="t">
+            <a:noAutofit/>
+          </a:bodyPr>
+          <a:lstStyle xmlns:a="http://schemas.openxmlformats.org/drawingml/2006/main">
+            <a:defPPr>
+              <a:defRPr sz="1125">
+                <a:solidFill>
+                  <a:srgbClr val="FFFFFF"/>
+                </a:solidFill>
+                <a:latin typeface="Arial"/>
+                <a:ea typeface="Arial"/>
+                <a:cs typeface="Arial"/>
+              </a:defRPr>
+            </a:defPPr>
+            <a:lvl1pPr>
+              <a:defRPr sz="1125">
+                <a:solidFill>
+                  <a:srgbClr val="FFFFFF"/>
+                </a:solidFill>
+                <a:latin typeface="Arial"/>
+                <a:ea typeface="Arial"/>
+                <a:cs typeface="Arial"/>
+              </a:defRPr>
+            </a:lvl1pPr>
+            <a:lvl2pPr>
+              <a:defRPr sz="1125">
+                <a:solidFill>
+                  <a:srgbClr val="FFFFFF"/>
+                </a:solidFill>
+                <a:latin typeface="Arial"/>
+                <a:ea typeface="Arial"/>
+                <a:cs typeface="Arial"/>
+              </a:defRPr>
+            </a:lvl2pPr>
+            <a:lvl3pPr>
+              <a:defRPr sz="1125">
+                <a:solidFill>
+                  <a:srgbClr val="FFFFFF"/>
+                </a:solidFill>
+                <a:latin typeface="Arial"/>
+                <a:ea typeface="Arial"/>
+                <a:cs typeface="Arial"/>
+              </a:defRPr>
+            </a:lvl3pPr>
+            <a:lvl4pPr>
+              <a:defRPr sz="1125">
+                <a:solidFill>
+                  <a:srgbClr val="FFFFFF"/>
+                </a:solidFill>
+                <a:latin typeface="Arial"/>
+                <a:ea typeface="Arial"/>
+                <a:cs typeface="Arial"/>
+              </a:defRPr>
+            </a:lvl4pPr>
+            <a:lvl5pPr>
+              <a:defRPr sz="1125">
+                <a:solidFill>
+                  <a:srgbClr val="FFFFFF"/>
+                </a:solidFill>
+                <a:latin typeface="Arial"/>
+                <a:ea typeface="Arial"/>
+                <a:cs typeface="Arial"/>
+              </a:defRPr>
+            </a:lvl5pPr>
+            <a:lvl6pPr>
+              <a:defRPr sz="1125">
+                <a:solidFill>
+                  <a:srgbClr val="FFFFFF"/>
+                </a:solidFill>
+                <a:latin typeface="Arial"/>
+                <a:ea typeface="Arial"/>
+                <a:cs typeface="Arial"/>
+              </a:defRPr>
+            </a:lvl6pPr>
+            <a:lvl7pPr>
+              <a:defRPr sz="1125">
+                <a:solidFill>
+                  <a:srgbClr val="FFFFFF"/>
+                </a:solidFill>
+                <a:latin typeface="Arial"/>
+                <a:ea typeface="Arial"/>
+                <a:cs typeface="Arial"/>
+              </a:defRPr>
+            </a:lvl7pPr>
+            <a:lvl8pPr>
+              <a:defRPr sz="1125">
+                <a:solidFill>
+                  <a:srgbClr val="FFFFFF"/>
+                </a:solidFill>
+                <a:latin typeface="Arial"/>
+                <a:ea typeface="Arial"/>
+                <a:cs typeface="Arial"/>
+              </a:defRPr>
+            </a:lvl8pPr>
+            <a:lvl9pPr>
+              <a:defRPr sz="1125">
+                <a:solidFill>
+                  <a:srgbClr val="FFFFFF"/>
+                </a:solidFill>
+                <a:latin typeface="Arial"/>
+                <a:ea typeface="Arial"/>
+                <a:cs typeface="Arial"/>
+              </a:defRPr>
+            </a:lvl9pPr>
+          </a:lstStyle>
+          <a:p xmlns:a="http://schemas.openxmlformats.org/drawingml/2006/main">
+            <a:pPr marL="0" indent="0">
+              <a:lnSpc>
+                <a:spcPct val="112000"/>
+              </a:lnSpc>
+              <a:spcBef>
+                <a:spcPts val="0"/>
+              </a:spcBef>
+              <a:spcAft>
+                <a:spcPts val="0"/>
+              </a:spcAft>
+              <a:buNone/>
+              <a:defRPr sz="1125">
+                <a:solidFill>
+                  <a:srgbClr val="FFFFFF"/>
+                </a:solidFill>
+                <a:latin typeface="Arial"/>
+                <a:ea typeface="Arial"/>
+                <a:cs typeface="Arial"/>
+              </a:defRPr>
+            </a:pPr>
+            <a:r>
+              <a:rPr sz="1125">
+                <a:solidFill>
+                  <a:srgbClr val="FFFFFF"/>
+                </a:solidFill>
+                <a:latin typeface="Arial"/>
+                <a:ea typeface="Arial"/>
+                <a:cs typeface="Arial"/>
+              </a:rPr>
+              <a:t>CS 211 · Recitation 07</a:t>
+            </a:r>
+          </a:p>
+        </p:txBody>
+      </p:sp>
+      <p:sp>
+        <p:nvSpPr>
+          <p:cNvPr id="532" name="Google Shape;532;p58">
+            <a:extLst xmlns:a="http://schemas.openxmlformats.org/drawingml/2006/main">
+              <a:ext uri="{FF2B5EF4-FFF2-40B4-BE49-F238E27FC236}">
+                <a16:creationId xmlns:a16="http://schemas.microsoft.com/office/drawing/2014/main" id="{1BCBE750-7048-686D-1472-52C53362D6CD}"/>
+              </a:ext>
+            </a:extLst>
+          </p:cNvPr>
+          <p:cNvSpPr>
+            <a:spLocks xmlns:a="http://schemas.openxmlformats.org/drawingml/2006/main" noGrp="1"/>
+          </p:cNvSpPr>
+          <p:nvPr>
+            <p:ph type="sldNum" idx="4"/>
+          </p:nvPr>
+        </p:nvSpPr>
+        <p:spPr>
+          <a:xfrm xmlns:a="http://schemas.openxmlformats.org/drawingml/2006/main">
+            <a:off x="11279332" y="6279294"/>
+            <a:ext cx="518968" cy="241240"/>
+          </a:xfrm>
+        </p:spPr>
+        <p:txBody>
+          <a:bodyPr xmlns:a="http://schemas.openxmlformats.org/drawingml/2006/main" spcFirstLastPara="1" vert="horz" wrap="square" lIns="0" tIns="0" rIns="0" bIns="0" anchor="t">
+            <a:noAutofit/>
+          </a:bodyPr>
+          <a:lstStyle xmlns:a="http://schemas.openxmlformats.org/drawingml/2006/main">
+            <a:defPPr>
+              <a:defRPr sz="1125">
+                <a:solidFill>
+                  <a:srgbClr val="FFFFFF"/>
+                </a:solidFill>
+                <a:latin typeface="Arial"/>
+                <a:ea typeface="Arial"/>
+                <a:cs typeface="Arial"/>
+              </a:defRPr>
+            </a:defPPr>
+            <a:lvl1pPr>
+              <a:defRPr sz="1125">
+                <a:solidFill>
+                  <a:srgbClr val="FFFFFF"/>
+                </a:solidFill>
+                <a:latin typeface="Arial"/>
+                <a:ea typeface="Arial"/>
+                <a:cs typeface="Arial"/>
+              </a:defRPr>
+            </a:lvl1pPr>
+            <a:lvl2pPr>
+              <a:defRPr sz="1125">
+                <a:solidFill>
+                  <a:srgbClr val="FFFFFF"/>
+                </a:solidFill>
+                <a:latin typeface="Arial"/>
+                <a:ea typeface="Arial"/>
+                <a:cs typeface="Arial"/>
+              </a:defRPr>
+            </a:lvl2pPr>
+            <a:lvl3pPr>
+              <a:defRPr sz="1125">
+                <a:solidFill>
+                  <a:srgbClr val="FFFFFF"/>
+                </a:solidFill>
+                <a:latin typeface="Arial"/>
+                <a:ea typeface="Arial"/>
+                <a:cs typeface="Arial"/>
+              </a:defRPr>
+            </a:lvl3pPr>
+            <a:lvl4pPr>
+              <a:defRPr sz="1125">
+                <a:solidFill>
+                  <a:srgbClr val="FFFFFF"/>
+                </a:solidFill>
+                <a:latin typeface="Arial"/>
+                <a:ea typeface="Arial"/>
+                <a:cs typeface="Arial"/>
+              </a:defRPr>
+            </a:lvl4pPr>
+            <a:lvl5pPr>
+              <a:defRPr sz="1125">
+                <a:solidFill>
+                  <a:srgbClr val="FFFFFF"/>
+                </a:solidFill>
+                <a:latin typeface="Arial"/>
+                <a:ea typeface="Arial"/>
+                <a:cs typeface="Arial"/>
+              </a:defRPr>
+            </a:lvl5pPr>
+            <a:lvl6pPr>
+              <a:defRPr sz="1125">
+                <a:solidFill>
+                  <a:srgbClr val="FFFFFF"/>
+                </a:solidFill>
+                <a:latin typeface="Arial"/>
+                <a:ea typeface="Arial"/>
+                <a:cs typeface="Arial"/>
+              </a:defRPr>
+            </a:lvl6pPr>
+            <a:lvl7pPr>
+              <a:defRPr sz="1125">
+                <a:solidFill>
+                  <a:srgbClr val="FFFFFF"/>
+                </a:solidFill>
+                <a:latin typeface="Arial"/>
+                <a:ea typeface="Arial"/>
+                <a:cs typeface="Arial"/>
+              </a:defRPr>
+            </a:lvl7pPr>
+            <a:lvl8pPr>
+              <a:defRPr sz="1125">
+                <a:solidFill>
+                  <a:srgbClr val="FFFFFF"/>
+                </a:solidFill>
+                <a:latin typeface="Arial"/>
+                <a:ea typeface="Arial"/>
+                <a:cs typeface="Arial"/>
+              </a:defRPr>
+            </a:lvl8pPr>
+            <a:lvl9pPr>
+              <a:defRPr sz="1125">
+                <a:solidFill>
+                  <a:srgbClr val="FFFFFF"/>
+                </a:solidFill>
+                <a:latin typeface="Arial"/>
+                <a:ea typeface="Arial"/>
+                <a:cs typeface="Arial"/>
+              </a:defRPr>
+            </a:lvl9pPr>
+          </a:lstStyle>
+          <a:p xmlns:a="http://schemas.openxmlformats.org/drawingml/2006/main">
+            <a:pPr marL="0" indent="0">
+              <a:lnSpc>
+                <a:spcPct val="112000"/>
+              </a:lnSpc>
+              <a:spcBef>
+                <a:spcPts val="0"/>
+              </a:spcBef>
+              <a:spcAft>
+                <a:spcPts val="0"/>
+              </a:spcAft>
+              <a:buNone/>
+              <a:defRPr sz="1125">
+                <a:solidFill>
+                  <a:srgbClr val="FFFFFF"/>
+                </a:solidFill>
+                <a:latin typeface="Arial"/>
+                <a:ea typeface="Arial"/>
+                <a:cs typeface="Arial"/>
+              </a:defRPr>
+            </a:pPr>
+            <a:r>
+              <a:rPr sz="1125">
+                <a:solidFill>
+                  <a:srgbClr val="FFFFFF"/>
+                </a:solidFill>
+                <a:latin typeface="Arial"/>
+                <a:ea typeface="Arial"/>
+                <a:cs typeface="Arial"/>
+              </a:rPr>
+              <a:t>23</a:t>
+            </a:r>
+          </a:p>
+        </p:txBody>
+      </p:sp>
+      <p:sp>
+        <p:nvSpPr>
+          <p:cNvPr id="533" name="Google Shape;533;p58">
+            <a:extLst xmlns:a="http://schemas.openxmlformats.org/drawingml/2006/main">
+              <a:ext uri="{FF2B5EF4-FFF2-40B4-BE49-F238E27FC236}">
+                <a16:creationId xmlns:a16="http://schemas.microsoft.com/office/drawing/2014/main" id="{1B5D55CD-1C17-7CD8-F26A-2DD65B067687}"/>
+              </a:ext>
+            </a:extLst>
+          </p:cNvPr>
+          <p:cNvSpPr>
+            <a:spLocks xmlns:a="http://schemas.openxmlformats.org/drawingml/2006/main" noGrp="1"/>
+          </p:cNvSpPr>
+          <p:nvPr>
+            <p:ph type="title" idx="0"/>
+          </p:nvPr>
+        </p:nvSpPr>
+        <p:spPr>
+          <a:xfrm xmlns:a="http://schemas.openxmlformats.org/drawingml/2006/main">
+            <a:off x="393700" y="344008"/>
+            <a:ext cx="11404600" cy="1047491"/>
+          </a:xfrm>
+        </p:spPr>
+        <p:txBody>
+          <a:bodyPr xmlns:a="http://schemas.openxmlformats.org/drawingml/2006/main" spcFirstLastPara="1" vert="horz" wrap="square" lIns="0" tIns="0" rIns="0" bIns="0" anchor="t">
+            <a:noAutofit/>
+          </a:bodyPr>
+          <a:lstStyle xmlns:a="http://schemas.openxmlformats.org/drawingml/2006/main">
+            <a:defPPr>
+              <a:defRPr sz="3150">
+                <a:solidFill>
+                  <a:srgbClr val="FFFFFF"/>
+                </a:solidFill>
+                <a:latin typeface="Arial"/>
+                <a:ea typeface="Arial"/>
+                <a:cs typeface="Arial"/>
+              </a:defRPr>
+            </a:defPPr>
+            <a:lvl1pPr>
+              <a:defRPr sz="3150">
+                <a:solidFill>
+                  <a:srgbClr val="FFFFFF"/>
+                </a:solidFill>
+                <a:latin typeface="Arial"/>
+                <a:ea typeface="Arial"/>
+                <a:cs typeface="Arial"/>
+              </a:defRPr>
+            </a:lvl1pPr>
+            <a:lvl2pPr>
+              <a:defRPr sz="3150">
+                <a:solidFill>
+                  <a:srgbClr val="FFFFFF"/>
+                </a:solidFill>
+                <a:latin typeface="Arial"/>
+                <a:ea typeface="Arial"/>
+                <a:cs typeface="Arial"/>
+              </a:defRPr>
+            </a:lvl2pPr>
+            <a:lvl3pPr>
+              <a:defRPr sz="3150">
+                <a:solidFill>
+                  <a:srgbClr val="FFFFFF"/>
+                </a:solidFill>
+                <a:latin typeface="Arial"/>
+                <a:ea typeface="Arial"/>
+                <a:cs typeface="Arial"/>
+              </a:defRPr>
+            </a:lvl3pPr>
+            <a:lvl4pPr>
+              <a:defRPr sz="3150">
+                <a:solidFill>
+                  <a:srgbClr val="FFFFFF"/>
+                </a:solidFill>
+                <a:latin typeface="Arial"/>
+                <a:ea typeface="Arial"/>
+                <a:cs typeface="Arial"/>
+              </a:defRPr>
+            </a:lvl4pPr>
+            <a:lvl5pPr>
+              <a:defRPr sz="3150">
+                <a:solidFill>
+                  <a:srgbClr val="FFFFFF"/>
+                </a:solidFill>
+                <a:latin typeface="Arial"/>
+                <a:ea typeface="Arial"/>
+                <a:cs typeface="Arial"/>
+              </a:defRPr>
+            </a:lvl5pPr>
+            <a:lvl6pPr>
+              <a:defRPr sz="3150">
+                <a:solidFill>
+                  <a:srgbClr val="FFFFFF"/>
+                </a:solidFill>
+                <a:latin typeface="Arial"/>
+                <a:ea typeface="Arial"/>
+                <a:cs typeface="Arial"/>
+              </a:defRPr>
+            </a:lvl6pPr>
+            <a:lvl7pPr>
+              <a:defRPr sz="3150">
+                <a:solidFill>
+                  <a:srgbClr val="FFFFFF"/>
+                </a:solidFill>
+                <a:latin typeface="Arial"/>
+                <a:ea typeface="Arial"/>
+                <a:cs typeface="Arial"/>
+              </a:defRPr>
+            </a:lvl7pPr>
+            <a:lvl8pPr>
+              <a:defRPr sz="3150">
+                <a:solidFill>
+                  <a:srgbClr val="FFFFFF"/>
+                </a:solidFill>
+                <a:latin typeface="Arial"/>
+                <a:ea typeface="Arial"/>
+                <a:cs typeface="Arial"/>
+              </a:defRPr>
+            </a:lvl8pPr>
+            <a:lvl9pPr>
+              <a:defRPr sz="3150">
+                <a:solidFill>
+                  <a:srgbClr val="FFFFFF"/>
+                </a:solidFill>
+                <a:latin typeface="Arial"/>
+                <a:ea typeface="Arial"/>
+                <a:cs typeface="Arial"/>
+              </a:defRPr>
+            </a:lvl9pPr>
+          </a:lstStyle>
+          <a:p xmlns:a="http://schemas.openxmlformats.org/drawingml/2006/main">
+            <a:pPr marL="0" indent="0">
+              <a:lnSpc>
+                <a:spcPct val="112000"/>
+              </a:lnSpc>
+              <a:spcBef>
+                <a:spcPts val="0"/>
+              </a:spcBef>
+              <a:spcAft>
+                <a:spcPts val="0"/>
+              </a:spcAft>
+              <a:buNone/>
+              <a:defRPr sz="3150">
+                <a:solidFill>
+                  <a:srgbClr val="FFFFFF"/>
+                </a:solidFill>
+                <a:latin typeface="Arial"/>
+                <a:ea typeface="Arial"/>
+                <a:cs typeface="Arial"/>
+              </a:defRPr>
+            </a:pPr>
+            <a:r>
+              <a:rPr sz="3150">
+                <a:solidFill>
+                  <a:srgbClr val="FFFFFF"/>
+                </a:solidFill>
+                <a:latin typeface="Arial"/>
+                <a:ea typeface="Arial"/>
+                <a:cs typeface="Arial"/>
+              </a:rPr>
+              <a:t>Adders and propagation delay</a:t>
+            </a:r>
+          </a:p>
+        </p:txBody>
+      </p:sp>
+      <p:sp>
+        <p:nvSpPr>
+          <p:cNvPr id="7" name="Google Shape;534;p58">
+            <a:extLst xmlns:a="http://schemas.openxmlformats.org/drawingml/2006/main">
+              <a:ext uri="{FF2B5EF4-FFF2-40B4-BE49-F238E27FC236}">
+                <a16:creationId xmlns:a16="http://schemas.microsoft.com/office/drawing/2014/main" id="{3A923FEE-B8D2-CD3A-ABBD-21770B40AA24}"/>
+              </a:ext>
+            </a:extLst>
+          </p:cNvPr>
+          <p:cNvSpPr>
+            <a:spLocks xmlns:a="http://schemas.openxmlformats.org/drawingml/2006/main" noGrp="1"/>
+          </p:cNvSpPr>
+          <p:nvPr/>
+        </p:nvSpPr>
+        <p:spPr>
+          <a:xfrm xmlns:a="http://schemas.openxmlformats.org/drawingml/2006/main">
+            <a:off x="393700" y="2031999"/>
+            <a:ext cx="5537200" cy="3534787"/>
+          </a:xfrm>
+          <a:prstGeom xmlns:a="http://schemas.openxmlformats.org/drawingml/2006/main" prst="rect">
+            <a:avLst/>
+          </a:prstGeom>
+        </p:spPr>
+        <p:txBody>
+          <a:bodyPr xmlns:a="http://schemas.openxmlformats.org/drawingml/2006/main" spcFirstLastPara="1" vert="horz" wrap="square" lIns="0" tIns="0" rIns="0" bIns="0" anchor="t">
+            <a:noAutofit/>
+          </a:bodyPr>
+          <a:lstStyle xmlns:a="http://schemas.openxmlformats.org/drawingml/2006/main">
+            <a:defPPr>
+              <a:defRPr sz="1575">
+                <a:solidFill>
+                  <a:srgbClr val="FFFFFF"/>
+                </a:solidFill>
+                <a:latin typeface="Arial"/>
+                <a:ea typeface="Arial"/>
+                <a:cs typeface="Arial"/>
+              </a:defRPr>
+            </a:defPPr>
+            <a:lvl1pPr marL="228600" indent="-228600" algn="l" defTabSz="914400">
+              <a:lnSpc>
+                <a:spcPct val="90000"/>
+              </a:lnSpc>
+              <a:spcBef>
+                <a:spcPts val="1000"/>
+              </a:spcBef>
+              <a:buFont typeface="Arial"/>
+              <a:buChar char="•"/>
+              <a:defRPr sz="2400" kern="1200">
+                <a:solidFill>
+                  <a:schemeClr val="tx1"/>
+                </a:solidFill>
+                <a:latin typeface="+mn-lt"/>
+                <a:ea typeface="+mn-lt"/>
+                <a:cs typeface="+mn-lt"/>
+              </a:defRPr>
+            </a:lvl1pPr>
+            <a:lvl2pPr marL="685800" indent="-228600" algn="l" defTabSz="914400">
+              <a:lnSpc>
+                <a:spcPct val="90000"/>
+              </a:lnSpc>
+              <a:spcBef>
+                <a:spcPts val="500"/>
+              </a:spcBef>
+              <a:buFont typeface="Arial"/>
+              <a:buChar char="•"/>
+              <a:defRPr sz="2000" kern="1200">
+                <a:solidFill>
+                  <a:schemeClr val="tx1"/>
+                </a:solidFill>
+                <a:latin typeface="+mn-lt"/>
+                <a:ea typeface="+mn-lt"/>
+                <a:cs typeface="+mn-lt"/>
+              </a:defRPr>
+            </a:lvl2pPr>
+            <a:lvl3pPr marL="1143000" indent="-228600" algn="l" defTabSz="914400">
+              <a:lnSpc>
+                <a:spcPct val="90000"/>
+              </a:lnSpc>
+              <a:spcBef>
+                <a:spcPts val="500"/>
+              </a:spcBef>
+              <a:buFont typeface="Arial"/>
+              <a:buChar char="•"/>
+              <a:defRPr sz="1800" kern="1200">
+                <a:solidFill>
+                  <a:schemeClr val="tx1"/>
+                </a:solidFill>
+                <a:latin typeface="+mn-lt"/>
+                <a:ea typeface="+mn-lt"/>
+                <a:cs typeface="+mn-lt"/>
+              </a:defRPr>
+            </a:lvl3pPr>
+            <a:lvl4pPr marL="1600200" indent="-228600" algn="l" defTabSz="914400">
+              <a:lnSpc>
+                <a:spcPct val="90000"/>
+              </a:lnSpc>
+              <a:spcBef>
+                <a:spcPts val="500"/>
+              </a:spcBef>
+              <a:buFont typeface="Arial"/>
+              <a:buChar char="•"/>
+              <a:defRPr sz="1800" kern="1200">
+                <a:solidFill>
+                  <a:schemeClr val="tx1"/>
+                </a:solidFill>
+                <a:latin typeface="+mn-lt"/>
+                <a:ea typeface="+mn-lt"/>
+                <a:cs typeface="+mn-lt"/>
+              </a:defRPr>
+            </a:lvl4pPr>
+            <a:lvl5pPr marL="2057400" indent="-228600" algn="l" defTabSz="914400">
+              <a:lnSpc>
+                <a:spcPct val="90000"/>
+              </a:lnSpc>
+              <a:spcBef>
+                <a:spcPts val="500"/>
+              </a:spcBef>
+              <a:buFont typeface="Arial"/>
+              <a:buChar char="•"/>
+              <a:defRPr sz="1800" kern="1200">
+                <a:solidFill>
+                  <a:schemeClr val="tx1"/>
+                </a:solidFill>
+                <a:latin typeface="+mn-lt"/>
+                <a:ea typeface="+mn-lt"/>
+                <a:cs typeface="+mn-lt"/>
+              </a:defRPr>
+            </a:lvl5pPr>
+            <a:lvl6pPr marL="2514600" indent="-228600" algn="l" defTabSz="914400">
+              <a:lnSpc>
+                <a:spcPct val="90000"/>
+              </a:lnSpc>
+              <a:spcBef>
+                <a:spcPts val="500"/>
+              </a:spcBef>
+              <a:buFont typeface="Arial"/>
+              <a:buChar char="•"/>
+              <a:defRPr sz="1800" kern="1200">
+                <a:solidFill>
+                  <a:schemeClr val="tx1"/>
+                </a:solidFill>
+                <a:latin typeface="+mn-lt"/>
+                <a:ea typeface="+mn-lt"/>
+                <a:cs typeface="+mn-lt"/>
+              </a:defRPr>
+            </a:lvl6pPr>
+            <a:lvl7pPr marL="2971800" indent="-228600" algn="l" defTabSz="914400">
+              <a:lnSpc>
+                <a:spcPct val="90000"/>
+              </a:lnSpc>
+              <a:spcBef>
+                <a:spcPts val="500"/>
+              </a:spcBef>
+              <a:buFont typeface="Arial"/>
+              <a:buChar char="•"/>
+              <a:defRPr sz="1800" kern="1200">
+                <a:solidFill>
+                  <a:schemeClr val="tx1"/>
+                </a:solidFill>
+                <a:latin typeface="+mn-lt"/>
+                <a:ea typeface="+mn-lt"/>
+                <a:cs typeface="+mn-lt"/>
+              </a:defRPr>
+            </a:lvl7pPr>
+            <a:lvl8pPr marL="3429000" indent="-228600" algn="l" defTabSz="914400">
+              <a:lnSpc>
+                <a:spcPct val="90000"/>
+              </a:lnSpc>
+              <a:spcBef>
+                <a:spcPts val="500"/>
+              </a:spcBef>
+              <a:buFont typeface="Arial"/>
+              <a:buChar char="•"/>
+              <a:defRPr sz="1800" kern="1200">
+                <a:solidFill>
+                  <a:schemeClr val="tx1"/>
+                </a:solidFill>
+                <a:latin typeface="+mn-lt"/>
+                <a:ea typeface="+mn-lt"/>
+                <a:cs typeface="+mn-lt"/>
+              </a:defRPr>
+            </a:lvl8pPr>
+            <a:lvl9pPr marL="3886200" indent="-228600" algn="l" defTabSz="914400">
+              <a:lnSpc>
+                <a:spcPct val="90000"/>
+              </a:lnSpc>
+              <a:spcBef>
+                <a:spcPts val="500"/>
+              </a:spcBef>
+              <a:buFont typeface="Arial"/>
+              <a:buChar char="•"/>
+              <a:defRPr sz="1800" kern="1200">
+                <a:solidFill>
+                  <a:schemeClr val="tx1"/>
+                </a:solidFill>
+                <a:latin typeface="+mn-lt"/>
+                <a:ea typeface="+mn-lt"/>
+                <a:cs typeface="+mn-lt"/>
+              </a:defRPr>
+            </a:lvl9pPr>
+          </a:lstStyle>
+          <a:p xmlns:a="http://schemas.openxmlformats.org/drawingml/2006/main">
+            <a:pPr marL="0" indent="0">
+              <a:lnSpc>
+                <a:spcPct val="112000"/>
+              </a:lnSpc>
+              <a:spcBef>
+                <a:spcPts val="0"/>
+              </a:spcBef>
+              <a:spcAft>
+                <a:spcPts val="0"/>
+              </a:spcAft>
+              <a:buNone/>
+              <a:defRPr sz="1575">
+                <a:solidFill>
+                  <a:srgbClr val="FFFFFF"/>
+                </a:solidFill>
+                <a:latin typeface="Arial"/>
+                <a:ea typeface="Arial"/>
+                <a:cs typeface="Arial"/>
+              </a:defRPr>
+            </a:pPr>
+            <a:r>
+              <a:rPr sz="1575">
+                <a:solidFill>
+                  <a:srgbClr val="FFFFFF"/>
+                </a:solidFill>
+                <a:latin typeface="Arial"/>
+                <a:ea typeface="Arial"/>
+                <a:cs typeface="Arial"/>
+              </a:rPr>
+              <a:t>A full adder takes A, B, and carry-in. It produces a sum bit and carry-out.</a:t>
+            </a:r>
+          </a:p>
+          <a:p xmlns:a="http://schemas.openxmlformats.org/drawingml/2006/main">
+            <a:pPr marL="0" indent="0">
+              <a:lnSpc>
+                <a:spcPct val="112000"/>
+              </a:lnSpc>
+              <a:spcBef>
+                <a:spcPts val="0"/>
+              </a:spcBef>
+              <a:spcAft>
+                <a:spcPts val="0"/>
+              </a:spcAft>
+              <a:buNone/>
+            </a:pPr>
+            <a:r>
+              <a:t/>
+            </a:r>
+          </a:p>
+          <a:p xmlns:a="http://schemas.openxmlformats.org/drawingml/2006/main">
+            <a:pPr marL="0" indent="0">
+              <a:lnSpc>
+                <a:spcPct val="112000"/>
+              </a:lnSpc>
+              <a:spcBef>
+                <a:spcPts val="0"/>
+              </a:spcBef>
+              <a:spcAft>
+                <a:spcPts val="0"/>
+              </a:spcAft>
+              <a:buNone/>
+              <a:defRPr sz="1575">
+                <a:solidFill>
+                  <a:srgbClr val="FFFFFF"/>
+                </a:solidFill>
+                <a:latin typeface="Arial"/>
+                <a:ea typeface="Arial"/>
+                <a:cs typeface="Arial"/>
+              </a:defRPr>
+            </a:pPr>
+            <a:r>
+              <a:rPr sz="1575">
+                <a:solidFill>
+                  <a:srgbClr val="FFFFFF"/>
+                </a:solidFill>
+                <a:latin typeface="Arial"/>
+                <a:ea typeface="Arial"/>
+                <a:cs typeface="Arial"/>
+              </a:rPr>
+              <a:t>Signals need time to propagate through gates. A ripple adder can wait for a carry to pass through many bit positions.</a:t>
+            </a:r>
+          </a:p>
+          <a:p xmlns:a="http://schemas.openxmlformats.org/drawingml/2006/main">
+            <a:pPr marL="0" indent="0">
+              <a:lnSpc>
+                <a:spcPct val="112000"/>
+              </a:lnSpc>
+              <a:spcBef>
+                <a:spcPts val="0"/>
+              </a:spcBef>
+              <a:spcAft>
+                <a:spcPts val="0"/>
+              </a:spcAft>
+              <a:buNone/>
+            </a:pPr>
+            <a:r>
+              <a:t/>
+            </a:r>
+          </a:p>
+          <a:p xmlns:a="http://schemas.openxmlformats.org/drawingml/2006/main">
+            <a:pPr marL="0" indent="0">
+              <a:lnSpc>
+                <a:spcPct val="112000"/>
+              </a:lnSpc>
+              <a:spcBef>
+                <a:spcPts val="0"/>
+              </a:spcBef>
+              <a:spcAft>
+                <a:spcPts val="0"/>
+              </a:spcAft>
+              <a:buNone/>
+              <a:defRPr sz="1575">
+                <a:solidFill>
+                  <a:srgbClr val="FFFFFF"/>
+                </a:solidFill>
+                <a:latin typeface="Arial"/>
+                <a:ea typeface="Arial"/>
+                <a:cs typeface="Arial"/>
+              </a:defRPr>
+            </a:pPr>
+            <a:r>
+              <a:rPr sz="1575">
+                <a:solidFill>
+                  <a:srgbClr val="FFFFFF"/>
+                </a:solidFill>
+                <a:latin typeface="Arial"/>
+                <a:ea typeface="Arial"/>
+                <a:cs typeface="Arial"/>
+              </a:rPr>
+              <a:t>Carry-lookahead uses more logic to reduce that dependency.</a:t>
+            </a:r>
+          </a:p>
+        </p:txBody>
+      </p:sp>
+      <p:sp>
+        <p:nvSpPr>
+          <p:cNvPr id="8" name="Content Placeholder 3">
+            <a:extLst xmlns:a="http://schemas.openxmlformats.org/drawingml/2006/main">
+              <a:ext uri="{FF2B5EF4-FFF2-40B4-BE49-F238E27FC236}">
+                <a16:creationId xmlns:a16="http://schemas.microsoft.com/office/drawing/2014/main" id="{2EE8F343-A95F-2AAA-FE9E-A6C31E298DF7}"/>
+              </a:ext>
+            </a:extLst>
+          </p:cNvPr>
+          <p:cNvSpPr>
+            <a:spLocks xmlns:a="http://schemas.openxmlformats.org/drawingml/2006/main" noGrp="1"/>
+          </p:cNvSpPr>
+          <p:nvPr/>
+        </p:nvSpPr>
+        <p:spPr>
+          <a:xfrm xmlns:a="http://schemas.openxmlformats.org/drawingml/2006/main">
+            <a:off x="6256618" y="2031999"/>
+            <a:ext cx="5537200" cy="3534787"/>
+          </a:xfrm>
+          <a:prstGeom xmlns:a="http://schemas.openxmlformats.org/drawingml/2006/main" prst="rect">
+            <a:avLst/>
+          </a:prstGeom>
+        </p:spPr>
+        <p:txBody>
+          <a:bodyPr xmlns:a="http://schemas.openxmlformats.org/drawingml/2006/main" lIns="0" tIns="0" rIns="0" bIns="0" anchor="t">
+            <a:noAutofit/>
+          </a:bodyPr>
+          <a:lstStyle xmlns:a="http://schemas.openxmlformats.org/drawingml/2006/main">
+            <a:defPPr>
+              <a:defRPr sz="1800">
+                <a:solidFill>
+                  <a:srgbClr val="FFFFFF"/>
+                </a:solidFill>
+                <a:latin typeface="Consolas"/>
+                <a:ea typeface="Consolas"/>
+                <a:cs typeface="Consolas"/>
+              </a:defRPr>
+            </a:defPPr>
+            <a:lvl1pPr marL="228600" indent="-228600" algn="l" defTabSz="914400">
+              <a:lnSpc>
+                <a:spcPct val="90000"/>
+              </a:lnSpc>
+              <a:spcBef>
+                <a:spcPts val="1000"/>
+              </a:spcBef>
+              <a:buFont typeface="Arial"/>
+              <a:buChar char="•"/>
+              <a:defRPr sz="2400" kern="1200">
+                <a:solidFill>
+                  <a:schemeClr val="tx1"/>
+                </a:solidFill>
+                <a:latin typeface="+mn-lt"/>
+                <a:ea typeface="+mn-lt"/>
+                <a:cs typeface="+mn-lt"/>
+              </a:defRPr>
+            </a:lvl1pPr>
+            <a:lvl2pPr marL="685800" indent="-228600" algn="l" defTabSz="914400">
+              <a:lnSpc>
+                <a:spcPct val="90000"/>
+              </a:lnSpc>
+              <a:spcBef>
+                <a:spcPts val="500"/>
+              </a:spcBef>
+              <a:buFont typeface="Arial"/>
+              <a:buChar char="•"/>
+              <a:defRPr sz="2000" kern="1200">
+                <a:solidFill>
+                  <a:schemeClr val="tx1"/>
+                </a:solidFill>
+                <a:latin typeface="+mn-lt"/>
+                <a:ea typeface="+mn-lt"/>
+                <a:cs typeface="+mn-lt"/>
+              </a:defRPr>
+            </a:lvl2pPr>
+            <a:lvl3pPr marL="1143000" indent="-228600" algn="l" defTabSz="914400">
+              <a:lnSpc>
+                <a:spcPct val="90000"/>
+              </a:lnSpc>
+              <a:spcBef>
+                <a:spcPts val="500"/>
+              </a:spcBef>
+              <a:buFont typeface="Arial"/>
+              <a:buChar char="•"/>
+              <a:defRPr sz="1800" kern="1200">
+                <a:solidFill>
+                  <a:schemeClr val="tx1"/>
+                </a:solidFill>
+                <a:latin typeface="+mn-lt"/>
+                <a:ea typeface="+mn-lt"/>
+                <a:cs typeface="+mn-lt"/>
+              </a:defRPr>
+            </a:lvl3pPr>
+            <a:lvl4pPr marL="1600200" indent="-228600" algn="l" defTabSz="914400">
+              <a:lnSpc>
+                <a:spcPct val="90000"/>
+              </a:lnSpc>
+              <a:spcBef>
+                <a:spcPts val="500"/>
+              </a:spcBef>
+              <a:buFont typeface="Arial"/>
+              <a:buChar char="•"/>
+              <a:defRPr sz="1800" kern="1200">
+                <a:solidFill>
+                  <a:schemeClr val="tx1"/>
+                </a:solidFill>
+                <a:latin typeface="+mn-lt"/>
+                <a:ea typeface="+mn-lt"/>
+                <a:cs typeface="+mn-lt"/>
+              </a:defRPr>
+            </a:lvl4pPr>
+            <a:lvl5pPr marL="2057400" indent="-228600" algn="l" defTabSz="914400">
+              <a:lnSpc>
+                <a:spcPct val="90000"/>
+              </a:lnSpc>
+              <a:spcBef>
+                <a:spcPts val="500"/>
+              </a:spcBef>
+              <a:buFont typeface="Arial"/>
+              <a:buChar char="•"/>
+              <a:defRPr sz="1800" kern="1200">
+                <a:solidFill>
+                  <a:schemeClr val="tx1"/>
+                </a:solidFill>
+                <a:latin typeface="+mn-lt"/>
+                <a:ea typeface="+mn-lt"/>
+                <a:cs typeface="+mn-lt"/>
+              </a:defRPr>
+            </a:lvl5pPr>
+            <a:lvl6pPr marL="2514600" indent="-228600" algn="l" defTabSz="914400">
+              <a:lnSpc>
+                <a:spcPct val="90000"/>
+              </a:lnSpc>
+              <a:spcBef>
+                <a:spcPts val="500"/>
+              </a:spcBef>
+              <a:buFont typeface="Arial"/>
+              <a:buChar char="•"/>
+              <a:defRPr sz="1800" kern="1200">
+                <a:solidFill>
+                  <a:schemeClr val="tx1"/>
+                </a:solidFill>
+                <a:latin typeface="+mn-lt"/>
+                <a:ea typeface="+mn-lt"/>
+                <a:cs typeface="+mn-lt"/>
+              </a:defRPr>
+            </a:lvl6pPr>
+            <a:lvl7pPr marL="2971800" indent="-228600" algn="l" defTabSz="914400">
+              <a:lnSpc>
+                <a:spcPct val="90000"/>
+              </a:lnSpc>
+              <a:spcBef>
+                <a:spcPts val="500"/>
+              </a:spcBef>
+              <a:buFont typeface="Arial"/>
+              <a:buChar char="•"/>
+              <a:defRPr sz="1800" kern="1200">
+                <a:solidFill>
+                  <a:schemeClr val="tx1"/>
+                </a:solidFill>
+                <a:latin typeface="+mn-lt"/>
+                <a:ea typeface="+mn-lt"/>
+                <a:cs typeface="+mn-lt"/>
+              </a:defRPr>
+            </a:lvl7pPr>
+            <a:lvl8pPr marL="3429000" indent="-228600" algn="l" defTabSz="914400">
+              <a:lnSpc>
+                <a:spcPct val="90000"/>
+              </a:lnSpc>
+              <a:spcBef>
+                <a:spcPts val="500"/>
+              </a:spcBef>
+              <a:buFont typeface="Arial"/>
+              <a:buChar char="•"/>
+              <a:defRPr sz="1800" kern="1200">
+                <a:solidFill>
+                  <a:schemeClr val="tx1"/>
+                </a:solidFill>
+                <a:latin typeface="+mn-lt"/>
+                <a:ea typeface="+mn-lt"/>
+                <a:cs typeface="+mn-lt"/>
+              </a:defRPr>
+            </a:lvl8pPr>
+            <a:lvl9pPr marL="3886200" indent="-228600" algn="l" defTabSz="914400">
+              <a:lnSpc>
+                <a:spcPct val="90000"/>
+              </a:lnSpc>
+              <a:spcBef>
+                <a:spcPts val="500"/>
+              </a:spcBef>
+              <a:buFont typeface="Arial"/>
+              <a:buChar char="•"/>
+              <a:defRPr sz="1800" kern="1200">
+                <a:solidFill>
+                  <a:schemeClr val="tx1"/>
+                </a:solidFill>
+                <a:latin typeface="+mn-lt"/>
+                <a:ea typeface="+mn-lt"/>
+                <a:cs typeface="+mn-lt"/>
+              </a:defRPr>
+            </a:lvl9pPr>
+          </a:lstStyle>
+          <a:p xmlns:a="http://schemas.openxmlformats.org/drawingml/2006/main">
+            <a:pPr marL="0" indent="0">
+              <a:lnSpc>
+                <a:spcPct val="112000"/>
+              </a:lnSpc>
+              <a:spcBef>
+                <a:spcPts val="0"/>
+              </a:spcBef>
+              <a:spcAft>
+                <a:spcPts val="0"/>
+              </a:spcAft>
+              <a:buNone/>
+              <a:defRPr sz="1800">
+                <a:solidFill>
+                  <a:srgbClr val="FFFFFF"/>
+                </a:solidFill>
+                <a:latin typeface="Consolas"/>
+                <a:ea typeface="Consolas"/>
+                <a:cs typeface="Consolas"/>
+              </a:defRPr>
+            </a:pPr>
+            <a:r>
+              <a:rPr sz="1800">
+                <a:solidFill>
+                  <a:srgbClr val="FFFFFF"/>
+                </a:solidFill>
+                <a:latin typeface="Consolas"/>
+                <a:ea typeface="Consolas"/>
+                <a:cs typeface="Consolas"/>
+              </a:rPr>
+              <a:t>Sum = A XOR B XOR Cin</a:t>
+            </a:r>
+          </a:p>
+          <a:p xmlns:a="http://schemas.openxmlformats.org/drawingml/2006/main">
+            <a:pPr marL="0" indent="0">
+              <a:lnSpc>
+                <a:spcPct val="112000"/>
+              </a:lnSpc>
+              <a:spcBef>
+                <a:spcPts val="0"/>
+              </a:spcBef>
+              <a:spcAft>
+                <a:spcPts val="0"/>
+              </a:spcAft>
+              <a:buNone/>
+              <a:defRPr sz="1800">
+                <a:solidFill>
+                  <a:srgbClr val="FFFFFF"/>
+                </a:solidFill>
+                <a:latin typeface="Consolas"/>
+                <a:ea typeface="Consolas"/>
+                <a:cs typeface="Consolas"/>
+              </a:defRPr>
+            </a:pPr>
+            <a:r>
+              <a:rPr sz="1800">
+                <a:solidFill>
+                  <a:srgbClr val="FFFFFF"/>
+                </a:solidFill>
+                <a:latin typeface="Consolas"/>
+                <a:ea typeface="Consolas"/>
+                <a:cs typeface="Consolas"/>
+              </a:rPr>
+              <a:t>Cout = (A AND B) OR</a:t>
+            </a:r>
+          </a:p>
+          <a:p xmlns:a="http://schemas.openxmlformats.org/drawingml/2006/main">
+            <a:pPr marL="0" indent="0">
+              <a:lnSpc>
+                <a:spcPct val="112000"/>
+              </a:lnSpc>
+              <a:spcBef>
+                <a:spcPts val="0"/>
+              </a:spcBef>
+              <a:spcAft>
+                <a:spcPts val="0"/>
+              </a:spcAft>
+              <a:buNone/>
+              <a:defRPr sz="1800">
+                <a:solidFill>
+                  <a:srgbClr val="FFFFFF"/>
+                </a:solidFill>
+                <a:latin typeface="Consolas"/>
+                <a:ea typeface="Consolas"/>
+                <a:cs typeface="Consolas"/>
+              </a:defRPr>
+            </a:pPr>
+            <a:r>
+              <a:rPr sz="1800">
+                <a:solidFill>
+                  <a:srgbClr val="FFFFFF"/>
+                </a:solidFill>
+                <a:latin typeface="Consolas"/>
+                <a:ea typeface="Consolas"/>
+                <a:cs typeface="Consolas"/>
+              </a:rPr>
+              <a:t>       (Cin AND (A XOR B))</a:t>
+            </a:r>
+          </a:p>
+          <a:p xmlns:a="http://schemas.openxmlformats.org/drawingml/2006/main">
+            <a:pPr marL="0" indent="0">
+              <a:lnSpc>
+                <a:spcPct val="112000"/>
+              </a:lnSpc>
+              <a:spcBef>
+                <a:spcPts val="0"/>
+              </a:spcBef>
+              <a:spcAft>
+                <a:spcPts val="0"/>
+              </a:spcAft>
+              <a:buNone/>
+            </a:pPr>
+            <a:r>
+              <a:t/>
+            </a:r>
+          </a:p>
+          <a:p xmlns:a="http://schemas.openxmlformats.org/drawingml/2006/main">
+            <a:pPr marL="0" indent="0">
+              <a:lnSpc>
+                <a:spcPct val="112000"/>
+              </a:lnSpc>
+              <a:spcBef>
+                <a:spcPts val="0"/>
+              </a:spcBef>
+              <a:spcAft>
+                <a:spcPts val="0"/>
+              </a:spcAft>
+              <a:buNone/>
+              <a:defRPr sz="1800">
+                <a:solidFill>
+                  <a:srgbClr val="FFFFFF"/>
+                </a:solidFill>
+                <a:latin typeface="Consolas"/>
+                <a:ea typeface="Consolas"/>
+                <a:cs typeface="Consolas"/>
+              </a:defRPr>
+            </a:pPr>
+            <a:r>
+              <a:rPr sz="1800">
+                <a:solidFill>
+                  <a:srgbClr val="FFFFFF"/>
+                </a:solidFill>
+                <a:latin typeface="Consolas"/>
+                <a:ea typeface="Consolas"/>
+                <a:cs typeface="Consolas"/>
+              </a:rPr>
+              <a:t>A=1, B=1, Cin=0:</a:t>
+            </a:r>
+          </a:p>
+          <a:p xmlns:a="http://schemas.openxmlformats.org/drawingml/2006/main">
+            <a:pPr marL="0" indent="0">
+              <a:lnSpc>
+                <a:spcPct val="112000"/>
+              </a:lnSpc>
+              <a:spcBef>
+                <a:spcPts val="0"/>
+              </a:spcBef>
+              <a:spcAft>
+                <a:spcPts val="0"/>
+              </a:spcAft>
+              <a:buNone/>
+              <a:defRPr sz="1800">
+                <a:solidFill>
+                  <a:srgbClr val="FFFFFF"/>
+                </a:solidFill>
+                <a:latin typeface="Consolas"/>
+                <a:ea typeface="Consolas"/>
+                <a:cs typeface="Consolas"/>
+              </a:defRPr>
+            </a:pPr>
+            <a:r>
+              <a:rPr sz="1800">
+                <a:solidFill>
+                  <a:srgbClr val="FFFFFF"/>
+                </a:solidFill>
+                <a:latin typeface="Consolas"/>
+                <a:ea typeface="Consolas"/>
+                <a:cs typeface="Consolas"/>
+              </a:rPr>
+              <a:t>Sum = ?</a:t>
+            </a:r>
+          </a:p>
+          <a:p xmlns:a="http://schemas.openxmlformats.org/drawingml/2006/main">
+            <a:pPr marL="0" indent="0">
+              <a:lnSpc>
+                <a:spcPct val="112000"/>
+              </a:lnSpc>
+              <a:spcBef>
+                <a:spcPts val="0"/>
+              </a:spcBef>
+              <a:spcAft>
+                <a:spcPts val="0"/>
+              </a:spcAft>
+              <a:buNone/>
+              <a:defRPr sz="1800">
+                <a:solidFill>
+                  <a:srgbClr val="FFFFFF"/>
+                </a:solidFill>
+                <a:latin typeface="Consolas"/>
+                <a:ea typeface="Consolas"/>
+                <a:cs typeface="Consolas"/>
+              </a:defRPr>
+            </a:pPr>
+            <a:r>
+              <a:rPr sz="1800">
+                <a:solidFill>
+                  <a:srgbClr val="FFFFFF"/>
+                </a:solidFill>
+                <a:latin typeface="Consolas"/>
+                <a:ea typeface="Consolas"/>
+                <a:cs typeface="Consolas"/>
+              </a:rPr>
+              <a:t>Cout = ?</a:t>
+            </a:r>
+          </a:p>
+        </p:txBody>
+      </p:sp>
+      <p:sp>
+        <p:nvSpPr>
+          <p:cNvPr id="534" name="Takeaway">
+            <a:extLst xmlns:a="http://schemas.openxmlformats.org/drawingml/2006/main">
+              <a:ext uri="{FF2B5EF4-FFF2-40B4-BE49-F238E27FC236}">
+                <a16:creationId xmlns:a16="http://schemas.microsoft.com/office/drawing/2014/main" id="{B517D3F3-F6E6-4722-ADC7-45AE8E3A6326}"/>
+              </a:ext>
+            </a:extLst>
+          </p:cNvPr>
+          <p:cNvSpPr>
+            <a:spLocks xmlns:a="http://schemas.openxmlformats.org/drawingml/2006/main" noGrp="1"/>
+          </p:cNvSpPr>
+          <p:nvPr/>
+        </p:nvSpPr>
+        <p:spPr>
+          <a:xfrm xmlns:a="http://schemas.openxmlformats.org/drawingml/2006/main">
+            <a:off x="393668" y="5715000"/>
+            <a:ext cx="11404283" cy="466725"/>
+          </a:xfrm>
+          <a:prstGeom xmlns:a="http://schemas.openxmlformats.org/drawingml/2006/main" prst="rect">
+            <a:avLst/>
+          </a:prstGeom>
+          <a:noFill xmlns:a="http://schemas.openxmlformats.org/drawingml/2006/main"/>
+          <a:ln xmlns:a="http://schemas.openxmlformats.org/drawingml/2006/main" w="0">
+            <a:noFill/>
+          </a:ln>
+        </p:spPr>
+        <p:txBody>
+          <a:bodyPr xmlns:a="http://schemas.openxmlformats.org/drawingml/2006/main" lIns="0" tIns="0" rIns="0" bIns="0" anchor="t">
+            <a:noAutofit/>
+          </a:bodyPr>
+          <a:lstStyle xmlns:a="http://schemas.openxmlformats.org/drawingml/2006/main">
+            <a:defPPr>
+              <a:defRPr sz="1350">
+                <a:solidFill>
+                  <a:srgbClr val="CCCCCC"/>
+                </a:solidFill>
+                <a:latin typeface="Arial"/>
+                <a:ea typeface="Arial"/>
+                <a:cs typeface="Arial"/>
+              </a:defRPr>
+            </a:defPPr>
+            <a:lvl1pPr>
+              <a:defRPr sz="1350">
+                <a:solidFill>
+                  <a:srgbClr val="CCCCCC"/>
+                </a:solidFill>
+                <a:latin typeface="Arial"/>
+                <a:ea typeface="Arial"/>
+                <a:cs typeface="Arial"/>
+              </a:defRPr>
+            </a:lvl1pPr>
+            <a:lvl2pPr>
+              <a:defRPr sz="1350">
+                <a:solidFill>
+                  <a:srgbClr val="CCCCCC"/>
+                </a:solidFill>
+                <a:latin typeface="Arial"/>
+                <a:ea typeface="Arial"/>
+                <a:cs typeface="Arial"/>
+              </a:defRPr>
+            </a:lvl2pPr>
+            <a:lvl3pPr>
+              <a:defRPr sz="1350">
+                <a:solidFill>
+                  <a:srgbClr val="CCCCCC"/>
+                </a:solidFill>
+                <a:latin typeface="Arial"/>
+                <a:ea typeface="Arial"/>
+                <a:cs typeface="Arial"/>
+              </a:defRPr>
+            </a:lvl3pPr>
+            <a:lvl4pPr>
+              <a:defRPr sz="1350">
+                <a:solidFill>
+                  <a:srgbClr val="CCCCCC"/>
+                </a:solidFill>
+                <a:latin typeface="Arial"/>
+                <a:ea typeface="Arial"/>
+                <a:cs typeface="Arial"/>
+              </a:defRPr>
+            </a:lvl4pPr>
+            <a:lvl5pPr>
+              <a:defRPr sz="1350">
+                <a:solidFill>
+                  <a:srgbClr val="CCCCCC"/>
+                </a:solidFill>
+                <a:latin typeface="Arial"/>
+                <a:ea typeface="Arial"/>
+                <a:cs typeface="Arial"/>
+              </a:defRPr>
+            </a:lvl5pPr>
+            <a:lvl6pPr>
+              <a:defRPr sz="1350">
+                <a:solidFill>
+                  <a:srgbClr val="CCCCCC"/>
+                </a:solidFill>
+                <a:latin typeface="Arial"/>
+                <a:ea typeface="Arial"/>
+                <a:cs typeface="Arial"/>
+              </a:defRPr>
+            </a:lvl6pPr>
+            <a:lvl7pPr>
+              <a:defRPr sz="1350">
+                <a:solidFill>
+                  <a:srgbClr val="CCCCCC"/>
+                </a:solidFill>
+                <a:latin typeface="Arial"/>
+                <a:ea typeface="Arial"/>
+                <a:cs typeface="Arial"/>
+              </a:defRPr>
+            </a:lvl7pPr>
+            <a:lvl8pPr>
+              <a:defRPr sz="1350">
+                <a:solidFill>
+                  <a:srgbClr val="CCCCCC"/>
+                </a:solidFill>
+                <a:latin typeface="Arial"/>
+                <a:ea typeface="Arial"/>
+                <a:cs typeface="Arial"/>
+              </a:defRPr>
+            </a:lvl8pPr>
+            <a:lvl9pPr>
+              <a:defRPr sz="1350">
+                <a:solidFill>
+                  <a:srgbClr val="CCCCCC"/>
+                </a:solidFill>
+                <a:latin typeface="Arial"/>
+                <a:ea typeface="Arial"/>
+                <a:cs typeface="Arial"/>
+              </a:defRPr>
+            </a:lvl9pPr>
+          </a:lstStyle>
+          <a:p xmlns:a="http://schemas.openxmlformats.org/drawingml/2006/main">
+            <a:pPr marL="0" indent="0">
+              <a:lnSpc>
+                <a:spcPct val="112000"/>
+              </a:lnSpc>
+              <a:spcBef>
+                <a:spcPts val="0"/>
+              </a:spcBef>
+              <a:spcAft>
+                <a:spcPts val="0"/>
+              </a:spcAft>
+              <a:buNone/>
+              <a:defRPr sz="1350">
+                <a:solidFill>
+                  <a:srgbClr val="CCCCCC"/>
+                </a:solidFill>
+                <a:latin typeface="Arial"/>
+                <a:ea typeface="Arial"/>
+                <a:cs typeface="Arial"/>
+              </a:defRPr>
+            </a:pPr>
+            <a:r>
+              <a:rPr sz="1350">
+                <a:solidFill>
+                  <a:srgbClr val="CCCCCC"/>
+                </a:solidFill>
+                <a:latin typeface="Arial"/>
+                <a:ea typeface="Arial"/>
+                <a:cs typeface="Arial"/>
+              </a:rPr>
+              <a:t>Timing follows the longest relevant signal path, not just the number of gates drawn.</a:t>
             </a:r>
           </a:p>
         </p:txBody>
@@ -33203,7 +33032,7 @@
                 <a:ea typeface="Arial"/>
                 <a:cs typeface="Arial"/>
               </a:rPr>
-              <a:t>Adders and propagation delay</a:t>
+              <a:t>MUXes select; decoders identify</a:t>
             </a:r>
           </a:p>
         </p:txBody>
@@ -33237,7 +33066,7 @@
           </a:bodyPr>
           <a:lstStyle xmlns:a="http://schemas.openxmlformats.org/drawingml/2006/main">
             <a:defPPr>
-              <a:defRPr sz="1575">
+              <a:defRPr sz="1875">
                 <a:solidFill>
                   <a:srgbClr val="FFFFFF"/>
                 </a:solidFill>
@@ -33421,17 +33250,17 @@
                 <a:spcPts val="0"/>
               </a:spcAft>
               <a:buNone/>
-              <a:defRPr sz="1575">
-                <a:solidFill>
-                  <a:srgbClr val="FFFFFF"/>
-                </a:solidFill>
-                <a:latin typeface="Arial"/>
-                <a:ea typeface="Arial"/>
-                <a:cs typeface="Arial"/>
-              </a:defRPr>
-            </a:pPr>
-            <a:r>
-              <a:rPr sz="1575">
+              <a:defRPr sz="1875">
+                <a:solidFill>
+                  <a:srgbClr val="FFFFFF"/>
+                </a:solidFill>
+                <a:latin typeface="Arial"/>
+                <a:ea typeface="Arial"/>
+                <a:cs typeface="Arial"/>
+              </a:defRPr>
+            </a:pPr>
+            <a:r>
+              <a:rPr sz="1875">
                 <a:solidFill>
                   <a:srgbClr val="FFFFFF"/>
                 </a:solidFill>
@@ -33439,7 +33268,7 @@
                 <a:ea typeface="Arial"/>
                 <a:cs typeface="Arial"/>
               </a:rPr>
-              <a:t>A full adder takes A, B, and carry-in. It produces a sum bit and carry-out.</a:t>
+              <a:t>A multiplexer routes one selected input to its output.</a:t>
             </a:r>
           </a:p>
           <a:p xmlns:a="http://schemas.openxmlformats.org/drawingml/2006/main">
@@ -33471,17 +33300,17 @@
                 <a:spcPts val="0"/>
               </a:spcAft>
               <a:buNone/>
-              <a:defRPr sz="1575">
-                <a:solidFill>
-                  <a:srgbClr val="FFFFFF"/>
-                </a:solidFill>
-                <a:latin typeface="Arial"/>
-                <a:ea typeface="Arial"/>
-                <a:cs typeface="Arial"/>
-              </a:defRPr>
-            </a:pPr>
-            <a:r>
-              <a:rPr sz="1575">
+              <a:defRPr sz="1875">
+                <a:solidFill>
+                  <a:srgbClr val="FFFFFF"/>
+                </a:solidFill>
+                <a:latin typeface="Arial"/>
+                <a:ea typeface="Arial"/>
+                <a:cs typeface="Arial"/>
+              </a:defRPr>
+            </a:pPr>
+            <a:r>
+              <a:rPr sz="1875">
                 <a:solidFill>
                   <a:srgbClr val="FFFFFF"/>
                 </a:solidFill>
@@ -33489,7 +33318,7 @@
                 <a:ea typeface="Arial"/>
                 <a:cs typeface="Arial"/>
               </a:rPr>
-              <a:t>Signals need time to propagate through gates. A ripple adder can wait for a carry to pass through many bit positions.</a:t>
+              <a:t>A decoder translates a binary input into a selected output line.</a:t>
             </a:r>
           </a:p>
           <a:p xmlns:a="http://schemas.openxmlformats.org/drawingml/2006/main">
@@ -33521,17 +33350,17 @@
                 <a:spcPts val="0"/>
               </a:spcAft>
               <a:buNone/>
-              <a:defRPr sz="1575">
-                <a:solidFill>
-                  <a:srgbClr val="FFFFFF"/>
-                </a:solidFill>
-                <a:latin typeface="Arial"/>
-                <a:ea typeface="Arial"/>
-                <a:cs typeface="Arial"/>
-              </a:defRPr>
-            </a:pPr>
-            <a:r>
-              <a:rPr sz="1575">
+              <a:defRPr sz="1875">
+                <a:solidFill>
+                  <a:srgbClr val="FFFFFF"/>
+                </a:solidFill>
+                <a:latin typeface="Arial"/>
+                <a:ea typeface="Arial"/>
+                <a:cs typeface="Arial"/>
+              </a:defRPr>
+            </a:pPr>
+            <a:r>
+              <a:rPr sz="1875">
                 <a:solidFill>
                   <a:srgbClr val="FFFFFF"/>
                 </a:solidFill>
@@ -33539,7 +33368,7 @@
                 <a:ea typeface="Arial"/>
                 <a:cs typeface="Arial"/>
               </a:rPr>
-              <a:t>Carry-lookahead uses more logic to reduce that dependency.</a:t>
+              <a:t>They help choose operands, operations, and memory locations.</a:t>
             </a:r>
           </a:p>
         </p:txBody>
@@ -33775,7 +33604,7 @@
                 <a:ea typeface="Consolas"/>
                 <a:cs typeface="Consolas"/>
               </a:rPr>
-              <a:t>Sum = A XOR B XOR Cin</a:t>
+              <a:t>2-to-1 MUX:</a:t>
             </a:r>
           </a:p>
           <a:p xmlns:a="http://schemas.openxmlformats.org/drawingml/2006/main">
@@ -33808,7 +33637,7 @@
                 <a:ea typeface="Consolas"/>
                 <a:cs typeface="Consolas"/>
               </a:rPr>
-              <a:t>Cout = (A AND B) OR</a:t>
+              <a:t>S=0 selects A; S=1 selects B</a:t>
             </a:r>
           </a:p>
           <a:p xmlns:a="http://schemas.openxmlformats.org/drawingml/2006/main">
@@ -33841,7 +33670,7 @@
                 <a:ea typeface="Consolas"/>
                 <a:cs typeface="Consolas"/>
               </a:rPr>
-              <a:t>       (Cin AND (A XOR B))</a:t>
+              <a:t>A=0, B=1, S=1: output = ?</a:t>
             </a:r>
           </a:p>
           <a:p xmlns:a="http://schemas.openxmlformats.org/drawingml/2006/main">
@@ -33891,7 +33720,7 @@
                 <a:ea typeface="Consolas"/>
                 <a:cs typeface="Consolas"/>
               </a:rPr>
-              <a:t>A=1, B=1, Cin=0:</a:t>
+              <a:t>2-to-4 active-high decoder:</a:t>
             </a:r>
           </a:p>
           <a:p xmlns:a="http://schemas.openxmlformats.org/drawingml/2006/main">
@@ -33924,7 +33753,24 @@
                 <a:ea typeface="Consolas"/>
                 <a:cs typeface="Consolas"/>
               </a:rPr>
-              <a:t>Sum = ?</a:t>
+              <a:t>input 10₂: selected line = ?</a:t>
+            </a:r>
+          </a:p>
+          <a:p xmlns:a="http://schemas.openxmlformats.org/drawingml/2006/main">
+            <a:pPr marL="0" indent="0">
+              <a:lnSpc>
+                <a:spcPct val="112000"/>
+              </a:lnSpc>
+              <a:spcBef>
+                <a:spcPts val="0"/>
+              </a:spcBef>
+              <a:spcAft>
+                <a:spcPts val="0"/>
+              </a:spcAft>
+              <a:buNone/>
+            </a:pPr>
+            <a:r>
+              <a:t/>
             </a:r>
           </a:p>
           <a:p xmlns:a="http://schemas.openxmlformats.org/drawingml/2006/main">
@@ -33957,7 +33803,7 @@
                 <a:ea typeface="Consolas"/>
                 <a:cs typeface="Consolas"/>
               </a:rPr>
-              <a:t>Cout = ?</a:t>
+              <a:t>8-input MUX: selector bits = ?</a:t>
             </a:r>
           </a:p>
         </p:txBody>
@@ -33967,7 +33813,7 @@
           <p:cNvPr id="534" name="Takeaway">
             <a:extLst xmlns:a="http://schemas.openxmlformats.org/drawingml/2006/main">
               <a:ext uri="{FF2B5EF4-FFF2-40B4-BE49-F238E27FC236}">
-                <a16:creationId xmlns:a16="http://schemas.microsoft.com/office/drawing/2014/main" id="{58AB3541-69CC-4A88-923F-9B809C265791}"/>
+                <a16:creationId xmlns:a16="http://schemas.microsoft.com/office/drawing/2014/main" id="{F17046B0-78C9-4EC1-A554-5D1D52BB4857}"/>
               </a:ext>
             </a:extLst>
           </p:cNvPr>
@@ -34125,7 +33971,7 @@
                 <a:ea typeface="Arial"/>
                 <a:cs typeface="Arial"/>
               </a:rPr>
-              <a:t>Timing follows the longest relevant signal path, not just the number of gates drawn.</a:t>
+              <a:t>For 2^n MUX inputs, n selector bits are needed.</a:t>
             </a:r>
           </a:p>
         </p:txBody>
@@ -34636,7 +34482,7 @@
                 <a:ea typeface="Arial"/>
                 <a:cs typeface="Arial"/>
               </a:rPr>
-              <a:t>MUXes select; decoders identify</a:t>
+              <a:t>Combinational logic versus stored state</a:t>
             </a:r>
           </a:p>
         </p:txBody>
@@ -34872,7 +34718,7 @@
                 <a:ea typeface="Arial"/>
                 <a:cs typeface="Arial"/>
               </a:rPr>
-              <a:t>A multiplexer routes one selected input to its output.</a:t>
+              <a:t>Combinational output depends on current inputs. Sequential behavior also depends on saved state.</a:t>
             </a:r>
           </a:p>
           <a:p xmlns:a="http://schemas.openxmlformats.org/drawingml/2006/main">
@@ -34922,57 +34768,7 @@
                 <a:ea typeface="Arial"/>
                 <a:cs typeface="Arial"/>
               </a:rPr>
-              <a:t>A decoder translates a binary input into a selected output line.</a:t>
-            </a:r>
-          </a:p>
-          <a:p xmlns:a="http://schemas.openxmlformats.org/drawingml/2006/main">
-            <a:pPr marL="0" indent="0">
-              <a:lnSpc>
-                <a:spcPct val="112000"/>
-              </a:lnSpc>
-              <a:spcBef>
-                <a:spcPts val="0"/>
-              </a:spcBef>
-              <a:spcAft>
-                <a:spcPts val="0"/>
-              </a:spcAft>
-              <a:buNone/>
-            </a:pPr>
-            <a:r>
-              <a:t/>
-            </a:r>
-          </a:p>
-          <a:p xmlns:a="http://schemas.openxmlformats.org/drawingml/2006/main">
-            <a:pPr marL="0" indent="0">
-              <a:lnSpc>
-                <a:spcPct val="112000"/>
-              </a:lnSpc>
-              <a:spcBef>
-                <a:spcPts val="0"/>
-              </a:spcBef>
-              <a:spcAft>
-                <a:spcPts val="0"/>
-              </a:spcAft>
-              <a:buNone/>
-              <a:defRPr sz="1875">
-                <a:solidFill>
-                  <a:srgbClr val="FFFFFF"/>
-                </a:solidFill>
-                <a:latin typeface="Arial"/>
-                <a:ea typeface="Arial"/>
-                <a:cs typeface="Arial"/>
-              </a:defRPr>
-            </a:pPr>
-            <a:r>
-              <a:rPr sz="1875">
-                <a:solidFill>
-                  <a:srgbClr val="FFFFFF"/>
-                </a:solidFill>
-                <a:latin typeface="Arial"/>
-                <a:ea typeface="Arial"/>
-                <a:cs typeface="Arial"/>
-              </a:rPr>
-              <a:t>They help choose operands, operations, and memory locations.</a:t>
+              <a:t>A D latch follows D while enabled, then holds its value. A D flip-flop samples D at its active clock edge.</a:t>
             </a:r>
           </a:p>
         </p:txBody>
@@ -35208,7 +35004,24 @@
                 <a:ea typeface="Consolas"/>
                 <a:cs typeface="Consolas"/>
               </a:rPr>
-              <a:t>2-to-1 MUX:</a:t>
+              <a:t>Rising-edge D flip-flop:</a:t>
+            </a:r>
+          </a:p>
+          <a:p xmlns:a="http://schemas.openxmlformats.org/drawingml/2006/main">
+            <a:pPr marL="0" indent="0">
+              <a:lnSpc>
+                <a:spcPct val="112000"/>
+              </a:lnSpc>
+              <a:spcBef>
+                <a:spcPts val="0"/>
+              </a:spcBef>
+              <a:spcAft>
+                <a:spcPts val="0"/>
+              </a:spcAft>
+              <a:buNone/>
+            </a:pPr>
+            <a:r>
+              <a:t/>
             </a:r>
           </a:p>
           <a:p xmlns:a="http://schemas.openxmlformats.org/drawingml/2006/main">
@@ -35241,7 +35054,7 @@
                 <a:ea typeface="Consolas"/>
                 <a:cs typeface="Consolas"/>
               </a:rPr>
-              <a:t>S=0 selects A; S=1 selects B</a:t>
+              <a:t>Q starts at 0.</a:t>
             </a:r>
           </a:p>
           <a:p xmlns:a="http://schemas.openxmlformats.org/drawingml/2006/main">
@@ -35274,24 +35087,7 @@
                 <a:ea typeface="Consolas"/>
                 <a:cs typeface="Consolas"/>
               </a:rPr>
-              <a:t>A=0, B=1, S=1: output = ?</a:t>
-            </a:r>
-          </a:p>
-          <a:p xmlns:a="http://schemas.openxmlformats.org/drawingml/2006/main">
-            <a:pPr marL="0" indent="0">
-              <a:lnSpc>
-                <a:spcPct val="112000"/>
-              </a:lnSpc>
-              <a:spcBef>
-                <a:spcPts val="0"/>
-              </a:spcBef>
-              <a:spcAft>
-                <a:spcPts val="0"/>
-              </a:spcAft>
-              <a:buNone/>
-            </a:pPr>
-            <a:r>
-              <a:t/>
+              <a:t>D changes to 1 between clock edges.</a:t>
             </a:r>
           </a:p>
           <a:p xmlns:a="http://schemas.openxmlformats.org/drawingml/2006/main">
@@ -35324,7 +35120,7 @@
                 <a:ea typeface="Consolas"/>
                 <a:cs typeface="Consolas"/>
               </a:rPr>
-              <a:t>2-to-4 active-high decoder:</a:t>
+              <a:t>Before the next rising edge: Q = ?</a:t>
             </a:r>
           </a:p>
           <a:p xmlns:a="http://schemas.openxmlformats.org/drawingml/2006/main">
@@ -35357,57 +35153,7 @@
                 <a:ea typeface="Consolas"/>
                 <a:cs typeface="Consolas"/>
               </a:rPr>
-              <a:t>input 10₂: selected line = ?</a:t>
-            </a:r>
-          </a:p>
-          <a:p xmlns:a="http://schemas.openxmlformats.org/drawingml/2006/main">
-            <a:pPr marL="0" indent="0">
-              <a:lnSpc>
-                <a:spcPct val="112000"/>
-              </a:lnSpc>
-              <a:spcBef>
-                <a:spcPts val="0"/>
-              </a:spcBef>
-              <a:spcAft>
-                <a:spcPts val="0"/>
-              </a:spcAft>
-              <a:buNone/>
-            </a:pPr>
-            <a:r>
-              <a:t/>
-            </a:r>
-          </a:p>
-          <a:p xmlns:a="http://schemas.openxmlformats.org/drawingml/2006/main">
-            <a:pPr marL="0" indent="0">
-              <a:lnSpc>
-                <a:spcPct val="112000"/>
-              </a:lnSpc>
-              <a:spcBef>
-                <a:spcPts val="0"/>
-              </a:spcBef>
-              <a:spcAft>
-                <a:spcPts val="0"/>
-              </a:spcAft>
-              <a:buNone/>
-              <a:defRPr sz="1800">
-                <a:solidFill>
-                  <a:srgbClr val="FFFFFF"/>
-                </a:solidFill>
-                <a:latin typeface="Consolas"/>
-                <a:ea typeface="Consolas"/>
-                <a:cs typeface="Consolas"/>
-              </a:defRPr>
-            </a:pPr>
-            <a:r>
-              <a:rPr sz="1800">
-                <a:solidFill>
-                  <a:srgbClr val="FFFFFF"/>
-                </a:solidFill>
-                <a:latin typeface="Consolas"/>
-                <a:ea typeface="Consolas"/>
-                <a:cs typeface="Consolas"/>
-              </a:rPr>
-              <a:t>8-input MUX: selector bits = ?</a:t>
+              <a:t>At that rising edge: Q becomes ?</a:t>
             </a:r>
           </a:p>
         </p:txBody>
@@ -35417,7 +35163,7 @@
           <p:cNvPr id="534" name="Takeaway">
             <a:extLst xmlns:a="http://schemas.openxmlformats.org/drawingml/2006/main">
               <a:ext uri="{FF2B5EF4-FFF2-40B4-BE49-F238E27FC236}">
-                <a16:creationId xmlns:a16="http://schemas.microsoft.com/office/drawing/2014/main" id="{8FC80085-0CB6-4781-9B2F-EEA24965EDF9}"/>
+                <a16:creationId xmlns:a16="http://schemas.microsoft.com/office/drawing/2014/main" id="{D1D01AC8-92DB-4977-B0A6-ACD730B5B600}"/>
               </a:ext>
             </a:extLst>
           </p:cNvPr>
@@ -35575,7 +35321,7 @@
                 <a:ea typeface="Arial"/>
                 <a:cs typeface="Arial"/>
               </a:rPr>
-              <a:t>For 2^n MUX inputs, n selector bits are needed.</a:t>
+              <a:t>A latch is level-sensitive; a flip-flop is edge-triggered.</a:t>
             </a:r>
           </a:p>
         </p:txBody>
@@ -36086,7 +35832,7 @@
                 <a:ea typeface="Arial"/>
                 <a:cs typeface="Arial"/>
               </a:rPr>
-              <a:t>Combinational logic versus stored state</a:t>
+              <a:t>Short C code: trace the actual values</a:t>
             </a:r>
           </a:p>
         </p:txBody>
@@ -36322,7 +36068,7 @@
                 <a:ea typeface="Arial"/>
                 <a:cs typeface="Arial"/>
               </a:rPr>
-              <a:t>Combinational output depends on current inputs. Sequential behavior also depends on saved state.</a:t>
+              <a:t>The midterm can include short code based on the homework. Trace one iteration at a time.</a:t>
             </a:r>
           </a:p>
           <a:p xmlns:a="http://schemas.openxmlformats.org/drawingml/2006/main">
@@ -36372,7 +36118,57 @@
                 <a:ea typeface="Arial"/>
                 <a:cs typeface="Arial"/>
               </a:rPr>
-              <a:t>A D latch follows D while enabled, then holds its value. A D flip-flop samples D at its active clock edge.</a:t>
+              <a:t>What does this function return for {3, 4, 7, 8}?</a:t>
+            </a:r>
+          </a:p>
+          <a:p xmlns:a="http://schemas.openxmlformats.org/drawingml/2006/main">
+            <a:pPr marL="0" indent="0">
+              <a:lnSpc>
+                <a:spcPct val="112000"/>
+              </a:lnSpc>
+              <a:spcBef>
+                <a:spcPts val="0"/>
+              </a:spcBef>
+              <a:spcAft>
+                <a:spcPts val="0"/>
+              </a:spcAft>
+              <a:buNone/>
+            </a:pPr>
+            <a:r>
+              <a:t/>
+            </a:r>
+          </a:p>
+          <a:p xmlns:a="http://schemas.openxmlformats.org/drawingml/2006/main">
+            <a:pPr marL="0" indent="0">
+              <a:lnSpc>
+                <a:spcPct val="112000"/>
+              </a:lnSpc>
+              <a:spcBef>
+                <a:spcPts val="0"/>
+              </a:spcBef>
+              <a:spcAft>
+                <a:spcPts val="0"/>
+              </a:spcAft>
+              <a:buNone/>
+              <a:defRPr sz="1875">
+                <a:solidFill>
+                  <a:srgbClr val="FFFFFF"/>
+                </a:solidFill>
+                <a:latin typeface="Arial"/>
+                <a:ea typeface="Arial"/>
+                <a:cs typeface="Arial"/>
+              </a:defRPr>
+            </a:pPr>
+            <a:r>
+              <a:rPr sz="1875">
+                <a:solidFill>
+                  <a:srgbClr val="FFFFFF"/>
+                </a:solidFill>
+                <a:latin typeface="Arial"/>
+                <a:ea typeface="Arial"/>
+                <a:cs typeface="Arial"/>
+              </a:rPr>
+              <a:t>What test selects the numbers being added?</a:t>
             </a:r>
           </a:p>
         </p:txBody>
@@ -36608,24 +36404,7 @@
                 <a:ea typeface="Consolas"/>
                 <a:cs typeface="Consolas"/>
               </a:rPr>
-              <a:t>Rising-edge D flip-flop:</a:t>
-            </a:r>
-          </a:p>
-          <a:p xmlns:a="http://schemas.openxmlformats.org/drawingml/2006/main">
-            <a:pPr marL="0" indent="0">
-              <a:lnSpc>
-                <a:spcPct val="112000"/>
-              </a:lnSpc>
-              <a:spcBef>
-                <a:spcPts val="0"/>
-              </a:spcBef>
-              <a:spcAft>
-                <a:spcPts val="0"/>
-              </a:spcAft>
-              <a:buNone/>
-            </a:pPr>
-            <a:r>
-              <a:t/>
+              <a:t>unsigned sum_even(const unsigned *v,</a:t>
             </a:r>
           </a:p>
           <a:p xmlns:a="http://schemas.openxmlformats.org/drawingml/2006/main">
@@ -36658,7 +36437,7 @@
                 <a:ea typeface="Consolas"/>
                 <a:cs typeface="Consolas"/>
               </a:rPr>
-              <a:t>Q starts at 0.</a:t>
+              <a:t>                  unsigned n) {</a:t>
             </a:r>
           </a:p>
           <a:p xmlns:a="http://schemas.openxmlformats.org/drawingml/2006/main">
@@ -36691,7 +36470,7 @@
                 <a:ea typeface="Consolas"/>
                 <a:cs typeface="Consolas"/>
               </a:rPr>
-              <a:t>D changes to 1 between clock edges.</a:t>
+              <a:t>    unsigned total = 0;</a:t>
             </a:r>
           </a:p>
           <a:p xmlns:a="http://schemas.openxmlformats.org/drawingml/2006/main">
@@ -36724,7 +36503,7 @@
                 <a:ea typeface="Consolas"/>
                 <a:cs typeface="Consolas"/>
               </a:rPr>
-              <a:t>Before the next rising edge: Q = ?</a:t>
+              <a:t>    for (unsigned i = 0; i &lt; n; ++i) {</a:t>
             </a:r>
           </a:p>
           <a:p xmlns:a="http://schemas.openxmlformats.org/drawingml/2006/main">
@@ -36757,7 +36536,139 @@
                 <a:ea typeface="Consolas"/>
                 <a:cs typeface="Consolas"/>
               </a:rPr>
-              <a:t>At that rising edge: Q becomes ?</a:t>
+              <a:t>        if ((v[i] &amp; 1u) == 0)</a:t>
+            </a:r>
+          </a:p>
+          <a:p xmlns:a="http://schemas.openxmlformats.org/drawingml/2006/main">
+            <a:pPr marL="0" indent="0">
+              <a:lnSpc>
+                <a:spcPct val="112000"/>
+              </a:lnSpc>
+              <a:spcBef>
+                <a:spcPts val="0"/>
+              </a:spcBef>
+              <a:spcAft>
+                <a:spcPts val="0"/>
+              </a:spcAft>
+              <a:buNone/>
+              <a:defRPr sz="1800">
+                <a:solidFill>
+                  <a:srgbClr val="FFFFFF"/>
+                </a:solidFill>
+                <a:latin typeface="Consolas"/>
+                <a:ea typeface="Consolas"/>
+                <a:cs typeface="Consolas"/>
+              </a:defRPr>
+            </a:pPr>
+            <a:r>
+              <a:rPr sz="1800">
+                <a:solidFill>
+                  <a:srgbClr val="FFFFFF"/>
+                </a:solidFill>
+                <a:latin typeface="Consolas"/>
+                <a:ea typeface="Consolas"/>
+                <a:cs typeface="Consolas"/>
+              </a:rPr>
+              <a:t>            total += v[i];</a:t>
+            </a:r>
+          </a:p>
+          <a:p xmlns:a="http://schemas.openxmlformats.org/drawingml/2006/main">
+            <a:pPr marL="0" indent="0">
+              <a:lnSpc>
+                <a:spcPct val="112000"/>
+              </a:lnSpc>
+              <a:spcBef>
+                <a:spcPts val="0"/>
+              </a:spcBef>
+              <a:spcAft>
+                <a:spcPts val="0"/>
+              </a:spcAft>
+              <a:buNone/>
+              <a:defRPr sz="1800">
+                <a:solidFill>
+                  <a:srgbClr val="FFFFFF"/>
+                </a:solidFill>
+                <a:latin typeface="Consolas"/>
+                <a:ea typeface="Consolas"/>
+                <a:cs typeface="Consolas"/>
+              </a:defRPr>
+            </a:pPr>
+            <a:r>
+              <a:rPr sz="1800">
+                <a:solidFill>
+                  <a:srgbClr val="FFFFFF"/>
+                </a:solidFill>
+                <a:latin typeface="Consolas"/>
+                <a:ea typeface="Consolas"/>
+                <a:cs typeface="Consolas"/>
+              </a:rPr>
+              <a:t>    }</a:t>
+            </a:r>
+          </a:p>
+          <a:p xmlns:a="http://schemas.openxmlformats.org/drawingml/2006/main">
+            <a:pPr marL="0" indent="0">
+              <a:lnSpc>
+                <a:spcPct val="112000"/>
+              </a:lnSpc>
+              <a:spcBef>
+                <a:spcPts val="0"/>
+              </a:spcBef>
+              <a:spcAft>
+                <a:spcPts val="0"/>
+              </a:spcAft>
+              <a:buNone/>
+              <a:defRPr sz="1800">
+                <a:solidFill>
+                  <a:srgbClr val="FFFFFF"/>
+                </a:solidFill>
+                <a:latin typeface="Consolas"/>
+                <a:ea typeface="Consolas"/>
+                <a:cs typeface="Consolas"/>
+              </a:defRPr>
+            </a:pPr>
+            <a:r>
+              <a:rPr sz="1800">
+                <a:solidFill>
+                  <a:srgbClr val="FFFFFF"/>
+                </a:solidFill>
+                <a:latin typeface="Consolas"/>
+                <a:ea typeface="Consolas"/>
+                <a:cs typeface="Consolas"/>
+              </a:rPr>
+              <a:t>    return total;</a:t>
+            </a:r>
+          </a:p>
+          <a:p xmlns:a="http://schemas.openxmlformats.org/drawingml/2006/main">
+            <a:pPr marL="0" indent="0">
+              <a:lnSpc>
+                <a:spcPct val="112000"/>
+              </a:lnSpc>
+              <a:spcBef>
+                <a:spcPts val="0"/>
+              </a:spcBef>
+              <a:spcAft>
+                <a:spcPts val="0"/>
+              </a:spcAft>
+              <a:buNone/>
+              <a:defRPr sz="1800">
+                <a:solidFill>
+                  <a:srgbClr val="FFFFFF"/>
+                </a:solidFill>
+                <a:latin typeface="Consolas"/>
+                <a:ea typeface="Consolas"/>
+                <a:cs typeface="Consolas"/>
+              </a:defRPr>
+            </a:pPr>
+            <a:r>
+              <a:rPr sz="1800">
+                <a:solidFill>
+                  <a:srgbClr val="FFFFFF"/>
+                </a:solidFill>
+                <a:latin typeface="Consolas"/>
+                <a:ea typeface="Consolas"/>
+                <a:cs typeface="Consolas"/>
+              </a:rPr>
+              <a:t>}</a:t>
             </a:r>
           </a:p>
         </p:txBody>
@@ -36767,7 +36678,7 @@
           <p:cNvPr id="534" name="Takeaway">
             <a:extLst xmlns:a="http://schemas.openxmlformats.org/drawingml/2006/main">
               <a:ext uri="{FF2B5EF4-FFF2-40B4-BE49-F238E27FC236}">
-                <a16:creationId xmlns:a16="http://schemas.microsoft.com/office/drawing/2014/main" id="{E576E655-4291-46C9-82E1-8BDA563E72CC}"/>
+                <a16:creationId xmlns:a16="http://schemas.microsoft.com/office/drawing/2014/main" id="{5A7C3E5B-5FD1-494C-A7DA-004B59005E54}"/>
               </a:ext>
             </a:extLst>
           </p:cNvPr>
@@ -36925,7 +36836,7 @@
                 <a:ea typeface="Arial"/>
                 <a:cs typeface="Arial"/>
               </a:rPr>
-              <a:t>A latch is level-sensitive; a flip-flop is edge-triggered.</a:t>
+              <a:t>Assume v points to at least n valid elements. No new allocation is needed.</a:t>
             </a:r>
           </a:p>
         </p:txBody>
@@ -37436,7 +37347,7 @@
                 <a:ea typeface="Arial"/>
                 <a:cs typeface="Arial"/>
               </a:rPr>
-              <a:t>Short C code: trace the actual values</a:t>
+              <a:t>Pipelines overlap instructions</a:t>
             </a:r>
           </a:p>
         </p:txBody>
@@ -37672,7 +37583,7 @@
                 <a:ea typeface="Arial"/>
                 <a:cs typeface="Arial"/>
               </a:rPr>
-              <a:t>The midterm can include short code based on the homework. Trace one iteration at a time.</a:t>
+              <a:t>Split instruction work into stages so different instructions can occupy different stages at the same time.</a:t>
             </a:r>
           </a:p>
           <a:p xmlns:a="http://schemas.openxmlformats.org/drawingml/2006/main">
@@ -37722,57 +37633,7 @@
                 <a:ea typeface="Arial"/>
                 <a:cs typeface="Arial"/>
               </a:rPr>
-              <a:t>What does this function return for {3, 4, 7, 8}?</a:t>
-            </a:r>
-          </a:p>
-          <a:p xmlns:a="http://schemas.openxmlformats.org/drawingml/2006/main">
-            <a:pPr marL="0" indent="0">
-              <a:lnSpc>
-                <a:spcPct val="112000"/>
-              </a:lnSpc>
-              <a:spcBef>
-                <a:spcPts val="0"/>
-              </a:spcBef>
-              <a:spcAft>
-                <a:spcPts val="0"/>
-              </a:spcAft>
-              <a:buNone/>
-            </a:pPr>
-            <a:r>
-              <a:t/>
-            </a:r>
-          </a:p>
-          <a:p xmlns:a="http://schemas.openxmlformats.org/drawingml/2006/main">
-            <a:pPr marL="0" indent="0">
-              <a:lnSpc>
-                <a:spcPct val="112000"/>
-              </a:lnSpc>
-              <a:spcBef>
-                <a:spcPts val="0"/>
-              </a:spcBef>
-              <a:spcAft>
-                <a:spcPts val="0"/>
-              </a:spcAft>
-              <a:buNone/>
-              <a:defRPr sz="1875">
-                <a:solidFill>
-                  <a:srgbClr val="FFFFFF"/>
-                </a:solidFill>
-                <a:latin typeface="Arial"/>
-                <a:ea typeface="Arial"/>
-                <a:cs typeface="Arial"/>
-              </a:defRPr>
-            </a:pPr>
-            <a:r>
-              <a:rPr sz="1875">
-                <a:solidFill>
-                  <a:srgbClr val="FFFFFF"/>
-                </a:solidFill>
-                <a:latin typeface="Arial"/>
-                <a:ea typeface="Arial"/>
-                <a:cs typeface="Arial"/>
-              </a:rPr>
-              <a:t>What test selects the numbers being added?</a:t>
+              <a:t>Pipelining improves throughput. It does not mean one instruction finishes instantly.</a:t>
             </a:r>
           </a:p>
         </p:txBody>
@@ -38008,7 +37869,7 @@
                 <a:ea typeface="Consolas"/>
                 <a:cs typeface="Consolas"/>
               </a:rPr>
-              <a:t>unsigned sum_even(const unsigned *v,</a:t>
+              <a:t>IF: fetch the instruction</a:t>
             </a:r>
           </a:p>
           <a:p xmlns:a="http://schemas.openxmlformats.org/drawingml/2006/main">
@@ -38041,7 +37902,7 @@
                 <a:ea typeface="Consolas"/>
                 <a:cs typeface="Consolas"/>
               </a:rPr>
-              <a:t>                  unsigned n) {</a:t>
+              <a:t>ID: decode and read registers</a:t>
             </a:r>
           </a:p>
           <a:p xmlns:a="http://schemas.openxmlformats.org/drawingml/2006/main">
@@ -38074,7 +37935,7 @@
                 <a:ea typeface="Consolas"/>
                 <a:cs typeface="Consolas"/>
               </a:rPr>
-              <a:t>    unsigned total = 0;</a:t>
+              <a:t>EX: compute or calculate an address</a:t>
             </a:r>
           </a:p>
           <a:p xmlns:a="http://schemas.openxmlformats.org/drawingml/2006/main">
@@ -38107,7 +37968,7 @@
                 <a:ea typeface="Consolas"/>
                 <a:cs typeface="Consolas"/>
               </a:rPr>
-              <a:t>    for (unsigned i = 0; i &lt; n; ++i) {</a:t>
+              <a:t>MA: access memory</a:t>
             </a:r>
           </a:p>
           <a:p xmlns:a="http://schemas.openxmlformats.org/drawingml/2006/main">
@@ -38140,7 +38001,24 @@
                 <a:ea typeface="Consolas"/>
                 <a:cs typeface="Consolas"/>
               </a:rPr>
-              <a:t>        if ((v[i] &amp; 1u) == 0)</a:t>
+              <a:t>WB: write the result</a:t>
+            </a:r>
+          </a:p>
+          <a:p xmlns:a="http://schemas.openxmlformats.org/drawingml/2006/main">
+            <a:pPr marL="0" indent="0">
+              <a:lnSpc>
+                <a:spcPct val="112000"/>
+              </a:lnSpc>
+              <a:spcBef>
+                <a:spcPts val="0"/>
+              </a:spcBef>
+              <a:spcAft>
+                <a:spcPts val="0"/>
+              </a:spcAft>
+              <a:buNone/>
+            </a:pPr>
+            <a:r>
+              <a:t/>
             </a:r>
           </a:p>
           <a:p xmlns:a="http://schemas.openxmlformats.org/drawingml/2006/main">
@@ -38173,7 +38051,7 @@
                 <a:ea typeface="Consolas"/>
                 <a:cs typeface="Consolas"/>
               </a:rPr>
-              <a:t>            total += v[i];</a:t>
+              <a:t>Ideal 5-stage pipeline, 4 instructions:</a:t>
             </a:r>
           </a:p>
           <a:p xmlns:a="http://schemas.openxmlformats.org/drawingml/2006/main">
@@ -38206,73 +38084,7 @@
                 <a:ea typeface="Consolas"/>
                 <a:cs typeface="Consolas"/>
               </a:rPr>
-              <a:t>    }</a:t>
-            </a:r>
-          </a:p>
-          <a:p xmlns:a="http://schemas.openxmlformats.org/drawingml/2006/main">
-            <a:pPr marL="0" indent="0">
-              <a:lnSpc>
-                <a:spcPct val="112000"/>
-              </a:lnSpc>
-              <a:spcBef>
-                <a:spcPts val="0"/>
-              </a:spcBef>
-              <a:spcAft>
-                <a:spcPts val="0"/>
-              </a:spcAft>
-              <a:buNone/>
-              <a:defRPr sz="1800">
-                <a:solidFill>
-                  <a:srgbClr val="FFFFFF"/>
-                </a:solidFill>
-                <a:latin typeface="Consolas"/>
-                <a:ea typeface="Consolas"/>
-                <a:cs typeface="Consolas"/>
-              </a:defRPr>
-            </a:pPr>
-            <a:r>
-              <a:rPr sz="1800">
-                <a:solidFill>
-                  <a:srgbClr val="FFFFFF"/>
-                </a:solidFill>
-                <a:latin typeface="Consolas"/>
-                <a:ea typeface="Consolas"/>
-                <a:cs typeface="Consolas"/>
-              </a:rPr>
-              <a:t>    return total;</a:t>
-            </a:r>
-          </a:p>
-          <a:p xmlns:a="http://schemas.openxmlformats.org/drawingml/2006/main">
-            <a:pPr marL="0" indent="0">
-              <a:lnSpc>
-                <a:spcPct val="112000"/>
-              </a:lnSpc>
-              <a:spcBef>
-                <a:spcPts val="0"/>
-              </a:spcBef>
-              <a:spcAft>
-                <a:spcPts val="0"/>
-              </a:spcAft>
-              <a:buNone/>
-              <a:defRPr sz="1800">
-                <a:solidFill>
-                  <a:srgbClr val="FFFFFF"/>
-                </a:solidFill>
-                <a:latin typeface="Consolas"/>
-                <a:ea typeface="Consolas"/>
-                <a:cs typeface="Consolas"/>
-              </a:defRPr>
-            </a:pPr>
-            <a:r>
-              <a:rPr sz="1800">
-                <a:solidFill>
-                  <a:srgbClr val="FFFFFF"/>
-                </a:solidFill>
-                <a:latin typeface="Consolas"/>
-                <a:ea typeface="Consolas"/>
-                <a:cs typeface="Consolas"/>
-              </a:rPr>
-              <a:t>}</a:t>
+              <a:t>cycles = 5 + 4 − 1 = ?</a:t>
             </a:r>
           </a:p>
         </p:txBody>
@@ -38282,7 +38094,7 @@
           <p:cNvPr id="534" name="Takeaway">
             <a:extLst xmlns:a="http://schemas.openxmlformats.org/drawingml/2006/main">
               <a:ext uri="{FF2B5EF4-FFF2-40B4-BE49-F238E27FC236}">
-                <a16:creationId xmlns:a16="http://schemas.microsoft.com/office/drawing/2014/main" id="{B36847A7-6E6B-48F5-9CE6-A3EA048B512F}"/>
+                <a16:creationId xmlns:a16="http://schemas.microsoft.com/office/drawing/2014/main" id="{0C7D2F76-9BB1-4AE2-A1C1-CDAB525EBD31}"/>
               </a:ext>
             </a:extLst>
           </p:cNvPr>
@@ -38440,7 +38252,7 @@
                 <a:ea typeface="Arial"/>
                 <a:cs typeface="Arial"/>
               </a:rPr>
-              <a:t>Assume v points to at least n valid elements. No new allocation is needed.</a:t>
+              <a:t>Assume one cycle per stage, no hazards, and a single issue per cycle.</a:t>
             </a:r>
           </a:p>
         </p:txBody>
@@ -38951,7 +38763,7 @@
                 <a:ea typeface="Arial"/>
                 <a:cs typeface="Arial"/>
               </a:rPr>
-              <a:t>Pipelines overlap instructions</a:t>
+              <a:t>Dependencies can force a wait</a:t>
             </a:r>
           </a:p>
         </p:txBody>
@@ -39187,7 +38999,7 @@
                 <a:ea typeface="Arial"/>
                 <a:cs typeface="Arial"/>
               </a:rPr>
-              <a:t>Split instruction work into stages so different instructions can occupy different stages at the same time.</a:t>
+              <a:t>A data hazard occurs when an instruction needs a result that is not ready. Forwarding can deliver a result before normal writeback; some cases still need a stall.</a:t>
             </a:r>
           </a:p>
           <a:p xmlns:a="http://schemas.openxmlformats.org/drawingml/2006/main">
@@ -39237,7 +39049,7 @@
                 <a:ea typeface="Arial"/>
                 <a:cs typeface="Arial"/>
               </a:rPr>
-              <a:t>Pipelining improves throughput. It does not mean one instruction finishes instantly.</a:t>
+              <a:t>A control hazard comes from uncertainty about the next instruction address.</a:t>
             </a:r>
           </a:p>
         </p:txBody>
@@ -39473,7 +39285,7 @@
                 <a:ea typeface="Consolas"/>
                 <a:cs typeface="Consolas"/>
               </a:rPr>
-              <a:t>IF: fetch the instruction</a:t>
+              <a:t># Data dependency on rax</a:t>
             </a:r>
           </a:p>
           <a:p xmlns:a="http://schemas.openxmlformats.org/drawingml/2006/main">
@@ -39506,7 +39318,7 @@
                 <a:ea typeface="Consolas"/>
                 <a:cs typeface="Consolas"/>
               </a:rPr>
-              <a:t>ID: decode and read registers</a:t>
+              <a:t>movq (%rdi), %rax</a:t>
             </a:r>
           </a:p>
           <a:p xmlns:a="http://schemas.openxmlformats.org/drawingml/2006/main">
@@ -39539,7 +39351,24 @@
                 <a:ea typeface="Consolas"/>
                 <a:cs typeface="Consolas"/>
               </a:rPr>
-              <a:t>EX: compute or calculate an address</a:t>
+              <a:t>addq %rax, %rbx</a:t>
+            </a:r>
+          </a:p>
+          <a:p xmlns:a="http://schemas.openxmlformats.org/drawingml/2006/main">
+            <a:pPr marL="0" indent="0">
+              <a:lnSpc>
+                <a:spcPct val="112000"/>
+              </a:lnSpc>
+              <a:spcBef>
+                <a:spcPts val="0"/>
+              </a:spcBef>
+              <a:spcAft>
+                <a:spcPts val="0"/>
+              </a:spcAft>
+              <a:buNone/>
+            </a:pPr>
+            <a:r>
+              <a:t/>
             </a:r>
           </a:p>
           <a:p xmlns:a="http://schemas.openxmlformats.org/drawingml/2006/main">
@@ -39572,7 +39401,7 @@
                 <a:ea typeface="Consolas"/>
                 <a:cs typeface="Consolas"/>
               </a:rPr>
-              <a:t>MA: access memory</a:t>
+              <a:t># Control depends on comparison</a:t>
             </a:r>
           </a:p>
           <a:p xmlns:a="http://schemas.openxmlformats.org/drawingml/2006/main">
@@ -39605,24 +39434,7 @@
                 <a:ea typeface="Consolas"/>
                 <a:cs typeface="Consolas"/>
               </a:rPr>
-              <a:t>WB: write the result</a:t>
-            </a:r>
-          </a:p>
-          <a:p xmlns:a="http://schemas.openxmlformats.org/drawingml/2006/main">
-            <a:pPr marL="0" indent="0">
-              <a:lnSpc>
-                <a:spcPct val="112000"/>
-              </a:lnSpc>
-              <a:spcBef>
-                <a:spcPts val="0"/>
-              </a:spcBef>
-              <a:spcAft>
-                <a:spcPts val="0"/>
-              </a:spcAft>
-              <a:buNone/>
-            </a:pPr>
-            <a:r>
-              <a:t/>
+              <a:t>cmpq $0, %rax</a:t>
             </a:r>
           </a:p>
           <a:p xmlns:a="http://schemas.openxmlformats.org/drawingml/2006/main">
@@ -39655,40 +39467,7 @@
                 <a:ea typeface="Consolas"/>
                 <a:cs typeface="Consolas"/>
               </a:rPr>
-              <a:t>Ideal 5-stage pipeline, 4 instructions:</a:t>
-            </a:r>
-          </a:p>
-          <a:p xmlns:a="http://schemas.openxmlformats.org/drawingml/2006/main">
-            <a:pPr marL="0" indent="0">
-              <a:lnSpc>
-                <a:spcPct val="112000"/>
-              </a:lnSpc>
-              <a:spcBef>
-                <a:spcPts val="0"/>
-              </a:spcBef>
-              <a:spcAft>
-                <a:spcPts val="0"/>
-              </a:spcAft>
-              <a:buNone/>
-              <a:defRPr sz="1800">
-                <a:solidFill>
-                  <a:srgbClr val="FFFFFF"/>
-                </a:solidFill>
-                <a:latin typeface="Consolas"/>
-                <a:ea typeface="Consolas"/>
-                <a:cs typeface="Consolas"/>
-              </a:defRPr>
-            </a:pPr>
-            <a:r>
-              <a:rPr sz="1800">
-                <a:solidFill>
-                  <a:srgbClr val="FFFFFF"/>
-                </a:solidFill>
-                <a:latin typeface="Consolas"/>
-                <a:ea typeface="Consolas"/>
-                <a:cs typeface="Consolas"/>
-              </a:rPr>
-              <a:t>cycles = 5 + 4 − 1 = ?</a:t>
+              <a:t>je zero_case</a:t>
             </a:r>
           </a:p>
         </p:txBody>
@@ -39698,7 +39477,7 @@
           <p:cNvPr id="534" name="Takeaway">
             <a:extLst xmlns:a="http://schemas.openxmlformats.org/drawingml/2006/main">
               <a:ext uri="{FF2B5EF4-FFF2-40B4-BE49-F238E27FC236}">
-                <a16:creationId xmlns:a16="http://schemas.microsoft.com/office/drawing/2014/main" id="{86129679-6608-40DA-91B3-2AD17D917755}"/>
+                <a16:creationId xmlns:a16="http://schemas.microsoft.com/office/drawing/2014/main" id="{1D06A9A1-7462-4FBC-B2E5-F304ADF780EC}"/>
               </a:ext>
             </a:extLst>
           </p:cNvPr>
@@ -39856,7 +39635,7 @@
                 <a:ea typeface="Arial"/>
                 <a:cs typeface="Arial"/>
               </a:rPr>
-              <a:t>Assume one cycle per stage, no hazards, and a single issue per cycle.</a:t>
+              <a:t>Forwarding cannot provide a value before the earlier instruction has produced it.</a:t>
             </a:r>
           </a:p>
         </p:txBody>
@@ -40367,7 +40146,7 @@
                 <a:ea typeface="Arial"/>
                 <a:cs typeface="Arial"/>
               </a:rPr>
-              <a:t>Dependencies can force a wait</a:t>
+              <a:t>Final check: explain the difference</a:t>
             </a:r>
           </a:p>
         </p:txBody>
@@ -40603,7 +40382,7 @@
                 <a:ea typeface="Arial"/>
                 <a:cs typeface="Arial"/>
               </a:rPr>
-              <a:t>A data hazard occurs when an instruction needs a result that is not ready. Forwarding can deliver a result before normal writeback; some cases still need a stall.</a:t>
+              <a:t>Give one clear sentence for each pair.</a:t>
             </a:r>
           </a:p>
           <a:p xmlns:a="http://schemas.openxmlformats.org/drawingml/2006/main">
@@ -40653,7 +40432,57 @@
                 <a:ea typeface="Arial"/>
                 <a:cs typeface="Arial"/>
               </a:rPr>
-              <a:t>A control hazard comes from uncertainty about the next instruction address.</a:t>
+              <a:t>An answer should name what changes and what stays the same.</a:t>
+            </a:r>
+          </a:p>
+          <a:p xmlns:a="http://schemas.openxmlformats.org/drawingml/2006/main">
+            <a:pPr marL="0" indent="0">
+              <a:lnSpc>
+                <a:spcPct val="112000"/>
+              </a:lnSpc>
+              <a:spcBef>
+                <a:spcPts val="0"/>
+              </a:spcBef>
+              <a:spcAft>
+                <a:spcPts val="0"/>
+              </a:spcAft>
+              <a:buNone/>
+            </a:pPr>
+            <a:r>
+              <a:t/>
+            </a:r>
+          </a:p>
+          <a:p xmlns:a="http://schemas.openxmlformats.org/drawingml/2006/main">
+            <a:pPr marL="0" indent="0">
+              <a:lnSpc>
+                <a:spcPct val="112000"/>
+              </a:lnSpc>
+              <a:spcBef>
+                <a:spcPts val="0"/>
+              </a:spcBef>
+              <a:spcAft>
+                <a:spcPts val="0"/>
+              </a:spcAft>
+              <a:buNone/>
+              <a:defRPr sz="1875">
+                <a:solidFill>
+                  <a:srgbClr val="FFFFFF"/>
+                </a:solidFill>
+                <a:latin typeface="Arial"/>
+                <a:ea typeface="Arial"/>
+                <a:cs typeface="Arial"/>
+              </a:defRPr>
+            </a:pPr>
+            <a:r>
+              <a:rPr sz="1875">
+                <a:solidFill>
+                  <a:srgbClr val="FFFFFF"/>
+                </a:solidFill>
+                <a:latin typeface="Arial"/>
+                <a:ea typeface="Arial"/>
+                <a:cs typeface="Arial"/>
+              </a:rPr>
+              <a:t>Then return to the topic you could not explain yet.</a:t>
             </a:r>
           </a:p>
         </p:txBody>
@@ -40889,7 +40718,7 @@
                 <a:ea typeface="Consolas"/>
                 <a:cs typeface="Consolas"/>
               </a:rPr>
-              <a:t># Data dependency on rax</a:t>
+              <a:t>1. Pointer size vs allocation size</a:t>
             </a:r>
           </a:p>
           <a:p xmlns:a="http://schemas.openxmlformats.org/drawingml/2006/main">
@@ -40922,7 +40751,7 @@
                 <a:ea typeface="Consolas"/>
                 <a:cs typeface="Consolas"/>
               </a:rPr>
-              <a:t>movq (%rdi), %rax</a:t>
+              <a:t>2. Address vs contents</a:t>
             </a:r>
           </a:p>
           <a:p xmlns:a="http://schemas.openxmlformats.org/drawingml/2006/main">
@@ -40955,24 +40784,7 @@
                 <a:ea typeface="Consolas"/>
                 <a:cs typeface="Consolas"/>
               </a:rPr>
-              <a:t>addq %rax, %rbx</a:t>
-            </a:r>
-          </a:p>
-          <a:p xmlns:a="http://schemas.openxmlformats.org/drawingml/2006/main">
-            <a:pPr marL="0" indent="0">
-              <a:lnSpc>
-                <a:spcPct val="112000"/>
-              </a:lnSpc>
-              <a:spcBef>
-                <a:spcPts val="0"/>
-              </a:spcBef>
-              <a:spcAft>
-                <a:spcPts val="0"/>
-              </a:spcAft>
-              <a:buNone/>
-            </a:pPr>
-            <a:r>
-              <a:t/>
+              <a:t>3. Stored fraction vs significand</a:t>
             </a:r>
           </a:p>
           <a:p xmlns:a="http://schemas.openxmlformats.org/drawingml/2006/main">
@@ -41005,7 +40817,7 @@
                 <a:ea typeface="Consolas"/>
                 <a:cs typeface="Consolas"/>
               </a:rPr>
-              <a:t># Control depends on comparison</a:t>
+              <a:t>4. Struct vs union</a:t>
             </a:r>
           </a:p>
           <a:p xmlns:a="http://schemas.openxmlformats.org/drawingml/2006/main">
@@ -41038,7 +40850,7 @@
                 <a:ea typeface="Consolas"/>
                 <a:cs typeface="Consolas"/>
               </a:rPr>
-              <a:t>cmpq $0, %rax</a:t>
+              <a:t>5. Stack cleanup vs free</a:t>
             </a:r>
           </a:p>
           <a:p xmlns:a="http://schemas.openxmlformats.org/drawingml/2006/main">
@@ -41071,7 +40883,7 @@
                 <a:ea typeface="Consolas"/>
                 <a:cs typeface="Consolas"/>
               </a:rPr>
-              <a:t>je zero_case</a:t>
+              <a:t>6. Latency vs throughput</a:t>
             </a:r>
           </a:p>
         </p:txBody>
@@ -41081,7 +40893,7 @@
           <p:cNvPr id="534" name="Takeaway">
             <a:extLst xmlns:a="http://schemas.openxmlformats.org/drawingml/2006/main">
               <a:ext uri="{FF2B5EF4-FFF2-40B4-BE49-F238E27FC236}">
-                <a16:creationId xmlns:a16="http://schemas.microsoft.com/office/drawing/2014/main" id="{96B91709-A055-4146-A099-BB7584BBF9AC}"/>
+                <a16:creationId xmlns:a16="http://schemas.microsoft.com/office/drawing/2014/main" id="{3DCC875E-C994-47DD-8827-DA178DF9F15F}"/>
               </a:ext>
             </a:extLst>
           </p:cNvPr>
@@ -41239,7 +41051,7 @@
                 <a:ea typeface="Arial"/>
                 <a:cs typeface="Arial"/>
               </a:rPr>
-              <a:t>Forwarding cannot provide a value before the earlier instruction has produced it.</a:t>
+              <a:t>Use the same reasoning on new numbers and new code.</a:t>
             </a:r>
           </a:p>
         </p:txBody>
@@ -42482,7 +42294,7 @@
           <p:cNvPr id="534" name="Takeaway">
             <a:extLst xmlns:a="http://schemas.openxmlformats.org/drawingml/2006/main">
               <a:ext uri="{FF2B5EF4-FFF2-40B4-BE49-F238E27FC236}">
-                <a16:creationId xmlns:a16="http://schemas.microsoft.com/office/drawing/2014/main" id="{F198C445-5161-454C-96BD-58E9F698CCE8}"/>
+                <a16:creationId xmlns:a16="http://schemas.microsoft.com/office/drawing/2014/main" id="{93D5E809-614D-4AC8-B616-6A30E8EE563A}"/>
               </a:ext>
             </a:extLst>
           </p:cNvPr>
@@ -42641,1422 +42453,6 @@
                 <a:cs typeface="Arial"/>
               </a:rPr>
               <a:t>Registers are close to execution units; they are not megabytes of stack storage.</a:t>
-            </a:r>
-          </a:p>
-        </p:txBody>
-      </p:sp>
-    </p:spTree>
-    <p:extLst>
-      <p:ext uri="{BB962C8B-B14F-4D97-AF65-F5344CB8AC3E}">
-        <p14:creationId xmlns:p14="http://schemas.microsoft.com/office/powerpoint/2010/main" val="3667182145"/>
-      </p:ext>
-    </p:extLst>
-  </p:cSld>
-</p:sld>
-</file>
-
-<file path=ppt/slides/slide30.xml><?xml version="1.0" encoding="utf-8"?>
-<p:sld xmlns:p="http://schemas.openxmlformats.org/presentationml/2006/main">
-  <p:cSld>
-    <p:spTree>
-      <p:nvGrpSpPr>
-        <p:cNvPr id="1" name=""/>
-        <p:cNvGrpSpPr/>
-        <p:nvPr/>
-      </p:nvGrpSpPr>
-      <p:grpSpPr>
-        <a:xfrm xmlns:a="http://schemas.openxmlformats.org/drawingml/2006/main"/>
-      </p:grpSpPr>
-      <p:sp>
-        <p:nvSpPr>
-          <p:cNvPr id="3" name="Footer Placeholder 2">
-            <a:extLst xmlns:a="http://schemas.openxmlformats.org/drawingml/2006/main">
-              <a:ext uri="{FF2B5EF4-FFF2-40B4-BE49-F238E27FC236}">
-                <a16:creationId xmlns:a16="http://schemas.microsoft.com/office/drawing/2014/main" id="{39EA4C82-C623-0196-4A95-876ADF5DEE92}"/>
-              </a:ext>
-            </a:extLst>
-          </p:cNvPr>
-          <p:cNvSpPr>
-            <a:spLocks xmlns:a="http://schemas.openxmlformats.org/drawingml/2006/main" noGrp="1"/>
-          </p:cNvSpPr>
-          <p:nvPr>
-            <p:ph type="ftr" idx="3"/>
-          </p:nvPr>
-        </p:nvSpPr>
-        <p:spPr>
-          <a:xfrm xmlns:a="http://schemas.openxmlformats.org/drawingml/2006/main">
-            <a:off x="393700" y="6279952"/>
-            <a:ext cx="3568700" cy="241240"/>
-          </a:xfrm>
-        </p:spPr>
-        <p:txBody>
-          <a:bodyPr xmlns:a="http://schemas.openxmlformats.org/drawingml/2006/main" lIns="0" tIns="0" rIns="0" bIns="0" anchor="t">
-            <a:noAutofit/>
-          </a:bodyPr>
-          <a:lstStyle xmlns:a="http://schemas.openxmlformats.org/drawingml/2006/main">
-            <a:defPPr>
-              <a:defRPr sz="1125">
-                <a:solidFill>
-                  <a:srgbClr val="FFFFFF"/>
-                </a:solidFill>
-                <a:latin typeface="Arial"/>
-                <a:ea typeface="Arial"/>
-                <a:cs typeface="Arial"/>
-              </a:defRPr>
-            </a:defPPr>
-            <a:lvl1pPr>
-              <a:defRPr sz="1125">
-                <a:solidFill>
-                  <a:srgbClr val="FFFFFF"/>
-                </a:solidFill>
-                <a:latin typeface="Arial"/>
-                <a:ea typeface="Arial"/>
-                <a:cs typeface="Arial"/>
-              </a:defRPr>
-            </a:lvl1pPr>
-            <a:lvl2pPr>
-              <a:defRPr sz="1125">
-                <a:solidFill>
-                  <a:srgbClr val="FFFFFF"/>
-                </a:solidFill>
-                <a:latin typeface="Arial"/>
-                <a:ea typeface="Arial"/>
-                <a:cs typeface="Arial"/>
-              </a:defRPr>
-            </a:lvl2pPr>
-            <a:lvl3pPr>
-              <a:defRPr sz="1125">
-                <a:solidFill>
-                  <a:srgbClr val="FFFFFF"/>
-                </a:solidFill>
-                <a:latin typeface="Arial"/>
-                <a:ea typeface="Arial"/>
-                <a:cs typeface="Arial"/>
-              </a:defRPr>
-            </a:lvl3pPr>
-            <a:lvl4pPr>
-              <a:defRPr sz="1125">
-                <a:solidFill>
-                  <a:srgbClr val="FFFFFF"/>
-                </a:solidFill>
-                <a:latin typeface="Arial"/>
-                <a:ea typeface="Arial"/>
-                <a:cs typeface="Arial"/>
-              </a:defRPr>
-            </a:lvl4pPr>
-            <a:lvl5pPr>
-              <a:defRPr sz="1125">
-                <a:solidFill>
-                  <a:srgbClr val="FFFFFF"/>
-                </a:solidFill>
-                <a:latin typeface="Arial"/>
-                <a:ea typeface="Arial"/>
-                <a:cs typeface="Arial"/>
-              </a:defRPr>
-            </a:lvl5pPr>
-            <a:lvl6pPr>
-              <a:defRPr sz="1125">
-                <a:solidFill>
-                  <a:srgbClr val="FFFFFF"/>
-                </a:solidFill>
-                <a:latin typeface="Arial"/>
-                <a:ea typeface="Arial"/>
-                <a:cs typeface="Arial"/>
-              </a:defRPr>
-            </a:lvl6pPr>
-            <a:lvl7pPr>
-              <a:defRPr sz="1125">
-                <a:solidFill>
-                  <a:srgbClr val="FFFFFF"/>
-                </a:solidFill>
-                <a:latin typeface="Arial"/>
-                <a:ea typeface="Arial"/>
-                <a:cs typeface="Arial"/>
-              </a:defRPr>
-            </a:lvl7pPr>
-            <a:lvl8pPr>
-              <a:defRPr sz="1125">
-                <a:solidFill>
-                  <a:srgbClr val="FFFFFF"/>
-                </a:solidFill>
-                <a:latin typeface="Arial"/>
-                <a:ea typeface="Arial"/>
-                <a:cs typeface="Arial"/>
-              </a:defRPr>
-            </a:lvl8pPr>
-            <a:lvl9pPr>
-              <a:defRPr sz="1125">
-                <a:solidFill>
-                  <a:srgbClr val="FFFFFF"/>
-                </a:solidFill>
-                <a:latin typeface="Arial"/>
-                <a:ea typeface="Arial"/>
-                <a:cs typeface="Arial"/>
-              </a:defRPr>
-            </a:lvl9pPr>
-          </a:lstStyle>
-          <a:p xmlns:a="http://schemas.openxmlformats.org/drawingml/2006/main">
-            <a:pPr marL="0" indent="0">
-              <a:lnSpc>
-                <a:spcPct val="112000"/>
-              </a:lnSpc>
-              <a:spcBef>
-                <a:spcPts val="0"/>
-              </a:spcBef>
-              <a:spcAft>
-                <a:spcPts val="0"/>
-              </a:spcAft>
-              <a:buNone/>
-              <a:defRPr sz="1125">
-                <a:solidFill>
-                  <a:srgbClr val="FFFFFF"/>
-                </a:solidFill>
-                <a:latin typeface="Arial"/>
-                <a:ea typeface="Arial"/>
-                <a:cs typeface="Arial"/>
-              </a:defRPr>
-            </a:pPr>
-            <a:r>
-              <a:rPr sz="1125">
-                <a:solidFill>
-                  <a:srgbClr val="FFFFFF"/>
-                </a:solidFill>
-                <a:latin typeface="Arial"/>
-                <a:ea typeface="Arial"/>
-                <a:cs typeface="Arial"/>
-              </a:rPr>
-              <a:t>CS 211 · Recitation 07</a:t>
-            </a:r>
-          </a:p>
-        </p:txBody>
-      </p:sp>
-      <p:sp>
-        <p:nvSpPr>
-          <p:cNvPr id="532" name="Google Shape;532;p58">
-            <a:extLst xmlns:a="http://schemas.openxmlformats.org/drawingml/2006/main">
-              <a:ext uri="{FF2B5EF4-FFF2-40B4-BE49-F238E27FC236}">
-                <a16:creationId xmlns:a16="http://schemas.microsoft.com/office/drawing/2014/main" id="{1BCBE750-7048-686D-1472-52C53362D6CD}"/>
-              </a:ext>
-            </a:extLst>
-          </p:cNvPr>
-          <p:cNvSpPr>
-            <a:spLocks xmlns:a="http://schemas.openxmlformats.org/drawingml/2006/main" noGrp="1"/>
-          </p:cNvSpPr>
-          <p:nvPr>
-            <p:ph type="sldNum" idx="4"/>
-          </p:nvPr>
-        </p:nvSpPr>
-        <p:spPr>
-          <a:xfrm xmlns:a="http://schemas.openxmlformats.org/drawingml/2006/main">
-            <a:off x="11279332" y="6279294"/>
-            <a:ext cx="518968" cy="241240"/>
-          </a:xfrm>
-        </p:spPr>
-        <p:txBody>
-          <a:bodyPr xmlns:a="http://schemas.openxmlformats.org/drawingml/2006/main" spcFirstLastPara="1" vert="horz" wrap="square" lIns="0" tIns="0" rIns="0" bIns="0" anchor="t">
-            <a:noAutofit/>
-          </a:bodyPr>
-          <a:lstStyle xmlns:a="http://schemas.openxmlformats.org/drawingml/2006/main">
-            <a:defPPr>
-              <a:defRPr sz="1125">
-                <a:solidFill>
-                  <a:srgbClr val="FFFFFF"/>
-                </a:solidFill>
-                <a:latin typeface="Arial"/>
-                <a:ea typeface="Arial"/>
-                <a:cs typeface="Arial"/>
-              </a:defRPr>
-            </a:defPPr>
-            <a:lvl1pPr>
-              <a:defRPr sz="1125">
-                <a:solidFill>
-                  <a:srgbClr val="FFFFFF"/>
-                </a:solidFill>
-                <a:latin typeface="Arial"/>
-                <a:ea typeface="Arial"/>
-                <a:cs typeface="Arial"/>
-              </a:defRPr>
-            </a:lvl1pPr>
-            <a:lvl2pPr>
-              <a:defRPr sz="1125">
-                <a:solidFill>
-                  <a:srgbClr val="FFFFFF"/>
-                </a:solidFill>
-                <a:latin typeface="Arial"/>
-                <a:ea typeface="Arial"/>
-                <a:cs typeface="Arial"/>
-              </a:defRPr>
-            </a:lvl2pPr>
-            <a:lvl3pPr>
-              <a:defRPr sz="1125">
-                <a:solidFill>
-                  <a:srgbClr val="FFFFFF"/>
-                </a:solidFill>
-                <a:latin typeface="Arial"/>
-                <a:ea typeface="Arial"/>
-                <a:cs typeface="Arial"/>
-              </a:defRPr>
-            </a:lvl3pPr>
-            <a:lvl4pPr>
-              <a:defRPr sz="1125">
-                <a:solidFill>
-                  <a:srgbClr val="FFFFFF"/>
-                </a:solidFill>
-                <a:latin typeface="Arial"/>
-                <a:ea typeface="Arial"/>
-                <a:cs typeface="Arial"/>
-              </a:defRPr>
-            </a:lvl4pPr>
-            <a:lvl5pPr>
-              <a:defRPr sz="1125">
-                <a:solidFill>
-                  <a:srgbClr val="FFFFFF"/>
-                </a:solidFill>
-                <a:latin typeface="Arial"/>
-                <a:ea typeface="Arial"/>
-                <a:cs typeface="Arial"/>
-              </a:defRPr>
-            </a:lvl5pPr>
-            <a:lvl6pPr>
-              <a:defRPr sz="1125">
-                <a:solidFill>
-                  <a:srgbClr val="FFFFFF"/>
-                </a:solidFill>
-                <a:latin typeface="Arial"/>
-                <a:ea typeface="Arial"/>
-                <a:cs typeface="Arial"/>
-              </a:defRPr>
-            </a:lvl6pPr>
-            <a:lvl7pPr>
-              <a:defRPr sz="1125">
-                <a:solidFill>
-                  <a:srgbClr val="FFFFFF"/>
-                </a:solidFill>
-                <a:latin typeface="Arial"/>
-                <a:ea typeface="Arial"/>
-                <a:cs typeface="Arial"/>
-              </a:defRPr>
-            </a:lvl7pPr>
-            <a:lvl8pPr>
-              <a:defRPr sz="1125">
-                <a:solidFill>
-                  <a:srgbClr val="FFFFFF"/>
-                </a:solidFill>
-                <a:latin typeface="Arial"/>
-                <a:ea typeface="Arial"/>
-                <a:cs typeface="Arial"/>
-              </a:defRPr>
-            </a:lvl8pPr>
-            <a:lvl9pPr>
-              <a:defRPr sz="1125">
-                <a:solidFill>
-                  <a:srgbClr val="FFFFFF"/>
-                </a:solidFill>
-                <a:latin typeface="Arial"/>
-                <a:ea typeface="Arial"/>
-                <a:cs typeface="Arial"/>
-              </a:defRPr>
-            </a:lvl9pPr>
-          </a:lstStyle>
-          <a:p xmlns:a="http://schemas.openxmlformats.org/drawingml/2006/main">
-            <a:pPr marL="0" indent="0">
-              <a:lnSpc>
-                <a:spcPct val="112000"/>
-              </a:lnSpc>
-              <a:spcBef>
-                <a:spcPts val="0"/>
-              </a:spcBef>
-              <a:spcAft>
-                <a:spcPts val="0"/>
-              </a:spcAft>
-              <a:buNone/>
-              <a:defRPr sz="1125">
-                <a:solidFill>
-                  <a:srgbClr val="FFFFFF"/>
-                </a:solidFill>
-                <a:latin typeface="Arial"/>
-                <a:ea typeface="Arial"/>
-                <a:cs typeface="Arial"/>
-              </a:defRPr>
-            </a:pPr>
-            <a:r>
-              <a:rPr sz="1125">
-                <a:solidFill>
-                  <a:srgbClr val="FFFFFF"/>
-                </a:solidFill>
-                <a:latin typeface="Arial"/>
-                <a:ea typeface="Arial"/>
-                <a:cs typeface="Arial"/>
-              </a:rPr>
-              <a:t>30</a:t>
-            </a:r>
-          </a:p>
-        </p:txBody>
-      </p:sp>
-      <p:sp>
-        <p:nvSpPr>
-          <p:cNvPr id="533" name="Google Shape;533;p58">
-            <a:extLst xmlns:a="http://schemas.openxmlformats.org/drawingml/2006/main">
-              <a:ext uri="{FF2B5EF4-FFF2-40B4-BE49-F238E27FC236}">
-                <a16:creationId xmlns:a16="http://schemas.microsoft.com/office/drawing/2014/main" id="{1B5D55CD-1C17-7CD8-F26A-2DD65B067687}"/>
-              </a:ext>
-            </a:extLst>
-          </p:cNvPr>
-          <p:cNvSpPr>
-            <a:spLocks xmlns:a="http://schemas.openxmlformats.org/drawingml/2006/main" noGrp="1"/>
-          </p:cNvSpPr>
-          <p:nvPr>
-            <p:ph type="title" idx="0"/>
-          </p:nvPr>
-        </p:nvSpPr>
-        <p:spPr>
-          <a:xfrm xmlns:a="http://schemas.openxmlformats.org/drawingml/2006/main">
-            <a:off x="393700" y="344008"/>
-            <a:ext cx="11404600" cy="1047491"/>
-          </a:xfrm>
-        </p:spPr>
-        <p:txBody>
-          <a:bodyPr xmlns:a="http://schemas.openxmlformats.org/drawingml/2006/main" spcFirstLastPara="1" vert="horz" wrap="square" lIns="0" tIns="0" rIns="0" bIns="0" anchor="t">
-            <a:noAutofit/>
-          </a:bodyPr>
-          <a:lstStyle xmlns:a="http://schemas.openxmlformats.org/drawingml/2006/main">
-            <a:defPPr>
-              <a:defRPr sz="3150">
-                <a:solidFill>
-                  <a:srgbClr val="FFFFFF"/>
-                </a:solidFill>
-                <a:latin typeface="Arial"/>
-                <a:ea typeface="Arial"/>
-                <a:cs typeface="Arial"/>
-              </a:defRPr>
-            </a:defPPr>
-            <a:lvl1pPr>
-              <a:defRPr sz="3150">
-                <a:solidFill>
-                  <a:srgbClr val="FFFFFF"/>
-                </a:solidFill>
-                <a:latin typeface="Arial"/>
-                <a:ea typeface="Arial"/>
-                <a:cs typeface="Arial"/>
-              </a:defRPr>
-            </a:lvl1pPr>
-            <a:lvl2pPr>
-              <a:defRPr sz="3150">
-                <a:solidFill>
-                  <a:srgbClr val="FFFFFF"/>
-                </a:solidFill>
-                <a:latin typeface="Arial"/>
-                <a:ea typeface="Arial"/>
-                <a:cs typeface="Arial"/>
-              </a:defRPr>
-            </a:lvl2pPr>
-            <a:lvl3pPr>
-              <a:defRPr sz="3150">
-                <a:solidFill>
-                  <a:srgbClr val="FFFFFF"/>
-                </a:solidFill>
-                <a:latin typeface="Arial"/>
-                <a:ea typeface="Arial"/>
-                <a:cs typeface="Arial"/>
-              </a:defRPr>
-            </a:lvl3pPr>
-            <a:lvl4pPr>
-              <a:defRPr sz="3150">
-                <a:solidFill>
-                  <a:srgbClr val="FFFFFF"/>
-                </a:solidFill>
-                <a:latin typeface="Arial"/>
-                <a:ea typeface="Arial"/>
-                <a:cs typeface="Arial"/>
-              </a:defRPr>
-            </a:lvl4pPr>
-            <a:lvl5pPr>
-              <a:defRPr sz="3150">
-                <a:solidFill>
-                  <a:srgbClr val="FFFFFF"/>
-                </a:solidFill>
-                <a:latin typeface="Arial"/>
-                <a:ea typeface="Arial"/>
-                <a:cs typeface="Arial"/>
-              </a:defRPr>
-            </a:lvl5pPr>
-            <a:lvl6pPr>
-              <a:defRPr sz="3150">
-                <a:solidFill>
-                  <a:srgbClr val="FFFFFF"/>
-                </a:solidFill>
-                <a:latin typeface="Arial"/>
-                <a:ea typeface="Arial"/>
-                <a:cs typeface="Arial"/>
-              </a:defRPr>
-            </a:lvl6pPr>
-            <a:lvl7pPr>
-              <a:defRPr sz="3150">
-                <a:solidFill>
-                  <a:srgbClr val="FFFFFF"/>
-                </a:solidFill>
-                <a:latin typeface="Arial"/>
-                <a:ea typeface="Arial"/>
-                <a:cs typeface="Arial"/>
-              </a:defRPr>
-            </a:lvl7pPr>
-            <a:lvl8pPr>
-              <a:defRPr sz="3150">
-                <a:solidFill>
-                  <a:srgbClr val="FFFFFF"/>
-                </a:solidFill>
-                <a:latin typeface="Arial"/>
-                <a:ea typeface="Arial"/>
-                <a:cs typeface="Arial"/>
-              </a:defRPr>
-            </a:lvl8pPr>
-            <a:lvl9pPr>
-              <a:defRPr sz="3150">
-                <a:solidFill>
-                  <a:srgbClr val="FFFFFF"/>
-                </a:solidFill>
-                <a:latin typeface="Arial"/>
-                <a:ea typeface="Arial"/>
-                <a:cs typeface="Arial"/>
-              </a:defRPr>
-            </a:lvl9pPr>
-          </a:lstStyle>
-          <a:p xmlns:a="http://schemas.openxmlformats.org/drawingml/2006/main">
-            <a:pPr marL="0" indent="0">
-              <a:lnSpc>
-                <a:spcPct val="112000"/>
-              </a:lnSpc>
-              <a:spcBef>
-                <a:spcPts val="0"/>
-              </a:spcBef>
-              <a:spcAft>
-                <a:spcPts val="0"/>
-              </a:spcAft>
-              <a:buNone/>
-              <a:defRPr sz="3150">
-                <a:solidFill>
-                  <a:srgbClr val="FFFFFF"/>
-                </a:solidFill>
-                <a:latin typeface="Arial"/>
-                <a:ea typeface="Arial"/>
-                <a:cs typeface="Arial"/>
-              </a:defRPr>
-            </a:pPr>
-            <a:r>
-              <a:rPr sz="3150">
-                <a:solidFill>
-                  <a:srgbClr val="FFFFFF"/>
-                </a:solidFill>
-                <a:latin typeface="Arial"/>
-                <a:ea typeface="Arial"/>
-                <a:cs typeface="Arial"/>
-              </a:rPr>
-              <a:t>Final check: explain the difference</a:t>
-            </a:r>
-          </a:p>
-        </p:txBody>
-      </p:sp>
-      <p:sp>
-        <p:nvSpPr>
-          <p:cNvPr id="7" name="Google Shape;534;p58">
-            <a:extLst xmlns:a="http://schemas.openxmlformats.org/drawingml/2006/main">
-              <a:ext uri="{FF2B5EF4-FFF2-40B4-BE49-F238E27FC236}">
-                <a16:creationId xmlns:a16="http://schemas.microsoft.com/office/drawing/2014/main" id="{3A923FEE-B8D2-CD3A-ABBD-21770B40AA24}"/>
-              </a:ext>
-            </a:extLst>
-          </p:cNvPr>
-          <p:cNvSpPr>
-            <a:spLocks xmlns:a="http://schemas.openxmlformats.org/drawingml/2006/main" noGrp="1"/>
-          </p:cNvSpPr>
-          <p:nvPr/>
-        </p:nvSpPr>
-        <p:spPr>
-          <a:xfrm xmlns:a="http://schemas.openxmlformats.org/drawingml/2006/main">
-            <a:off x="393700" y="2031999"/>
-            <a:ext cx="5537200" cy="3534787"/>
-          </a:xfrm>
-          <a:prstGeom xmlns:a="http://schemas.openxmlformats.org/drawingml/2006/main" prst="rect">
-            <a:avLst/>
-          </a:prstGeom>
-        </p:spPr>
-        <p:txBody>
-          <a:bodyPr xmlns:a="http://schemas.openxmlformats.org/drawingml/2006/main" spcFirstLastPara="1" vert="horz" wrap="square" lIns="0" tIns="0" rIns="0" bIns="0" anchor="t">
-            <a:noAutofit/>
-          </a:bodyPr>
-          <a:lstStyle xmlns:a="http://schemas.openxmlformats.org/drawingml/2006/main">
-            <a:defPPr>
-              <a:defRPr sz="1875">
-                <a:solidFill>
-                  <a:srgbClr val="FFFFFF"/>
-                </a:solidFill>
-                <a:latin typeface="Arial"/>
-                <a:ea typeface="Arial"/>
-                <a:cs typeface="Arial"/>
-              </a:defRPr>
-            </a:defPPr>
-            <a:lvl1pPr marL="228600" indent="-228600" algn="l" defTabSz="914400">
-              <a:lnSpc>
-                <a:spcPct val="90000"/>
-              </a:lnSpc>
-              <a:spcBef>
-                <a:spcPts val="1000"/>
-              </a:spcBef>
-              <a:buFont typeface="Arial"/>
-              <a:buChar char="•"/>
-              <a:defRPr sz="2400" kern="1200">
-                <a:solidFill>
-                  <a:schemeClr val="tx1"/>
-                </a:solidFill>
-                <a:latin typeface="+mn-lt"/>
-                <a:ea typeface="+mn-lt"/>
-                <a:cs typeface="+mn-lt"/>
-              </a:defRPr>
-            </a:lvl1pPr>
-            <a:lvl2pPr marL="685800" indent="-228600" algn="l" defTabSz="914400">
-              <a:lnSpc>
-                <a:spcPct val="90000"/>
-              </a:lnSpc>
-              <a:spcBef>
-                <a:spcPts val="500"/>
-              </a:spcBef>
-              <a:buFont typeface="Arial"/>
-              <a:buChar char="•"/>
-              <a:defRPr sz="2000" kern="1200">
-                <a:solidFill>
-                  <a:schemeClr val="tx1"/>
-                </a:solidFill>
-                <a:latin typeface="+mn-lt"/>
-                <a:ea typeface="+mn-lt"/>
-                <a:cs typeface="+mn-lt"/>
-              </a:defRPr>
-            </a:lvl2pPr>
-            <a:lvl3pPr marL="1143000" indent="-228600" algn="l" defTabSz="914400">
-              <a:lnSpc>
-                <a:spcPct val="90000"/>
-              </a:lnSpc>
-              <a:spcBef>
-                <a:spcPts val="500"/>
-              </a:spcBef>
-              <a:buFont typeface="Arial"/>
-              <a:buChar char="•"/>
-              <a:defRPr sz="1800" kern="1200">
-                <a:solidFill>
-                  <a:schemeClr val="tx1"/>
-                </a:solidFill>
-                <a:latin typeface="+mn-lt"/>
-                <a:ea typeface="+mn-lt"/>
-                <a:cs typeface="+mn-lt"/>
-              </a:defRPr>
-            </a:lvl3pPr>
-            <a:lvl4pPr marL="1600200" indent="-228600" algn="l" defTabSz="914400">
-              <a:lnSpc>
-                <a:spcPct val="90000"/>
-              </a:lnSpc>
-              <a:spcBef>
-                <a:spcPts val="500"/>
-              </a:spcBef>
-              <a:buFont typeface="Arial"/>
-              <a:buChar char="•"/>
-              <a:defRPr sz="1800" kern="1200">
-                <a:solidFill>
-                  <a:schemeClr val="tx1"/>
-                </a:solidFill>
-                <a:latin typeface="+mn-lt"/>
-                <a:ea typeface="+mn-lt"/>
-                <a:cs typeface="+mn-lt"/>
-              </a:defRPr>
-            </a:lvl4pPr>
-            <a:lvl5pPr marL="2057400" indent="-228600" algn="l" defTabSz="914400">
-              <a:lnSpc>
-                <a:spcPct val="90000"/>
-              </a:lnSpc>
-              <a:spcBef>
-                <a:spcPts val="500"/>
-              </a:spcBef>
-              <a:buFont typeface="Arial"/>
-              <a:buChar char="•"/>
-              <a:defRPr sz="1800" kern="1200">
-                <a:solidFill>
-                  <a:schemeClr val="tx1"/>
-                </a:solidFill>
-                <a:latin typeface="+mn-lt"/>
-                <a:ea typeface="+mn-lt"/>
-                <a:cs typeface="+mn-lt"/>
-              </a:defRPr>
-            </a:lvl5pPr>
-            <a:lvl6pPr marL="2514600" indent="-228600" algn="l" defTabSz="914400">
-              <a:lnSpc>
-                <a:spcPct val="90000"/>
-              </a:lnSpc>
-              <a:spcBef>
-                <a:spcPts val="500"/>
-              </a:spcBef>
-              <a:buFont typeface="Arial"/>
-              <a:buChar char="•"/>
-              <a:defRPr sz="1800" kern="1200">
-                <a:solidFill>
-                  <a:schemeClr val="tx1"/>
-                </a:solidFill>
-                <a:latin typeface="+mn-lt"/>
-                <a:ea typeface="+mn-lt"/>
-                <a:cs typeface="+mn-lt"/>
-              </a:defRPr>
-            </a:lvl6pPr>
-            <a:lvl7pPr marL="2971800" indent="-228600" algn="l" defTabSz="914400">
-              <a:lnSpc>
-                <a:spcPct val="90000"/>
-              </a:lnSpc>
-              <a:spcBef>
-                <a:spcPts val="500"/>
-              </a:spcBef>
-              <a:buFont typeface="Arial"/>
-              <a:buChar char="•"/>
-              <a:defRPr sz="1800" kern="1200">
-                <a:solidFill>
-                  <a:schemeClr val="tx1"/>
-                </a:solidFill>
-                <a:latin typeface="+mn-lt"/>
-                <a:ea typeface="+mn-lt"/>
-                <a:cs typeface="+mn-lt"/>
-              </a:defRPr>
-            </a:lvl7pPr>
-            <a:lvl8pPr marL="3429000" indent="-228600" algn="l" defTabSz="914400">
-              <a:lnSpc>
-                <a:spcPct val="90000"/>
-              </a:lnSpc>
-              <a:spcBef>
-                <a:spcPts val="500"/>
-              </a:spcBef>
-              <a:buFont typeface="Arial"/>
-              <a:buChar char="•"/>
-              <a:defRPr sz="1800" kern="1200">
-                <a:solidFill>
-                  <a:schemeClr val="tx1"/>
-                </a:solidFill>
-                <a:latin typeface="+mn-lt"/>
-                <a:ea typeface="+mn-lt"/>
-                <a:cs typeface="+mn-lt"/>
-              </a:defRPr>
-            </a:lvl8pPr>
-            <a:lvl9pPr marL="3886200" indent="-228600" algn="l" defTabSz="914400">
-              <a:lnSpc>
-                <a:spcPct val="90000"/>
-              </a:lnSpc>
-              <a:spcBef>
-                <a:spcPts val="500"/>
-              </a:spcBef>
-              <a:buFont typeface="Arial"/>
-              <a:buChar char="•"/>
-              <a:defRPr sz="1800" kern="1200">
-                <a:solidFill>
-                  <a:schemeClr val="tx1"/>
-                </a:solidFill>
-                <a:latin typeface="+mn-lt"/>
-                <a:ea typeface="+mn-lt"/>
-                <a:cs typeface="+mn-lt"/>
-              </a:defRPr>
-            </a:lvl9pPr>
-          </a:lstStyle>
-          <a:p xmlns:a="http://schemas.openxmlformats.org/drawingml/2006/main">
-            <a:pPr marL="0" indent="0">
-              <a:lnSpc>
-                <a:spcPct val="112000"/>
-              </a:lnSpc>
-              <a:spcBef>
-                <a:spcPts val="0"/>
-              </a:spcBef>
-              <a:spcAft>
-                <a:spcPts val="0"/>
-              </a:spcAft>
-              <a:buNone/>
-              <a:defRPr sz="1875">
-                <a:solidFill>
-                  <a:srgbClr val="FFFFFF"/>
-                </a:solidFill>
-                <a:latin typeface="Arial"/>
-                <a:ea typeface="Arial"/>
-                <a:cs typeface="Arial"/>
-              </a:defRPr>
-            </a:pPr>
-            <a:r>
-              <a:rPr sz="1875">
-                <a:solidFill>
-                  <a:srgbClr val="FFFFFF"/>
-                </a:solidFill>
-                <a:latin typeface="Arial"/>
-                <a:ea typeface="Arial"/>
-                <a:cs typeface="Arial"/>
-              </a:rPr>
-              <a:t>Give one clear sentence for each pair.</a:t>
-            </a:r>
-          </a:p>
-          <a:p xmlns:a="http://schemas.openxmlformats.org/drawingml/2006/main">
-            <a:pPr marL="0" indent="0">
-              <a:lnSpc>
-                <a:spcPct val="112000"/>
-              </a:lnSpc>
-              <a:spcBef>
-                <a:spcPts val="0"/>
-              </a:spcBef>
-              <a:spcAft>
-                <a:spcPts val="0"/>
-              </a:spcAft>
-              <a:buNone/>
-            </a:pPr>
-            <a:r>
-              <a:t/>
-            </a:r>
-          </a:p>
-          <a:p xmlns:a="http://schemas.openxmlformats.org/drawingml/2006/main">
-            <a:pPr marL="0" indent="0">
-              <a:lnSpc>
-                <a:spcPct val="112000"/>
-              </a:lnSpc>
-              <a:spcBef>
-                <a:spcPts val="0"/>
-              </a:spcBef>
-              <a:spcAft>
-                <a:spcPts val="0"/>
-              </a:spcAft>
-              <a:buNone/>
-              <a:defRPr sz="1875">
-                <a:solidFill>
-                  <a:srgbClr val="FFFFFF"/>
-                </a:solidFill>
-                <a:latin typeface="Arial"/>
-                <a:ea typeface="Arial"/>
-                <a:cs typeface="Arial"/>
-              </a:defRPr>
-            </a:pPr>
-            <a:r>
-              <a:rPr sz="1875">
-                <a:solidFill>
-                  <a:srgbClr val="FFFFFF"/>
-                </a:solidFill>
-                <a:latin typeface="Arial"/>
-                <a:ea typeface="Arial"/>
-                <a:cs typeface="Arial"/>
-              </a:rPr>
-              <a:t>An answer should name what changes and what stays the same.</a:t>
-            </a:r>
-          </a:p>
-          <a:p xmlns:a="http://schemas.openxmlformats.org/drawingml/2006/main">
-            <a:pPr marL="0" indent="0">
-              <a:lnSpc>
-                <a:spcPct val="112000"/>
-              </a:lnSpc>
-              <a:spcBef>
-                <a:spcPts val="0"/>
-              </a:spcBef>
-              <a:spcAft>
-                <a:spcPts val="0"/>
-              </a:spcAft>
-              <a:buNone/>
-            </a:pPr>
-            <a:r>
-              <a:t/>
-            </a:r>
-          </a:p>
-          <a:p xmlns:a="http://schemas.openxmlformats.org/drawingml/2006/main">
-            <a:pPr marL="0" indent="0">
-              <a:lnSpc>
-                <a:spcPct val="112000"/>
-              </a:lnSpc>
-              <a:spcBef>
-                <a:spcPts val="0"/>
-              </a:spcBef>
-              <a:spcAft>
-                <a:spcPts val="0"/>
-              </a:spcAft>
-              <a:buNone/>
-              <a:defRPr sz="1875">
-                <a:solidFill>
-                  <a:srgbClr val="FFFFFF"/>
-                </a:solidFill>
-                <a:latin typeface="Arial"/>
-                <a:ea typeface="Arial"/>
-                <a:cs typeface="Arial"/>
-              </a:defRPr>
-            </a:pPr>
-            <a:r>
-              <a:rPr sz="1875">
-                <a:solidFill>
-                  <a:srgbClr val="FFFFFF"/>
-                </a:solidFill>
-                <a:latin typeface="Arial"/>
-                <a:ea typeface="Arial"/>
-                <a:cs typeface="Arial"/>
-              </a:rPr>
-              <a:t>Then return to the topic you could not explain yet.</a:t>
-            </a:r>
-          </a:p>
-        </p:txBody>
-      </p:sp>
-      <p:sp>
-        <p:nvSpPr>
-          <p:cNvPr id="8" name="Content Placeholder 3">
-            <a:extLst xmlns:a="http://schemas.openxmlformats.org/drawingml/2006/main">
-              <a:ext uri="{FF2B5EF4-FFF2-40B4-BE49-F238E27FC236}">
-                <a16:creationId xmlns:a16="http://schemas.microsoft.com/office/drawing/2014/main" id="{2EE8F343-A95F-2AAA-FE9E-A6C31E298DF7}"/>
-              </a:ext>
-            </a:extLst>
-          </p:cNvPr>
-          <p:cNvSpPr>
-            <a:spLocks xmlns:a="http://schemas.openxmlformats.org/drawingml/2006/main" noGrp="1"/>
-          </p:cNvSpPr>
-          <p:nvPr/>
-        </p:nvSpPr>
-        <p:spPr>
-          <a:xfrm xmlns:a="http://schemas.openxmlformats.org/drawingml/2006/main">
-            <a:off x="6256618" y="2031999"/>
-            <a:ext cx="5537200" cy="3534787"/>
-          </a:xfrm>
-          <a:prstGeom xmlns:a="http://schemas.openxmlformats.org/drawingml/2006/main" prst="rect">
-            <a:avLst/>
-          </a:prstGeom>
-        </p:spPr>
-        <p:txBody>
-          <a:bodyPr xmlns:a="http://schemas.openxmlformats.org/drawingml/2006/main" lIns="0" tIns="0" rIns="0" bIns="0" anchor="t">
-            <a:noAutofit/>
-          </a:bodyPr>
-          <a:lstStyle xmlns:a="http://schemas.openxmlformats.org/drawingml/2006/main">
-            <a:defPPr>
-              <a:defRPr sz="1800">
-                <a:solidFill>
-                  <a:srgbClr val="FFFFFF"/>
-                </a:solidFill>
-                <a:latin typeface="Consolas"/>
-                <a:ea typeface="Consolas"/>
-                <a:cs typeface="Consolas"/>
-              </a:defRPr>
-            </a:defPPr>
-            <a:lvl1pPr marL="228600" indent="-228600" algn="l" defTabSz="914400">
-              <a:lnSpc>
-                <a:spcPct val="90000"/>
-              </a:lnSpc>
-              <a:spcBef>
-                <a:spcPts val="1000"/>
-              </a:spcBef>
-              <a:buFont typeface="Arial"/>
-              <a:buChar char="•"/>
-              <a:defRPr sz="2400" kern="1200">
-                <a:solidFill>
-                  <a:schemeClr val="tx1"/>
-                </a:solidFill>
-                <a:latin typeface="+mn-lt"/>
-                <a:ea typeface="+mn-lt"/>
-                <a:cs typeface="+mn-lt"/>
-              </a:defRPr>
-            </a:lvl1pPr>
-            <a:lvl2pPr marL="685800" indent="-228600" algn="l" defTabSz="914400">
-              <a:lnSpc>
-                <a:spcPct val="90000"/>
-              </a:lnSpc>
-              <a:spcBef>
-                <a:spcPts val="500"/>
-              </a:spcBef>
-              <a:buFont typeface="Arial"/>
-              <a:buChar char="•"/>
-              <a:defRPr sz="2000" kern="1200">
-                <a:solidFill>
-                  <a:schemeClr val="tx1"/>
-                </a:solidFill>
-                <a:latin typeface="+mn-lt"/>
-                <a:ea typeface="+mn-lt"/>
-                <a:cs typeface="+mn-lt"/>
-              </a:defRPr>
-            </a:lvl2pPr>
-            <a:lvl3pPr marL="1143000" indent="-228600" algn="l" defTabSz="914400">
-              <a:lnSpc>
-                <a:spcPct val="90000"/>
-              </a:lnSpc>
-              <a:spcBef>
-                <a:spcPts val="500"/>
-              </a:spcBef>
-              <a:buFont typeface="Arial"/>
-              <a:buChar char="•"/>
-              <a:defRPr sz="1800" kern="1200">
-                <a:solidFill>
-                  <a:schemeClr val="tx1"/>
-                </a:solidFill>
-                <a:latin typeface="+mn-lt"/>
-                <a:ea typeface="+mn-lt"/>
-                <a:cs typeface="+mn-lt"/>
-              </a:defRPr>
-            </a:lvl3pPr>
-            <a:lvl4pPr marL="1600200" indent="-228600" algn="l" defTabSz="914400">
-              <a:lnSpc>
-                <a:spcPct val="90000"/>
-              </a:lnSpc>
-              <a:spcBef>
-                <a:spcPts val="500"/>
-              </a:spcBef>
-              <a:buFont typeface="Arial"/>
-              <a:buChar char="•"/>
-              <a:defRPr sz="1800" kern="1200">
-                <a:solidFill>
-                  <a:schemeClr val="tx1"/>
-                </a:solidFill>
-                <a:latin typeface="+mn-lt"/>
-                <a:ea typeface="+mn-lt"/>
-                <a:cs typeface="+mn-lt"/>
-              </a:defRPr>
-            </a:lvl4pPr>
-            <a:lvl5pPr marL="2057400" indent="-228600" algn="l" defTabSz="914400">
-              <a:lnSpc>
-                <a:spcPct val="90000"/>
-              </a:lnSpc>
-              <a:spcBef>
-                <a:spcPts val="500"/>
-              </a:spcBef>
-              <a:buFont typeface="Arial"/>
-              <a:buChar char="•"/>
-              <a:defRPr sz="1800" kern="1200">
-                <a:solidFill>
-                  <a:schemeClr val="tx1"/>
-                </a:solidFill>
-                <a:latin typeface="+mn-lt"/>
-                <a:ea typeface="+mn-lt"/>
-                <a:cs typeface="+mn-lt"/>
-              </a:defRPr>
-            </a:lvl5pPr>
-            <a:lvl6pPr marL="2514600" indent="-228600" algn="l" defTabSz="914400">
-              <a:lnSpc>
-                <a:spcPct val="90000"/>
-              </a:lnSpc>
-              <a:spcBef>
-                <a:spcPts val="500"/>
-              </a:spcBef>
-              <a:buFont typeface="Arial"/>
-              <a:buChar char="•"/>
-              <a:defRPr sz="1800" kern="1200">
-                <a:solidFill>
-                  <a:schemeClr val="tx1"/>
-                </a:solidFill>
-                <a:latin typeface="+mn-lt"/>
-                <a:ea typeface="+mn-lt"/>
-                <a:cs typeface="+mn-lt"/>
-              </a:defRPr>
-            </a:lvl6pPr>
-            <a:lvl7pPr marL="2971800" indent="-228600" algn="l" defTabSz="914400">
-              <a:lnSpc>
-                <a:spcPct val="90000"/>
-              </a:lnSpc>
-              <a:spcBef>
-                <a:spcPts val="500"/>
-              </a:spcBef>
-              <a:buFont typeface="Arial"/>
-              <a:buChar char="•"/>
-              <a:defRPr sz="1800" kern="1200">
-                <a:solidFill>
-                  <a:schemeClr val="tx1"/>
-                </a:solidFill>
-                <a:latin typeface="+mn-lt"/>
-                <a:ea typeface="+mn-lt"/>
-                <a:cs typeface="+mn-lt"/>
-              </a:defRPr>
-            </a:lvl7pPr>
-            <a:lvl8pPr marL="3429000" indent="-228600" algn="l" defTabSz="914400">
-              <a:lnSpc>
-                <a:spcPct val="90000"/>
-              </a:lnSpc>
-              <a:spcBef>
-                <a:spcPts val="500"/>
-              </a:spcBef>
-              <a:buFont typeface="Arial"/>
-              <a:buChar char="•"/>
-              <a:defRPr sz="1800" kern="1200">
-                <a:solidFill>
-                  <a:schemeClr val="tx1"/>
-                </a:solidFill>
-                <a:latin typeface="+mn-lt"/>
-                <a:ea typeface="+mn-lt"/>
-                <a:cs typeface="+mn-lt"/>
-              </a:defRPr>
-            </a:lvl8pPr>
-            <a:lvl9pPr marL="3886200" indent="-228600" algn="l" defTabSz="914400">
-              <a:lnSpc>
-                <a:spcPct val="90000"/>
-              </a:lnSpc>
-              <a:spcBef>
-                <a:spcPts val="500"/>
-              </a:spcBef>
-              <a:buFont typeface="Arial"/>
-              <a:buChar char="•"/>
-              <a:defRPr sz="1800" kern="1200">
-                <a:solidFill>
-                  <a:schemeClr val="tx1"/>
-                </a:solidFill>
-                <a:latin typeface="+mn-lt"/>
-                <a:ea typeface="+mn-lt"/>
-                <a:cs typeface="+mn-lt"/>
-              </a:defRPr>
-            </a:lvl9pPr>
-          </a:lstStyle>
-          <a:p xmlns:a="http://schemas.openxmlformats.org/drawingml/2006/main">
-            <a:pPr marL="0" indent="0">
-              <a:lnSpc>
-                <a:spcPct val="112000"/>
-              </a:lnSpc>
-              <a:spcBef>
-                <a:spcPts val="0"/>
-              </a:spcBef>
-              <a:spcAft>
-                <a:spcPts val="0"/>
-              </a:spcAft>
-              <a:buNone/>
-              <a:defRPr sz="1800">
-                <a:solidFill>
-                  <a:srgbClr val="FFFFFF"/>
-                </a:solidFill>
-                <a:latin typeface="Consolas"/>
-                <a:ea typeface="Consolas"/>
-                <a:cs typeface="Consolas"/>
-              </a:defRPr>
-            </a:pPr>
-            <a:r>
-              <a:rPr sz="1800">
-                <a:solidFill>
-                  <a:srgbClr val="FFFFFF"/>
-                </a:solidFill>
-                <a:latin typeface="Consolas"/>
-                <a:ea typeface="Consolas"/>
-                <a:cs typeface="Consolas"/>
-              </a:rPr>
-              <a:t>1. Pointer size vs allocation size</a:t>
-            </a:r>
-          </a:p>
-          <a:p xmlns:a="http://schemas.openxmlformats.org/drawingml/2006/main">
-            <a:pPr marL="0" indent="0">
-              <a:lnSpc>
-                <a:spcPct val="112000"/>
-              </a:lnSpc>
-              <a:spcBef>
-                <a:spcPts val="0"/>
-              </a:spcBef>
-              <a:spcAft>
-                <a:spcPts val="0"/>
-              </a:spcAft>
-              <a:buNone/>
-              <a:defRPr sz="1800">
-                <a:solidFill>
-                  <a:srgbClr val="FFFFFF"/>
-                </a:solidFill>
-                <a:latin typeface="Consolas"/>
-                <a:ea typeface="Consolas"/>
-                <a:cs typeface="Consolas"/>
-              </a:defRPr>
-            </a:pPr>
-            <a:r>
-              <a:rPr sz="1800">
-                <a:solidFill>
-                  <a:srgbClr val="FFFFFF"/>
-                </a:solidFill>
-                <a:latin typeface="Consolas"/>
-                <a:ea typeface="Consolas"/>
-                <a:cs typeface="Consolas"/>
-              </a:rPr>
-              <a:t>2. Address vs contents</a:t>
-            </a:r>
-          </a:p>
-          <a:p xmlns:a="http://schemas.openxmlformats.org/drawingml/2006/main">
-            <a:pPr marL="0" indent="0">
-              <a:lnSpc>
-                <a:spcPct val="112000"/>
-              </a:lnSpc>
-              <a:spcBef>
-                <a:spcPts val="0"/>
-              </a:spcBef>
-              <a:spcAft>
-                <a:spcPts val="0"/>
-              </a:spcAft>
-              <a:buNone/>
-              <a:defRPr sz="1800">
-                <a:solidFill>
-                  <a:srgbClr val="FFFFFF"/>
-                </a:solidFill>
-                <a:latin typeface="Consolas"/>
-                <a:ea typeface="Consolas"/>
-                <a:cs typeface="Consolas"/>
-              </a:defRPr>
-            </a:pPr>
-            <a:r>
-              <a:rPr sz="1800">
-                <a:solidFill>
-                  <a:srgbClr val="FFFFFF"/>
-                </a:solidFill>
-                <a:latin typeface="Consolas"/>
-                <a:ea typeface="Consolas"/>
-                <a:cs typeface="Consolas"/>
-              </a:rPr>
-              <a:t>3. Stored fraction vs significand</a:t>
-            </a:r>
-          </a:p>
-          <a:p xmlns:a="http://schemas.openxmlformats.org/drawingml/2006/main">
-            <a:pPr marL="0" indent="0">
-              <a:lnSpc>
-                <a:spcPct val="112000"/>
-              </a:lnSpc>
-              <a:spcBef>
-                <a:spcPts val="0"/>
-              </a:spcBef>
-              <a:spcAft>
-                <a:spcPts val="0"/>
-              </a:spcAft>
-              <a:buNone/>
-              <a:defRPr sz="1800">
-                <a:solidFill>
-                  <a:srgbClr val="FFFFFF"/>
-                </a:solidFill>
-                <a:latin typeface="Consolas"/>
-                <a:ea typeface="Consolas"/>
-                <a:cs typeface="Consolas"/>
-              </a:defRPr>
-            </a:pPr>
-            <a:r>
-              <a:rPr sz="1800">
-                <a:solidFill>
-                  <a:srgbClr val="FFFFFF"/>
-                </a:solidFill>
-                <a:latin typeface="Consolas"/>
-                <a:ea typeface="Consolas"/>
-                <a:cs typeface="Consolas"/>
-              </a:rPr>
-              <a:t>4. Struct vs union</a:t>
-            </a:r>
-          </a:p>
-          <a:p xmlns:a="http://schemas.openxmlformats.org/drawingml/2006/main">
-            <a:pPr marL="0" indent="0">
-              <a:lnSpc>
-                <a:spcPct val="112000"/>
-              </a:lnSpc>
-              <a:spcBef>
-                <a:spcPts val="0"/>
-              </a:spcBef>
-              <a:spcAft>
-                <a:spcPts val="0"/>
-              </a:spcAft>
-              <a:buNone/>
-              <a:defRPr sz="1800">
-                <a:solidFill>
-                  <a:srgbClr val="FFFFFF"/>
-                </a:solidFill>
-                <a:latin typeface="Consolas"/>
-                <a:ea typeface="Consolas"/>
-                <a:cs typeface="Consolas"/>
-              </a:defRPr>
-            </a:pPr>
-            <a:r>
-              <a:rPr sz="1800">
-                <a:solidFill>
-                  <a:srgbClr val="FFFFFF"/>
-                </a:solidFill>
-                <a:latin typeface="Consolas"/>
-                <a:ea typeface="Consolas"/>
-                <a:cs typeface="Consolas"/>
-              </a:rPr>
-              <a:t>5. Stack cleanup vs free</a:t>
-            </a:r>
-          </a:p>
-          <a:p xmlns:a="http://schemas.openxmlformats.org/drawingml/2006/main">
-            <a:pPr marL="0" indent="0">
-              <a:lnSpc>
-                <a:spcPct val="112000"/>
-              </a:lnSpc>
-              <a:spcBef>
-                <a:spcPts val="0"/>
-              </a:spcBef>
-              <a:spcAft>
-                <a:spcPts val="0"/>
-              </a:spcAft>
-              <a:buNone/>
-              <a:defRPr sz="1800">
-                <a:solidFill>
-                  <a:srgbClr val="FFFFFF"/>
-                </a:solidFill>
-                <a:latin typeface="Consolas"/>
-                <a:ea typeface="Consolas"/>
-                <a:cs typeface="Consolas"/>
-              </a:defRPr>
-            </a:pPr>
-            <a:r>
-              <a:rPr sz="1800">
-                <a:solidFill>
-                  <a:srgbClr val="FFFFFF"/>
-                </a:solidFill>
-                <a:latin typeface="Consolas"/>
-                <a:ea typeface="Consolas"/>
-                <a:cs typeface="Consolas"/>
-              </a:rPr>
-              <a:t>6. Latency vs throughput</a:t>
-            </a:r>
-          </a:p>
-        </p:txBody>
-      </p:sp>
-      <p:sp>
-        <p:nvSpPr>
-          <p:cNvPr id="534" name="Takeaway">
-            <a:extLst xmlns:a="http://schemas.openxmlformats.org/drawingml/2006/main">
-              <a:ext uri="{FF2B5EF4-FFF2-40B4-BE49-F238E27FC236}">
-                <a16:creationId xmlns:a16="http://schemas.microsoft.com/office/drawing/2014/main" id="{5CEBB2C4-8C45-4CE1-8A00-EFBDC3F67A50}"/>
-              </a:ext>
-            </a:extLst>
-          </p:cNvPr>
-          <p:cNvSpPr>
-            <a:spLocks xmlns:a="http://schemas.openxmlformats.org/drawingml/2006/main" noGrp="1"/>
-          </p:cNvSpPr>
-          <p:nvPr/>
-        </p:nvSpPr>
-        <p:spPr>
-          <a:xfrm xmlns:a="http://schemas.openxmlformats.org/drawingml/2006/main">
-            <a:off x="393668" y="5715000"/>
-            <a:ext cx="11404283" cy="466725"/>
-          </a:xfrm>
-          <a:prstGeom xmlns:a="http://schemas.openxmlformats.org/drawingml/2006/main" prst="rect">
-            <a:avLst/>
-          </a:prstGeom>
-          <a:noFill xmlns:a="http://schemas.openxmlformats.org/drawingml/2006/main"/>
-          <a:ln xmlns:a="http://schemas.openxmlformats.org/drawingml/2006/main" w="0">
-            <a:noFill/>
-          </a:ln>
-        </p:spPr>
-        <p:txBody>
-          <a:bodyPr xmlns:a="http://schemas.openxmlformats.org/drawingml/2006/main" lIns="0" tIns="0" rIns="0" bIns="0" anchor="t">
-            <a:noAutofit/>
-          </a:bodyPr>
-          <a:lstStyle xmlns:a="http://schemas.openxmlformats.org/drawingml/2006/main">
-            <a:defPPr>
-              <a:defRPr sz="1350">
-                <a:solidFill>
-                  <a:srgbClr val="CCCCCC"/>
-                </a:solidFill>
-                <a:latin typeface="Arial"/>
-                <a:ea typeface="Arial"/>
-                <a:cs typeface="Arial"/>
-              </a:defRPr>
-            </a:defPPr>
-            <a:lvl1pPr>
-              <a:defRPr sz="1350">
-                <a:solidFill>
-                  <a:srgbClr val="CCCCCC"/>
-                </a:solidFill>
-                <a:latin typeface="Arial"/>
-                <a:ea typeface="Arial"/>
-                <a:cs typeface="Arial"/>
-              </a:defRPr>
-            </a:lvl1pPr>
-            <a:lvl2pPr>
-              <a:defRPr sz="1350">
-                <a:solidFill>
-                  <a:srgbClr val="CCCCCC"/>
-                </a:solidFill>
-                <a:latin typeface="Arial"/>
-                <a:ea typeface="Arial"/>
-                <a:cs typeface="Arial"/>
-              </a:defRPr>
-            </a:lvl2pPr>
-            <a:lvl3pPr>
-              <a:defRPr sz="1350">
-                <a:solidFill>
-                  <a:srgbClr val="CCCCCC"/>
-                </a:solidFill>
-                <a:latin typeface="Arial"/>
-                <a:ea typeface="Arial"/>
-                <a:cs typeface="Arial"/>
-              </a:defRPr>
-            </a:lvl3pPr>
-            <a:lvl4pPr>
-              <a:defRPr sz="1350">
-                <a:solidFill>
-                  <a:srgbClr val="CCCCCC"/>
-                </a:solidFill>
-                <a:latin typeface="Arial"/>
-                <a:ea typeface="Arial"/>
-                <a:cs typeface="Arial"/>
-              </a:defRPr>
-            </a:lvl4pPr>
-            <a:lvl5pPr>
-              <a:defRPr sz="1350">
-                <a:solidFill>
-                  <a:srgbClr val="CCCCCC"/>
-                </a:solidFill>
-                <a:latin typeface="Arial"/>
-                <a:ea typeface="Arial"/>
-                <a:cs typeface="Arial"/>
-              </a:defRPr>
-            </a:lvl5pPr>
-            <a:lvl6pPr>
-              <a:defRPr sz="1350">
-                <a:solidFill>
-                  <a:srgbClr val="CCCCCC"/>
-                </a:solidFill>
-                <a:latin typeface="Arial"/>
-                <a:ea typeface="Arial"/>
-                <a:cs typeface="Arial"/>
-              </a:defRPr>
-            </a:lvl6pPr>
-            <a:lvl7pPr>
-              <a:defRPr sz="1350">
-                <a:solidFill>
-                  <a:srgbClr val="CCCCCC"/>
-                </a:solidFill>
-                <a:latin typeface="Arial"/>
-                <a:ea typeface="Arial"/>
-                <a:cs typeface="Arial"/>
-              </a:defRPr>
-            </a:lvl7pPr>
-            <a:lvl8pPr>
-              <a:defRPr sz="1350">
-                <a:solidFill>
-                  <a:srgbClr val="CCCCCC"/>
-                </a:solidFill>
-                <a:latin typeface="Arial"/>
-                <a:ea typeface="Arial"/>
-                <a:cs typeface="Arial"/>
-              </a:defRPr>
-            </a:lvl8pPr>
-            <a:lvl9pPr>
-              <a:defRPr sz="1350">
-                <a:solidFill>
-                  <a:srgbClr val="CCCCCC"/>
-                </a:solidFill>
-                <a:latin typeface="Arial"/>
-                <a:ea typeface="Arial"/>
-                <a:cs typeface="Arial"/>
-              </a:defRPr>
-            </a:lvl9pPr>
-          </a:lstStyle>
-          <a:p xmlns:a="http://schemas.openxmlformats.org/drawingml/2006/main">
-            <a:pPr marL="0" indent="0">
-              <a:lnSpc>
-                <a:spcPct val="112000"/>
-              </a:lnSpc>
-              <a:spcBef>
-                <a:spcPts val="0"/>
-              </a:spcBef>
-              <a:spcAft>
-                <a:spcPts val="0"/>
-              </a:spcAft>
-              <a:buNone/>
-              <a:defRPr sz="1350">
-                <a:solidFill>
-                  <a:srgbClr val="CCCCCC"/>
-                </a:solidFill>
-                <a:latin typeface="Arial"/>
-                <a:ea typeface="Arial"/>
-                <a:cs typeface="Arial"/>
-              </a:defRPr>
-            </a:pPr>
-            <a:r>
-              <a:rPr sz="1350">
-                <a:solidFill>
-                  <a:srgbClr val="CCCCCC"/>
-                </a:solidFill>
-                <a:latin typeface="Arial"/>
-                <a:ea typeface="Arial"/>
-                <a:cs typeface="Arial"/>
-              </a:rPr>
-              <a:t>Use the same reasoning on new numbers and new code.</a:t>
             </a:r>
           </a:p>
         </p:txBody>
@@ -45314,7 +43710,7 @@
           <p:cNvPr id="534" name="Takeaway">
             <a:extLst xmlns:a="http://schemas.openxmlformats.org/drawingml/2006/main">
               <a:ext uri="{FF2B5EF4-FFF2-40B4-BE49-F238E27FC236}">
-                <a16:creationId xmlns:a16="http://schemas.microsoft.com/office/drawing/2014/main" id="{498B7EAC-8B8F-4F0C-9421-FC1F053285C2}"/>
+                <a16:creationId xmlns:a16="http://schemas.microsoft.com/office/drawing/2014/main" id="{2873FACF-C824-40DE-8901-E0F671CF10DF}"/>
               </a:ext>
             </a:extLst>
           </p:cNvPr>
@@ -46763,7 +45159,7 @@
           <p:cNvPr id="534" name="Takeaway">
             <a:extLst xmlns:a="http://schemas.openxmlformats.org/drawingml/2006/main">
               <a:ext uri="{FF2B5EF4-FFF2-40B4-BE49-F238E27FC236}">
-                <a16:creationId xmlns:a16="http://schemas.microsoft.com/office/drawing/2014/main" id="{6EB8A47F-6B2E-4ADB-93D5-AAB6784DD975}"/>
+                <a16:creationId xmlns:a16="http://schemas.microsoft.com/office/drawing/2014/main" id="{E6149888-261F-47EE-99D3-04EE57CE0EEC}"/>
               </a:ext>
             </a:extLst>
           </p:cNvPr>
@@ -48146,7 +46542,7 @@
           <p:cNvPr id="534" name="Takeaway">
             <a:extLst xmlns:a="http://schemas.openxmlformats.org/drawingml/2006/main">
               <a:ext uri="{FF2B5EF4-FFF2-40B4-BE49-F238E27FC236}">
-                <a16:creationId xmlns:a16="http://schemas.microsoft.com/office/drawing/2014/main" id="{3F85962B-2FD9-4219-9D45-E8B8A86EA0C6}"/>
+                <a16:creationId xmlns:a16="http://schemas.microsoft.com/office/drawing/2014/main" id="{A2942431-5259-429A-BAE4-6B37D32F3745}"/>
               </a:ext>
             </a:extLst>
           </p:cNvPr>
@@ -49562,7 +47958,7 @@
           <p:cNvPr id="534" name="Takeaway">
             <a:extLst xmlns:a="http://schemas.openxmlformats.org/drawingml/2006/main">
               <a:ext uri="{FF2B5EF4-FFF2-40B4-BE49-F238E27FC236}">
-                <a16:creationId xmlns:a16="http://schemas.microsoft.com/office/drawing/2014/main" id="{F0C067B6-61CD-4C92-BA29-CEEE39A771F3}"/>
+                <a16:creationId xmlns:a16="http://schemas.microsoft.com/office/drawing/2014/main" id="{7432EBB3-1A8F-4BAB-9EA9-1CA537CC7954}"/>
               </a:ext>
             </a:extLst>
           </p:cNvPr>
@@ -50979,7 +49375,7 @@
           <p:cNvPr id="534" name="Takeaway">
             <a:extLst xmlns:a="http://schemas.openxmlformats.org/drawingml/2006/main">
               <a:ext uri="{FF2B5EF4-FFF2-40B4-BE49-F238E27FC236}">
-                <a16:creationId xmlns:a16="http://schemas.microsoft.com/office/drawing/2014/main" id="{FECEEAC4-8E77-4099-B8FF-4843DF6F5C3D}"/>
+                <a16:creationId xmlns:a16="http://schemas.microsoft.com/office/drawing/2014/main" id="{4AB1DA99-1468-4715-B7F2-745A01AB82D8}"/>
               </a:ext>
             </a:extLst>
           </p:cNvPr>
@@ -52478,7 +50874,7 @@
           <p:cNvPr id="534" name="Takeaway">
             <a:extLst xmlns:a="http://schemas.openxmlformats.org/drawingml/2006/main">
               <a:ext uri="{FF2B5EF4-FFF2-40B4-BE49-F238E27FC236}">
-                <a16:creationId xmlns:a16="http://schemas.microsoft.com/office/drawing/2014/main" id="{82E021C4-0CA4-4FD7-9A21-06231B6DDF4A}"/>
+                <a16:creationId xmlns:a16="http://schemas.microsoft.com/office/drawing/2014/main" id="{9B91AA5D-94EF-4B2D-9242-99C4324ACEF3}"/>
               </a:ext>
             </a:extLst>
           </p:cNvPr>

--- a/public/presentations/CS211_Recitation_7.pptx
+++ b/public/presentations/CS211_Recitation_7.pptx
@@ -2,45 +2,45 @@
 <file path=ppt/presentation.xml><?xml version="1.0" encoding="utf-8"?>
 <p:presentation xmlns:p="http://schemas.openxmlformats.org/presentationml/2006/main" embedTrueTypeFonts="1" saveSubsetFonts="0">
   <p:sldMasterIdLst>
-    <p:sldMasterId xmlns:r="http://schemas.openxmlformats.org/officeDocument/2006/relationships" id="2147483648" r:id="R9f36d197724a4d4a"/>
+    <p:sldMasterId xmlns:r="http://schemas.openxmlformats.org/officeDocument/2006/relationships" id="2147483648" r:id="R0e7a8a5136224fde"/>
   </p:sldMasterIdLst>
   <p:notesMasterIdLst>
-    <p:notesMasterId xmlns:r="http://schemas.openxmlformats.org/officeDocument/2006/relationships" r:id="Rd5d666ad25704bc3"/>
+    <p:notesMasterId xmlns:r="http://schemas.openxmlformats.org/officeDocument/2006/relationships" r:id="R30214bec0cbd41fb"/>
   </p:notesMasterIdLst>
   <p:sldIdLst>
-    <p:sldId xmlns:r="http://schemas.openxmlformats.org/officeDocument/2006/relationships" id="256" r:id="R54c9652d857f4567"/>
-    <p:sldId xmlns:r="http://schemas.openxmlformats.org/officeDocument/2006/relationships" id="257" r:id="R7ff626f778064efa"/>
-    <p:sldId xmlns:r="http://schemas.openxmlformats.org/officeDocument/2006/relationships" id="258" r:id="R86cd73b5a894491f"/>
-    <p:sldId xmlns:r="http://schemas.openxmlformats.org/officeDocument/2006/relationships" id="259" r:id="Rb538f45a78b24926"/>
-    <p:sldId xmlns:r="http://schemas.openxmlformats.org/officeDocument/2006/relationships" id="260" r:id="R0e9cba78e623487d"/>
-    <p:sldId xmlns:r="http://schemas.openxmlformats.org/officeDocument/2006/relationships" id="261" r:id="Rddcc95b7e95a4458"/>
-    <p:sldId xmlns:r="http://schemas.openxmlformats.org/officeDocument/2006/relationships" id="262" r:id="R2449be60f7f449b8"/>
-    <p:sldId xmlns:r="http://schemas.openxmlformats.org/officeDocument/2006/relationships" id="263" r:id="R51b6d8e6b1054610"/>
-    <p:sldId xmlns:r="http://schemas.openxmlformats.org/officeDocument/2006/relationships" id="264" r:id="Ra030d658446b4f7e"/>
-    <p:sldId xmlns:r="http://schemas.openxmlformats.org/officeDocument/2006/relationships" id="265" r:id="Rc2ef2d59ec4e498d"/>
-    <p:sldId xmlns:r="http://schemas.openxmlformats.org/officeDocument/2006/relationships" id="266" r:id="R207aabbf8b34457f"/>
-    <p:sldId xmlns:r="http://schemas.openxmlformats.org/officeDocument/2006/relationships" id="267" r:id="Rb9a4b445b6124fc4"/>
-    <p:sldId xmlns:r="http://schemas.openxmlformats.org/officeDocument/2006/relationships" id="268" r:id="Rb3250c260c3243d8"/>
-    <p:sldId xmlns:r="http://schemas.openxmlformats.org/officeDocument/2006/relationships" id="269" r:id="Re4ba086785fa4b48"/>
-    <p:sldId xmlns:r="http://schemas.openxmlformats.org/officeDocument/2006/relationships" id="270" r:id="R829f8f6183d94ce9"/>
-    <p:sldId xmlns:r="http://schemas.openxmlformats.org/officeDocument/2006/relationships" id="271" r:id="Re13015b6302241df"/>
-    <p:sldId xmlns:r="http://schemas.openxmlformats.org/officeDocument/2006/relationships" id="272" r:id="R832e9f68a76d400c"/>
-    <p:sldId xmlns:r="http://schemas.openxmlformats.org/officeDocument/2006/relationships" id="273" r:id="Ra80fd736b9d34c62"/>
-    <p:sldId xmlns:r="http://schemas.openxmlformats.org/officeDocument/2006/relationships" id="274" r:id="R896e2b4199be4983"/>
-    <p:sldId xmlns:r="http://schemas.openxmlformats.org/officeDocument/2006/relationships" id="275" r:id="Rb39f62a315bd4ebd"/>
-    <p:sldId xmlns:r="http://schemas.openxmlformats.org/officeDocument/2006/relationships" id="276" r:id="Rca27ccde41e5411e"/>
-    <p:sldId xmlns:r="http://schemas.openxmlformats.org/officeDocument/2006/relationships" id="277" r:id="R0eade8bfe43c4a0c"/>
-    <p:sldId xmlns:r="http://schemas.openxmlformats.org/officeDocument/2006/relationships" id="278" r:id="R8789737889994fee"/>
+    <p:sldId xmlns:r="http://schemas.openxmlformats.org/officeDocument/2006/relationships" id="256" r:id="R54a419f5acf44c12"/>
+    <p:sldId xmlns:r="http://schemas.openxmlformats.org/officeDocument/2006/relationships" id="257" r:id="R49ac621a0d9b4676"/>
+    <p:sldId xmlns:r="http://schemas.openxmlformats.org/officeDocument/2006/relationships" id="258" r:id="Re4472a261d8542e8"/>
+    <p:sldId xmlns:r="http://schemas.openxmlformats.org/officeDocument/2006/relationships" id="259" r:id="R6c5dafd550964940"/>
+    <p:sldId xmlns:r="http://schemas.openxmlformats.org/officeDocument/2006/relationships" id="260" r:id="R0645639e024349e5"/>
+    <p:sldId xmlns:r="http://schemas.openxmlformats.org/officeDocument/2006/relationships" id="261" r:id="Rf8235a4e25294fb2"/>
+    <p:sldId xmlns:r="http://schemas.openxmlformats.org/officeDocument/2006/relationships" id="262" r:id="R3885ed69a77341ef"/>
+    <p:sldId xmlns:r="http://schemas.openxmlformats.org/officeDocument/2006/relationships" id="263" r:id="Rfed9f0f27eaa41a4"/>
+    <p:sldId xmlns:r="http://schemas.openxmlformats.org/officeDocument/2006/relationships" id="264" r:id="Rdb536370759844aa"/>
+    <p:sldId xmlns:r="http://schemas.openxmlformats.org/officeDocument/2006/relationships" id="265" r:id="Rd2500efbb61c4c85"/>
+    <p:sldId xmlns:r="http://schemas.openxmlformats.org/officeDocument/2006/relationships" id="266" r:id="R880313408f394e54"/>
+    <p:sldId xmlns:r="http://schemas.openxmlformats.org/officeDocument/2006/relationships" id="267" r:id="R02b1380f3bb64349"/>
+    <p:sldId xmlns:r="http://schemas.openxmlformats.org/officeDocument/2006/relationships" id="268" r:id="R7c461ae444dd4ab6"/>
+    <p:sldId xmlns:r="http://schemas.openxmlformats.org/officeDocument/2006/relationships" id="269" r:id="Rfa762dbcad7f49e7"/>
+    <p:sldId xmlns:r="http://schemas.openxmlformats.org/officeDocument/2006/relationships" id="270" r:id="R3a98809f153145e8"/>
+    <p:sldId xmlns:r="http://schemas.openxmlformats.org/officeDocument/2006/relationships" id="271" r:id="Rc548e0460ad84b13"/>
+    <p:sldId xmlns:r="http://schemas.openxmlformats.org/officeDocument/2006/relationships" id="272" r:id="Rf64c3155233f4a99"/>
+    <p:sldId xmlns:r="http://schemas.openxmlformats.org/officeDocument/2006/relationships" id="273" r:id="R1eba9e2d8d0a4517"/>
+    <p:sldId xmlns:r="http://schemas.openxmlformats.org/officeDocument/2006/relationships" id="274" r:id="R8a9da1a01da047c9"/>
+    <p:sldId xmlns:r="http://schemas.openxmlformats.org/officeDocument/2006/relationships" id="275" r:id="R8b1bfbc492a54323"/>
+    <p:sldId xmlns:r="http://schemas.openxmlformats.org/officeDocument/2006/relationships" id="276" r:id="Rbdcd86c0088a44ae"/>
+    <p:sldId xmlns:r="http://schemas.openxmlformats.org/officeDocument/2006/relationships" id="277" r:id="R5146a19a60344a08"/>
+    <p:sldId xmlns:r="http://schemas.openxmlformats.org/officeDocument/2006/relationships" id="278" r:id="Rc266c82505b24b05"/>
   </p:sldIdLst>
   <p:sldSz cx="12192000" cy="6858000"/>
   <p:notesSz cx="6858000" cy="9144000"/>
   <p:embeddedFontLst>
     <p:embeddedFont>
       <p:font typeface="OpenAI Sans"/>
-      <p:regular xmlns:r="http://schemas.openxmlformats.org/officeDocument/2006/relationships" r:id="R771a34c063ac4c1e"/>
-      <p:bold xmlns:r="http://schemas.openxmlformats.org/officeDocument/2006/relationships" r:id="R888c0e007df14941"/>
-      <p:italic xmlns:r="http://schemas.openxmlformats.org/officeDocument/2006/relationships" r:id="R22535a57c21c4405"/>
-      <p:boldItalic xmlns:r="http://schemas.openxmlformats.org/officeDocument/2006/relationships" r:id="Rfc48235d3be341b7"/>
+      <p:regular xmlns:r="http://schemas.openxmlformats.org/officeDocument/2006/relationships" r:id="Rc93f8612a50a40d7"/>
+      <p:bold xmlns:r="http://schemas.openxmlformats.org/officeDocument/2006/relationships" r:id="R7bcd55f6e24d44e8"/>
+      <p:italic xmlns:r="http://schemas.openxmlformats.org/officeDocument/2006/relationships" r:id="R04d937ebf9d84e42"/>
+      <p:boldItalic xmlns:r="http://schemas.openxmlformats.org/officeDocument/2006/relationships" r:id="Rebc70526097844a6"/>
     </p:embeddedFont>
   </p:embeddedFontLst>
   <p:defaultTextStyle>
@@ -3596,66 +3596,6 @@
             </a:r>
             <a:endParaRPr/>
           </a:p>
-          <a:p xmlns:a="http://schemas.openxmlformats.org/drawingml/2006/main">
-            <a:pPr marL="0" lvl="0" indent="0" algn="l">
-              <a:spcBef>
-                <a:spcPts val="0"/>
-              </a:spcBef>
-              <a:spcAft>
-                <a:spcPts val="0"/>
-              </a:spcAft>
-              <a:buNone/>
-            </a:pPr>
-            <a:r>
-              <a:t/>
-            </a:r>
-            <a:endParaRPr/>
-          </a:p>
-          <a:p xmlns:a="http://schemas.openxmlformats.org/drawingml/2006/main">
-            <a:pPr marL="0" lvl="0" indent="0" algn="l">
-              <a:spcBef>
-                <a:spcPts val="0"/>
-              </a:spcBef>
-              <a:spcAft>
-                <a:spcPts val="0"/>
-              </a:spcAft>
-              <a:buNone/>
-            </a:pPr>
-            <a:r>
-              <a:t>Answer: 1. subq $32, %rsp decreases RSP by 32, reserving 32 bytes below its previous position.</a:t>
-            </a:r>
-            <a:endParaRPr/>
-          </a:p>
-          <a:p xmlns:a="http://schemas.openxmlformats.org/drawingml/2006/main">
-            <a:pPr marL="0" lvl="0" indent="0" algn="l">
-              <a:spcBef>
-                <a:spcPts val="0"/>
-              </a:spcBef>
-              <a:spcAft>
-                <a:spcPts val="0"/>
-              </a:spcAft>
-              <a:buNone/>
-            </a:pPr>
-            <a:r>
-              <a:t/>
-            </a:r>
-            <a:endParaRPr/>
-          </a:p>
-          <a:p xmlns:a="http://schemas.openxmlformats.org/drawingml/2006/main">
-            <a:pPr marL="0" lvl="0" indent="0" algn="l">
-              <a:spcBef>
-                <a:spcPts val="0"/>
-              </a:spcBef>
-              <a:spcAft>
-                <a:spcPts val="0"/>
-              </a:spcAft>
-              <a:buNone/>
-            </a:pPr>
-            <a:r>
-              <a:t>2. movq %rbp, %rsp restores RSP to this frame’s base. popq restores the saved caller RBP. ret consumes the return address and resumes the caller.</a:t>
-            </a:r>
-            <a:endParaRPr/>
-          </a:p>
         </p:txBody>
       </p:sp>
       <p:sp>
@@ -6216,14 +6156,14 @@
   </p:cSld>
   <p:clrMap bg1="dk1" tx1="lt1" bg2="dk2" tx2="lt2" accent1="accent1" accent2="accent2" accent3="accent3" accent4="accent4" accent5="accent5" accent6="accent6" hlink="hlink" folHlink="folHlink"/>
   <p:sldLayoutIdLst>
-    <p:sldLayoutId xmlns:r="http://schemas.openxmlformats.org/officeDocument/2006/relationships" id="2147483649" r:id="R8cbee9d63ac0493d"/>
-    <p:sldLayoutId xmlns:r="http://schemas.openxmlformats.org/officeDocument/2006/relationships" id="2147483650" r:id="Ra7df42572436448a"/>
-    <p:sldLayoutId xmlns:r="http://schemas.openxmlformats.org/officeDocument/2006/relationships" id="2147483651" r:id="Rbfab4a536e864478"/>
-    <p:sldLayoutId xmlns:r="http://schemas.openxmlformats.org/officeDocument/2006/relationships" id="2147483652" r:id="R3ecd5b987e9a4df6"/>
-    <p:sldLayoutId xmlns:r="http://schemas.openxmlformats.org/officeDocument/2006/relationships" id="2147483653" r:id="R6ef1ced36c2b4611"/>
-    <p:sldLayoutId xmlns:r="http://schemas.openxmlformats.org/officeDocument/2006/relationships" id="2147483654" r:id="R4ad01fa022f4437f"/>
-    <p:sldLayoutId xmlns:r="http://schemas.openxmlformats.org/officeDocument/2006/relationships" id="2147483655" r:id="R5b7935eb90134c2b"/>
-    <p:sldLayoutId xmlns:r="http://schemas.openxmlformats.org/officeDocument/2006/relationships" id="2147483656" r:id="Re88146bd729e4b92"/>
+    <p:sldLayoutId xmlns:r="http://schemas.openxmlformats.org/officeDocument/2006/relationships" id="2147483649" r:id="R78d557211e4b4205"/>
+    <p:sldLayoutId xmlns:r="http://schemas.openxmlformats.org/officeDocument/2006/relationships" id="2147483650" r:id="R04fbee4d4c464775"/>
+    <p:sldLayoutId xmlns:r="http://schemas.openxmlformats.org/officeDocument/2006/relationships" id="2147483651" r:id="R75667768e0084791"/>
+    <p:sldLayoutId xmlns:r="http://schemas.openxmlformats.org/officeDocument/2006/relationships" id="2147483652" r:id="Re451ec1b75de41e1"/>
+    <p:sldLayoutId xmlns:r="http://schemas.openxmlformats.org/officeDocument/2006/relationships" id="2147483653" r:id="Re0d369c2f161460c"/>
+    <p:sldLayoutId xmlns:r="http://schemas.openxmlformats.org/officeDocument/2006/relationships" id="2147483654" r:id="R57b2f11281744806"/>
+    <p:sldLayoutId xmlns:r="http://schemas.openxmlformats.org/officeDocument/2006/relationships" id="2147483655" r:id="R10f7d0a00fee4c25"/>
+    <p:sldLayoutId xmlns:r="http://schemas.openxmlformats.org/officeDocument/2006/relationships" id="2147483656" r:id="R79d3cea4952e4313"/>
   </p:sldLayoutIdLst>
   <p:hf hdr="0" dt="0"/>
   <p:txStyles>
@@ -9094,7 +9034,7 @@
           <p:cNvPr id="534" name="">
             <a:extLst xmlns:a="http://schemas.openxmlformats.org/drawingml/2006/main">
               <a:ext uri="{FF2B5EF4-FFF2-40B4-BE49-F238E27FC236}">
-                <a16:creationId xmlns:a16="http://schemas.microsoft.com/office/drawing/2014/main" id="{6FCCE28B-7EFF-4B47-9B23-1FFD02537173}"/>
+                <a16:creationId xmlns:a16="http://schemas.microsoft.com/office/drawing/2014/main" id="{971C40B4-20AC-4450-9A51-A85F453F177B}"/>
               </a:ext>
             </a:extLst>
           </p:cNvPr>
@@ -9837,7 +9777,7 @@
           <p:cNvPr id="535" name="Takeaway">
             <a:extLst xmlns:a="http://schemas.openxmlformats.org/drawingml/2006/main">
               <a:ext uri="{FF2B5EF4-FFF2-40B4-BE49-F238E27FC236}">
-                <a16:creationId xmlns:a16="http://schemas.microsoft.com/office/drawing/2014/main" id="{537E36E0-0321-414D-A3FA-5D74279EA142}"/>
+                <a16:creationId xmlns:a16="http://schemas.microsoft.com/office/drawing/2014/main" id="{7FBE8C99-2F84-48F5-B843-49889E06CF14}"/>
               </a:ext>
             </a:extLst>
           </p:cNvPr>
@@ -11221,7 +11161,7 @@
           <p:cNvPr id="534" name="Takeaway">
             <a:extLst xmlns:a="http://schemas.openxmlformats.org/drawingml/2006/main">
               <a:ext uri="{FF2B5EF4-FFF2-40B4-BE49-F238E27FC236}">
-                <a16:creationId xmlns:a16="http://schemas.microsoft.com/office/drawing/2014/main" id="{7541806E-0771-4C2E-B28B-CC598DB3A81E}"/>
+                <a16:creationId xmlns:a16="http://schemas.microsoft.com/office/drawing/2014/main" id="{832D1CA6-F714-43F2-92AB-193FEC35CE41}"/>
               </a:ext>
             </a:extLst>
           </p:cNvPr>
@@ -12654,7 +12594,7 @@
           <p:cNvPr id="534" name="Takeaway">
             <a:extLst xmlns:a="http://schemas.openxmlformats.org/drawingml/2006/main">
               <a:ext uri="{FF2B5EF4-FFF2-40B4-BE49-F238E27FC236}">
-                <a16:creationId xmlns:a16="http://schemas.microsoft.com/office/drawing/2014/main" id="{6EB14764-E89D-4D28-8A57-779C4580CC62}"/>
+                <a16:creationId xmlns:a16="http://schemas.microsoft.com/office/drawing/2014/main" id="{B9374ABE-FFE3-48BB-BE72-8E7E710AE770}"/>
               </a:ext>
             </a:extLst>
           </p:cNvPr>
@@ -14136,7 +14076,7 @@
           <p:cNvPr id="534" name="Takeaway">
             <a:extLst xmlns:a="http://schemas.openxmlformats.org/drawingml/2006/main">
               <a:ext uri="{FF2B5EF4-FFF2-40B4-BE49-F238E27FC236}">
-                <a16:creationId xmlns:a16="http://schemas.microsoft.com/office/drawing/2014/main" id="{34FC27C5-CF90-4E1B-A15E-12D278FACD46}"/>
+                <a16:creationId xmlns:a16="http://schemas.microsoft.com/office/drawing/2014/main" id="{0185E7EE-2D1D-45DF-8068-D2D525BD8030}"/>
               </a:ext>
             </a:extLst>
           </p:cNvPr>
@@ -15519,7 +15459,7 @@
           <p:cNvPr id="534" name="">
             <a:extLst xmlns:a="http://schemas.openxmlformats.org/drawingml/2006/main">
               <a:ext uri="{FF2B5EF4-FFF2-40B4-BE49-F238E27FC236}">
-                <a16:creationId xmlns:a16="http://schemas.microsoft.com/office/drawing/2014/main" id="{04CEB5FA-2553-40CC-9FEE-5F7D2627E3B0}"/>
+                <a16:creationId xmlns:a16="http://schemas.microsoft.com/office/drawing/2014/main" id="{FB8DB4C9-6933-4726-8D17-04EFE20708EA}"/>
               </a:ext>
             </a:extLst>
           </p:cNvPr>
@@ -15879,7 +15819,7 @@
           <p:cNvPr id="535" name="Takeaway">
             <a:extLst xmlns:a="http://schemas.openxmlformats.org/drawingml/2006/main">
               <a:ext uri="{FF2B5EF4-FFF2-40B4-BE49-F238E27FC236}">
-                <a16:creationId xmlns:a16="http://schemas.microsoft.com/office/drawing/2014/main" id="{F2BAEB72-B926-4769-B419-C563C22B9E0B}"/>
+                <a16:creationId xmlns:a16="http://schemas.microsoft.com/office/drawing/2014/main" id="{E4C585EB-FCC5-4710-B805-C0B40B32A791}"/>
               </a:ext>
             </a:extLst>
           </p:cNvPr>
@@ -17329,7 +17269,7 @@
           <p:cNvPr id="534" name="Takeaway">
             <a:extLst xmlns:a="http://schemas.openxmlformats.org/drawingml/2006/main">
               <a:ext uri="{FF2B5EF4-FFF2-40B4-BE49-F238E27FC236}">
-                <a16:creationId xmlns:a16="http://schemas.microsoft.com/office/drawing/2014/main" id="{B7100F3D-9062-40E9-8E44-DBD36FB16D15}"/>
+                <a16:creationId xmlns:a16="http://schemas.microsoft.com/office/drawing/2014/main" id="{6742AE34-50CA-4D0F-A8FB-A294D37CF768}"/>
               </a:ext>
             </a:extLst>
           </p:cNvPr>
@@ -18729,7 +18669,7 @@
           <p:cNvPr id="534" name="Takeaway">
             <a:extLst xmlns:a="http://schemas.openxmlformats.org/drawingml/2006/main">
               <a:ext uri="{FF2B5EF4-FFF2-40B4-BE49-F238E27FC236}">
-                <a16:creationId xmlns:a16="http://schemas.microsoft.com/office/drawing/2014/main" id="{B6562FAC-C200-45B6-9B26-704ED2BFBFEE}"/>
+                <a16:creationId xmlns:a16="http://schemas.microsoft.com/office/drawing/2014/main" id="{F5C7BD72-255F-4EBC-AE26-AF106DC0323D}"/>
               </a:ext>
             </a:extLst>
           </p:cNvPr>
@@ -20179,7 +20119,7 @@
           <p:cNvPr id="534" name="Takeaway">
             <a:extLst xmlns:a="http://schemas.openxmlformats.org/drawingml/2006/main">
               <a:ext uri="{FF2B5EF4-FFF2-40B4-BE49-F238E27FC236}">
-                <a16:creationId xmlns:a16="http://schemas.microsoft.com/office/drawing/2014/main" id="{1F203D10-DDBF-4119-9822-23593C823BEC}"/>
+                <a16:creationId xmlns:a16="http://schemas.microsoft.com/office/drawing/2014/main" id="{4DF58262-EB23-4D35-8BD2-FBAEE31CB15B}"/>
               </a:ext>
             </a:extLst>
           </p:cNvPr>
@@ -21612,7 +21552,7 @@
           <p:cNvPr id="534" name="Takeaway">
             <a:extLst xmlns:a="http://schemas.openxmlformats.org/drawingml/2006/main">
               <a:ext uri="{FF2B5EF4-FFF2-40B4-BE49-F238E27FC236}">
-                <a16:creationId xmlns:a16="http://schemas.microsoft.com/office/drawing/2014/main" id="{4AAAD5DC-2B0D-4283-AD48-06D5987BBDC6}"/>
+                <a16:creationId xmlns:a16="http://schemas.microsoft.com/office/drawing/2014/main" id="{812A45D3-92CA-4E5D-BD87-4E21314A084A}"/>
               </a:ext>
             </a:extLst>
           </p:cNvPr>
@@ -23078,7 +23018,7 @@
           <p:cNvPr id="534" name="Takeaway">
             <a:extLst xmlns:a="http://schemas.openxmlformats.org/drawingml/2006/main">
               <a:ext uri="{FF2B5EF4-FFF2-40B4-BE49-F238E27FC236}">
-                <a16:creationId xmlns:a16="http://schemas.microsoft.com/office/drawing/2014/main" id="{A2F2FC1D-5904-4512-8FF8-96C4F550E745}"/>
+                <a16:creationId xmlns:a16="http://schemas.microsoft.com/office/drawing/2014/main" id="{A299AB3F-CAC7-45C6-B905-56803A147272}"/>
               </a:ext>
             </a:extLst>
           </p:cNvPr>
@@ -24362,7 +24302,7 @@
           <p:cNvPr id="534" name="">
             <a:extLst xmlns:a="http://schemas.openxmlformats.org/drawingml/2006/main">
               <a:ext uri="{FF2B5EF4-FFF2-40B4-BE49-F238E27FC236}">
-                <a16:creationId xmlns:a16="http://schemas.microsoft.com/office/drawing/2014/main" id="{7FC1DEDF-585D-41F2-AA34-8ABC66ED81A5}"/>
+                <a16:creationId xmlns:a16="http://schemas.microsoft.com/office/drawing/2014/main" id="{354148E4-91DD-4091-9755-846CBD5FC793}"/>
               </a:ext>
             </a:extLst>
           </p:cNvPr>
@@ -24722,7 +24662,7 @@
           <p:cNvPr id="535" name="Takeaway">
             <a:extLst xmlns:a="http://schemas.openxmlformats.org/drawingml/2006/main">
               <a:ext uri="{FF2B5EF4-FFF2-40B4-BE49-F238E27FC236}">
-                <a16:creationId xmlns:a16="http://schemas.microsoft.com/office/drawing/2014/main" id="{54E91967-B7BE-4B3A-B047-70BC7F5553AB}"/>
+                <a16:creationId xmlns:a16="http://schemas.microsoft.com/office/drawing/2014/main" id="{37164DC2-CFF4-442E-B39A-AACBDA7912AF}"/>
               </a:ext>
             </a:extLst>
           </p:cNvPr>
@@ -26105,7 +26045,7 @@
           <p:cNvPr id="534" name="Takeaway">
             <a:extLst xmlns:a="http://schemas.openxmlformats.org/drawingml/2006/main">
               <a:ext uri="{FF2B5EF4-FFF2-40B4-BE49-F238E27FC236}">
-                <a16:creationId xmlns:a16="http://schemas.microsoft.com/office/drawing/2014/main" id="{D22B5CA5-F49B-4631-A8C4-D1B329AA3E1A}"/>
+                <a16:creationId xmlns:a16="http://schemas.microsoft.com/office/drawing/2014/main" id="{DE634C2C-0898-4853-A5C4-D01918BBB8B2}"/>
               </a:ext>
             </a:extLst>
           </p:cNvPr>
@@ -27472,7 +27412,7 @@
           <p:cNvPr id="534" name="Takeaway">
             <a:extLst xmlns:a="http://schemas.openxmlformats.org/drawingml/2006/main">
               <a:ext uri="{FF2B5EF4-FFF2-40B4-BE49-F238E27FC236}">
-                <a16:creationId xmlns:a16="http://schemas.microsoft.com/office/drawing/2014/main" id="{98DF3F86-688D-41F1-B726-EB7D8937A18C}"/>
+                <a16:creationId xmlns:a16="http://schemas.microsoft.com/office/drawing/2014/main" id="{ED771414-6432-454D-8253-E68F1E8D3552}"/>
               </a:ext>
             </a:extLst>
           </p:cNvPr>
@@ -28723,7 +28663,7 @@
           <p:cNvPr id="534" name="">
             <a:extLst xmlns:a="http://schemas.openxmlformats.org/drawingml/2006/main">
               <a:ext uri="{FF2B5EF4-FFF2-40B4-BE49-F238E27FC236}">
-                <a16:creationId xmlns:a16="http://schemas.microsoft.com/office/drawing/2014/main" id="{A6CA8972-7F91-42B4-AE94-9DA0F1C08D7B}"/>
+                <a16:creationId xmlns:a16="http://schemas.microsoft.com/office/drawing/2014/main" id="{89013C81-78D9-4D92-AF05-E237CFA2DC9F}"/>
               </a:ext>
             </a:extLst>
           </p:cNvPr>
@@ -29724,7 +29664,7 @@
           <p:cNvPr id="535" name="Takeaway">
             <a:extLst xmlns:a="http://schemas.openxmlformats.org/drawingml/2006/main">
               <a:ext uri="{FF2B5EF4-FFF2-40B4-BE49-F238E27FC236}">
-                <a16:creationId xmlns:a16="http://schemas.microsoft.com/office/drawing/2014/main" id="{8EF1B560-B096-42E8-972F-CCA82F71CDC0}"/>
+                <a16:creationId xmlns:a16="http://schemas.microsoft.com/office/drawing/2014/main" id="{80E7B2F5-B15B-4346-B9E1-82DA41827297}"/>
               </a:ext>
             </a:extLst>
           </p:cNvPr>
@@ -31157,7 +31097,7 @@
           <p:cNvPr id="534" name="Takeaway">
             <a:extLst xmlns:a="http://schemas.openxmlformats.org/drawingml/2006/main">
               <a:ext uri="{FF2B5EF4-FFF2-40B4-BE49-F238E27FC236}">
-                <a16:creationId xmlns:a16="http://schemas.microsoft.com/office/drawing/2014/main" id="{F73F9572-35ED-47A8-B89D-E9E414778EB0}"/>
+                <a16:creationId xmlns:a16="http://schemas.microsoft.com/office/drawing/2014/main" id="{ED900BF0-8FCE-4DC5-929A-57620050F0A2}"/>
               </a:ext>
             </a:extLst>
           </p:cNvPr>
@@ -32558,7 +32498,7 @@
           <p:cNvPr id="534" name="Takeaway">
             <a:extLst xmlns:a="http://schemas.openxmlformats.org/drawingml/2006/main">
               <a:ext uri="{FF2B5EF4-FFF2-40B4-BE49-F238E27FC236}">
-                <a16:creationId xmlns:a16="http://schemas.microsoft.com/office/drawing/2014/main" id="{84CC2B02-4776-48FD-BD79-2B43A6FAB43B}"/>
+                <a16:creationId xmlns:a16="http://schemas.microsoft.com/office/drawing/2014/main" id="{93E96C14-84FF-4F4D-B462-2FB25CA11BBD}"/>
               </a:ext>
             </a:extLst>
           </p:cNvPr>
@@ -33974,7 +33914,7 @@
           <p:cNvPr id="534" name="Takeaway">
             <a:extLst xmlns:a="http://schemas.openxmlformats.org/drawingml/2006/main">
               <a:ext uri="{FF2B5EF4-FFF2-40B4-BE49-F238E27FC236}">
-                <a16:creationId xmlns:a16="http://schemas.microsoft.com/office/drawing/2014/main" id="{463D7B2B-D827-4763-BC3E-4162B4F622FC}"/>
+                <a16:creationId xmlns:a16="http://schemas.microsoft.com/office/drawing/2014/main" id="{C6759121-7196-456C-9EED-108C886AEE21}"/>
               </a:ext>
             </a:extLst>
           </p:cNvPr>
@@ -35423,7 +35363,7 @@
           <p:cNvPr id="534" name="Takeaway">
             <a:extLst xmlns:a="http://schemas.openxmlformats.org/drawingml/2006/main">
               <a:ext uri="{FF2B5EF4-FFF2-40B4-BE49-F238E27FC236}">
-                <a16:creationId xmlns:a16="http://schemas.microsoft.com/office/drawing/2014/main" id="{525C13C1-DA6D-430D-BB9B-23AB3BB3159F}"/>
+                <a16:creationId xmlns:a16="http://schemas.microsoft.com/office/drawing/2014/main" id="{7A41ED02-16A2-4943-A9A0-D2FC2D8A4863}"/>
               </a:ext>
             </a:extLst>
           </p:cNvPr>
@@ -36806,7 +36746,7 @@
           <p:cNvPr id="534" name="Takeaway">
             <a:extLst xmlns:a="http://schemas.openxmlformats.org/drawingml/2006/main">
               <a:ext uri="{FF2B5EF4-FFF2-40B4-BE49-F238E27FC236}">
-                <a16:creationId xmlns:a16="http://schemas.microsoft.com/office/drawing/2014/main" id="{E76CB519-6CEB-481C-8A8D-146C80B6DE66}"/>
+                <a16:creationId xmlns:a16="http://schemas.microsoft.com/office/drawing/2014/main" id="{70053DA7-F09D-4570-847F-32397D0C0051}"/>
               </a:ext>
             </a:extLst>
           </p:cNvPr>
@@ -38222,7 +38162,7 @@
           <p:cNvPr id="534" name="Takeaway">
             <a:extLst xmlns:a="http://schemas.openxmlformats.org/drawingml/2006/main">
               <a:ext uri="{FF2B5EF4-FFF2-40B4-BE49-F238E27FC236}">
-                <a16:creationId xmlns:a16="http://schemas.microsoft.com/office/drawing/2014/main" id="{40E38B24-8A66-4F69-8F56-00B8880354A2}"/>
+                <a16:creationId xmlns:a16="http://schemas.microsoft.com/office/drawing/2014/main" id="{B351121F-963A-41AF-9926-D6A656F8F5CE}"/>
               </a:ext>
             </a:extLst>
           </p:cNvPr>
@@ -39639,7 +39579,7 @@
           <p:cNvPr id="534" name="Takeaway">
             <a:extLst xmlns:a="http://schemas.openxmlformats.org/drawingml/2006/main">
               <a:ext uri="{FF2B5EF4-FFF2-40B4-BE49-F238E27FC236}">
-                <a16:creationId xmlns:a16="http://schemas.microsoft.com/office/drawing/2014/main" id="{8327313E-B5A9-414A-9154-BF19113DC5C3}"/>
+                <a16:creationId xmlns:a16="http://schemas.microsoft.com/office/drawing/2014/main" id="{5ED3F4BE-38B6-4980-9309-D1E6087DBA1E}"/>
               </a:ext>
             </a:extLst>
           </p:cNvPr>
@@ -41138,7 +41078,7 @@
           <p:cNvPr id="534" name="Takeaway">
             <a:extLst xmlns:a="http://schemas.openxmlformats.org/drawingml/2006/main">
               <a:ext uri="{FF2B5EF4-FFF2-40B4-BE49-F238E27FC236}">
-                <a16:creationId xmlns:a16="http://schemas.microsoft.com/office/drawing/2014/main" id="{830936F1-E763-42FE-BE05-09C52649B3AA}"/>
+                <a16:creationId xmlns:a16="http://schemas.microsoft.com/office/drawing/2014/main" id="{C4F297A4-0022-447E-B6ED-41A7D723F31A}"/>
               </a:ext>
             </a:extLst>
           </p:cNvPr>

--- a/public/presentations/CS211_Recitation_7.pptx
+++ b/public/presentations/CS211_Recitation_7.pptx
@@ -2,45 +2,44 @@
 <file path=ppt/presentation.xml><?xml version="1.0" encoding="utf-8"?>
 <p:presentation xmlns:p="http://schemas.openxmlformats.org/presentationml/2006/main" embedTrueTypeFonts="1" saveSubsetFonts="0">
   <p:sldMasterIdLst>
-    <p:sldMasterId xmlns:r="http://schemas.openxmlformats.org/officeDocument/2006/relationships" id="2147483648" r:id="R0e7a8a5136224fde"/>
+    <p:sldMasterId xmlns:r="http://schemas.openxmlformats.org/officeDocument/2006/relationships" id="2147483648" r:id="Rce25d4b090c14cc1"/>
   </p:sldMasterIdLst>
   <p:notesMasterIdLst>
-    <p:notesMasterId xmlns:r="http://schemas.openxmlformats.org/officeDocument/2006/relationships" r:id="R30214bec0cbd41fb"/>
+    <p:notesMasterId xmlns:r="http://schemas.openxmlformats.org/officeDocument/2006/relationships" r:id="R3d8ab4d9cfa54910"/>
   </p:notesMasterIdLst>
   <p:sldIdLst>
-    <p:sldId xmlns:r="http://schemas.openxmlformats.org/officeDocument/2006/relationships" id="256" r:id="R54a419f5acf44c12"/>
-    <p:sldId xmlns:r="http://schemas.openxmlformats.org/officeDocument/2006/relationships" id="257" r:id="R49ac621a0d9b4676"/>
-    <p:sldId xmlns:r="http://schemas.openxmlformats.org/officeDocument/2006/relationships" id="258" r:id="Re4472a261d8542e8"/>
-    <p:sldId xmlns:r="http://schemas.openxmlformats.org/officeDocument/2006/relationships" id="259" r:id="R6c5dafd550964940"/>
-    <p:sldId xmlns:r="http://schemas.openxmlformats.org/officeDocument/2006/relationships" id="260" r:id="R0645639e024349e5"/>
-    <p:sldId xmlns:r="http://schemas.openxmlformats.org/officeDocument/2006/relationships" id="261" r:id="Rf8235a4e25294fb2"/>
-    <p:sldId xmlns:r="http://schemas.openxmlformats.org/officeDocument/2006/relationships" id="262" r:id="R3885ed69a77341ef"/>
-    <p:sldId xmlns:r="http://schemas.openxmlformats.org/officeDocument/2006/relationships" id="263" r:id="Rfed9f0f27eaa41a4"/>
-    <p:sldId xmlns:r="http://schemas.openxmlformats.org/officeDocument/2006/relationships" id="264" r:id="Rdb536370759844aa"/>
-    <p:sldId xmlns:r="http://schemas.openxmlformats.org/officeDocument/2006/relationships" id="265" r:id="Rd2500efbb61c4c85"/>
-    <p:sldId xmlns:r="http://schemas.openxmlformats.org/officeDocument/2006/relationships" id="266" r:id="R880313408f394e54"/>
-    <p:sldId xmlns:r="http://schemas.openxmlformats.org/officeDocument/2006/relationships" id="267" r:id="R02b1380f3bb64349"/>
-    <p:sldId xmlns:r="http://schemas.openxmlformats.org/officeDocument/2006/relationships" id="268" r:id="R7c461ae444dd4ab6"/>
-    <p:sldId xmlns:r="http://schemas.openxmlformats.org/officeDocument/2006/relationships" id="269" r:id="Rfa762dbcad7f49e7"/>
-    <p:sldId xmlns:r="http://schemas.openxmlformats.org/officeDocument/2006/relationships" id="270" r:id="R3a98809f153145e8"/>
-    <p:sldId xmlns:r="http://schemas.openxmlformats.org/officeDocument/2006/relationships" id="271" r:id="Rc548e0460ad84b13"/>
-    <p:sldId xmlns:r="http://schemas.openxmlformats.org/officeDocument/2006/relationships" id="272" r:id="Rf64c3155233f4a99"/>
-    <p:sldId xmlns:r="http://schemas.openxmlformats.org/officeDocument/2006/relationships" id="273" r:id="R1eba9e2d8d0a4517"/>
-    <p:sldId xmlns:r="http://schemas.openxmlformats.org/officeDocument/2006/relationships" id="274" r:id="R8a9da1a01da047c9"/>
-    <p:sldId xmlns:r="http://schemas.openxmlformats.org/officeDocument/2006/relationships" id="275" r:id="R8b1bfbc492a54323"/>
-    <p:sldId xmlns:r="http://schemas.openxmlformats.org/officeDocument/2006/relationships" id="276" r:id="Rbdcd86c0088a44ae"/>
-    <p:sldId xmlns:r="http://schemas.openxmlformats.org/officeDocument/2006/relationships" id="277" r:id="R5146a19a60344a08"/>
-    <p:sldId xmlns:r="http://schemas.openxmlformats.org/officeDocument/2006/relationships" id="278" r:id="Rc266c82505b24b05"/>
+    <p:sldId xmlns:r="http://schemas.openxmlformats.org/officeDocument/2006/relationships" id="256" r:id="R8dab3aaf10494ca6"/>
+    <p:sldId xmlns:r="http://schemas.openxmlformats.org/officeDocument/2006/relationships" id="257" r:id="R7d5ccc01832541e8"/>
+    <p:sldId xmlns:r="http://schemas.openxmlformats.org/officeDocument/2006/relationships" id="258" r:id="Rdf206e1b5c68413b"/>
+    <p:sldId xmlns:r="http://schemas.openxmlformats.org/officeDocument/2006/relationships" id="259" r:id="Rc6a9ea1ad4234004"/>
+    <p:sldId xmlns:r="http://schemas.openxmlformats.org/officeDocument/2006/relationships" id="260" r:id="R213f2f324d604ecf"/>
+    <p:sldId xmlns:r="http://schemas.openxmlformats.org/officeDocument/2006/relationships" id="261" r:id="R994f085237324869"/>
+    <p:sldId xmlns:r="http://schemas.openxmlformats.org/officeDocument/2006/relationships" id="262" r:id="Rb547301698ae4e18"/>
+    <p:sldId xmlns:r="http://schemas.openxmlformats.org/officeDocument/2006/relationships" id="263" r:id="Rf4491fe6e9824604"/>
+    <p:sldId xmlns:r="http://schemas.openxmlformats.org/officeDocument/2006/relationships" id="264" r:id="R4aaa9c64e6b64cf5"/>
+    <p:sldId xmlns:r="http://schemas.openxmlformats.org/officeDocument/2006/relationships" id="265" r:id="R237a5bce76e04972"/>
+    <p:sldId xmlns:r="http://schemas.openxmlformats.org/officeDocument/2006/relationships" id="266" r:id="R23e43d821d4c46c4"/>
+    <p:sldId xmlns:r="http://schemas.openxmlformats.org/officeDocument/2006/relationships" id="267" r:id="R22cfc8b47f234451"/>
+    <p:sldId xmlns:r="http://schemas.openxmlformats.org/officeDocument/2006/relationships" id="268" r:id="Rad941524ed7249c8"/>
+    <p:sldId xmlns:r="http://schemas.openxmlformats.org/officeDocument/2006/relationships" id="269" r:id="Rfa68cad13ed94f25"/>
+    <p:sldId xmlns:r="http://schemas.openxmlformats.org/officeDocument/2006/relationships" id="270" r:id="R83f8a8dcc0b940c2"/>
+    <p:sldId xmlns:r="http://schemas.openxmlformats.org/officeDocument/2006/relationships" id="271" r:id="Ra1f85339196c45e5"/>
+    <p:sldId xmlns:r="http://schemas.openxmlformats.org/officeDocument/2006/relationships" id="272" r:id="R80d8b52298e4429a"/>
+    <p:sldId xmlns:r="http://schemas.openxmlformats.org/officeDocument/2006/relationships" id="273" r:id="R648563cf5ac0469a"/>
+    <p:sldId xmlns:r="http://schemas.openxmlformats.org/officeDocument/2006/relationships" id="274" r:id="R1484e7ecbec949d8"/>
+    <p:sldId xmlns:r="http://schemas.openxmlformats.org/officeDocument/2006/relationships" id="275" r:id="Rb79833eaa2df4063"/>
+    <p:sldId xmlns:r="http://schemas.openxmlformats.org/officeDocument/2006/relationships" id="276" r:id="R1e45ea9a4fc241b8"/>
+    <p:sldId xmlns:r="http://schemas.openxmlformats.org/officeDocument/2006/relationships" id="277" r:id="R023748979ad74fa2"/>
   </p:sldIdLst>
   <p:sldSz cx="12192000" cy="6858000"/>
   <p:notesSz cx="6858000" cy="9144000"/>
   <p:embeddedFontLst>
     <p:embeddedFont>
       <p:font typeface="OpenAI Sans"/>
-      <p:regular xmlns:r="http://schemas.openxmlformats.org/officeDocument/2006/relationships" r:id="Rc93f8612a50a40d7"/>
-      <p:bold xmlns:r="http://schemas.openxmlformats.org/officeDocument/2006/relationships" r:id="R7bcd55f6e24d44e8"/>
-      <p:italic xmlns:r="http://schemas.openxmlformats.org/officeDocument/2006/relationships" r:id="R04d937ebf9d84e42"/>
-      <p:boldItalic xmlns:r="http://schemas.openxmlformats.org/officeDocument/2006/relationships" r:id="Rebc70526097844a6"/>
+      <p:regular xmlns:r="http://schemas.openxmlformats.org/officeDocument/2006/relationships" r:id="R28d6267d361b48d6"/>
+      <p:bold xmlns:r="http://schemas.openxmlformats.org/officeDocument/2006/relationships" r:id="Ra8af04b54b4345d6"/>
+      <p:italic xmlns:r="http://schemas.openxmlformats.org/officeDocument/2006/relationships" r:id="R4960771da5a049cf"/>
+      <p:boldItalic xmlns:r="http://schemas.openxmlformats.org/officeDocument/2006/relationships" r:id="Rb2e071fd818540bd"/>
     </p:embeddedFont>
   </p:embeddedFontLst>
   <p:defaultTextStyle>
@@ -1942,7 +1941,7 @@
               <a:buNone/>
             </a:pPr>
             <a:r>
-              <a:t>Say: a large tray can hold one small cup; tray size and cup size are different. This is why both 64-bit and 8-byte choices on released Quiz 3A Q11 were insufficient. XMM is the low 128 bits of the corresponding YMM; ZMM, when present, extends that storage further. x87 has its own register stack, separate from the function-call stack. MMX registers are packed-integer aliases of x87 storage, not another name for XMM. Scalar mulss/addss use float values, not integer addition of their bit encodings.</a:t>
+              <a:t>Ask the two answer-reveal questions aloud: convert 0xA7; then list bytes of 0xA7B2 little-endian. Break into 4-bit groups and insist on preserving leading zeros within each nibble. For the endian example, draw addresses 1000 and 1001 and place full byte pairs into them. Do not reverse the digits inside a byte or the individual bits. Reading a uint32_t word in GDB and listing its bytes are different displays.</a:t>
             </a:r>
             <a:endParaRPr/>
           </a:p>
@@ -1972,7 +1971,7 @@
               <a:buNone/>
             </a:pPr>
             <a:r>
-              <a:t>Sources: https://firner.com/presentations/cs211/2026-Fall/cs211_11/; https://www.intel.com/content/www/us/en/developer/articles/technical/intel-sdm.html</a:t>
+              <a:t>Sources: https://firner.com/presentations/cs211/2026-Fall/cs211_01/; https://firner.com/presentations/cs211/2026-Fall/cs211_03/</a:t>
             </a:r>
             <a:endParaRPr/>
           </a:p>
@@ -2002,7 +2001,7 @@
               <a:buNone/>
             </a:pPr>
             <a:r>
-              <a:t>Answer: 1. A 32-bit float stored in XMM does not make XMM a 32-bit register. XMM is 128 bits wide.</a:t>
+              <a:t>Answer: 1. 0xA7 expands to 1010 0111₂.</a:t>
             </a:r>
             <a:endParaRPr/>
           </a:p>
@@ -2032,7 +2031,7 @@
               <a:buNone/>
             </a:pPr>
             <a:r>
-              <a:t>2. The largest available register depends on CPU extensions; common examples are wider than 64 bits.</a:t>
+              <a:t>2. In little-endian memory, 0xA7B2 as a 16-bit value stores B2 first, then A7.</a:t>
             </a:r>
             <a:endParaRPr/>
           </a:p>
@@ -2112,7 +2111,7 @@
               <a:buNone/>
             </a:pPr>
             <a:r>
-              <a:t>Ask the two answer-reveal questions aloud: convert 0xA7; then list bytes of 0xA7B2 little-endian. Break into 4-bit groups and insist on preserving leading zeros within each nibble. For the endian example, draw addresses 1000 and 1001 and place full byte pairs into them. Do not reverse the digits inside a byte or the individual bits. Reading a uint32_t word in GDB and listing its bytes are different displays.</a:t>
+              <a:t>Emphasize interpretation rather than a separate collection of signed memory cells. For general n-bit signed values, minimum is −2^(n−1) and maximum is 2^(n−1)−1. This is a fixed-width hardware/representation exercise. In C, small integer types are usually promoted before arithmetic, and signed overflow at the operation’s actual type width is undefined behavior; do not claim ordinary signed C overflow is guaranteed to wrap.</a:t>
             </a:r>
             <a:endParaRPr/>
           </a:p>
@@ -2142,7 +2141,7 @@
               <a:buNone/>
             </a:pPr>
             <a:r>
-              <a:t>Sources: https://firner.com/presentations/cs211/2026-Fall/cs211_01/; https://firner.com/presentations/cs211/2026-Fall/cs211_03/</a:t>
+              <a:t>Sources: https://firner.com/presentations/cs211/2026-Fall/cs211_02/; https://firner.com/presentations/cs211/2026-Fall/cs211_04/</a:t>
             </a:r>
             <a:endParaRPr/>
           </a:p>
@@ -2172,7 +2171,7 @@
               <a:buNone/>
             </a:pPr>
             <a:r>
-              <a:t>Answer: 1. 0xA7 expands to 1010 0111₂.</a:t>
+              <a:t>Answer: 1. Signed and unsigned 8-bit values each have 256 possible patterns.</a:t>
             </a:r>
             <a:endParaRPr/>
           </a:p>
@@ -2202,7 +2201,7 @@
               <a:buNone/>
             </a:pPr>
             <a:r>
-              <a:t>2. In little-endian memory, 0xA7B2 as a 16-bit value stores B2 first, then A7.</a:t>
+              <a:t>2. The fixed-width negation pattern for 10000000 is still 10000000. Read as signed, it is −128, but the desired positive result overflowed the signed 8-bit range.</a:t>
             </a:r>
             <a:endParaRPr/>
           </a:p>
@@ -2482,7 +2481,7 @@
               <a:buNone/>
             </a:pPr>
             <a:r>
-              <a:t>Emphasize interpretation rather than a separate collection of signed memory cells. For general n-bit signed values, minimum is −2^(n−1) and maximum is 2^(n−1)−1. This is a fixed-width hardware/representation exercise. In C, small integer types are usually promoted before arithmetic, and signed overflow at the operation’s actual type width is undefined behavior; do not claim ordinary signed C overflow is guaranteed to wrap.</a:t>
+              <a:t>Draw eight seats in a row; a shift throws the person at the end away, while a rotation sends that person around to the empty seat. For the homework-style method, combine a masked left shift with x &gt;&gt; 7. State the width and use unsigned arithmetic; shift counts must be valid for the promoted operand type. This is a one-bit illustration, not a complete general rotation function with all edge cases.</a:t>
             </a:r>
             <a:endParaRPr/>
           </a:p>
@@ -2512,7 +2511,7 @@
               <a:buNone/>
             </a:pPr>
             <a:r>
-              <a:t>Sources: https://firner.com/presentations/cs211/2026-Fall/cs211_02/; https://firner.com/presentations/cs211/2026-Fall/cs211_04/</a:t>
+              <a:t>Sources: https://firner.com/presentations/cs211/2026-Fall/cs211_02/; https://firner.com/presentations/cs211/2026-Fall/hw2.html</a:t>
             </a:r>
             <a:endParaRPr/>
           </a:p>
@@ -2542,7 +2541,7 @@
               <a:buNone/>
             </a:pPr>
             <a:r>
-              <a:t>Answer: 1. Signed and unsigned 8-bit values each have 256 possible patterns.</a:t>
+              <a:t>Answer: 1. x &amp; 0x0F = 0x06, keeping the low four bits.</a:t>
             </a:r>
             <a:endParaRPr/>
           </a:p>
@@ -2572,7 +2571,37 @@
               <a:buNone/>
             </a:pPr>
             <a:r>
-              <a:t>2. The fixed-width negation pattern for 10000000 is still 10000000. Read as signed, it is −128, but the desired positive result overflowed the signed 8-bit range.</a:t>
+              <a:t>2. The masked left shift is 0x6C = 01101100₂.</a:t>
+            </a:r>
+            <a:endParaRPr/>
+          </a:p>
+          <a:p xmlns:a="http://schemas.openxmlformats.org/drawingml/2006/main">
+            <a:pPr marL="0" lvl="0" indent="0" algn="l">
+              <a:spcBef>
+                <a:spcPts val="0"/>
+              </a:spcBef>
+              <a:spcAft>
+                <a:spcPts val="0"/>
+              </a:spcAft>
+              <a:buNone/>
+            </a:pPr>
+            <a:r>
+              <a:t/>
+            </a:r>
+            <a:endParaRPr/>
+          </a:p>
+          <a:p xmlns:a="http://schemas.openxmlformats.org/drawingml/2006/main">
+            <a:pPr marL="0" lvl="0" indent="0" algn="l">
+              <a:spcBef>
+                <a:spcPts val="0"/>
+              </a:spcBef>
+              <a:spcAft>
+                <a:spcPts val="0"/>
+              </a:spcAft>
+              <a:buNone/>
+            </a:pPr>
+            <a:r>
+              <a:t>3. The rotation is 0x6D = 01101101₂: the old top bit becomes the low bit.</a:t>
             </a:r>
             <a:endParaRPr/>
           </a:p>
@@ -2652,7 +2681,7 @@
               <a:buNone/>
             </a:pPr>
             <a:r>
-              <a:t>Draw eight seats in a row; a shift throws the person at the end away, while a rotation sends that person around to the empty seat. For the homework-style method, combine a masked left shift with x &gt;&gt; 7. State the width and use unsigned arithmetic; shift counts must be valid for the promoted operand type. This is a one-bit illustration, not a complete general rotation function with all edge cases.</a:t>
+              <a:t>Board: draw columns A, B, A AND B, NOT A, Out. For each row, fill both internal columns before Out. Circle the wire entering NOT so students do not invert the wrong input. In C, bitwise &amp;, |, ~ operate on bit patterns, while logical &amp;&amp;, ||, ! operate on truth values; this slide is single-bit logic. A truth table with n binary inputs needs 2^n rows.</a:t>
             </a:r>
             <a:endParaRPr/>
           </a:p>
@@ -2682,7 +2711,7 @@
               <a:buNone/>
             </a:pPr>
             <a:r>
-              <a:t>Sources: https://firner.com/presentations/cs211/2026-Fall/cs211_02/; https://firner.com/presentations/cs211/2026-Fall/hw2.html</a:t>
+              <a:t>Sources: https://firner.com/presentations/cs211/2026-Fall/cs211_02/; https://firner.com/presentations/cs211/2026-Fall/cs211_12/</a:t>
             </a:r>
             <a:endParaRPr/>
           </a:p>
@@ -2712,7 +2741,7 @@
               <a:buNone/>
             </a:pPr>
             <a:r>
-              <a:t>Answer: 1. x &amp; 0x0F = 0x06, keeping the low four bits.</a:t>
+              <a:t>Answer: 1. A=0,B=0: AND=0, NOT A=1, so output=1.</a:t>
             </a:r>
             <a:endParaRPr/>
           </a:p>
@@ -2742,7 +2771,7 @@
               <a:buNone/>
             </a:pPr>
             <a:r>
-              <a:t>2. The masked left shift is 0x6C = 01101100₂.</a:t>
+              <a:t>2. A=0,B=1: AND=0, NOT A=1, so output=1.</a:t>
             </a:r>
             <a:endParaRPr/>
           </a:p>
@@ -2772,7 +2801,37 @@
               <a:buNone/>
             </a:pPr>
             <a:r>
-              <a:t>3. The rotation is 0x6D = 01101101₂: the old top bit becomes the low bit.</a:t>
+              <a:t>3. A=1,B=0: AND=0, NOT A=0, so output=0.</a:t>
+            </a:r>
+            <a:endParaRPr/>
+          </a:p>
+          <a:p xmlns:a="http://schemas.openxmlformats.org/drawingml/2006/main">
+            <a:pPr marL="0" lvl="0" indent="0" algn="l">
+              <a:spcBef>
+                <a:spcPts val="0"/>
+              </a:spcBef>
+              <a:spcAft>
+                <a:spcPts val="0"/>
+              </a:spcAft>
+              <a:buNone/>
+            </a:pPr>
+            <a:r>
+              <a:t/>
+            </a:r>
+            <a:endParaRPr/>
+          </a:p>
+          <a:p xmlns:a="http://schemas.openxmlformats.org/drawingml/2006/main">
+            <a:pPr marL="0" lvl="0" indent="0" algn="l">
+              <a:spcBef>
+                <a:spcPts val="0"/>
+              </a:spcBef>
+              <a:spcAft>
+                <a:spcPts val="0"/>
+              </a:spcAft>
+              <a:buNone/>
+            </a:pPr>
+            <a:r>
+              <a:t>4. A=1,B=1: AND=1, NOT A=0, so output=1.</a:t>
             </a:r>
             <a:endParaRPr/>
           </a:p>
@@ -2804,236 +2863,6 @@
 </file>
 
 <file path=ppt/notesSlides/notesSlide22.xml><?xml version="1.0" encoding="utf-8"?>
-<p:notes xmlns:p="http://schemas.openxmlformats.org/presentationml/2006/main">
-  <p:cSld>
-    <p:spTree>
-      <p:nvGrpSpPr>
-        <p:cNvPr id="1" name=""/>
-        <p:cNvGrpSpPr/>
-        <p:nvPr/>
-      </p:nvGrpSpPr>
-      <p:grpSpPr>
-        <a:xfrm xmlns:a="http://schemas.openxmlformats.org/drawingml/2006/main"/>
-      </p:grpSpPr>
-      <p:sp>
-        <p:nvSpPr>
-          <p:cNvPr id="2" name="Slide Image Placeholder 1"/>
-          <p:cNvSpPr>
-            <a:spLocks xmlns:a="http://schemas.openxmlformats.org/drawingml/2006/main" noGrp="1"/>
-          </p:cNvSpPr>
-          <p:nvPr>
-            <p:ph type="sldImg" idx="0"/>
-          </p:nvPr>
-        </p:nvSpPr>
-        <p:spPr/>
-      </p:sp>
-      <p:sp>
-        <p:nvSpPr>
-          <p:cNvPr id="3" name="Notes Placeholder 2"/>
-          <p:cNvSpPr>
-            <a:spLocks xmlns:a="http://schemas.openxmlformats.org/drawingml/2006/main" noGrp="1"/>
-          </p:cNvSpPr>
-          <p:nvPr>
-            <p:ph type="body" idx="1"/>
-          </p:nvPr>
-        </p:nvSpPr>
-        <p:spPr/>
-        <p:txBody>
-          <a:bodyPr xmlns:a="http://schemas.openxmlformats.org/drawingml/2006/main"/>
-          <a:lstStyle xmlns:a="http://schemas.openxmlformats.org/drawingml/2006/main"/>
-          <a:p xmlns:a="http://schemas.openxmlformats.org/drawingml/2006/main">
-            <a:pPr marL="0" lvl="0" indent="0" algn="l">
-              <a:spcBef>
-                <a:spcPts val="0"/>
-              </a:spcBef>
-              <a:spcAft>
-                <a:spcPts val="0"/>
-              </a:spcAft>
-              <a:buNone/>
-            </a:pPr>
-            <a:r>
-              <a:t>Board: draw columns A, B, A AND B, NOT A, Out. For each row, fill both internal columns before Out. Circle the wire entering NOT so students do not invert the wrong input. In C, bitwise &amp;, |, ~ operate on bit patterns, while logical &amp;&amp;, ||, ! operate on truth values; this slide is single-bit logic. A truth table with n binary inputs needs 2^n rows.</a:t>
-            </a:r>
-            <a:endParaRPr/>
-          </a:p>
-          <a:p xmlns:a="http://schemas.openxmlformats.org/drawingml/2006/main">
-            <a:pPr marL="0" lvl="0" indent="0" algn="l">
-              <a:spcBef>
-                <a:spcPts val="0"/>
-              </a:spcBef>
-              <a:spcAft>
-                <a:spcPts val="0"/>
-              </a:spcAft>
-              <a:buNone/>
-            </a:pPr>
-            <a:r>
-              <a:t/>
-            </a:r>
-            <a:endParaRPr/>
-          </a:p>
-          <a:p xmlns:a="http://schemas.openxmlformats.org/drawingml/2006/main">
-            <a:pPr marL="0" lvl="0" indent="0" algn="l">
-              <a:spcBef>
-                <a:spcPts val="0"/>
-              </a:spcBef>
-              <a:spcAft>
-                <a:spcPts val="0"/>
-              </a:spcAft>
-              <a:buNone/>
-            </a:pPr>
-            <a:r>
-              <a:t>Sources: https://firner.com/presentations/cs211/2026-Fall/cs211_02/; https://firner.com/presentations/cs211/2026-Fall/cs211_12/</a:t>
-            </a:r>
-            <a:endParaRPr/>
-          </a:p>
-          <a:p xmlns:a="http://schemas.openxmlformats.org/drawingml/2006/main">
-            <a:pPr marL="0" lvl="0" indent="0" algn="l">
-              <a:spcBef>
-                <a:spcPts val="0"/>
-              </a:spcBef>
-              <a:spcAft>
-                <a:spcPts val="0"/>
-              </a:spcAft>
-              <a:buNone/>
-            </a:pPr>
-            <a:r>
-              <a:t/>
-            </a:r>
-            <a:endParaRPr/>
-          </a:p>
-          <a:p xmlns:a="http://schemas.openxmlformats.org/drawingml/2006/main">
-            <a:pPr marL="0" lvl="0" indent="0" algn="l">
-              <a:spcBef>
-                <a:spcPts val="0"/>
-              </a:spcBef>
-              <a:spcAft>
-                <a:spcPts val="0"/>
-              </a:spcAft>
-              <a:buNone/>
-            </a:pPr>
-            <a:r>
-              <a:t>Answer: 1. A=0,B=0: AND=0, NOT A=1, so output=1.</a:t>
-            </a:r>
-            <a:endParaRPr/>
-          </a:p>
-          <a:p xmlns:a="http://schemas.openxmlformats.org/drawingml/2006/main">
-            <a:pPr marL="0" lvl="0" indent="0" algn="l">
-              <a:spcBef>
-                <a:spcPts val="0"/>
-              </a:spcBef>
-              <a:spcAft>
-                <a:spcPts val="0"/>
-              </a:spcAft>
-              <a:buNone/>
-            </a:pPr>
-            <a:r>
-              <a:t/>
-            </a:r>
-            <a:endParaRPr/>
-          </a:p>
-          <a:p xmlns:a="http://schemas.openxmlformats.org/drawingml/2006/main">
-            <a:pPr marL="0" lvl="0" indent="0" algn="l">
-              <a:spcBef>
-                <a:spcPts val="0"/>
-              </a:spcBef>
-              <a:spcAft>
-                <a:spcPts val="0"/>
-              </a:spcAft>
-              <a:buNone/>
-            </a:pPr>
-            <a:r>
-              <a:t>2. A=0,B=1: AND=0, NOT A=1, so output=1.</a:t>
-            </a:r>
-            <a:endParaRPr/>
-          </a:p>
-          <a:p xmlns:a="http://schemas.openxmlformats.org/drawingml/2006/main">
-            <a:pPr marL="0" lvl="0" indent="0" algn="l">
-              <a:spcBef>
-                <a:spcPts val="0"/>
-              </a:spcBef>
-              <a:spcAft>
-                <a:spcPts val="0"/>
-              </a:spcAft>
-              <a:buNone/>
-            </a:pPr>
-            <a:r>
-              <a:t/>
-            </a:r>
-            <a:endParaRPr/>
-          </a:p>
-          <a:p xmlns:a="http://schemas.openxmlformats.org/drawingml/2006/main">
-            <a:pPr marL="0" lvl="0" indent="0" algn="l">
-              <a:spcBef>
-                <a:spcPts val="0"/>
-              </a:spcBef>
-              <a:spcAft>
-                <a:spcPts val="0"/>
-              </a:spcAft>
-              <a:buNone/>
-            </a:pPr>
-            <a:r>
-              <a:t>3. A=1,B=0: AND=0, NOT A=0, so output=0.</a:t>
-            </a:r>
-            <a:endParaRPr/>
-          </a:p>
-          <a:p xmlns:a="http://schemas.openxmlformats.org/drawingml/2006/main">
-            <a:pPr marL="0" lvl="0" indent="0" algn="l">
-              <a:spcBef>
-                <a:spcPts val="0"/>
-              </a:spcBef>
-              <a:spcAft>
-                <a:spcPts val="0"/>
-              </a:spcAft>
-              <a:buNone/>
-            </a:pPr>
-            <a:r>
-              <a:t/>
-            </a:r>
-            <a:endParaRPr/>
-          </a:p>
-          <a:p xmlns:a="http://schemas.openxmlformats.org/drawingml/2006/main">
-            <a:pPr marL="0" lvl="0" indent="0" algn="l">
-              <a:spcBef>
-                <a:spcPts val="0"/>
-              </a:spcBef>
-              <a:spcAft>
-                <a:spcPts val="0"/>
-              </a:spcAft>
-              <a:buNone/>
-            </a:pPr>
-            <a:r>
-              <a:t>4. A=1,B=1: AND=1, NOT A=0, so output=1.</a:t>
-            </a:r>
-            <a:endParaRPr/>
-          </a:p>
-        </p:txBody>
-      </p:sp>
-      <p:sp>
-        <p:nvSpPr>
-          <p:cNvPr id="4" name="Slide Number Placeholder 3"/>
-          <p:cNvSpPr>
-            <a:spLocks xmlns:a="http://schemas.openxmlformats.org/drawingml/2006/main" noGrp="1"/>
-          </p:cNvSpPr>
-          <p:nvPr>
-            <p:ph type="sldNum" idx="5"/>
-          </p:nvPr>
-        </p:nvSpPr>
-        <p:spPr/>
-        <p:txBody>
-          <a:bodyPr xmlns:a="http://schemas.openxmlformats.org/drawingml/2006/main"/>
-          <a:lstStyle xmlns:a="http://schemas.openxmlformats.org/drawingml/2006/main"/>
-          <a:p xmlns:a="http://schemas.openxmlformats.org/drawingml/2006/main"/>
-        </p:txBody>
-      </p:sp>
-    </p:spTree>
-  </p:cSld>
-  <p:clrMapOvr>
-    <a:masterClrMapping xmlns:a="http://schemas.openxmlformats.org/drawingml/2006/main"/>
-  </p:clrMapOvr>
-</p:notes>
-</file>
-
-<file path=ppt/notesSlides/notesSlide23.xml><?xml version="1.0" encoding="utf-8"?>
 <p:notes xmlns:p="http://schemas.openxmlformats.org/presentationml/2006/main">
   <p:cSld>
     <p:spTree>
@@ -6156,14 +5985,14 @@
   </p:cSld>
   <p:clrMap bg1="dk1" tx1="lt1" bg2="dk2" tx2="lt2" accent1="accent1" accent2="accent2" accent3="accent3" accent4="accent4" accent5="accent5" accent6="accent6" hlink="hlink" folHlink="folHlink"/>
   <p:sldLayoutIdLst>
-    <p:sldLayoutId xmlns:r="http://schemas.openxmlformats.org/officeDocument/2006/relationships" id="2147483649" r:id="R78d557211e4b4205"/>
-    <p:sldLayoutId xmlns:r="http://schemas.openxmlformats.org/officeDocument/2006/relationships" id="2147483650" r:id="R04fbee4d4c464775"/>
-    <p:sldLayoutId xmlns:r="http://schemas.openxmlformats.org/officeDocument/2006/relationships" id="2147483651" r:id="R75667768e0084791"/>
-    <p:sldLayoutId xmlns:r="http://schemas.openxmlformats.org/officeDocument/2006/relationships" id="2147483652" r:id="Re451ec1b75de41e1"/>
-    <p:sldLayoutId xmlns:r="http://schemas.openxmlformats.org/officeDocument/2006/relationships" id="2147483653" r:id="Re0d369c2f161460c"/>
-    <p:sldLayoutId xmlns:r="http://schemas.openxmlformats.org/officeDocument/2006/relationships" id="2147483654" r:id="R57b2f11281744806"/>
-    <p:sldLayoutId xmlns:r="http://schemas.openxmlformats.org/officeDocument/2006/relationships" id="2147483655" r:id="R10f7d0a00fee4c25"/>
-    <p:sldLayoutId xmlns:r="http://schemas.openxmlformats.org/officeDocument/2006/relationships" id="2147483656" r:id="R79d3cea4952e4313"/>
+    <p:sldLayoutId xmlns:r="http://schemas.openxmlformats.org/officeDocument/2006/relationships" id="2147483649" r:id="R29f3c32ccf024bba"/>
+    <p:sldLayoutId xmlns:r="http://schemas.openxmlformats.org/officeDocument/2006/relationships" id="2147483650" r:id="Rfe82a67123524ec7"/>
+    <p:sldLayoutId xmlns:r="http://schemas.openxmlformats.org/officeDocument/2006/relationships" id="2147483651" r:id="R764a44180c664fa7"/>
+    <p:sldLayoutId xmlns:r="http://schemas.openxmlformats.org/officeDocument/2006/relationships" id="2147483652" r:id="R5bbc885e11784e98"/>
+    <p:sldLayoutId xmlns:r="http://schemas.openxmlformats.org/officeDocument/2006/relationships" id="2147483653" r:id="R58f791987a7247e7"/>
+    <p:sldLayoutId xmlns:r="http://schemas.openxmlformats.org/officeDocument/2006/relationships" id="2147483654" r:id="R481cb4a3e68b4ea9"/>
+    <p:sldLayoutId xmlns:r="http://schemas.openxmlformats.org/officeDocument/2006/relationships" id="2147483655" r:id="Rd983b1f2b0cf4bce"/>
+    <p:sldLayoutId xmlns:r="http://schemas.openxmlformats.org/officeDocument/2006/relationships" id="2147483656" r:id="Rdd0664d47146485b"/>
   </p:sldLayoutIdLst>
   <p:hf hdr="0" dt="0"/>
   <p:txStyles>
@@ -9034,7 +8863,7 @@
           <p:cNvPr id="534" name="">
             <a:extLst xmlns:a="http://schemas.openxmlformats.org/drawingml/2006/main">
               <a:ext uri="{FF2B5EF4-FFF2-40B4-BE49-F238E27FC236}">
-                <a16:creationId xmlns:a16="http://schemas.microsoft.com/office/drawing/2014/main" id="{971C40B4-20AC-4450-9A51-A85F453F177B}"/>
+                <a16:creationId xmlns:a16="http://schemas.microsoft.com/office/drawing/2014/main" id="{6126DCBC-E03C-4869-9646-67257DF6F56D}"/>
               </a:ext>
             </a:extLst>
           </p:cNvPr>
@@ -9777,7 +9606,7 @@
           <p:cNvPr id="535" name="Takeaway">
             <a:extLst xmlns:a="http://schemas.openxmlformats.org/drawingml/2006/main">
               <a:ext uri="{FF2B5EF4-FFF2-40B4-BE49-F238E27FC236}">
-                <a16:creationId xmlns:a16="http://schemas.microsoft.com/office/drawing/2014/main" id="{7FBE8C99-2F84-48F5-B843-49889E06CF14}"/>
+                <a16:creationId xmlns:a16="http://schemas.microsoft.com/office/drawing/2014/main" id="{D1443A28-0C27-40CF-8121-EF986138E0D3}"/>
               </a:ext>
             </a:extLst>
           </p:cNvPr>
@@ -11161,7 +10990,7 @@
           <p:cNvPr id="534" name="Takeaway">
             <a:extLst xmlns:a="http://schemas.openxmlformats.org/drawingml/2006/main">
               <a:ext uri="{FF2B5EF4-FFF2-40B4-BE49-F238E27FC236}">
-                <a16:creationId xmlns:a16="http://schemas.microsoft.com/office/drawing/2014/main" id="{832D1CA6-F714-43F2-92AB-193FEC35CE41}"/>
+                <a16:creationId xmlns:a16="http://schemas.microsoft.com/office/drawing/2014/main" id="{DC661101-C783-4BC7-AA3B-EE8733ED038C}"/>
               </a:ext>
             </a:extLst>
           </p:cNvPr>
@@ -12594,7 +12423,7 @@
           <p:cNvPr id="534" name="Takeaway">
             <a:extLst xmlns:a="http://schemas.openxmlformats.org/drawingml/2006/main">
               <a:ext uri="{FF2B5EF4-FFF2-40B4-BE49-F238E27FC236}">
-                <a16:creationId xmlns:a16="http://schemas.microsoft.com/office/drawing/2014/main" id="{B9374ABE-FFE3-48BB-BE72-8E7E710AE770}"/>
+                <a16:creationId xmlns:a16="http://schemas.microsoft.com/office/drawing/2014/main" id="{C807CC87-FE4E-45BF-907B-82A3C480A950}"/>
               </a:ext>
             </a:extLst>
           </p:cNvPr>
@@ -14076,7 +13905,7 @@
           <p:cNvPr id="534" name="Takeaway">
             <a:extLst xmlns:a="http://schemas.openxmlformats.org/drawingml/2006/main">
               <a:ext uri="{FF2B5EF4-FFF2-40B4-BE49-F238E27FC236}">
-                <a16:creationId xmlns:a16="http://schemas.microsoft.com/office/drawing/2014/main" id="{0185E7EE-2D1D-45DF-8068-D2D525BD8030}"/>
+                <a16:creationId xmlns:a16="http://schemas.microsoft.com/office/drawing/2014/main" id="{7F882D58-6104-4A81-A780-76E8F7C406FE}"/>
               </a:ext>
             </a:extLst>
           </p:cNvPr>
@@ -15459,7 +15288,7 @@
           <p:cNvPr id="534" name="">
             <a:extLst xmlns:a="http://schemas.openxmlformats.org/drawingml/2006/main">
               <a:ext uri="{FF2B5EF4-FFF2-40B4-BE49-F238E27FC236}">
-                <a16:creationId xmlns:a16="http://schemas.microsoft.com/office/drawing/2014/main" id="{FB8DB4C9-6933-4726-8D17-04EFE20708EA}"/>
+                <a16:creationId xmlns:a16="http://schemas.microsoft.com/office/drawing/2014/main" id="{C3FDB7B7-EF09-4638-BC1D-A97AFF6EBD36}"/>
               </a:ext>
             </a:extLst>
           </p:cNvPr>
@@ -15819,7 +15648,7 @@
           <p:cNvPr id="535" name="Takeaway">
             <a:extLst xmlns:a="http://schemas.openxmlformats.org/drawingml/2006/main">
               <a:ext uri="{FF2B5EF4-FFF2-40B4-BE49-F238E27FC236}">
-                <a16:creationId xmlns:a16="http://schemas.microsoft.com/office/drawing/2014/main" id="{E4C585EB-FCC5-4710-B805-C0B40B32A791}"/>
+                <a16:creationId xmlns:a16="http://schemas.microsoft.com/office/drawing/2014/main" id="{26446728-EABA-4E14-8CD8-CED6FC6ABE33}"/>
               </a:ext>
             </a:extLst>
           </p:cNvPr>
@@ -17269,7 +17098,7 @@
           <p:cNvPr id="534" name="Takeaway">
             <a:extLst xmlns:a="http://schemas.openxmlformats.org/drawingml/2006/main">
               <a:ext uri="{FF2B5EF4-FFF2-40B4-BE49-F238E27FC236}">
-                <a16:creationId xmlns:a16="http://schemas.microsoft.com/office/drawing/2014/main" id="{6742AE34-50CA-4D0F-A8FB-A294D37CF768}"/>
+                <a16:creationId xmlns:a16="http://schemas.microsoft.com/office/drawing/2014/main" id="{8F629B4C-85BF-4BCD-808E-A4824DFE98BF}"/>
               </a:ext>
             </a:extLst>
           </p:cNvPr>
@@ -18669,7 +18498,7 @@
           <p:cNvPr id="534" name="Takeaway">
             <a:extLst xmlns:a="http://schemas.openxmlformats.org/drawingml/2006/main">
               <a:ext uri="{FF2B5EF4-FFF2-40B4-BE49-F238E27FC236}">
-                <a16:creationId xmlns:a16="http://schemas.microsoft.com/office/drawing/2014/main" id="{F5C7BD72-255F-4EBC-AE26-AF106DC0323D}"/>
+                <a16:creationId xmlns:a16="http://schemas.microsoft.com/office/drawing/2014/main" id="{B80853D7-6010-461D-BCF0-B69BAF7757FE}"/>
               </a:ext>
             </a:extLst>
           </p:cNvPr>
@@ -20119,7 +19948,7 @@
           <p:cNvPr id="534" name="Takeaway">
             <a:extLst xmlns:a="http://schemas.openxmlformats.org/drawingml/2006/main">
               <a:ext uri="{FF2B5EF4-FFF2-40B4-BE49-F238E27FC236}">
-                <a16:creationId xmlns:a16="http://schemas.microsoft.com/office/drawing/2014/main" id="{4DF58262-EB23-4D35-8BD2-FBAEE31CB15B}"/>
+                <a16:creationId xmlns:a16="http://schemas.microsoft.com/office/drawing/2014/main" id="{3AB64039-1C82-40A6-BCBA-0FF28061D2D8}"/>
               </a:ext>
             </a:extLst>
           </p:cNvPr>
@@ -20788,7 +20617,7 @@
                 <a:ea typeface="Arial"/>
                 <a:cs typeface="Arial"/>
               </a:rPr>
-              <a:t>A 64-bit CPU can have wider registers</a:t>
+              <a:t>Hex, binary, and byte order</a:t>
             </a:r>
           </a:p>
         </p:txBody>
@@ -21024,7 +20853,7 @@
                 <a:ea typeface="Arial"/>
                 <a:cs typeface="Arial"/>
               </a:rPr>
-              <a:t>The machine’s common integer-register width does not set the maximum size of every register.</a:t>
+              <a:t>One hex digit represents four bits. Convert one digit at a time.</a:t>
             </a:r>
           </a:p>
           <a:p xmlns:a="http://schemas.openxmlformats.org/drawingml/2006/main">
@@ -21074,7 +20903,7 @@
                 <a:ea typeface="Arial"/>
                 <a:cs typeface="Arial"/>
               </a:rPr>
-              <a:t>An XMM register can hold a scalar 32-bit float even though the register itself is 128 bits wide.</a:t>
+              <a:t>Endianness orders bytes in memory; it does not reverse the bits within each byte.</a:t>
             </a:r>
           </a:p>
           <a:p xmlns:a="http://schemas.openxmlformats.org/drawingml/2006/main">
@@ -21124,7 +20953,7 @@
                 <a:ea typeface="Arial"/>
                 <a:cs typeface="Arial"/>
               </a:rPr>
-              <a:t>Wider extensions depend on the supported instruction set.</a:t>
+              <a:t>Start at the lowest address when listing stored bytes.</a:t>
             </a:r>
           </a:p>
         </p:txBody>
@@ -21360,7 +21189,7 @@
                 <a:ea typeface="Consolas"/>
                 <a:cs typeface="Consolas"/>
               </a:rPr>
-              <a:t>x87: 80-bit floating-point registers</a:t>
+              <a:t>0xD6 = 1101 0110₂</a:t>
             </a:r>
           </a:p>
           <a:p xmlns:a="http://schemas.openxmlformats.org/drawingml/2006/main">
@@ -21393,7 +21222,7 @@
                 <a:ea typeface="Consolas"/>
                 <a:cs typeface="Consolas"/>
               </a:rPr>
-              <a:t>XMM: 128 bits = 16 bytes</a:t>
+              <a:t>0x1234, low address first:</a:t>
             </a:r>
           </a:p>
           <a:p xmlns:a="http://schemas.openxmlformats.org/drawingml/2006/main">
@@ -21426,7 +21255,7 @@
                 <a:ea typeface="Consolas"/>
                 <a:cs typeface="Consolas"/>
               </a:rPr>
-              <a:t>YMM: 256 bits = 32 bytes</a:t>
+              <a:t>Little endian: 34 12</a:t>
             </a:r>
           </a:p>
           <a:p xmlns:a="http://schemas.openxmlformats.org/drawingml/2006/main">
@@ -21459,7 +21288,7 @@
                 <a:ea typeface="Consolas"/>
                 <a:cs typeface="Consolas"/>
               </a:rPr>
-              <a:t>ZMM: 512 bits = 64 bytes (AVX-512)</a:t>
+              <a:t>Big endian:    12 34</a:t>
             </a:r>
           </a:p>
           <a:p xmlns:a="http://schemas.openxmlformats.org/drawingml/2006/main">
@@ -21509,7 +21338,7 @@
                 <a:ea typeface="Consolas"/>
                 <a:cs typeface="Consolas"/>
               </a:rPr>
-              <a:t>movss / addss: low scalar FP32</a:t>
+              <a:t>Your turn:</a:t>
             </a:r>
           </a:p>
           <a:p xmlns:a="http://schemas.openxmlformats.org/drawingml/2006/main">
@@ -21542,7 +21371,40 @@
                 <a:ea typeface="Consolas"/>
                 <a:cs typeface="Consolas"/>
               </a:rPr>
-              <a:t>movsd / addsd: low scalar FP64</a:t>
+              <a:t>1. 0xA7 in binary?</a:t>
+            </a:r>
+          </a:p>
+          <a:p xmlns:a="http://schemas.openxmlformats.org/drawingml/2006/main">
+            <a:pPr marL="0" indent="0">
+              <a:lnSpc>
+                <a:spcPct val="112000"/>
+              </a:lnSpc>
+              <a:spcBef>
+                <a:spcPts val="0"/>
+              </a:spcBef>
+              <a:spcAft>
+                <a:spcPts val="0"/>
+              </a:spcAft>
+              <a:buNone/>
+              <a:defRPr sz="1800">
+                <a:solidFill>
+                  <a:srgbClr val="FFFFFF"/>
+                </a:solidFill>
+                <a:latin typeface="Consolas"/>
+                <a:ea typeface="Consolas"/>
+                <a:cs typeface="Consolas"/>
+              </a:defRPr>
+            </a:pPr>
+            <a:r>
+              <a:rPr sz="1800">
+                <a:solidFill>
+                  <a:srgbClr val="FFFFFF"/>
+                </a:solidFill>
+                <a:latin typeface="Consolas"/>
+                <a:ea typeface="Consolas"/>
+                <a:cs typeface="Consolas"/>
+              </a:rPr>
+              <a:t>2. Bytes of 0xA7B2, little-endian?</a:t>
             </a:r>
           </a:p>
         </p:txBody>
@@ -21552,7 +21414,7 @@
           <p:cNvPr id="534" name="Takeaway">
             <a:extLst xmlns:a="http://schemas.openxmlformats.org/drawingml/2006/main">
               <a:ext uri="{FF2B5EF4-FFF2-40B4-BE49-F238E27FC236}">
-                <a16:creationId xmlns:a16="http://schemas.microsoft.com/office/drawing/2014/main" id="{812A45D3-92CA-4E5D-BD87-4E21314A084A}"/>
+                <a16:creationId xmlns:a16="http://schemas.microsoft.com/office/drawing/2014/main" id="{391D6956-D8A2-4783-945F-6EEC3B572E63}"/>
               </a:ext>
             </a:extLst>
           </p:cNvPr>
@@ -21710,7 +21572,7 @@
                 <a:ea typeface="Arial"/>
                 <a:cs typeface="Arial"/>
               </a:rPr>
-              <a:t>There is no universal “largest register = 64 bits” rule for a 64-bit system.</a:t>
+              <a:t>Same numeric value, different byte order in memory.</a:t>
             </a:r>
           </a:p>
         </p:txBody>
@@ -22221,7 +22083,7 @@
                 <a:ea typeface="Arial"/>
                 <a:cs typeface="Arial"/>
               </a:rPr>
-              <a:t>Hex, binary, and byte order</a:t>
+              <a:t>Signed values use the same bit patterns</a:t>
             </a:r>
           </a:p>
         </p:txBody>
@@ -22457,7 +22319,7 @@
                 <a:ea typeface="Arial"/>
                 <a:cs typeface="Arial"/>
               </a:rPr>
-              <a:t>One hex digit represents four bits. Convert one digit at a time.</a:t>
+              <a:t>n bits provide 2^n distinct patterns. Signed and unsigned interpretation assign different meanings to those patterns.</a:t>
             </a:r>
           </a:p>
           <a:p xmlns:a="http://schemas.openxmlformats.org/drawingml/2006/main">
@@ -22507,57 +22369,7 @@
                 <a:ea typeface="Arial"/>
                 <a:cs typeface="Arial"/>
               </a:rPr>
-              <a:t>Endianness orders bytes in memory; it does not reverse the bits within each byte.</a:t>
-            </a:r>
-          </a:p>
-          <a:p xmlns:a="http://schemas.openxmlformats.org/drawingml/2006/main">
-            <a:pPr marL="0" indent="0">
-              <a:lnSpc>
-                <a:spcPct val="112000"/>
-              </a:lnSpc>
-              <a:spcBef>
-                <a:spcPts val="0"/>
-              </a:spcBef>
-              <a:spcAft>
-                <a:spcPts val="0"/>
-              </a:spcAft>
-              <a:buNone/>
-            </a:pPr>
-            <a:r>
-              <a:t/>
-            </a:r>
-          </a:p>
-          <a:p xmlns:a="http://schemas.openxmlformats.org/drawingml/2006/main">
-            <a:pPr marL="0" indent="0">
-              <a:lnSpc>
-                <a:spcPct val="112000"/>
-              </a:lnSpc>
-              <a:spcBef>
-                <a:spcPts val="0"/>
-              </a:spcBef>
-              <a:spcAft>
-                <a:spcPts val="0"/>
-              </a:spcAft>
-              <a:buNone/>
-              <a:defRPr sz="1875">
-                <a:solidFill>
-                  <a:srgbClr val="FFFFFF"/>
-                </a:solidFill>
-                <a:latin typeface="Arial"/>
-                <a:ea typeface="Arial"/>
-                <a:cs typeface="Arial"/>
-              </a:defRPr>
-            </a:pPr>
-            <a:r>
-              <a:rPr sz="1875">
-                <a:solidFill>
-                  <a:srgbClr val="FFFFFF"/>
-                </a:solidFill>
-                <a:latin typeface="Arial"/>
-                <a:ea typeface="Arial"/>
-                <a:cs typeface="Arial"/>
-              </a:rPr>
-              <a:t>Start at the lowest address when listing stored bytes.</a:t>
+              <a:t>For 8-bit two’s complement, the range is −128 through 127. Negation flips the bits and adds 1, keeping 8 bits.</a:t>
             </a:r>
           </a:p>
         </p:txBody>
@@ -22793,7 +22605,7 @@
                 <a:ea typeface="Consolas"/>
                 <a:cs typeface="Consolas"/>
               </a:rPr>
-              <a:t>0xD6 = 1101 0110₂</a:t>
+              <a:t>8-bit pattern: 11111111</a:t>
             </a:r>
           </a:p>
           <a:p xmlns:a="http://schemas.openxmlformats.org/drawingml/2006/main">
@@ -22826,7 +22638,7 @@
                 <a:ea typeface="Consolas"/>
                 <a:cs typeface="Consolas"/>
               </a:rPr>
-              <a:t>0x1234, low address first:</a:t>
+              <a:t>Unsigned meaning: 255</a:t>
             </a:r>
           </a:p>
           <a:p xmlns:a="http://schemas.openxmlformats.org/drawingml/2006/main">
@@ -22859,7 +22671,24 @@
                 <a:ea typeface="Consolas"/>
                 <a:cs typeface="Consolas"/>
               </a:rPr>
-              <a:t>Little endian: 34 12</a:t>
+              <a:t>Signed meaning:   −1</a:t>
+            </a:r>
+          </a:p>
+          <a:p xmlns:a="http://schemas.openxmlformats.org/drawingml/2006/main">
+            <a:pPr marL="0" indent="0">
+              <a:lnSpc>
+                <a:spcPct val="112000"/>
+              </a:lnSpc>
+              <a:spcBef>
+                <a:spcPts val="0"/>
+              </a:spcBef>
+              <a:spcAft>
+                <a:spcPts val="0"/>
+              </a:spcAft>
+              <a:buNone/>
+            </a:pPr>
+            <a:r>
+              <a:t/>
             </a:r>
           </a:p>
           <a:p xmlns:a="http://schemas.openxmlformats.org/drawingml/2006/main">
@@ -22892,24 +22721,7 @@
                 <a:ea typeface="Consolas"/>
                 <a:cs typeface="Consolas"/>
               </a:rPr>
-              <a:t>Big endian:    12 34</a:t>
-            </a:r>
-          </a:p>
-          <a:p xmlns:a="http://schemas.openxmlformats.org/drawingml/2006/main">
-            <a:pPr marL="0" indent="0">
-              <a:lnSpc>
-                <a:spcPct val="112000"/>
-              </a:lnSpc>
-              <a:spcBef>
-                <a:spcPts val="0"/>
-              </a:spcBef>
-              <a:spcAft>
-                <a:spcPts val="0"/>
-              </a:spcAft>
-              <a:buNone/>
-            </a:pPr>
-            <a:r>
-              <a:t/>
+              <a:t>Negate 10000000 in 8 bits:</a:t>
             </a:r>
           </a:p>
           <a:p xmlns:a="http://schemas.openxmlformats.org/drawingml/2006/main">
@@ -22942,7 +22754,7 @@
                 <a:ea typeface="Consolas"/>
                 <a:cs typeface="Consolas"/>
               </a:rPr>
-              <a:t>Your turn:</a:t>
+              <a:t>Flip: 01111111</a:t>
             </a:r>
           </a:p>
           <a:p xmlns:a="http://schemas.openxmlformats.org/drawingml/2006/main">
@@ -22975,40 +22787,7 @@
                 <a:ea typeface="Consolas"/>
                 <a:cs typeface="Consolas"/>
               </a:rPr>
-              <a:t>1. 0xA7 in binary?</a:t>
-            </a:r>
-          </a:p>
-          <a:p xmlns:a="http://schemas.openxmlformats.org/drawingml/2006/main">
-            <a:pPr marL="0" indent="0">
-              <a:lnSpc>
-                <a:spcPct val="112000"/>
-              </a:lnSpc>
-              <a:spcBef>
-                <a:spcPts val="0"/>
-              </a:spcBef>
-              <a:spcAft>
-                <a:spcPts val="0"/>
-              </a:spcAft>
-              <a:buNone/>
-              <a:defRPr sz="1800">
-                <a:solidFill>
-                  <a:srgbClr val="FFFFFF"/>
-                </a:solidFill>
-                <a:latin typeface="Consolas"/>
-                <a:ea typeface="Consolas"/>
-                <a:cs typeface="Consolas"/>
-              </a:defRPr>
-            </a:pPr>
-            <a:r>
-              <a:rPr sz="1800">
-                <a:solidFill>
-                  <a:srgbClr val="FFFFFF"/>
-                </a:solidFill>
-                <a:latin typeface="Consolas"/>
-                <a:ea typeface="Consolas"/>
-                <a:cs typeface="Consolas"/>
-              </a:rPr>
-              <a:t>2. Bytes of 0xA7B2, little-endian?</a:t>
+              <a:t>Add 1: 10000000</a:t>
             </a:r>
           </a:p>
         </p:txBody>
@@ -23018,7 +22797,7 @@
           <p:cNvPr id="534" name="Takeaway">
             <a:extLst xmlns:a="http://schemas.openxmlformats.org/drawingml/2006/main">
               <a:ext uri="{FF2B5EF4-FFF2-40B4-BE49-F238E27FC236}">
-                <a16:creationId xmlns:a16="http://schemas.microsoft.com/office/drawing/2014/main" id="{A299AB3F-CAC7-45C6-B905-56803A147272}"/>
+                <a16:creationId xmlns:a16="http://schemas.microsoft.com/office/drawing/2014/main" id="{088693FA-538C-4604-8AAE-CE245EFAFE41}"/>
               </a:ext>
             </a:extLst>
           </p:cNvPr>
@@ -23176,7 +22955,7 @@
                 <a:ea typeface="Arial"/>
                 <a:cs typeface="Arial"/>
               </a:rPr>
-              <a:t>Same numeric value, different byte order in memory.</a:t>
+              <a:t>Mathematically +128 cannot fit in a signed 8-bit result.</a:t>
             </a:r>
           </a:p>
         </p:txBody>
@@ -24302,7 +24081,7 @@
           <p:cNvPr id="534" name="">
             <a:extLst xmlns:a="http://schemas.openxmlformats.org/drawingml/2006/main">
               <a:ext uri="{FF2B5EF4-FFF2-40B4-BE49-F238E27FC236}">
-                <a16:creationId xmlns:a16="http://schemas.microsoft.com/office/drawing/2014/main" id="{354148E4-91DD-4091-9755-846CBD5FC793}"/>
+                <a16:creationId xmlns:a16="http://schemas.microsoft.com/office/drawing/2014/main" id="{03179E62-FFE6-4C91-9F4F-8D38672E70F9}"/>
               </a:ext>
             </a:extLst>
           </p:cNvPr>
@@ -24662,7 +24441,7 @@
           <p:cNvPr id="535" name="Takeaway">
             <a:extLst xmlns:a="http://schemas.openxmlformats.org/drawingml/2006/main">
               <a:ext uri="{FF2B5EF4-FFF2-40B4-BE49-F238E27FC236}">
-                <a16:creationId xmlns:a16="http://schemas.microsoft.com/office/drawing/2014/main" id="{37164DC2-CFF4-442E-B39A-AACBDA7912AF}"/>
+                <a16:creationId xmlns:a16="http://schemas.microsoft.com/office/drawing/2014/main" id="{3100A582-35DA-4603-B89F-1EC47260928D}"/>
               </a:ext>
             </a:extLst>
           </p:cNvPr>
@@ -25331,7 +25110,7 @@
                 <a:ea typeface="Arial"/>
                 <a:cs typeface="Arial"/>
               </a:rPr>
-              <a:t>Signed values use the same bit patterns</a:t>
+              <a:t>Masks, shifts, and rotations</a:t>
             </a:r>
           </a:p>
         </p:txBody>
@@ -25567,7 +25346,7 @@
                 <a:ea typeface="Arial"/>
                 <a:cs typeface="Arial"/>
               </a:rPr>
-              <a:t>n bits provide 2^n distinct patterns. Signed and unsigned interpretation assign different meanings to those patterns.</a:t>
+              <a:t>AND keeps only bits selected by a mask. OR sets selected bits. XOR flips selected bits.</a:t>
             </a:r>
           </a:p>
           <a:p xmlns:a="http://schemas.openxmlformats.org/drawingml/2006/main">
@@ -25617,7 +25396,57 @@
                 <a:ea typeface="Arial"/>
                 <a:cs typeface="Arial"/>
               </a:rPr>
-              <a:t>For 8-bit two’s complement, the range is −128 through 127. Negation flips the bits and adds 1, keeping 8 bits.</a:t>
+              <a:t>A shift drops bits from one end. A rotation brings those bits around to the other end.</a:t>
+            </a:r>
+          </a:p>
+          <a:p xmlns:a="http://schemas.openxmlformats.org/drawingml/2006/main">
+            <a:pPr marL="0" indent="0">
+              <a:lnSpc>
+                <a:spcPct val="112000"/>
+              </a:lnSpc>
+              <a:spcBef>
+                <a:spcPts val="0"/>
+              </a:spcBef>
+              <a:spcAft>
+                <a:spcPts val="0"/>
+              </a:spcAft>
+              <a:buNone/>
+            </a:pPr>
+            <a:r>
+              <a:t/>
+            </a:r>
+          </a:p>
+          <a:p xmlns:a="http://schemas.openxmlformats.org/drawingml/2006/main">
+            <a:pPr marL="0" indent="0">
+              <a:lnSpc>
+                <a:spcPct val="112000"/>
+              </a:lnSpc>
+              <a:spcBef>
+                <a:spcPts val="0"/>
+              </a:spcBef>
+              <a:spcAft>
+                <a:spcPts val="0"/>
+              </a:spcAft>
+              <a:buNone/>
+              <a:defRPr sz="1875">
+                <a:solidFill>
+                  <a:srgbClr val="FFFFFF"/>
+                </a:solidFill>
+                <a:latin typeface="Arial"/>
+                <a:ea typeface="Arial"/>
+                <a:cs typeface="Arial"/>
+              </a:defRPr>
+            </a:pPr>
+            <a:r>
+              <a:rPr sz="1875">
+                <a:solidFill>
+                  <a:srgbClr val="FFFFFF"/>
+                </a:solidFill>
+                <a:latin typeface="Arial"/>
+                <a:ea typeface="Arial"/>
+                <a:cs typeface="Arial"/>
+              </a:rPr>
+              <a:t>Use an explicitly unsigned 8-bit model here.</a:t>
             </a:r>
           </a:p>
         </p:txBody>
@@ -25853,7 +25682,24 @@
                 <a:ea typeface="Consolas"/>
                 <a:cs typeface="Consolas"/>
               </a:rPr>
-              <a:t>8-bit pattern: 11111111</a:t>
+              <a:t>x = 0xB6 = 10110110₂</a:t>
+            </a:r>
+          </a:p>
+          <a:p xmlns:a="http://schemas.openxmlformats.org/drawingml/2006/main">
+            <a:pPr marL="0" indent="0">
+              <a:lnSpc>
+                <a:spcPct val="112000"/>
+              </a:lnSpc>
+              <a:spcBef>
+                <a:spcPts val="0"/>
+              </a:spcBef>
+              <a:spcAft>
+                <a:spcPts val="0"/>
+              </a:spcAft>
+              <a:buNone/>
+            </a:pPr>
+            <a:r>
+              <a:t/>
             </a:r>
           </a:p>
           <a:p xmlns:a="http://schemas.openxmlformats.org/drawingml/2006/main">
@@ -25886,7 +25732,7 @@
                 <a:ea typeface="Consolas"/>
                 <a:cs typeface="Consolas"/>
               </a:rPr>
-              <a:t>Unsigned meaning: 255</a:t>
+              <a:t>x &amp; 0x0F = ?</a:t>
             </a:r>
           </a:p>
           <a:p xmlns:a="http://schemas.openxmlformats.org/drawingml/2006/main">
@@ -25919,24 +25765,7 @@
                 <a:ea typeface="Consolas"/>
                 <a:cs typeface="Consolas"/>
               </a:rPr>
-              <a:t>Signed meaning:   −1</a:t>
-            </a:r>
-          </a:p>
-          <a:p xmlns:a="http://schemas.openxmlformats.org/drawingml/2006/main">
-            <a:pPr marL="0" indent="0">
-              <a:lnSpc>
-                <a:spcPct val="112000"/>
-              </a:lnSpc>
-              <a:spcBef>
-                <a:spcPts val="0"/>
-              </a:spcBef>
-              <a:spcAft>
-                <a:spcPts val="0"/>
-              </a:spcAft>
-              <a:buNone/>
-            </a:pPr>
-            <a:r>
-              <a:t/>
+              <a:t>(x &lt;&lt; 1) &amp; 0xFF = ?</a:t>
             </a:r>
           </a:p>
           <a:p xmlns:a="http://schemas.openxmlformats.org/drawingml/2006/main">
@@ -25969,73 +25798,7 @@
                 <a:ea typeface="Consolas"/>
                 <a:cs typeface="Consolas"/>
               </a:rPr>
-              <a:t>Negate 10000000 in 8 bits:</a:t>
-            </a:r>
-          </a:p>
-          <a:p xmlns:a="http://schemas.openxmlformats.org/drawingml/2006/main">
-            <a:pPr marL="0" indent="0">
-              <a:lnSpc>
-                <a:spcPct val="112000"/>
-              </a:lnSpc>
-              <a:spcBef>
-                <a:spcPts val="0"/>
-              </a:spcBef>
-              <a:spcAft>
-                <a:spcPts val="0"/>
-              </a:spcAft>
-              <a:buNone/>
-              <a:defRPr sz="1800">
-                <a:solidFill>
-                  <a:srgbClr val="FFFFFF"/>
-                </a:solidFill>
-                <a:latin typeface="Consolas"/>
-                <a:ea typeface="Consolas"/>
-                <a:cs typeface="Consolas"/>
-              </a:defRPr>
-            </a:pPr>
-            <a:r>
-              <a:rPr sz="1800">
-                <a:solidFill>
-                  <a:srgbClr val="FFFFFF"/>
-                </a:solidFill>
-                <a:latin typeface="Consolas"/>
-                <a:ea typeface="Consolas"/>
-                <a:cs typeface="Consolas"/>
-              </a:rPr>
-              <a:t>Flip: 01111111</a:t>
-            </a:r>
-          </a:p>
-          <a:p xmlns:a="http://schemas.openxmlformats.org/drawingml/2006/main">
-            <a:pPr marL="0" indent="0">
-              <a:lnSpc>
-                <a:spcPct val="112000"/>
-              </a:lnSpc>
-              <a:spcBef>
-                <a:spcPts val="0"/>
-              </a:spcBef>
-              <a:spcAft>
-                <a:spcPts val="0"/>
-              </a:spcAft>
-              <a:buNone/>
-              <a:defRPr sz="1800">
-                <a:solidFill>
-                  <a:srgbClr val="FFFFFF"/>
-                </a:solidFill>
-                <a:latin typeface="Consolas"/>
-                <a:ea typeface="Consolas"/>
-                <a:cs typeface="Consolas"/>
-              </a:defRPr>
-            </a:pPr>
-            <a:r>
-              <a:rPr sz="1800">
-                <a:solidFill>
-                  <a:srgbClr val="FFFFFF"/>
-                </a:solidFill>
-                <a:latin typeface="Consolas"/>
-                <a:ea typeface="Consolas"/>
-                <a:cs typeface="Consolas"/>
-              </a:rPr>
-              <a:t>Add 1: 10000000</a:t>
+              <a:t>Rotate left by 1 within 8 bits = ?</a:t>
             </a:r>
           </a:p>
         </p:txBody>
@@ -26045,7 +25808,7 @@
           <p:cNvPr id="534" name="Takeaway">
             <a:extLst xmlns:a="http://schemas.openxmlformats.org/drawingml/2006/main">
               <a:ext uri="{FF2B5EF4-FFF2-40B4-BE49-F238E27FC236}">
-                <a16:creationId xmlns:a16="http://schemas.microsoft.com/office/drawing/2014/main" id="{DE634C2C-0898-4853-A5C4-D01918BBB8B2}"/>
+                <a16:creationId xmlns:a16="http://schemas.microsoft.com/office/drawing/2014/main" id="{A2E452FF-9994-4D14-A931-464BE5FC2262}"/>
               </a:ext>
             </a:extLst>
           </p:cNvPr>
@@ -26203,7 +25966,7 @@
                 <a:ea typeface="Arial"/>
                 <a:cs typeface="Arial"/>
               </a:rPr>
-              <a:t>Mathematically +128 cannot fit in a signed 8-bit result.</a:t>
+              <a:t>Keep the chosen width explicit; C integer promotions do not automatically limit x &lt;&lt; 1 to 8 bits.</a:t>
             </a:r>
           </a:p>
         </p:txBody>
@@ -26714,7 +26477,7 @@
                 <a:ea typeface="Arial"/>
                 <a:cs typeface="Arial"/>
               </a:rPr>
-              <a:t>Masks, shifts, and rotations</a:t>
+              <a:t>Build a truth table one gate at a time</a:t>
             </a:r>
           </a:p>
         </p:txBody>
@@ -26950,1373 +26713,6 @@
                 <a:ea typeface="Arial"/>
                 <a:cs typeface="Arial"/>
               </a:rPr>
-              <a:t>AND keeps only bits selected by a mask. OR sets selected bits. XOR flips selected bits.</a:t>
-            </a:r>
-          </a:p>
-          <a:p xmlns:a="http://schemas.openxmlformats.org/drawingml/2006/main">
-            <a:pPr marL="0" indent="0">
-              <a:lnSpc>
-                <a:spcPct val="112000"/>
-              </a:lnSpc>
-              <a:spcBef>
-                <a:spcPts val="0"/>
-              </a:spcBef>
-              <a:spcAft>
-                <a:spcPts val="0"/>
-              </a:spcAft>
-              <a:buNone/>
-            </a:pPr>
-            <a:r>
-              <a:t/>
-            </a:r>
-          </a:p>
-          <a:p xmlns:a="http://schemas.openxmlformats.org/drawingml/2006/main">
-            <a:pPr marL="0" indent="0">
-              <a:lnSpc>
-                <a:spcPct val="112000"/>
-              </a:lnSpc>
-              <a:spcBef>
-                <a:spcPts val="0"/>
-              </a:spcBef>
-              <a:spcAft>
-                <a:spcPts val="0"/>
-              </a:spcAft>
-              <a:buNone/>
-              <a:defRPr sz="1875">
-                <a:solidFill>
-                  <a:srgbClr val="FFFFFF"/>
-                </a:solidFill>
-                <a:latin typeface="Arial"/>
-                <a:ea typeface="Arial"/>
-                <a:cs typeface="Arial"/>
-              </a:defRPr>
-            </a:pPr>
-            <a:r>
-              <a:rPr sz="1875">
-                <a:solidFill>
-                  <a:srgbClr val="FFFFFF"/>
-                </a:solidFill>
-                <a:latin typeface="Arial"/>
-                <a:ea typeface="Arial"/>
-                <a:cs typeface="Arial"/>
-              </a:rPr>
-              <a:t>A shift drops bits from one end. A rotation brings those bits around to the other end.</a:t>
-            </a:r>
-          </a:p>
-          <a:p xmlns:a="http://schemas.openxmlformats.org/drawingml/2006/main">
-            <a:pPr marL="0" indent="0">
-              <a:lnSpc>
-                <a:spcPct val="112000"/>
-              </a:lnSpc>
-              <a:spcBef>
-                <a:spcPts val="0"/>
-              </a:spcBef>
-              <a:spcAft>
-                <a:spcPts val="0"/>
-              </a:spcAft>
-              <a:buNone/>
-            </a:pPr>
-            <a:r>
-              <a:t/>
-            </a:r>
-          </a:p>
-          <a:p xmlns:a="http://schemas.openxmlformats.org/drawingml/2006/main">
-            <a:pPr marL="0" indent="0">
-              <a:lnSpc>
-                <a:spcPct val="112000"/>
-              </a:lnSpc>
-              <a:spcBef>
-                <a:spcPts val="0"/>
-              </a:spcBef>
-              <a:spcAft>
-                <a:spcPts val="0"/>
-              </a:spcAft>
-              <a:buNone/>
-              <a:defRPr sz="1875">
-                <a:solidFill>
-                  <a:srgbClr val="FFFFFF"/>
-                </a:solidFill>
-                <a:latin typeface="Arial"/>
-                <a:ea typeface="Arial"/>
-                <a:cs typeface="Arial"/>
-              </a:defRPr>
-            </a:pPr>
-            <a:r>
-              <a:rPr sz="1875">
-                <a:solidFill>
-                  <a:srgbClr val="FFFFFF"/>
-                </a:solidFill>
-                <a:latin typeface="Arial"/>
-                <a:ea typeface="Arial"/>
-                <a:cs typeface="Arial"/>
-              </a:rPr>
-              <a:t>Use an explicitly unsigned 8-bit model here.</a:t>
-            </a:r>
-          </a:p>
-        </p:txBody>
-      </p:sp>
-      <p:sp>
-        <p:nvSpPr>
-          <p:cNvPr id="8" name="Content Placeholder 3">
-            <a:extLst xmlns:a="http://schemas.openxmlformats.org/drawingml/2006/main">
-              <a:ext uri="{FF2B5EF4-FFF2-40B4-BE49-F238E27FC236}">
-                <a16:creationId xmlns:a16="http://schemas.microsoft.com/office/drawing/2014/main" id="{2EE8F343-A95F-2AAA-FE9E-A6C31E298DF7}"/>
-              </a:ext>
-            </a:extLst>
-          </p:cNvPr>
-          <p:cNvSpPr>
-            <a:spLocks xmlns:a="http://schemas.openxmlformats.org/drawingml/2006/main" noGrp="1"/>
-          </p:cNvSpPr>
-          <p:nvPr/>
-        </p:nvSpPr>
-        <p:spPr>
-          <a:xfrm xmlns:a="http://schemas.openxmlformats.org/drawingml/2006/main">
-            <a:off x="6256618" y="2031999"/>
-            <a:ext cx="5537200" cy="3534787"/>
-          </a:xfrm>
-          <a:prstGeom xmlns:a="http://schemas.openxmlformats.org/drawingml/2006/main" prst="rect">
-            <a:avLst/>
-          </a:prstGeom>
-        </p:spPr>
-        <p:txBody>
-          <a:bodyPr xmlns:a="http://schemas.openxmlformats.org/drawingml/2006/main" lIns="0" tIns="0" rIns="0" bIns="0" anchor="t">
-            <a:noAutofit/>
-          </a:bodyPr>
-          <a:lstStyle xmlns:a="http://schemas.openxmlformats.org/drawingml/2006/main">
-            <a:defPPr>
-              <a:defRPr sz="1800">
-                <a:solidFill>
-                  <a:srgbClr val="FFFFFF"/>
-                </a:solidFill>
-                <a:latin typeface="Consolas"/>
-                <a:ea typeface="Consolas"/>
-                <a:cs typeface="Consolas"/>
-              </a:defRPr>
-            </a:defPPr>
-            <a:lvl1pPr marL="228600" indent="-228600" algn="l" defTabSz="914400">
-              <a:lnSpc>
-                <a:spcPct val="90000"/>
-              </a:lnSpc>
-              <a:spcBef>
-                <a:spcPts val="1000"/>
-              </a:spcBef>
-              <a:buFont typeface="Arial"/>
-              <a:buChar char="•"/>
-              <a:defRPr sz="2400" kern="1200">
-                <a:solidFill>
-                  <a:schemeClr val="tx1"/>
-                </a:solidFill>
-                <a:latin typeface="+mn-lt"/>
-                <a:ea typeface="+mn-lt"/>
-                <a:cs typeface="+mn-lt"/>
-              </a:defRPr>
-            </a:lvl1pPr>
-            <a:lvl2pPr marL="685800" indent="-228600" algn="l" defTabSz="914400">
-              <a:lnSpc>
-                <a:spcPct val="90000"/>
-              </a:lnSpc>
-              <a:spcBef>
-                <a:spcPts val="500"/>
-              </a:spcBef>
-              <a:buFont typeface="Arial"/>
-              <a:buChar char="•"/>
-              <a:defRPr sz="2000" kern="1200">
-                <a:solidFill>
-                  <a:schemeClr val="tx1"/>
-                </a:solidFill>
-                <a:latin typeface="+mn-lt"/>
-                <a:ea typeface="+mn-lt"/>
-                <a:cs typeface="+mn-lt"/>
-              </a:defRPr>
-            </a:lvl2pPr>
-            <a:lvl3pPr marL="1143000" indent="-228600" algn="l" defTabSz="914400">
-              <a:lnSpc>
-                <a:spcPct val="90000"/>
-              </a:lnSpc>
-              <a:spcBef>
-                <a:spcPts val="500"/>
-              </a:spcBef>
-              <a:buFont typeface="Arial"/>
-              <a:buChar char="•"/>
-              <a:defRPr sz="1800" kern="1200">
-                <a:solidFill>
-                  <a:schemeClr val="tx1"/>
-                </a:solidFill>
-                <a:latin typeface="+mn-lt"/>
-                <a:ea typeface="+mn-lt"/>
-                <a:cs typeface="+mn-lt"/>
-              </a:defRPr>
-            </a:lvl3pPr>
-            <a:lvl4pPr marL="1600200" indent="-228600" algn="l" defTabSz="914400">
-              <a:lnSpc>
-                <a:spcPct val="90000"/>
-              </a:lnSpc>
-              <a:spcBef>
-                <a:spcPts val="500"/>
-              </a:spcBef>
-              <a:buFont typeface="Arial"/>
-              <a:buChar char="•"/>
-              <a:defRPr sz="1800" kern="1200">
-                <a:solidFill>
-                  <a:schemeClr val="tx1"/>
-                </a:solidFill>
-                <a:latin typeface="+mn-lt"/>
-                <a:ea typeface="+mn-lt"/>
-                <a:cs typeface="+mn-lt"/>
-              </a:defRPr>
-            </a:lvl4pPr>
-            <a:lvl5pPr marL="2057400" indent="-228600" algn="l" defTabSz="914400">
-              <a:lnSpc>
-                <a:spcPct val="90000"/>
-              </a:lnSpc>
-              <a:spcBef>
-                <a:spcPts val="500"/>
-              </a:spcBef>
-              <a:buFont typeface="Arial"/>
-              <a:buChar char="•"/>
-              <a:defRPr sz="1800" kern="1200">
-                <a:solidFill>
-                  <a:schemeClr val="tx1"/>
-                </a:solidFill>
-                <a:latin typeface="+mn-lt"/>
-                <a:ea typeface="+mn-lt"/>
-                <a:cs typeface="+mn-lt"/>
-              </a:defRPr>
-            </a:lvl5pPr>
-            <a:lvl6pPr marL="2514600" indent="-228600" algn="l" defTabSz="914400">
-              <a:lnSpc>
-                <a:spcPct val="90000"/>
-              </a:lnSpc>
-              <a:spcBef>
-                <a:spcPts val="500"/>
-              </a:spcBef>
-              <a:buFont typeface="Arial"/>
-              <a:buChar char="•"/>
-              <a:defRPr sz="1800" kern="1200">
-                <a:solidFill>
-                  <a:schemeClr val="tx1"/>
-                </a:solidFill>
-                <a:latin typeface="+mn-lt"/>
-                <a:ea typeface="+mn-lt"/>
-                <a:cs typeface="+mn-lt"/>
-              </a:defRPr>
-            </a:lvl6pPr>
-            <a:lvl7pPr marL="2971800" indent="-228600" algn="l" defTabSz="914400">
-              <a:lnSpc>
-                <a:spcPct val="90000"/>
-              </a:lnSpc>
-              <a:spcBef>
-                <a:spcPts val="500"/>
-              </a:spcBef>
-              <a:buFont typeface="Arial"/>
-              <a:buChar char="•"/>
-              <a:defRPr sz="1800" kern="1200">
-                <a:solidFill>
-                  <a:schemeClr val="tx1"/>
-                </a:solidFill>
-                <a:latin typeface="+mn-lt"/>
-                <a:ea typeface="+mn-lt"/>
-                <a:cs typeface="+mn-lt"/>
-              </a:defRPr>
-            </a:lvl7pPr>
-            <a:lvl8pPr marL="3429000" indent="-228600" algn="l" defTabSz="914400">
-              <a:lnSpc>
-                <a:spcPct val="90000"/>
-              </a:lnSpc>
-              <a:spcBef>
-                <a:spcPts val="500"/>
-              </a:spcBef>
-              <a:buFont typeface="Arial"/>
-              <a:buChar char="•"/>
-              <a:defRPr sz="1800" kern="1200">
-                <a:solidFill>
-                  <a:schemeClr val="tx1"/>
-                </a:solidFill>
-                <a:latin typeface="+mn-lt"/>
-                <a:ea typeface="+mn-lt"/>
-                <a:cs typeface="+mn-lt"/>
-              </a:defRPr>
-            </a:lvl8pPr>
-            <a:lvl9pPr marL="3886200" indent="-228600" algn="l" defTabSz="914400">
-              <a:lnSpc>
-                <a:spcPct val="90000"/>
-              </a:lnSpc>
-              <a:spcBef>
-                <a:spcPts val="500"/>
-              </a:spcBef>
-              <a:buFont typeface="Arial"/>
-              <a:buChar char="•"/>
-              <a:defRPr sz="1800" kern="1200">
-                <a:solidFill>
-                  <a:schemeClr val="tx1"/>
-                </a:solidFill>
-                <a:latin typeface="+mn-lt"/>
-                <a:ea typeface="+mn-lt"/>
-                <a:cs typeface="+mn-lt"/>
-              </a:defRPr>
-            </a:lvl9pPr>
-          </a:lstStyle>
-          <a:p xmlns:a="http://schemas.openxmlformats.org/drawingml/2006/main">
-            <a:pPr marL="0" indent="0">
-              <a:lnSpc>
-                <a:spcPct val="112000"/>
-              </a:lnSpc>
-              <a:spcBef>
-                <a:spcPts val="0"/>
-              </a:spcBef>
-              <a:spcAft>
-                <a:spcPts val="0"/>
-              </a:spcAft>
-              <a:buNone/>
-              <a:defRPr sz="1800">
-                <a:solidFill>
-                  <a:srgbClr val="FFFFFF"/>
-                </a:solidFill>
-                <a:latin typeface="Consolas"/>
-                <a:ea typeface="Consolas"/>
-                <a:cs typeface="Consolas"/>
-              </a:defRPr>
-            </a:pPr>
-            <a:r>
-              <a:rPr sz="1800">
-                <a:solidFill>
-                  <a:srgbClr val="FFFFFF"/>
-                </a:solidFill>
-                <a:latin typeface="Consolas"/>
-                <a:ea typeface="Consolas"/>
-                <a:cs typeface="Consolas"/>
-              </a:rPr>
-              <a:t>x = 0xB6 = 10110110₂</a:t>
-            </a:r>
-          </a:p>
-          <a:p xmlns:a="http://schemas.openxmlformats.org/drawingml/2006/main">
-            <a:pPr marL="0" indent="0">
-              <a:lnSpc>
-                <a:spcPct val="112000"/>
-              </a:lnSpc>
-              <a:spcBef>
-                <a:spcPts val="0"/>
-              </a:spcBef>
-              <a:spcAft>
-                <a:spcPts val="0"/>
-              </a:spcAft>
-              <a:buNone/>
-            </a:pPr>
-            <a:r>
-              <a:t/>
-            </a:r>
-          </a:p>
-          <a:p xmlns:a="http://schemas.openxmlformats.org/drawingml/2006/main">
-            <a:pPr marL="0" indent="0">
-              <a:lnSpc>
-                <a:spcPct val="112000"/>
-              </a:lnSpc>
-              <a:spcBef>
-                <a:spcPts val="0"/>
-              </a:spcBef>
-              <a:spcAft>
-                <a:spcPts val="0"/>
-              </a:spcAft>
-              <a:buNone/>
-              <a:defRPr sz="1800">
-                <a:solidFill>
-                  <a:srgbClr val="FFFFFF"/>
-                </a:solidFill>
-                <a:latin typeface="Consolas"/>
-                <a:ea typeface="Consolas"/>
-                <a:cs typeface="Consolas"/>
-              </a:defRPr>
-            </a:pPr>
-            <a:r>
-              <a:rPr sz="1800">
-                <a:solidFill>
-                  <a:srgbClr val="FFFFFF"/>
-                </a:solidFill>
-                <a:latin typeface="Consolas"/>
-                <a:ea typeface="Consolas"/>
-                <a:cs typeface="Consolas"/>
-              </a:rPr>
-              <a:t>x &amp; 0x0F = ?</a:t>
-            </a:r>
-          </a:p>
-          <a:p xmlns:a="http://schemas.openxmlformats.org/drawingml/2006/main">
-            <a:pPr marL="0" indent="0">
-              <a:lnSpc>
-                <a:spcPct val="112000"/>
-              </a:lnSpc>
-              <a:spcBef>
-                <a:spcPts val="0"/>
-              </a:spcBef>
-              <a:spcAft>
-                <a:spcPts val="0"/>
-              </a:spcAft>
-              <a:buNone/>
-              <a:defRPr sz="1800">
-                <a:solidFill>
-                  <a:srgbClr val="FFFFFF"/>
-                </a:solidFill>
-                <a:latin typeface="Consolas"/>
-                <a:ea typeface="Consolas"/>
-                <a:cs typeface="Consolas"/>
-              </a:defRPr>
-            </a:pPr>
-            <a:r>
-              <a:rPr sz="1800">
-                <a:solidFill>
-                  <a:srgbClr val="FFFFFF"/>
-                </a:solidFill>
-                <a:latin typeface="Consolas"/>
-                <a:ea typeface="Consolas"/>
-                <a:cs typeface="Consolas"/>
-              </a:rPr>
-              <a:t>(x &lt;&lt; 1) &amp; 0xFF = ?</a:t>
-            </a:r>
-          </a:p>
-          <a:p xmlns:a="http://schemas.openxmlformats.org/drawingml/2006/main">
-            <a:pPr marL="0" indent="0">
-              <a:lnSpc>
-                <a:spcPct val="112000"/>
-              </a:lnSpc>
-              <a:spcBef>
-                <a:spcPts val="0"/>
-              </a:spcBef>
-              <a:spcAft>
-                <a:spcPts val="0"/>
-              </a:spcAft>
-              <a:buNone/>
-              <a:defRPr sz="1800">
-                <a:solidFill>
-                  <a:srgbClr val="FFFFFF"/>
-                </a:solidFill>
-                <a:latin typeface="Consolas"/>
-                <a:ea typeface="Consolas"/>
-                <a:cs typeface="Consolas"/>
-              </a:defRPr>
-            </a:pPr>
-            <a:r>
-              <a:rPr sz="1800">
-                <a:solidFill>
-                  <a:srgbClr val="FFFFFF"/>
-                </a:solidFill>
-                <a:latin typeface="Consolas"/>
-                <a:ea typeface="Consolas"/>
-                <a:cs typeface="Consolas"/>
-              </a:rPr>
-              <a:t>Rotate left by 1 within 8 bits = ?</a:t>
-            </a:r>
-          </a:p>
-        </p:txBody>
-      </p:sp>
-      <p:sp>
-        <p:nvSpPr>
-          <p:cNvPr id="534" name="Takeaway">
-            <a:extLst xmlns:a="http://schemas.openxmlformats.org/drawingml/2006/main">
-              <a:ext uri="{FF2B5EF4-FFF2-40B4-BE49-F238E27FC236}">
-                <a16:creationId xmlns:a16="http://schemas.microsoft.com/office/drawing/2014/main" id="{ED771414-6432-454D-8253-E68F1E8D3552}"/>
-              </a:ext>
-            </a:extLst>
-          </p:cNvPr>
-          <p:cNvSpPr>
-            <a:spLocks xmlns:a="http://schemas.openxmlformats.org/drawingml/2006/main" noGrp="1"/>
-          </p:cNvSpPr>
-          <p:nvPr/>
-        </p:nvSpPr>
-        <p:spPr>
-          <a:xfrm xmlns:a="http://schemas.openxmlformats.org/drawingml/2006/main">
-            <a:off x="393668" y="5715000"/>
-            <a:ext cx="11404283" cy="466725"/>
-          </a:xfrm>
-          <a:prstGeom xmlns:a="http://schemas.openxmlformats.org/drawingml/2006/main" prst="rect">
-            <a:avLst/>
-          </a:prstGeom>
-          <a:noFill xmlns:a="http://schemas.openxmlformats.org/drawingml/2006/main"/>
-          <a:ln xmlns:a="http://schemas.openxmlformats.org/drawingml/2006/main" w="0">
-            <a:noFill/>
-          </a:ln>
-        </p:spPr>
-        <p:txBody>
-          <a:bodyPr xmlns:a="http://schemas.openxmlformats.org/drawingml/2006/main" lIns="0" tIns="0" rIns="0" bIns="0" anchor="t">
-            <a:noAutofit/>
-          </a:bodyPr>
-          <a:lstStyle xmlns:a="http://schemas.openxmlformats.org/drawingml/2006/main">
-            <a:defPPr>
-              <a:defRPr sz="1350">
-                <a:solidFill>
-                  <a:srgbClr val="CCCCCC"/>
-                </a:solidFill>
-                <a:latin typeface="Arial"/>
-                <a:ea typeface="Arial"/>
-                <a:cs typeface="Arial"/>
-              </a:defRPr>
-            </a:defPPr>
-            <a:lvl1pPr>
-              <a:defRPr sz="1350">
-                <a:solidFill>
-                  <a:srgbClr val="CCCCCC"/>
-                </a:solidFill>
-                <a:latin typeface="Arial"/>
-                <a:ea typeface="Arial"/>
-                <a:cs typeface="Arial"/>
-              </a:defRPr>
-            </a:lvl1pPr>
-            <a:lvl2pPr>
-              <a:defRPr sz="1350">
-                <a:solidFill>
-                  <a:srgbClr val="CCCCCC"/>
-                </a:solidFill>
-                <a:latin typeface="Arial"/>
-                <a:ea typeface="Arial"/>
-                <a:cs typeface="Arial"/>
-              </a:defRPr>
-            </a:lvl2pPr>
-            <a:lvl3pPr>
-              <a:defRPr sz="1350">
-                <a:solidFill>
-                  <a:srgbClr val="CCCCCC"/>
-                </a:solidFill>
-                <a:latin typeface="Arial"/>
-                <a:ea typeface="Arial"/>
-                <a:cs typeface="Arial"/>
-              </a:defRPr>
-            </a:lvl3pPr>
-            <a:lvl4pPr>
-              <a:defRPr sz="1350">
-                <a:solidFill>
-                  <a:srgbClr val="CCCCCC"/>
-                </a:solidFill>
-                <a:latin typeface="Arial"/>
-                <a:ea typeface="Arial"/>
-                <a:cs typeface="Arial"/>
-              </a:defRPr>
-            </a:lvl4pPr>
-            <a:lvl5pPr>
-              <a:defRPr sz="1350">
-                <a:solidFill>
-                  <a:srgbClr val="CCCCCC"/>
-                </a:solidFill>
-                <a:latin typeface="Arial"/>
-                <a:ea typeface="Arial"/>
-                <a:cs typeface="Arial"/>
-              </a:defRPr>
-            </a:lvl5pPr>
-            <a:lvl6pPr>
-              <a:defRPr sz="1350">
-                <a:solidFill>
-                  <a:srgbClr val="CCCCCC"/>
-                </a:solidFill>
-                <a:latin typeface="Arial"/>
-                <a:ea typeface="Arial"/>
-                <a:cs typeface="Arial"/>
-              </a:defRPr>
-            </a:lvl6pPr>
-            <a:lvl7pPr>
-              <a:defRPr sz="1350">
-                <a:solidFill>
-                  <a:srgbClr val="CCCCCC"/>
-                </a:solidFill>
-                <a:latin typeface="Arial"/>
-                <a:ea typeface="Arial"/>
-                <a:cs typeface="Arial"/>
-              </a:defRPr>
-            </a:lvl7pPr>
-            <a:lvl8pPr>
-              <a:defRPr sz="1350">
-                <a:solidFill>
-                  <a:srgbClr val="CCCCCC"/>
-                </a:solidFill>
-                <a:latin typeface="Arial"/>
-                <a:ea typeface="Arial"/>
-                <a:cs typeface="Arial"/>
-              </a:defRPr>
-            </a:lvl8pPr>
-            <a:lvl9pPr>
-              <a:defRPr sz="1350">
-                <a:solidFill>
-                  <a:srgbClr val="CCCCCC"/>
-                </a:solidFill>
-                <a:latin typeface="Arial"/>
-                <a:ea typeface="Arial"/>
-                <a:cs typeface="Arial"/>
-              </a:defRPr>
-            </a:lvl9pPr>
-          </a:lstStyle>
-          <a:p xmlns:a="http://schemas.openxmlformats.org/drawingml/2006/main">
-            <a:pPr marL="0" indent="0">
-              <a:lnSpc>
-                <a:spcPct val="112000"/>
-              </a:lnSpc>
-              <a:spcBef>
-                <a:spcPts val="0"/>
-              </a:spcBef>
-              <a:spcAft>
-                <a:spcPts val="0"/>
-              </a:spcAft>
-              <a:buNone/>
-              <a:defRPr sz="1350">
-                <a:solidFill>
-                  <a:srgbClr val="CCCCCC"/>
-                </a:solidFill>
-                <a:latin typeface="Arial"/>
-                <a:ea typeface="Arial"/>
-                <a:cs typeface="Arial"/>
-              </a:defRPr>
-            </a:pPr>
-            <a:r>
-              <a:rPr sz="1350">
-                <a:solidFill>
-                  <a:srgbClr val="CCCCCC"/>
-                </a:solidFill>
-                <a:latin typeface="Arial"/>
-                <a:ea typeface="Arial"/>
-                <a:cs typeface="Arial"/>
-              </a:rPr>
-              <a:t>Keep the chosen width explicit; C integer promotions do not automatically limit x &lt;&lt; 1 to 8 bits.</a:t>
-            </a:r>
-          </a:p>
-        </p:txBody>
-      </p:sp>
-    </p:spTree>
-    <p:extLst>
-      <p:ext uri="{BB962C8B-B14F-4D97-AF65-F5344CB8AC3E}">
-        <p14:creationId xmlns:p14="http://schemas.microsoft.com/office/powerpoint/2010/main" val="3667182145"/>
-      </p:ext>
-    </p:extLst>
-  </p:cSld>
-</p:sld>
-</file>
-
-<file path=ppt/slides/slide22.xml><?xml version="1.0" encoding="utf-8"?>
-<p:sld xmlns:p="http://schemas.openxmlformats.org/presentationml/2006/main">
-  <p:cSld>
-    <p:spTree>
-      <p:nvGrpSpPr>
-        <p:cNvPr id="1" name=""/>
-        <p:cNvGrpSpPr/>
-        <p:nvPr/>
-      </p:nvGrpSpPr>
-      <p:grpSpPr>
-        <a:xfrm xmlns:a="http://schemas.openxmlformats.org/drawingml/2006/main"/>
-      </p:grpSpPr>
-      <p:sp>
-        <p:nvSpPr>
-          <p:cNvPr id="3" name="Footer Placeholder 2">
-            <a:extLst xmlns:a="http://schemas.openxmlformats.org/drawingml/2006/main">
-              <a:ext uri="{FF2B5EF4-FFF2-40B4-BE49-F238E27FC236}">
-                <a16:creationId xmlns:a16="http://schemas.microsoft.com/office/drawing/2014/main" id="{39EA4C82-C623-0196-4A95-876ADF5DEE92}"/>
-              </a:ext>
-            </a:extLst>
-          </p:cNvPr>
-          <p:cNvSpPr>
-            <a:spLocks xmlns:a="http://schemas.openxmlformats.org/drawingml/2006/main" noGrp="1"/>
-          </p:cNvSpPr>
-          <p:nvPr>
-            <p:ph type="ftr" idx="3"/>
-          </p:nvPr>
-        </p:nvSpPr>
-        <p:spPr>
-          <a:xfrm xmlns:a="http://schemas.openxmlformats.org/drawingml/2006/main">
-            <a:off x="393700" y="6279952"/>
-            <a:ext cx="3568700" cy="241240"/>
-          </a:xfrm>
-        </p:spPr>
-        <p:txBody>
-          <a:bodyPr xmlns:a="http://schemas.openxmlformats.org/drawingml/2006/main" lIns="0" tIns="0" rIns="0" bIns="0" anchor="t">
-            <a:noAutofit/>
-          </a:bodyPr>
-          <a:lstStyle xmlns:a="http://schemas.openxmlformats.org/drawingml/2006/main">
-            <a:defPPr>
-              <a:defRPr sz="1125">
-                <a:solidFill>
-                  <a:srgbClr val="FFFFFF"/>
-                </a:solidFill>
-                <a:latin typeface="Arial"/>
-                <a:ea typeface="Arial"/>
-                <a:cs typeface="Arial"/>
-              </a:defRPr>
-            </a:defPPr>
-            <a:lvl1pPr>
-              <a:defRPr sz="1125">
-                <a:solidFill>
-                  <a:srgbClr val="FFFFFF"/>
-                </a:solidFill>
-                <a:latin typeface="Arial"/>
-                <a:ea typeface="Arial"/>
-                <a:cs typeface="Arial"/>
-              </a:defRPr>
-            </a:lvl1pPr>
-            <a:lvl2pPr>
-              <a:defRPr sz="1125">
-                <a:solidFill>
-                  <a:srgbClr val="FFFFFF"/>
-                </a:solidFill>
-                <a:latin typeface="Arial"/>
-                <a:ea typeface="Arial"/>
-                <a:cs typeface="Arial"/>
-              </a:defRPr>
-            </a:lvl2pPr>
-            <a:lvl3pPr>
-              <a:defRPr sz="1125">
-                <a:solidFill>
-                  <a:srgbClr val="FFFFFF"/>
-                </a:solidFill>
-                <a:latin typeface="Arial"/>
-                <a:ea typeface="Arial"/>
-                <a:cs typeface="Arial"/>
-              </a:defRPr>
-            </a:lvl3pPr>
-            <a:lvl4pPr>
-              <a:defRPr sz="1125">
-                <a:solidFill>
-                  <a:srgbClr val="FFFFFF"/>
-                </a:solidFill>
-                <a:latin typeface="Arial"/>
-                <a:ea typeface="Arial"/>
-                <a:cs typeface="Arial"/>
-              </a:defRPr>
-            </a:lvl4pPr>
-            <a:lvl5pPr>
-              <a:defRPr sz="1125">
-                <a:solidFill>
-                  <a:srgbClr val="FFFFFF"/>
-                </a:solidFill>
-                <a:latin typeface="Arial"/>
-                <a:ea typeface="Arial"/>
-                <a:cs typeface="Arial"/>
-              </a:defRPr>
-            </a:lvl5pPr>
-            <a:lvl6pPr>
-              <a:defRPr sz="1125">
-                <a:solidFill>
-                  <a:srgbClr val="FFFFFF"/>
-                </a:solidFill>
-                <a:latin typeface="Arial"/>
-                <a:ea typeface="Arial"/>
-                <a:cs typeface="Arial"/>
-              </a:defRPr>
-            </a:lvl6pPr>
-            <a:lvl7pPr>
-              <a:defRPr sz="1125">
-                <a:solidFill>
-                  <a:srgbClr val="FFFFFF"/>
-                </a:solidFill>
-                <a:latin typeface="Arial"/>
-                <a:ea typeface="Arial"/>
-                <a:cs typeface="Arial"/>
-              </a:defRPr>
-            </a:lvl7pPr>
-            <a:lvl8pPr>
-              <a:defRPr sz="1125">
-                <a:solidFill>
-                  <a:srgbClr val="FFFFFF"/>
-                </a:solidFill>
-                <a:latin typeface="Arial"/>
-                <a:ea typeface="Arial"/>
-                <a:cs typeface="Arial"/>
-              </a:defRPr>
-            </a:lvl8pPr>
-            <a:lvl9pPr>
-              <a:defRPr sz="1125">
-                <a:solidFill>
-                  <a:srgbClr val="FFFFFF"/>
-                </a:solidFill>
-                <a:latin typeface="Arial"/>
-                <a:ea typeface="Arial"/>
-                <a:cs typeface="Arial"/>
-              </a:defRPr>
-            </a:lvl9pPr>
-          </a:lstStyle>
-          <a:p xmlns:a="http://schemas.openxmlformats.org/drawingml/2006/main">
-            <a:pPr marL="0" indent="0">
-              <a:lnSpc>
-                <a:spcPct val="112000"/>
-              </a:lnSpc>
-              <a:spcBef>
-                <a:spcPts val="0"/>
-              </a:spcBef>
-              <a:spcAft>
-                <a:spcPts val="0"/>
-              </a:spcAft>
-              <a:buNone/>
-              <a:defRPr sz="1125">
-                <a:solidFill>
-                  <a:srgbClr val="FFFFFF"/>
-                </a:solidFill>
-                <a:latin typeface="Arial"/>
-                <a:ea typeface="Arial"/>
-                <a:cs typeface="Arial"/>
-              </a:defRPr>
-            </a:pPr>
-            <a:r>
-              <a:rPr sz="1125">
-                <a:solidFill>
-                  <a:srgbClr val="FFFFFF"/>
-                </a:solidFill>
-                <a:latin typeface="Arial"/>
-                <a:ea typeface="Arial"/>
-                <a:cs typeface="Arial"/>
-              </a:rPr>
-              <a:t>CS 211 · Recitation 07</a:t>
-            </a:r>
-          </a:p>
-        </p:txBody>
-      </p:sp>
-      <p:sp>
-        <p:nvSpPr>
-          <p:cNvPr id="532" name="Google Shape;532;p58">
-            <a:extLst xmlns:a="http://schemas.openxmlformats.org/drawingml/2006/main">
-              <a:ext uri="{FF2B5EF4-FFF2-40B4-BE49-F238E27FC236}">
-                <a16:creationId xmlns:a16="http://schemas.microsoft.com/office/drawing/2014/main" id="{1BCBE750-7048-686D-1472-52C53362D6CD}"/>
-              </a:ext>
-            </a:extLst>
-          </p:cNvPr>
-          <p:cNvSpPr>
-            <a:spLocks xmlns:a="http://schemas.openxmlformats.org/drawingml/2006/main" noGrp="1"/>
-          </p:cNvSpPr>
-          <p:nvPr>
-            <p:ph type="sldNum" idx="4"/>
-          </p:nvPr>
-        </p:nvSpPr>
-        <p:spPr>
-          <a:xfrm xmlns:a="http://schemas.openxmlformats.org/drawingml/2006/main">
-            <a:off x="11279332" y="6279294"/>
-            <a:ext cx="518968" cy="241240"/>
-          </a:xfrm>
-        </p:spPr>
-        <p:txBody>
-          <a:bodyPr xmlns:a="http://schemas.openxmlformats.org/drawingml/2006/main" spcFirstLastPara="1" vert="horz" wrap="square" lIns="0" tIns="0" rIns="0" bIns="0" anchor="t">
-            <a:noAutofit/>
-          </a:bodyPr>
-          <a:lstStyle xmlns:a="http://schemas.openxmlformats.org/drawingml/2006/main">
-            <a:defPPr>
-              <a:defRPr sz="1125">
-                <a:solidFill>
-                  <a:srgbClr val="FFFFFF"/>
-                </a:solidFill>
-                <a:latin typeface="Arial"/>
-                <a:ea typeface="Arial"/>
-                <a:cs typeface="Arial"/>
-              </a:defRPr>
-            </a:defPPr>
-            <a:lvl1pPr>
-              <a:defRPr sz="1125">
-                <a:solidFill>
-                  <a:srgbClr val="FFFFFF"/>
-                </a:solidFill>
-                <a:latin typeface="Arial"/>
-                <a:ea typeface="Arial"/>
-                <a:cs typeface="Arial"/>
-              </a:defRPr>
-            </a:lvl1pPr>
-            <a:lvl2pPr>
-              <a:defRPr sz="1125">
-                <a:solidFill>
-                  <a:srgbClr val="FFFFFF"/>
-                </a:solidFill>
-                <a:latin typeface="Arial"/>
-                <a:ea typeface="Arial"/>
-                <a:cs typeface="Arial"/>
-              </a:defRPr>
-            </a:lvl2pPr>
-            <a:lvl3pPr>
-              <a:defRPr sz="1125">
-                <a:solidFill>
-                  <a:srgbClr val="FFFFFF"/>
-                </a:solidFill>
-                <a:latin typeface="Arial"/>
-                <a:ea typeface="Arial"/>
-                <a:cs typeface="Arial"/>
-              </a:defRPr>
-            </a:lvl3pPr>
-            <a:lvl4pPr>
-              <a:defRPr sz="1125">
-                <a:solidFill>
-                  <a:srgbClr val="FFFFFF"/>
-                </a:solidFill>
-                <a:latin typeface="Arial"/>
-                <a:ea typeface="Arial"/>
-                <a:cs typeface="Arial"/>
-              </a:defRPr>
-            </a:lvl4pPr>
-            <a:lvl5pPr>
-              <a:defRPr sz="1125">
-                <a:solidFill>
-                  <a:srgbClr val="FFFFFF"/>
-                </a:solidFill>
-                <a:latin typeface="Arial"/>
-                <a:ea typeface="Arial"/>
-                <a:cs typeface="Arial"/>
-              </a:defRPr>
-            </a:lvl5pPr>
-            <a:lvl6pPr>
-              <a:defRPr sz="1125">
-                <a:solidFill>
-                  <a:srgbClr val="FFFFFF"/>
-                </a:solidFill>
-                <a:latin typeface="Arial"/>
-                <a:ea typeface="Arial"/>
-                <a:cs typeface="Arial"/>
-              </a:defRPr>
-            </a:lvl6pPr>
-            <a:lvl7pPr>
-              <a:defRPr sz="1125">
-                <a:solidFill>
-                  <a:srgbClr val="FFFFFF"/>
-                </a:solidFill>
-                <a:latin typeface="Arial"/>
-                <a:ea typeface="Arial"/>
-                <a:cs typeface="Arial"/>
-              </a:defRPr>
-            </a:lvl7pPr>
-            <a:lvl8pPr>
-              <a:defRPr sz="1125">
-                <a:solidFill>
-                  <a:srgbClr val="FFFFFF"/>
-                </a:solidFill>
-                <a:latin typeface="Arial"/>
-                <a:ea typeface="Arial"/>
-                <a:cs typeface="Arial"/>
-              </a:defRPr>
-            </a:lvl8pPr>
-            <a:lvl9pPr>
-              <a:defRPr sz="1125">
-                <a:solidFill>
-                  <a:srgbClr val="FFFFFF"/>
-                </a:solidFill>
-                <a:latin typeface="Arial"/>
-                <a:ea typeface="Arial"/>
-                <a:cs typeface="Arial"/>
-              </a:defRPr>
-            </a:lvl9pPr>
-          </a:lstStyle>
-          <a:p xmlns:a="http://schemas.openxmlformats.org/drawingml/2006/main">
-            <a:pPr marL="0" indent="0">
-              <a:lnSpc>
-                <a:spcPct val="112000"/>
-              </a:lnSpc>
-              <a:spcBef>
-                <a:spcPts val="0"/>
-              </a:spcBef>
-              <a:spcAft>
-                <a:spcPts val="0"/>
-              </a:spcAft>
-              <a:buNone/>
-              <a:defRPr sz="1125">
-                <a:solidFill>
-                  <a:srgbClr val="FFFFFF"/>
-                </a:solidFill>
-                <a:latin typeface="Arial"/>
-                <a:ea typeface="Arial"/>
-                <a:cs typeface="Arial"/>
-              </a:defRPr>
-            </a:pPr>
-            <a:r>
-              <a:rPr sz="1125">
-                <a:solidFill>
-                  <a:srgbClr val="FFFFFF"/>
-                </a:solidFill>
-                <a:latin typeface="Arial"/>
-                <a:ea typeface="Arial"/>
-                <a:cs typeface="Arial"/>
-              </a:rPr>
-              <a:t>22</a:t>
-            </a:r>
-          </a:p>
-        </p:txBody>
-      </p:sp>
-      <p:sp>
-        <p:nvSpPr>
-          <p:cNvPr id="533" name="Google Shape;533;p58">
-            <a:extLst xmlns:a="http://schemas.openxmlformats.org/drawingml/2006/main">
-              <a:ext uri="{FF2B5EF4-FFF2-40B4-BE49-F238E27FC236}">
-                <a16:creationId xmlns:a16="http://schemas.microsoft.com/office/drawing/2014/main" id="{1B5D55CD-1C17-7CD8-F26A-2DD65B067687}"/>
-              </a:ext>
-            </a:extLst>
-          </p:cNvPr>
-          <p:cNvSpPr>
-            <a:spLocks xmlns:a="http://schemas.openxmlformats.org/drawingml/2006/main" noGrp="1"/>
-          </p:cNvSpPr>
-          <p:nvPr>
-            <p:ph type="title" idx="0"/>
-          </p:nvPr>
-        </p:nvSpPr>
-        <p:spPr>
-          <a:xfrm xmlns:a="http://schemas.openxmlformats.org/drawingml/2006/main">
-            <a:off x="393700" y="344008"/>
-            <a:ext cx="11404600" cy="1047491"/>
-          </a:xfrm>
-        </p:spPr>
-        <p:txBody>
-          <a:bodyPr xmlns:a="http://schemas.openxmlformats.org/drawingml/2006/main" spcFirstLastPara="1" vert="horz" wrap="square" lIns="0" tIns="0" rIns="0" bIns="0" anchor="t">
-            <a:noAutofit/>
-          </a:bodyPr>
-          <a:lstStyle xmlns:a="http://schemas.openxmlformats.org/drawingml/2006/main">
-            <a:defPPr>
-              <a:defRPr sz="3150">
-                <a:solidFill>
-                  <a:srgbClr val="FFFFFF"/>
-                </a:solidFill>
-                <a:latin typeface="Arial"/>
-                <a:ea typeface="Arial"/>
-                <a:cs typeface="Arial"/>
-              </a:defRPr>
-            </a:defPPr>
-            <a:lvl1pPr>
-              <a:defRPr sz="3150">
-                <a:solidFill>
-                  <a:srgbClr val="FFFFFF"/>
-                </a:solidFill>
-                <a:latin typeface="Arial"/>
-                <a:ea typeface="Arial"/>
-                <a:cs typeface="Arial"/>
-              </a:defRPr>
-            </a:lvl1pPr>
-            <a:lvl2pPr>
-              <a:defRPr sz="3150">
-                <a:solidFill>
-                  <a:srgbClr val="FFFFFF"/>
-                </a:solidFill>
-                <a:latin typeface="Arial"/>
-                <a:ea typeface="Arial"/>
-                <a:cs typeface="Arial"/>
-              </a:defRPr>
-            </a:lvl2pPr>
-            <a:lvl3pPr>
-              <a:defRPr sz="3150">
-                <a:solidFill>
-                  <a:srgbClr val="FFFFFF"/>
-                </a:solidFill>
-                <a:latin typeface="Arial"/>
-                <a:ea typeface="Arial"/>
-                <a:cs typeface="Arial"/>
-              </a:defRPr>
-            </a:lvl3pPr>
-            <a:lvl4pPr>
-              <a:defRPr sz="3150">
-                <a:solidFill>
-                  <a:srgbClr val="FFFFFF"/>
-                </a:solidFill>
-                <a:latin typeface="Arial"/>
-                <a:ea typeface="Arial"/>
-                <a:cs typeface="Arial"/>
-              </a:defRPr>
-            </a:lvl4pPr>
-            <a:lvl5pPr>
-              <a:defRPr sz="3150">
-                <a:solidFill>
-                  <a:srgbClr val="FFFFFF"/>
-                </a:solidFill>
-                <a:latin typeface="Arial"/>
-                <a:ea typeface="Arial"/>
-                <a:cs typeface="Arial"/>
-              </a:defRPr>
-            </a:lvl5pPr>
-            <a:lvl6pPr>
-              <a:defRPr sz="3150">
-                <a:solidFill>
-                  <a:srgbClr val="FFFFFF"/>
-                </a:solidFill>
-                <a:latin typeface="Arial"/>
-                <a:ea typeface="Arial"/>
-                <a:cs typeface="Arial"/>
-              </a:defRPr>
-            </a:lvl6pPr>
-            <a:lvl7pPr>
-              <a:defRPr sz="3150">
-                <a:solidFill>
-                  <a:srgbClr val="FFFFFF"/>
-                </a:solidFill>
-                <a:latin typeface="Arial"/>
-                <a:ea typeface="Arial"/>
-                <a:cs typeface="Arial"/>
-              </a:defRPr>
-            </a:lvl7pPr>
-            <a:lvl8pPr>
-              <a:defRPr sz="3150">
-                <a:solidFill>
-                  <a:srgbClr val="FFFFFF"/>
-                </a:solidFill>
-                <a:latin typeface="Arial"/>
-                <a:ea typeface="Arial"/>
-                <a:cs typeface="Arial"/>
-              </a:defRPr>
-            </a:lvl8pPr>
-            <a:lvl9pPr>
-              <a:defRPr sz="3150">
-                <a:solidFill>
-                  <a:srgbClr val="FFFFFF"/>
-                </a:solidFill>
-                <a:latin typeface="Arial"/>
-                <a:ea typeface="Arial"/>
-                <a:cs typeface="Arial"/>
-              </a:defRPr>
-            </a:lvl9pPr>
-          </a:lstStyle>
-          <a:p xmlns:a="http://schemas.openxmlformats.org/drawingml/2006/main">
-            <a:pPr marL="0" indent="0">
-              <a:lnSpc>
-                <a:spcPct val="112000"/>
-              </a:lnSpc>
-              <a:spcBef>
-                <a:spcPts val="0"/>
-              </a:spcBef>
-              <a:spcAft>
-                <a:spcPts val="0"/>
-              </a:spcAft>
-              <a:buNone/>
-              <a:defRPr sz="3150">
-                <a:solidFill>
-                  <a:srgbClr val="FFFFFF"/>
-                </a:solidFill>
-                <a:latin typeface="Arial"/>
-                <a:ea typeface="Arial"/>
-                <a:cs typeface="Arial"/>
-              </a:defRPr>
-            </a:pPr>
-            <a:r>
-              <a:rPr sz="3150">
-                <a:solidFill>
-                  <a:srgbClr val="FFFFFF"/>
-                </a:solidFill>
-                <a:latin typeface="Arial"/>
-                <a:ea typeface="Arial"/>
-                <a:cs typeface="Arial"/>
-              </a:rPr>
-              <a:t>Build a truth table one gate at a time</a:t>
-            </a:r>
-          </a:p>
-        </p:txBody>
-      </p:sp>
-      <p:sp>
-        <p:nvSpPr>
-          <p:cNvPr id="7" name="Google Shape;534;p58">
-            <a:extLst xmlns:a="http://schemas.openxmlformats.org/drawingml/2006/main">
-              <a:ext uri="{FF2B5EF4-FFF2-40B4-BE49-F238E27FC236}">
-                <a16:creationId xmlns:a16="http://schemas.microsoft.com/office/drawing/2014/main" id="{3A923FEE-B8D2-CD3A-ABBD-21770B40AA24}"/>
-              </a:ext>
-            </a:extLst>
-          </p:cNvPr>
-          <p:cNvSpPr>
-            <a:spLocks xmlns:a="http://schemas.openxmlformats.org/drawingml/2006/main" noGrp="1"/>
-          </p:cNvSpPr>
-          <p:nvPr/>
-        </p:nvSpPr>
-        <p:spPr>
-          <a:xfrm xmlns:a="http://schemas.openxmlformats.org/drawingml/2006/main">
-            <a:off x="393700" y="2031999"/>
-            <a:ext cx="5537200" cy="3534787"/>
-          </a:xfrm>
-          <a:prstGeom xmlns:a="http://schemas.openxmlformats.org/drawingml/2006/main" prst="rect">
-            <a:avLst/>
-          </a:prstGeom>
-        </p:spPr>
-        <p:txBody>
-          <a:bodyPr xmlns:a="http://schemas.openxmlformats.org/drawingml/2006/main" spcFirstLastPara="1" vert="horz" wrap="square" lIns="0" tIns="0" rIns="0" bIns="0" anchor="t">
-            <a:noAutofit/>
-          </a:bodyPr>
-          <a:lstStyle xmlns:a="http://schemas.openxmlformats.org/drawingml/2006/main">
-            <a:defPPr>
-              <a:defRPr sz="1875">
-                <a:solidFill>
-                  <a:srgbClr val="FFFFFF"/>
-                </a:solidFill>
-                <a:latin typeface="Arial"/>
-                <a:ea typeface="Arial"/>
-                <a:cs typeface="Arial"/>
-              </a:defRPr>
-            </a:defPPr>
-            <a:lvl1pPr marL="228600" indent="-228600" algn="l" defTabSz="914400">
-              <a:lnSpc>
-                <a:spcPct val="90000"/>
-              </a:lnSpc>
-              <a:spcBef>
-                <a:spcPts val="1000"/>
-              </a:spcBef>
-              <a:buFont typeface="Arial"/>
-              <a:buChar char="•"/>
-              <a:defRPr sz="2400" kern="1200">
-                <a:solidFill>
-                  <a:schemeClr val="tx1"/>
-                </a:solidFill>
-                <a:latin typeface="+mn-lt"/>
-                <a:ea typeface="+mn-lt"/>
-                <a:cs typeface="+mn-lt"/>
-              </a:defRPr>
-            </a:lvl1pPr>
-            <a:lvl2pPr marL="685800" indent="-228600" algn="l" defTabSz="914400">
-              <a:lnSpc>
-                <a:spcPct val="90000"/>
-              </a:lnSpc>
-              <a:spcBef>
-                <a:spcPts val="500"/>
-              </a:spcBef>
-              <a:buFont typeface="Arial"/>
-              <a:buChar char="•"/>
-              <a:defRPr sz="2000" kern="1200">
-                <a:solidFill>
-                  <a:schemeClr val="tx1"/>
-                </a:solidFill>
-                <a:latin typeface="+mn-lt"/>
-                <a:ea typeface="+mn-lt"/>
-                <a:cs typeface="+mn-lt"/>
-              </a:defRPr>
-            </a:lvl2pPr>
-            <a:lvl3pPr marL="1143000" indent="-228600" algn="l" defTabSz="914400">
-              <a:lnSpc>
-                <a:spcPct val="90000"/>
-              </a:lnSpc>
-              <a:spcBef>
-                <a:spcPts val="500"/>
-              </a:spcBef>
-              <a:buFont typeface="Arial"/>
-              <a:buChar char="•"/>
-              <a:defRPr sz="1800" kern="1200">
-                <a:solidFill>
-                  <a:schemeClr val="tx1"/>
-                </a:solidFill>
-                <a:latin typeface="+mn-lt"/>
-                <a:ea typeface="+mn-lt"/>
-                <a:cs typeface="+mn-lt"/>
-              </a:defRPr>
-            </a:lvl3pPr>
-            <a:lvl4pPr marL="1600200" indent="-228600" algn="l" defTabSz="914400">
-              <a:lnSpc>
-                <a:spcPct val="90000"/>
-              </a:lnSpc>
-              <a:spcBef>
-                <a:spcPts val="500"/>
-              </a:spcBef>
-              <a:buFont typeface="Arial"/>
-              <a:buChar char="•"/>
-              <a:defRPr sz="1800" kern="1200">
-                <a:solidFill>
-                  <a:schemeClr val="tx1"/>
-                </a:solidFill>
-                <a:latin typeface="+mn-lt"/>
-                <a:ea typeface="+mn-lt"/>
-                <a:cs typeface="+mn-lt"/>
-              </a:defRPr>
-            </a:lvl4pPr>
-            <a:lvl5pPr marL="2057400" indent="-228600" algn="l" defTabSz="914400">
-              <a:lnSpc>
-                <a:spcPct val="90000"/>
-              </a:lnSpc>
-              <a:spcBef>
-                <a:spcPts val="500"/>
-              </a:spcBef>
-              <a:buFont typeface="Arial"/>
-              <a:buChar char="•"/>
-              <a:defRPr sz="1800" kern="1200">
-                <a:solidFill>
-                  <a:schemeClr val="tx1"/>
-                </a:solidFill>
-                <a:latin typeface="+mn-lt"/>
-                <a:ea typeface="+mn-lt"/>
-                <a:cs typeface="+mn-lt"/>
-              </a:defRPr>
-            </a:lvl5pPr>
-            <a:lvl6pPr marL="2514600" indent="-228600" algn="l" defTabSz="914400">
-              <a:lnSpc>
-                <a:spcPct val="90000"/>
-              </a:lnSpc>
-              <a:spcBef>
-                <a:spcPts val="500"/>
-              </a:spcBef>
-              <a:buFont typeface="Arial"/>
-              <a:buChar char="•"/>
-              <a:defRPr sz="1800" kern="1200">
-                <a:solidFill>
-                  <a:schemeClr val="tx1"/>
-                </a:solidFill>
-                <a:latin typeface="+mn-lt"/>
-                <a:ea typeface="+mn-lt"/>
-                <a:cs typeface="+mn-lt"/>
-              </a:defRPr>
-            </a:lvl6pPr>
-            <a:lvl7pPr marL="2971800" indent="-228600" algn="l" defTabSz="914400">
-              <a:lnSpc>
-                <a:spcPct val="90000"/>
-              </a:lnSpc>
-              <a:spcBef>
-                <a:spcPts val="500"/>
-              </a:spcBef>
-              <a:buFont typeface="Arial"/>
-              <a:buChar char="•"/>
-              <a:defRPr sz="1800" kern="1200">
-                <a:solidFill>
-                  <a:schemeClr val="tx1"/>
-                </a:solidFill>
-                <a:latin typeface="+mn-lt"/>
-                <a:ea typeface="+mn-lt"/>
-                <a:cs typeface="+mn-lt"/>
-              </a:defRPr>
-            </a:lvl7pPr>
-            <a:lvl8pPr marL="3429000" indent="-228600" algn="l" defTabSz="914400">
-              <a:lnSpc>
-                <a:spcPct val="90000"/>
-              </a:lnSpc>
-              <a:spcBef>
-                <a:spcPts val="500"/>
-              </a:spcBef>
-              <a:buFont typeface="Arial"/>
-              <a:buChar char="•"/>
-              <a:defRPr sz="1800" kern="1200">
-                <a:solidFill>
-                  <a:schemeClr val="tx1"/>
-                </a:solidFill>
-                <a:latin typeface="+mn-lt"/>
-                <a:ea typeface="+mn-lt"/>
-                <a:cs typeface="+mn-lt"/>
-              </a:defRPr>
-            </a:lvl8pPr>
-            <a:lvl9pPr marL="3886200" indent="-228600" algn="l" defTabSz="914400">
-              <a:lnSpc>
-                <a:spcPct val="90000"/>
-              </a:lnSpc>
-              <a:spcBef>
-                <a:spcPts val="500"/>
-              </a:spcBef>
-              <a:buFont typeface="Arial"/>
-              <a:buChar char="•"/>
-              <a:defRPr sz="1800" kern="1200">
-                <a:solidFill>
-                  <a:schemeClr val="tx1"/>
-                </a:solidFill>
-                <a:latin typeface="+mn-lt"/>
-                <a:ea typeface="+mn-lt"/>
-                <a:cs typeface="+mn-lt"/>
-              </a:defRPr>
-            </a:lvl9pPr>
-          </a:lstStyle>
-          <a:p xmlns:a="http://schemas.openxmlformats.org/drawingml/2006/main">
-            <a:pPr marL="0" indent="0">
-              <a:lnSpc>
-                <a:spcPct val="112000"/>
-              </a:lnSpc>
-              <a:spcBef>
-                <a:spcPts val="0"/>
-              </a:spcBef>
-              <a:spcAft>
-                <a:spcPts val="0"/>
-              </a:spcAft>
-              <a:buNone/>
-              <a:defRPr sz="1875">
-                <a:solidFill>
-                  <a:srgbClr val="FFFFFF"/>
-                </a:solidFill>
-                <a:latin typeface="Arial"/>
-                <a:ea typeface="Arial"/>
-                <a:cs typeface="Arial"/>
-              </a:defRPr>
-            </a:pPr>
-            <a:r>
-              <a:rPr sz="1875">
-                <a:solidFill>
-                  <a:srgbClr val="FFFFFF"/>
-                </a:solidFill>
-                <a:latin typeface="Arial"/>
-                <a:ea typeface="Arial"/>
-                <a:cs typeface="Arial"/>
-              </a:rPr>
               <a:t>Do not try to guess the entire circuit at once. Write a column for each intermediate result.</a:t>
             </a:r>
           </a:p>
@@ -28663,7 +27059,7 @@
           <p:cNvPr id="534" name="">
             <a:extLst xmlns:a="http://schemas.openxmlformats.org/drawingml/2006/main">
               <a:ext uri="{FF2B5EF4-FFF2-40B4-BE49-F238E27FC236}">
-                <a16:creationId xmlns:a16="http://schemas.microsoft.com/office/drawing/2014/main" id="{89013C81-78D9-4D92-AF05-E237CFA2DC9F}"/>
+                <a16:creationId xmlns:a16="http://schemas.microsoft.com/office/drawing/2014/main" id="{A012E9F3-5308-4C3A-9C19-7DE0AFD2C889}"/>
               </a:ext>
             </a:extLst>
           </p:cNvPr>
@@ -29664,7 +28060,7 @@
           <p:cNvPr id="535" name="Takeaway">
             <a:extLst xmlns:a="http://schemas.openxmlformats.org/drawingml/2006/main">
               <a:ext uri="{FF2B5EF4-FFF2-40B4-BE49-F238E27FC236}">
-                <a16:creationId xmlns:a16="http://schemas.microsoft.com/office/drawing/2014/main" id="{80E7B2F5-B15B-4346-B9E1-82DA41827297}"/>
+                <a16:creationId xmlns:a16="http://schemas.microsoft.com/office/drawing/2014/main" id="{525F78FC-4EDC-46D3-AC08-FC1461A3F460}"/>
               </a:ext>
             </a:extLst>
           </p:cNvPr>
@@ -29837,7 +28233,7 @@
 </p:sld>
 </file>
 
-<file path=ppt/slides/slide23.xml><?xml version="1.0" encoding="utf-8"?>
+<file path=ppt/slides/slide22.xml><?xml version="1.0" encoding="utf-8"?>
 <p:sld xmlns:p="http://schemas.openxmlformats.org/presentationml/2006/main">
   <p:cSld>
     <p:spTree>
@@ -30170,7 +28566,7 @@
                 <a:ea typeface="Arial"/>
                 <a:cs typeface="Arial"/>
               </a:rPr>
-              <a:t>23</a:t>
+              <a:t>22</a:t>
             </a:r>
           </a:p>
         </p:txBody>
@@ -31097,7 +29493,7 @@
           <p:cNvPr id="534" name="Takeaway">
             <a:extLst xmlns:a="http://schemas.openxmlformats.org/drawingml/2006/main">
               <a:ext uri="{FF2B5EF4-FFF2-40B4-BE49-F238E27FC236}">
-                <a16:creationId xmlns:a16="http://schemas.microsoft.com/office/drawing/2014/main" id="{ED900BF0-8FCE-4DC5-929A-57620050F0A2}"/>
+                <a16:creationId xmlns:a16="http://schemas.microsoft.com/office/drawing/2014/main" id="{CFACD00C-15FA-4ADC-B5AA-67413F22CBFF}"/>
               </a:ext>
             </a:extLst>
           </p:cNvPr>
@@ -32498,7 +30894,7 @@
           <p:cNvPr id="534" name="Takeaway">
             <a:extLst xmlns:a="http://schemas.openxmlformats.org/drawingml/2006/main">
               <a:ext uri="{FF2B5EF4-FFF2-40B4-BE49-F238E27FC236}">
-                <a16:creationId xmlns:a16="http://schemas.microsoft.com/office/drawing/2014/main" id="{93E96C14-84FF-4F4D-B462-2FB25CA11BBD}"/>
+                <a16:creationId xmlns:a16="http://schemas.microsoft.com/office/drawing/2014/main" id="{8E7FD6EA-DD8C-469E-A422-AC9457977B48}"/>
               </a:ext>
             </a:extLst>
           </p:cNvPr>
@@ -33914,7 +32310,7 @@
           <p:cNvPr id="534" name="Takeaway">
             <a:extLst xmlns:a="http://schemas.openxmlformats.org/drawingml/2006/main">
               <a:ext uri="{FF2B5EF4-FFF2-40B4-BE49-F238E27FC236}">
-                <a16:creationId xmlns:a16="http://schemas.microsoft.com/office/drawing/2014/main" id="{C6759121-7196-456C-9EED-108C886AEE21}"/>
+                <a16:creationId xmlns:a16="http://schemas.microsoft.com/office/drawing/2014/main" id="{37E8A624-1B8E-4E81-A102-E31049CA9299}"/>
               </a:ext>
             </a:extLst>
           </p:cNvPr>
@@ -35363,7 +33759,7 @@
           <p:cNvPr id="534" name="Takeaway">
             <a:extLst xmlns:a="http://schemas.openxmlformats.org/drawingml/2006/main">
               <a:ext uri="{FF2B5EF4-FFF2-40B4-BE49-F238E27FC236}">
-                <a16:creationId xmlns:a16="http://schemas.microsoft.com/office/drawing/2014/main" id="{7A41ED02-16A2-4943-A9A0-D2FC2D8A4863}"/>
+                <a16:creationId xmlns:a16="http://schemas.microsoft.com/office/drawing/2014/main" id="{E948C928-12C4-4381-A325-E7F56B1B2A08}"/>
               </a:ext>
             </a:extLst>
           </p:cNvPr>
@@ -36746,7 +35142,7 @@
           <p:cNvPr id="534" name="Takeaway">
             <a:extLst xmlns:a="http://schemas.openxmlformats.org/drawingml/2006/main">
               <a:ext uri="{FF2B5EF4-FFF2-40B4-BE49-F238E27FC236}">
-                <a16:creationId xmlns:a16="http://schemas.microsoft.com/office/drawing/2014/main" id="{70053DA7-F09D-4570-847F-32397D0C0051}"/>
+                <a16:creationId xmlns:a16="http://schemas.microsoft.com/office/drawing/2014/main" id="{9DC7F8A1-CD71-43C2-AAC8-6D5E7417A9CE}"/>
               </a:ext>
             </a:extLst>
           </p:cNvPr>
@@ -38162,7 +36558,7 @@
           <p:cNvPr id="534" name="Takeaway">
             <a:extLst xmlns:a="http://schemas.openxmlformats.org/drawingml/2006/main">
               <a:ext uri="{FF2B5EF4-FFF2-40B4-BE49-F238E27FC236}">
-                <a16:creationId xmlns:a16="http://schemas.microsoft.com/office/drawing/2014/main" id="{B351121F-963A-41AF-9926-D6A656F8F5CE}"/>
+                <a16:creationId xmlns:a16="http://schemas.microsoft.com/office/drawing/2014/main" id="{32666288-B351-4C6A-BB14-A72BD39F5A15}"/>
               </a:ext>
             </a:extLst>
           </p:cNvPr>
@@ -39579,7 +37975,7 @@
           <p:cNvPr id="534" name="Takeaway">
             <a:extLst xmlns:a="http://schemas.openxmlformats.org/drawingml/2006/main">
               <a:ext uri="{FF2B5EF4-FFF2-40B4-BE49-F238E27FC236}">
-                <a16:creationId xmlns:a16="http://schemas.microsoft.com/office/drawing/2014/main" id="{5ED3F4BE-38B6-4980-9309-D1E6087DBA1E}"/>
+                <a16:creationId xmlns:a16="http://schemas.microsoft.com/office/drawing/2014/main" id="{2D81D9CD-6125-4C20-8EBE-680FD8464A5B}"/>
               </a:ext>
             </a:extLst>
           </p:cNvPr>
@@ -41078,7 +39474,7 @@
           <p:cNvPr id="534" name="Takeaway">
             <a:extLst xmlns:a="http://schemas.openxmlformats.org/drawingml/2006/main">
               <a:ext uri="{FF2B5EF4-FFF2-40B4-BE49-F238E27FC236}">
-                <a16:creationId xmlns:a16="http://schemas.microsoft.com/office/drawing/2014/main" id="{C4F297A4-0022-447E-B6ED-41A7D723F31A}"/>
+                <a16:creationId xmlns:a16="http://schemas.microsoft.com/office/drawing/2014/main" id="{ECC071D2-F7D0-45B7-98CD-046A82AB859D}"/>
               </a:ext>
             </a:extLst>
           </p:cNvPr>

--- a/public/presentations/CS211_Recitation_7.pptx
+++ b/public/presentations/CS211_Recitation_7.pptx
@@ -2,44 +2,44 @@
 <file path=ppt/presentation.xml><?xml version="1.0" encoding="utf-8"?>
 <p:presentation xmlns:p="http://schemas.openxmlformats.org/presentationml/2006/main" embedTrueTypeFonts="1" saveSubsetFonts="0">
   <p:sldMasterIdLst>
-    <p:sldMasterId xmlns:r="http://schemas.openxmlformats.org/officeDocument/2006/relationships" id="2147483648" r:id="Rce25d4b090c14cc1"/>
+    <p:sldMasterId xmlns:r="http://schemas.openxmlformats.org/officeDocument/2006/relationships" id="2147483648" r:id="R37655bd99d084677"/>
   </p:sldMasterIdLst>
   <p:notesMasterIdLst>
-    <p:notesMasterId xmlns:r="http://schemas.openxmlformats.org/officeDocument/2006/relationships" r:id="R3d8ab4d9cfa54910"/>
+    <p:notesMasterId xmlns:r="http://schemas.openxmlformats.org/officeDocument/2006/relationships" r:id="R03256266da544236"/>
   </p:notesMasterIdLst>
   <p:sldIdLst>
-    <p:sldId xmlns:r="http://schemas.openxmlformats.org/officeDocument/2006/relationships" id="256" r:id="R8dab3aaf10494ca6"/>
-    <p:sldId xmlns:r="http://schemas.openxmlformats.org/officeDocument/2006/relationships" id="257" r:id="R7d5ccc01832541e8"/>
-    <p:sldId xmlns:r="http://schemas.openxmlformats.org/officeDocument/2006/relationships" id="258" r:id="Rdf206e1b5c68413b"/>
-    <p:sldId xmlns:r="http://schemas.openxmlformats.org/officeDocument/2006/relationships" id="259" r:id="Rc6a9ea1ad4234004"/>
-    <p:sldId xmlns:r="http://schemas.openxmlformats.org/officeDocument/2006/relationships" id="260" r:id="R213f2f324d604ecf"/>
-    <p:sldId xmlns:r="http://schemas.openxmlformats.org/officeDocument/2006/relationships" id="261" r:id="R994f085237324869"/>
-    <p:sldId xmlns:r="http://schemas.openxmlformats.org/officeDocument/2006/relationships" id="262" r:id="Rb547301698ae4e18"/>
-    <p:sldId xmlns:r="http://schemas.openxmlformats.org/officeDocument/2006/relationships" id="263" r:id="Rf4491fe6e9824604"/>
-    <p:sldId xmlns:r="http://schemas.openxmlformats.org/officeDocument/2006/relationships" id="264" r:id="R4aaa9c64e6b64cf5"/>
-    <p:sldId xmlns:r="http://schemas.openxmlformats.org/officeDocument/2006/relationships" id="265" r:id="R237a5bce76e04972"/>
-    <p:sldId xmlns:r="http://schemas.openxmlformats.org/officeDocument/2006/relationships" id="266" r:id="R23e43d821d4c46c4"/>
-    <p:sldId xmlns:r="http://schemas.openxmlformats.org/officeDocument/2006/relationships" id="267" r:id="R22cfc8b47f234451"/>
-    <p:sldId xmlns:r="http://schemas.openxmlformats.org/officeDocument/2006/relationships" id="268" r:id="Rad941524ed7249c8"/>
-    <p:sldId xmlns:r="http://schemas.openxmlformats.org/officeDocument/2006/relationships" id="269" r:id="Rfa68cad13ed94f25"/>
-    <p:sldId xmlns:r="http://schemas.openxmlformats.org/officeDocument/2006/relationships" id="270" r:id="R83f8a8dcc0b940c2"/>
-    <p:sldId xmlns:r="http://schemas.openxmlformats.org/officeDocument/2006/relationships" id="271" r:id="Ra1f85339196c45e5"/>
-    <p:sldId xmlns:r="http://schemas.openxmlformats.org/officeDocument/2006/relationships" id="272" r:id="R80d8b52298e4429a"/>
-    <p:sldId xmlns:r="http://schemas.openxmlformats.org/officeDocument/2006/relationships" id="273" r:id="R648563cf5ac0469a"/>
-    <p:sldId xmlns:r="http://schemas.openxmlformats.org/officeDocument/2006/relationships" id="274" r:id="R1484e7ecbec949d8"/>
-    <p:sldId xmlns:r="http://schemas.openxmlformats.org/officeDocument/2006/relationships" id="275" r:id="Rb79833eaa2df4063"/>
-    <p:sldId xmlns:r="http://schemas.openxmlformats.org/officeDocument/2006/relationships" id="276" r:id="R1e45ea9a4fc241b8"/>
-    <p:sldId xmlns:r="http://schemas.openxmlformats.org/officeDocument/2006/relationships" id="277" r:id="R023748979ad74fa2"/>
+    <p:sldId xmlns:r="http://schemas.openxmlformats.org/officeDocument/2006/relationships" id="256" r:id="R7212e87c1bbc4287"/>
+    <p:sldId xmlns:r="http://schemas.openxmlformats.org/officeDocument/2006/relationships" id="257" r:id="R5f96e33df8574c9b"/>
+    <p:sldId xmlns:r="http://schemas.openxmlformats.org/officeDocument/2006/relationships" id="258" r:id="Reaf81f6b5d0b418b"/>
+    <p:sldId xmlns:r="http://schemas.openxmlformats.org/officeDocument/2006/relationships" id="259" r:id="R99aea0ace4594e50"/>
+    <p:sldId xmlns:r="http://schemas.openxmlformats.org/officeDocument/2006/relationships" id="260" r:id="R823f9d95f7f24cdf"/>
+    <p:sldId xmlns:r="http://schemas.openxmlformats.org/officeDocument/2006/relationships" id="261" r:id="R5d021e351ced42ee"/>
+    <p:sldId xmlns:r="http://schemas.openxmlformats.org/officeDocument/2006/relationships" id="262" r:id="R9d951a48f43e4eed"/>
+    <p:sldId xmlns:r="http://schemas.openxmlformats.org/officeDocument/2006/relationships" id="263" r:id="R6a413aff89d24e01"/>
+    <p:sldId xmlns:r="http://schemas.openxmlformats.org/officeDocument/2006/relationships" id="264" r:id="Ra1bc88cda042482c"/>
+    <p:sldId xmlns:r="http://schemas.openxmlformats.org/officeDocument/2006/relationships" id="265" r:id="R554767c3b17e4657"/>
+    <p:sldId xmlns:r="http://schemas.openxmlformats.org/officeDocument/2006/relationships" id="266" r:id="Rec59cac6e3144107"/>
+    <p:sldId xmlns:r="http://schemas.openxmlformats.org/officeDocument/2006/relationships" id="267" r:id="R237fe6a4e09d4e27"/>
+    <p:sldId xmlns:r="http://schemas.openxmlformats.org/officeDocument/2006/relationships" id="268" r:id="Rfd9521142524454c"/>
+    <p:sldId xmlns:r="http://schemas.openxmlformats.org/officeDocument/2006/relationships" id="269" r:id="Rd99be987902c40ce"/>
+    <p:sldId xmlns:r="http://schemas.openxmlformats.org/officeDocument/2006/relationships" id="270" r:id="Rbfe9c67ff6654487"/>
+    <p:sldId xmlns:r="http://schemas.openxmlformats.org/officeDocument/2006/relationships" id="271" r:id="R3874cdc829834b04"/>
+    <p:sldId xmlns:r="http://schemas.openxmlformats.org/officeDocument/2006/relationships" id="272" r:id="Ra384b90997be4046"/>
+    <p:sldId xmlns:r="http://schemas.openxmlformats.org/officeDocument/2006/relationships" id="273" r:id="R659747c324844c8f"/>
+    <p:sldId xmlns:r="http://schemas.openxmlformats.org/officeDocument/2006/relationships" id="274" r:id="R0113c65df5d440d8"/>
+    <p:sldId xmlns:r="http://schemas.openxmlformats.org/officeDocument/2006/relationships" id="275" r:id="Rb2caf02f508649d8"/>
+    <p:sldId xmlns:r="http://schemas.openxmlformats.org/officeDocument/2006/relationships" id="276" r:id="R03a13533ca024245"/>
+    <p:sldId xmlns:r="http://schemas.openxmlformats.org/officeDocument/2006/relationships" id="277" r:id="R964e11826ad64581"/>
   </p:sldIdLst>
   <p:sldSz cx="12192000" cy="6858000"/>
   <p:notesSz cx="6858000" cy="9144000"/>
   <p:embeddedFontLst>
     <p:embeddedFont>
       <p:font typeface="OpenAI Sans"/>
-      <p:regular xmlns:r="http://schemas.openxmlformats.org/officeDocument/2006/relationships" r:id="R28d6267d361b48d6"/>
-      <p:bold xmlns:r="http://schemas.openxmlformats.org/officeDocument/2006/relationships" r:id="Ra8af04b54b4345d6"/>
-      <p:italic xmlns:r="http://schemas.openxmlformats.org/officeDocument/2006/relationships" r:id="R4960771da5a049cf"/>
-      <p:boldItalic xmlns:r="http://schemas.openxmlformats.org/officeDocument/2006/relationships" r:id="Rb2e071fd818540bd"/>
+      <p:regular xmlns:r="http://schemas.openxmlformats.org/officeDocument/2006/relationships" r:id="Rf605d04f8e524b61"/>
+      <p:bold xmlns:r="http://schemas.openxmlformats.org/officeDocument/2006/relationships" r:id="R90952de796a5427c"/>
+      <p:italic xmlns:r="http://schemas.openxmlformats.org/officeDocument/2006/relationships" r:id="R49f3792868fd464e"/>
+      <p:boldItalic xmlns:r="http://schemas.openxmlformats.org/officeDocument/2006/relationships" r:id="Redc28b11f6a54118"/>
     </p:embeddedFont>
   </p:embeddedFontLst>
   <p:defaultTextStyle>
@@ -3005,36 +3005,6 @@
             </a:r>
             <a:endParaRPr/>
           </a:p>
-          <a:p xmlns:a="http://schemas.openxmlformats.org/drawingml/2006/main">
-            <a:pPr marL="0" lvl="0" indent="0" algn="l">
-              <a:spcBef>
-                <a:spcPts val="0"/>
-              </a:spcBef>
-              <a:spcAft>
-                <a:spcPts val="0"/>
-              </a:spcAft>
-              <a:buNone/>
-            </a:pPr>
-            <a:r>
-              <a:t/>
-            </a:r>
-            <a:endParaRPr/>
-          </a:p>
-          <a:p xmlns:a="http://schemas.openxmlformats.org/drawingml/2006/main">
-            <a:pPr marL="0" lvl="0" indent="0" algn="l">
-              <a:spcBef>
-                <a:spcPts val="0"/>
-              </a:spcBef>
-              <a:spcAft>
-                <a:spcPts val="0"/>
-              </a:spcAft>
-              <a:buNone/>
-            </a:pPr>
-            <a:r>
-              <a:t>3. Lookahead trades extra circuitry for less serial carry waiting; it does not make propagation delay disappear.</a:t>
-            </a:r>
-            <a:endParaRPr/>
-          </a:p>
         </p:txBody>
       </p:sp>
       <p:sp>
@@ -5985,14 +5955,14 @@
   </p:cSld>
   <p:clrMap bg1="dk1" tx1="lt1" bg2="dk2" tx2="lt2" accent1="accent1" accent2="accent2" accent3="accent3" accent4="accent4" accent5="accent5" accent6="accent6" hlink="hlink" folHlink="folHlink"/>
   <p:sldLayoutIdLst>
-    <p:sldLayoutId xmlns:r="http://schemas.openxmlformats.org/officeDocument/2006/relationships" id="2147483649" r:id="R29f3c32ccf024bba"/>
-    <p:sldLayoutId xmlns:r="http://schemas.openxmlformats.org/officeDocument/2006/relationships" id="2147483650" r:id="Rfe82a67123524ec7"/>
-    <p:sldLayoutId xmlns:r="http://schemas.openxmlformats.org/officeDocument/2006/relationships" id="2147483651" r:id="R764a44180c664fa7"/>
-    <p:sldLayoutId xmlns:r="http://schemas.openxmlformats.org/officeDocument/2006/relationships" id="2147483652" r:id="R5bbc885e11784e98"/>
-    <p:sldLayoutId xmlns:r="http://schemas.openxmlformats.org/officeDocument/2006/relationships" id="2147483653" r:id="R58f791987a7247e7"/>
-    <p:sldLayoutId xmlns:r="http://schemas.openxmlformats.org/officeDocument/2006/relationships" id="2147483654" r:id="R481cb4a3e68b4ea9"/>
-    <p:sldLayoutId xmlns:r="http://schemas.openxmlformats.org/officeDocument/2006/relationships" id="2147483655" r:id="Rd983b1f2b0cf4bce"/>
-    <p:sldLayoutId xmlns:r="http://schemas.openxmlformats.org/officeDocument/2006/relationships" id="2147483656" r:id="Rdd0664d47146485b"/>
+    <p:sldLayoutId xmlns:r="http://schemas.openxmlformats.org/officeDocument/2006/relationships" id="2147483649" r:id="R68d8640fc0bf4718"/>
+    <p:sldLayoutId xmlns:r="http://schemas.openxmlformats.org/officeDocument/2006/relationships" id="2147483650" r:id="R9ff3bff97c074c3b"/>
+    <p:sldLayoutId xmlns:r="http://schemas.openxmlformats.org/officeDocument/2006/relationships" id="2147483651" r:id="Rd0a9a8efed914327"/>
+    <p:sldLayoutId xmlns:r="http://schemas.openxmlformats.org/officeDocument/2006/relationships" id="2147483652" r:id="Rbe51dc8d30b046c0"/>
+    <p:sldLayoutId xmlns:r="http://schemas.openxmlformats.org/officeDocument/2006/relationships" id="2147483653" r:id="R23401447fdcb4f5f"/>
+    <p:sldLayoutId xmlns:r="http://schemas.openxmlformats.org/officeDocument/2006/relationships" id="2147483654" r:id="Rb4c27b008e094e24"/>
+    <p:sldLayoutId xmlns:r="http://schemas.openxmlformats.org/officeDocument/2006/relationships" id="2147483655" r:id="R32597ce987994ce8"/>
+    <p:sldLayoutId xmlns:r="http://schemas.openxmlformats.org/officeDocument/2006/relationships" id="2147483656" r:id="Rcc6f29ee4d004615"/>
   </p:sldLayoutIdLst>
   <p:hf hdr="0" dt="0"/>
   <p:txStyles>
@@ -8863,7 +8833,7 @@
           <p:cNvPr id="534" name="">
             <a:extLst xmlns:a="http://schemas.openxmlformats.org/drawingml/2006/main">
               <a:ext uri="{FF2B5EF4-FFF2-40B4-BE49-F238E27FC236}">
-                <a16:creationId xmlns:a16="http://schemas.microsoft.com/office/drawing/2014/main" id="{6126DCBC-E03C-4869-9646-67257DF6F56D}"/>
+                <a16:creationId xmlns:a16="http://schemas.microsoft.com/office/drawing/2014/main" id="{948FAC2A-C0F0-47A1-8480-66AE235B74A3}"/>
               </a:ext>
             </a:extLst>
           </p:cNvPr>
@@ -9606,7 +9576,7 @@
           <p:cNvPr id="535" name="Takeaway">
             <a:extLst xmlns:a="http://schemas.openxmlformats.org/drawingml/2006/main">
               <a:ext uri="{FF2B5EF4-FFF2-40B4-BE49-F238E27FC236}">
-                <a16:creationId xmlns:a16="http://schemas.microsoft.com/office/drawing/2014/main" id="{D1443A28-0C27-40CF-8121-EF986138E0D3}"/>
+                <a16:creationId xmlns:a16="http://schemas.microsoft.com/office/drawing/2014/main" id="{92E188C0-B2B3-4A7D-8EAD-F22D15C1025C}"/>
               </a:ext>
             </a:extLst>
           </p:cNvPr>
@@ -10990,7 +10960,7 @@
           <p:cNvPr id="534" name="Takeaway">
             <a:extLst xmlns:a="http://schemas.openxmlformats.org/drawingml/2006/main">
               <a:ext uri="{FF2B5EF4-FFF2-40B4-BE49-F238E27FC236}">
-                <a16:creationId xmlns:a16="http://schemas.microsoft.com/office/drawing/2014/main" id="{DC661101-C783-4BC7-AA3B-EE8733ED038C}"/>
+                <a16:creationId xmlns:a16="http://schemas.microsoft.com/office/drawing/2014/main" id="{F4BE7A76-DF7A-4FC5-8E87-0CACAEEF22A7}"/>
               </a:ext>
             </a:extLst>
           </p:cNvPr>
@@ -12423,7 +12393,7 @@
           <p:cNvPr id="534" name="Takeaway">
             <a:extLst xmlns:a="http://schemas.openxmlformats.org/drawingml/2006/main">
               <a:ext uri="{FF2B5EF4-FFF2-40B4-BE49-F238E27FC236}">
-                <a16:creationId xmlns:a16="http://schemas.microsoft.com/office/drawing/2014/main" id="{C807CC87-FE4E-45BF-907B-82A3C480A950}"/>
+                <a16:creationId xmlns:a16="http://schemas.microsoft.com/office/drawing/2014/main" id="{6A70441A-0A53-45B6-B30D-E349E0B76B64}"/>
               </a:ext>
             </a:extLst>
           </p:cNvPr>
@@ -13905,7 +13875,7 @@
           <p:cNvPr id="534" name="Takeaway">
             <a:extLst xmlns:a="http://schemas.openxmlformats.org/drawingml/2006/main">
               <a:ext uri="{FF2B5EF4-FFF2-40B4-BE49-F238E27FC236}">
-                <a16:creationId xmlns:a16="http://schemas.microsoft.com/office/drawing/2014/main" id="{7F882D58-6104-4A81-A780-76E8F7C406FE}"/>
+                <a16:creationId xmlns:a16="http://schemas.microsoft.com/office/drawing/2014/main" id="{2B084C75-3685-4DD1-BCE9-9CE1C6284BB2}"/>
               </a:ext>
             </a:extLst>
           </p:cNvPr>
@@ -15288,7 +15258,7 @@
           <p:cNvPr id="534" name="">
             <a:extLst xmlns:a="http://schemas.openxmlformats.org/drawingml/2006/main">
               <a:ext uri="{FF2B5EF4-FFF2-40B4-BE49-F238E27FC236}">
-                <a16:creationId xmlns:a16="http://schemas.microsoft.com/office/drawing/2014/main" id="{C3FDB7B7-EF09-4638-BC1D-A97AFF6EBD36}"/>
+                <a16:creationId xmlns:a16="http://schemas.microsoft.com/office/drawing/2014/main" id="{889B9E10-52BC-43FB-A9C2-A0B8BE542754}"/>
               </a:ext>
             </a:extLst>
           </p:cNvPr>
@@ -15648,7 +15618,7 @@
           <p:cNvPr id="535" name="Takeaway">
             <a:extLst xmlns:a="http://schemas.openxmlformats.org/drawingml/2006/main">
               <a:ext uri="{FF2B5EF4-FFF2-40B4-BE49-F238E27FC236}">
-                <a16:creationId xmlns:a16="http://schemas.microsoft.com/office/drawing/2014/main" id="{26446728-EABA-4E14-8CD8-CED6FC6ABE33}"/>
+                <a16:creationId xmlns:a16="http://schemas.microsoft.com/office/drawing/2014/main" id="{8FB76A11-5511-4B94-88C4-2B2B763A98AA}"/>
               </a:ext>
             </a:extLst>
           </p:cNvPr>
@@ -17098,7 +17068,7 @@
           <p:cNvPr id="534" name="Takeaway">
             <a:extLst xmlns:a="http://schemas.openxmlformats.org/drawingml/2006/main">
               <a:ext uri="{FF2B5EF4-FFF2-40B4-BE49-F238E27FC236}">
-                <a16:creationId xmlns:a16="http://schemas.microsoft.com/office/drawing/2014/main" id="{8F629B4C-85BF-4BCD-808E-A4824DFE98BF}"/>
+                <a16:creationId xmlns:a16="http://schemas.microsoft.com/office/drawing/2014/main" id="{3C48011C-488F-4C78-B598-E00FE8E6B473}"/>
               </a:ext>
             </a:extLst>
           </p:cNvPr>
@@ -18498,7 +18468,7 @@
           <p:cNvPr id="534" name="Takeaway">
             <a:extLst xmlns:a="http://schemas.openxmlformats.org/drawingml/2006/main">
               <a:ext uri="{FF2B5EF4-FFF2-40B4-BE49-F238E27FC236}">
-                <a16:creationId xmlns:a16="http://schemas.microsoft.com/office/drawing/2014/main" id="{B80853D7-6010-461D-BCF0-B69BAF7757FE}"/>
+                <a16:creationId xmlns:a16="http://schemas.microsoft.com/office/drawing/2014/main" id="{F8CCE1B6-FFA1-4B4C-AF7C-5CFFE28777B1}"/>
               </a:ext>
             </a:extLst>
           </p:cNvPr>
@@ -19948,7 +19918,7 @@
           <p:cNvPr id="534" name="Takeaway">
             <a:extLst xmlns:a="http://schemas.openxmlformats.org/drawingml/2006/main">
               <a:ext uri="{FF2B5EF4-FFF2-40B4-BE49-F238E27FC236}">
-                <a16:creationId xmlns:a16="http://schemas.microsoft.com/office/drawing/2014/main" id="{3AB64039-1C82-40A6-BCBA-0FF28061D2D8}"/>
+                <a16:creationId xmlns:a16="http://schemas.microsoft.com/office/drawing/2014/main" id="{94DCFC8A-EA52-4D5B-9106-BD7066C58056}"/>
               </a:ext>
             </a:extLst>
           </p:cNvPr>
@@ -21414,7 +21384,7 @@
           <p:cNvPr id="534" name="Takeaway">
             <a:extLst xmlns:a="http://schemas.openxmlformats.org/drawingml/2006/main">
               <a:ext uri="{FF2B5EF4-FFF2-40B4-BE49-F238E27FC236}">
-                <a16:creationId xmlns:a16="http://schemas.microsoft.com/office/drawing/2014/main" id="{391D6956-D8A2-4783-945F-6EEC3B572E63}"/>
+                <a16:creationId xmlns:a16="http://schemas.microsoft.com/office/drawing/2014/main" id="{E82237D0-8A9F-4B55-8A50-B1C56CF23423}"/>
               </a:ext>
             </a:extLst>
           </p:cNvPr>
@@ -22797,7 +22767,7 @@
           <p:cNvPr id="534" name="Takeaway">
             <a:extLst xmlns:a="http://schemas.openxmlformats.org/drawingml/2006/main">
               <a:ext uri="{FF2B5EF4-FFF2-40B4-BE49-F238E27FC236}">
-                <a16:creationId xmlns:a16="http://schemas.microsoft.com/office/drawing/2014/main" id="{088693FA-538C-4604-8AAE-CE245EFAFE41}"/>
+                <a16:creationId xmlns:a16="http://schemas.microsoft.com/office/drawing/2014/main" id="{28F56B6A-9F26-4E16-B4E9-072E52D5330B}"/>
               </a:ext>
             </a:extLst>
           </p:cNvPr>
@@ -24081,7 +24051,7 @@
           <p:cNvPr id="534" name="">
             <a:extLst xmlns:a="http://schemas.openxmlformats.org/drawingml/2006/main">
               <a:ext uri="{FF2B5EF4-FFF2-40B4-BE49-F238E27FC236}">
-                <a16:creationId xmlns:a16="http://schemas.microsoft.com/office/drawing/2014/main" id="{03179E62-FFE6-4C91-9F4F-8D38672E70F9}"/>
+                <a16:creationId xmlns:a16="http://schemas.microsoft.com/office/drawing/2014/main" id="{1CA9AB26-D5BA-4B49-AF36-8E0AAF4A9B48}"/>
               </a:ext>
             </a:extLst>
           </p:cNvPr>
@@ -24441,7 +24411,7 @@
           <p:cNvPr id="535" name="Takeaway">
             <a:extLst xmlns:a="http://schemas.openxmlformats.org/drawingml/2006/main">
               <a:ext uri="{FF2B5EF4-FFF2-40B4-BE49-F238E27FC236}">
-                <a16:creationId xmlns:a16="http://schemas.microsoft.com/office/drawing/2014/main" id="{3100A582-35DA-4603-B89F-1EC47260928D}"/>
+                <a16:creationId xmlns:a16="http://schemas.microsoft.com/office/drawing/2014/main" id="{256F5027-5C27-4E3B-8B5D-57EF5F14372E}"/>
               </a:ext>
             </a:extLst>
           </p:cNvPr>
@@ -25808,7 +25778,7 @@
           <p:cNvPr id="534" name="Takeaway">
             <a:extLst xmlns:a="http://schemas.openxmlformats.org/drawingml/2006/main">
               <a:ext uri="{FF2B5EF4-FFF2-40B4-BE49-F238E27FC236}">
-                <a16:creationId xmlns:a16="http://schemas.microsoft.com/office/drawing/2014/main" id="{A2E452FF-9994-4D14-A931-464BE5FC2262}"/>
+                <a16:creationId xmlns:a16="http://schemas.microsoft.com/office/drawing/2014/main" id="{FB8F47FD-3722-4CFC-890F-DD5D9E9A795B}"/>
               </a:ext>
             </a:extLst>
           </p:cNvPr>
@@ -27059,7 +27029,7 @@
           <p:cNvPr id="534" name="">
             <a:extLst xmlns:a="http://schemas.openxmlformats.org/drawingml/2006/main">
               <a:ext uri="{FF2B5EF4-FFF2-40B4-BE49-F238E27FC236}">
-                <a16:creationId xmlns:a16="http://schemas.microsoft.com/office/drawing/2014/main" id="{A012E9F3-5308-4C3A-9C19-7DE0AFD2C889}"/>
+                <a16:creationId xmlns:a16="http://schemas.microsoft.com/office/drawing/2014/main" id="{F673537E-2D02-4FDE-856A-3EBD9A61E031}"/>
               </a:ext>
             </a:extLst>
           </p:cNvPr>
@@ -28060,7 +28030,7 @@
           <p:cNvPr id="535" name="Takeaway">
             <a:extLst xmlns:a="http://schemas.openxmlformats.org/drawingml/2006/main">
               <a:ext uri="{FF2B5EF4-FFF2-40B4-BE49-F238E27FC236}">
-                <a16:creationId xmlns:a16="http://schemas.microsoft.com/office/drawing/2014/main" id="{525F78FC-4EDC-46D3-AC08-FC1461A3F460}"/>
+                <a16:creationId xmlns:a16="http://schemas.microsoft.com/office/drawing/2014/main" id="{4870899A-06FF-41E9-8B93-D98157C3747D}"/>
               </a:ext>
             </a:extLst>
           </p:cNvPr>
@@ -29493,7 +29463,7 @@
           <p:cNvPr id="534" name="Takeaway">
             <a:extLst xmlns:a="http://schemas.openxmlformats.org/drawingml/2006/main">
               <a:ext uri="{FF2B5EF4-FFF2-40B4-BE49-F238E27FC236}">
-                <a16:creationId xmlns:a16="http://schemas.microsoft.com/office/drawing/2014/main" id="{CFACD00C-15FA-4ADC-B5AA-67413F22CBFF}"/>
+                <a16:creationId xmlns:a16="http://schemas.microsoft.com/office/drawing/2014/main" id="{9E6E6410-3460-4CD9-8449-3E1ED9D20E57}"/>
               </a:ext>
             </a:extLst>
           </p:cNvPr>
@@ -30894,7 +30864,7 @@
           <p:cNvPr id="534" name="Takeaway">
             <a:extLst xmlns:a="http://schemas.openxmlformats.org/drawingml/2006/main">
               <a:ext uri="{FF2B5EF4-FFF2-40B4-BE49-F238E27FC236}">
-                <a16:creationId xmlns:a16="http://schemas.microsoft.com/office/drawing/2014/main" id="{8E7FD6EA-DD8C-469E-A422-AC9457977B48}"/>
+                <a16:creationId xmlns:a16="http://schemas.microsoft.com/office/drawing/2014/main" id="{277CFD7A-F486-4A4D-B0C8-A2A4B3BDB011}"/>
               </a:ext>
             </a:extLst>
           </p:cNvPr>
@@ -32310,7 +32280,7 @@
           <p:cNvPr id="534" name="Takeaway">
             <a:extLst xmlns:a="http://schemas.openxmlformats.org/drawingml/2006/main">
               <a:ext uri="{FF2B5EF4-FFF2-40B4-BE49-F238E27FC236}">
-                <a16:creationId xmlns:a16="http://schemas.microsoft.com/office/drawing/2014/main" id="{37E8A624-1B8E-4E81-A102-E31049CA9299}"/>
+                <a16:creationId xmlns:a16="http://schemas.microsoft.com/office/drawing/2014/main" id="{B856ED25-80AE-49DF-905B-F2F15E4626F0}"/>
               </a:ext>
             </a:extLst>
           </p:cNvPr>
@@ -33759,7 +33729,7 @@
           <p:cNvPr id="534" name="Takeaway">
             <a:extLst xmlns:a="http://schemas.openxmlformats.org/drawingml/2006/main">
               <a:ext uri="{FF2B5EF4-FFF2-40B4-BE49-F238E27FC236}">
-                <a16:creationId xmlns:a16="http://schemas.microsoft.com/office/drawing/2014/main" id="{E948C928-12C4-4381-A325-E7F56B1B2A08}"/>
+                <a16:creationId xmlns:a16="http://schemas.microsoft.com/office/drawing/2014/main" id="{3CF02E1F-EC25-46E4-910F-55FDB9995F10}"/>
               </a:ext>
             </a:extLst>
           </p:cNvPr>
@@ -35142,7 +35112,7 @@
           <p:cNvPr id="534" name="Takeaway">
             <a:extLst xmlns:a="http://schemas.openxmlformats.org/drawingml/2006/main">
               <a:ext uri="{FF2B5EF4-FFF2-40B4-BE49-F238E27FC236}">
-                <a16:creationId xmlns:a16="http://schemas.microsoft.com/office/drawing/2014/main" id="{9DC7F8A1-CD71-43C2-AAC8-6D5E7417A9CE}"/>
+                <a16:creationId xmlns:a16="http://schemas.microsoft.com/office/drawing/2014/main" id="{A3DEBD3D-2D8C-4A21-BFAE-4EEFF15F2BB1}"/>
               </a:ext>
             </a:extLst>
           </p:cNvPr>
@@ -36558,7 +36528,7 @@
           <p:cNvPr id="534" name="Takeaway">
             <a:extLst xmlns:a="http://schemas.openxmlformats.org/drawingml/2006/main">
               <a:ext uri="{FF2B5EF4-FFF2-40B4-BE49-F238E27FC236}">
-                <a16:creationId xmlns:a16="http://schemas.microsoft.com/office/drawing/2014/main" id="{32666288-B351-4C6A-BB14-A72BD39F5A15}"/>
+                <a16:creationId xmlns:a16="http://schemas.microsoft.com/office/drawing/2014/main" id="{8C7E06A6-FF64-4D12-BA7C-FE2003EDE72D}"/>
               </a:ext>
             </a:extLst>
           </p:cNvPr>
@@ -37975,7 +37945,7 @@
           <p:cNvPr id="534" name="Takeaway">
             <a:extLst xmlns:a="http://schemas.openxmlformats.org/drawingml/2006/main">
               <a:ext uri="{FF2B5EF4-FFF2-40B4-BE49-F238E27FC236}">
-                <a16:creationId xmlns:a16="http://schemas.microsoft.com/office/drawing/2014/main" id="{2D81D9CD-6125-4C20-8EBE-680FD8464A5B}"/>
+                <a16:creationId xmlns:a16="http://schemas.microsoft.com/office/drawing/2014/main" id="{2C95D011-3605-4821-BA17-84D455503E5E}"/>
               </a:ext>
             </a:extLst>
           </p:cNvPr>
@@ -39474,7 +39444,7 @@
           <p:cNvPr id="534" name="Takeaway">
             <a:extLst xmlns:a="http://schemas.openxmlformats.org/drawingml/2006/main">
               <a:ext uri="{FF2B5EF4-FFF2-40B4-BE49-F238E27FC236}">
-                <a16:creationId xmlns:a16="http://schemas.microsoft.com/office/drawing/2014/main" id="{ECC071D2-F7D0-45B7-98CD-046A82AB859D}"/>
+                <a16:creationId xmlns:a16="http://schemas.microsoft.com/office/drawing/2014/main" id="{6B2CA453-D4AC-4091-AEAF-8068EABD507F}"/>
               </a:ext>
             </a:extLst>
           </p:cNvPr>
